--- a/blocks/B_robot_build/M05_urdf_basic_model/M05_URDF로_기본_AGV_제작.pptx
+++ b/blocks/B_robot_build/M05_urdf_basic_model/M05_URDF로_기본_AGV_제작.pptx
@@ -45,6 +45,9 @@
     <p:sldId id="293" r:id="rId45"/>
     <p:sldId id="294" r:id="rId46"/>
     <p:sldId id="295" r:id="rId47"/>
+    <p:sldId id="296" r:id="rId48"/>
+    <p:sldId id="297" r:id="rId49"/>
+    <p:sldId id="298" r:id="rId50"/>
   </p:sldIdLst>
   <p:sldSz cx="12191999" cy="6858000" type="screen4x3"/>
   <p:notesSz cx="6858000" cy="9144000"/>
@@ -631,7 +634,7 @@
           <a:lstStyle/>
           <a:p>
             <a:r>
-              <a:t>[설명] ~/agv_ws/src/agv_description/urdf/agv.urdf.xacro의 전체 파일을 2/10 구간으로 작성한다.</a:t>
+              <a:t>[설명] ~/agv_ws/src/agv_description/urdf/agv.urdf.xacro의 전체 파일을 2/11 구간으로 작성한다.</a:t>
             </a:r>
           </a:p>
           <a:p>
@@ -721,7 +724,7 @@
           <a:lstStyle/>
           <a:p>
             <a:r>
-              <a:t>[설명] ~/agv_ws/src/agv_description/urdf/agv.urdf.xacro의 전체 파일을 3/10 구간으로 작성한다.</a:t>
+              <a:t>[설명] ~/agv_ws/src/agv_description/urdf/agv.urdf.xacro의 전체 파일을 3/11 구간으로 작성한다.</a:t>
             </a:r>
           </a:p>
           <a:p>
@@ -811,7 +814,7 @@
           <a:lstStyle/>
           <a:p>
             <a:r>
-              <a:t>[설명] ~/agv_ws/src/agv_description/urdf/agv.urdf.xacro의 전체 파일을 4/10 구간으로 작성한다.</a:t>
+              <a:t>[설명] ~/agv_ws/src/agv_description/urdf/agv.urdf.xacro의 전체 파일을 4/11 구간으로 작성한다.</a:t>
             </a:r>
           </a:p>
           <a:p>
@@ -901,7 +904,7 @@
           <a:lstStyle/>
           <a:p>
             <a:r>
-              <a:t>[설명] ~/agv_ws/src/agv_description/urdf/agv.urdf.xacro의 전체 파일을 5/10 구간으로 작성한다.</a:t>
+              <a:t>[설명] ~/agv_ws/src/agv_description/urdf/agv.urdf.xacro의 전체 파일을 5/11 구간으로 작성한다.</a:t>
             </a:r>
           </a:p>
           <a:p>
@@ -991,7 +994,7 @@
           <a:lstStyle/>
           <a:p>
             <a:r>
-              <a:t>[설명] ~/agv_ws/src/agv_description/urdf/agv.urdf.xacro의 전체 파일을 6/10 구간으로 작성한다.</a:t>
+              <a:t>[설명] ~/agv_ws/src/agv_description/urdf/agv.urdf.xacro의 전체 파일을 6/11 구간으로 작성한다.</a:t>
             </a:r>
           </a:p>
           <a:p>
@@ -1081,7 +1084,7 @@
           <a:lstStyle/>
           <a:p>
             <a:r>
-              <a:t>[설명] ~/agv_ws/src/agv_description/urdf/agv.urdf.xacro의 전체 파일을 7/10 구간으로 작성한다.</a:t>
+              <a:t>[설명] ~/agv_ws/src/agv_description/urdf/agv.urdf.xacro의 전체 파일을 7/11 구간으로 작성한다.</a:t>
             </a:r>
           </a:p>
           <a:p>
@@ -1171,7 +1174,7 @@
           <a:lstStyle/>
           <a:p>
             <a:r>
-              <a:t>[설명] ~/agv_ws/src/agv_description/urdf/agv.urdf.xacro의 전체 파일을 8/10 구간으로 작성한다.</a:t>
+              <a:t>[설명] ~/agv_ws/src/agv_description/urdf/agv.urdf.xacro의 전체 파일을 8/11 구간으로 작성한다.</a:t>
             </a:r>
           </a:p>
           <a:p>
@@ -1261,7 +1264,7 @@
           <a:lstStyle/>
           <a:p>
             <a:r>
-              <a:t>[설명] ~/agv_ws/src/agv_description/urdf/agv.urdf.xacro의 전체 파일을 9/10 구간으로 작성한다.</a:t>
+              <a:t>[설명] ~/agv_ws/src/agv_description/urdf/agv.urdf.xacro의 전체 파일을 9/11 구간으로 작성한다.</a:t>
             </a:r>
           </a:p>
           <a:p>
@@ -1351,7 +1354,7 @@
           <a:lstStyle/>
           <a:p>
             <a:r>
-              <a:t>[설명] ~/agv_ws/src/agv_description/urdf/agv.urdf.xacro의 전체 파일을 10/10 구간으로 작성한다.</a:t>
+              <a:t>[설명] ~/agv_ws/src/agv_description/urdf/agv.urdf.xacro의 전체 파일을 10/11 구간으로 작성한다.</a:t>
             </a:r>
           </a:p>
           <a:p>
@@ -1441,12 +1444,12 @@
           <a:lstStyle/>
           <a:p>
             <a:r>
-              <a:t>[설명] ~/agv_ws/src/agv_description/urdf/common.xacro의 전체 파일을 1/5 구간으로 작성한다.</a:t>
-            </a:r>
-          </a:p>
-          <a:p>
-            <a:r>
-              <a:t>[실행] nano ~/agv_ws/src/agv_description/urdf/common.xacro</a:t>
+              <a:t>[설명] ~/agv_ws/src/agv_description/urdf/agv.urdf.xacro의 전체 파일을 11/11 구간으로 작성한다.</a:t>
+            </a:r>
+          </a:p>
+          <a:p>
+            <a:r>
+              <a:t>[실행] nano ~/agv_ws/src/agv_description/urdf/agv.urdf.xacro</a:t>
             </a:r>
           </a:p>
           <a:p>
@@ -1621,7 +1624,7 @@
           <a:lstStyle/>
           <a:p>
             <a:r>
-              <a:t>[설명] ~/agv_ws/src/agv_description/urdf/common.xacro의 전체 파일을 2/5 구간으로 작성한다.</a:t>
+              <a:t>[설명] ~/agv_ws/src/agv_description/urdf/common.xacro의 전체 파일을 1/6 구간으로 작성한다.</a:t>
             </a:r>
           </a:p>
           <a:p>
@@ -1711,7 +1714,7 @@
           <a:lstStyle/>
           <a:p>
             <a:r>
-              <a:t>[설명] ~/agv_ws/src/agv_description/urdf/common.xacro의 전체 파일을 3/5 구간으로 작성한다.</a:t>
+              <a:t>[설명] ~/agv_ws/src/agv_description/urdf/common.xacro의 전체 파일을 2/6 구간으로 작성한다.</a:t>
             </a:r>
           </a:p>
           <a:p>
@@ -1801,7 +1804,7 @@
           <a:lstStyle/>
           <a:p>
             <a:r>
-              <a:t>[설명] ~/agv_ws/src/agv_description/urdf/common.xacro의 전체 파일을 4/5 구간으로 작성한다.</a:t>
+              <a:t>[설명] ~/agv_ws/src/agv_description/urdf/common.xacro의 전체 파일을 3/6 구간으로 작성한다.</a:t>
             </a:r>
           </a:p>
           <a:p>
@@ -1891,7 +1894,7 @@
           <a:lstStyle/>
           <a:p>
             <a:r>
-              <a:t>[설명] ~/agv_ws/src/agv_description/urdf/common.xacro의 전체 파일을 5/5 구간으로 작성한다.</a:t>
+              <a:t>[설명] ~/agv_ws/src/agv_description/urdf/common.xacro의 전체 파일을 4/6 구간으로 작성한다.</a:t>
             </a:r>
           </a:p>
           <a:p>
@@ -1981,12 +1984,12 @@
           <a:lstStyle/>
           <a:p>
             <a:r>
-              <a:t>[설명] ~/agv_ws/src/agv_description/urdf/wheels.xacro의 전체 파일을 1/4 구간으로 작성한다.</a:t>
-            </a:r>
-          </a:p>
-          <a:p>
-            <a:r>
-              <a:t>[실행] nano ~/agv_ws/src/agv_description/urdf/wheels.xacro</a:t>
+              <a:t>[설명] ~/agv_ws/src/agv_description/urdf/common.xacro의 전체 파일을 5/6 구간으로 작성한다.</a:t>
+            </a:r>
+          </a:p>
+          <a:p>
+            <a:r>
+              <a:t>[실행] nano ~/agv_ws/src/agv_description/urdf/common.xacro</a:t>
             </a:r>
           </a:p>
           <a:p>
@@ -2071,12 +2074,12 @@
           <a:lstStyle/>
           <a:p>
             <a:r>
-              <a:t>[설명] ~/agv_ws/src/agv_description/urdf/wheels.xacro의 전체 파일을 2/4 구간으로 작성한다.</a:t>
-            </a:r>
-          </a:p>
-          <a:p>
-            <a:r>
-              <a:t>[실행] nano ~/agv_ws/src/agv_description/urdf/wheels.xacro</a:t>
+              <a:t>[설명] ~/agv_ws/src/agv_description/urdf/common.xacro의 전체 파일을 6/6 구간으로 작성한다.</a:t>
+            </a:r>
+          </a:p>
+          <a:p>
+            <a:r>
+              <a:t>[실행] nano ~/agv_ws/src/agv_description/urdf/common.xacro</a:t>
             </a:r>
           </a:p>
           <a:p>
@@ -2161,7 +2164,7 @@
           <a:lstStyle/>
           <a:p>
             <a:r>
-              <a:t>[설명] ~/agv_ws/src/agv_description/urdf/wheels.xacro의 전체 파일을 3/4 구간으로 작성한다.</a:t>
+              <a:t>[설명] ~/agv_ws/src/agv_description/urdf/wheels.xacro의 전체 파일을 1/5 구간으로 작성한다.</a:t>
             </a:r>
           </a:p>
           <a:p>
@@ -2251,7 +2254,7 @@
           <a:lstStyle/>
           <a:p>
             <a:r>
-              <a:t>[설명] ~/agv_ws/src/agv_description/urdf/wheels.xacro의 전체 파일을 4/4 구간으로 작성한다.</a:t>
+              <a:t>[설명] ~/agv_ws/src/agv_description/urdf/wheels.xacro의 전체 파일을 2/5 구간으로 작성한다.</a:t>
             </a:r>
           </a:p>
           <a:p>
@@ -2341,12 +2344,12 @@
           <a:lstStyle/>
           <a:p>
             <a:r>
-              <a:t>[설명] ~/agv_ws/src/agv_description/urdf/sensors.xacro의 전체 파일을 1/4 구간으로 작성한다.</a:t>
-            </a:r>
-          </a:p>
-          <a:p>
-            <a:r>
-              <a:t>[실행] nano ~/agv_ws/src/agv_description/urdf/sensors.xacro</a:t>
+              <a:t>[설명] ~/agv_ws/src/agv_description/urdf/wheels.xacro의 전체 파일을 3/5 구간으로 작성한다.</a:t>
+            </a:r>
+          </a:p>
+          <a:p>
+            <a:r>
+              <a:t>[실행] nano ~/agv_ws/src/agv_description/urdf/wheels.xacro</a:t>
             </a:r>
           </a:p>
           <a:p>
@@ -2431,12 +2434,12 @@
           <a:lstStyle/>
           <a:p>
             <a:r>
-              <a:t>[설명] ~/agv_ws/src/agv_description/urdf/sensors.xacro의 전체 파일을 2/4 구간으로 작성한다.</a:t>
-            </a:r>
-          </a:p>
-          <a:p>
-            <a:r>
-              <a:t>[실행] nano ~/agv_ws/src/agv_description/urdf/sensors.xacro</a:t>
+              <a:t>[설명] ~/agv_ws/src/agv_description/urdf/wheels.xacro의 전체 파일을 4/5 구간으로 작성한다.</a:t>
+            </a:r>
+          </a:p>
+          <a:p>
+            <a:r>
+              <a:t>[실행] nano ~/agv_ws/src/agv_description/urdf/wheels.xacro</a:t>
             </a:r>
           </a:p>
           <a:p>
@@ -2611,12 +2614,12 @@
           <a:lstStyle/>
           <a:p>
             <a:r>
-              <a:t>[설명] ~/agv_ws/src/agv_description/urdf/sensors.xacro의 전체 파일을 3/4 구간으로 작성한다.</a:t>
-            </a:r>
-          </a:p>
-          <a:p>
-            <a:r>
-              <a:t>[실행] nano ~/agv_ws/src/agv_description/urdf/sensors.xacro</a:t>
+              <a:t>[설명] ~/agv_ws/src/agv_description/urdf/wheels.xacro의 전체 파일을 5/5 구간으로 작성한다.</a:t>
+            </a:r>
+          </a:p>
+          <a:p>
+            <a:r>
+              <a:t>[실행] nano ~/agv_ws/src/agv_description/urdf/wheels.xacro</a:t>
             </a:r>
           </a:p>
           <a:p>
@@ -2701,7 +2704,7 @@
           <a:lstStyle/>
           <a:p>
             <a:r>
-              <a:t>[설명] ~/agv_ws/src/agv_description/urdf/sensors.xacro의 전체 파일을 4/4 구간으로 작성한다.</a:t>
+              <a:t>[설명] ~/agv_ws/src/agv_description/urdf/sensors.xacro의 전체 파일을 1/4 구간으로 작성한다.</a:t>
             </a:r>
           </a:p>
           <a:p>
@@ -2791,12 +2794,12 @@
           <a:lstStyle/>
           <a:p>
             <a:r>
-              <a:t>[설명] ~/agv_ws/src/agv_description/launch/display.launch.py의 전체 파일을 1/2 구간으로 작성한다.</a:t>
-            </a:r>
-          </a:p>
-          <a:p>
-            <a:r>
-              <a:t>[실행] nano ~/agv_ws/src/agv_description/launch/display.launch.py</a:t>
+              <a:t>[설명] ~/agv_ws/src/agv_description/urdf/sensors.xacro의 전체 파일을 2/4 구간으로 작성한다.</a:t>
+            </a:r>
+          </a:p>
+          <a:p>
+            <a:r>
+              <a:t>[실행] nano ~/agv_ws/src/agv_description/urdf/sensors.xacro</a:t>
             </a:r>
           </a:p>
           <a:p>
@@ -2881,12 +2884,12 @@
           <a:lstStyle/>
           <a:p>
             <a:r>
-              <a:t>[설명] ~/agv_ws/src/agv_description/launch/display.launch.py의 전체 파일을 2/2 구간으로 작성한다.</a:t>
-            </a:r>
-          </a:p>
-          <a:p>
-            <a:r>
-              <a:t>[실행] nano ~/agv_ws/src/agv_description/launch/display.launch.py</a:t>
+              <a:t>[설명] ~/agv_ws/src/agv_description/urdf/sensors.xacro의 전체 파일을 3/4 구간으로 작성한다.</a:t>
+            </a:r>
+          </a:p>
+          <a:p>
+            <a:r>
+              <a:t>[실행] nano ~/agv_ws/src/agv_description/urdf/sensors.xacro</a:t>
             </a:r>
           </a:p>
           <a:p>
@@ -2971,22 +2974,17 @@
           <a:lstStyle/>
           <a:p>
             <a:r>
-              <a:t>[설명] build/source/run을 생략 없이 실행한다.</a:t>
-            </a:r>
-          </a:p>
-          <a:p>
-            <a:r>
-              <a:t>[실행] cd ~/agv_ws &amp;&amp; source install/setup.bash</a:t>
-            </a:r>
-          </a:p>
-          <a:p>
-            <a:r>
-              <a:t>ros2 launch agv_description display.launch.py</a:t>
-            </a:r>
-          </a:p>
-          <a:p>
-            <a:r>
-              <a:t>[확인] RobotModel과 TF에서 base, 두 wheel, camera, lidar, imu 연결을 확인한다.</a:t>
+              <a:t>[설명] ~/agv_ws/src/agv_description/urdf/sensors.xacro의 전체 파일을 4/4 구간으로 작성한다.</a:t>
+            </a:r>
+          </a:p>
+          <a:p>
+            <a:r>
+              <a:t>[실행] nano ~/agv_ws/src/agv_description/urdf/sensors.xacro</a:t>
+            </a:r>
+          </a:p>
+          <a:p>
+            <a:r>
+              <a:t>[확인] 코드를 저장하고 다음 코드 슬라이드 또는 build 단계로 이동한다.</a:t>
             </a:r>
           </a:p>
           <a:p>
@@ -2996,7 +2994,7 @@
           </a:p>
           <a:p>
             <a:r>
-              <a:t>[오류] 오류가 나면 현재 폴더, source, 파일 경로를 먼저 확인한다.</a:t>
+              <a:t>[오류] 들여쓰기·XML 태그·따옴표가 슬라이드와 정확히 같은지 확인한다.</a:t>
             </a:r>
           </a:p>
         </p:txBody>
@@ -3066,17 +3064,17 @@
           <a:lstStyle/>
           <a:p>
             <a:r>
-              <a:t>[설명] 실제 Ubuntu/ROS 2 환경에서 생성한 검증 화면이다.</a:t>
-            </a:r>
-          </a:p>
-          <a:p>
-            <a:r>
-              <a:t>[실행] 슬라이드의 명령 또는 파일 작성 단계를 진행한다.</a:t>
-            </a:r>
-          </a:p>
-          <a:p>
-            <a:r>
-              <a:t>[확인] 캡처의 명령과 다음 슬라이드의 검증 명령을 비교한다.</a:t>
+              <a:t>[설명] ~/agv_ws/src/agv_description/launch/display.launch.py의 전체 파일을 1/2 구간으로 작성한다.</a:t>
+            </a:r>
+          </a:p>
+          <a:p>
+            <a:r>
+              <a:t>[실행] nano ~/agv_ws/src/agv_description/launch/display.launch.py</a:t>
+            </a:r>
+          </a:p>
+          <a:p>
+            <a:r>
+              <a:t>[확인] 코드를 저장하고 다음 코드 슬라이드 또는 build 단계로 이동한다.</a:t>
             </a:r>
           </a:p>
           <a:p>
@@ -3086,7 +3084,7 @@
           </a:p>
           <a:p>
             <a:r>
-              <a:t>[오류] 오류가 나면 현재 폴더, source, 파일 경로를 먼저 확인한다.</a:t>
+              <a:t>[오류] 들여쓰기·XML 태그·따옴표가 슬라이드와 정확히 같은지 확인한다.</a:t>
             </a:r>
           </a:p>
         </p:txBody>
@@ -3156,22 +3154,17 @@
           <a:lstStyle/>
           <a:p>
             <a:r>
-              <a:t>[설명] 검증 명령은 GUI 결과와 별도로 실행해 재현 가능한 완료 기준을 만든다.</a:t>
-            </a:r>
-          </a:p>
-          <a:p>
-            <a:r>
-              <a:t>[실행] xacro ~/agv_ws/src/agv_description/urdf/agv.urdf.xacro &gt; /tmp/agv.urdf</a:t>
-            </a:r>
-          </a:p>
-          <a:p>
-            <a:r>
-              <a:t>check_urdf /tmp/agv.urdf</a:t>
-            </a:r>
-          </a:p>
-          <a:p>
-            <a:r>
-              <a:t>[확인] RobotModel과 TF에서 base, 두 wheel, camera, lidar, imu 연결을 확인한다.</a:t>
+              <a:t>[설명] ~/agv_ws/src/agv_description/launch/display.launch.py의 전체 파일을 2/2 구간으로 작성한다.</a:t>
+            </a:r>
+          </a:p>
+          <a:p>
+            <a:r>
+              <a:t>[실행] nano ~/agv_ws/src/agv_description/launch/display.launch.py</a:t>
+            </a:r>
+          </a:p>
+          <a:p>
+            <a:r>
+              <a:t>[확인] 코드를 저장하고 다음 코드 슬라이드 또는 build 단계로 이동한다.</a:t>
             </a:r>
           </a:p>
           <a:p>
@@ -3181,7 +3174,7 @@
           </a:p>
           <a:p>
             <a:r>
-              <a:t>[오류] 오류가 나면 현재 폴더, source, 파일 경로를 먼저 확인한다.</a:t>
+              <a:t>[오류] 들여쓰기·XML 태그·따옴표가 슬라이드와 정확히 같은지 확인한다.</a:t>
             </a:r>
           </a:p>
         </p:txBody>
@@ -3251,17 +3244,22 @@
           <a:lstStyle/>
           <a:p>
             <a:r>
-              <a:t>[설명] 오류를 대신 해결하지 말고 증상부터 우선 확인 순서대로 교육생이 실행하게 한다.</a:t>
-            </a:r>
-          </a:p>
-          <a:p>
-            <a:r>
-              <a:t>[실행] 슬라이드의 명령 또는 파일 작성 단계를 진행한다.</a:t>
-            </a:r>
-          </a:p>
-          <a:p>
-            <a:r>
-              <a:t>[확인] 수정 뒤 첫 검증 명령을 다시 실행한다.</a:t>
+              <a:t>[설명] build/source/run을 생략 없이 실행한다.</a:t>
+            </a:r>
+          </a:p>
+          <a:p>
+            <a:r>
+              <a:t>[실행] cd ~/agv_ws &amp;&amp; source install/setup.bash</a:t>
+            </a:r>
+          </a:p>
+          <a:p>
+            <a:r>
+              <a:t>ros2 launch agv_description display.launch.py</a:t>
+            </a:r>
+          </a:p>
+          <a:p>
+            <a:r>
+              <a:t>[확인] RobotModel과 TF에서 base, 두 wheel, camera, lidar, imu 연결을 확인한다.</a:t>
             </a:r>
           </a:p>
           <a:p>
@@ -3271,7 +3269,7 @@
           </a:p>
           <a:p>
             <a:r>
-              <a:t>[오류] 슬라이드의 두 대표 오류를 먼저 사용한다.</a:t>
+              <a:t>[오류] 오류가 나면 현재 폴더, source, 파일 경로를 먼저 확인한다.</a:t>
             </a:r>
           </a:p>
         </p:txBody>
@@ -3341,7 +3339,7 @@
           <a:lstStyle/>
           <a:p>
             <a:r>
-              <a:t>[설명] 교육생이 직접 한 값만 바꿔 원인과 결과를 연결하게 한다.</a:t>
+              <a:t>[설명] 실제 Ubuntu/ROS 2 환경에서 생성한 검증 화면이다.</a:t>
             </a:r>
           </a:p>
           <a:p>
@@ -3351,7 +3349,7 @@
           </a:p>
           <a:p>
             <a:r>
-              <a:t>[확인] 원래 값과 변경 값을 모두 기록한다.</a:t>
+              <a:t>[확인] 캡처의 명령과 다음 슬라이드의 검증 명령을 비교한다.</a:t>
             </a:r>
           </a:p>
           <a:p>
@@ -3431,17 +3429,22 @@
           <a:lstStyle/>
           <a:p>
             <a:r>
-              <a:t>[설명] 교육생이 Complete·캡처·로그를 저장했는지 확인하고 다음 모듈의 시작 상태를 읽는다.</a:t>
-            </a:r>
-          </a:p>
-          <a:p>
-            <a:r>
-              <a:t>[실행] 슬라이드의 명령 또는 파일 작성 단계를 진행한다.</a:t>
-            </a:r>
-          </a:p>
-          <a:p>
-            <a:r>
-              <a:t>[확인] M06 Xacro 모듈화 시작 조건을 말할 수 있다.</a:t>
+              <a:t>[설명] 검증 명령은 GUI 결과와 별도로 실행해 재현 가능한 완료 기준을 만든다.</a:t>
+            </a:r>
+          </a:p>
+          <a:p>
+            <a:r>
+              <a:t>[실행] xacro ~/agv_ws/src/agv_description/urdf/agv.urdf.xacro &gt; /tmp/agv.urdf</a:t>
+            </a:r>
+          </a:p>
+          <a:p>
+            <a:r>
+              <a:t>check_urdf /tmp/agv.urdf</a:t>
+            </a:r>
+          </a:p>
+          <a:p>
+            <a:r>
+              <a:t>[확인] RobotModel과 TF에서 base, 두 wheel, camera, lidar, imu 연결을 확인한다.</a:t>
             </a:r>
           </a:p>
           <a:p>
@@ -3611,6 +3614,276 @@
           <a:lstStyle/>
           <a:p>
             <a:r>
+              <a:t>[설명] 오류를 대신 해결하지 말고 증상부터 우선 확인 순서대로 교육생이 실행하게 한다.</a:t>
+            </a:r>
+          </a:p>
+          <a:p>
+            <a:r>
+              <a:t>[실행] 슬라이드의 명령 또는 파일 작성 단계를 진행한다.</a:t>
+            </a:r>
+          </a:p>
+          <a:p>
+            <a:r>
+              <a:t>[확인] 수정 뒤 첫 검증 명령을 다시 실행한다.</a:t>
+            </a:r>
+          </a:p>
+          <a:p>
+            <a:r>
+              <a:t>[멈춤] 교육생이 현재 체크포인트를 통과할 때까지 기다린다.</a:t>
+            </a:r>
+          </a:p>
+          <a:p>
+            <a:r>
+              <a:t>[오류] 슬라이드의 두 대표 오류를 먼저 사용한다.</a:t>
+            </a:r>
+          </a:p>
+        </p:txBody>
+      </p:sp>
+      <p:sp>
+        <p:nvSpPr>
+          <p:cNvPr id="4" name="Slide Number Placeholder 3"/>
+          <p:cNvSpPr>
+            <a:spLocks noGrp="1"/>
+          </p:cNvSpPr>
+          <p:nvPr>
+            <p:ph type="sldNum" idx="5" sz="quarter"/>
+          </p:nvPr>
+        </p:nvSpPr>
+        <p:spPr/>
+      </p:sp>
+    </p:spTree>
+  </p:cSld>
+  <p:clrMapOvr>
+    <a:masterClrMapping/>
+  </p:clrMapOvr>
+</p:notes>
+</file>
+
+<file path=ppt/notesSlides/notesSlide41.xml><?xml version="1.0" encoding="utf-8"?>
+<p:notes xmlns:a="http://schemas.openxmlformats.org/drawingml/2006/main" xmlns:p="http://schemas.openxmlformats.org/presentationml/2006/main" xmlns:r="http://schemas.openxmlformats.org/officeDocument/2006/relationships">
+  <p:cSld>
+    <p:spTree>
+      <p:nvGrpSpPr>
+        <p:cNvPr id="1" name=""/>
+        <p:cNvGrpSpPr/>
+        <p:nvPr/>
+      </p:nvGrpSpPr>
+      <p:grpSpPr>
+        <a:xfrm>
+          <a:off x="0" y="0"/>
+          <a:ext cx="0" cy="0"/>
+          <a:chOff x="0" y="0"/>
+          <a:chExt cx="0" cy="0"/>
+        </a:xfrm>
+      </p:grpSpPr>
+      <p:sp>
+        <p:nvSpPr>
+          <p:cNvPr id="2" name="Slide Image Placeholder 1"/>
+          <p:cNvSpPr>
+            <a:spLocks noGrp="1"/>
+          </p:cNvSpPr>
+          <p:nvPr>
+            <p:ph type="sldImg" idx="2"/>
+          </p:nvPr>
+        </p:nvSpPr>
+        <p:spPr/>
+      </p:sp>
+      <p:sp>
+        <p:nvSpPr>
+          <p:cNvPr id="3" name="Notes Placeholder 2"/>
+          <p:cNvSpPr>
+            <a:spLocks noGrp="1"/>
+          </p:cNvSpPr>
+          <p:nvPr>
+            <p:ph type="body" idx="3" sz="quarter"/>
+          </p:nvPr>
+        </p:nvSpPr>
+        <p:spPr/>
+        <p:txBody>
+          <a:bodyPr/>
+          <a:lstStyle/>
+          <a:p>
+            <a:r>
+              <a:t>[설명] 교육생이 직접 한 값만 바꿔 원인과 결과를 연결하게 한다.</a:t>
+            </a:r>
+          </a:p>
+          <a:p>
+            <a:r>
+              <a:t>[실행] 슬라이드의 명령 또는 파일 작성 단계를 진행한다.</a:t>
+            </a:r>
+          </a:p>
+          <a:p>
+            <a:r>
+              <a:t>[확인] 원래 값과 변경 값을 모두 기록한다.</a:t>
+            </a:r>
+          </a:p>
+          <a:p>
+            <a:r>
+              <a:t>[멈춤] 교육생이 현재 체크포인트를 통과할 때까지 기다린다.</a:t>
+            </a:r>
+          </a:p>
+          <a:p>
+            <a:r>
+              <a:t>[오류] 오류가 나면 현재 폴더, source, 파일 경로를 먼저 확인한다.</a:t>
+            </a:r>
+          </a:p>
+        </p:txBody>
+      </p:sp>
+      <p:sp>
+        <p:nvSpPr>
+          <p:cNvPr id="4" name="Slide Number Placeholder 3"/>
+          <p:cNvSpPr>
+            <a:spLocks noGrp="1"/>
+          </p:cNvSpPr>
+          <p:nvPr>
+            <p:ph type="sldNum" idx="5" sz="quarter"/>
+          </p:nvPr>
+        </p:nvSpPr>
+        <p:spPr/>
+      </p:sp>
+    </p:spTree>
+  </p:cSld>
+  <p:clrMapOvr>
+    <a:masterClrMapping/>
+  </p:clrMapOvr>
+</p:notes>
+</file>
+
+<file path=ppt/notesSlides/notesSlide42.xml><?xml version="1.0" encoding="utf-8"?>
+<p:notes xmlns:a="http://schemas.openxmlformats.org/drawingml/2006/main" xmlns:p="http://schemas.openxmlformats.org/presentationml/2006/main" xmlns:r="http://schemas.openxmlformats.org/officeDocument/2006/relationships">
+  <p:cSld>
+    <p:spTree>
+      <p:nvGrpSpPr>
+        <p:cNvPr id="1" name=""/>
+        <p:cNvGrpSpPr/>
+        <p:nvPr/>
+      </p:nvGrpSpPr>
+      <p:grpSpPr>
+        <a:xfrm>
+          <a:off x="0" y="0"/>
+          <a:ext cx="0" cy="0"/>
+          <a:chOff x="0" y="0"/>
+          <a:chExt cx="0" cy="0"/>
+        </a:xfrm>
+      </p:grpSpPr>
+      <p:sp>
+        <p:nvSpPr>
+          <p:cNvPr id="2" name="Slide Image Placeholder 1"/>
+          <p:cNvSpPr>
+            <a:spLocks noGrp="1"/>
+          </p:cNvSpPr>
+          <p:nvPr>
+            <p:ph type="sldImg" idx="2"/>
+          </p:nvPr>
+        </p:nvSpPr>
+        <p:spPr/>
+      </p:sp>
+      <p:sp>
+        <p:nvSpPr>
+          <p:cNvPr id="3" name="Notes Placeholder 2"/>
+          <p:cNvSpPr>
+            <a:spLocks noGrp="1"/>
+          </p:cNvSpPr>
+          <p:nvPr>
+            <p:ph type="body" idx="3" sz="quarter"/>
+          </p:nvPr>
+        </p:nvSpPr>
+        <p:spPr/>
+        <p:txBody>
+          <a:bodyPr/>
+          <a:lstStyle/>
+          <a:p>
+            <a:r>
+              <a:t>[설명] 교육생이 Complete·캡처·로그를 저장했는지 확인하고 다음 모듈의 시작 상태를 읽는다.</a:t>
+            </a:r>
+          </a:p>
+          <a:p>
+            <a:r>
+              <a:t>[실행] 슬라이드의 명령 또는 파일 작성 단계를 진행한다.</a:t>
+            </a:r>
+          </a:p>
+          <a:p>
+            <a:r>
+              <a:t>[확인] M06 Xacro 모듈화 시작 조건을 말할 수 있다.</a:t>
+            </a:r>
+          </a:p>
+          <a:p>
+            <a:r>
+              <a:t>[멈춤] 교육생이 현재 체크포인트를 통과할 때까지 기다린다.</a:t>
+            </a:r>
+          </a:p>
+          <a:p>
+            <a:r>
+              <a:t>[오류] 오류가 나면 현재 폴더, source, 파일 경로를 먼저 확인한다.</a:t>
+            </a:r>
+          </a:p>
+        </p:txBody>
+      </p:sp>
+      <p:sp>
+        <p:nvSpPr>
+          <p:cNvPr id="4" name="Slide Number Placeholder 3"/>
+          <p:cNvSpPr>
+            <a:spLocks noGrp="1"/>
+          </p:cNvSpPr>
+          <p:nvPr>
+            <p:ph type="sldNum" idx="5" sz="quarter"/>
+          </p:nvPr>
+        </p:nvSpPr>
+        <p:spPr/>
+      </p:sp>
+    </p:spTree>
+  </p:cSld>
+  <p:clrMapOvr>
+    <a:masterClrMapping/>
+  </p:clrMapOvr>
+</p:notes>
+</file>
+
+<file path=ppt/notesSlides/notesSlide43.xml><?xml version="1.0" encoding="utf-8"?>
+<p:notes xmlns:a="http://schemas.openxmlformats.org/drawingml/2006/main" xmlns:p="http://schemas.openxmlformats.org/presentationml/2006/main" xmlns:r="http://schemas.openxmlformats.org/officeDocument/2006/relationships">
+  <p:cSld>
+    <p:spTree>
+      <p:nvGrpSpPr>
+        <p:cNvPr id="1" name=""/>
+        <p:cNvGrpSpPr/>
+        <p:nvPr/>
+      </p:nvGrpSpPr>
+      <p:grpSpPr>
+        <a:xfrm>
+          <a:off x="0" y="0"/>
+          <a:ext cx="0" cy="0"/>
+          <a:chOff x="0" y="0"/>
+          <a:chExt cx="0" cy="0"/>
+        </a:xfrm>
+      </p:grpSpPr>
+      <p:sp>
+        <p:nvSpPr>
+          <p:cNvPr id="2" name="Slide Image Placeholder 1"/>
+          <p:cNvSpPr>
+            <a:spLocks noGrp="1"/>
+          </p:cNvSpPr>
+          <p:nvPr>
+            <p:ph type="sldImg" idx="2"/>
+          </p:nvPr>
+        </p:nvSpPr>
+        <p:spPr/>
+      </p:sp>
+      <p:sp>
+        <p:nvSpPr>
+          <p:cNvPr id="3" name="Notes Placeholder 2"/>
+          <p:cNvSpPr>
+            <a:spLocks noGrp="1"/>
+          </p:cNvSpPr>
+          <p:nvPr>
+            <p:ph type="body" idx="3" sz="quarter"/>
+          </p:nvPr>
+        </p:nvSpPr>
+        <p:spPr/>
+        <p:txBody>
+          <a:bodyPr/>
+          <a:lstStyle/>
+          <a:p>
+            <a:r>
               <a:t>[설명] 공식 문서는 버전 차이와 확장 학습을 확인할 때 사용한다.</a:t>
             </a:r>
           </a:p>
@@ -4076,7 +4349,7 @@
           <a:lstStyle/>
           <a:p>
             <a:r>
-              <a:t>[설명] ~/agv_ws/src/agv_description/urdf/agv.urdf.xacro의 전체 파일을 1/10 구간으로 작성한다.</a:t>
+              <a:t>[설명] ~/agv_ws/src/agv_description/urdf/agv.urdf.xacro의 전체 파일을 1/11 구간으로 작성한다.</a:t>
             </a:r>
           </a:p>
           <a:p>
@@ -7469,7 +7742,7 @@
               </a:defRPr>
             </a:pPr>
             <a:r>
-              <a:t>파일을 계속 작성하고 저장한다 (2/10)</a:t>
+              <a:t>파일을 계속 작성하고 저장한다 (2/11)</a:t>
             </a:r>
           </a:p>
         </p:txBody>
@@ -7644,7 +7917,7 @@
               </a:defRPr>
             </a:pPr>
             <a:r>
-              <a:t>현재 단계 4/13    |    현재 폴더 ~/agv_ws    |    현재 터미널</a:t>
+              <a:t>현재 단계 4/14    |    현재 폴더 ~/agv_ws    |    현재 터미널</a:t>
             </a:r>
           </a:p>
         </p:txBody>
@@ -7657,8 +7930,8 @@
         </p:nvSpPr>
         <p:spPr>
           <a:xfrm>
-            <a:off x="658368" y="1682496"/>
-            <a:ext cx="10972800" cy="347472"/>
+            <a:off x="658368" y="1627632"/>
+            <a:ext cx="10972800" cy="256032"/>
           </a:xfrm>
           <a:prstGeom prst="rect">
             <a:avLst/>
@@ -7675,7 +7948,7 @@
               <a:spcAft>
                 <a:spcPts val="0"/>
               </a:spcAft>
-              <a:defRPr sz="1700" b="1">
+              <a:defRPr sz="1500" b="1">
                 <a:solidFill>
                   <a:srgbClr val="122C4E"/>
                 </a:solidFill>
@@ -7696,8 +7969,8 @@
         </p:nvSpPr>
         <p:spPr>
           <a:xfrm>
-            <a:off x="658368" y="2103120"/>
-            <a:ext cx="10972800" cy="493776"/>
+            <a:off x="658368" y="1956816"/>
+            <a:ext cx="10972800" cy="603504"/>
           </a:xfrm>
           <a:prstGeom prst="rect">
             <a:avLst/>
@@ -7741,7 +8014,11 @@
               </a:defRPr>
             </a:pPr>
             <a:r>
-              <a:t>파일 생성/열기: mkdir -p ~/agv_ws/src/agv_description/urdf    &amp;&amp;    nano ~/agv_ws/src/agv_description/urdf/agv.urdf.xacro</a:t>
+              <a:t>파일 생성: mkdir -p ~/agv_ws/src/agv_description/urdf</a:t>
+            </a:r>
+            <a:br/>
+            <a:r>
+              <a:t>파일 열기: nano ~/agv_ws/src/agv_description/urdf/agv.urdf.xacro</a:t>
             </a:r>
           </a:p>
         </p:txBody>
@@ -7754,8 +8031,8 @@
         </p:nvSpPr>
         <p:spPr>
           <a:xfrm>
-            <a:off x="658368" y="2761488"/>
-            <a:ext cx="10972800" cy="3383280"/>
+            <a:off x="658368" y="2706624"/>
+            <a:ext cx="10972800" cy="3364992"/>
           </a:xfrm>
           <a:prstGeom prst="rect">
             <a:avLst/>
@@ -7798,6 +8075,11 @@
                 <a:latin typeface="DejaVu Sans Mono"/>
               </a:defRPr>
             </a:pPr>
+            <a:br/>
+            <a:r>
+              <a:t>  </a:t>
+            </a:r>
+            <a:br/>
             <a:r>
               <a:t>  &lt;xacro:property name="body_length" value="0.60"/&gt;</a:t>
             </a:r>
@@ -7836,22 +8118,6 @@
             <a:br/>
             <a:r>
               <a:t>  &lt;xacro:property name="wheel_radius" value="0.08"/&gt;</a:t>
-            </a:r>
-            <a:br/>
-            <a:r>
-              <a:t>  </a:t>
-            </a:r>
-            <a:br/>
-            <a:r>
-              <a:t>  </a:t>
-            </a:r>
-            <a:br/>
-            <a:r>
-              <a:t>  &lt;xacro:property name="wheel_width" value="0.05"/&gt;</a:t>
-            </a:r>
-            <a:br/>
-            <a:r>
-              <a:t>  </a:t>
             </a:r>
           </a:p>
         </p:txBody>
@@ -7864,7 +8130,7 @@
         </p:nvSpPr>
         <p:spPr>
           <a:xfrm>
-            <a:off x="749808" y="6199632"/>
+            <a:off x="749808" y="6181344"/>
             <a:ext cx="10789920" cy="201168"/>
           </a:xfrm>
           <a:prstGeom prst="rect">
@@ -7890,7 +8156,7 @@
               </a:defRPr>
             </a:pPr>
             <a:r>
-              <a:t>파일 전체 2/10 · 이 슬라이드 다음에 같은 파일의 나머지 줄이 이어집니다.</a:t>
+              <a:t>파일 전체 2/11 · 이 슬라이드 다음에 같은 파일의 나머지 줄이 이어집니다.</a:t>
             </a:r>
           </a:p>
         </p:txBody>
@@ -7947,7 +8213,7 @@
               </a:defRPr>
             </a:pPr>
             <a:r>
-              <a:t>파일을 계속 작성하고 저장한다 (3/10)</a:t>
+              <a:t>파일을 계속 작성하고 저장한다 (3/11)</a:t>
             </a:r>
           </a:p>
         </p:txBody>
@@ -8122,7 +8388,7 @@
               </a:defRPr>
             </a:pPr>
             <a:r>
-              <a:t>현재 단계 5/13    |    현재 폴더 ~/agv_ws    |    현재 터미널</a:t>
+              <a:t>현재 단계 5/14    |    현재 폴더 ~/agv_ws    |    현재 터미널</a:t>
             </a:r>
           </a:p>
         </p:txBody>
@@ -8135,8 +8401,8 @@
         </p:nvSpPr>
         <p:spPr>
           <a:xfrm>
-            <a:off x="658368" y="1682496"/>
-            <a:ext cx="10972800" cy="347472"/>
+            <a:off x="658368" y="1627632"/>
+            <a:ext cx="10972800" cy="256032"/>
           </a:xfrm>
           <a:prstGeom prst="rect">
             <a:avLst/>
@@ -8153,7 +8419,7 @@
               <a:spcAft>
                 <a:spcPts val="0"/>
               </a:spcAft>
-              <a:defRPr sz="1700" b="1">
+              <a:defRPr sz="1500" b="1">
                 <a:solidFill>
                   <a:srgbClr val="122C4E"/>
                 </a:solidFill>
@@ -8174,8 +8440,8 @@
         </p:nvSpPr>
         <p:spPr>
           <a:xfrm>
-            <a:off x="658368" y="2103120"/>
-            <a:ext cx="10972800" cy="493776"/>
+            <a:off x="658368" y="1956816"/>
+            <a:ext cx="10972800" cy="603504"/>
           </a:xfrm>
           <a:prstGeom prst="rect">
             <a:avLst/>
@@ -8219,7 +8485,11 @@
               </a:defRPr>
             </a:pPr>
             <a:r>
-              <a:t>파일 생성/열기: mkdir -p ~/agv_ws/src/agv_description/urdf    &amp;&amp;    nano ~/agv_ws/src/agv_description/urdf/agv.urdf.xacro</a:t>
+              <a:t>파일 생성: mkdir -p ~/agv_ws/src/agv_description/urdf</a:t>
+            </a:r>
+            <a:br/>
+            <a:r>
+              <a:t>파일 열기: nano ~/agv_ws/src/agv_description/urdf/agv.urdf.xacro</a:t>
             </a:r>
           </a:p>
         </p:txBody>
@@ -8232,8 +8502,8 @@
         </p:nvSpPr>
         <p:spPr>
           <a:xfrm>
-            <a:off x="658368" y="2761488"/>
-            <a:ext cx="10972800" cy="3383280"/>
+            <a:off x="658368" y="2706624"/>
+            <a:ext cx="10972800" cy="3364992"/>
           </a:xfrm>
           <a:prstGeom prst="rect">
             <a:avLst/>
@@ -8281,6 +8551,22 @@
             </a:r>
             <a:br/>
             <a:r>
+              <a:t>  </a:t>
+            </a:r>
+            <a:br/>
+            <a:r>
+              <a:t>  &lt;xacro:property name="wheel_width" value="0.05"/&gt;</a:t>
+            </a:r>
+            <a:br/>
+            <a:r>
+              <a:t>  </a:t>
+            </a:r>
+            <a:br/>
+            <a:r>
+              <a:t>  </a:t>
+            </a:r>
+            <a:br/>
+            <a:r>
               <a:t>  &lt;xacro:property name="wheel_base" value="0.38"/&gt;</a:t>
             </a:r>
             <a:br/>
@@ -8303,30 +8589,6 @@
             <a:br/>
             <a:r>
               <a:t>  </a:t>
-            </a:r>
-            <a:br/>
-            <a:r>
-              <a:t>  &lt;link name="base_link"&gt;</a:t>
-            </a:r>
-            <a:br/>
-            <a:r>
-              <a:t>    </a:t>
-            </a:r>
-            <a:br/>
-            <a:r>
-              <a:t>    </a:t>
-            </a:r>
-            <a:br/>
-            <a:r>
-              <a:t>    &lt;visual&gt;</a:t>
-            </a:r>
-            <a:br/>
-            <a:r>
-              <a:t>      &lt;origin xyz="0 0 ${wheel_radius + body_height/2}"/&gt;</a:t>
-            </a:r>
-            <a:br/>
-            <a:r>
-              <a:t>      &lt;geometry&gt;</a:t>
             </a:r>
           </a:p>
         </p:txBody>
@@ -8339,7 +8601,7 @@
         </p:nvSpPr>
         <p:spPr>
           <a:xfrm>
-            <a:off x="749808" y="6199632"/>
+            <a:off x="749808" y="6181344"/>
             <a:ext cx="10789920" cy="201168"/>
           </a:xfrm>
           <a:prstGeom prst="rect">
@@ -8365,7 +8627,7 @@
               </a:defRPr>
             </a:pPr>
             <a:r>
-              <a:t>파일 전체 3/10 · 이 슬라이드 다음에 같은 파일의 나머지 줄이 이어집니다.</a:t>
+              <a:t>파일 전체 3/11 · 이 슬라이드 다음에 같은 파일의 나머지 줄이 이어집니다.</a:t>
             </a:r>
           </a:p>
         </p:txBody>
@@ -8422,7 +8684,7 @@
               </a:defRPr>
             </a:pPr>
             <a:r>
-              <a:t>파일을 계속 작성하고 저장한다 (4/10)</a:t>
+              <a:t>파일을 계속 작성하고 저장한다 (4/11)</a:t>
             </a:r>
           </a:p>
         </p:txBody>
@@ -8597,7 +8859,7 @@
               </a:defRPr>
             </a:pPr>
             <a:r>
-              <a:t>현재 단계 6/13    |    현재 폴더 ~/agv_ws    |    현재 터미널</a:t>
+              <a:t>현재 단계 6/14    |    현재 폴더 ~/agv_ws    |    현재 터미널</a:t>
             </a:r>
           </a:p>
         </p:txBody>
@@ -8610,8 +8872,8 @@
         </p:nvSpPr>
         <p:spPr>
           <a:xfrm>
-            <a:off x="658368" y="1682496"/>
-            <a:ext cx="10972800" cy="347472"/>
+            <a:off x="658368" y="1627632"/>
+            <a:ext cx="10972800" cy="256032"/>
           </a:xfrm>
           <a:prstGeom prst="rect">
             <a:avLst/>
@@ -8628,7 +8890,7 @@
               <a:spcAft>
                 <a:spcPts val="0"/>
               </a:spcAft>
-              <a:defRPr sz="1700" b="1">
+              <a:defRPr sz="1500" b="1">
                 <a:solidFill>
                   <a:srgbClr val="122C4E"/>
                 </a:solidFill>
@@ -8649,8 +8911,8 @@
         </p:nvSpPr>
         <p:spPr>
           <a:xfrm>
-            <a:off x="658368" y="2103120"/>
-            <a:ext cx="10972800" cy="493776"/>
+            <a:off x="658368" y="1956816"/>
+            <a:ext cx="10972800" cy="603504"/>
           </a:xfrm>
           <a:prstGeom prst="rect">
             <a:avLst/>
@@ -8694,7 +8956,11 @@
               </a:defRPr>
             </a:pPr>
             <a:r>
-              <a:t>파일 생성/열기: mkdir -p ~/agv_ws/src/agv_description/urdf    &amp;&amp;    nano ~/agv_ws/src/agv_description/urdf/agv.urdf.xacro</a:t>
+              <a:t>파일 생성: mkdir -p ~/agv_ws/src/agv_description/urdf</a:t>
+            </a:r>
+            <a:br/>
+            <a:r>
+              <a:t>파일 열기: nano ~/agv_ws/src/agv_description/urdf/agv.urdf.xacro</a:t>
             </a:r>
           </a:p>
         </p:txBody>
@@ -8707,8 +8973,8 @@
         </p:nvSpPr>
         <p:spPr>
           <a:xfrm>
-            <a:off x="658368" y="2761488"/>
-            <a:ext cx="10972800" cy="3383280"/>
+            <a:off x="658368" y="2706624"/>
+            <a:ext cx="10972800" cy="3364992"/>
           </a:xfrm>
           <a:prstGeom prst="rect">
             <a:avLst/>
@@ -8752,6 +9018,30 @@
               </a:defRPr>
             </a:pPr>
             <a:r>
+              <a:t>  &lt;link name="base_link"&gt;</a:t>
+            </a:r>
+            <a:br/>
+            <a:r>
+              <a:t>    </a:t>
+            </a:r>
+            <a:br/>
+            <a:r>
+              <a:t>    </a:t>
+            </a:r>
+            <a:br/>
+            <a:r>
+              <a:t>    &lt;visual&gt;</a:t>
+            </a:r>
+            <a:br/>
+            <a:r>
+              <a:t>      &lt;origin xyz="0 0 ${wheel_radius + body_height/2}"/&gt;</a:t>
+            </a:r>
+            <a:br/>
+            <a:r>
+              <a:t>      &lt;geometry&gt;</a:t>
+            </a:r>
+            <a:br/>
+            <a:r>
               <a:t>        &lt;box size="${body_length} ${body_width} ${body_height}"/&gt;</a:t>
             </a:r>
             <a:br/>
@@ -8765,38 +9055,6 @@
             <a:br/>
             <a:r>
               <a:t>    &lt;/visual&gt;</a:t>
-            </a:r>
-            <a:br/>
-            <a:r>
-              <a:t>    </a:t>
-            </a:r>
-            <a:br/>
-            <a:r>
-              <a:t>    </a:t>
-            </a:r>
-            <a:br/>
-            <a:r>
-              <a:t>    &lt;collision&gt;</a:t>
-            </a:r>
-            <a:br/>
-            <a:r>
-              <a:t>      &lt;origin xyz="0 0 ${wheel_radius + body_height/2}"/&gt;</a:t>
-            </a:r>
-            <a:br/>
-            <a:r>
-              <a:t>      &lt;geometry&gt;</a:t>
-            </a:r>
-            <a:br/>
-            <a:r>
-              <a:t>        &lt;box size="${body_length} ${body_width} ${body_height}"/&gt;</a:t>
-            </a:r>
-            <a:br/>
-            <a:r>
-              <a:t>      &lt;/geometry&gt;</a:t>
-            </a:r>
-            <a:br/>
-            <a:r>
-              <a:t>    &lt;/collision&gt;</a:t>
             </a:r>
             <a:br/>
             <a:r>
@@ -8817,7 +9075,7 @@
         </p:nvSpPr>
         <p:spPr>
           <a:xfrm>
-            <a:off x="749808" y="6199632"/>
+            <a:off x="749808" y="6181344"/>
             <a:ext cx="10789920" cy="201168"/>
           </a:xfrm>
           <a:prstGeom prst="rect">
@@ -8843,7 +9101,7 @@
               </a:defRPr>
             </a:pPr>
             <a:r>
-              <a:t>파일 전체 4/10 · 이 슬라이드 다음에 같은 파일의 나머지 줄이 이어집니다.</a:t>
+              <a:t>파일 전체 4/11 · 이 슬라이드 다음에 같은 파일의 나머지 줄이 이어집니다.</a:t>
             </a:r>
           </a:p>
         </p:txBody>
@@ -8900,7 +9158,7 @@
               </a:defRPr>
             </a:pPr>
             <a:r>
-              <a:t>파일을 계속 작성하고 저장한다 (5/10)</a:t>
+              <a:t>파일을 계속 작성하고 저장한다 (5/11)</a:t>
             </a:r>
           </a:p>
         </p:txBody>
@@ -9075,7 +9333,7 @@
               </a:defRPr>
             </a:pPr>
             <a:r>
-              <a:t>현재 단계 7/13    |    현재 폴더 ~/agv_ws    |    현재 터미널</a:t>
+              <a:t>현재 단계 7/14    |    현재 폴더 ~/agv_ws    |    현재 터미널</a:t>
             </a:r>
           </a:p>
         </p:txBody>
@@ -9088,8 +9346,8 @@
         </p:nvSpPr>
         <p:spPr>
           <a:xfrm>
-            <a:off x="658368" y="1682496"/>
-            <a:ext cx="10972800" cy="347472"/>
+            <a:off x="658368" y="1627632"/>
+            <a:ext cx="10972800" cy="256032"/>
           </a:xfrm>
           <a:prstGeom prst="rect">
             <a:avLst/>
@@ -9106,7 +9364,7 @@
               <a:spcAft>
                 <a:spcPts val="0"/>
               </a:spcAft>
-              <a:defRPr sz="1700" b="1">
+              <a:defRPr sz="1500" b="1">
                 <a:solidFill>
                   <a:srgbClr val="122C4E"/>
                 </a:solidFill>
@@ -9127,8 +9385,8 @@
         </p:nvSpPr>
         <p:spPr>
           <a:xfrm>
-            <a:off x="658368" y="2103120"/>
-            <a:ext cx="10972800" cy="493776"/>
+            <a:off x="658368" y="1956816"/>
+            <a:ext cx="10972800" cy="603504"/>
           </a:xfrm>
           <a:prstGeom prst="rect">
             <a:avLst/>
@@ -9172,7 +9430,11 @@
               </a:defRPr>
             </a:pPr>
             <a:r>
-              <a:t>파일 생성/열기: mkdir -p ~/agv_ws/src/agv_description/urdf    &amp;&amp;    nano ~/agv_ws/src/agv_description/urdf/agv.urdf.xacro</a:t>
+              <a:t>파일 생성: mkdir -p ~/agv_ws/src/agv_description/urdf</a:t>
+            </a:r>
+            <a:br/>
+            <a:r>
+              <a:t>파일 열기: nano ~/agv_ws/src/agv_description/urdf/agv.urdf.xacro</a:t>
             </a:r>
           </a:p>
         </p:txBody>
@@ -9185,8 +9447,8 @@
         </p:nvSpPr>
         <p:spPr>
           <a:xfrm>
-            <a:off x="658368" y="2761488"/>
-            <a:ext cx="10972800" cy="3383280"/>
+            <a:off x="658368" y="2706624"/>
+            <a:ext cx="10972800" cy="3364992"/>
           </a:xfrm>
           <a:prstGeom prst="rect">
             <a:avLst/>
@@ -9230,6 +9492,38 @@
               </a:defRPr>
             </a:pPr>
             <a:r>
+              <a:t>    &lt;collision&gt;</a:t>
+            </a:r>
+            <a:br/>
+            <a:r>
+              <a:t>      &lt;origin xyz="0 0 ${wheel_radius + body_height/2}"/&gt;</a:t>
+            </a:r>
+            <a:br/>
+            <a:r>
+              <a:t>      &lt;geometry&gt;</a:t>
+            </a:r>
+            <a:br/>
+            <a:r>
+              <a:t>        &lt;box size="${body_length} ${body_width} ${body_height}"/&gt;</a:t>
+            </a:r>
+            <a:br/>
+            <a:r>
+              <a:t>      &lt;/geometry&gt;</a:t>
+            </a:r>
+            <a:br/>
+            <a:r>
+              <a:t>    &lt;/collision&gt;</a:t>
+            </a:r>
+            <a:br/>
+            <a:r>
+              <a:t>    </a:t>
+            </a:r>
+            <a:br/>
+            <a:r>
+              <a:t>    </a:t>
+            </a:r>
+            <a:br/>
+            <a:r>
               <a:t>    &lt;xacro:box_inertia mass="12.0" x="${body_length}" y="${body_width}"</a:t>
             </a:r>
             <a:br/>
@@ -9240,43 +9534,6 @@
             <a:r>
               <a:t>    </a:t>
             </a:r>
-            <a:br/>
-            <a:r>
-              <a:t>  </a:t>
-            </a:r>
-            <a:br/>
-            <a:r>
-              <a:t>  &lt;/link&gt;</a:t>
-            </a:r>
-            <a:br/>
-            <a:r>
-              <a:t>  </a:t>
-            </a:r>
-            <a:br/>
-            <a:r>
-              <a:t>  </a:t>
-            </a:r>
-            <a:br/>
-            <a:r>
-              <a:t>  &lt;joint name="base_footprint_joint" type="fixed"&gt;</a:t>
-            </a:r>
-            <a:br/>
-            <a:r>
-              <a:t>    &lt;parent link="base_footprint"/&gt;</a:t>
-            </a:r>
-            <a:br/>
-            <a:r>
-              <a:t>    &lt;child link="base_link"/&gt;</a:t>
-            </a:r>
-            <a:br/>
-            <a:r>
-              <a:t>  &lt;/joint&gt;</a:t>
-            </a:r>
-            <a:br/>
-            <a:r>
-              <a:t>  </a:t>
-            </a:r>
-            <a:br/>
             <a:br/>
             <a:r>
               <a:t>  </a:t>
@@ -9292,7 +9549,7 @@
         </p:nvSpPr>
         <p:spPr>
           <a:xfrm>
-            <a:off x="749808" y="6199632"/>
+            <a:off x="749808" y="6181344"/>
             <a:ext cx="10789920" cy="201168"/>
           </a:xfrm>
           <a:prstGeom prst="rect">
@@ -9318,7 +9575,7 @@
               </a:defRPr>
             </a:pPr>
             <a:r>
-              <a:t>파일 전체 5/10 · 이 슬라이드 다음에 같은 파일의 나머지 줄이 이어집니다.</a:t>
+              <a:t>파일 전체 5/11 · 이 슬라이드 다음에 같은 파일의 나머지 줄이 이어집니다.</a:t>
             </a:r>
           </a:p>
         </p:txBody>
@@ -9375,7 +9632,7 @@
               </a:defRPr>
             </a:pPr>
             <a:r>
-              <a:t>파일을 계속 작성하고 저장한다 (6/10)</a:t>
+              <a:t>파일을 계속 작성하고 저장한다 (6/11)</a:t>
             </a:r>
           </a:p>
         </p:txBody>
@@ -9550,7 +9807,7 @@
               </a:defRPr>
             </a:pPr>
             <a:r>
-              <a:t>현재 단계 8/13    |    현재 폴더 ~/agv_ws    |    현재 터미널</a:t>
+              <a:t>현재 단계 8/14    |    현재 폴더 ~/agv_ws    |    현재 터미널</a:t>
             </a:r>
           </a:p>
         </p:txBody>
@@ -9563,8 +9820,8 @@
         </p:nvSpPr>
         <p:spPr>
           <a:xfrm>
-            <a:off x="658368" y="1682496"/>
-            <a:ext cx="10972800" cy="347472"/>
+            <a:off x="658368" y="1627632"/>
+            <a:ext cx="10972800" cy="256032"/>
           </a:xfrm>
           <a:prstGeom prst="rect">
             <a:avLst/>
@@ -9581,7 +9838,7 @@
               <a:spcAft>
                 <a:spcPts val="0"/>
               </a:spcAft>
-              <a:defRPr sz="1700" b="1">
+              <a:defRPr sz="1500" b="1">
                 <a:solidFill>
                   <a:srgbClr val="122C4E"/>
                 </a:solidFill>
@@ -9602,8 +9859,8 @@
         </p:nvSpPr>
         <p:spPr>
           <a:xfrm>
-            <a:off x="658368" y="2103120"/>
-            <a:ext cx="10972800" cy="493776"/>
+            <a:off x="658368" y="1956816"/>
+            <a:ext cx="10972800" cy="603504"/>
           </a:xfrm>
           <a:prstGeom prst="rect">
             <a:avLst/>
@@ -9647,7 +9904,11 @@
               </a:defRPr>
             </a:pPr>
             <a:r>
-              <a:t>파일 생성/열기: mkdir -p ~/agv_ws/src/agv_description/urdf    &amp;&amp;    nano ~/agv_ws/src/agv_description/urdf/agv.urdf.xacro</a:t>
+              <a:t>파일 생성: mkdir -p ~/agv_ws/src/agv_description/urdf</a:t>
+            </a:r>
+            <a:br/>
+            <a:r>
+              <a:t>파일 열기: nano ~/agv_ws/src/agv_description/urdf/agv.urdf.xacro</a:t>
             </a:r>
           </a:p>
         </p:txBody>
@@ -9660,8 +9921,8 @@
         </p:nvSpPr>
         <p:spPr>
           <a:xfrm>
-            <a:off x="658368" y="2761488"/>
-            <a:ext cx="10972800" cy="3383280"/>
+            <a:off x="658368" y="2706624"/>
+            <a:ext cx="10972800" cy="3364992"/>
           </a:xfrm>
           <a:prstGeom prst="rect">
             <a:avLst/>
@@ -9705,56 +9966,48 @@
               </a:defRPr>
             </a:pPr>
             <a:r>
+              <a:t>  &lt;/link&gt;</a:t>
+            </a:r>
+            <a:br/>
+            <a:r>
+              <a:t>  </a:t>
+            </a:r>
+            <a:br/>
+            <a:r>
+              <a:t>  </a:t>
+            </a:r>
+            <a:br/>
+            <a:r>
+              <a:t>  &lt;joint name="base_footprint_joint" type="fixed"&gt;</a:t>
+            </a:r>
+            <a:br/>
+            <a:r>
+              <a:t>    &lt;parent link="base_footprint"/&gt;</a:t>
+            </a:r>
+            <a:br/>
+            <a:r>
+              <a:t>    &lt;child link="base_link"/&gt;</a:t>
+            </a:r>
+            <a:br/>
+            <a:r>
+              <a:t>  &lt;/joint&gt;</a:t>
+            </a:r>
+            <a:br/>
+            <a:r>
+              <a:t>  </a:t>
+            </a:r>
+            <a:br/>
+            <a:br/>
+            <a:r>
+              <a:t>  </a:t>
+            </a:r>
+            <a:br/>
+            <a:r>
               <a:t>  &lt;xacro:agv_wheel side="left" y="${wheel_base/2}" radius="${wheel_radius}"</a:t>
             </a:r>
             <a:br/>
             <a:r>
               <a:t>    width="${wheel_width}"/&gt;</a:t>
-            </a:r>
-            <a:br/>
-            <a:r>
-              <a:t>  </a:t>
-            </a:r>
-            <a:br/>
-            <a:r>
-              <a:t>  </a:t>
-            </a:r>
-            <a:br/>
-            <a:r>
-              <a:t>  &lt;xacro:agv_wheel side="right" y="${-wheel_base/2}" radius="${wheel_radius}"</a:t>
-            </a:r>
-            <a:br/>
-            <a:r>
-              <a:t>    width="${wheel_width}"/&gt;</a:t>
-            </a:r>
-            <a:br/>
-            <a:r>
-              <a:t>  </a:t>
-            </a:r>
-            <a:br/>
-            <a:br/>
-            <a:r>
-              <a:t>  </a:t>
-            </a:r>
-            <a:br/>
-            <a:r>
-              <a:t>  &lt;link name="caster_link"&gt;</a:t>
-            </a:r>
-            <a:br/>
-            <a:r>
-              <a:t>    &lt;visual&gt;</a:t>
-            </a:r>
-            <a:br/>
-            <a:r>
-              <a:t>      &lt;geometry&gt;</a:t>
-            </a:r>
-            <a:br/>
-            <a:r>
-              <a:t>        &lt;sphere radius="0.04"/&gt;</a:t>
-            </a:r>
-            <a:br/>
-            <a:r>
-              <a:t>      &lt;/geometry&gt;</a:t>
             </a:r>
           </a:p>
         </p:txBody>
@@ -9767,7 +10020,7 @@
         </p:nvSpPr>
         <p:spPr>
           <a:xfrm>
-            <a:off x="749808" y="6199632"/>
+            <a:off x="749808" y="6181344"/>
             <a:ext cx="10789920" cy="201168"/>
           </a:xfrm>
           <a:prstGeom prst="rect">
@@ -9793,7 +10046,7 @@
               </a:defRPr>
             </a:pPr>
             <a:r>
-              <a:t>파일 전체 6/10 · 이 슬라이드 다음에 같은 파일의 나머지 줄이 이어집니다.</a:t>
+              <a:t>파일 전체 6/11 · 이 슬라이드 다음에 같은 파일의 나머지 줄이 이어집니다.</a:t>
             </a:r>
           </a:p>
         </p:txBody>
@@ -9850,7 +10103,7 @@
               </a:defRPr>
             </a:pPr>
             <a:r>
-              <a:t>파일을 계속 작성하고 저장한다 (7/10)</a:t>
+              <a:t>파일을 계속 작성하고 저장한다 (7/11)</a:t>
             </a:r>
           </a:p>
         </p:txBody>
@@ -10025,7 +10278,7 @@
               </a:defRPr>
             </a:pPr>
             <a:r>
-              <a:t>현재 단계 9/13    |    현재 폴더 ~/agv_ws    |    현재 터미널</a:t>
+              <a:t>현재 단계 9/14    |    현재 폴더 ~/agv_ws    |    현재 터미널</a:t>
             </a:r>
           </a:p>
         </p:txBody>
@@ -10038,8 +10291,8 @@
         </p:nvSpPr>
         <p:spPr>
           <a:xfrm>
-            <a:off x="658368" y="1682496"/>
-            <a:ext cx="10972800" cy="347472"/>
+            <a:off x="658368" y="1627632"/>
+            <a:ext cx="10972800" cy="256032"/>
           </a:xfrm>
           <a:prstGeom prst="rect">
             <a:avLst/>
@@ -10056,7 +10309,7 @@
               <a:spcAft>
                 <a:spcPts val="0"/>
               </a:spcAft>
-              <a:defRPr sz="1700" b="1">
+              <a:defRPr sz="1500" b="1">
                 <a:solidFill>
                   <a:srgbClr val="122C4E"/>
                 </a:solidFill>
@@ -10077,8 +10330,8 @@
         </p:nvSpPr>
         <p:spPr>
           <a:xfrm>
-            <a:off x="658368" y="2103120"/>
-            <a:ext cx="10972800" cy="493776"/>
+            <a:off x="658368" y="1956816"/>
+            <a:ext cx="10972800" cy="603504"/>
           </a:xfrm>
           <a:prstGeom prst="rect">
             <a:avLst/>
@@ -10122,7 +10375,11 @@
               </a:defRPr>
             </a:pPr>
             <a:r>
-              <a:t>파일 생성/열기: mkdir -p ~/agv_ws/src/agv_description/urdf    &amp;&amp;    nano ~/agv_ws/src/agv_description/urdf/agv.urdf.xacro</a:t>
+              <a:t>파일 생성: mkdir -p ~/agv_ws/src/agv_description/urdf</a:t>
+            </a:r>
+            <a:br/>
+            <a:r>
+              <a:t>파일 열기: nano ~/agv_ws/src/agv_description/urdf/agv.urdf.xacro</a:t>
             </a:r>
           </a:p>
         </p:txBody>
@@ -10135,8 +10392,8 @@
         </p:nvSpPr>
         <p:spPr>
           <a:xfrm>
-            <a:off x="658368" y="2761488"/>
-            <a:ext cx="10972800" cy="3383280"/>
+            <a:off x="658368" y="2706624"/>
+            <a:ext cx="10972800" cy="3364992"/>
           </a:xfrm>
           <a:prstGeom prst="rect">
             <a:avLst/>
@@ -10180,15 +10437,36 @@
               </a:defRPr>
             </a:pPr>
             <a:r>
-              <a:t>      &lt;material name="wheel_gray"/&gt;</a:t>
-            </a:r>
-            <a:br/>
-            <a:r>
-              <a:t>    &lt;/visual&gt;</a:t>
-            </a:r>
-            <a:br/>
-            <a:r>
-              <a:t>    &lt;collision&gt;</a:t>
+              <a:t>  </a:t>
+            </a:r>
+            <a:br/>
+            <a:r>
+              <a:t>  </a:t>
+            </a:r>
+            <a:br/>
+            <a:r>
+              <a:t>  &lt;xacro:agv_wheel side="right" y="${-wheel_base/2}" radius="${wheel_radius}"</a:t>
+            </a:r>
+            <a:br/>
+            <a:r>
+              <a:t>    width="${wheel_width}"/&gt;</a:t>
+            </a:r>
+            <a:br/>
+            <a:r>
+              <a:t>  </a:t>
+            </a:r>
+            <a:br/>
+            <a:br/>
+            <a:r>
+              <a:t>  </a:t>
+            </a:r>
+            <a:br/>
+            <a:r>
+              <a:t>  &lt;link name="caster_link"&gt;</a:t>
+            </a:r>
+            <a:br/>
+            <a:r>
+              <a:t>    &lt;visual&gt;</a:t>
             </a:r>
             <a:br/>
             <a:r>
@@ -10201,38 +10479,6 @@
             <a:br/>
             <a:r>
               <a:t>      &lt;/geometry&gt;</a:t>
-            </a:r>
-            <a:br/>
-            <a:r>
-              <a:t>    &lt;/collision&gt;</a:t>
-            </a:r>
-            <a:br/>
-            <a:r>
-              <a:t>    &lt;inertial&gt;</a:t>
-            </a:r>
-            <a:br/>
-            <a:r>
-              <a:t>      &lt;mass value="0.15"/&gt;</a:t>
-            </a:r>
-            <a:br/>
-            <a:r>
-              <a:t>      &lt;inertia ixx="0.0001" ixy="0" ixz="0" iyy="0.0001" iyz="0" izz="0.0001"/&gt;</a:t>
-            </a:r>
-            <a:br/>
-            <a:r>
-              <a:t>    &lt;/inertial&gt;</a:t>
-            </a:r>
-            <a:br/>
-            <a:r>
-              <a:t>  &lt;/link&gt;</a:t>
-            </a:r>
-            <a:br/>
-            <a:r>
-              <a:t>  </a:t>
-            </a:r>
-            <a:br/>
-            <a:r>
-              <a:t>  </a:t>
             </a:r>
           </a:p>
         </p:txBody>
@@ -10245,7 +10491,7 @@
         </p:nvSpPr>
         <p:spPr>
           <a:xfrm>
-            <a:off x="749808" y="6199632"/>
+            <a:off x="749808" y="6181344"/>
             <a:ext cx="10789920" cy="201168"/>
           </a:xfrm>
           <a:prstGeom prst="rect">
@@ -10271,7 +10517,7 @@
               </a:defRPr>
             </a:pPr>
             <a:r>
-              <a:t>파일 전체 7/10 · 이 슬라이드 다음에 같은 파일의 나머지 줄이 이어집니다.</a:t>
+              <a:t>파일 전체 7/11 · 이 슬라이드 다음에 같은 파일의 나머지 줄이 이어집니다.</a:t>
             </a:r>
           </a:p>
         </p:txBody>
@@ -10328,7 +10574,7 @@
               </a:defRPr>
             </a:pPr>
             <a:r>
-              <a:t>파일을 계속 작성하고 저장한다 (8/10)</a:t>
+              <a:t>파일을 계속 작성하고 저장한다 (8/11)</a:t>
             </a:r>
           </a:p>
         </p:txBody>
@@ -10503,7 +10749,7 @@
               </a:defRPr>
             </a:pPr>
             <a:r>
-              <a:t>현재 단계 10/13    |    현재 폴더 ~/agv_ws    |    현재 터미널</a:t>
+              <a:t>현재 단계 10/14    |    현재 폴더 ~/agv_ws    |    현재 터미널</a:t>
             </a:r>
           </a:p>
         </p:txBody>
@@ -10516,8 +10762,8 @@
         </p:nvSpPr>
         <p:spPr>
           <a:xfrm>
-            <a:off x="658368" y="1682496"/>
-            <a:ext cx="10972800" cy="347472"/>
+            <a:off x="658368" y="1627632"/>
+            <a:ext cx="10972800" cy="256032"/>
           </a:xfrm>
           <a:prstGeom prst="rect">
             <a:avLst/>
@@ -10534,7 +10780,7 @@
               <a:spcAft>
                 <a:spcPts val="0"/>
               </a:spcAft>
-              <a:defRPr sz="1700" b="1">
+              <a:defRPr sz="1500" b="1">
                 <a:solidFill>
                   <a:srgbClr val="122C4E"/>
                 </a:solidFill>
@@ -10555,8 +10801,8 @@
         </p:nvSpPr>
         <p:spPr>
           <a:xfrm>
-            <a:off x="658368" y="2103120"/>
-            <a:ext cx="10972800" cy="493776"/>
+            <a:off x="658368" y="1956816"/>
+            <a:ext cx="10972800" cy="603504"/>
           </a:xfrm>
           <a:prstGeom prst="rect">
             <a:avLst/>
@@ -10600,7 +10846,11 @@
               </a:defRPr>
             </a:pPr>
             <a:r>
-              <a:t>파일 생성/열기: mkdir -p ~/agv_ws/src/agv_description/urdf    &amp;&amp;    nano ~/agv_ws/src/agv_description/urdf/agv.urdf.xacro</a:t>
+              <a:t>파일 생성: mkdir -p ~/agv_ws/src/agv_description/urdf</a:t>
+            </a:r>
+            <a:br/>
+            <a:r>
+              <a:t>파일 열기: nano ~/agv_ws/src/agv_description/urdf/agv.urdf.xacro</a:t>
             </a:r>
           </a:p>
         </p:txBody>
@@ -10613,8 +10863,8 @@
         </p:nvSpPr>
         <p:spPr>
           <a:xfrm>
-            <a:off x="658368" y="2761488"/>
-            <a:ext cx="10972800" cy="3383280"/>
+            <a:off x="658368" y="2706624"/>
+            <a:ext cx="10972800" cy="3364992"/>
           </a:xfrm>
           <a:prstGeom prst="rect">
             <a:avLst/>
@@ -10658,56 +10908,51 @@
               </a:defRPr>
             </a:pPr>
             <a:r>
-              <a:t>  &lt;joint name="caster_joint" type="fixed"&gt;</a:t>
-            </a:r>
-            <a:br/>
-            <a:r>
-              <a:t>    &lt;parent link="base_link"/&gt;</a:t>
-            </a:r>
-            <a:br/>
-            <a:r>
-              <a:t>    &lt;child link="caster_link"/&gt;</a:t>
-            </a:r>
-            <a:br/>
-            <a:r>
-              <a:t>    &lt;origin xyz="-0.24 0 0.04"/&gt;</a:t>
-            </a:r>
-            <a:br/>
-            <a:r>
-              <a:t>  &lt;/joint&gt;</a:t>
-            </a:r>
-            <a:br/>
-            <a:r>
-              <a:t>  </a:t>
-            </a:r>
-            <a:br/>
-            <a:br/>
-            <a:r>
-              <a:t>  </a:t>
-            </a:r>
-            <a:br/>
-            <a:r>
-              <a:t>  &lt;xacro:fixed_sensor name="lidar" parent="base_link" xyz="0.12 0 ${wheel_radius +</a:t>
-            </a:r>
-            <a:br/>
-            <a:r>
-              <a:t>    body_height + 0.04}" rpy="0 0 0" size="0.09 0.09 0.05"/&gt;</a:t>
-            </a:r>
-            <a:br/>
-            <a:r>
-              <a:t>  </a:t>
-            </a:r>
-            <a:br/>
-            <a:r>
-              <a:t>  </a:t>
-            </a:r>
-            <a:br/>
-            <a:r>
-              <a:t>  &lt;xacro:fixed_sensor name="camera" parent="base_link" xyz="0.28 0 ${wheel_radius +</a:t>
-            </a:r>
-            <a:br/>
-            <a:r>
-              <a:t>    body_height + 0.04}" rpy="0 0 0" size="0.05 0.08 0.05"/&gt;</a:t>
+              <a:t>      &lt;material name="wheel_gray"/&gt;</a:t>
+            </a:r>
+            <a:br/>
+            <a:r>
+              <a:t>    &lt;/visual&gt;</a:t>
+            </a:r>
+            <a:br/>
+            <a:r>
+              <a:t>    &lt;collision&gt;</a:t>
+            </a:r>
+            <a:br/>
+            <a:r>
+              <a:t>      &lt;geometry&gt;</a:t>
+            </a:r>
+            <a:br/>
+            <a:r>
+              <a:t>        &lt;sphere radius="0.04"/&gt;</a:t>
+            </a:r>
+            <a:br/>
+            <a:r>
+              <a:t>      &lt;/geometry&gt;</a:t>
+            </a:r>
+            <a:br/>
+            <a:r>
+              <a:t>    &lt;/collision&gt;</a:t>
+            </a:r>
+            <a:br/>
+            <a:r>
+              <a:t>    &lt;inertial&gt;</a:t>
+            </a:r>
+            <a:br/>
+            <a:r>
+              <a:t>      &lt;mass value="0.15"/&gt;</a:t>
+            </a:r>
+            <a:br/>
+            <a:r>
+              <a:t>      &lt;inertia ixx="0.0001" ixy="0" ixz="0" iyy="0.0001" iyz="0" izz="0.0001"/&gt;</a:t>
+            </a:r>
+            <a:br/>
+            <a:r>
+              <a:t>    &lt;/inertial&gt;</a:t>
+            </a:r>
+            <a:br/>
+            <a:r>
+              <a:t>  &lt;/link&gt;</a:t>
             </a:r>
           </a:p>
         </p:txBody>
@@ -10720,7 +10965,7 @@
         </p:nvSpPr>
         <p:spPr>
           <a:xfrm>
-            <a:off x="749808" y="6199632"/>
+            <a:off x="749808" y="6181344"/>
             <a:ext cx="10789920" cy="201168"/>
           </a:xfrm>
           <a:prstGeom prst="rect">
@@ -10746,7 +10991,7 @@
               </a:defRPr>
             </a:pPr>
             <a:r>
-              <a:t>파일 전체 8/10 · 이 슬라이드 다음에 같은 파일의 나머지 줄이 이어집니다.</a:t>
+              <a:t>파일 전체 8/11 · 이 슬라이드 다음에 같은 파일의 나머지 줄이 이어집니다.</a:t>
             </a:r>
           </a:p>
         </p:txBody>
@@ -10803,7 +11048,7 @@
               </a:defRPr>
             </a:pPr>
             <a:r>
-              <a:t>파일을 계속 작성하고 저장한다 (9/10)</a:t>
+              <a:t>파일을 계속 작성하고 저장한다 (9/11)</a:t>
             </a:r>
           </a:p>
         </p:txBody>
@@ -10978,7 +11223,7 @@
               </a:defRPr>
             </a:pPr>
             <a:r>
-              <a:t>현재 단계 11/13    |    현재 폴더 ~/agv_ws    |    현재 터미널</a:t>
+              <a:t>현재 단계 11/14    |    현재 폴더 ~/agv_ws    |    현재 터미널</a:t>
             </a:r>
           </a:p>
         </p:txBody>
@@ -10991,8 +11236,8 @@
         </p:nvSpPr>
         <p:spPr>
           <a:xfrm>
-            <a:off x="658368" y="1682496"/>
-            <a:ext cx="10972800" cy="347472"/>
+            <a:off x="658368" y="1627632"/>
+            <a:ext cx="10972800" cy="256032"/>
           </a:xfrm>
           <a:prstGeom prst="rect">
             <a:avLst/>
@@ -11009,7 +11254,7 @@
               <a:spcAft>
                 <a:spcPts val="0"/>
               </a:spcAft>
-              <a:defRPr sz="1700" b="1">
+              <a:defRPr sz="1500" b="1">
                 <a:solidFill>
                   <a:srgbClr val="122C4E"/>
                 </a:solidFill>
@@ -11030,8 +11275,8 @@
         </p:nvSpPr>
         <p:spPr>
           <a:xfrm>
-            <a:off x="658368" y="2103120"/>
-            <a:ext cx="10972800" cy="493776"/>
+            <a:off x="658368" y="1956816"/>
+            <a:ext cx="10972800" cy="603504"/>
           </a:xfrm>
           <a:prstGeom prst="rect">
             <a:avLst/>
@@ -11075,7 +11320,11 @@
               </a:defRPr>
             </a:pPr>
             <a:r>
-              <a:t>파일 생성/열기: mkdir -p ~/agv_ws/src/agv_description/urdf    &amp;&amp;    nano ~/agv_ws/src/agv_description/urdf/agv.urdf.xacro</a:t>
+              <a:t>파일 생성: mkdir -p ~/agv_ws/src/agv_description/urdf</a:t>
+            </a:r>
+            <a:br/>
+            <a:r>
+              <a:t>파일 열기: nano ~/agv_ws/src/agv_description/urdf/agv.urdf.xacro</a:t>
             </a:r>
           </a:p>
         </p:txBody>
@@ -11088,8 +11337,8 @@
         </p:nvSpPr>
         <p:spPr>
           <a:xfrm>
-            <a:off x="658368" y="2761488"/>
-            <a:ext cx="10972800" cy="3383280"/>
+            <a:off x="658368" y="2706624"/>
+            <a:ext cx="10972800" cy="3364992"/>
           </a:xfrm>
           <a:prstGeom prst="rect">
             <a:avLst/>
@@ -11141,51 +11390,40 @@
             </a:r>
             <a:br/>
             <a:r>
-              <a:t>  &lt;link name="camera_optical_frame"/&gt;</a:t>
+              <a:t>  &lt;joint name="caster_joint" type="fixed"&gt;</a:t>
+            </a:r>
+            <a:br/>
+            <a:r>
+              <a:t>    &lt;parent link="base_link"/&gt;</a:t>
+            </a:r>
+            <a:br/>
+            <a:r>
+              <a:t>    &lt;child link="caster_link"/&gt;</a:t>
+            </a:r>
+            <a:br/>
+            <a:r>
+              <a:t>    &lt;origin xyz="-0.24 0 0.04"/&gt;</a:t>
+            </a:r>
+            <a:br/>
+            <a:r>
+              <a:t>  &lt;/joint&gt;</a:t>
             </a:r>
             <a:br/>
             <a:r>
               <a:t>  </a:t>
             </a:r>
             <a:br/>
+            <a:br/>
             <a:r>
               <a:t>  </a:t>
             </a:r>
             <a:br/>
             <a:r>
-              <a:t>  &lt;joint name="camera_optical_joint" type="fixed"&gt;</a:t>
-            </a:r>
-            <a:br/>
-            <a:r>
-              <a:t>    &lt;parent link="camera_link"/&gt;</a:t>
-            </a:r>
-            <a:br/>
-            <a:r>
-              <a:t>    &lt;child link="camera_optical_frame"/&gt;</a:t>
-            </a:r>
-            <a:br/>
-            <a:r>
-              <a:t>    &lt;origin xyz="0 0 0" rpy="-1.5708 0 -1.5708"/&gt;</a:t>
-            </a:r>
-            <a:br/>
-            <a:r>
-              <a:t>  &lt;/joint&gt;</a:t>
-            </a:r>
-            <a:br/>
-            <a:r>
-              <a:t>  </a:t>
-            </a:r>
-            <a:br/>
-            <a:r>
-              <a:t>  </a:t>
-            </a:r>
-            <a:br/>
-            <a:r>
-              <a:t>  &lt;xacro:fixed_sensor name="imu" parent="base_link" xyz="0 0 ${wheel_radius +</a:t>
-            </a:r>
-            <a:br/>
-            <a:r>
-              <a:t>    body_height + 0.02}" rpy="0 0 0" size="0.03 0.03 0.02"/&gt;</a:t>
+              <a:t>  &lt;xacro:fixed_sensor name="lidar" parent="base_link" xyz="0.12 0 ${wheel_radius +</a:t>
+            </a:r>
+            <a:br/>
+            <a:r>
+              <a:t>    body_height + 0.04}" rpy="0 0 0" size="0.09 0.09 0.05"/&gt;</a:t>
             </a:r>
           </a:p>
         </p:txBody>
@@ -11198,7 +11436,7 @@
         </p:nvSpPr>
         <p:spPr>
           <a:xfrm>
-            <a:off x="749808" y="6199632"/>
+            <a:off x="749808" y="6181344"/>
             <a:ext cx="10789920" cy="201168"/>
           </a:xfrm>
           <a:prstGeom prst="rect">
@@ -11224,7 +11462,7 @@
               </a:defRPr>
             </a:pPr>
             <a:r>
-              <a:t>파일 전체 9/10 · 이 슬라이드 다음에 같은 파일의 나머지 줄이 이어집니다.</a:t>
+              <a:t>파일 전체 9/11 · 이 슬라이드 다음에 같은 파일의 나머지 줄이 이어집니다.</a:t>
             </a:r>
           </a:p>
         </p:txBody>
@@ -11281,7 +11519,7 @@
               </a:defRPr>
             </a:pPr>
             <a:r>
-              <a:t>파일을 계속 작성하고 저장한다 (10/10)</a:t>
+              <a:t>파일을 계속 작성하고 저장한다 (10/11)</a:t>
             </a:r>
           </a:p>
         </p:txBody>
@@ -11456,7 +11694,7 @@
               </a:defRPr>
             </a:pPr>
             <a:r>
-              <a:t>현재 단계 12/13    |    현재 폴더 ~/agv_ws    |    현재 터미널</a:t>
+              <a:t>현재 단계 12/14    |    현재 폴더 ~/agv_ws    |    현재 터미널</a:t>
             </a:r>
           </a:p>
         </p:txBody>
@@ -11469,8 +11707,8 @@
         </p:nvSpPr>
         <p:spPr>
           <a:xfrm>
-            <a:off x="658368" y="1682496"/>
-            <a:ext cx="10972800" cy="347472"/>
+            <a:off x="658368" y="1627632"/>
+            <a:ext cx="10972800" cy="256032"/>
           </a:xfrm>
           <a:prstGeom prst="rect">
             <a:avLst/>
@@ -11487,7 +11725,7 @@
               <a:spcAft>
                 <a:spcPts val="0"/>
               </a:spcAft>
-              <a:defRPr sz="1700" b="1">
+              <a:defRPr sz="1500" b="1">
                 <a:solidFill>
                   <a:srgbClr val="122C4E"/>
                 </a:solidFill>
@@ -11508,8 +11746,8 @@
         </p:nvSpPr>
         <p:spPr>
           <a:xfrm>
-            <a:off x="658368" y="2103120"/>
-            <a:ext cx="10972800" cy="493776"/>
+            <a:off x="658368" y="1956816"/>
+            <a:ext cx="10972800" cy="603504"/>
           </a:xfrm>
           <a:prstGeom prst="rect">
             <a:avLst/>
@@ -11553,7 +11791,11 @@
               </a:defRPr>
             </a:pPr>
             <a:r>
-              <a:t>파일 생성/열기: mkdir -p ~/agv_ws/src/agv_description/urdf    &amp;&amp;    nano ~/agv_ws/src/agv_description/urdf/agv.urdf.xacro</a:t>
+              <a:t>파일 생성: mkdir -p ~/agv_ws/src/agv_description/urdf</a:t>
+            </a:r>
+            <a:br/>
+            <a:r>
+              <a:t>파일 열기: nano ~/agv_ws/src/agv_description/urdf/agv.urdf.xacro</a:t>
             </a:r>
           </a:p>
         </p:txBody>
@@ -11566,8 +11808,8 @@
         </p:nvSpPr>
         <p:spPr>
           <a:xfrm>
-            <a:off x="658368" y="2761488"/>
-            <a:ext cx="10972800" cy="3383280"/>
+            <a:off x="658368" y="2706624"/>
+            <a:ext cx="10972800" cy="3364992"/>
           </a:xfrm>
           <a:prstGeom prst="rect">
             <a:avLst/>
@@ -11614,9 +11856,48 @@
               <a:t>  </a:t>
             </a:r>
             <a:br/>
-            <a:br/>
-            <a:r>
-              <a:t>&lt;/robot&gt;</a:t>
+            <a:r>
+              <a:t>  </a:t>
+            </a:r>
+            <a:br/>
+            <a:r>
+              <a:t>  &lt;xacro:fixed_sensor name="camera" parent="base_link" xyz="0.28 0 ${wheel_radius +</a:t>
+            </a:r>
+            <a:br/>
+            <a:r>
+              <a:t>    body_height + 0.04}" rpy="0 0 0" size="0.05 0.08 0.05"/&gt;</a:t>
+            </a:r>
+            <a:br/>
+            <a:r>
+              <a:t>  </a:t>
+            </a:r>
+            <a:br/>
+            <a:r>
+              <a:t>  </a:t>
+            </a:r>
+            <a:br/>
+            <a:r>
+              <a:t>  &lt;link name="camera_optical_frame"/&gt;</a:t>
+            </a:r>
+            <a:br/>
+            <a:r>
+              <a:t>  </a:t>
+            </a:r>
+            <a:br/>
+            <a:r>
+              <a:t>  </a:t>
+            </a:r>
+            <a:br/>
+            <a:r>
+              <a:t>  &lt;joint name="camera_optical_joint" type="fixed"&gt;</a:t>
+            </a:r>
+            <a:br/>
+            <a:r>
+              <a:t>    &lt;parent link="camera_link"/&gt;</a:t>
+            </a:r>
+            <a:br/>
+            <a:r>
+              <a:t>    &lt;child link="camera_optical_frame"/&gt;</a:t>
             </a:r>
           </a:p>
         </p:txBody>
@@ -11629,7 +11910,7 @@
         </p:nvSpPr>
         <p:spPr>
           <a:xfrm>
-            <a:off x="749808" y="6199632"/>
+            <a:off x="749808" y="6181344"/>
             <a:ext cx="10789920" cy="201168"/>
           </a:xfrm>
           <a:prstGeom prst="rect">
@@ -11655,7 +11936,7 @@
               </a:defRPr>
             </a:pPr>
             <a:r>
-              <a:t>파일 전체 10/10 · 이 슬라이드 다음에 같은 파일의 나머지 줄이 이어집니다.</a:t>
+              <a:t>파일 전체 10/11 · 이 슬라이드 다음에 같은 파일의 나머지 줄이 이어집니다.</a:t>
             </a:r>
           </a:p>
         </p:txBody>
@@ -11712,7 +11993,7 @@
               </a:defRPr>
             </a:pPr>
             <a:r>
-              <a:t>파일을 새로 만들고 저장한다 (1/5)</a:t>
+              <a:t>파일을 계속 작성하고 저장한다 (11/11)</a:t>
             </a:r>
           </a:p>
         </p:txBody>
@@ -11751,7 +12032,7 @@
               </a:defRPr>
             </a:pPr>
             <a:r>
-              <a:t>~/agv_ws/src/agv_description/urdf/common.xacro</a:t>
+              <a:t>~/agv_ws/src/agv_description/urdf/agv.urdf.xacro</a:t>
             </a:r>
           </a:p>
         </p:txBody>
@@ -11887,7 +12168,7 @@
               </a:defRPr>
             </a:pPr>
             <a:r>
-              <a:t>현재 단계 13/18    |    현재 폴더 ~/agv_ws    |    현재 터미널</a:t>
+              <a:t>현재 단계 13/14    |    현재 폴더 ~/agv_ws    |    현재 터미널</a:t>
             </a:r>
           </a:p>
         </p:txBody>
@@ -11900,8 +12181,8 @@
         </p:nvSpPr>
         <p:spPr>
           <a:xfrm>
-            <a:off x="658368" y="1682496"/>
-            <a:ext cx="10972800" cy="347472"/>
+            <a:off x="658368" y="1627632"/>
+            <a:ext cx="10972800" cy="256032"/>
           </a:xfrm>
           <a:prstGeom prst="rect">
             <a:avLst/>
@@ -11918,7 +12199,7 @@
               <a:spcAft>
                 <a:spcPts val="0"/>
               </a:spcAft>
-              <a:defRPr sz="1700" b="1">
+              <a:defRPr sz="1500" b="1">
                 <a:solidFill>
                   <a:srgbClr val="122C4E"/>
                 </a:solidFill>
@@ -11939,8 +12220,8 @@
         </p:nvSpPr>
         <p:spPr>
           <a:xfrm>
-            <a:off x="658368" y="2103120"/>
-            <a:ext cx="10972800" cy="493776"/>
+            <a:off x="658368" y="1956816"/>
+            <a:ext cx="10972800" cy="603504"/>
           </a:xfrm>
           <a:prstGeom prst="rect">
             <a:avLst/>
@@ -11984,7 +12265,11 @@
               </a:defRPr>
             </a:pPr>
             <a:r>
-              <a:t>파일 생성/열기: mkdir -p ~/agv_ws/src/agv_description/urdf    &amp;&amp;    nano ~/agv_ws/src/agv_description/urdf/common.xacro</a:t>
+              <a:t>파일 생성: mkdir -p ~/agv_ws/src/agv_description/urdf</a:t>
+            </a:r>
+            <a:br/>
+            <a:r>
+              <a:t>파일 열기: nano ~/agv_ws/src/agv_description/urdf/agv.urdf.xacro</a:t>
             </a:r>
           </a:p>
         </p:txBody>
@@ -11997,8 +12282,8 @@
         </p:nvSpPr>
         <p:spPr>
           <a:xfrm>
-            <a:off x="658368" y="2761488"/>
-            <a:ext cx="10972800" cy="3383280"/>
+            <a:off x="658368" y="2706624"/>
+            <a:ext cx="10972800" cy="3364992"/>
           </a:xfrm>
           <a:prstGeom prst="rect">
             <a:avLst/>
@@ -12042,11 +12327,11 @@
               </a:defRPr>
             </a:pPr>
             <a:r>
-              <a:t>&lt;?xml version="1.0" ?&gt;</a:t>
-            </a:r>
-            <a:br/>
-            <a:r>
-              <a:t>&lt;robot xmlns:xacro="http://www.ros.org/wiki/xacro"&gt;</a:t>
+              <a:t>    &lt;origin xyz="0 0 0" rpy="-1.5708 0 -1.5708"/&gt;</a:t>
+            </a:r>
+            <a:br/>
+            <a:r>
+              <a:t>  &lt;/joint&gt;</a:t>
             </a:r>
             <a:br/>
             <a:r>
@@ -12058,43 +12343,20 @@
             </a:r>
             <a:br/>
             <a:r>
-              <a:t>  &lt;material name="agv_blue"&gt;</a:t>
-            </a:r>
-            <a:br/>
-            <a:r>
-              <a:t>    &lt;color rgba="0.10 0.35 0.80 1.0"/&gt;</a:t>
-            </a:r>
-            <a:br/>
-            <a:r>
-              <a:t>  &lt;/material&gt;</a:t>
+              <a:t>  &lt;xacro:fixed_sensor name="imu" parent="base_link" xyz="0 0 ${wheel_radius +</a:t>
+            </a:r>
+            <a:br/>
+            <a:r>
+              <a:t>    body_height + 0.02}" rpy="0 0 0" size="0.03 0.03 0.02"/&gt;</a:t>
             </a:r>
             <a:br/>
             <a:r>
               <a:t>  </a:t>
             </a:r>
             <a:br/>
-            <a:r>
-              <a:t>  </a:t>
-            </a:r>
-            <a:br/>
-            <a:r>
-              <a:t>  &lt;material name="sensor_black"&gt;</a:t>
-            </a:r>
-            <a:br/>
-            <a:r>
-              <a:t>    &lt;color rgba="0.06 0.06 0.06 1.0"/&gt;</a:t>
-            </a:r>
-            <a:br/>
-            <a:r>
-              <a:t>  &lt;/material&gt;</a:t>
-            </a:r>
-            <a:br/>
-            <a:r>
-              <a:t>  </a:t>
-            </a:r>
-            <a:br/>
-            <a:r>
-              <a:t>  </a:t>
+            <a:br/>
+            <a:r>
+              <a:t>&lt;/robot&gt;</a:t>
             </a:r>
           </a:p>
         </p:txBody>
@@ -12107,7 +12369,7 @@
         </p:nvSpPr>
         <p:spPr>
           <a:xfrm>
-            <a:off x="749808" y="6199632"/>
+            <a:off x="749808" y="6181344"/>
             <a:ext cx="10789920" cy="201168"/>
           </a:xfrm>
           <a:prstGeom prst="rect">
@@ -12133,7 +12395,7 @@
               </a:defRPr>
             </a:pPr>
             <a:r>
-              <a:t>파일 전체 1/5 · 이 슬라이드 다음에 같은 파일의 나머지 줄이 이어집니다.</a:t>
+              <a:t>파일 전체 11/11 · 이 슬라이드 다음에 같은 파일의 나머지 줄이 이어집니다.</a:t>
             </a:r>
           </a:p>
         </p:txBody>
@@ -12651,7 +12913,7 @@
               </a:defRPr>
             </a:pPr>
             <a:r>
-              <a:t>파일을 계속 작성하고 저장한다 (2/5)</a:t>
+              <a:t>파일을 새로 만들고 저장한다 (1/6)</a:t>
             </a:r>
           </a:p>
         </p:txBody>
@@ -12826,7 +13088,7 @@
               </a:defRPr>
             </a:pPr>
             <a:r>
-              <a:t>현재 단계 14/18    |    현재 폴더 ~/agv_ws    |    현재 터미널</a:t>
+              <a:t>현재 단계 14/20    |    현재 폴더 ~/agv_ws    |    현재 터미널</a:t>
             </a:r>
           </a:p>
         </p:txBody>
@@ -12839,8 +13101,8 @@
         </p:nvSpPr>
         <p:spPr>
           <a:xfrm>
-            <a:off x="658368" y="1682496"/>
-            <a:ext cx="10972800" cy="347472"/>
+            <a:off x="658368" y="1627632"/>
+            <a:ext cx="10972800" cy="256032"/>
           </a:xfrm>
           <a:prstGeom prst="rect">
             <a:avLst/>
@@ -12857,7 +13119,7 @@
               <a:spcAft>
                 <a:spcPts val="0"/>
               </a:spcAft>
-              <a:defRPr sz="1700" b="1">
+              <a:defRPr sz="1500" b="1">
                 <a:solidFill>
                   <a:srgbClr val="122C4E"/>
                 </a:solidFill>
@@ -12878,8 +13140,8 @@
         </p:nvSpPr>
         <p:spPr>
           <a:xfrm>
-            <a:off x="658368" y="2103120"/>
-            <a:ext cx="10972800" cy="493776"/>
+            <a:off x="658368" y="1956816"/>
+            <a:ext cx="10972800" cy="603504"/>
           </a:xfrm>
           <a:prstGeom prst="rect">
             <a:avLst/>
@@ -12923,7 +13185,11 @@
               </a:defRPr>
             </a:pPr>
             <a:r>
-              <a:t>파일 생성/열기: mkdir -p ~/agv_ws/src/agv_description/urdf    &amp;&amp;    nano ~/agv_ws/src/agv_description/urdf/common.xacro</a:t>
+              <a:t>파일 생성: mkdir -p ~/agv_ws/src/agv_description/urdf</a:t>
+            </a:r>
+            <a:br/>
+            <a:r>
+              <a:t>파일 열기: nano ~/agv_ws/src/agv_description/urdf/common.xacro</a:t>
             </a:r>
           </a:p>
         </p:txBody>
@@ -12936,8 +13202,8 @@
         </p:nvSpPr>
         <p:spPr>
           <a:xfrm>
-            <a:off x="658368" y="2761488"/>
-            <a:ext cx="10972800" cy="3383280"/>
+            <a:off x="658368" y="2706624"/>
+            <a:ext cx="10972800" cy="3364992"/>
           </a:xfrm>
           <a:prstGeom prst="rect">
             <a:avLst/>
@@ -12981,11 +13247,27 @@
               </a:defRPr>
             </a:pPr>
             <a:r>
-              <a:t>  &lt;material name="wheel_gray"&gt;</a:t>
-            </a:r>
-            <a:br/>
-            <a:r>
-              <a:t>    &lt;color rgba="0.15 0.15 0.15 1.0"/&gt;</a:t>
+              <a:t>&lt;?xml version="1.0" ?&gt;</a:t>
+            </a:r>
+            <a:br/>
+            <a:r>
+              <a:t>&lt;robot xmlns:xacro="http://www.ros.org/wiki/xacro"&gt;</a:t>
+            </a:r>
+            <a:br/>
+            <a:r>
+              <a:t>  </a:t>
+            </a:r>
+            <a:br/>
+            <a:r>
+              <a:t>  </a:t>
+            </a:r>
+            <a:br/>
+            <a:r>
+              <a:t>  &lt;material name="agv_blue"&gt;</a:t>
+            </a:r>
+            <a:br/>
+            <a:r>
+              <a:t>    &lt;color rgba="0.10 0.35 0.80 1.0"/&gt;</a:t>
             </a:r>
             <a:br/>
             <a:r>
@@ -12996,41 +13278,20 @@
               <a:t>  </a:t>
             </a:r>
             <a:br/>
-            <a:br/>
             <a:r>
               <a:t>  </a:t>
             </a:r>
             <a:br/>
             <a:r>
-              <a:t>  &lt;xacro:macro name="box_inertia" params="mass x y z"&gt;</a:t>
-            </a:r>
-            <a:br/>
-            <a:r>
-              <a:t>    </a:t>
-            </a:r>
-            <a:br/>
-            <a:r>
-              <a:t>    </a:t>
-            </a:r>
-            <a:br/>
-            <a:r>
-              <a:t>    &lt;inertial&gt;</a:t>
-            </a:r>
-            <a:br/>
-            <a:r>
-              <a:t>      </a:t>
-            </a:r>
-            <a:br/>
-            <a:r>
-              <a:t>      </a:t>
-            </a:r>
-            <a:br/>
-            <a:r>
-              <a:t>      &lt;mass value="${mass}"/&gt;</a:t>
-            </a:r>
-            <a:br/>
-            <a:r>
-              <a:t>      </a:t>
+              <a:t>  &lt;material name="sensor_black"&gt;</a:t>
+            </a:r>
+            <a:br/>
+            <a:r>
+              <a:t>    &lt;color rgba="0.06 0.06 0.06 1.0"/&gt;</a:t>
+            </a:r>
+            <a:br/>
+            <a:r>
+              <a:t>  &lt;/material&gt;</a:t>
             </a:r>
           </a:p>
         </p:txBody>
@@ -13043,7 +13304,7 @@
         </p:nvSpPr>
         <p:spPr>
           <a:xfrm>
-            <a:off x="749808" y="6199632"/>
+            <a:off x="749808" y="6181344"/>
             <a:ext cx="10789920" cy="201168"/>
           </a:xfrm>
           <a:prstGeom prst="rect">
@@ -13069,7 +13330,7 @@
               </a:defRPr>
             </a:pPr>
             <a:r>
-              <a:t>파일 전체 2/5 · 이 슬라이드 다음에 같은 파일의 나머지 줄이 이어집니다.</a:t>
+              <a:t>파일 전체 1/6 · 이 슬라이드 다음에 같은 파일의 나머지 줄이 이어집니다.</a:t>
             </a:r>
           </a:p>
         </p:txBody>
@@ -13126,7 +13387,7 @@
               </a:defRPr>
             </a:pPr>
             <a:r>
-              <a:t>파일을 계속 작성하고 저장한다 (3/5)</a:t>
+              <a:t>파일을 계속 작성하고 저장한다 (2/6)</a:t>
             </a:r>
           </a:p>
         </p:txBody>
@@ -13301,7 +13562,7 @@
               </a:defRPr>
             </a:pPr>
             <a:r>
-              <a:t>현재 단계 15/18    |    현재 폴더 ~/agv_ws    |    현재 터미널</a:t>
+              <a:t>현재 단계 15/20    |    현재 폴더 ~/agv_ws    |    현재 터미널</a:t>
             </a:r>
           </a:p>
         </p:txBody>
@@ -13314,8 +13575,8 @@
         </p:nvSpPr>
         <p:spPr>
           <a:xfrm>
-            <a:off x="658368" y="1682496"/>
-            <a:ext cx="10972800" cy="347472"/>
+            <a:off x="658368" y="1627632"/>
+            <a:ext cx="10972800" cy="256032"/>
           </a:xfrm>
           <a:prstGeom prst="rect">
             <a:avLst/>
@@ -13332,7 +13593,7 @@
               <a:spcAft>
                 <a:spcPts val="0"/>
               </a:spcAft>
-              <a:defRPr sz="1700" b="1">
+              <a:defRPr sz="1500" b="1">
                 <a:solidFill>
                   <a:srgbClr val="122C4E"/>
                 </a:solidFill>
@@ -13353,8 +13614,8 @@
         </p:nvSpPr>
         <p:spPr>
           <a:xfrm>
-            <a:off x="658368" y="2103120"/>
-            <a:ext cx="10972800" cy="493776"/>
+            <a:off x="658368" y="1956816"/>
+            <a:ext cx="10972800" cy="603504"/>
           </a:xfrm>
           <a:prstGeom prst="rect">
             <a:avLst/>
@@ -13398,7 +13659,11 @@
               </a:defRPr>
             </a:pPr>
             <a:r>
-              <a:t>파일 생성/열기: mkdir -p ~/agv_ws/src/agv_description/urdf    &amp;&amp;    nano ~/agv_ws/src/agv_description/urdf/common.xacro</a:t>
+              <a:t>파일 생성: mkdir -p ~/agv_ws/src/agv_description/urdf</a:t>
+            </a:r>
+            <a:br/>
+            <a:r>
+              <a:t>파일 열기: nano ~/agv_ws/src/agv_description/urdf/common.xacro</a:t>
             </a:r>
           </a:p>
         </p:txBody>
@@ -13411,8 +13676,8 @@
         </p:nvSpPr>
         <p:spPr>
           <a:xfrm>
-            <a:off x="658368" y="2761488"/>
-            <a:ext cx="10972800" cy="3383280"/>
+            <a:off x="658368" y="2706624"/>
+            <a:ext cx="10972800" cy="3364992"/>
           </a:xfrm>
           <a:prstGeom prst="rect">
             <a:avLst/>
@@ -13456,31 +13721,36 @@
               </a:defRPr>
             </a:pPr>
             <a:r>
-              <a:t>      </a:t>
-            </a:r>
-            <a:br/>
-            <a:r>
-              <a:t>      &lt;origin xyz="0 0 0" rpy="0 0 0"/&gt;</a:t>
-            </a:r>
-            <a:br/>
-            <a:r>
-              <a:t>      </a:t>
-            </a:r>
-            <a:br/>
-            <a:r>
-              <a:t>      </a:t>
-            </a:r>
-            <a:br/>
-            <a:r>
-              <a:t>      &lt;inertia ixx="${mass * (y*y + z*z) / 12}" ixy="0" ixz="0" iyy="${mass * (x*x +</a:t>
-            </a:r>
-            <a:br/>
-            <a:r>
-              <a:t>        z*z) / 12}" iyz="0" izz="${mass * (x*x + y*y) / 12}"/&gt;</a:t>
-            </a:r>
-            <a:br/>
-            <a:r>
-              <a:t>      </a:t>
+              <a:t>  </a:t>
+            </a:r>
+            <a:br/>
+            <a:r>
+              <a:t>  </a:t>
+            </a:r>
+            <a:br/>
+            <a:r>
+              <a:t>  &lt;material name="wheel_gray"&gt;</a:t>
+            </a:r>
+            <a:br/>
+            <a:r>
+              <a:t>    &lt;color rgba="0.15 0.15 0.15 1.0"/&gt;</a:t>
+            </a:r>
+            <a:br/>
+            <a:r>
+              <a:t>  &lt;/material&gt;</a:t>
+            </a:r>
+            <a:br/>
+            <a:r>
+              <a:t>  </a:t>
+            </a:r>
+            <a:br/>
+            <a:br/>
+            <a:r>
+              <a:t>  </a:t>
+            </a:r>
+            <a:br/>
+            <a:r>
+              <a:t>  &lt;xacro:macro name="box_inertia" params="mass x y z"&gt;</a:t>
             </a:r>
             <a:br/>
             <a:r>
@@ -13488,25 +13758,12 @@
             </a:r>
             <a:br/>
             <a:r>
-              <a:t>    &lt;/inertial&gt;</a:t>
-            </a:r>
-            <a:br/>
-            <a:r>
               <a:t>    </a:t>
             </a:r>
             <a:br/>
             <a:r>
-              <a:t>  </a:t>
-            </a:r>
-            <a:br/>
-            <a:r>
-              <a:t>  &lt;/xacro:macro&gt;</a:t>
-            </a:r>
-            <a:br/>
-            <a:r>
-              <a:t>  </a:t>
-            </a:r>
-            <a:br/>
+              <a:t>    &lt;inertial&gt;</a:t>
+            </a:r>
           </a:p>
         </p:txBody>
       </p:sp>
@@ -13518,7 +13775,7 @@
         </p:nvSpPr>
         <p:spPr>
           <a:xfrm>
-            <a:off x="749808" y="6199632"/>
+            <a:off x="749808" y="6181344"/>
             <a:ext cx="10789920" cy="201168"/>
           </a:xfrm>
           <a:prstGeom prst="rect">
@@ -13544,7 +13801,7 @@
               </a:defRPr>
             </a:pPr>
             <a:r>
-              <a:t>파일 전체 3/5 · 이 슬라이드 다음에 같은 파일의 나머지 줄이 이어집니다.</a:t>
+              <a:t>파일 전체 2/6 · 이 슬라이드 다음에 같은 파일의 나머지 줄이 이어집니다.</a:t>
             </a:r>
           </a:p>
         </p:txBody>
@@ -13601,7 +13858,7 @@
               </a:defRPr>
             </a:pPr>
             <a:r>
-              <a:t>파일을 계속 작성하고 저장한다 (4/5)</a:t>
+              <a:t>파일을 계속 작성하고 저장한다 (3/6)</a:t>
             </a:r>
           </a:p>
         </p:txBody>
@@ -13776,7 +14033,7 @@
               </a:defRPr>
             </a:pPr>
             <a:r>
-              <a:t>현재 단계 16/18    |    현재 폴더 ~/agv_ws    |    현재 터미널</a:t>
+              <a:t>현재 단계 16/20    |    현재 폴더 ~/agv_ws    |    현재 터미널</a:t>
             </a:r>
           </a:p>
         </p:txBody>
@@ -13789,8 +14046,8 @@
         </p:nvSpPr>
         <p:spPr>
           <a:xfrm>
-            <a:off x="658368" y="1682496"/>
-            <a:ext cx="10972800" cy="347472"/>
+            <a:off x="658368" y="1627632"/>
+            <a:ext cx="10972800" cy="256032"/>
           </a:xfrm>
           <a:prstGeom prst="rect">
             <a:avLst/>
@@ -13807,7 +14064,7 @@
               <a:spcAft>
                 <a:spcPts val="0"/>
               </a:spcAft>
-              <a:defRPr sz="1700" b="1">
+              <a:defRPr sz="1500" b="1">
                 <a:solidFill>
                   <a:srgbClr val="122C4E"/>
                 </a:solidFill>
@@ -13828,8 +14085,8 @@
         </p:nvSpPr>
         <p:spPr>
           <a:xfrm>
-            <a:off x="658368" y="2103120"/>
-            <a:ext cx="10972800" cy="493776"/>
+            <a:off x="658368" y="1956816"/>
+            <a:ext cx="10972800" cy="603504"/>
           </a:xfrm>
           <a:prstGeom prst="rect">
             <a:avLst/>
@@ -13873,7 +14130,11 @@
               </a:defRPr>
             </a:pPr>
             <a:r>
-              <a:t>파일 생성/열기: mkdir -p ~/agv_ws/src/agv_description/urdf    &amp;&amp;    nano ~/agv_ws/src/agv_description/urdf/common.xacro</a:t>
+              <a:t>파일 생성: mkdir -p ~/agv_ws/src/agv_description/urdf</a:t>
+            </a:r>
+            <a:br/>
+            <a:r>
+              <a:t>파일 열기: nano ~/agv_ws/src/agv_description/urdf/common.xacro</a:t>
             </a:r>
           </a:p>
         </p:txBody>
@@ -13886,8 +14147,8 @@
         </p:nvSpPr>
         <p:spPr>
           <a:xfrm>
-            <a:off x="658368" y="2761488"/>
-            <a:ext cx="10972800" cy="3383280"/>
+            <a:off x="658368" y="2706624"/>
+            <a:ext cx="10972800" cy="3364992"/>
           </a:xfrm>
           <a:prstGeom prst="rect">
             <a:avLst/>
@@ -13931,59 +14192,51 @@
               </a:defRPr>
             </a:pPr>
             <a:r>
-              <a:t>  </a:t>
-            </a:r>
-            <a:br/>
-            <a:r>
-              <a:t>  &lt;xacro:macro name="cylinder_inertia" params="mass radius length"&gt;</a:t>
+              <a:t>      </a:t>
+            </a:r>
+            <a:br/>
+            <a:r>
+              <a:t>      </a:t>
+            </a:r>
+            <a:br/>
+            <a:r>
+              <a:t>      &lt;mass value="${mass}"/&gt;</a:t>
+            </a:r>
+            <a:br/>
+            <a:r>
+              <a:t>      </a:t>
+            </a:r>
+            <a:br/>
+            <a:r>
+              <a:t>      </a:t>
+            </a:r>
+            <a:br/>
+            <a:r>
+              <a:t>      &lt;origin xyz="0 0 0" rpy="0 0 0"/&gt;</a:t>
+            </a:r>
+            <a:br/>
+            <a:r>
+              <a:t>      </a:t>
+            </a:r>
+            <a:br/>
+            <a:r>
+              <a:t>      </a:t>
+            </a:r>
+            <a:br/>
+            <a:r>
+              <a:t>      &lt;inertia ixx="${mass * (y*y + z*z) / 12}" ixy="0" ixz="0" iyy="${mass * (x*x +</a:t>
+            </a:r>
+            <a:br/>
+            <a:r>
+              <a:t>        z*z) / 12}" iyz="0" izz="${mass * (x*x + y*y) / 12}"/&gt;</a:t>
+            </a:r>
+            <a:br/>
+            <a:r>
+              <a:t>      </a:t>
             </a:r>
             <a:br/>
             <a:r>
               <a:t>    </a:t>
-            </a:r>
-            <a:br/>
-            <a:r>
-              <a:t>    </a:t>
-            </a:r>
-            <a:br/>
-            <a:r>
-              <a:t>    &lt;inertial&gt;</a:t>
-            </a:r>
-            <a:br/>
-            <a:r>
-              <a:t>      </a:t>
-            </a:r>
-            <a:br/>
-            <a:r>
-              <a:t>      </a:t>
-            </a:r>
-            <a:br/>
-            <a:r>
-              <a:t>      &lt;mass value="${mass}"/&gt;</a:t>
-            </a:r>
-            <a:br/>
-            <a:r>
-              <a:t>      </a:t>
-            </a:r>
-            <a:br/>
-            <a:r>
-              <a:t>      </a:t>
-            </a:r>
-            <a:br/>
-            <a:r>
-              <a:t>      &lt;origin xyz="0 0 0" rpy="0 0 0"/&gt;</a:t>
-            </a:r>
-            <a:br/>
-            <a:r>
-              <a:t>      </a:t>
-            </a:r>
-            <a:br/>
-            <a:r>
-              <a:t>      </a:t>
-            </a:r>
-            <a:br/>
-            <a:r>
-              <a:t>      &lt;inertia ixx="${mass * (3*radius*radius + length*length) / 12}" ixy="0" ixz="0"</a:t>
             </a:r>
           </a:p>
         </p:txBody>
@@ -13996,7 +14249,7 @@
         </p:nvSpPr>
         <p:spPr>
           <a:xfrm>
-            <a:off x="749808" y="6199632"/>
+            <a:off x="749808" y="6181344"/>
             <a:ext cx="10789920" cy="201168"/>
           </a:xfrm>
           <a:prstGeom prst="rect">
@@ -14022,7 +14275,7 @@
               </a:defRPr>
             </a:pPr>
             <a:r>
-              <a:t>파일 전체 4/5 · 이 슬라이드 다음에 같은 파일의 나머지 줄이 이어집니다.</a:t>
+              <a:t>파일 전체 3/6 · 이 슬라이드 다음에 같은 파일의 나머지 줄이 이어집니다.</a:t>
             </a:r>
           </a:p>
         </p:txBody>
@@ -14079,7 +14332,7 @@
               </a:defRPr>
             </a:pPr>
             <a:r>
-              <a:t>파일을 계속 작성하고 저장한다 (5/5)</a:t>
+              <a:t>파일을 계속 작성하고 저장한다 (4/6)</a:t>
             </a:r>
           </a:p>
         </p:txBody>
@@ -14254,7 +14507,7 @@
               </a:defRPr>
             </a:pPr>
             <a:r>
-              <a:t>현재 단계 17/18    |    현재 폴더 ~/agv_ws    |    현재 터미널</a:t>
+              <a:t>현재 단계 17/20    |    현재 폴더 ~/agv_ws    |    현재 터미널</a:t>
             </a:r>
           </a:p>
         </p:txBody>
@@ -14267,8 +14520,8 @@
         </p:nvSpPr>
         <p:spPr>
           <a:xfrm>
-            <a:off x="658368" y="1682496"/>
-            <a:ext cx="10972800" cy="347472"/>
+            <a:off x="658368" y="1627632"/>
+            <a:ext cx="10972800" cy="256032"/>
           </a:xfrm>
           <a:prstGeom prst="rect">
             <a:avLst/>
@@ -14285,7 +14538,7 @@
               <a:spcAft>
                 <a:spcPts val="0"/>
               </a:spcAft>
-              <a:defRPr sz="1700" b="1">
+              <a:defRPr sz="1500" b="1">
                 <a:solidFill>
                   <a:srgbClr val="122C4E"/>
                 </a:solidFill>
@@ -14306,8 +14559,8 @@
         </p:nvSpPr>
         <p:spPr>
           <a:xfrm>
-            <a:off x="658368" y="2103120"/>
-            <a:ext cx="10972800" cy="493776"/>
+            <a:off x="658368" y="1956816"/>
+            <a:ext cx="10972800" cy="603504"/>
           </a:xfrm>
           <a:prstGeom prst="rect">
             <a:avLst/>
@@ -14351,7 +14604,11 @@
               </a:defRPr>
             </a:pPr>
             <a:r>
-              <a:t>파일 생성/열기: mkdir -p ~/agv_ws/src/agv_description/urdf    &amp;&amp;    nano ~/agv_ws/src/agv_description/urdf/common.xacro</a:t>
+              <a:t>파일 생성: mkdir -p ~/agv_ws/src/agv_description/urdf</a:t>
+            </a:r>
+            <a:br/>
+            <a:r>
+              <a:t>파일 열기: nano ~/agv_ws/src/agv_description/urdf/common.xacro</a:t>
             </a:r>
           </a:p>
         </p:txBody>
@@ -14364,8 +14621,8 @@
         </p:nvSpPr>
         <p:spPr>
           <a:xfrm>
-            <a:off x="658368" y="2761488"/>
-            <a:ext cx="10972800" cy="3383280"/>
+            <a:off x="658368" y="2706624"/>
+            <a:ext cx="10972800" cy="3364992"/>
           </a:xfrm>
           <a:prstGeom prst="rect">
             <a:avLst/>
@@ -14409,44 +14666,48 @@
               </a:defRPr>
             </a:pPr>
             <a:r>
-              <a:t>        iyy="${mass * (3*radius*radius + length*length) / 12}" iyz="0" izz="${mass *</a:t>
-            </a:r>
-            <a:br/>
-            <a:r>
-              <a:t>        radius*radius / 2}"/&gt;</a:t>
+              <a:t>    &lt;/inertial&gt;</a:t>
+            </a:r>
+            <a:br/>
+            <a:r>
+              <a:t>    </a:t>
+            </a:r>
+            <a:br/>
+            <a:r>
+              <a:t>  </a:t>
+            </a:r>
+            <a:br/>
+            <a:r>
+              <a:t>  &lt;/xacro:macro&gt;</a:t>
+            </a:r>
+            <a:br/>
+            <a:r>
+              <a:t>  </a:t>
+            </a:r>
+            <a:br/>
+            <a:br/>
+            <a:r>
+              <a:t>  </a:t>
+            </a:r>
+            <a:br/>
+            <a:r>
+              <a:t>  &lt;xacro:macro name="cylinder_inertia" params="mass radius length"&gt;</a:t>
+            </a:r>
+            <a:br/>
+            <a:r>
+              <a:t>    </a:t>
+            </a:r>
+            <a:br/>
+            <a:r>
+              <a:t>    </a:t>
+            </a:r>
+            <a:br/>
+            <a:r>
+              <a:t>    &lt;inertial&gt;</a:t>
             </a:r>
             <a:br/>
             <a:r>
               <a:t>      </a:t>
-            </a:r>
-            <a:br/>
-            <a:r>
-              <a:t>    </a:t>
-            </a:r>
-            <a:br/>
-            <a:r>
-              <a:t>    &lt;/inertial&gt;</a:t>
-            </a:r>
-            <a:br/>
-            <a:r>
-              <a:t>    </a:t>
-            </a:r>
-            <a:br/>
-            <a:r>
-              <a:t>  </a:t>
-            </a:r>
-            <a:br/>
-            <a:r>
-              <a:t>  &lt;/xacro:macro&gt;</a:t>
-            </a:r>
-            <a:br/>
-            <a:r>
-              <a:t>  </a:t>
-            </a:r>
-            <a:br/>
-            <a:br/>
-            <a:r>
-              <a:t>&lt;/robot&gt;</a:t>
             </a:r>
           </a:p>
         </p:txBody>
@@ -14459,7 +14720,7 @@
         </p:nvSpPr>
         <p:spPr>
           <a:xfrm>
-            <a:off x="749808" y="6199632"/>
+            <a:off x="749808" y="6181344"/>
             <a:ext cx="10789920" cy="201168"/>
           </a:xfrm>
           <a:prstGeom prst="rect">
@@ -14485,7 +14746,7 @@
               </a:defRPr>
             </a:pPr>
             <a:r>
-              <a:t>파일 전체 5/5 · 이 슬라이드 다음에 같은 파일의 나머지 줄이 이어집니다.</a:t>
+              <a:t>파일 전체 4/6 · 이 슬라이드 다음에 같은 파일의 나머지 줄이 이어집니다.</a:t>
             </a:r>
           </a:p>
         </p:txBody>
@@ -14542,7 +14803,7 @@
               </a:defRPr>
             </a:pPr>
             <a:r>
-              <a:t>파일을 새로 만들고 저장한다 (1/4)</a:t>
+              <a:t>파일을 계속 작성하고 저장한다 (5/6)</a:t>
             </a:r>
           </a:p>
         </p:txBody>
@@ -14581,7 +14842,7 @@
               </a:defRPr>
             </a:pPr>
             <a:r>
-              <a:t>~/agv_ws/src/agv_description/urdf/wheels.xacro</a:t>
+              <a:t>~/agv_ws/src/agv_description/urdf/common.xacro</a:t>
             </a:r>
           </a:p>
         </p:txBody>
@@ -14717,7 +14978,7 @@
               </a:defRPr>
             </a:pPr>
             <a:r>
-              <a:t>현재 단계 18/22    |    현재 폴더 ~/agv_ws    |    현재 터미널</a:t>
+              <a:t>현재 단계 18/20    |    현재 폴더 ~/agv_ws    |    현재 터미널</a:t>
             </a:r>
           </a:p>
         </p:txBody>
@@ -14730,8 +14991,8 @@
         </p:nvSpPr>
         <p:spPr>
           <a:xfrm>
-            <a:off x="658368" y="1682496"/>
-            <a:ext cx="10972800" cy="347472"/>
+            <a:off x="658368" y="1627632"/>
+            <a:ext cx="10972800" cy="256032"/>
           </a:xfrm>
           <a:prstGeom prst="rect">
             <a:avLst/>
@@ -14748,7 +15009,7 @@
               <a:spcAft>
                 <a:spcPts val="0"/>
               </a:spcAft>
-              <a:defRPr sz="1700" b="1">
+              <a:defRPr sz="1500" b="1">
                 <a:solidFill>
                   <a:srgbClr val="122C4E"/>
                 </a:solidFill>
@@ -14769,8 +15030,8 @@
         </p:nvSpPr>
         <p:spPr>
           <a:xfrm>
-            <a:off x="658368" y="2103120"/>
-            <a:ext cx="10972800" cy="493776"/>
+            <a:off x="658368" y="1956816"/>
+            <a:ext cx="10972800" cy="603504"/>
           </a:xfrm>
           <a:prstGeom prst="rect">
             <a:avLst/>
@@ -14814,7 +15075,11 @@
               </a:defRPr>
             </a:pPr>
             <a:r>
-              <a:t>파일 생성/열기: mkdir -p ~/agv_ws/src/agv_description/urdf    &amp;&amp;    nano ~/agv_ws/src/agv_description/urdf/wheels.xacro</a:t>
+              <a:t>파일 생성: mkdir -p ~/agv_ws/src/agv_description/urdf</a:t>
+            </a:r>
+            <a:br/>
+            <a:r>
+              <a:t>파일 열기: nano ~/agv_ws/src/agv_description/urdf/common.xacro</a:t>
             </a:r>
           </a:p>
         </p:txBody>
@@ -14827,8 +15092,8 @@
         </p:nvSpPr>
         <p:spPr>
           <a:xfrm>
-            <a:off x="658368" y="2761488"/>
-            <a:ext cx="10972800" cy="3383280"/>
+            <a:off x="658368" y="2706624"/>
+            <a:ext cx="10972800" cy="3364992"/>
           </a:xfrm>
           <a:prstGeom prst="rect">
             <a:avLst/>
@@ -14872,59 +15137,51 @@
               </a:defRPr>
             </a:pPr>
             <a:r>
-              <a:t>&lt;?xml version="1.0" ?&gt;</a:t>
-            </a:r>
-            <a:br/>
-            <a:r>
-              <a:t>&lt;robot xmlns:xacro="http://www.ros.org/wiki/xacro"&gt;</a:t>
-            </a:r>
-            <a:br/>
-            <a:r>
-              <a:t>  </a:t>
-            </a:r>
-            <a:br/>
-            <a:r>
-              <a:t>  </a:t>
-            </a:r>
-            <a:br/>
-            <a:r>
-              <a:t>  &lt;xacro:macro name="agv_wheel" params="side y radius width"&gt;</a:t>
+              <a:t>      </a:t>
+            </a:r>
+            <a:br/>
+            <a:r>
+              <a:t>      &lt;mass value="${mass}"/&gt;</a:t>
+            </a:r>
+            <a:br/>
+            <a:r>
+              <a:t>      </a:t>
+            </a:r>
+            <a:br/>
+            <a:r>
+              <a:t>      </a:t>
+            </a:r>
+            <a:br/>
+            <a:r>
+              <a:t>      &lt;origin xyz="0 0 0" rpy="0 0 0"/&gt;</a:t>
+            </a:r>
+            <a:br/>
+            <a:r>
+              <a:t>      </a:t>
+            </a:r>
+            <a:br/>
+            <a:r>
+              <a:t>      </a:t>
+            </a:r>
+            <a:br/>
+            <a:r>
+              <a:t>      &lt;inertia ixx="${mass * (3*radius*radius + length*length) / 12}" ixy="0" ixz="0"</a:t>
+            </a:r>
+            <a:br/>
+            <a:r>
+              <a:t>        iyy="${mass * (3*radius*radius + length*length) / 12}" iyz="0" izz="${mass *</a:t>
+            </a:r>
+            <a:br/>
+            <a:r>
+              <a:t>        radius*radius / 2}"/&gt;</a:t>
+            </a:r>
+            <a:br/>
+            <a:r>
+              <a:t>      </a:t>
             </a:r>
             <a:br/>
             <a:r>
               <a:t>    </a:t>
-            </a:r>
-            <a:br/>
-            <a:r>
-              <a:t>    </a:t>
-            </a:r>
-            <a:br/>
-            <a:r>
-              <a:t>    &lt;link name="${side}_wheel_link"&gt;</a:t>
-            </a:r>
-            <a:br/>
-            <a:r>
-              <a:t>      </a:t>
-            </a:r>
-            <a:br/>
-            <a:r>
-              <a:t>      </a:t>
-            </a:r>
-            <a:br/>
-            <a:r>
-              <a:t>      &lt;visual&gt;</a:t>
-            </a:r>
-            <a:br/>
-            <a:r>
-              <a:t>        &lt;origin xyz="0 0 0" rpy="1.5708 0 0"/&gt;</a:t>
-            </a:r>
-            <a:br/>
-            <a:r>
-              <a:t>        &lt;geometry&gt;</a:t>
-            </a:r>
-            <a:br/>
-            <a:r>
-              <a:t>          &lt;cylinder radius="${radius}" length="${width}"/&gt;</a:t>
             </a:r>
           </a:p>
         </p:txBody>
@@ -14937,7 +15194,7 @@
         </p:nvSpPr>
         <p:spPr>
           <a:xfrm>
-            <a:off x="749808" y="6199632"/>
+            <a:off x="749808" y="6181344"/>
             <a:ext cx="10789920" cy="201168"/>
           </a:xfrm>
           <a:prstGeom prst="rect">
@@ -14963,7 +15220,7 @@
               </a:defRPr>
             </a:pPr>
             <a:r>
-              <a:t>파일 전체 1/4 · 이 슬라이드 다음에 같은 파일의 나머지 줄이 이어집니다.</a:t>
+              <a:t>파일 전체 5/6 · 이 슬라이드 다음에 같은 파일의 나머지 줄이 이어집니다.</a:t>
             </a:r>
           </a:p>
         </p:txBody>
@@ -15020,7 +15277,7 @@
               </a:defRPr>
             </a:pPr>
             <a:r>
-              <a:t>파일을 계속 작성하고 저장한다 (2/4)</a:t>
+              <a:t>파일을 계속 작성하고 저장한다 (6/6)</a:t>
             </a:r>
           </a:p>
         </p:txBody>
@@ -15059,7 +15316,7 @@
               </a:defRPr>
             </a:pPr>
             <a:r>
-              <a:t>~/agv_ws/src/agv_description/urdf/wheels.xacro</a:t>
+              <a:t>~/agv_ws/src/agv_description/urdf/common.xacro</a:t>
             </a:r>
           </a:p>
         </p:txBody>
@@ -15195,7 +15452,7 @@
               </a:defRPr>
             </a:pPr>
             <a:r>
-              <a:t>현재 단계 19/22    |    현재 폴더 ~/agv_ws    |    현재 터미널</a:t>
+              <a:t>현재 단계 19/20    |    현재 폴더 ~/agv_ws    |    현재 터미널</a:t>
             </a:r>
           </a:p>
         </p:txBody>
@@ -15208,8 +15465,8 @@
         </p:nvSpPr>
         <p:spPr>
           <a:xfrm>
-            <a:off x="658368" y="1682496"/>
-            <a:ext cx="10972800" cy="347472"/>
+            <a:off x="658368" y="1627632"/>
+            <a:ext cx="10972800" cy="256032"/>
           </a:xfrm>
           <a:prstGeom prst="rect">
             <a:avLst/>
@@ -15226,7 +15483,7 @@
               <a:spcAft>
                 <a:spcPts val="0"/>
               </a:spcAft>
-              <a:defRPr sz="1700" b="1">
+              <a:defRPr sz="1500" b="1">
                 <a:solidFill>
                   <a:srgbClr val="122C4E"/>
                 </a:solidFill>
@@ -15247,8 +15504,8 @@
         </p:nvSpPr>
         <p:spPr>
           <a:xfrm>
-            <a:off x="658368" y="2103120"/>
-            <a:ext cx="10972800" cy="493776"/>
+            <a:off x="658368" y="1956816"/>
+            <a:ext cx="10972800" cy="603504"/>
           </a:xfrm>
           <a:prstGeom prst="rect">
             <a:avLst/>
@@ -15292,7 +15549,11 @@
               </a:defRPr>
             </a:pPr>
             <a:r>
-              <a:t>파일 생성/열기: mkdir -p ~/agv_ws/src/agv_description/urdf    &amp;&amp;    nano ~/agv_ws/src/agv_description/urdf/wheels.xacro</a:t>
+              <a:t>파일 생성: mkdir -p ~/agv_ws/src/agv_description/urdf</a:t>
+            </a:r>
+            <a:br/>
+            <a:r>
+              <a:t>파일 열기: nano ~/agv_ws/src/agv_description/urdf/common.xacro</a:t>
             </a:r>
           </a:p>
         </p:txBody>
@@ -15305,8 +15566,8 @@
         </p:nvSpPr>
         <p:spPr>
           <a:xfrm>
-            <a:off x="658368" y="2761488"/>
-            <a:ext cx="10972800" cy="3383280"/>
+            <a:off x="658368" y="2706624"/>
+            <a:ext cx="10972800" cy="3364992"/>
           </a:xfrm>
           <a:prstGeom prst="rect">
             <a:avLst/>
@@ -15350,59 +15611,28 @@
               </a:defRPr>
             </a:pPr>
             <a:r>
-              <a:t>        &lt;/geometry&gt;</a:t>
-            </a:r>
-            <a:br/>
-            <a:r>
-              <a:t>        &lt;material name="wheel_gray"/&gt;</a:t>
-            </a:r>
-            <a:br/>
-            <a:r>
-              <a:t>      &lt;/visual&gt;</a:t>
-            </a:r>
-            <a:br/>
-            <a:r>
-              <a:t>      </a:t>
-            </a:r>
-            <a:br/>
-            <a:r>
-              <a:t>      </a:t>
-            </a:r>
-            <a:br/>
-            <a:r>
-              <a:t>      &lt;collision&gt;</a:t>
-            </a:r>
-            <a:br/>
-            <a:r>
-              <a:t>        &lt;origin xyz="0 0 0" rpy="1.5708 0 0"/&gt;</a:t>
-            </a:r>
-            <a:br/>
-            <a:r>
-              <a:t>        &lt;geometry&gt;</a:t>
-            </a:r>
-            <a:br/>
-            <a:r>
-              <a:t>          &lt;cylinder radius="${radius}" length="${width}"/&gt;</a:t>
-            </a:r>
-            <a:br/>
-            <a:r>
-              <a:t>        &lt;/geometry&gt;</a:t>
-            </a:r>
-            <a:br/>
-            <a:r>
-              <a:t>      &lt;/collision&gt;</a:t>
-            </a:r>
-            <a:br/>
-            <a:r>
-              <a:t>      </a:t>
-            </a:r>
-            <a:br/>
-            <a:r>
-              <a:t>      </a:t>
-            </a:r>
-            <a:br/>
-            <a:r>
-              <a:t>      &lt;xacro:cylinder_inertia mass="0.6" radius="${radius}" length="${width}"/&gt;</a:t>
+              <a:t>    &lt;/inertial&gt;</a:t>
+            </a:r>
+            <a:br/>
+            <a:r>
+              <a:t>    </a:t>
+            </a:r>
+            <a:br/>
+            <a:r>
+              <a:t>  </a:t>
+            </a:r>
+            <a:br/>
+            <a:r>
+              <a:t>  &lt;/xacro:macro&gt;</a:t>
+            </a:r>
+            <a:br/>
+            <a:r>
+              <a:t>  </a:t>
+            </a:r>
+            <a:br/>
+            <a:br/>
+            <a:r>
+              <a:t>&lt;/robot&gt;</a:t>
             </a:r>
           </a:p>
         </p:txBody>
@@ -15415,7 +15645,7 @@
         </p:nvSpPr>
         <p:spPr>
           <a:xfrm>
-            <a:off x="749808" y="6199632"/>
+            <a:off x="749808" y="6181344"/>
             <a:ext cx="10789920" cy="201168"/>
           </a:xfrm>
           <a:prstGeom prst="rect">
@@ -15441,7 +15671,7 @@
               </a:defRPr>
             </a:pPr>
             <a:r>
-              <a:t>파일 전체 2/4 · 이 슬라이드 다음에 같은 파일의 나머지 줄이 이어집니다.</a:t>
+              <a:t>파일 전체 6/6 · 이 슬라이드 다음에 같은 파일의 나머지 줄이 이어집니다.</a:t>
             </a:r>
           </a:p>
         </p:txBody>
@@ -15498,7 +15728,7 @@
               </a:defRPr>
             </a:pPr>
             <a:r>
-              <a:t>파일을 계속 작성하고 저장한다 (3/4)</a:t>
+              <a:t>파일을 새로 만들고 저장한다 (1/5)</a:t>
             </a:r>
           </a:p>
         </p:txBody>
@@ -15673,7 +15903,7 @@
               </a:defRPr>
             </a:pPr>
             <a:r>
-              <a:t>현재 단계 20/22    |    현재 폴더 ~/agv_ws    |    현재 터미널</a:t>
+              <a:t>현재 단계 20/25    |    현재 폴더 ~/agv_ws    |    현재 터미널</a:t>
             </a:r>
           </a:p>
         </p:txBody>
@@ -15686,8 +15916,8 @@
         </p:nvSpPr>
         <p:spPr>
           <a:xfrm>
-            <a:off x="658368" y="1682496"/>
-            <a:ext cx="10972800" cy="347472"/>
+            <a:off x="658368" y="1627632"/>
+            <a:ext cx="10972800" cy="256032"/>
           </a:xfrm>
           <a:prstGeom prst="rect">
             <a:avLst/>
@@ -15704,7 +15934,7 @@
               <a:spcAft>
                 <a:spcPts val="0"/>
               </a:spcAft>
-              <a:defRPr sz="1700" b="1">
+              <a:defRPr sz="1500" b="1">
                 <a:solidFill>
                   <a:srgbClr val="122C4E"/>
                 </a:solidFill>
@@ -15725,8 +15955,8 @@
         </p:nvSpPr>
         <p:spPr>
           <a:xfrm>
-            <a:off x="658368" y="2103120"/>
-            <a:ext cx="10972800" cy="493776"/>
+            <a:off x="658368" y="1956816"/>
+            <a:ext cx="10972800" cy="603504"/>
           </a:xfrm>
           <a:prstGeom prst="rect">
             <a:avLst/>
@@ -15770,7 +16000,11 @@
               </a:defRPr>
             </a:pPr>
             <a:r>
-              <a:t>파일 생성/열기: mkdir -p ~/agv_ws/src/agv_description/urdf    &amp;&amp;    nano ~/agv_ws/src/agv_description/urdf/wheels.xacro</a:t>
+              <a:t>파일 생성: mkdir -p ~/agv_ws/src/agv_description/urdf</a:t>
+            </a:r>
+            <a:br/>
+            <a:r>
+              <a:t>파일 열기: nano ~/agv_ws/src/agv_description/urdf/wheels.xacro</a:t>
             </a:r>
           </a:p>
         </p:txBody>
@@ -15783,8 +16017,8 @@
         </p:nvSpPr>
         <p:spPr>
           <a:xfrm>
-            <a:off x="658368" y="2761488"/>
-            <a:ext cx="10972800" cy="3383280"/>
+            <a:off x="658368" y="2706624"/>
+            <a:ext cx="10972800" cy="3364992"/>
           </a:xfrm>
           <a:prstGeom prst="rect">
             <a:avLst/>
@@ -15828,59 +16062,51 @@
               </a:defRPr>
             </a:pPr>
             <a:r>
+              <a:t>&lt;?xml version="1.0" ?&gt;</a:t>
+            </a:r>
+            <a:br/>
+            <a:r>
+              <a:t>&lt;robot xmlns:xacro="http://www.ros.org/wiki/xacro"&gt;</a:t>
+            </a:r>
+            <a:br/>
+            <a:r>
+              <a:t>  </a:t>
+            </a:r>
+            <a:br/>
+            <a:r>
+              <a:t>  </a:t>
+            </a:r>
+            <a:br/>
+            <a:r>
+              <a:t>  &lt;xacro:macro name="agv_wheel" params="side y radius width"&gt;</a:t>
+            </a:r>
+            <a:br/>
+            <a:r>
+              <a:t>    </a:t>
+            </a:r>
+            <a:br/>
+            <a:r>
+              <a:t>    </a:t>
+            </a:r>
+            <a:br/>
+            <a:r>
+              <a:t>    &lt;link name="${side}_wheel_link"&gt;</a:t>
+            </a:r>
+            <a:br/>
+            <a:r>
               <a:t>      </a:t>
             </a:r>
             <a:br/>
             <a:r>
-              <a:t>    </a:t>
-            </a:r>
-            <a:br/>
-            <a:r>
-              <a:t>    &lt;/link&gt;</a:t>
-            </a:r>
-            <a:br/>
-            <a:r>
-              <a:t>    </a:t>
-            </a:r>
-            <a:br/>
-            <a:r>
-              <a:t>    </a:t>
-            </a:r>
-            <a:br/>
-            <a:r>
-              <a:t>    &lt;joint name="${side}_wheel_joint" type="continuous"&gt;</a:t>
-            </a:r>
-            <a:br/>
-            <a:r>
               <a:t>      </a:t>
             </a:r>
             <a:br/>
             <a:r>
-              <a:t>      </a:t>
-            </a:r>
-            <a:br/>
-            <a:r>
-              <a:t>      &lt;parent link="base_link"/&gt;</a:t>
-            </a:r>
-            <a:br/>
-            <a:r>
-              <a:t>      &lt;child link="${side}_wheel_link"/&gt;</a:t>
-            </a:r>
-            <a:br/>
-            <a:r>
-              <a:t>      </a:t>
-            </a:r>
-            <a:br/>
-            <a:r>
-              <a:t>      </a:t>
-            </a:r>
-            <a:br/>
-            <a:r>
-              <a:t>      &lt;origin xyz="0 ${y} ${radius}" rpy="0 0 0"/&gt;</a:t>
-            </a:r>
-            <a:br/>
-            <a:r>
-              <a:t>      &lt;axis xyz="0 1 0"/&gt;</a:t>
+              <a:t>      &lt;visual&gt;</a:t>
+            </a:r>
+            <a:br/>
+            <a:r>
+              <a:t>        &lt;origin xyz="0 0 0" rpy="1.5708 0 0"/&gt;</a:t>
             </a:r>
           </a:p>
         </p:txBody>
@@ -15893,7 +16119,7 @@
         </p:nvSpPr>
         <p:spPr>
           <a:xfrm>
-            <a:off x="749808" y="6199632"/>
+            <a:off x="749808" y="6181344"/>
             <a:ext cx="10789920" cy="201168"/>
           </a:xfrm>
           <a:prstGeom prst="rect">
@@ -15919,7 +16145,7 @@
               </a:defRPr>
             </a:pPr>
             <a:r>
-              <a:t>파일 전체 3/4 · 이 슬라이드 다음에 같은 파일의 나머지 줄이 이어집니다.</a:t>
+              <a:t>파일 전체 1/5 · 이 슬라이드 다음에 같은 파일의 나머지 줄이 이어집니다.</a:t>
             </a:r>
           </a:p>
         </p:txBody>
@@ -15976,7 +16202,7 @@
               </a:defRPr>
             </a:pPr>
             <a:r>
-              <a:t>파일을 계속 작성하고 저장한다 (4/4)</a:t>
+              <a:t>파일을 계속 작성하고 저장한다 (2/5)</a:t>
             </a:r>
           </a:p>
         </p:txBody>
@@ -16151,7 +16377,7 @@
               </a:defRPr>
             </a:pPr>
             <a:r>
-              <a:t>현재 단계 21/22    |    현재 폴더 ~/agv_ws    |    현재 터미널</a:t>
+              <a:t>현재 단계 21/25    |    현재 폴더 ~/agv_ws    |    현재 터미널</a:t>
             </a:r>
           </a:p>
         </p:txBody>
@@ -16164,8 +16390,8 @@
         </p:nvSpPr>
         <p:spPr>
           <a:xfrm>
-            <a:off x="658368" y="1682496"/>
-            <a:ext cx="10972800" cy="347472"/>
+            <a:off x="658368" y="1627632"/>
+            <a:ext cx="10972800" cy="256032"/>
           </a:xfrm>
           <a:prstGeom prst="rect">
             <a:avLst/>
@@ -16182,7 +16408,7 @@
               <a:spcAft>
                 <a:spcPts val="0"/>
               </a:spcAft>
-              <a:defRPr sz="1700" b="1">
+              <a:defRPr sz="1500" b="1">
                 <a:solidFill>
                   <a:srgbClr val="122C4E"/>
                 </a:solidFill>
@@ -16203,8 +16429,8 @@
         </p:nvSpPr>
         <p:spPr>
           <a:xfrm>
-            <a:off x="658368" y="2103120"/>
-            <a:ext cx="10972800" cy="493776"/>
+            <a:off x="658368" y="1956816"/>
+            <a:ext cx="10972800" cy="603504"/>
           </a:xfrm>
           <a:prstGeom prst="rect">
             <a:avLst/>
@@ -16248,7 +16474,11 @@
               </a:defRPr>
             </a:pPr>
             <a:r>
-              <a:t>파일 생성/열기: mkdir -p ~/agv_ws/src/agv_description/urdf    &amp;&amp;    nano ~/agv_ws/src/agv_description/urdf/wheels.xacro</a:t>
+              <a:t>파일 생성: mkdir -p ~/agv_ws/src/agv_description/urdf</a:t>
+            </a:r>
+            <a:br/>
+            <a:r>
+              <a:t>파일 열기: nano ~/agv_ws/src/agv_description/urdf/wheels.xacro</a:t>
             </a:r>
           </a:p>
         </p:txBody>
@@ -16261,8 +16491,8 @@
         </p:nvSpPr>
         <p:spPr>
           <a:xfrm>
-            <a:off x="658368" y="2761488"/>
-            <a:ext cx="10972800" cy="3383280"/>
+            <a:off x="658368" y="2706624"/>
+            <a:ext cx="10972800" cy="3364992"/>
           </a:xfrm>
           <a:prstGeom prst="rect">
             <a:avLst/>
@@ -16306,36 +16536,51 @@
               </a:defRPr>
             </a:pPr>
             <a:r>
+              <a:t>        &lt;geometry&gt;</a:t>
+            </a:r>
+            <a:br/>
+            <a:r>
+              <a:t>          &lt;cylinder radius="${radius}" length="${width}"/&gt;</a:t>
+            </a:r>
+            <a:br/>
+            <a:r>
+              <a:t>        &lt;/geometry&gt;</a:t>
+            </a:r>
+            <a:br/>
+            <a:r>
+              <a:t>        &lt;material name="wheel_gray"/&gt;</a:t>
+            </a:r>
+            <a:br/>
+            <a:r>
+              <a:t>      &lt;/visual&gt;</a:t>
+            </a:r>
+            <a:br/>
+            <a:r>
               <a:t>      </a:t>
             </a:r>
             <a:br/>
             <a:r>
-              <a:t>    </a:t>
-            </a:r>
-            <a:br/>
-            <a:r>
-              <a:t>    &lt;/joint&gt;</a:t>
-            </a:r>
-            <a:br/>
-            <a:r>
-              <a:t>    </a:t>
-            </a:r>
-            <a:br/>
-            <a:r>
-              <a:t>  </a:t>
-            </a:r>
-            <a:br/>
-            <a:r>
-              <a:t>  &lt;/xacro:macro&gt;</a:t>
-            </a:r>
-            <a:br/>
-            <a:r>
-              <a:t>  </a:t>
-            </a:r>
-            <a:br/>
-            <a:br/>
-            <a:r>
-              <a:t>&lt;/robot&gt;</a:t>
+              <a:t>      </a:t>
+            </a:r>
+            <a:br/>
+            <a:r>
+              <a:t>      &lt;collision&gt;</a:t>
+            </a:r>
+            <a:br/>
+            <a:r>
+              <a:t>        &lt;origin xyz="0 0 0" rpy="1.5708 0 0"/&gt;</a:t>
+            </a:r>
+            <a:br/>
+            <a:r>
+              <a:t>        &lt;geometry&gt;</a:t>
+            </a:r>
+            <a:br/>
+            <a:r>
+              <a:t>          &lt;cylinder radius="${radius}" length="${width}"/&gt;</a:t>
+            </a:r>
+            <a:br/>
+            <a:r>
+              <a:t>        &lt;/geometry&gt;</a:t>
             </a:r>
           </a:p>
         </p:txBody>
@@ -16348,7 +16593,7 @@
         </p:nvSpPr>
         <p:spPr>
           <a:xfrm>
-            <a:off x="749808" y="6199632"/>
+            <a:off x="749808" y="6181344"/>
             <a:ext cx="10789920" cy="201168"/>
           </a:xfrm>
           <a:prstGeom prst="rect">
@@ -16374,7 +16619,7 @@
               </a:defRPr>
             </a:pPr>
             <a:r>
-              <a:t>파일 전체 4/4 · 이 슬라이드 다음에 같은 파일의 나머지 줄이 이어집니다.</a:t>
+              <a:t>파일 전체 2/5 · 이 슬라이드 다음에 같은 파일의 나머지 줄이 이어집니다.</a:t>
             </a:r>
           </a:p>
         </p:txBody>
@@ -16431,7 +16676,7 @@
               </a:defRPr>
             </a:pPr>
             <a:r>
-              <a:t>파일을 새로 만들고 저장한다 (1/4)</a:t>
+              <a:t>파일을 계속 작성하고 저장한다 (3/5)</a:t>
             </a:r>
           </a:p>
         </p:txBody>
@@ -16470,7 +16715,7 @@
               </a:defRPr>
             </a:pPr>
             <a:r>
-              <a:t>~/agv_ws/src/agv_description/urdf/sensors.xacro</a:t>
+              <a:t>~/agv_ws/src/agv_description/urdf/wheels.xacro</a:t>
             </a:r>
           </a:p>
         </p:txBody>
@@ -16606,7 +16851,7 @@
               </a:defRPr>
             </a:pPr>
             <a:r>
-              <a:t>현재 단계 22/26    |    현재 폴더 ~/agv_ws    |    현재 터미널</a:t>
+              <a:t>현재 단계 22/25    |    현재 폴더 ~/agv_ws    |    현재 터미널</a:t>
             </a:r>
           </a:p>
         </p:txBody>
@@ -16619,8 +16864,8 @@
         </p:nvSpPr>
         <p:spPr>
           <a:xfrm>
-            <a:off x="658368" y="1682496"/>
-            <a:ext cx="10972800" cy="347472"/>
+            <a:off x="658368" y="1627632"/>
+            <a:ext cx="10972800" cy="256032"/>
           </a:xfrm>
           <a:prstGeom prst="rect">
             <a:avLst/>
@@ -16637,7 +16882,7 @@
               <a:spcAft>
                 <a:spcPts val="0"/>
               </a:spcAft>
-              <a:defRPr sz="1700" b="1">
+              <a:defRPr sz="1500" b="1">
                 <a:solidFill>
                   <a:srgbClr val="122C4E"/>
                 </a:solidFill>
@@ -16658,8 +16903,8 @@
         </p:nvSpPr>
         <p:spPr>
           <a:xfrm>
-            <a:off x="658368" y="2103120"/>
-            <a:ext cx="10972800" cy="493776"/>
+            <a:off x="658368" y="1956816"/>
+            <a:ext cx="10972800" cy="603504"/>
           </a:xfrm>
           <a:prstGeom prst="rect">
             <a:avLst/>
@@ -16703,7 +16948,11 @@
               </a:defRPr>
             </a:pPr>
             <a:r>
-              <a:t>파일 생성/열기: mkdir -p ~/agv_ws/src/agv_description/urdf    &amp;&amp;    nano ~/agv_ws/src/agv_description/urdf/sensors.xacro</a:t>
+              <a:t>파일 생성: mkdir -p ~/agv_ws/src/agv_description/urdf</a:t>
+            </a:r>
+            <a:br/>
+            <a:r>
+              <a:t>파일 열기: nano ~/agv_ws/src/agv_description/urdf/wheels.xacro</a:t>
             </a:r>
           </a:p>
         </p:txBody>
@@ -16716,8 +16965,8 @@
         </p:nvSpPr>
         <p:spPr>
           <a:xfrm>
-            <a:off x="658368" y="2761488"/>
-            <a:ext cx="10972800" cy="3383280"/>
+            <a:off x="658368" y="2706624"/>
+            <a:ext cx="10972800" cy="3364992"/>
           </a:xfrm>
           <a:prstGeom prst="rect">
             <a:avLst/>
@@ -16761,23 +17010,23 @@
               </a:defRPr>
             </a:pPr>
             <a:r>
-              <a:t>&lt;?xml version="1.0" ?&gt;</a:t>
-            </a:r>
-            <a:br/>
-            <a:r>
-              <a:t>&lt;robot xmlns:xacro="http://www.ros.org/wiki/xacro"&gt;</a:t>
-            </a:r>
-            <a:br/>
-            <a:r>
-              <a:t>  </a:t>
-            </a:r>
-            <a:br/>
-            <a:r>
-              <a:t>  </a:t>
-            </a:r>
-            <a:br/>
-            <a:r>
-              <a:t>  &lt;xacro:macro name="fixed_sensor" params="name parent xyz rpy size"&gt;</a:t>
+              <a:t>      &lt;/collision&gt;</a:t>
+            </a:r>
+            <a:br/>
+            <a:r>
+              <a:t>      </a:t>
+            </a:r>
+            <a:br/>
+            <a:r>
+              <a:t>      </a:t>
+            </a:r>
+            <a:br/>
+            <a:r>
+              <a:t>      &lt;xacro:cylinder_inertia mass="0.6" radius="${radius}" length="${width}"/&gt;</a:t>
+            </a:r>
+            <a:br/>
+            <a:r>
+              <a:t>      </a:t>
             </a:r>
             <a:br/>
             <a:r>
@@ -16785,11 +17034,19 @@
             </a:r>
             <a:br/>
             <a:r>
+              <a:t>    &lt;/link&gt;</a:t>
+            </a:r>
+            <a:br/>
+            <a:r>
               <a:t>    </a:t>
             </a:r>
             <a:br/>
             <a:r>
-              <a:t>    &lt;link name="${name}_link"&gt;</a:t>
+              <a:t>    </a:t>
+            </a:r>
+            <a:br/>
+            <a:r>
+              <a:t>    &lt;joint name="${side}_wheel_joint" type="continuous"&gt;</a:t>
             </a:r>
             <a:br/>
             <a:r>
@@ -16798,22 +17055,6 @@
             <a:br/>
             <a:r>
               <a:t>      </a:t>
-            </a:r>
-            <a:br/>
-            <a:r>
-              <a:t>      &lt;visual&gt;</a:t>
-            </a:r>
-            <a:br/>
-            <a:r>
-              <a:t>        &lt;geometry&gt;</a:t>
-            </a:r>
-            <a:br/>
-            <a:r>
-              <a:t>          &lt;box size="${size}"/&gt;</a:t>
-            </a:r>
-            <a:br/>
-            <a:r>
-              <a:t>        &lt;/geometry&gt;</a:t>
             </a:r>
           </a:p>
         </p:txBody>
@@ -16826,7 +17067,7 @@
         </p:nvSpPr>
         <p:spPr>
           <a:xfrm>
-            <a:off x="749808" y="6199632"/>
+            <a:off x="749808" y="6181344"/>
             <a:ext cx="10789920" cy="201168"/>
           </a:xfrm>
           <a:prstGeom prst="rect">
@@ -16852,7 +17093,7 @@
               </a:defRPr>
             </a:pPr>
             <a:r>
-              <a:t>파일 전체 1/4 · 이 슬라이드 다음에 같은 파일의 나머지 줄이 이어집니다.</a:t>
+              <a:t>파일 전체 3/5 · 이 슬라이드 다음에 같은 파일의 나머지 줄이 이어집니다.</a:t>
             </a:r>
           </a:p>
         </p:txBody>
@@ -16909,7 +17150,7 @@
               </a:defRPr>
             </a:pPr>
             <a:r>
-              <a:t>파일을 계속 작성하고 저장한다 (2/4)</a:t>
+              <a:t>파일을 계속 작성하고 저장한다 (4/5)</a:t>
             </a:r>
           </a:p>
         </p:txBody>
@@ -16948,7 +17189,7 @@
               </a:defRPr>
             </a:pPr>
             <a:r>
-              <a:t>~/agv_ws/src/agv_description/urdf/sensors.xacro</a:t>
+              <a:t>~/agv_ws/src/agv_description/urdf/wheels.xacro</a:t>
             </a:r>
           </a:p>
         </p:txBody>
@@ -17084,7 +17325,7 @@
               </a:defRPr>
             </a:pPr>
             <a:r>
-              <a:t>현재 단계 23/26    |    현재 폴더 ~/agv_ws    |    현재 터미널</a:t>
+              <a:t>현재 단계 23/25    |    현재 폴더 ~/agv_ws    |    현재 터미널</a:t>
             </a:r>
           </a:p>
         </p:txBody>
@@ -17097,8 +17338,8 @@
         </p:nvSpPr>
         <p:spPr>
           <a:xfrm>
-            <a:off x="658368" y="1682496"/>
-            <a:ext cx="10972800" cy="347472"/>
+            <a:off x="658368" y="1627632"/>
+            <a:ext cx="10972800" cy="256032"/>
           </a:xfrm>
           <a:prstGeom prst="rect">
             <a:avLst/>
@@ -17115,7 +17356,7 @@
               <a:spcAft>
                 <a:spcPts val="0"/>
               </a:spcAft>
-              <a:defRPr sz="1700" b="1">
+              <a:defRPr sz="1500" b="1">
                 <a:solidFill>
                   <a:srgbClr val="122C4E"/>
                 </a:solidFill>
@@ -17136,8 +17377,8 @@
         </p:nvSpPr>
         <p:spPr>
           <a:xfrm>
-            <a:off x="658368" y="2103120"/>
-            <a:ext cx="10972800" cy="493776"/>
+            <a:off x="658368" y="1956816"/>
+            <a:ext cx="10972800" cy="603504"/>
           </a:xfrm>
           <a:prstGeom prst="rect">
             <a:avLst/>
@@ -17181,7 +17422,11 @@
               </a:defRPr>
             </a:pPr>
             <a:r>
-              <a:t>파일 생성/열기: mkdir -p ~/agv_ws/src/agv_description/urdf    &amp;&amp;    nano ~/agv_ws/src/agv_description/urdf/sensors.xacro</a:t>
+              <a:t>파일 생성: mkdir -p ~/agv_ws/src/agv_description/urdf</a:t>
+            </a:r>
+            <a:br/>
+            <a:r>
+              <a:t>파일 열기: nano ~/agv_ws/src/agv_description/urdf/wheels.xacro</a:t>
             </a:r>
           </a:p>
         </p:txBody>
@@ -17194,8 +17439,8 @@
         </p:nvSpPr>
         <p:spPr>
           <a:xfrm>
-            <a:off x="658368" y="2761488"/>
-            <a:ext cx="10972800" cy="3383280"/>
+            <a:off x="658368" y="2706624"/>
+            <a:ext cx="10972800" cy="3364992"/>
           </a:xfrm>
           <a:prstGeom prst="rect">
             <a:avLst/>
@@ -17239,11 +17484,11 @@
               </a:defRPr>
             </a:pPr>
             <a:r>
-              <a:t>        &lt;material name="sensor_black"/&gt;</a:t>
-            </a:r>
-            <a:br/>
-            <a:r>
-              <a:t>      &lt;/visual&gt;</a:t>
+              <a:t>      &lt;parent link="base_link"/&gt;</a:t>
+            </a:r>
+            <a:br/>
+            <a:r>
+              <a:t>      &lt;child link="${side}_wheel_link"/&gt;</a:t>
             </a:r>
             <a:br/>
             <a:r>
@@ -17255,23 +17500,11 @@
             </a:r>
             <a:br/>
             <a:r>
-              <a:t>      &lt;collision&gt;</a:t>
-            </a:r>
-            <a:br/>
-            <a:r>
-              <a:t>        &lt;geometry&gt;</a:t>
-            </a:r>
-            <a:br/>
-            <a:r>
-              <a:t>          &lt;box size="${size}"/&gt;</a:t>
-            </a:r>
-            <a:br/>
-            <a:r>
-              <a:t>        &lt;/geometry&gt;</a:t>
-            </a:r>
-            <a:br/>
-            <a:r>
-              <a:t>      &lt;/collision&gt;</a:t>
+              <a:t>      &lt;origin xyz="0 ${y} ${radius}" rpy="0 0 0"/&gt;</a:t>
+            </a:r>
+            <a:br/>
+            <a:r>
+              <a:t>      &lt;axis xyz="0 1 0"/&gt;</a:t>
             </a:r>
             <a:br/>
             <a:r>
@@ -17279,19 +17512,23 @@
             </a:r>
             <a:br/>
             <a:r>
-              <a:t>      </a:t>
-            </a:r>
-            <a:br/>
-            <a:r>
-              <a:t>      &lt;inertial&gt;</a:t>
-            </a:r>
-            <a:br/>
-            <a:r>
-              <a:t>        &lt;mass value="0.05"/&gt;</a:t>
-            </a:r>
-            <a:br/>
-            <a:r>
-              <a:t>        &lt;inertia ixx="0.0001" ixy="0" ixz="0" iyy="0.0001" iyz="0" izz="0.0001"/&gt;</a:t>
+              <a:t>    </a:t>
+            </a:r>
+            <a:br/>
+            <a:r>
+              <a:t>    &lt;/joint&gt;</a:t>
+            </a:r>
+            <a:br/>
+            <a:r>
+              <a:t>    </a:t>
+            </a:r>
+            <a:br/>
+            <a:r>
+              <a:t>  </a:t>
+            </a:r>
+            <a:br/>
+            <a:r>
+              <a:t>  &lt;/xacro:macro&gt;</a:t>
             </a:r>
           </a:p>
         </p:txBody>
@@ -17304,7 +17541,7 @@
         </p:nvSpPr>
         <p:spPr>
           <a:xfrm>
-            <a:off x="749808" y="6199632"/>
+            <a:off x="749808" y="6181344"/>
             <a:ext cx="10789920" cy="201168"/>
           </a:xfrm>
           <a:prstGeom prst="rect">
@@ -17330,7 +17567,7 @@
               </a:defRPr>
             </a:pPr>
             <a:r>
-              <a:t>파일 전체 2/4 · 이 슬라이드 다음에 같은 파일의 나머지 줄이 이어집니다.</a:t>
+              <a:t>파일 전체 4/5 · 이 슬라이드 다음에 같은 파일의 나머지 줄이 이어집니다.</a:t>
             </a:r>
           </a:p>
         </p:txBody>
@@ -17806,7 +18043,7 @@
               </a:defRPr>
             </a:pPr>
             <a:r>
-              <a:t>파일을 계속 작성하고 저장한다 (3/4)</a:t>
+              <a:t>파일을 계속 작성하고 저장한다 (5/5)</a:t>
             </a:r>
           </a:p>
         </p:txBody>
@@ -17845,7 +18082,7 @@
               </a:defRPr>
             </a:pPr>
             <a:r>
-              <a:t>~/agv_ws/src/agv_description/urdf/sensors.xacro</a:t>
+              <a:t>~/agv_ws/src/agv_description/urdf/wheels.xacro</a:t>
             </a:r>
           </a:p>
         </p:txBody>
@@ -17981,7 +18218,7 @@
               </a:defRPr>
             </a:pPr>
             <a:r>
-              <a:t>현재 단계 24/26    |    현재 폴더 ~/agv_ws    |    현재 터미널</a:t>
+              <a:t>현재 단계 24/25    |    현재 폴더 ~/agv_ws    |    현재 터미널</a:t>
             </a:r>
           </a:p>
         </p:txBody>
@@ -17994,8 +18231,8 @@
         </p:nvSpPr>
         <p:spPr>
           <a:xfrm>
-            <a:off x="658368" y="1682496"/>
-            <a:ext cx="10972800" cy="347472"/>
+            <a:off x="658368" y="1627632"/>
+            <a:ext cx="10972800" cy="256032"/>
           </a:xfrm>
           <a:prstGeom prst="rect">
             <a:avLst/>
@@ -18012,7 +18249,7 @@
               <a:spcAft>
                 <a:spcPts val="0"/>
               </a:spcAft>
-              <a:defRPr sz="1700" b="1">
+              <a:defRPr sz="1500" b="1">
                 <a:solidFill>
                   <a:srgbClr val="122C4E"/>
                 </a:solidFill>
@@ -18033,8 +18270,8 @@
         </p:nvSpPr>
         <p:spPr>
           <a:xfrm>
-            <a:off x="658368" y="2103120"/>
-            <a:ext cx="10972800" cy="493776"/>
+            <a:off x="658368" y="1956816"/>
+            <a:ext cx="10972800" cy="603504"/>
           </a:xfrm>
           <a:prstGeom prst="rect">
             <a:avLst/>
@@ -18078,7 +18315,11 @@
               </a:defRPr>
             </a:pPr>
             <a:r>
-              <a:t>파일 생성/열기: mkdir -p ~/agv_ws/src/agv_description/urdf    &amp;&amp;    nano ~/agv_ws/src/agv_description/urdf/sensors.xacro</a:t>
+              <a:t>파일 생성: mkdir -p ~/agv_ws/src/agv_description/urdf</a:t>
+            </a:r>
+            <a:br/>
+            <a:r>
+              <a:t>파일 열기: nano ~/agv_ws/src/agv_description/urdf/wheels.xacro</a:t>
             </a:r>
           </a:p>
         </p:txBody>
@@ -18091,8 +18332,8 @@
         </p:nvSpPr>
         <p:spPr>
           <a:xfrm>
-            <a:off x="658368" y="2761488"/>
-            <a:ext cx="10972800" cy="3383280"/>
+            <a:off x="658368" y="2706624"/>
+            <a:ext cx="10972800" cy="3364992"/>
           </a:xfrm>
           <a:prstGeom prst="rect">
             <a:avLst/>
@@ -18136,59 +18377,12 @@
               </a:defRPr>
             </a:pPr>
             <a:r>
-              <a:t>      &lt;/inertial&gt;</a:t>
-            </a:r>
-            <a:br/>
-            <a:r>
-              <a:t>      </a:t>
-            </a:r>
-            <a:br/>
-            <a:r>
-              <a:t>    </a:t>
-            </a:r>
-            <a:br/>
-            <a:r>
-              <a:t>    &lt;/link&gt;</a:t>
-            </a:r>
-            <a:br/>
-            <a:r>
-              <a:t>    </a:t>
-            </a:r>
-            <a:br/>
-            <a:r>
-              <a:t>    </a:t>
-            </a:r>
-            <a:br/>
-            <a:r>
-              <a:t>    &lt;joint name="${name}_joint" type="fixed"&gt;</a:t>
-            </a:r>
-            <a:br/>
-            <a:r>
-              <a:t>      &lt;parent link="${parent}"/&gt;</a:t>
-            </a:r>
-            <a:br/>
-            <a:r>
-              <a:t>      &lt;child link="${name}_link"/&gt;</a:t>
-            </a:r>
-            <a:br/>
-            <a:r>
-              <a:t>      &lt;origin xyz="${xyz}" rpy="${rpy}"/&gt;</a:t>
-            </a:r>
-            <a:br/>
-            <a:r>
-              <a:t>    &lt;/joint&gt;</a:t>
-            </a:r>
-            <a:br/>
-            <a:r>
-              <a:t>    </a:t>
-            </a:r>
-            <a:br/>
-            <a:r>
               <a:t>  </a:t>
             </a:r>
             <a:br/>
-            <a:r>
-              <a:t>  &lt;/xacro:macro&gt;</a:t>
+            <a:br/>
+            <a:r>
+              <a:t>&lt;/robot&gt;</a:t>
             </a:r>
           </a:p>
         </p:txBody>
@@ -18201,7 +18395,7 @@
         </p:nvSpPr>
         <p:spPr>
           <a:xfrm>
-            <a:off x="749808" y="6199632"/>
+            <a:off x="749808" y="6181344"/>
             <a:ext cx="10789920" cy="201168"/>
           </a:xfrm>
           <a:prstGeom prst="rect">
@@ -18227,7 +18421,7 @@
               </a:defRPr>
             </a:pPr>
             <a:r>
-              <a:t>파일 전체 3/4 · 이 슬라이드 다음에 같은 파일의 나머지 줄이 이어집니다.</a:t>
+              <a:t>파일 전체 5/5 · 이 슬라이드 다음에 같은 파일의 나머지 줄이 이어집니다.</a:t>
             </a:r>
           </a:p>
         </p:txBody>
@@ -18284,7 +18478,7 @@
               </a:defRPr>
             </a:pPr>
             <a:r>
-              <a:t>파일을 계속 작성하고 저장한다 (4/4)</a:t>
+              <a:t>파일을 새로 만들고 저장한다 (1/4)</a:t>
             </a:r>
           </a:p>
         </p:txBody>
@@ -18459,7 +18653,7 @@
               </a:defRPr>
             </a:pPr>
             <a:r>
-              <a:t>현재 단계 25/26    |    현재 폴더 ~/agv_ws    |    현재 터미널</a:t>
+              <a:t>현재 단계 25/29    |    현재 폴더 ~/agv_ws    |    현재 터미널</a:t>
             </a:r>
           </a:p>
         </p:txBody>
@@ -18472,8 +18666,8 @@
         </p:nvSpPr>
         <p:spPr>
           <a:xfrm>
-            <a:off x="658368" y="1682496"/>
-            <a:ext cx="10972800" cy="347472"/>
+            <a:off x="658368" y="1627632"/>
+            <a:ext cx="10972800" cy="256032"/>
           </a:xfrm>
           <a:prstGeom prst="rect">
             <a:avLst/>
@@ -18490,7 +18684,7 @@
               <a:spcAft>
                 <a:spcPts val="0"/>
               </a:spcAft>
-              <a:defRPr sz="1700" b="1">
+              <a:defRPr sz="1500" b="1">
                 <a:solidFill>
                   <a:srgbClr val="122C4E"/>
                 </a:solidFill>
@@ -18511,8 +18705,8 @@
         </p:nvSpPr>
         <p:spPr>
           <a:xfrm>
-            <a:off x="658368" y="2103120"/>
-            <a:ext cx="10972800" cy="493776"/>
+            <a:off x="658368" y="1956816"/>
+            <a:ext cx="10972800" cy="603504"/>
           </a:xfrm>
           <a:prstGeom prst="rect">
             <a:avLst/>
@@ -18556,7 +18750,11 @@
               </a:defRPr>
             </a:pPr>
             <a:r>
-              <a:t>파일 생성/열기: mkdir -p ~/agv_ws/src/agv_description/urdf    &amp;&amp;    nano ~/agv_ws/src/agv_description/urdf/sensors.xacro</a:t>
+              <a:t>파일 생성: mkdir -p ~/agv_ws/src/agv_description/urdf</a:t>
+            </a:r>
+            <a:br/>
+            <a:r>
+              <a:t>파일 열기: nano ~/agv_ws/src/agv_description/urdf/sensors.xacro</a:t>
             </a:r>
           </a:p>
         </p:txBody>
@@ -18569,8 +18767,8 @@
         </p:nvSpPr>
         <p:spPr>
           <a:xfrm>
-            <a:off x="658368" y="2761488"/>
-            <a:ext cx="10972800" cy="3383280"/>
+            <a:off x="658368" y="2706624"/>
+            <a:ext cx="10972800" cy="3364992"/>
           </a:xfrm>
           <a:prstGeom prst="rect">
             <a:avLst/>
@@ -18614,12 +18812,51 @@
               </a:defRPr>
             </a:pPr>
             <a:r>
+              <a:t>&lt;?xml version="1.0" ?&gt;</a:t>
+            </a:r>
+            <a:br/>
+            <a:r>
+              <a:t>&lt;robot xmlns:xacro="http://www.ros.org/wiki/xacro"&gt;</a:t>
+            </a:r>
+            <a:br/>
+            <a:r>
               <a:t>  </a:t>
             </a:r>
             <a:br/>
-            <a:br/>
-            <a:r>
-              <a:t>&lt;/robot&gt;</a:t>
+            <a:r>
+              <a:t>  </a:t>
+            </a:r>
+            <a:br/>
+            <a:r>
+              <a:t>  &lt;xacro:macro name="fixed_sensor" params="name parent xyz rpy size"&gt;</a:t>
+            </a:r>
+            <a:br/>
+            <a:r>
+              <a:t>    </a:t>
+            </a:r>
+            <a:br/>
+            <a:r>
+              <a:t>    </a:t>
+            </a:r>
+            <a:br/>
+            <a:r>
+              <a:t>    &lt;link name="${name}_link"&gt;</a:t>
+            </a:r>
+            <a:br/>
+            <a:r>
+              <a:t>      </a:t>
+            </a:r>
+            <a:br/>
+            <a:r>
+              <a:t>      </a:t>
+            </a:r>
+            <a:br/>
+            <a:r>
+              <a:t>      &lt;visual&gt;</a:t>
+            </a:r>
+            <a:br/>
+            <a:r>
+              <a:t>        &lt;geometry&gt;</a:t>
             </a:r>
           </a:p>
         </p:txBody>
@@ -18632,7 +18869,7 @@
         </p:nvSpPr>
         <p:spPr>
           <a:xfrm>
-            <a:off x="749808" y="6199632"/>
+            <a:off x="749808" y="6181344"/>
             <a:ext cx="10789920" cy="201168"/>
           </a:xfrm>
           <a:prstGeom prst="rect">
@@ -18658,7 +18895,7 @@
               </a:defRPr>
             </a:pPr>
             <a:r>
-              <a:t>파일 전체 4/4 · 이 슬라이드 다음에 같은 파일의 나머지 줄이 이어집니다.</a:t>
+              <a:t>파일 전체 1/4 · 이 슬라이드 다음에 같은 파일의 나머지 줄이 이어집니다.</a:t>
             </a:r>
           </a:p>
         </p:txBody>
@@ -18715,7 +18952,7 @@
               </a:defRPr>
             </a:pPr>
             <a:r>
-              <a:t>파일을 새로 만들고 저장한다 (1/2)</a:t>
+              <a:t>파일을 계속 작성하고 저장한다 (2/4)</a:t>
             </a:r>
           </a:p>
         </p:txBody>
@@ -18754,7 +18991,7 @@
               </a:defRPr>
             </a:pPr>
             <a:r>
-              <a:t>~/agv_ws/src/agv_description/launch/display.launch.py</a:t>
+              <a:t>~/agv_ws/src/agv_description/urdf/sensors.xacro</a:t>
             </a:r>
           </a:p>
         </p:txBody>
@@ -18890,7 +19127,7 @@
               </a:defRPr>
             </a:pPr>
             <a:r>
-              <a:t>현재 단계 26/28    |    현재 폴더 ~/agv_ws    |    현재 터미널</a:t>
+              <a:t>현재 단계 26/29    |    현재 폴더 ~/agv_ws    |    현재 터미널</a:t>
             </a:r>
           </a:p>
         </p:txBody>
@@ -18903,8 +19140,8 @@
         </p:nvSpPr>
         <p:spPr>
           <a:xfrm>
-            <a:off x="658368" y="1682496"/>
-            <a:ext cx="10972800" cy="347472"/>
+            <a:off x="658368" y="1627632"/>
+            <a:ext cx="10972800" cy="256032"/>
           </a:xfrm>
           <a:prstGeom prst="rect">
             <a:avLst/>
@@ -18921,7 +19158,7 @@
               <a:spcAft>
                 <a:spcPts val="0"/>
               </a:spcAft>
-              <a:defRPr sz="1700" b="1">
+              <a:defRPr sz="1500" b="1">
                 <a:solidFill>
                   <a:srgbClr val="122C4E"/>
                 </a:solidFill>
@@ -18942,8 +19179,8 @@
         </p:nvSpPr>
         <p:spPr>
           <a:xfrm>
-            <a:off x="658368" y="2103120"/>
-            <a:ext cx="10972800" cy="493776"/>
+            <a:off x="658368" y="1956816"/>
+            <a:ext cx="10972800" cy="603504"/>
           </a:xfrm>
           <a:prstGeom prst="rect">
             <a:avLst/>
@@ -18987,7 +19224,11 @@
               </a:defRPr>
             </a:pPr>
             <a:r>
-              <a:t>파일 생성/열기: mkdir -p ~/agv_ws/src/agv_description/launch    &amp;&amp;    nano ~/agv_ws/src/agv_description/launch/display.launch.py</a:t>
+              <a:t>파일 생성: mkdir -p ~/agv_ws/src/agv_description/urdf</a:t>
+            </a:r>
+            <a:br/>
+            <a:r>
+              <a:t>파일 열기: nano ~/agv_ws/src/agv_description/urdf/sensors.xacro</a:t>
             </a:r>
           </a:p>
         </p:txBody>
@@ -19000,8 +19241,8 @@
         </p:nvSpPr>
         <p:spPr>
           <a:xfrm>
-            <a:off x="658368" y="2761488"/>
-            <a:ext cx="10972800" cy="3383280"/>
+            <a:off x="658368" y="2706624"/>
+            <a:ext cx="10972800" cy="3364992"/>
           </a:xfrm>
           <a:prstGeom prst="rect">
             <a:avLst/>
@@ -19045,56 +19286,51 @@
               </a:defRPr>
             </a:pPr>
             <a:r>
-              <a:t>from launch import LaunchDescription</a:t>
-            </a:r>
-            <a:br/>
-            <a:r>
-              <a:t>from launch.substitutions import Command</a:t>
-            </a:r>
-            <a:br/>
-            <a:r>
-              <a:t>from launch_ros.actions import Node</a:t>
-            </a:r>
-            <a:br/>
-            <a:r>
-              <a:t>from launch_ros.parameter_descriptions import ParameterValue</a:t>
-            </a:r>
-            <a:br/>
-            <a:r>
-              <a:t>from ament_index_python.packages import get_package_share_directory</a:t>
-            </a:r>
-            <a:br/>
-            <a:r>
-              <a:t>import os</a:t>
-            </a:r>
-            <a:br/>
-            <a:br/>
-            <a:r>
-              <a:t>def generate_launch_description():</a:t>
-            </a:r>
-            <a:br/>
-            <a:r>
-              <a:t>    share = get_package_share_directory('agv_description')</a:t>
-            </a:r>
-            <a:br/>
-            <a:r>
-              <a:t>    xacro_file = os.path.join(share, 'urdf', 'agv.urdf.xacro')</a:t>
-            </a:r>
-            <a:br/>
-            <a:r>
-              <a:t>    rviz_file = os.path.join(share, 'rviz', 'agv.rviz')</a:t>
-            </a:r>
-            <a:br/>
-            <a:r>
-              <a:t>    robot_description = ParameterValue(Command(['xacro ', xacro_file]), value_type=str)</a:t>
-            </a:r>
-            <a:br/>
-            <a:r>
-              <a:t>    return LaunchDescription([Node(package='joint_state_publisher_gui',</a:t>
-            </a:r>
-            <a:br/>
-            <a:r>
-              <a:t>        executable='joint_state_publisher_gui'), Node(package='robot_state_publisher',</a:t>
+              <a:t>          &lt;box size="${size}"/&gt;</a:t>
+            </a:r>
+            <a:br/>
+            <a:r>
+              <a:t>        &lt;/geometry&gt;</a:t>
+            </a:r>
+            <a:br/>
+            <a:r>
+              <a:t>        &lt;material name="sensor_black"/&gt;</a:t>
+            </a:r>
+            <a:br/>
+            <a:r>
+              <a:t>      &lt;/visual&gt;</a:t>
+            </a:r>
+            <a:br/>
+            <a:r>
+              <a:t>      </a:t>
+            </a:r>
+            <a:br/>
+            <a:r>
+              <a:t>      </a:t>
+            </a:r>
+            <a:br/>
+            <a:r>
+              <a:t>      &lt;collision&gt;</a:t>
+            </a:r>
+            <a:br/>
+            <a:r>
+              <a:t>        &lt;geometry&gt;</a:t>
+            </a:r>
+            <a:br/>
+            <a:r>
+              <a:t>          &lt;box size="${size}"/&gt;</a:t>
+            </a:r>
+            <a:br/>
+            <a:r>
+              <a:t>        &lt;/geometry&gt;</a:t>
+            </a:r>
+            <a:br/>
+            <a:r>
+              <a:t>      &lt;/collision&gt;</a:t>
+            </a:r>
+            <a:br/>
+            <a:r>
+              <a:t>      </a:t>
             </a:r>
           </a:p>
         </p:txBody>
@@ -19107,7 +19343,7 @@
         </p:nvSpPr>
         <p:spPr>
           <a:xfrm>
-            <a:off x="749808" y="6199632"/>
+            <a:off x="749808" y="6181344"/>
             <a:ext cx="10789920" cy="201168"/>
           </a:xfrm>
           <a:prstGeom prst="rect">
@@ -19133,7 +19369,7 @@
               </a:defRPr>
             </a:pPr>
             <a:r>
-              <a:t>파일 전체 1/2 · 이 슬라이드 다음에 같은 파일의 나머지 줄이 이어집니다.</a:t>
+              <a:t>파일 전체 2/4 · 이 슬라이드 다음에 같은 파일의 나머지 줄이 이어집니다.</a:t>
             </a:r>
           </a:p>
         </p:txBody>
@@ -19190,7 +19426,7 @@
               </a:defRPr>
             </a:pPr>
             <a:r>
-              <a:t>파일을 계속 작성하고 저장한다 (2/2)</a:t>
+              <a:t>파일을 계속 작성하고 저장한다 (3/4)</a:t>
             </a:r>
           </a:p>
         </p:txBody>
@@ -19229,7 +19465,7 @@
               </a:defRPr>
             </a:pPr>
             <a:r>
-              <a:t>~/agv_ws/src/agv_description/launch/display.launch.py</a:t>
+              <a:t>~/agv_ws/src/agv_description/urdf/sensors.xacro</a:t>
             </a:r>
           </a:p>
         </p:txBody>
@@ -19365,7 +19601,7 @@
               </a:defRPr>
             </a:pPr>
             <a:r>
-              <a:t>현재 단계 27/28    |    현재 폴더 ~/agv_ws    |    현재 터미널</a:t>
+              <a:t>현재 단계 27/29    |    현재 폴더 ~/agv_ws    |    현재 터미널</a:t>
             </a:r>
           </a:p>
         </p:txBody>
@@ -19378,8 +19614,8 @@
         </p:nvSpPr>
         <p:spPr>
           <a:xfrm>
-            <a:off x="658368" y="1682496"/>
-            <a:ext cx="10972800" cy="347472"/>
+            <a:off x="658368" y="1627632"/>
+            <a:ext cx="10972800" cy="256032"/>
           </a:xfrm>
           <a:prstGeom prst="rect">
             <a:avLst/>
@@ -19396,7 +19632,7 @@
               <a:spcAft>
                 <a:spcPts val="0"/>
               </a:spcAft>
-              <a:defRPr sz="1700" b="1">
+              <a:defRPr sz="1500" b="1">
                 <a:solidFill>
                   <a:srgbClr val="122C4E"/>
                 </a:solidFill>
@@ -19417,8 +19653,8 @@
         </p:nvSpPr>
         <p:spPr>
           <a:xfrm>
-            <a:off x="658368" y="2103120"/>
-            <a:ext cx="10972800" cy="493776"/>
+            <a:off x="658368" y="1956816"/>
+            <a:ext cx="10972800" cy="603504"/>
           </a:xfrm>
           <a:prstGeom prst="rect">
             <a:avLst/>
@@ -19462,7 +19698,11 @@
               </a:defRPr>
             </a:pPr>
             <a:r>
-              <a:t>파일 생성/열기: mkdir -p ~/agv_ws/src/agv_description/launch    &amp;&amp;    nano ~/agv_ws/src/agv_description/launch/display.launch.py</a:t>
+              <a:t>파일 생성: mkdir -p ~/agv_ws/src/agv_description/urdf</a:t>
+            </a:r>
+            <a:br/>
+            <a:r>
+              <a:t>파일 열기: nano ~/agv_ws/src/agv_description/urdf/sensors.xacro</a:t>
             </a:r>
           </a:p>
         </p:txBody>
@@ -19475,8 +19715,8 @@
         </p:nvSpPr>
         <p:spPr>
           <a:xfrm>
-            <a:off x="658368" y="2761488"/>
-            <a:ext cx="10972800" cy="3383280"/>
+            <a:off x="658368" y="2706624"/>
+            <a:ext cx="10972800" cy="3364992"/>
           </a:xfrm>
           <a:prstGeom prst="rect">
             <a:avLst/>
@@ -19520,15 +19760,51 @@
               </a:defRPr>
             </a:pPr>
             <a:r>
-              <a:t>        executable='robot_state_publisher',</a:t>
-            </a:r>
-            <a:br/>
-            <a:r>
-              <a:t>        parameters=[{'robot_description': robot_description}]), Node(package='rviz2',</a:t>
-            </a:r>
-            <a:br/>
-            <a:r>
-              <a:t>        executable='rviz2', arguments=['-d', rviz_file])])</a:t>
+              <a:t>      </a:t>
+            </a:r>
+            <a:br/>
+            <a:r>
+              <a:t>      &lt;inertial&gt;</a:t>
+            </a:r>
+            <a:br/>
+            <a:r>
+              <a:t>        &lt;mass value="0.05"/&gt;</a:t>
+            </a:r>
+            <a:br/>
+            <a:r>
+              <a:t>        &lt;inertia ixx="0.0001" ixy="0" ixz="0" iyy="0.0001" iyz="0" izz="0.0001"/&gt;</a:t>
+            </a:r>
+            <a:br/>
+            <a:r>
+              <a:t>      &lt;/inertial&gt;</a:t>
+            </a:r>
+            <a:br/>
+            <a:r>
+              <a:t>      </a:t>
+            </a:r>
+            <a:br/>
+            <a:r>
+              <a:t>    </a:t>
+            </a:r>
+            <a:br/>
+            <a:r>
+              <a:t>    &lt;/link&gt;</a:t>
+            </a:r>
+            <a:br/>
+            <a:r>
+              <a:t>    </a:t>
+            </a:r>
+            <a:br/>
+            <a:r>
+              <a:t>    </a:t>
+            </a:r>
+            <a:br/>
+            <a:r>
+              <a:t>    &lt;joint name="${name}_joint" type="fixed"&gt;</a:t>
+            </a:r>
+            <a:br/>
+            <a:r>
+              <a:t>      &lt;parent link="${parent}"/&gt;</a:t>
             </a:r>
           </a:p>
         </p:txBody>
@@ -19541,7 +19817,7 @@
         </p:nvSpPr>
         <p:spPr>
           <a:xfrm>
-            <a:off x="749808" y="6199632"/>
+            <a:off x="749808" y="6181344"/>
             <a:ext cx="10789920" cy="201168"/>
           </a:xfrm>
           <a:prstGeom prst="rect">
@@ -19567,7 +19843,7 @@
               </a:defRPr>
             </a:pPr>
             <a:r>
-              <a:t>파일 전체 2/2 · 이 슬라이드 다음에 같은 파일의 나머지 줄이 이어집니다.</a:t>
+              <a:t>파일 전체 3/4 · 이 슬라이드 다음에 같은 파일의 나머지 줄이 이어집니다.</a:t>
             </a:r>
           </a:p>
         </p:txBody>
@@ -19624,7 +19900,7 @@
               </a:defRPr>
             </a:pPr>
             <a:r>
-              <a:t>build → source → run 순서로 실행한다</a:t>
+              <a:t>파일을 계속 작성하고 저장한다 (4/4)</a:t>
             </a:r>
           </a:p>
         </p:txBody>
@@ -19663,7 +19939,7 @@
               </a:defRPr>
             </a:pPr>
             <a:r>
-              <a:t>새 파일 또는 수정 파일은 build와 source 뒤에만 실행 이름·설정에 반영됩니다.</a:t>
+              <a:t>~/agv_ws/src/agv_description/urdf/sensors.xacro</a:t>
             </a:r>
           </a:p>
         </p:txBody>
@@ -19799,23 +20075,124 @@
               </a:defRPr>
             </a:pPr>
             <a:r>
-              <a:t>현재 단계 실행    |    현재 폴더 ~/agv_ws    |    현재 터미널</a:t>
-            </a:r>
-          </a:p>
-        </p:txBody>
-      </p:sp>
-      <p:sp>
-        <p:nvSpPr>
-          <p:cNvPr id="7" name="Rounded Rectangle 6"/>
+              <a:t>현재 단계 28/29    |    현재 폴더 ~/agv_ws    |    현재 터미널</a:t>
+            </a:r>
+          </a:p>
+        </p:txBody>
+      </p:sp>
+      <p:sp>
+        <p:nvSpPr>
+          <p:cNvPr id="7" name="TextBox 6"/>
+          <p:cNvSpPr txBox="1"/>
+          <p:nvPr/>
+        </p:nvSpPr>
+        <p:spPr>
+          <a:xfrm>
+            <a:off x="658368" y="1627632"/>
+            <a:ext cx="10972800" cy="256032"/>
+          </a:xfrm>
+          <a:prstGeom prst="rect">
+            <a:avLst/>
+          </a:prstGeom>
+          <a:noFill/>
+        </p:spPr>
+        <p:txBody>
+          <a:bodyPr wrap="square" lIns="73152" rIns="73152" tIns="36576" bIns="36576">
+            <a:spAutoFit/>
+          </a:bodyPr>
+          <a:lstStyle/>
+          <a:p>
+            <a:pPr algn="l">
+              <a:spcAft>
+                <a:spcPts val="0"/>
+              </a:spcAft>
+              <a:defRPr sz="1500" b="1">
+                <a:solidFill>
+                  <a:srgbClr val="122C4E"/>
+                </a:solidFill>
+                <a:latin typeface="Noto Sans CJK KR"/>
+              </a:defRPr>
+            </a:pPr>
+            <a:r>
+              <a:t>이번 단계: 파일의 전체 내용을 중간 생략 없이 작성합니다. 아래 줄 범위를 끝까지 입력하세요.</a:t>
+            </a:r>
+          </a:p>
+        </p:txBody>
+      </p:sp>
+      <p:sp>
+        <p:nvSpPr>
+          <p:cNvPr id="8" name="Rectangle 7"/>
           <p:cNvSpPr/>
           <p:nvPr/>
         </p:nvSpPr>
         <p:spPr>
           <a:xfrm>
-            <a:off x="658368" y="1700784"/>
-            <a:ext cx="10972800" cy="3182112"/>
-          </a:xfrm>
-          <a:prstGeom prst="roundRect">
+            <a:off x="658368" y="1956816"/>
+            <a:ext cx="10972800" cy="603504"/>
+          </a:xfrm>
+          <a:prstGeom prst="rect">
+            <a:avLst/>
+          </a:prstGeom>
+          <a:solidFill>
+            <a:srgbClr val="F4F7FB"/>
+          </a:solidFill>
+          <a:ln>
+            <a:solidFill>
+              <a:srgbClr val="F4F7FB"/>
+            </a:solidFill>
+          </a:ln>
+        </p:spPr>
+        <p:style>
+          <a:lnRef idx="1">
+            <a:schemeClr val="accent1"/>
+          </a:lnRef>
+          <a:fillRef idx="3">
+            <a:schemeClr val="accent1"/>
+          </a:fillRef>
+          <a:effectRef idx="2">
+            <a:schemeClr val="accent1"/>
+          </a:effectRef>
+          <a:fontRef idx="minor">
+            <a:schemeClr val="lt1"/>
+          </a:fontRef>
+        </p:style>
+        <p:txBody>
+          <a:bodyPr rtlCol="0" anchor="ctr" wrap="square" lIns="73152" rIns="73152" tIns="36576" bIns="36576"/>
+          <a:lstStyle/>
+          <a:p>
+            <a:pPr algn="l">
+              <a:spcAft>
+                <a:spcPts val="0"/>
+              </a:spcAft>
+              <a:defRPr sz="1400" b="0">
+                <a:solidFill>
+                  <a:srgbClr val="122C4E"/>
+                </a:solidFill>
+                <a:latin typeface="DejaVu Sans Mono"/>
+              </a:defRPr>
+            </a:pPr>
+            <a:r>
+              <a:t>파일 생성: mkdir -p ~/agv_ws/src/agv_description/urdf</a:t>
+            </a:r>
+            <a:br/>
+            <a:r>
+              <a:t>파일 열기: nano ~/agv_ws/src/agv_description/urdf/sensors.xacro</a:t>
+            </a:r>
+          </a:p>
+        </p:txBody>
+      </p:sp>
+      <p:sp>
+        <p:nvSpPr>
+          <p:cNvPr id="9" name="Rectangle 8"/>
+          <p:cNvSpPr/>
+          <p:nvPr/>
+        </p:nvSpPr>
+        <p:spPr>
+          <a:xfrm>
+            <a:off x="658368" y="2706624"/>
+            <a:ext cx="10972800" cy="3364992"/>
+          </a:xfrm>
+          <a:prstGeom prst="rect">
             <a:avLst/>
           </a:prstGeom>
           <a:solidFill>
@@ -19842,14 +20219,14 @@
           </a:fontRef>
         </p:style>
         <p:txBody>
-          <a:bodyPr rtlCol="0" anchor="ctr" wrap="square" lIns="73152" rIns="73152" tIns="36576" bIns="36576"/>
-          <a:lstStyle/>
-          <a:p>
-            <a:pPr algn="l">
-              <a:spcAft>
-                <a:spcPts val="0"/>
-              </a:spcAft>
-              <a:defRPr sz="1600" b="0">
+          <a:bodyPr rtlCol="0" anchor="ctr" wrap="square" lIns="164592" rIns="164592" tIns="109728" bIns="36576"/>
+          <a:lstStyle/>
+          <a:p>
+            <a:pPr algn="l">
+              <a:spcAft>
+                <a:spcPts val="0"/>
+              </a:spcAft>
+              <a:defRPr sz="1400" b="0">
                 <a:solidFill>
                   <a:srgbClr val="FFFFFF"/>
                 </a:solidFill>
@@ -19857,25 +20234,50 @@
               </a:defRPr>
             </a:pPr>
             <a:r>
-              <a:t>cd ~/agv_ws &amp;&amp; source install/setup.bash</a:t>
-            </a:r>
-            <a:br/>
-            <a:r>
-              <a:t>ros2 launch agv_description display.launch.py</a:t>
-            </a:r>
-          </a:p>
-        </p:txBody>
-      </p:sp>
-      <p:sp>
-        <p:nvSpPr>
-          <p:cNvPr id="8" name="TextBox 7"/>
+              <a:t>      &lt;child link="${name}_link"/&gt;</a:t>
+            </a:r>
+            <a:br/>
+            <a:r>
+              <a:t>      &lt;origin xyz="${xyz}" rpy="${rpy}"/&gt;</a:t>
+            </a:r>
+            <a:br/>
+            <a:r>
+              <a:t>    &lt;/joint&gt;</a:t>
+            </a:r>
+            <a:br/>
+            <a:r>
+              <a:t>    </a:t>
+            </a:r>
+            <a:br/>
+            <a:r>
+              <a:t>  </a:t>
+            </a:r>
+            <a:br/>
+            <a:r>
+              <a:t>  &lt;/xacro:macro&gt;</a:t>
+            </a:r>
+            <a:br/>
+            <a:r>
+              <a:t>  </a:t>
+            </a:r>
+            <a:br/>
+            <a:br/>
+            <a:r>
+              <a:t>&lt;/robot&gt;</a:t>
+            </a:r>
+          </a:p>
+        </p:txBody>
+      </p:sp>
+      <p:sp>
+        <p:nvSpPr>
+          <p:cNvPr id="10" name="TextBox 9"/>
           <p:cNvSpPr txBox="1"/>
           <p:nvPr/>
         </p:nvSpPr>
         <p:spPr>
           <a:xfrm>
-            <a:off x="786384" y="5239512"/>
-            <a:ext cx="1261872" cy="237744"/>
+            <a:off x="749808" y="6181344"/>
+            <a:ext cx="10789920" cy="201168"/>
           </a:xfrm>
           <a:prstGeom prst="rect">
             <a:avLst/>
@@ -19892,54 +20294,15 @@
               <a:spcAft>
                 <a:spcPts val="0"/>
               </a:spcAft>
-              <a:defRPr sz="1800" b="1">
-                <a:solidFill>
-                  <a:srgbClr val="2A8B5A"/>
-                </a:solidFill>
-                <a:latin typeface="Noto Sans CJK KR"/>
-              </a:defRPr>
-            </a:pPr>
-            <a:r>
-              <a:t>확인 기준</a:t>
-            </a:r>
-          </a:p>
-        </p:txBody>
-      </p:sp>
-      <p:sp>
-        <p:nvSpPr>
-          <p:cNvPr id="9" name="TextBox 8"/>
-          <p:cNvSpPr txBox="1"/>
-          <p:nvPr/>
-        </p:nvSpPr>
-        <p:spPr>
-          <a:xfrm>
-            <a:off x="786384" y="5532120"/>
-            <a:ext cx="10469880" cy="420624"/>
-          </a:xfrm>
-          <a:prstGeom prst="rect">
-            <a:avLst/>
-          </a:prstGeom>
-          <a:noFill/>
-        </p:spPr>
-        <p:txBody>
-          <a:bodyPr wrap="square" lIns="73152" rIns="73152" tIns="36576" bIns="36576">
-            <a:spAutoFit/>
-          </a:bodyPr>
-          <a:lstStyle/>
-          <a:p>
-            <a:pPr algn="l">
-              <a:spcAft>
-                <a:spcPts val="0"/>
-              </a:spcAft>
-              <a:defRPr sz="1800" b="0">
-                <a:solidFill>
-                  <a:srgbClr val="122C4E"/>
-                </a:solidFill>
-                <a:latin typeface="Noto Sans CJK KR"/>
-              </a:defRPr>
-            </a:pPr>
-            <a:r>
-              <a:t>RobotModel과 TF에서 base, 두 wheel, camera, lidar, imu 연결을 확인한다.</a:t>
+              <a:defRPr sz="1000" b="0">
+                <a:solidFill>
+                  <a:srgbClr val="5C6672"/>
+                </a:solidFill>
+                <a:latin typeface="Noto Sans CJK KR"/>
+              </a:defRPr>
+            </a:pPr>
+            <a:r>
+              <a:t>파일 전체 4/4 · 이 슬라이드 다음에 같은 파일의 나머지 줄이 이어집니다.</a:t>
             </a:r>
           </a:p>
         </p:txBody>
@@ -19996,7 +20359,7 @@
               </a:defRPr>
             </a:pPr>
             <a:r>
-              <a:t>정상 결과: 실제 환경에서 확인한 출력</a:t>
+              <a:t>파일을 새로 만들고 저장한다 (1/2)</a:t>
             </a:r>
           </a:p>
         </p:txBody>
@@ -20035,7 +20398,7 @@
               </a:defRPr>
             </a:pPr>
             <a:r>
-              <a:t>실제 ROS 2 환경의 파일·패키지·구성 검증 로그</a:t>
+              <a:t>~/agv_ws/src/agv_description/launch/display.launch.py</a:t>
             </a:r>
           </a:p>
         </p:txBody>
@@ -20118,30 +20481,64 @@
           </a:p>
         </p:txBody>
       </p:sp>
-      <p:pic>
-        <p:nvPicPr>
-          <p:cNvPr id="6" name="Picture 5" descr="validation_terminal.png"/>
-          <p:cNvPicPr>
-            <a:picLocks noChangeAspect="1"/>
-          </p:cNvPicPr>
-          <p:nvPr/>
-        </p:nvPicPr>
-        <p:blipFill>
-          <a:blip r:embed="rId2"/>
-          <a:stretch>
-            <a:fillRect/>
-          </a:stretch>
-        </p:blipFill>
-        <p:spPr>
-          <a:xfrm>
-            <a:off x="790956" y="1884338"/>
-            <a:ext cx="10607040" cy="3738546"/>
-          </a:xfrm>
-          <a:prstGeom prst="rect">
-            <a:avLst/>
-          </a:prstGeom>
-        </p:spPr>
-      </p:pic>
+      <p:sp>
+        <p:nvSpPr>
+          <p:cNvPr id="6" name="Rectangle 5"/>
+          <p:cNvSpPr/>
+          <p:nvPr/>
+        </p:nvSpPr>
+        <p:spPr>
+          <a:xfrm>
+            <a:off x="566928" y="1188720"/>
+            <a:ext cx="11064240" cy="347472"/>
+          </a:xfrm>
+          <a:prstGeom prst="rect">
+            <a:avLst/>
+          </a:prstGeom>
+          <a:solidFill>
+            <a:srgbClr val="F4F7FB"/>
+          </a:solidFill>
+          <a:ln>
+            <a:solidFill>
+              <a:srgbClr val="F4F7FB"/>
+            </a:solidFill>
+          </a:ln>
+        </p:spPr>
+        <p:style>
+          <a:lnRef idx="1">
+            <a:schemeClr val="accent1"/>
+          </a:lnRef>
+          <a:fillRef idx="3">
+            <a:schemeClr val="accent1"/>
+          </a:fillRef>
+          <a:effectRef idx="2">
+            <a:schemeClr val="accent1"/>
+          </a:effectRef>
+          <a:fontRef idx="minor">
+            <a:schemeClr val="lt1"/>
+          </a:fontRef>
+        </p:style>
+        <p:txBody>
+          <a:bodyPr rtlCol="0" anchor="ctr" wrap="square" lIns="73152" rIns="73152" tIns="36576" bIns="36576"/>
+          <a:lstStyle/>
+          <a:p>
+            <a:pPr algn="l">
+              <a:spcAft>
+                <a:spcPts val="0"/>
+              </a:spcAft>
+              <a:defRPr sz="1300" b="1">
+                <a:solidFill>
+                  <a:srgbClr val="122C4E"/>
+                </a:solidFill>
+                <a:latin typeface="Noto Sans CJK KR"/>
+              </a:defRPr>
+            </a:pPr>
+            <a:r>
+              <a:t>현재 단계 29/31    |    현재 폴더 ~/agv_ws    |    현재 터미널</a:t>
+            </a:r>
+          </a:p>
+        </p:txBody>
+      </p:sp>
       <p:sp>
         <p:nvSpPr>
           <p:cNvPr id="7" name="TextBox 6"/>
@@ -20150,8 +20547,8 @@
         </p:nvSpPr>
         <p:spPr>
           <a:xfrm>
-            <a:off x="777240" y="6217920"/>
-            <a:ext cx="10607040" cy="182880"/>
+            <a:off x="658368" y="1627632"/>
+            <a:ext cx="10972800" cy="256032"/>
           </a:xfrm>
           <a:prstGeom prst="rect">
             <a:avLst/>
@@ -20164,19 +20561,219 @@
           </a:bodyPr>
           <a:lstStyle/>
           <a:p>
-            <a:pPr algn="ctr">
-              <a:spcAft>
-                <a:spcPts val="0"/>
-              </a:spcAft>
-              <a:defRPr sz="1100" b="1">
-                <a:solidFill>
-                  <a:srgbClr val="2A8B5A"/>
-                </a:solidFill>
-                <a:latin typeface="Noto Sans CJK KR"/>
-              </a:defRPr>
-            </a:pPr>
-            <a:r>
-              <a:t>① 명령/설정  ② 정상 출력 또는 화면  ③ 다음 검증 명령으로 재확인</a:t>
+            <a:pPr algn="l">
+              <a:spcAft>
+                <a:spcPts val="0"/>
+              </a:spcAft>
+              <a:defRPr sz="1500" b="1">
+                <a:solidFill>
+                  <a:srgbClr val="122C4E"/>
+                </a:solidFill>
+                <a:latin typeface="Noto Sans CJK KR"/>
+              </a:defRPr>
+            </a:pPr>
+            <a:r>
+              <a:t>이번 단계: 파일의 전체 내용을 중간 생략 없이 작성합니다. 아래 줄 범위를 끝까지 입력하세요.</a:t>
+            </a:r>
+          </a:p>
+        </p:txBody>
+      </p:sp>
+      <p:sp>
+        <p:nvSpPr>
+          <p:cNvPr id="8" name="Rectangle 7"/>
+          <p:cNvSpPr/>
+          <p:nvPr/>
+        </p:nvSpPr>
+        <p:spPr>
+          <a:xfrm>
+            <a:off x="658368" y="1956816"/>
+            <a:ext cx="10972800" cy="603504"/>
+          </a:xfrm>
+          <a:prstGeom prst="rect">
+            <a:avLst/>
+          </a:prstGeom>
+          <a:solidFill>
+            <a:srgbClr val="F4F7FB"/>
+          </a:solidFill>
+          <a:ln>
+            <a:solidFill>
+              <a:srgbClr val="F4F7FB"/>
+            </a:solidFill>
+          </a:ln>
+        </p:spPr>
+        <p:style>
+          <a:lnRef idx="1">
+            <a:schemeClr val="accent1"/>
+          </a:lnRef>
+          <a:fillRef idx="3">
+            <a:schemeClr val="accent1"/>
+          </a:fillRef>
+          <a:effectRef idx="2">
+            <a:schemeClr val="accent1"/>
+          </a:effectRef>
+          <a:fontRef idx="minor">
+            <a:schemeClr val="lt1"/>
+          </a:fontRef>
+        </p:style>
+        <p:txBody>
+          <a:bodyPr rtlCol="0" anchor="ctr" wrap="square" lIns="73152" rIns="73152" tIns="36576" bIns="36576"/>
+          <a:lstStyle/>
+          <a:p>
+            <a:pPr algn="l">
+              <a:spcAft>
+                <a:spcPts val="0"/>
+              </a:spcAft>
+              <a:defRPr sz="1400" b="0">
+                <a:solidFill>
+                  <a:srgbClr val="122C4E"/>
+                </a:solidFill>
+                <a:latin typeface="DejaVu Sans Mono"/>
+              </a:defRPr>
+            </a:pPr>
+            <a:r>
+              <a:t>파일 생성: mkdir -p ~/agv_ws/src/agv_description/launch</a:t>
+            </a:r>
+            <a:br/>
+            <a:r>
+              <a:t>파일 열기: nano ~/agv_ws/src/agv_description/launch/display.launch.py</a:t>
+            </a:r>
+          </a:p>
+        </p:txBody>
+      </p:sp>
+      <p:sp>
+        <p:nvSpPr>
+          <p:cNvPr id="9" name="Rectangle 8"/>
+          <p:cNvSpPr/>
+          <p:nvPr/>
+        </p:nvSpPr>
+        <p:spPr>
+          <a:xfrm>
+            <a:off x="658368" y="2706624"/>
+            <a:ext cx="10972800" cy="3364992"/>
+          </a:xfrm>
+          <a:prstGeom prst="rect">
+            <a:avLst/>
+          </a:prstGeom>
+          <a:solidFill>
+            <a:srgbClr val="1D232D"/>
+          </a:solidFill>
+          <a:ln>
+            <a:solidFill>
+              <a:srgbClr val="1D232D"/>
+            </a:solidFill>
+          </a:ln>
+        </p:spPr>
+        <p:style>
+          <a:lnRef idx="1">
+            <a:schemeClr val="accent1"/>
+          </a:lnRef>
+          <a:fillRef idx="3">
+            <a:schemeClr val="accent1"/>
+          </a:fillRef>
+          <a:effectRef idx="2">
+            <a:schemeClr val="accent1"/>
+          </a:effectRef>
+          <a:fontRef idx="minor">
+            <a:schemeClr val="lt1"/>
+          </a:fontRef>
+        </p:style>
+        <p:txBody>
+          <a:bodyPr rtlCol="0" anchor="ctr" wrap="square" lIns="164592" rIns="164592" tIns="109728" bIns="36576"/>
+          <a:lstStyle/>
+          <a:p>
+            <a:pPr algn="l">
+              <a:spcAft>
+                <a:spcPts val="0"/>
+              </a:spcAft>
+              <a:defRPr sz="1400" b="0">
+                <a:solidFill>
+                  <a:srgbClr val="FFFFFF"/>
+                </a:solidFill>
+                <a:latin typeface="DejaVu Sans Mono"/>
+              </a:defRPr>
+            </a:pPr>
+            <a:r>
+              <a:t>from launch import LaunchDescription</a:t>
+            </a:r>
+            <a:br/>
+            <a:r>
+              <a:t>from launch.substitutions import Command</a:t>
+            </a:r>
+            <a:br/>
+            <a:r>
+              <a:t>from launch_ros.actions import Node</a:t>
+            </a:r>
+            <a:br/>
+            <a:r>
+              <a:t>from launch_ros.parameter_descriptions import ParameterValue</a:t>
+            </a:r>
+            <a:br/>
+            <a:r>
+              <a:t>from ament_index_python.packages import get_package_share_directory</a:t>
+            </a:r>
+            <a:br/>
+            <a:r>
+              <a:t>import os</a:t>
+            </a:r>
+            <a:br/>
+            <a:br/>
+            <a:r>
+              <a:t>def generate_launch_description():</a:t>
+            </a:r>
+            <a:br/>
+            <a:r>
+              <a:t>    share = get_package_share_directory('agv_description')</a:t>
+            </a:r>
+            <a:br/>
+            <a:r>
+              <a:t>    xacro_file = os.path.join(share, 'urdf', 'agv.urdf.xacro')</a:t>
+            </a:r>
+            <a:br/>
+            <a:r>
+              <a:t>    rviz_file = os.path.join(share, 'rviz', 'agv.rviz')</a:t>
+            </a:r>
+            <a:br/>
+            <a:r>
+              <a:t>    robot_description = ParameterValue(Command(['xacro ', xacro_file]), value_type=str)</a:t>
+            </a:r>
+          </a:p>
+        </p:txBody>
+      </p:sp>
+      <p:sp>
+        <p:nvSpPr>
+          <p:cNvPr id="10" name="TextBox 9"/>
+          <p:cNvSpPr txBox="1"/>
+          <p:nvPr/>
+        </p:nvSpPr>
+        <p:spPr>
+          <a:xfrm>
+            <a:off x="749808" y="6181344"/>
+            <a:ext cx="10789920" cy="201168"/>
+          </a:xfrm>
+          <a:prstGeom prst="rect">
+            <a:avLst/>
+          </a:prstGeom>
+          <a:noFill/>
+        </p:spPr>
+        <p:txBody>
+          <a:bodyPr wrap="square" lIns="73152" rIns="73152" tIns="36576" bIns="36576">
+            <a:spAutoFit/>
+          </a:bodyPr>
+          <a:lstStyle/>
+          <a:p>
+            <a:pPr algn="l">
+              <a:spcAft>
+                <a:spcPts val="0"/>
+              </a:spcAft>
+              <a:defRPr sz="1000" b="0">
+                <a:solidFill>
+                  <a:srgbClr val="5C6672"/>
+                </a:solidFill>
+                <a:latin typeface="Noto Sans CJK KR"/>
+              </a:defRPr>
+            </a:pPr>
+            <a:r>
+              <a:t>파일 전체 1/2 · 이 슬라이드 다음에 같은 파일의 나머지 줄이 이어집니다.</a:t>
             </a:r>
           </a:p>
         </p:txBody>
@@ -20233,7 +20830,7 @@
               </a:defRPr>
             </a:pPr>
             <a:r>
-              <a:t>객관적 검증 명령으로 완료를 확인한다</a:t>
+              <a:t>파일을 계속 작성하고 저장한다 (2/2)</a:t>
             </a:r>
           </a:p>
         </p:txBody>
@@ -20272,7 +20869,7 @@
               </a:defRPr>
             </a:pPr>
             <a:r>
-              <a:t>화면만 보지 말고 topic·frame·파일·parameter를 다시 확인합니다.</a:t>
+              <a:t>~/agv_ws/src/agv_description/launch/display.launch.py</a:t>
             </a:r>
           </a:p>
         </p:txBody>
@@ -20408,23 +21005,124 @@
               </a:defRPr>
             </a:pPr>
             <a:r>
-              <a:t>현재 단계 검증    |    현재 폴더 ~/agv_ws    |    현재 터미널</a:t>
-            </a:r>
-          </a:p>
-        </p:txBody>
-      </p:sp>
-      <p:sp>
-        <p:nvSpPr>
-          <p:cNvPr id="7" name="Rounded Rectangle 6"/>
+              <a:t>현재 단계 30/31    |    현재 폴더 ~/agv_ws    |    현재 터미널</a:t>
+            </a:r>
+          </a:p>
+        </p:txBody>
+      </p:sp>
+      <p:sp>
+        <p:nvSpPr>
+          <p:cNvPr id="7" name="TextBox 6"/>
+          <p:cNvSpPr txBox="1"/>
+          <p:nvPr/>
+        </p:nvSpPr>
+        <p:spPr>
+          <a:xfrm>
+            <a:off x="658368" y="1627632"/>
+            <a:ext cx="10972800" cy="256032"/>
+          </a:xfrm>
+          <a:prstGeom prst="rect">
+            <a:avLst/>
+          </a:prstGeom>
+          <a:noFill/>
+        </p:spPr>
+        <p:txBody>
+          <a:bodyPr wrap="square" lIns="73152" rIns="73152" tIns="36576" bIns="36576">
+            <a:spAutoFit/>
+          </a:bodyPr>
+          <a:lstStyle/>
+          <a:p>
+            <a:pPr algn="l">
+              <a:spcAft>
+                <a:spcPts val="0"/>
+              </a:spcAft>
+              <a:defRPr sz="1500" b="1">
+                <a:solidFill>
+                  <a:srgbClr val="122C4E"/>
+                </a:solidFill>
+                <a:latin typeface="Noto Sans CJK KR"/>
+              </a:defRPr>
+            </a:pPr>
+            <a:r>
+              <a:t>이번 단계: 파일의 전체 내용을 중간 생략 없이 작성합니다. 아래 줄 범위를 끝까지 입력하세요.</a:t>
+            </a:r>
+          </a:p>
+        </p:txBody>
+      </p:sp>
+      <p:sp>
+        <p:nvSpPr>
+          <p:cNvPr id="8" name="Rectangle 7"/>
           <p:cNvSpPr/>
           <p:nvPr/>
         </p:nvSpPr>
         <p:spPr>
           <a:xfrm>
-            <a:off x="658368" y="1755648"/>
-            <a:ext cx="10972800" cy="2148840"/>
-          </a:xfrm>
-          <a:prstGeom prst="roundRect">
+            <a:off x="658368" y="1956816"/>
+            <a:ext cx="10972800" cy="603504"/>
+          </a:xfrm>
+          <a:prstGeom prst="rect">
+            <a:avLst/>
+          </a:prstGeom>
+          <a:solidFill>
+            <a:srgbClr val="F4F7FB"/>
+          </a:solidFill>
+          <a:ln>
+            <a:solidFill>
+              <a:srgbClr val="F4F7FB"/>
+            </a:solidFill>
+          </a:ln>
+        </p:spPr>
+        <p:style>
+          <a:lnRef idx="1">
+            <a:schemeClr val="accent1"/>
+          </a:lnRef>
+          <a:fillRef idx="3">
+            <a:schemeClr val="accent1"/>
+          </a:fillRef>
+          <a:effectRef idx="2">
+            <a:schemeClr val="accent1"/>
+          </a:effectRef>
+          <a:fontRef idx="minor">
+            <a:schemeClr val="lt1"/>
+          </a:fontRef>
+        </p:style>
+        <p:txBody>
+          <a:bodyPr rtlCol="0" anchor="ctr" wrap="square" lIns="73152" rIns="73152" tIns="36576" bIns="36576"/>
+          <a:lstStyle/>
+          <a:p>
+            <a:pPr algn="l">
+              <a:spcAft>
+                <a:spcPts val="0"/>
+              </a:spcAft>
+              <a:defRPr sz="1400" b="0">
+                <a:solidFill>
+                  <a:srgbClr val="122C4E"/>
+                </a:solidFill>
+                <a:latin typeface="DejaVu Sans Mono"/>
+              </a:defRPr>
+            </a:pPr>
+            <a:r>
+              <a:t>파일 생성: mkdir -p ~/agv_ws/src/agv_description/launch</a:t>
+            </a:r>
+            <a:br/>
+            <a:r>
+              <a:t>파일 열기: nano ~/agv_ws/src/agv_description/launch/display.launch.py</a:t>
+            </a:r>
+          </a:p>
+        </p:txBody>
+      </p:sp>
+      <p:sp>
+        <p:nvSpPr>
+          <p:cNvPr id="9" name="Rectangle 8"/>
+          <p:cNvSpPr/>
+          <p:nvPr/>
+        </p:nvSpPr>
+        <p:spPr>
+          <a:xfrm>
+            <a:off x="658368" y="2706624"/>
+            <a:ext cx="10972800" cy="3364992"/>
+          </a:xfrm>
+          <a:prstGeom prst="rect">
             <a:avLst/>
           </a:prstGeom>
           <a:solidFill>
@@ -20451,14 +21149,14 @@
           </a:fontRef>
         </p:style>
         <p:txBody>
-          <a:bodyPr rtlCol="0" anchor="ctr" wrap="square" lIns="73152" rIns="73152" tIns="36576" bIns="36576"/>
-          <a:lstStyle/>
-          <a:p>
-            <a:pPr algn="l">
-              <a:spcAft>
-                <a:spcPts val="0"/>
-              </a:spcAft>
-              <a:defRPr sz="1600" b="0">
+          <a:bodyPr rtlCol="0" anchor="ctr" wrap="square" lIns="164592" rIns="164592" tIns="109728" bIns="36576"/>
+          <a:lstStyle/>
+          <a:p>
+            <a:pPr algn="l">
+              <a:spcAft>
+                <a:spcPts val="0"/>
+              </a:spcAft>
+              <a:defRPr sz="1400" b="0">
                 <a:solidFill>
                   <a:srgbClr val="FFFFFF"/>
                 </a:solidFill>
@@ -20466,95 +21164,37 @@
               </a:defRPr>
             </a:pPr>
             <a:r>
-              <a:t>xacro ~/agv_ws/src/agv_description/urdf/agv.urdf.xacro &gt; /tmp/agv.urdf</a:t>
-            </a:r>
-            <a:br/>
-            <a:r>
-              <a:t>check_urdf /tmp/agv.urdf</a:t>
-            </a:r>
-          </a:p>
-        </p:txBody>
-      </p:sp>
-      <p:sp>
-        <p:nvSpPr>
-          <p:cNvPr id="8" name="Rounded Rectangle 7"/>
-          <p:cNvSpPr/>
-          <p:nvPr/>
-        </p:nvSpPr>
-        <p:spPr>
-          <a:xfrm>
-            <a:off x="658368" y="4206240"/>
-            <a:ext cx="10972800" cy="1554480"/>
-          </a:xfrm>
-          <a:prstGeom prst="roundRect">
-            <a:avLst/>
-          </a:prstGeom>
-          <a:solidFill>
-            <a:srgbClr val="F4F7FB"/>
-          </a:solidFill>
-          <a:ln>
-            <a:solidFill>
-              <a:srgbClr val="D1DFD5"/>
-            </a:solidFill>
-          </a:ln>
-        </p:spPr>
-        <p:style>
-          <a:lnRef idx="1">
-            <a:schemeClr val="accent1"/>
-          </a:lnRef>
-          <a:fillRef idx="3">
-            <a:schemeClr val="accent1"/>
-          </a:fillRef>
-          <a:effectRef idx="2">
-            <a:schemeClr val="accent1"/>
-          </a:effectRef>
-          <a:fontRef idx="minor">
-            <a:schemeClr val="lt1"/>
-          </a:fontRef>
-        </p:style>
-        <p:txBody>
-          <a:bodyPr rtlCol="0" anchor="ctr" wrap="square" lIns="73152" rIns="73152" tIns="36576" bIns="36576"/>
-          <a:lstStyle/>
-          <a:p>
-            <a:pPr algn="l">
-              <a:spcAft>
-                <a:spcPts val="0"/>
-              </a:spcAft>
-              <a:defRPr sz="1800" b="1">
-                <a:solidFill>
-                  <a:srgbClr val="2A8B5A"/>
-                </a:solidFill>
-                <a:latin typeface="Noto Sans CJK KR"/>
-              </a:defRPr>
-            </a:pPr>
-            <a:r>
-              <a:t>완료 체크</a:t>
-            </a:r>
-            <a:br/>
-            <a:r>
-              <a:t>□ 명령이 오류 없이 실행된다.</a:t>
-            </a:r>
-            <a:br/>
-            <a:r>
-              <a:t>□ 기대한 파일·topic·frame·parameter 이름이 보인다.</a:t>
-            </a:r>
-            <a:br/>
-            <a:r>
-              <a:t>□ 값의 단위와 방향을 한 문장으로 설명할 수 있다.</a:t>
-            </a:r>
-          </a:p>
-        </p:txBody>
-      </p:sp>
-      <p:sp>
-        <p:nvSpPr>
-          <p:cNvPr id="9" name="TextBox 8"/>
+              <a:t>    return LaunchDescription([Node(package='joint_state_publisher_gui',</a:t>
+            </a:r>
+            <a:br/>
+            <a:r>
+              <a:t>        executable='joint_state_publisher_gui'), Node(package='robot_state_publisher',</a:t>
+            </a:r>
+            <a:br/>
+            <a:r>
+              <a:t>        executable='robot_state_publisher',</a:t>
+            </a:r>
+            <a:br/>
+            <a:r>
+              <a:t>        parameters=[{'robot_description': robot_description}]), Node(package='rviz2',</a:t>
+            </a:r>
+            <a:br/>
+            <a:r>
+              <a:t>        executable='rviz2', arguments=['-d', rviz_file])])</a:t>
+            </a:r>
+          </a:p>
+        </p:txBody>
+      </p:sp>
+      <p:sp>
+        <p:nvSpPr>
+          <p:cNvPr id="10" name="TextBox 9"/>
           <p:cNvSpPr txBox="1"/>
           <p:nvPr/>
         </p:nvSpPr>
         <p:spPr>
           <a:xfrm>
-            <a:off x="731520" y="5989320"/>
-            <a:ext cx="10789920" cy="237744"/>
+            <a:off x="749808" y="6181344"/>
+            <a:ext cx="10789920" cy="201168"/>
           </a:xfrm>
           <a:prstGeom prst="rect">
             <a:avLst/>
@@ -20571,15 +21211,15 @@
               <a:spcAft>
                 <a:spcPts val="0"/>
               </a:spcAft>
-              <a:defRPr sz="1500" b="1">
-                <a:solidFill>
-                  <a:srgbClr val="122C4E"/>
-                </a:solidFill>
-                <a:latin typeface="Noto Sans CJK KR"/>
-              </a:defRPr>
-            </a:pPr>
-            <a:r>
-              <a:t>완료 조건: RobotModel과 TF에서 base, 두 wheel, camera, lidar, imu 연결을 확인한다.</a:t>
+              <a:defRPr sz="1000" b="0">
+                <a:solidFill>
+                  <a:srgbClr val="5C6672"/>
+                </a:solidFill>
+                <a:latin typeface="Noto Sans CJK KR"/>
+              </a:defRPr>
+            </a:pPr>
+            <a:r>
+              <a:t>파일 전체 2/2 · 이 슬라이드 다음에 같은 파일의 나머지 줄이 이어집니다.</a:t>
             </a:r>
           </a:p>
         </p:txBody>
@@ -20636,7 +21276,7 @@
               </a:defRPr>
             </a:pPr>
             <a:r>
-              <a:t>막히면: 증상 → 우선 확인 → 재검증</a:t>
+              <a:t>build → source → run 순서로 실행한다</a:t>
             </a:r>
           </a:p>
         </p:txBody>
@@ -20675,7 +21315,7 @@
               </a:defRPr>
             </a:pPr>
             <a:r>
-              <a:t>오류 메시지를 숨기지 않고 같은 순서로 점검합니다.</a:t>
+              <a:t>새 파일 또는 수정 파일은 build와 source 뒤에만 실행 이름·설정에 반영됩니다.</a:t>
             </a:r>
           </a:p>
         </p:txBody>
@@ -20811,7 +21451,7 @@
               </a:defRPr>
             </a:pPr>
             <a:r>
-              <a:t>현재 단계 오류 대응    |    현재 폴더 ~/agv_ws    |    현재 터미널</a:t>
+              <a:t>현재 단계 실행    |    현재 폴더 ~/agv_ws    |    현재 터미널</a:t>
             </a:r>
           </a:p>
         </p:txBody>
@@ -20824,18 +21464,18 @@
         </p:nvSpPr>
         <p:spPr>
           <a:xfrm>
-            <a:off x="694944" y="1755648"/>
-            <a:ext cx="10972800" cy="1115568"/>
+            <a:off x="658368" y="1700784"/>
+            <a:ext cx="10972800" cy="3182112"/>
           </a:xfrm>
           <a:prstGeom prst="roundRect">
             <a:avLst/>
           </a:prstGeom>
           <a:solidFill>
-            <a:srgbClr val="FFF7F4"/>
+            <a:srgbClr val="1D232D"/>
           </a:solidFill>
           <a:ln>
             <a:solidFill>
-              <a:srgbClr val="EDBEB4"/>
+              <a:srgbClr val="1D232D"/>
             </a:solidFill>
           </a:ln>
         </p:spPr>
@@ -20854,10 +21494,27 @@
           </a:fontRef>
         </p:style>
         <p:txBody>
-          <a:bodyPr rtlCol="0" anchor="ctr"/>
-          <a:lstStyle/>
-          <a:p>
-            <a:pPr algn="ctr"/>
+          <a:bodyPr rtlCol="0" anchor="ctr" wrap="square" lIns="73152" rIns="73152" tIns="36576" bIns="36576"/>
+          <a:lstStyle/>
+          <a:p>
+            <a:pPr algn="l">
+              <a:spcAft>
+                <a:spcPts val="0"/>
+              </a:spcAft>
+              <a:defRPr sz="1600" b="0">
+                <a:solidFill>
+                  <a:srgbClr val="FFFFFF"/>
+                </a:solidFill>
+                <a:latin typeface="DejaVu Sans Mono"/>
+              </a:defRPr>
+            </a:pPr>
+            <a:r>
+              <a:t>cd ~/agv_ws &amp;&amp; source install/setup.bash</a:t>
+            </a:r>
+            <a:br/>
+            <a:r>
+              <a:t>ros2 launch agv_description display.launch.py</a:t>
+            </a:r>
           </a:p>
         </p:txBody>
       </p:sp>
@@ -20869,8 +21526,8 @@
         </p:nvSpPr>
         <p:spPr>
           <a:xfrm>
-            <a:off x="896112" y="1901952"/>
-            <a:ext cx="2926080" cy="274320"/>
+            <a:off x="786384" y="5239512"/>
+            <a:ext cx="1261872" cy="237744"/>
           </a:xfrm>
           <a:prstGeom prst="rect">
             <a:avLst/>
@@ -20889,13 +21546,13 @@
               </a:spcAft>
               <a:defRPr sz="1800" b="1">
                 <a:solidFill>
-                  <a:srgbClr val="BE3B3B"/>
-                </a:solidFill>
-                <a:latin typeface="Noto Sans CJK KR"/>
-              </a:defRPr>
-            </a:pPr>
-            <a:r>
-              <a:t>증상 1: XML parsing error</a:t>
+                  <a:srgbClr val="2A8B5A"/>
+                </a:solidFill>
+                <a:latin typeface="Noto Sans CJK KR"/>
+              </a:defRPr>
+            </a:pPr>
+            <a:r>
+              <a:t>확인 기준</a:t>
             </a:r>
           </a:p>
         </p:txBody>
@@ -20908,8 +21565,8 @@
         </p:nvSpPr>
         <p:spPr>
           <a:xfrm>
-            <a:off x="3794760" y="1883664"/>
-            <a:ext cx="7543800" cy="621792"/>
+            <a:off x="786384" y="5532120"/>
+            <a:ext cx="10469880" cy="420624"/>
           </a:xfrm>
           <a:prstGeom prst="rect">
             <a:avLst/>
@@ -20926,7 +21583,7 @@
               <a:spcAft>
                 <a:spcPts val="0"/>
               </a:spcAft>
-              <a:defRPr sz="1600" b="0">
+              <a:defRPr sz="1800" b="0">
                 <a:solidFill>
                   <a:srgbClr val="122C4E"/>
                 </a:solidFill>
@@ -20934,177 +21591,7 @@
               </a:defRPr>
             </a:pPr>
             <a:r>
-              <a:t>우선 확인: 닫는 태그·따옴표·중첩 구조를 확인한다.</a:t>
-            </a:r>
-            <a:br/>
-            <a:r>
-              <a:t>수정 후: xacro ~/agv_ws/src/agv_description/urdf/agv.urdf.xacro &gt; /tmp/agv.urdf</a:t>
-            </a:r>
-          </a:p>
-        </p:txBody>
-      </p:sp>
-      <p:sp>
-        <p:nvSpPr>
-          <p:cNvPr id="10" name="Rounded Rectangle 9"/>
-          <p:cNvSpPr/>
-          <p:nvPr/>
-        </p:nvSpPr>
-        <p:spPr>
-          <a:xfrm>
-            <a:off x="694944" y="3172968"/>
-            <a:ext cx="10972800" cy="1115568"/>
-          </a:xfrm>
-          <a:prstGeom prst="roundRect">
-            <a:avLst/>
-          </a:prstGeom>
-          <a:solidFill>
-            <a:srgbClr val="FFF7F4"/>
-          </a:solidFill>
-          <a:ln>
-            <a:solidFill>
-              <a:srgbClr val="EDBEB4"/>
-            </a:solidFill>
-          </a:ln>
-        </p:spPr>
-        <p:style>
-          <a:lnRef idx="1">
-            <a:schemeClr val="accent1"/>
-          </a:lnRef>
-          <a:fillRef idx="3">
-            <a:schemeClr val="accent1"/>
-          </a:fillRef>
-          <a:effectRef idx="2">
-            <a:schemeClr val="accent1"/>
-          </a:effectRef>
-          <a:fontRef idx="minor">
-            <a:schemeClr val="lt1"/>
-          </a:fontRef>
-        </p:style>
-        <p:txBody>
-          <a:bodyPr rtlCol="0" anchor="ctr"/>
-          <a:lstStyle/>
-          <a:p>
-            <a:pPr algn="ctr"/>
-          </a:p>
-        </p:txBody>
-      </p:sp>
-      <p:sp>
-        <p:nvSpPr>
-          <p:cNvPr id="11" name="TextBox 10"/>
-          <p:cNvSpPr txBox="1"/>
-          <p:nvPr/>
-        </p:nvSpPr>
-        <p:spPr>
-          <a:xfrm>
-            <a:off x="896112" y="3319272"/>
-            <a:ext cx="2926080" cy="274320"/>
-          </a:xfrm>
-          <a:prstGeom prst="rect">
-            <a:avLst/>
-          </a:prstGeom>
-          <a:noFill/>
-        </p:spPr>
-        <p:txBody>
-          <a:bodyPr wrap="square" lIns="73152" rIns="73152" tIns="36576" bIns="36576">
-            <a:spAutoFit/>
-          </a:bodyPr>
-          <a:lstStyle/>
-          <a:p>
-            <a:pPr algn="l">
-              <a:spcAft>
-                <a:spcPts val="0"/>
-              </a:spcAft>
-              <a:defRPr sz="1800" b="1">
-                <a:solidFill>
-                  <a:srgbClr val="BE3B3B"/>
-                </a:solidFill>
-                <a:latin typeface="Noto Sans CJK KR"/>
-              </a:defRPr>
-            </a:pPr>
-            <a:r>
-              <a:t>증상 2: 바퀴가 눕거나 TF가 없음</a:t>
-            </a:r>
-          </a:p>
-        </p:txBody>
-      </p:sp>
-      <p:sp>
-        <p:nvSpPr>
-          <p:cNvPr id="12" name="TextBox 11"/>
-          <p:cNvSpPr txBox="1"/>
-          <p:nvPr/>
-        </p:nvSpPr>
-        <p:spPr>
-          <a:xfrm>
-            <a:off x="3794760" y="3300984"/>
-            <a:ext cx="7543800" cy="621792"/>
-          </a:xfrm>
-          <a:prstGeom prst="rect">
-            <a:avLst/>
-          </a:prstGeom>
-          <a:noFill/>
-        </p:spPr>
-        <p:txBody>
-          <a:bodyPr wrap="square" lIns="73152" rIns="73152" tIns="36576" bIns="36576">
-            <a:spAutoFit/>
-          </a:bodyPr>
-          <a:lstStyle/>
-          <a:p>
-            <a:pPr algn="l">
-              <a:spcAft>
-                <a:spcPts val="0"/>
-              </a:spcAft>
-              <a:defRPr sz="1600" b="0">
-                <a:solidFill>
-                  <a:srgbClr val="122C4E"/>
-                </a:solidFill>
-                <a:latin typeface="Noto Sans CJK KR"/>
-              </a:defRPr>
-            </a:pPr>
-            <a:r>
-              <a:t>우선 확인: cylinder rpy·joint axis·parent/child link 이름을 확인한다.</a:t>
-            </a:r>
-            <a:br/>
-            <a:r>
-              <a:t>수정 후: xacro ~/agv_ws/src/agv_description/urdf/agv.urdf.xacro &gt; /tmp/agv.urdf</a:t>
-            </a:r>
-          </a:p>
-        </p:txBody>
-      </p:sp>
-      <p:sp>
-        <p:nvSpPr>
-          <p:cNvPr id="13" name="TextBox 12"/>
-          <p:cNvSpPr txBox="1"/>
-          <p:nvPr/>
-        </p:nvSpPr>
-        <p:spPr>
-          <a:xfrm>
-            <a:off x="822960" y="5102352"/>
-            <a:ext cx="10607040" cy="402336"/>
-          </a:xfrm>
-          <a:prstGeom prst="rect">
-            <a:avLst/>
-          </a:prstGeom>
-          <a:noFill/>
-        </p:spPr>
-        <p:txBody>
-          <a:bodyPr wrap="square" lIns="73152" rIns="73152" tIns="36576" bIns="36576">
-            <a:spAutoFit/>
-          </a:bodyPr>
-          <a:lstStyle/>
-          <a:p>
-            <a:pPr algn="ctr">
-              <a:spcAft>
-                <a:spcPts val="0"/>
-              </a:spcAft>
-              <a:defRPr sz="1800" b="1">
-                <a:solidFill>
-                  <a:srgbClr val="DB7E22"/>
-                </a:solidFill>
-                <a:latin typeface="Noto Sans CJK KR"/>
-              </a:defRPr>
-            </a:pPr>
-            <a:r>
-              <a:t>공통 순서: ① 현재 폴더 ② source ③ 파일 경로 ④ 이름/타입/단위 ⑤ build·source 후 재실행</a:t>
+              <a:t>RobotModel과 TF에서 base, 두 wheel, camera, lidar, imu 연결을 확인한다.</a:t>
             </a:r>
           </a:p>
         </p:txBody>
@@ -21161,7 +21648,7 @@
               </a:defRPr>
             </a:pPr>
             <a:r>
-              <a:t>미니 실습: 값 하나를 바꾸고 결과를 비교한다</a:t>
+              <a:t>정상 결과: 실제 환경에서 확인한 출력</a:t>
             </a:r>
           </a:p>
         </p:txBody>
@@ -21200,7 +21687,7 @@
               </a:defRPr>
             </a:pPr>
             <a:r>
-              <a:t>정상 결과를 만든 뒤에는 한 번에 하나의 값만 바꿉니다.</a:t>
+              <a:t>실제 ROS 2 환경의 파일·패키지·구성 검증 로그</a:t>
             </a:r>
           </a:p>
         </p:txBody>
@@ -21283,132 +21770,40 @@
           </a:p>
         </p:txBody>
       </p:sp>
-      <p:sp>
-        <p:nvSpPr>
-          <p:cNvPr id="6" name="Rectangle 5"/>
-          <p:cNvSpPr/>
-          <p:nvPr/>
-        </p:nvSpPr>
-        <p:spPr>
-          <a:xfrm>
-            <a:off x="566928" y="1188720"/>
-            <a:ext cx="11064240" cy="347472"/>
-          </a:xfrm>
-          <a:prstGeom prst="rect">
-            <a:avLst/>
-          </a:prstGeom>
-          <a:solidFill>
-            <a:srgbClr val="F4F7FB"/>
-          </a:solidFill>
-          <a:ln>
-            <a:solidFill>
-              <a:srgbClr val="F4F7FB"/>
-            </a:solidFill>
-          </a:ln>
-        </p:spPr>
-        <p:style>
-          <a:lnRef idx="1">
-            <a:schemeClr val="accent1"/>
-          </a:lnRef>
-          <a:fillRef idx="3">
-            <a:schemeClr val="accent1"/>
-          </a:fillRef>
-          <a:effectRef idx="2">
-            <a:schemeClr val="accent1"/>
-          </a:effectRef>
-          <a:fontRef idx="minor">
-            <a:schemeClr val="lt1"/>
-          </a:fontRef>
-        </p:style>
-        <p:txBody>
-          <a:bodyPr rtlCol="0" anchor="ctr" wrap="square" lIns="73152" rIns="73152" tIns="36576" bIns="36576"/>
-          <a:lstStyle/>
-          <a:p>
-            <a:pPr algn="l">
-              <a:spcAft>
-                <a:spcPts val="0"/>
-              </a:spcAft>
-              <a:defRPr sz="1300" b="1">
-                <a:solidFill>
-                  <a:srgbClr val="122C4E"/>
-                </a:solidFill>
-                <a:latin typeface="Noto Sans CJK KR"/>
-              </a:defRPr>
-            </a:pPr>
-            <a:r>
-              <a:t>현재 단계 미니 실습    |    현재 폴더 ~/agv_ws    |    현재 터미널</a:t>
-            </a:r>
-          </a:p>
-        </p:txBody>
-      </p:sp>
-      <p:sp>
-        <p:nvSpPr>
-          <p:cNvPr id="7" name="Rounded Rectangle 6"/>
-          <p:cNvSpPr/>
-          <p:nvPr/>
-        </p:nvSpPr>
-        <p:spPr>
-          <a:xfrm>
-            <a:off x="749808" y="1874519"/>
-            <a:ext cx="10652760" cy="1993392"/>
-          </a:xfrm>
-          <a:prstGeom prst="roundRect">
-            <a:avLst/>
-          </a:prstGeom>
-          <a:solidFill>
-            <a:srgbClr val="FFF8EB"/>
-          </a:solidFill>
-          <a:ln>
-            <a:solidFill>
-              <a:srgbClr val="ECC680"/>
-            </a:solidFill>
-          </a:ln>
-        </p:spPr>
-        <p:style>
-          <a:lnRef idx="1">
-            <a:schemeClr val="accent1"/>
-          </a:lnRef>
-          <a:fillRef idx="3">
-            <a:schemeClr val="accent1"/>
-          </a:fillRef>
-          <a:effectRef idx="2">
-            <a:schemeClr val="accent1"/>
-          </a:effectRef>
-          <a:fontRef idx="minor">
-            <a:schemeClr val="lt1"/>
-          </a:fontRef>
-        </p:style>
-        <p:txBody>
-          <a:bodyPr rtlCol="0" anchor="ctr" wrap="square" lIns="73152" rIns="73152" tIns="36576" bIns="36576"/>
-          <a:lstStyle/>
-          <a:p>
-            <a:pPr algn="ctr">
-              <a:spcAft>
-                <a:spcPts val="0"/>
-              </a:spcAft>
-              <a:defRPr sz="2300" b="1">
-                <a:solidFill>
-                  <a:srgbClr val="122C4E"/>
-                </a:solidFill>
-                <a:latin typeface="Noto Sans CJK KR"/>
-              </a:defRPr>
-            </a:pPr>
-            <a:r>
-              <a:t>wheel_radius를 0.08 m에서 0.10 m로 바꾸고 RobotModel에서 바퀴 크기 변화를 확인한다.</a:t>
-            </a:r>
-          </a:p>
-        </p:txBody>
-      </p:sp>
-      <p:sp>
-        <p:nvSpPr>
-          <p:cNvPr id="8" name="TextBox 7"/>
+      <p:pic>
+        <p:nvPicPr>
+          <p:cNvPr id="6" name="Picture 5" descr="validation_terminal.png"/>
+          <p:cNvPicPr>
+            <a:picLocks noChangeAspect="1"/>
+          </p:cNvPicPr>
+          <p:nvPr/>
+        </p:nvPicPr>
+        <p:blipFill>
+          <a:blip r:embed="rId2"/>
+          <a:stretch>
+            <a:fillRect/>
+          </a:stretch>
+        </p:blipFill>
+        <p:spPr>
+          <a:xfrm>
+            <a:off x="790956" y="1884338"/>
+            <a:ext cx="10607040" cy="3738546"/>
+          </a:xfrm>
+          <a:prstGeom prst="rect">
+            <a:avLst/>
+          </a:prstGeom>
+        </p:spPr>
+      </p:pic>
+      <p:sp>
+        <p:nvSpPr>
+          <p:cNvPr id="7" name="TextBox 6"/>
           <p:cNvSpPr txBox="1"/>
           <p:nvPr/>
         </p:nvSpPr>
         <p:spPr>
           <a:xfrm>
-            <a:off x="877824" y="4590288"/>
-            <a:ext cx="10241280" cy="594360"/>
+            <a:off x="777240" y="6217920"/>
+            <a:ext cx="10607040" cy="182880"/>
           </a:xfrm>
           <a:prstGeom prst="rect">
             <a:avLst/>
@@ -21425,15 +21820,15 @@
               <a:spcAft>
                 <a:spcPts val="0"/>
               </a:spcAft>
-              <a:defRPr sz="1900" b="1">
-                <a:solidFill>
-                  <a:srgbClr val="DB7E22"/>
-                </a:solidFill>
-                <a:latin typeface="Noto Sans CJK KR"/>
-              </a:defRPr>
-            </a:pPr>
-            <a:r>
-              <a:t>기록할 것: 바꾼 값(단위) · 기대한 변화 · 실제 출력/화면 · 원래 값으로 되돌린 결과</a:t>
+              <a:defRPr sz="1100" b="1">
+                <a:solidFill>
+                  <a:srgbClr val="2A8B5A"/>
+                </a:solidFill>
+                <a:latin typeface="Noto Sans CJK KR"/>
+              </a:defRPr>
+            </a:pPr>
+            <a:r>
+              <a:t>① 명령/설정  ② 정상 출력 또는 화면  ③ 다음 검증 명령으로 재확인</a:t>
             </a:r>
           </a:p>
         </p:txBody>
@@ -21490,7 +21885,7 @@
               </a:defRPr>
             </a:pPr>
             <a:r>
-              <a:t>체크포인트를 저장하고 다음 모듈로 넘긴다</a:t>
+              <a:t>객관적 검증 명령으로 완료를 확인한다</a:t>
             </a:r>
           </a:p>
         </p:txBody>
@@ -21529,7 +21924,7 @@
               </a:defRPr>
             </a:pPr>
             <a:r>
-              <a:t>현재 Complete는 다음 Starter의 기준선입니다.</a:t>
+              <a:t>화면만 보지 말고 topic·frame·파일·parameter를 다시 확인합니다.</a:t>
             </a:r>
           </a:p>
         </p:txBody>
@@ -21665,7 +22060,7 @@
               </a:defRPr>
             </a:pPr>
             <a:r>
-              <a:t>현재 단계 체크포인트    |    현재 폴더 ~/agv_ws    |    현재 터미널</a:t>
+              <a:t>현재 단계 검증    |    현재 폴더 ~/agv_ws    |    현재 터미널</a:t>
             </a:r>
           </a:p>
         </p:txBody>
@@ -21678,8 +22073,70 @@
         </p:nvSpPr>
         <p:spPr>
           <a:xfrm>
-            <a:off x="685800" y="1737360"/>
-            <a:ext cx="10972800" cy="3611880"/>
+            <a:off x="658368" y="1755648"/>
+            <a:ext cx="10972800" cy="2148840"/>
+          </a:xfrm>
+          <a:prstGeom prst="roundRect">
+            <a:avLst/>
+          </a:prstGeom>
+          <a:solidFill>
+            <a:srgbClr val="1D232D"/>
+          </a:solidFill>
+          <a:ln>
+            <a:solidFill>
+              <a:srgbClr val="1D232D"/>
+            </a:solidFill>
+          </a:ln>
+        </p:spPr>
+        <p:style>
+          <a:lnRef idx="1">
+            <a:schemeClr val="accent1"/>
+          </a:lnRef>
+          <a:fillRef idx="3">
+            <a:schemeClr val="accent1"/>
+          </a:fillRef>
+          <a:effectRef idx="2">
+            <a:schemeClr val="accent1"/>
+          </a:effectRef>
+          <a:fontRef idx="minor">
+            <a:schemeClr val="lt1"/>
+          </a:fontRef>
+        </p:style>
+        <p:txBody>
+          <a:bodyPr rtlCol="0" anchor="ctr" wrap="square" lIns="73152" rIns="73152" tIns="36576" bIns="36576"/>
+          <a:lstStyle/>
+          <a:p>
+            <a:pPr algn="l">
+              <a:spcAft>
+                <a:spcPts val="0"/>
+              </a:spcAft>
+              <a:defRPr sz="1600" b="0">
+                <a:solidFill>
+                  <a:srgbClr val="FFFFFF"/>
+                </a:solidFill>
+                <a:latin typeface="DejaVu Sans Mono"/>
+              </a:defRPr>
+            </a:pPr>
+            <a:r>
+              <a:t>xacro ~/agv_ws/src/agv_description/urdf/agv.urdf.xacro &gt; /tmp/agv.urdf</a:t>
+            </a:r>
+            <a:br/>
+            <a:r>
+              <a:t>check_urdf /tmp/agv.urdf</a:t>
+            </a:r>
+          </a:p>
+        </p:txBody>
+      </p:sp>
+      <p:sp>
+        <p:nvSpPr>
+          <p:cNvPr id="8" name="Rounded Rectangle 7"/>
+          <p:cNvSpPr/>
+          <p:nvPr/>
+        </p:nvSpPr>
+        <p:spPr>
+          <a:xfrm>
+            <a:off x="658368" y="4206240"/>
+            <a:ext cx="10972800" cy="1554480"/>
           </a:xfrm>
           <a:prstGeom prst="roundRect">
             <a:avLst/>
@@ -21689,7 +22146,7 @@
           </a:solidFill>
           <a:ln>
             <a:solidFill>
-              <a:srgbClr val="D2DCE8"/>
+              <a:srgbClr val="D1DFD5"/>
             </a:solidFill>
           </a:ln>
         </p:spPr>
@@ -21708,112 +22165,34 @@
           </a:fontRef>
         </p:style>
         <p:txBody>
-          <a:bodyPr rtlCol="0" anchor="ctr"/>
-          <a:lstStyle/>
-          <a:p>
-            <a:pPr algn="ctr"/>
-          </a:p>
-        </p:txBody>
-      </p:sp>
-      <p:sp>
-        <p:nvSpPr>
-          <p:cNvPr id="8" name="TextBox 7"/>
-          <p:cNvSpPr txBox="1"/>
-          <p:nvPr/>
-        </p:nvSpPr>
-        <p:spPr>
-          <a:xfrm>
-            <a:off x="896112" y="1993392"/>
-            <a:ext cx="10332720" cy="2971800"/>
-          </a:xfrm>
-          <a:prstGeom prst="rect">
-            <a:avLst/>
-          </a:prstGeom>
-          <a:noFill/>
-        </p:spPr>
-        <p:txBody>
-          <a:bodyPr wrap="square" lIns="109728" rIns="109728">
-            <a:spAutoFit/>
-          </a:bodyPr>
-          <a:lstStyle/>
-          <a:p>
-            <a:pPr>
-              <a:spcAft>
-                <a:spcPts val="800"/>
-              </a:spcAft>
-              <a:defRPr sz="1800">
-                <a:solidFill>
-                  <a:srgbClr val="122C4E"/>
-                </a:solidFill>
-                <a:latin typeface="Noto Sans CJK KR"/>
-              </a:defRPr>
-            </a:pPr>
-            <a:r>
-              <a:t>• □ 완료 화면: RobotModel과 TF에서 base, 두 wheel, camera, lidar, imu 연결을 확인한다.</a:t>
-            </a:r>
-          </a:p>
-          <a:p>
-            <a:pPr>
-              <a:spcAft>
-                <a:spcPts val="800"/>
-              </a:spcAft>
-              <a:defRPr sz="1800">
-                <a:solidFill>
-                  <a:srgbClr val="122C4E"/>
-                </a:solidFill>
-                <a:latin typeface="Noto Sans CJK KR"/>
-              </a:defRPr>
-            </a:pPr>
-            <a:r>
-              <a:t>• □ Complete 파일: blocks/B_robot_build/M05_urdf_basic_model/complete/</a:t>
-            </a:r>
-          </a:p>
-          <a:p>
-            <a:pPr>
-              <a:spcAft>
-                <a:spcPts val="800"/>
-              </a:spcAft>
-              <a:defRPr sz="1800">
-                <a:solidFill>
-                  <a:srgbClr val="122C4E"/>
-                </a:solidFill>
-                <a:latin typeface="Noto Sans CJK KR"/>
-              </a:defRPr>
-            </a:pPr>
-            <a:r>
-              <a:t>• □ 정상 로그·캡처: logs/validation.log, screenshots/validation_terminal.png</a:t>
-            </a:r>
-          </a:p>
-          <a:p>
-            <a:pPr>
-              <a:spcAft>
-                <a:spcPts val="800"/>
-              </a:spcAft>
-              <a:defRPr sz="1800">
-                <a:solidFill>
-                  <a:srgbClr val="122C4E"/>
-                </a:solidFill>
-                <a:latin typeface="Noto Sans CJK KR"/>
-              </a:defRPr>
-            </a:pPr>
-            <a:r>
-              <a:t>• □ 버전 식별: CHECKSUM_or_TAG.txt의 SHA-256 manifest</a:t>
-            </a:r>
-          </a:p>
-          <a:p>
-            <a:pPr>
-              <a:spcAft>
-                <a:spcPts val="800"/>
-              </a:spcAft>
-              <a:defRPr sz="1800">
-                <a:solidFill>
-                  <a:srgbClr val="122C4E"/>
-                </a:solidFill>
-                <a:latin typeface="Noto Sans CJK KR"/>
-              </a:defRPr>
-            </a:pPr>
-            <a:r>
-              <a:t>• □ 다음 시작 조건: M06 Xacro 모듈화</a:t>
+          <a:bodyPr rtlCol="0" anchor="ctr" wrap="square" lIns="73152" rIns="73152" tIns="36576" bIns="36576"/>
+          <a:lstStyle/>
+          <a:p>
+            <a:pPr algn="l">
+              <a:spcAft>
+                <a:spcPts val="0"/>
+              </a:spcAft>
+              <a:defRPr sz="1800" b="1">
+                <a:solidFill>
+                  <a:srgbClr val="2A8B5A"/>
+                </a:solidFill>
+                <a:latin typeface="Noto Sans CJK KR"/>
+              </a:defRPr>
+            </a:pPr>
+            <a:r>
+              <a:t>완료 체크</a:t>
+            </a:r>
+            <a:br/>
+            <a:r>
+              <a:t>□ 명령이 오류 없이 실행된다.</a:t>
+            </a:r>
+            <a:br/>
+            <a:r>
+              <a:t>□ 기대한 파일·topic·frame·parameter 이름이 보인다.</a:t>
+            </a:r>
+            <a:br/>
+            <a:r>
+              <a:t>□ 값의 단위와 방향을 한 문장으로 설명할 수 있다.</a:t>
             </a:r>
           </a:p>
         </p:txBody>
@@ -21826,8 +22205,8 @@
         </p:nvSpPr>
         <p:spPr>
           <a:xfrm>
-            <a:off x="868680" y="5596128"/>
-            <a:ext cx="10515600" cy="338328"/>
+            <a:off x="731520" y="5989320"/>
+            <a:ext cx="10789920" cy="237744"/>
           </a:xfrm>
           <a:prstGeom prst="rect">
             <a:avLst/>
@@ -21840,19 +22219,19 @@
           </a:bodyPr>
           <a:lstStyle/>
           <a:p>
-            <a:pPr algn="ctr">
-              <a:spcAft>
-                <a:spcPts val="0"/>
-              </a:spcAft>
-              <a:defRPr sz="1700" b="1">
-                <a:solidFill>
-                  <a:srgbClr val="2A8B5A"/>
-                </a:solidFill>
-                <a:latin typeface="Noto Sans CJK KR"/>
-              </a:defRPr>
-            </a:pPr>
-            <a:r>
-              <a:t>다음 모듈을 시작하기 전, 이 슬라이드의 Complete와 다음 모듈의 Starter를 비교합니다.</a:t>
+            <a:pPr algn="l">
+              <a:spcAft>
+                <a:spcPts val="0"/>
+              </a:spcAft>
+              <a:defRPr sz="1500" b="1">
+                <a:solidFill>
+                  <a:srgbClr val="122C4E"/>
+                </a:solidFill>
+                <a:latin typeface="Noto Sans CJK KR"/>
+              </a:defRPr>
+            </a:pPr>
+            <a:r>
+              <a:t>완료 조건: RobotModel과 TF에서 base, 두 wheel, camera, lidar, imu 연결을 확인한다.</a:t>
             </a:r>
           </a:p>
         </p:txBody>
@@ -22242,6 +22621,1279 @@
               </a:defRPr>
             </a:pPr>
             <a:r>
+              <a:t>막히면: 증상 → 우선 확인 → 재검증</a:t>
+            </a:r>
+          </a:p>
+        </p:txBody>
+      </p:sp>
+      <p:sp>
+        <p:nvSpPr>
+          <p:cNvPr id="3" name="TextBox 2"/>
+          <p:cNvSpPr txBox="1"/>
+          <p:nvPr/>
+        </p:nvSpPr>
+        <p:spPr>
+          <a:xfrm>
+            <a:off x="603504" y="859536"/>
+            <a:ext cx="10698480" cy="292608"/>
+          </a:xfrm>
+          <a:prstGeom prst="rect">
+            <a:avLst/>
+          </a:prstGeom>
+          <a:noFill/>
+        </p:spPr>
+        <p:txBody>
+          <a:bodyPr wrap="square" lIns="73152" rIns="73152" tIns="36576" bIns="36576">
+            <a:spAutoFit/>
+          </a:bodyPr>
+          <a:lstStyle/>
+          <a:p>
+            <a:pPr algn="l">
+              <a:spcAft>
+                <a:spcPts val="0"/>
+              </a:spcAft>
+              <a:defRPr sz="1700" b="0">
+                <a:solidFill>
+                  <a:srgbClr val="5C6672"/>
+                </a:solidFill>
+                <a:latin typeface="Noto Sans CJK KR"/>
+              </a:defRPr>
+            </a:pPr>
+            <a:r>
+              <a:t>오류 메시지를 숨기지 않고 같은 순서로 점검합니다.</a:t>
+            </a:r>
+          </a:p>
+        </p:txBody>
+      </p:sp>
+      <p:sp>
+        <p:nvSpPr>
+          <p:cNvPr id="4" name="TextBox 3"/>
+          <p:cNvSpPr txBox="1"/>
+          <p:nvPr/>
+        </p:nvSpPr>
+        <p:spPr>
+          <a:xfrm>
+            <a:off x="530352" y="6510528"/>
+            <a:ext cx="7772400" cy="201168"/>
+          </a:xfrm>
+          <a:prstGeom prst="rect">
+            <a:avLst/>
+          </a:prstGeom>
+          <a:noFill/>
+        </p:spPr>
+        <p:txBody>
+          <a:bodyPr wrap="square" lIns="73152" rIns="73152" tIns="36576" bIns="36576">
+            <a:spAutoFit/>
+          </a:bodyPr>
+          <a:lstStyle/>
+          <a:p>
+            <a:pPr algn="l">
+              <a:spcAft>
+                <a:spcPts val="0"/>
+              </a:spcAft>
+              <a:defRPr sz="1000" b="0">
+                <a:solidFill>
+                  <a:srgbClr val="5C6672"/>
+                </a:solidFill>
+                <a:latin typeface="Noto Sans CJK KR"/>
+              </a:defRPr>
+            </a:pPr>
+            <a:r>
+              <a:t>ROS 2 Jazzy · Gazebo Harmonic · M05 · 따라 하기형 AGV 실습</a:t>
+            </a:r>
+          </a:p>
+        </p:txBody>
+      </p:sp>
+      <p:sp>
+        <p:nvSpPr>
+          <p:cNvPr id="5" name="TextBox 4"/>
+          <p:cNvSpPr txBox="1"/>
+          <p:nvPr/>
+        </p:nvSpPr>
+        <p:spPr>
+          <a:xfrm>
+            <a:off x="9144000" y="6510528"/>
+            <a:ext cx="2468880" cy="201168"/>
+          </a:xfrm>
+          <a:prstGeom prst="rect">
+            <a:avLst/>
+          </a:prstGeom>
+          <a:noFill/>
+        </p:spPr>
+        <p:txBody>
+          <a:bodyPr wrap="square" lIns="73152" rIns="73152" tIns="36576" bIns="36576">
+            <a:spAutoFit/>
+          </a:bodyPr>
+          <a:lstStyle/>
+          <a:p>
+            <a:pPr algn="r">
+              <a:spcAft>
+                <a:spcPts val="0"/>
+              </a:spcAft>
+              <a:defRPr sz="1000" b="0">
+                <a:solidFill>
+                  <a:srgbClr val="5C6672"/>
+                </a:solidFill>
+                <a:latin typeface="Noto Sans CJK KR"/>
+              </a:defRPr>
+            </a:pPr>
+            <a:r>
+              <a:t>명령·파일 경로는 슬라이드에서 복사 가능</a:t>
+            </a:r>
+          </a:p>
+        </p:txBody>
+      </p:sp>
+      <p:sp>
+        <p:nvSpPr>
+          <p:cNvPr id="6" name="Rectangle 5"/>
+          <p:cNvSpPr/>
+          <p:nvPr/>
+        </p:nvSpPr>
+        <p:spPr>
+          <a:xfrm>
+            <a:off x="566928" y="1188720"/>
+            <a:ext cx="11064240" cy="347472"/>
+          </a:xfrm>
+          <a:prstGeom prst="rect">
+            <a:avLst/>
+          </a:prstGeom>
+          <a:solidFill>
+            <a:srgbClr val="F4F7FB"/>
+          </a:solidFill>
+          <a:ln>
+            <a:solidFill>
+              <a:srgbClr val="F4F7FB"/>
+            </a:solidFill>
+          </a:ln>
+        </p:spPr>
+        <p:style>
+          <a:lnRef idx="1">
+            <a:schemeClr val="accent1"/>
+          </a:lnRef>
+          <a:fillRef idx="3">
+            <a:schemeClr val="accent1"/>
+          </a:fillRef>
+          <a:effectRef idx="2">
+            <a:schemeClr val="accent1"/>
+          </a:effectRef>
+          <a:fontRef idx="minor">
+            <a:schemeClr val="lt1"/>
+          </a:fontRef>
+        </p:style>
+        <p:txBody>
+          <a:bodyPr rtlCol="0" anchor="ctr" wrap="square" lIns="73152" rIns="73152" tIns="36576" bIns="36576"/>
+          <a:lstStyle/>
+          <a:p>
+            <a:pPr algn="l">
+              <a:spcAft>
+                <a:spcPts val="0"/>
+              </a:spcAft>
+              <a:defRPr sz="1300" b="1">
+                <a:solidFill>
+                  <a:srgbClr val="122C4E"/>
+                </a:solidFill>
+                <a:latin typeface="Noto Sans CJK KR"/>
+              </a:defRPr>
+            </a:pPr>
+            <a:r>
+              <a:t>현재 단계 오류 대응    |    현재 폴더 ~/agv_ws    |    현재 터미널</a:t>
+            </a:r>
+          </a:p>
+        </p:txBody>
+      </p:sp>
+      <p:sp>
+        <p:nvSpPr>
+          <p:cNvPr id="7" name="Rounded Rectangle 6"/>
+          <p:cNvSpPr/>
+          <p:nvPr/>
+        </p:nvSpPr>
+        <p:spPr>
+          <a:xfrm>
+            <a:off x="694944" y="1755648"/>
+            <a:ext cx="10972800" cy="1115568"/>
+          </a:xfrm>
+          <a:prstGeom prst="roundRect">
+            <a:avLst/>
+          </a:prstGeom>
+          <a:solidFill>
+            <a:srgbClr val="FFF7F4"/>
+          </a:solidFill>
+          <a:ln>
+            <a:solidFill>
+              <a:srgbClr val="EDBEB4"/>
+            </a:solidFill>
+          </a:ln>
+        </p:spPr>
+        <p:style>
+          <a:lnRef idx="1">
+            <a:schemeClr val="accent1"/>
+          </a:lnRef>
+          <a:fillRef idx="3">
+            <a:schemeClr val="accent1"/>
+          </a:fillRef>
+          <a:effectRef idx="2">
+            <a:schemeClr val="accent1"/>
+          </a:effectRef>
+          <a:fontRef idx="minor">
+            <a:schemeClr val="lt1"/>
+          </a:fontRef>
+        </p:style>
+        <p:txBody>
+          <a:bodyPr rtlCol="0" anchor="ctr"/>
+          <a:lstStyle/>
+          <a:p>
+            <a:pPr algn="ctr"/>
+          </a:p>
+        </p:txBody>
+      </p:sp>
+      <p:sp>
+        <p:nvSpPr>
+          <p:cNvPr id="8" name="TextBox 7"/>
+          <p:cNvSpPr txBox="1"/>
+          <p:nvPr/>
+        </p:nvSpPr>
+        <p:spPr>
+          <a:xfrm>
+            <a:off x="896112" y="1901952"/>
+            <a:ext cx="2926080" cy="274320"/>
+          </a:xfrm>
+          <a:prstGeom prst="rect">
+            <a:avLst/>
+          </a:prstGeom>
+          <a:noFill/>
+        </p:spPr>
+        <p:txBody>
+          <a:bodyPr wrap="square" lIns="73152" rIns="73152" tIns="36576" bIns="36576">
+            <a:spAutoFit/>
+          </a:bodyPr>
+          <a:lstStyle/>
+          <a:p>
+            <a:pPr algn="l">
+              <a:spcAft>
+                <a:spcPts val="0"/>
+              </a:spcAft>
+              <a:defRPr sz="1800" b="1">
+                <a:solidFill>
+                  <a:srgbClr val="BE3B3B"/>
+                </a:solidFill>
+                <a:latin typeface="Noto Sans CJK KR"/>
+              </a:defRPr>
+            </a:pPr>
+            <a:r>
+              <a:t>증상 1: XML parsing error</a:t>
+            </a:r>
+          </a:p>
+        </p:txBody>
+      </p:sp>
+      <p:sp>
+        <p:nvSpPr>
+          <p:cNvPr id="9" name="TextBox 8"/>
+          <p:cNvSpPr txBox="1"/>
+          <p:nvPr/>
+        </p:nvSpPr>
+        <p:spPr>
+          <a:xfrm>
+            <a:off x="3794760" y="1883664"/>
+            <a:ext cx="7543800" cy="621792"/>
+          </a:xfrm>
+          <a:prstGeom prst="rect">
+            <a:avLst/>
+          </a:prstGeom>
+          <a:noFill/>
+        </p:spPr>
+        <p:txBody>
+          <a:bodyPr wrap="square" lIns="73152" rIns="73152" tIns="36576" bIns="36576">
+            <a:spAutoFit/>
+          </a:bodyPr>
+          <a:lstStyle/>
+          <a:p>
+            <a:pPr algn="l">
+              <a:spcAft>
+                <a:spcPts val="0"/>
+              </a:spcAft>
+              <a:defRPr sz="1600" b="0">
+                <a:solidFill>
+                  <a:srgbClr val="122C4E"/>
+                </a:solidFill>
+                <a:latin typeface="Noto Sans CJK KR"/>
+              </a:defRPr>
+            </a:pPr>
+            <a:r>
+              <a:t>우선 확인: 닫는 태그·따옴표·중첩 구조를 확인한다.</a:t>
+            </a:r>
+            <a:br/>
+            <a:r>
+              <a:t>수정 후: xacro ~/agv_ws/src/agv_description/urdf/agv.urdf.xacro &gt; /tmp/agv.urdf</a:t>
+            </a:r>
+          </a:p>
+        </p:txBody>
+      </p:sp>
+      <p:sp>
+        <p:nvSpPr>
+          <p:cNvPr id="10" name="Rounded Rectangle 9"/>
+          <p:cNvSpPr/>
+          <p:nvPr/>
+        </p:nvSpPr>
+        <p:spPr>
+          <a:xfrm>
+            <a:off x="694944" y="3172968"/>
+            <a:ext cx="10972800" cy="1115568"/>
+          </a:xfrm>
+          <a:prstGeom prst="roundRect">
+            <a:avLst/>
+          </a:prstGeom>
+          <a:solidFill>
+            <a:srgbClr val="FFF7F4"/>
+          </a:solidFill>
+          <a:ln>
+            <a:solidFill>
+              <a:srgbClr val="EDBEB4"/>
+            </a:solidFill>
+          </a:ln>
+        </p:spPr>
+        <p:style>
+          <a:lnRef idx="1">
+            <a:schemeClr val="accent1"/>
+          </a:lnRef>
+          <a:fillRef idx="3">
+            <a:schemeClr val="accent1"/>
+          </a:fillRef>
+          <a:effectRef idx="2">
+            <a:schemeClr val="accent1"/>
+          </a:effectRef>
+          <a:fontRef idx="minor">
+            <a:schemeClr val="lt1"/>
+          </a:fontRef>
+        </p:style>
+        <p:txBody>
+          <a:bodyPr rtlCol="0" anchor="ctr"/>
+          <a:lstStyle/>
+          <a:p>
+            <a:pPr algn="ctr"/>
+          </a:p>
+        </p:txBody>
+      </p:sp>
+      <p:sp>
+        <p:nvSpPr>
+          <p:cNvPr id="11" name="TextBox 10"/>
+          <p:cNvSpPr txBox="1"/>
+          <p:nvPr/>
+        </p:nvSpPr>
+        <p:spPr>
+          <a:xfrm>
+            <a:off x="896112" y="3319272"/>
+            <a:ext cx="2926080" cy="274320"/>
+          </a:xfrm>
+          <a:prstGeom prst="rect">
+            <a:avLst/>
+          </a:prstGeom>
+          <a:noFill/>
+        </p:spPr>
+        <p:txBody>
+          <a:bodyPr wrap="square" lIns="73152" rIns="73152" tIns="36576" bIns="36576">
+            <a:spAutoFit/>
+          </a:bodyPr>
+          <a:lstStyle/>
+          <a:p>
+            <a:pPr algn="l">
+              <a:spcAft>
+                <a:spcPts val="0"/>
+              </a:spcAft>
+              <a:defRPr sz="1800" b="1">
+                <a:solidFill>
+                  <a:srgbClr val="BE3B3B"/>
+                </a:solidFill>
+                <a:latin typeface="Noto Sans CJK KR"/>
+              </a:defRPr>
+            </a:pPr>
+            <a:r>
+              <a:t>증상 2: 바퀴가 눕거나 TF가 없음</a:t>
+            </a:r>
+          </a:p>
+        </p:txBody>
+      </p:sp>
+      <p:sp>
+        <p:nvSpPr>
+          <p:cNvPr id="12" name="TextBox 11"/>
+          <p:cNvSpPr txBox="1"/>
+          <p:nvPr/>
+        </p:nvSpPr>
+        <p:spPr>
+          <a:xfrm>
+            <a:off x="3794760" y="3300984"/>
+            <a:ext cx="7543800" cy="621792"/>
+          </a:xfrm>
+          <a:prstGeom prst="rect">
+            <a:avLst/>
+          </a:prstGeom>
+          <a:noFill/>
+        </p:spPr>
+        <p:txBody>
+          <a:bodyPr wrap="square" lIns="73152" rIns="73152" tIns="36576" bIns="36576">
+            <a:spAutoFit/>
+          </a:bodyPr>
+          <a:lstStyle/>
+          <a:p>
+            <a:pPr algn="l">
+              <a:spcAft>
+                <a:spcPts val="0"/>
+              </a:spcAft>
+              <a:defRPr sz="1600" b="0">
+                <a:solidFill>
+                  <a:srgbClr val="122C4E"/>
+                </a:solidFill>
+                <a:latin typeface="Noto Sans CJK KR"/>
+              </a:defRPr>
+            </a:pPr>
+            <a:r>
+              <a:t>우선 확인: cylinder rpy·joint axis·parent/child link 이름을 확인한다.</a:t>
+            </a:r>
+            <a:br/>
+            <a:r>
+              <a:t>수정 후: xacro ~/agv_ws/src/agv_description/urdf/agv.urdf.xacro &gt; /tmp/agv.urdf</a:t>
+            </a:r>
+          </a:p>
+        </p:txBody>
+      </p:sp>
+      <p:sp>
+        <p:nvSpPr>
+          <p:cNvPr id="13" name="TextBox 12"/>
+          <p:cNvSpPr txBox="1"/>
+          <p:nvPr/>
+        </p:nvSpPr>
+        <p:spPr>
+          <a:xfrm>
+            <a:off x="822960" y="5102352"/>
+            <a:ext cx="10607040" cy="402336"/>
+          </a:xfrm>
+          <a:prstGeom prst="rect">
+            <a:avLst/>
+          </a:prstGeom>
+          <a:noFill/>
+        </p:spPr>
+        <p:txBody>
+          <a:bodyPr wrap="square" lIns="73152" rIns="73152" tIns="36576" bIns="36576">
+            <a:spAutoFit/>
+          </a:bodyPr>
+          <a:lstStyle/>
+          <a:p>
+            <a:pPr algn="ctr">
+              <a:spcAft>
+                <a:spcPts val="0"/>
+              </a:spcAft>
+              <a:defRPr sz="1800" b="1">
+                <a:solidFill>
+                  <a:srgbClr val="DB7E22"/>
+                </a:solidFill>
+                <a:latin typeface="Noto Sans CJK KR"/>
+              </a:defRPr>
+            </a:pPr>
+            <a:r>
+              <a:t>공통 순서: ① 현재 폴더 ② source ③ 파일 경로 ④ 이름/타입/단위 ⑤ build·source 후 재실행</a:t>
+            </a:r>
+          </a:p>
+        </p:txBody>
+      </p:sp>
+    </p:spTree>
+  </p:cSld>
+  <p:clrMapOvr>
+    <a:masterClrMapping/>
+  </p:clrMapOvr>
+</p:sld>
+</file>
+
+<file path=ppt/slides/slide41.xml><?xml version="1.0" encoding="utf-8"?>
+<p:sld xmlns:a="http://schemas.openxmlformats.org/drawingml/2006/main" xmlns:p="http://schemas.openxmlformats.org/presentationml/2006/main" xmlns:r="http://schemas.openxmlformats.org/officeDocument/2006/relationships">
+  <p:cSld>
+    <p:spTree>
+      <p:nvGrpSpPr>
+        <p:cNvPr id="1" name=""/>
+        <p:cNvGrpSpPr/>
+        <p:nvPr/>
+      </p:nvGrpSpPr>
+      <p:grpSpPr/>
+      <p:sp>
+        <p:nvSpPr>
+          <p:cNvPr id="2" name="TextBox 1"/>
+          <p:cNvSpPr txBox="1"/>
+          <p:nvPr/>
+        </p:nvSpPr>
+        <p:spPr>
+          <a:xfrm>
+            <a:off x="566928" y="347472"/>
+            <a:ext cx="10881360" cy="438912"/>
+          </a:xfrm>
+          <a:prstGeom prst="rect">
+            <a:avLst/>
+          </a:prstGeom>
+          <a:noFill/>
+        </p:spPr>
+        <p:txBody>
+          <a:bodyPr wrap="square" lIns="73152" rIns="73152" tIns="36576" bIns="36576">
+            <a:spAutoFit/>
+          </a:bodyPr>
+          <a:lstStyle/>
+          <a:p>
+            <a:pPr algn="l">
+              <a:spcAft>
+                <a:spcPts val="0"/>
+              </a:spcAft>
+              <a:defRPr sz="3200" b="1">
+                <a:solidFill>
+                  <a:srgbClr val="122C4E"/>
+                </a:solidFill>
+                <a:latin typeface="Noto Sans CJK KR"/>
+              </a:defRPr>
+            </a:pPr>
+            <a:r>
+              <a:t>미니 실습: 값 하나를 바꾸고 결과를 비교한다</a:t>
+            </a:r>
+          </a:p>
+        </p:txBody>
+      </p:sp>
+      <p:sp>
+        <p:nvSpPr>
+          <p:cNvPr id="3" name="TextBox 2"/>
+          <p:cNvSpPr txBox="1"/>
+          <p:nvPr/>
+        </p:nvSpPr>
+        <p:spPr>
+          <a:xfrm>
+            <a:off x="603504" y="859536"/>
+            <a:ext cx="10698480" cy="292608"/>
+          </a:xfrm>
+          <a:prstGeom prst="rect">
+            <a:avLst/>
+          </a:prstGeom>
+          <a:noFill/>
+        </p:spPr>
+        <p:txBody>
+          <a:bodyPr wrap="square" lIns="73152" rIns="73152" tIns="36576" bIns="36576">
+            <a:spAutoFit/>
+          </a:bodyPr>
+          <a:lstStyle/>
+          <a:p>
+            <a:pPr algn="l">
+              <a:spcAft>
+                <a:spcPts val="0"/>
+              </a:spcAft>
+              <a:defRPr sz="1700" b="0">
+                <a:solidFill>
+                  <a:srgbClr val="5C6672"/>
+                </a:solidFill>
+                <a:latin typeface="Noto Sans CJK KR"/>
+              </a:defRPr>
+            </a:pPr>
+            <a:r>
+              <a:t>정상 결과를 만든 뒤에는 한 번에 하나의 값만 바꿉니다.</a:t>
+            </a:r>
+          </a:p>
+        </p:txBody>
+      </p:sp>
+      <p:sp>
+        <p:nvSpPr>
+          <p:cNvPr id="4" name="TextBox 3"/>
+          <p:cNvSpPr txBox="1"/>
+          <p:nvPr/>
+        </p:nvSpPr>
+        <p:spPr>
+          <a:xfrm>
+            <a:off x="530352" y="6510528"/>
+            <a:ext cx="7772400" cy="201168"/>
+          </a:xfrm>
+          <a:prstGeom prst="rect">
+            <a:avLst/>
+          </a:prstGeom>
+          <a:noFill/>
+        </p:spPr>
+        <p:txBody>
+          <a:bodyPr wrap="square" lIns="73152" rIns="73152" tIns="36576" bIns="36576">
+            <a:spAutoFit/>
+          </a:bodyPr>
+          <a:lstStyle/>
+          <a:p>
+            <a:pPr algn="l">
+              <a:spcAft>
+                <a:spcPts val="0"/>
+              </a:spcAft>
+              <a:defRPr sz="1000" b="0">
+                <a:solidFill>
+                  <a:srgbClr val="5C6672"/>
+                </a:solidFill>
+                <a:latin typeface="Noto Sans CJK KR"/>
+              </a:defRPr>
+            </a:pPr>
+            <a:r>
+              <a:t>ROS 2 Jazzy · Gazebo Harmonic · M05 · 따라 하기형 AGV 실습</a:t>
+            </a:r>
+          </a:p>
+        </p:txBody>
+      </p:sp>
+      <p:sp>
+        <p:nvSpPr>
+          <p:cNvPr id="5" name="TextBox 4"/>
+          <p:cNvSpPr txBox="1"/>
+          <p:nvPr/>
+        </p:nvSpPr>
+        <p:spPr>
+          <a:xfrm>
+            <a:off x="9144000" y="6510528"/>
+            <a:ext cx="2468880" cy="201168"/>
+          </a:xfrm>
+          <a:prstGeom prst="rect">
+            <a:avLst/>
+          </a:prstGeom>
+          <a:noFill/>
+        </p:spPr>
+        <p:txBody>
+          <a:bodyPr wrap="square" lIns="73152" rIns="73152" tIns="36576" bIns="36576">
+            <a:spAutoFit/>
+          </a:bodyPr>
+          <a:lstStyle/>
+          <a:p>
+            <a:pPr algn="r">
+              <a:spcAft>
+                <a:spcPts val="0"/>
+              </a:spcAft>
+              <a:defRPr sz="1000" b="0">
+                <a:solidFill>
+                  <a:srgbClr val="5C6672"/>
+                </a:solidFill>
+                <a:latin typeface="Noto Sans CJK KR"/>
+              </a:defRPr>
+            </a:pPr>
+            <a:r>
+              <a:t>명령·파일 경로는 슬라이드에서 복사 가능</a:t>
+            </a:r>
+          </a:p>
+        </p:txBody>
+      </p:sp>
+      <p:sp>
+        <p:nvSpPr>
+          <p:cNvPr id="6" name="Rectangle 5"/>
+          <p:cNvSpPr/>
+          <p:nvPr/>
+        </p:nvSpPr>
+        <p:spPr>
+          <a:xfrm>
+            <a:off x="566928" y="1188720"/>
+            <a:ext cx="11064240" cy="347472"/>
+          </a:xfrm>
+          <a:prstGeom prst="rect">
+            <a:avLst/>
+          </a:prstGeom>
+          <a:solidFill>
+            <a:srgbClr val="F4F7FB"/>
+          </a:solidFill>
+          <a:ln>
+            <a:solidFill>
+              <a:srgbClr val="F4F7FB"/>
+            </a:solidFill>
+          </a:ln>
+        </p:spPr>
+        <p:style>
+          <a:lnRef idx="1">
+            <a:schemeClr val="accent1"/>
+          </a:lnRef>
+          <a:fillRef idx="3">
+            <a:schemeClr val="accent1"/>
+          </a:fillRef>
+          <a:effectRef idx="2">
+            <a:schemeClr val="accent1"/>
+          </a:effectRef>
+          <a:fontRef idx="minor">
+            <a:schemeClr val="lt1"/>
+          </a:fontRef>
+        </p:style>
+        <p:txBody>
+          <a:bodyPr rtlCol="0" anchor="ctr" wrap="square" lIns="73152" rIns="73152" tIns="36576" bIns="36576"/>
+          <a:lstStyle/>
+          <a:p>
+            <a:pPr algn="l">
+              <a:spcAft>
+                <a:spcPts val="0"/>
+              </a:spcAft>
+              <a:defRPr sz="1300" b="1">
+                <a:solidFill>
+                  <a:srgbClr val="122C4E"/>
+                </a:solidFill>
+                <a:latin typeface="Noto Sans CJK KR"/>
+              </a:defRPr>
+            </a:pPr>
+            <a:r>
+              <a:t>현재 단계 미니 실습    |    현재 폴더 ~/agv_ws    |    현재 터미널</a:t>
+            </a:r>
+          </a:p>
+        </p:txBody>
+      </p:sp>
+      <p:sp>
+        <p:nvSpPr>
+          <p:cNvPr id="7" name="Rounded Rectangle 6"/>
+          <p:cNvSpPr/>
+          <p:nvPr/>
+        </p:nvSpPr>
+        <p:spPr>
+          <a:xfrm>
+            <a:off x="749808" y="1874519"/>
+            <a:ext cx="10652760" cy="1993392"/>
+          </a:xfrm>
+          <a:prstGeom prst="roundRect">
+            <a:avLst/>
+          </a:prstGeom>
+          <a:solidFill>
+            <a:srgbClr val="FFF8EB"/>
+          </a:solidFill>
+          <a:ln>
+            <a:solidFill>
+              <a:srgbClr val="ECC680"/>
+            </a:solidFill>
+          </a:ln>
+        </p:spPr>
+        <p:style>
+          <a:lnRef idx="1">
+            <a:schemeClr val="accent1"/>
+          </a:lnRef>
+          <a:fillRef idx="3">
+            <a:schemeClr val="accent1"/>
+          </a:fillRef>
+          <a:effectRef idx="2">
+            <a:schemeClr val="accent1"/>
+          </a:effectRef>
+          <a:fontRef idx="minor">
+            <a:schemeClr val="lt1"/>
+          </a:fontRef>
+        </p:style>
+        <p:txBody>
+          <a:bodyPr rtlCol="0" anchor="ctr" wrap="square" lIns="73152" rIns="73152" tIns="36576" bIns="36576"/>
+          <a:lstStyle/>
+          <a:p>
+            <a:pPr algn="ctr">
+              <a:spcAft>
+                <a:spcPts val="0"/>
+              </a:spcAft>
+              <a:defRPr sz="2300" b="1">
+                <a:solidFill>
+                  <a:srgbClr val="122C4E"/>
+                </a:solidFill>
+                <a:latin typeface="Noto Sans CJK KR"/>
+              </a:defRPr>
+            </a:pPr>
+            <a:r>
+              <a:t>wheel_radius를 0.08 m에서 0.10 m로 바꾸고 RobotModel에서 바퀴 크기 변화를 확인한다.</a:t>
+            </a:r>
+          </a:p>
+        </p:txBody>
+      </p:sp>
+      <p:sp>
+        <p:nvSpPr>
+          <p:cNvPr id="8" name="TextBox 7"/>
+          <p:cNvSpPr txBox="1"/>
+          <p:nvPr/>
+        </p:nvSpPr>
+        <p:spPr>
+          <a:xfrm>
+            <a:off x="877824" y="4590288"/>
+            <a:ext cx="10241280" cy="594360"/>
+          </a:xfrm>
+          <a:prstGeom prst="rect">
+            <a:avLst/>
+          </a:prstGeom>
+          <a:noFill/>
+        </p:spPr>
+        <p:txBody>
+          <a:bodyPr wrap="square" lIns="73152" rIns="73152" tIns="36576" bIns="36576">
+            <a:spAutoFit/>
+          </a:bodyPr>
+          <a:lstStyle/>
+          <a:p>
+            <a:pPr algn="ctr">
+              <a:spcAft>
+                <a:spcPts val="0"/>
+              </a:spcAft>
+              <a:defRPr sz="1900" b="1">
+                <a:solidFill>
+                  <a:srgbClr val="DB7E22"/>
+                </a:solidFill>
+                <a:latin typeface="Noto Sans CJK KR"/>
+              </a:defRPr>
+            </a:pPr>
+            <a:r>
+              <a:t>기록할 것: 바꾼 값(단위) · 기대한 변화 · 실제 출력/화면 · 원래 값으로 되돌린 결과</a:t>
+            </a:r>
+          </a:p>
+        </p:txBody>
+      </p:sp>
+    </p:spTree>
+  </p:cSld>
+  <p:clrMapOvr>
+    <a:masterClrMapping/>
+  </p:clrMapOvr>
+</p:sld>
+</file>
+
+<file path=ppt/slides/slide42.xml><?xml version="1.0" encoding="utf-8"?>
+<p:sld xmlns:a="http://schemas.openxmlformats.org/drawingml/2006/main" xmlns:p="http://schemas.openxmlformats.org/presentationml/2006/main" xmlns:r="http://schemas.openxmlformats.org/officeDocument/2006/relationships">
+  <p:cSld>
+    <p:spTree>
+      <p:nvGrpSpPr>
+        <p:cNvPr id="1" name=""/>
+        <p:cNvGrpSpPr/>
+        <p:nvPr/>
+      </p:nvGrpSpPr>
+      <p:grpSpPr/>
+      <p:sp>
+        <p:nvSpPr>
+          <p:cNvPr id="2" name="TextBox 1"/>
+          <p:cNvSpPr txBox="1"/>
+          <p:nvPr/>
+        </p:nvSpPr>
+        <p:spPr>
+          <a:xfrm>
+            <a:off x="566928" y="347472"/>
+            <a:ext cx="10881360" cy="438912"/>
+          </a:xfrm>
+          <a:prstGeom prst="rect">
+            <a:avLst/>
+          </a:prstGeom>
+          <a:noFill/>
+        </p:spPr>
+        <p:txBody>
+          <a:bodyPr wrap="square" lIns="73152" rIns="73152" tIns="36576" bIns="36576">
+            <a:spAutoFit/>
+          </a:bodyPr>
+          <a:lstStyle/>
+          <a:p>
+            <a:pPr algn="l">
+              <a:spcAft>
+                <a:spcPts val="0"/>
+              </a:spcAft>
+              <a:defRPr sz="3200" b="1">
+                <a:solidFill>
+                  <a:srgbClr val="122C4E"/>
+                </a:solidFill>
+                <a:latin typeface="Noto Sans CJK KR"/>
+              </a:defRPr>
+            </a:pPr>
+            <a:r>
+              <a:t>체크포인트를 저장하고 다음 모듈로 넘긴다</a:t>
+            </a:r>
+          </a:p>
+        </p:txBody>
+      </p:sp>
+      <p:sp>
+        <p:nvSpPr>
+          <p:cNvPr id="3" name="TextBox 2"/>
+          <p:cNvSpPr txBox="1"/>
+          <p:nvPr/>
+        </p:nvSpPr>
+        <p:spPr>
+          <a:xfrm>
+            <a:off x="603504" y="859536"/>
+            <a:ext cx="10698480" cy="292608"/>
+          </a:xfrm>
+          <a:prstGeom prst="rect">
+            <a:avLst/>
+          </a:prstGeom>
+          <a:noFill/>
+        </p:spPr>
+        <p:txBody>
+          <a:bodyPr wrap="square" lIns="73152" rIns="73152" tIns="36576" bIns="36576">
+            <a:spAutoFit/>
+          </a:bodyPr>
+          <a:lstStyle/>
+          <a:p>
+            <a:pPr algn="l">
+              <a:spcAft>
+                <a:spcPts val="0"/>
+              </a:spcAft>
+              <a:defRPr sz="1700" b="0">
+                <a:solidFill>
+                  <a:srgbClr val="5C6672"/>
+                </a:solidFill>
+                <a:latin typeface="Noto Sans CJK KR"/>
+              </a:defRPr>
+            </a:pPr>
+            <a:r>
+              <a:t>현재 Complete는 다음 Starter의 기준선입니다.</a:t>
+            </a:r>
+          </a:p>
+        </p:txBody>
+      </p:sp>
+      <p:sp>
+        <p:nvSpPr>
+          <p:cNvPr id="4" name="TextBox 3"/>
+          <p:cNvSpPr txBox="1"/>
+          <p:nvPr/>
+        </p:nvSpPr>
+        <p:spPr>
+          <a:xfrm>
+            <a:off x="530352" y="6510528"/>
+            <a:ext cx="7772400" cy="201168"/>
+          </a:xfrm>
+          <a:prstGeom prst="rect">
+            <a:avLst/>
+          </a:prstGeom>
+          <a:noFill/>
+        </p:spPr>
+        <p:txBody>
+          <a:bodyPr wrap="square" lIns="73152" rIns="73152" tIns="36576" bIns="36576">
+            <a:spAutoFit/>
+          </a:bodyPr>
+          <a:lstStyle/>
+          <a:p>
+            <a:pPr algn="l">
+              <a:spcAft>
+                <a:spcPts val="0"/>
+              </a:spcAft>
+              <a:defRPr sz="1000" b="0">
+                <a:solidFill>
+                  <a:srgbClr val="5C6672"/>
+                </a:solidFill>
+                <a:latin typeface="Noto Sans CJK KR"/>
+              </a:defRPr>
+            </a:pPr>
+            <a:r>
+              <a:t>ROS 2 Jazzy · Gazebo Harmonic · M05 · 따라 하기형 AGV 실습</a:t>
+            </a:r>
+          </a:p>
+        </p:txBody>
+      </p:sp>
+      <p:sp>
+        <p:nvSpPr>
+          <p:cNvPr id="5" name="TextBox 4"/>
+          <p:cNvSpPr txBox="1"/>
+          <p:nvPr/>
+        </p:nvSpPr>
+        <p:spPr>
+          <a:xfrm>
+            <a:off x="9144000" y="6510528"/>
+            <a:ext cx="2468880" cy="201168"/>
+          </a:xfrm>
+          <a:prstGeom prst="rect">
+            <a:avLst/>
+          </a:prstGeom>
+          <a:noFill/>
+        </p:spPr>
+        <p:txBody>
+          <a:bodyPr wrap="square" lIns="73152" rIns="73152" tIns="36576" bIns="36576">
+            <a:spAutoFit/>
+          </a:bodyPr>
+          <a:lstStyle/>
+          <a:p>
+            <a:pPr algn="r">
+              <a:spcAft>
+                <a:spcPts val="0"/>
+              </a:spcAft>
+              <a:defRPr sz="1000" b="0">
+                <a:solidFill>
+                  <a:srgbClr val="5C6672"/>
+                </a:solidFill>
+                <a:latin typeface="Noto Sans CJK KR"/>
+              </a:defRPr>
+            </a:pPr>
+            <a:r>
+              <a:t>명령·파일 경로는 슬라이드에서 복사 가능</a:t>
+            </a:r>
+          </a:p>
+        </p:txBody>
+      </p:sp>
+      <p:sp>
+        <p:nvSpPr>
+          <p:cNvPr id="6" name="Rectangle 5"/>
+          <p:cNvSpPr/>
+          <p:nvPr/>
+        </p:nvSpPr>
+        <p:spPr>
+          <a:xfrm>
+            <a:off x="566928" y="1188720"/>
+            <a:ext cx="11064240" cy="347472"/>
+          </a:xfrm>
+          <a:prstGeom prst="rect">
+            <a:avLst/>
+          </a:prstGeom>
+          <a:solidFill>
+            <a:srgbClr val="F4F7FB"/>
+          </a:solidFill>
+          <a:ln>
+            <a:solidFill>
+              <a:srgbClr val="F4F7FB"/>
+            </a:solidFill>
+          </a:ln>
+        </p:spPr>
+        <p:style>
+          <a:lnRef idx="1">
+            <a:schemeClr val="accent1"/>
+          </a:lnRef>
+          <a:fillRef idx="3">
+            <a:schemeClr val="accent1"/>
+          </a:fillRef>
+          <a:effectRef idx="2">
+            <a:schemeClr val="accent1"/>
+          </a:effectRef>
+          <a:fontRef idx="minor">
+            <a:schemeClr val="lt1"/>
+          </a:fontRef>
+        </p:style>
+        <p:txBody>
+          <a:bodyPr rtlCol="0" anchor="ctr" wrap="square" lIns="73152" rIns="73152" tIns="36576" bIns="36576"/>
+          <a:lstStyle/>
+          <a:p>
+            <a:pPr algn="l">
+              <a:spcAft>
+                <a:spcPts val="0"/>
+              </a:spcAft>
+              <a:defRPr sz="1300" b="1">
+                <a:solidFill>
+                  <a:srgbClr val="122C4E"/>
+                </a:solidFill>
+                <a:latin typeface="Noto Sans CJK KR"/>
+              </a:defRPr>
+            </a:pPr>
+            <a:r>
+              <a:t>현재 단계 체크포인트    |    현재 폴더 ~/agv_ws    |    현재 터미널</a:t>
+            </a:r>
+          </a:p>
+        </p:txBody>
+      </p:sp>
+      <p:sp>
+        <p:nvSpPr>
+          <p:cNvPr id="7" name="Rounded Rectangle 6"/>
+          <p:cNvSpPr/>
+          <p:nvPr/>
+        </p:nvSpPr>
+        <p:spPr>
+          <a:xfrm>
+            <a:off x="685800" y="1737360"/>
+            <a:ext cx="10972800" cy="3611880"/>
+          </a:xfrm>
+          <a:prstGeom prst="roundRect">
+            <a:avLst/>
+          </a:prstGeom>
+          <a:solidFill>
+            <a:srgbClr val="F4F7FB"/>
+          </a:solidFill>
+          <a:ln>
+            <a:solidFill>
+              <a:srgbClr val="D2DCE8"/>
+            </a:solidFill>
+          </a:ln>
+        </p:spPr>
+        <p:style>
+          <a:lnRef idx="1">
+            <a:schemeClr val="accent1"/>
+          </a:lnRef>
+          <a:fillRef idx="3">
+            <a:schemeClr val="accent1"/>
+          </a:fillRef>
+          <a:effectRef idx="2">
+            <a:schemeClr val="accent1"/>
+          </a:effectRef>
+          <a:fontRef idx="minor">
+            <a:schemeClr val="lt1"/>
+          </a:fontRef>
+        </p:style>
+        <p:txBody>
+          <a:bodyPr rtlCol="0" anchor="ctr"/>
+          <a:lstStyle/>
+          <a:p>
+            <a:pPr algn="ctr"/>
+          </a:p>
+        </p:txBody>
+      </p:sp>
+      <p:sp>
+        <p:nvSpPr>
+          <p:cNvPr id="8" name="TextBox 7"/>
+          <p:cNvSpPr txBox="1"/>
+          <p:nvPr/>
+        </p:nvSpPr>
+        <p:spPr>
+          <a:xfrm>
+            <a:off x="896112" y="1993392"/>
+            <a:ext cx="10332720" cy="2971800"/>
+          </a:xfrm>
+          <a:prstGeom prst="rect">
+            <a:avLst/>
+          </a:prstGeom>
+          <a:noFill/>
+        </p:spPr>
+        <p:txBody>
+          <a:bodyPr wrap="square" lIns="109728" rIns="109728">
+            <a:spAutoFit/>
+          </a:bodyPr>
+          <a:lstStyle/>
+          <a:p>
+            <a:pPr>
+              <a:spcAft>
+                <a:spcPts val="800"/>
+              </a:spcAft>
+              <a:defRPr sz="1800">
+                <a:solidFill>
+                  <a:srgbClr val="122C4E"/>
+                </a:solidFill>
+                <a:latin typeface="Noto Sans CJK KR"/>
+              </a:defRPr>
+            </a:pPr>
+            <a:r>
+              <a:t>• □ 완료 화면: RobotModel과 TF에서 base, 두 wheel, camera, lidar, imu 연결을 확인한다.</a:t>
+            </a:r>
+          </a:p>
+          <a:p>
+            <a:pPr>
+              <a:spcAft>
+                <a:spcPts val="800"/>
+              </a:spcAft>
+              <a:defRPr sz="1800">
+                <a:solidFill>
+                  <a:srgbClr val="122C4E"/>
+                </a:solidFill>
+                <a:latin typeface="Noto Sans CJK KR"/>
+              </a:defRPr>
+            </a:pPr>
+            <a:r>
+              <a:t>• □ Complete 파일: blocks/B_robot_build/M05_urdf_basic_model/complete/</a:t>
+            </a:r>
+          </a:p>
+          <a:p>
+            <a:pPr>
+              <a:spcAft>
+                <a:spcPts val="800"/>
+              </a:spcAft>
+              <a:defRPr sz="1800">
+                <a:solidFill>
+                  <a:srgbClr val="122C4E"/>
+                </a:solidFill>
+                <a:latin typeface="Noto Sans CJK KR"/>
+              </a:defRPr>
+            </a:pPr>
+            <a:r>
+              <a:t>• □ 정상 로그·캡처: logs/validation.log, screenshots/validation_terminal.png</a:t>
+            </a:r>
+          </a:p>
+          <a:p>
+            <a:pPr>
+              <a:spcAft>
+                <a:spcPts val="800"/>
+              </a:spcAft>
+              <a:defRPr sz="1800">
+                <a:solidFill>
+                  <a:srgbClr val="122C4E"/>
+                </a:solidFill>
+                <a:latin typeface="Noto Sans CJK KR"/>
+              </a:defRPr>
+            </a:pPr>
+            <a:r>
+              <a:t>• □ 버전 식별: CHECKSUM_or_TAG.txt의 SHA-256 manifest</a:t>
+            </a:r>
+          </a:p>
+          <a:p>
+            <a:pPr>
+              <a:spcAft>
+                <a:spcPts val="800"/>
+              </a:spcAft>
+              <a:defRPr sz="1800">
+                <a:solidFill>
+                  <a:srgbClr val="122C4E"/>
+                </a:solidFill>
+                <a:latin typeface="Noto Sans CJK KR"/>
+              </a:defRPr>
+            </a:pPr>
+            <a:r>
+              <a:t>• □ 다음 시작 조건: M06 Xacro 모듈화</a:t>
+            </a:r>
+          </a:p>
+        </p:txBody>
+      </p:sp>
+      <p:sp>
+        <p:nvSpPr>
+          <p:cNvPr id="9" name="TextBox 8"/>
+          <p:cNvSpPr txBox="1"/>
+          <p:nvPr/>
+        </p:nvSpPr>
+        <p:spPr>
+          <a:xfrm>
+            <a:off x="868680" y="5596128"/>
+            <a:ext cx="10515600" cy="338328"/>
+          </a:xfrm>
+          <a:prstGeom prst="rect">
+            <a:avLst/>
+          </a:prstGeom>
+          <a:noFill/>
+        </p:spPr>
+        <p:txBody>
+          <a:bodyPr wrap="square" lIns="73152" rIns="73152" tIns="36576" bIns="36576">
+            <a:spAutoFit/>
+          </a:bodyPr>
+          <a:lstStyle/>
+          <a:p>
+            <a:pPr algn="ctr">
+              <a:spcAft>
+                <a:spcPts val="0"/>
+              </a:spcAft>
+              <a:defRPr sz="1700" b="1">
+                <a:solidFill>
+                  <a:srgbClr val="2A8B5A"/>
+                </a:solidFill>
+                <a:latin typeface="Noto Sans CJK KR"/>
+              </a:defRPr>
+            </a:pPr>
+            <a:r>
+              <a:t>다음 모듈을 시작하기 전, 이 슬라이드의 Complete와 다음 모듈의 Starter를 비교합니다.</a:t>
+            </a:r>
+          </a:p>
+        </p:txBody>
+      </p:sp>
+    </p:spTree>
+  </p:cSld>
+  <p:clrMapOvr>
+    <a:masterClrMapping/>
+  </p:clrMapOvr>
+</p:sld>
+</file>
+
+<file path=ppt/slides/slide43.xml><?xml version="1.0" encoding="utf-8"?>
+<p:sld xmlns:a="http://schemas.openxmlformats.org/drawingml/2006/main" xmlns:p="http://schemas.openxmlformats.org/presentationml/2006/main" xmlns:r="http://schemas.openxmlformats.org/officeDocument/2006/relationships">
+  <p:cSld>
+    <p:spTree>
+      <p:nvGrpSpPr>
+        <p:cNvPr id="1" name=""/>
+        <p:cNvGrpSpPr/>
+        <p:nvPr/>
+      </p:nvGrpSpPr>
+      <p:grpSpPr/>
+      <p:sp>
+        <p:nvSpPr>
+          <p:cNvPr id="2" name="TextBox 1"/>
+          <p:cNvSpPr txBox="1"/>
+          <p:nvPr/>
+        </p:nvSpPr>
+        <p:spPr>
+          <a:xfrm>
+            <a:off x="566928" y="347472"/>
+            <a:ext cx="10881360" cy="438912"/>
+          </a:xfrm>
+          <a:prstGeom prst="rect">
+            <a:avLst/>
+          </a:prstGeom>
+          <a:noFill/>
+        </p:spPr>
+        <p:txBody>
+          <a:bodyPr wrap="square" lIns="73152" rIns="73152" tIns="36576" bIns="36576">
+            <a:spAutoFit/>
+          </a:bodyPr>
+          <a:lstStyle/>
+          <a:p>
+            <a:pPr algn="l">
+              <a:spcAft>
+                <a:spcPts val="0"/>
+              </a:spcAft>
+              <a:defRPr sz="3200" b="1">
+                <a:solidFill>
+                  <a:srgbClr val="122C4E"/>
+                </a:solidFill>
+                <a:latin typeface="Noto Sans CJK KR"/>
+              </a:defRPr>
+            </a:pPr>
+            <a:r>
               <a:t>공식 참고 자료</a:t>
             </a:r>
           </a:p>
@@ -22417,7 +24069,7 @@
         </p:nvSpPr>
         <p:spPr>
           <a:xfrm>
-            <a:off x="914400" y="1810512"/>
+            <a:off x="914400" y="1773936"/>
             <a:ext cx="3840480" cy="256032"/>
           </a:xfrm>
           <a:prstGeom prst="rect">
@@ -22456,8 +24108,8 @@
         </p:nvSpPr>
         <p:spPr>
           <a:xfrm>
-            <a:off x="914400" y="2121408"/>
-            <a:ext cx="9966960" cy="256032"/>
+            <a:off x="914400" y="2048255"/>
+            <a:ext cx="9966960" cy="475488"/>
           </a:xfrm>
           <a:prstGeom prst="rect">
             <a:avLst/>
@@ -22474,7 +24126,7 @@
               <a:spcAft>
                 <a:spcPts val="0"/>
               </a:spcAft>
-              <a:defRPr sz="1200" b="0">
+              <a:defRPr sz="1000" b="0">
                 <a:solidFill>
                   <a:srgbClr val="225B9B"/>
                 </a:solidFill>
@@ -22495,7 +24147,7 @@
         </p:nvSpPr>
         <p:spPr>
           <a:xfrm>
-            <a:off x="914400" y="2816352"/>
+            <a:off x="914400" y="2852928"/>
             <a:ext cx="3840480" cy="256032"/>
           </a:xfrm>
           <a:prstGeom prst="rect">
@@ -22535,7 +24187,7 @@
         <p:spPr>
           <a:xfrm>
             <a:off x="914400" y="3127248"/>
-            <a:ext cx="9966960" cy="256032"/>
+            <a:ext cx="9966960" cy="475488"/>
           </a:xfrm>
           <a:prstGeom prst="rect">
             <a:avLst/>
@@ -22552,7 +24204,7 @@
               <a:spcAft>
                 <a:spcPts val="0"/>
               </a:spcAft>
-              <a:defRPr sz="1200" b="0">
+              <a:defRPr sz="1000" b="0">
                 <a:solidFill>
                   <a:srgbClr val="225B9B"/>
                 </a:solidFill>
@@ -22573,7 +24225,7 @@
         </p:nvSpPr>
         <p:spPr>
           <a:xfrm>
-            <a:off x="914400" y="3822191"/>
+            <a:off x="914400" y="3931920"/>
             <a:ext cx="3840480" cy="256032"/>
           </a:xfrm>
           <a:prstGeom prst="rect">
@@ -22612,8 +24264,8 @@
         </p:nvSpPr>
         <p:spPr>
           <a:xfrm>
-            <a:off x="914400" y="4133087"/>
-            <a:ext cx="9966960" cy="256032"/>
+            <a:off x="914400" y="4206240"/>
+            <a:ext cx="9966960" cy="475488"/>
           </a:xfrm>
           <a:prstGeom prst="rect">
             <a:avLst/>
@@ -22630,7 +24282,7 @@
               <a:spcAft>
                 <a:spcPts val="0"/>
               </a:spcAft>
-              <a:defRPr sz="1200" b="0">
+              <a:defRPr sz="1000" b="0">
                 <a:solidFill>
                   <a:srgbClr val="225B9B"/>
                 </a:solidFill>
@@ -22651,7 +24303,7 @@
         </p:nvSpPr>
         <p:spPr>
           <a:xfrm>
-            <a:off x="914400" y="4828032"/>
+            <a:off x="914400" y="5010912"/>
             <a:ext cx="3840480" cy="256032"/>
           </a:xfrm>
           <a:prstGeom prst="rect">
@@ -22690,8 +24342,8 @@
         </p:nvSpPr>
         <p:spPr>
           <a:xfrm>
-            <a:off x="914400" y="5138928"/>
-            <a:ext cx="9966960" cy="256032"/>
+            <a:off x="914400" y="5285232"/>
+            <a:ext cx="9966960" cy="475488"/>
           </a:xfrm>
           <a:prstGeom prst="rect">
             <a:avLst/>
@@ -22708,7 +24360,7 @@
               <a:spcAft>
                 <a:spcPts val="0"/>
               </a:spcAft>
-              <a:defRPr sz="1200" b="0">
+              <a:defRPr sz="1000" b="0">
                 <a:solidFill>
                   <a:srgbClr val="225B9B"/>
                 </a:solidFill>
@@ -24437,7 +26089,7 @@
               </a:defRPr>
             </a:pPr>
             <a:r>
-              <a:t>파일을 새로 만들고 저장한다 (1/10)</a:t>
+              <a:t>파일을 새로 만들고 저장한다 (1/11)</a:t>
             </a:r>
           </a:p>
         </p:txBody>
@@ -24612,7 +26264,7 @@
               </a:defRPr>
             </a:pPr>
             <a:r>
-              <a:t>현재 단계 3/13    |    현재 폴더 ~/agv_ws    |    현재 터미널</a:t>
+              <a:t>현재 단계 3/14    |    현재 폴더 ~/agv_ws    |    현재 터미널</a:t>
             </a:r>
           </a:p>
         </p:txBody>
@@ -24625,8 +26277,8 @@
         </p:nvSpPr>
         <p:spPr>
           <a:xfrm>
-            <a:off x="658368" y="1682496"/>
-            <a:ext cx="10972800" cy="347472"/>
+            <a:off x="658368" y="1627632"/>
+            <a:ext cx="10972800" cy="256032"/>
           </a:xfrm>
           <a:prstGeom prst="rect">
             <a:avLst/>
@@ -24643,7 +26295,7 @@
               <a:spcAft>
                 <a:spcPts val="0"/>
               </a:spcAft>
-              <a:defRPr sz="1700" b="1">
+              <a:defRPr sz="1500" b="1">
                 <a:solidFill>
                   <a:srgbClr val="122C4E"/>
                 </a:solidFill>
@@ -24664,8 +26316,8 @@
         </p:nvSpPr>
         <p:spPr>
           <a:xfrm>
-            <a:off x="658368" y="2103120"/>
-            <a:ext cx="10972800" cy="493776"/>
+            <a:off x="658368" y="1956816"/>
+            <a:ext cx="10972800" cy="603504"/>
           </a:xfrm>
           <a:prstGeom prst="rect">
             <a:avLst/>
@@ -24709,7 +26361,11 @@
               </a:defRPr>
             </a:pPr>
             <a:r>
-              <a:t>파일 생성/열기: mkdir -p ~/agv_ws/src/agv_description/urdf    &amp;&amp;    nano ~/agv_ws/src/agv_description/urdf/agv.urdf.xacro</a:t>
+              <a:t>파일 생성: mkdir -p ~/agv_ws/src/agv_description/urdf</a:t>
+            </a:r>
+            <a:br/>
+            <a:r>
+              <a:t>파일 열기: nano ~/agv_ws/src/agv_description/urdf/agv.urdf.xacro</a:t>
             </a:r>
           </a:p>
         </p:txBody>
@@ -24722,8 +26378,8 @@
         </p:nvSpPr>
         <p:spPr>
           <a:xfrm>
-            <a:off x="658368" y="2761488"/>
-            <a:ext cx="10972800" cy="3383280"/>
+            <a:off x="658368" y="2706624"/>
+            <a:ext cx="10972800" cy="3364992"/>
           </a:xfrm>
           <a:prstGeom prst="rect">
             <a:avLst/>
@@ -24813,11 +26469,6 @@
             <a:r>
               <a:t>  </a:t>
             </a:r>
-            <a:br/>
-            <a:br/>
-            <a:r>
-              <a:t>  </a:t>
-            </a:r>
           </a:p>
         </p:txBody>
       </p:sp>
@@ -24829,7 +26480,7 @@
         </p:nvSpPr>
         <p:spPr>
           <a:xfrm>
-            <a:off x="749808" y="6199632"/>
+            <a:off x="749808" y="6181344"/>
             <a:ext cx="10789920" cy="201168"/>
           </a:xfrm>
           <a:prstGeom prst="rect">
@@ -24855,7 +26506,7 @@
               </a:defRPr>
             </a:pPr>
             <a:r>
-              <a:t>파일 전체 1/10 · 이 슬라이드 다음에 같은 파일의 나머지 줄이 이어집니다.</a:t>
+              <a:t>파일 전체 1/11 · 이 슬라이드 다음에 같은 파일의 나머지 줄이 이어집니다.</a:t>
             </a:r>
           </a:p>
         </p:txBody>

--- a/blocks/B_robot_build/M05_urdf_basic_model/M05_URDF로_기본_AGV_제작.pptx
+++ b/blocks/B_robot_build/M05_urdf_basic_model/M05_URDF로_기본_AGV_제작.pptx
@@ -22,6 +22,9 @@
     <p:sldId id="270" r:id="rId22"/>
     <p:sldId id="271" r:id="rId23"/>
     <p:sldId id="272" r:id="rId24"/>
+    <p:sldId id="273" r:id="rId25"/>
+    <p:sldId id="274" r:id="rId26"/>
+    <p:sldId id="275" r:id="rId27"/>
   </p:sldIdLst>
   <p:sldSz cx="12191999" cy="6858000" type="screen4x3"/>
   <p:notesSz cx="6858000" cy="9144000"/>
@@ -608,17 +611,27 @@
           <a:lstStyle/>
           <a:p>
             <a:r>
-              <a:t>[설명] ~/ros2_curri/agv_ws/src/agv_description/curriculum_stages/M05/agv.urdf의 전체 파일을 2/2 구간으로 작성한다.</a:t>
-            </a:r>
-          </a:p>
-          <a:p>
-            <a:r>
-              <a:t>[실행] nano ~/ros2_curri/agv_ws/src/agv_description/curriculum_stages/M05/agv.urdf</a:t>
-            </a:r>
-          </a:p>
-          <a:p>
-            <a:r>
-              <a:t>[확인] 코드를 저장하고 다음 코드 슬라이드 또는 build 단계로 이동한다.</a:t>
+              <a:t>[설명] RobotModel에는 단일 URDF 텍스트를 robot_description으로 넣고 TF를 함께 확인한다.</a:t>
+            </a:r>
+          </a:p>
+          <a:p>
+            <a:r>
+              <a:t>[실행] ros2 run robot_state_publisher robot_state_publisher \</a:t>
+            </a:r>
+          </a:p>
+          <a:p>
+            <a:r>
+              <a:t>  --ros-args -p robot_description:="$(cat src/agv_description/curriculum_stages/M05/agv.urdf)"</a:t>
+            </a:r>
+          </a:p>
+          <a:p>
+            <a:r>
+              <a:t># 새 터미널: rviz2 → Add → RobotModel, TF</a:t>
+            </a:r>
+          </a:p>
+          <a:p>
+            <a:r>
+              <a:t>[확인] 명령 출력에서 슬라이드의 확인 항목을 찾는다.</a:t>
             </a:r>
           </a:p>
           <a:p>
@@ -628,7 +641,7 @@
           </a:p>
           <a:p>
             <a:r>
-              <a:t>[오류] 들여쓰기·XML 태그·따옴표가 슬라이드와 정확히 같은지 확인한다.</a:t>
+              <a:t>[오류] 오류가 나면 현재 폴더, source, 파일 경로를 먼저 확인한다.</a:t>
             </a:r>
           </a:p>
         </p:txBody>
@@ -698,27 +711,17 @@
           <a:lstStyle/>
           <a:p>
             <a:r>
-              <a:t>[설명] build/source/run을 생략 없이 실행한다.</a:t>
-            </a:r>
-          </a:p>
-          <a:p>
-            <a:r>
-              <a:t>[실행] cd ~/ros2_curri/agv_ws</a:t>
-            </a:r>
-          </a:p>
-          <a:p>
-            <a:r>
-              <a:t>check_urdf src/agv_description/curriculum_stages/M05/agv.urdf</a:t>
-            </a:r>
-          </a:p>
-          <a:p>
-            <a:r>
-              <a:t># 다음 M06에서 처음으로 xacro를 사용한다.</a:t>
-            </a:r>
-          </a:p>
-          <a:p>
-            <a:r>
-              <a:t>[확인] RobotModel과 TF에서 base, 두 wheel, camera, lidar, imu 연결을 확인한다.</a:t>
+              <a:t>[설명] ~/ros2_curri/agv_ws/src/agv_description/curriculum_stages/M05/agv.urdf의 전체 파일을 1/2 구간으로 작성한다.</a:t>
+            </a:r>
+          </a:p>
+          <a:p>
+            <a:r>
+              <a:t>[실행] nano ~/ros2_curri/agv_ws/src/agv_description/curriculum_stages/M05/agv.urdf</a:t>
+            </a:r>
+          </a:p>
+          <a:p>
+            <a:r>
+              <a:t>[확인] 코드를 저장하고 다음 코드 슬라이드 또는 build 단계로 이동한다.</a:t>
             </a:r>
           </a:p>
           <a:p>
@@ -728,7 +731,7 @@
           </a:p>
           <a:p>
             <a:r>
-              <a:t>[오류] 오류가 나면 현재 폴더, source, 파일 경로를 먼저 확인한다.</a:t>
+              <a:t>[오류] 들여쓰기·XML 태그·따옴표가 슬라이드와 정확히 같은지 확인한다.</a:t>
             </a:r>
           </a:p>
         </p:txBody>
@@ -798,17 +801,17 @@
           <a:lstStyle/>
           <a:p>
             <a:r>
-              <a:t>[설명] 실제 Ubuntu/ROS 2 환경에서 생성한 검증 화면이다.</a:t>
-            </a:r>
-          </a:p>
-          <a:p>
-            <a:r>
-              <a:t>[실행] 슬라이드의 명령 또는 파일 작성 단계를 진행한다.</a:t>
-            </a:r>
-          </a:p>
-          <a:p>
-            <a:r>
-              <a:t>[확인] 캡처의 명령과 다음 슬라이드의 검증 명령을 비교한다.</a:t>
+              <a:t>[설명] ~/ros2_curri/agv_ws/src/agv_description/curriculum_stages/M05/agv.urdf의 전체 파일을 2/2 구간으로 작성한다.</a:t>
+            </a:r>
+          </a:p>
+          <a:p>
+            <a:r>
+              <a:t>[실행] nano ~/ros2_curri/agv_ws/src/agv_description/curriculum_stages/M05/agv.urdf</a:t>
+            </a:r>
+          </a:p>
+          <a:p>
+            <a:r>
+              <a:t>[확인] 코드를 저장하고 다음 코드 슬라이드 또는 build 단계로 이동한다.</a:t>
             </a:r>
           </a:p>
           <a:p>
@@ -818,7 +821,7 @@
           </a:p>
           <a:p>
             <a:r>
-              <a:t>[오류] 오류가 나면 현재 폴더, source, 파일 경로를 먼저 확인한다.</a:t>
+              <a:t>[오류] 들여쓰기·XML 태그·따옴표가 슬라이드와 정확히 같은지 확인한다.</a:t>
             </a:r>
           </a:p>
         </p:txBody>
@@ -888,17 +891,22 @@
           <a:lstStyle/>
           <a:p>
             <a:r>
-              <a:t>[설명] 검증 명령은 GUI 결과와 별도로 실행해 재현 가능한 완료 기준을 만든다.</a:t>
-            </a:r>
-          </a:p>
-          <a:p>
-            <a:r>
-              <a:t>[실행] check_urdf ~/ros2_curri/agv_ws/src/agv_description/curriculum_stages/M05/agv.urdf</a:t>
-            </a:r>
-          </a:p>
-          <a:p>
-            <a:r>
-              <a:t>rg -n '&lt;xacro:|&lt;link |&lt;joint ' ~/ros2_curri/agv_ws/src/agv_description/curriculum_stages/M05/agv.urdf</a:t>
+              <a:t>[설명] build/source/run을 생략 없이 실행한다.</a:t>
+            </a:r>
+          </a:p>
+          <a:p>
+            <a:r>
+              <a:t>[실행] cd ~/ros2_curri/agv_ws</a:t>
+            </a:r>
+          </a:p>
+          <a:p>
+            <a:r>
+              <a:t>check_urdf src/agv_description/curriculum_stages/M05/agv.urdf</a:t>
+            </a:r>
+          </a:p>
+          <a:p>
+            <a:r>
+              <a:t># 다음 M06에서 처음으로 xacro를 사용한다.</a:t>
             </a:r>
           </a:p>
           <a:p>
@@ -983,7 +991,7 @@
           <a:lstStyle/>
           <a:p>
             <a:r>
-              <a:t>[설명] 오류를 대신 해결하지 말고 증상부터 우선 확인 순서대로 교육생이 실행하게 한다.</a:t>
+              <a:t>[설명] 실제 Ubuntu/ROS 2 환경에서 생성한 검증 화면이다.</a:t>
             </a:r>
           </a:p>
           <a:p>
@@ -993,7 +1001,7 @@
           </a:p>
           <a:p>
             <a:r>
-              <a:t>[확인] 수정 뒤 첫 검증 명령을 다시 실행한다.</a:t>
+              <a:t>[확인] ① 명령/설정  ② 정상 출력 또는 화면  ③ 다음 검증 명령으로 재확인</a:t>
             </a:r>
           </a:p>
           <a:p>
@@ -1003,7 +1011,7 @@
           </a:p>
           <a:p>
             <a:r>
-              <a:t>[오류] 슬라이드의 두 대표 오류를 먼저 사용한다.</a:t>
+              <a:t>[오류] 오류가 나면 현재 폴더, source, 파일 경로를 먼저 확인한다.</a:t>
             </a:r>
           </a:p>
         </p:txBody>
@@ -1073,7 +1081,7 @@
           <a:lstStyle/>
           <a:p>
             <a:r>
-              <a:t>[설명] 교육생이 직접 한 값만 바꿔 원인과 결과를 연결하게 한다.</a:t>
+              <a:t>[설명] 실제 Ubuntu/ROS 2 환경에서 생성한 검증 화면이다.</a:t>
             </a:r>
           </a:p>
           <a:p>
@@ -1083,7 +1091,7 @@
           </a:p>
           <a:p>
             <a:r>
-              <a:t>[확인] 원래 값과 변경 값을 모두 기록한다.</a:t>
+              <a:t>[확인] root Link=base_link와 wheel·camera·lidar·imu child 이름을 찾습니다.</a:t>
             </a:r>
           </a:p>
           <a:p>
@@ -1163,17 +1171,22 @@
           <a:lstStyle/>
           <a:p>
             <a:r>
-              <a:t>[설명] 교육생이 Complete·캡처·로그를 저장했는지 확인하고 다음 모듈의 시작 상태를 읽는다.</a:t>
-            </a:r>
-          </a:p>
-          <a:p>
-            <a:r>
-              <a:t>[실행] 슬라이드의 명령 또는 파일 작성 단계를 진행한다.</a:t>
-            </a:r>
-          </a:p>
-          <a:p>
-            <a:r>
-              <a:t>[확인] M06 Xacro 모듈화 시작 조건을 말할 수 있다.</a:t>
+              <a:t>[설명] 검증 명령은 GUI 결과와 별도로 실행해 재현 가능한 완료 기준을 만든다.</a:t>
+            </a:r>
+          </a:p>
+          <a:p>
+            <a:r>
+              <a:t>[실행] check_urdf ~/ros2_curri/agv_ws/src/agv_description/curriculum_stages/M05/agv.urdf</a:t>
+            </a:r>
+          </a:p>
+          <a:p>
+            <a:r>
+              <a:t>rg -n '&lt;xacro:|&lt;link |&lt;joint ' ~/ros2_curri/agv_ws/src/agv_description/curriculum_stages/M05/agv.urdf</a:t>
+            </a:r>
+          </a:p>
+          <a:p>
+            <a:r>
+              <a:t>[확인] RobotModel과 TF에서 base, 두 wheel, camera, lidar, imu 연결을 확인한다.</a:t>
             </a:r>
           </a:p>
           <a:p>
@@ -1253,7 +1266,7 @@
           <a:lstStyle/>
           <a:p>
             <a:r>
-              <a:t>[설명] 공식 문서는 버전 차이와 확장 학습을 확인할 때 사용한다.</a:t>
+              <a:t>[설명] 오류를 대신 해결하지 말고 증상부터 우선 확인 순서대로 교육생이 실행하게 한다.</a:t>
             </a:r>
           </a:p>
           <a:p>
@@ -1263,7 +1276,187 @@
           </a:p>
           <a:p>
             <a:r>
-              <a:t>[확인] 학습자는 본문만으로 현재 모듈을 완료한 상태여야 한다.</a:t>
+              <a:t>[확인] 수정 뒤 첫 검증 명령을 다시 실행한다.</a:t>
+            </a:r>
+          </a:p>
+          <a:p>
+            <a:r>
+              <a:t>[멈춤] 교육생이 현재 체크포인트를 통과할 때까지 기다린다.</a:t>
+            </a:r>
+          </a:p>
+          <a:p>
+            <a:r>
+              <a:t>[오류] 슬라이드의 두 대표 오류를 먼저 사용한다.</a:t>
+            </a:r>
+          </a:p>
+        </p:txBody>
+      </p:sp>
+      <p:sp>
+        <p:nvSpPr>
+          <p:cNvPr id="4" name="Slide Number Placeholder 3"/>
+          <p:cNvSpPr>
+            <a:spLocks noGrp="1"/>
+          </p:cNvSpPr>
+          <p:nvPr>
+            <p:ph type="sldNum" idx="5" sz="quarter"/>
+          </p:nvPr>
+        </p:nvSpPr>
+        <p:spPr/>
+      </p:sp>
+    </p:spTree>
+  </p:cSld>
+  <p:clrMapOvr>
+    <a:masterClrMapping/>
+  </p:clrMapOvr>
+</p:notes>
+</file>
+
+<file path=ppt/notesSlides/notesSlide18.xml><?xml version="1.0" encoding="utf-8"?>
+<p:notes xmlns:a="http://schemas.openxmlformats.org/drawingml/2006/main" xmlns:p="http://schemas.openxmlformats.org/presentationml/2006/main" xmlns:r="http://schemas.openxmlformats.org/officeDocument/2006/relationships">
+  <p:cSld>
+    <p:spTree>
+      <p:nvGrpSpPr>
+        <p:cNvPr id="1" name=""/>
+        <p:cNvGrpSpPr/>
+        <p:nvPr/>
+      </p:nvGrpSpPr>
+      <p:grpSpPr>
+        <a:xfrm>
+          <a:off x="0" y="0"/>
+          <a:ext cx="0" cy="0"/>
+          <a:chOff x="0" y="0"/>
+          <a:chExt cx="0" cy="0"/>
+        </a:xfrm>
+      </p:grpSpPr>
+      <p:sp>
+        <p:nvSpPr>
+          <p:cNvPr id="2" name="Slide Image Placeholder 1"/>
+          <p:cNvSpPr>
+            <a:spLocks noGrp="1"/>
+          </p:cNvSpPr>
+          <p:nvPr>
+            <p:ph type="sldImg" idx="2"/>
+          </p:nvPr>
+        </p:nvSpPr>
+        <p:spPr/>
+      </p:sp>
+      <p:sp>
+        <p:nvSpPr>
+          <p:cNvPr id="3" name="Notes Placeholder 2"/>
+          <p:cNvSpPr>
+            <a:spLocks noGrp="1"/>
+          </p:cNvSpPr>
+          <p:nvPr>
+            <p:ph type="body" idx="3" sz="quarter"/>
+          </p:nvPr>
+        </p:nvSpPr>
+        <p:spPr/>
+        <p:txBody>
+          <a:bodyPr/>
+          <a:lstStyle/>
+          <a:p>
+            <a:r>
+              <a:t>[설명] 교육생이 직접 한 값만 바꿔 원인과 결과를 연결하게 한다.</a:t>
+            </a:r>
+          </a:p>
+          <a:p>
+            <a:r>
+              <a:t>[실행] 슬라이드의 명령 또는 파일 작성 단계를 진행한다.</a:t>
+            </a:r>
+          </a:p>
+          <a:p>
+            <a:r>
+              <a:t>[확인] 원래 값과 변경 값을 모두 기록한다.</a:t>
+            </a:r>
+          </a:p>
+          <a:p>
+            <a:r>
+              <a:t>[멈춤] 교육생이 현재 체크포인트를 통과할 때까지 기다린다.</a:t>
+            </a:r>
+          </a:p>
+          <a:p>
+            <a:r>
+              <a:t>[오류] 오류가 나면 현재 폴더, source, 파일 경로를 먼저 확인한다.</a:t>
+            </a:r>
+          </a:p>
+        </p:txBody>
+      </p:sp>
+      <p:sp>
+        <p:nvSpPr>
+          <p:cNvPr id="4" name="Slide Number Placeholder 3"/>
+          <p:cNvSpPr>
+            <a:spLocks noGrp="1"/>
+          </p:cNvSpPr>
+          <p:nvPr>
+            <p:ph type="sldNum" idx="5" sz="quarter"/>
+          </p:nvPr>
+        </p:nvSpPr>
+        <p:spPr/>
+      </p:sp>
+    </p:spTree>
+  </p:cSld>
+  <p:clrMapOvr>
+    <a:masterClrMapping/>
+  </p:clrMapOvr>
+</p:notes>
+</file>
+
+<file path=ppt/notesSlides/notesSlide19.xml><?xml version="1.0" encoding="utf-8"?>
+<p:notes xmlns:a="http://schemas.openxmlformats.org/drawingml/2006/main" xmlns:p="http://schemas.openxmlformats.org/presentationml/2006/main" xmlns:r="http://schemas.openxmlformats.org/officeDocument/2006/relationships">
+  <p:cSld>
+    <p:spTree>
+      <p:nvGrpSpPr>
+        <p:cNvPr id="1" name=""/>
+        <p:cNvGrpSpPr/>
+        <p:nvPr/>
+      </p:nvGrpSpPr>
+      <p:grpSpPr>
+        <a:xfrm>
+          <a:off x="0" y="0"/>
+          <a:ext cx="0" cy="0"/>
+          <a:chOff x="0" y="0"/>
+          <a:chExt cx="0" cy="0"/>
+        </a:xfrm>
+      </p:grpSpPr>
+      <p:sp>
+        <p:nvSpPr>
+          <p:cNvPr id="2" name="Slide Image Placeholder 1"/>
+          <p:cNvSpPr>
+            <a:spLocks noGrp="1"/>
+          </p:cNvSpPr>
+          <p:nvPr>
+            <p:ph type="sldImg" idx="2"/>
+          </p:nvPr>
+        </p:nvSpPr>
+        <p:spPr/>
+      </p:sp>
+      <p:sp>
+        <p:nvSpPr>
+          <p:cNvPr id="3" name="Notes Placeholder 2"/>
+          <p:cNvSpPr>
+            <a:spLocks noGrp="1"/>
+          </p:cNvSpPr>
+          <p:nvPr>
+            <p:ph type="body" idx="3" sz="quarter"/>
+          </p:nvPr>
+        </p:nvSpPr>
+        <p:spPr/>
+        <p:txBody>
+          <a:bodyPr/>
+          <a:lstStyle/>
+          <a:p>
+            <a:r>
+              <a:t>[설명] 교육생이 Complete·캡처·로그를 저장했는지 확인하고 다음 모듈의 시작 상태를 읽는다.</a:t>
+            </a:r>
+          </a:p>
+          <a:p>
+            <a:r>
+              <a:t>[실행] 슬라이드의 명령 또는 파일 작성 단계를 진행한다.</a:t>
+            </a:r>
+          </a:p>
+          <a:p>
+            <a:r>
+              <a:t>[확인] M06 Xacro 모듈화 시작 조건을 말할 수 있다.</a:t>
             </a:r>
           </a:p>
           <a:p>
@@ -1388,6 +1581,96 @@
 </p:notes>
 </file>
 
+<file path=ppt/notesSlides/notesSlide20.xml><?xml version="1.0" encoding="utf-8"?>
+<p:notes xmlns:a="http://schemas.openxmlformats.org/drawingml/2006/main" xmlns:p="http://schemas.openxmlformats.org/presentationml/2006/main" xmlns:r="http://schemas.openxmlformats.org/officeDocument/2006/relationships">
+  <p:cSld>
+    <p:spTree>
+      <p:nvGrpSpPr>
+        <p:cNvPr id="1" name=""/>
+        <p:cNvGrpSpPr/>
+        <p:nvPr/>
+      </p:nvGrpSpPr>
+      <p:grpSpPr>
+        <a:xfrm>
+          <a:off x="0" y="0"/>
+          <a:ext cx="0" cy="0"/>
+          <a:chOff x="0" y="0"/>
+          <a:chExt cx="0" cy="0"/>
+        </a:xfrm>
+      </p:grpSpPr>
+      <p:sp>
+        <p:nvSpPr>
+          <p:cNvPr id="2" name="Slide Image Placeholder 1"/>
+          <p:cNvSpPr>
+            <a:spLocks noGrp="1"/>
+          </p:cNvSpPr>
+          <p:nvPr>
+            <p:ph type="sldImg" idx="2"/>
+          </p:nvPr>
+        </p:nvSpPr>
+        <p:spPr/>
+      </p:sp>
+      <p:sp>
+        <p:nvSpPr>
+          <p:cNvPr id="3" name="Notes Placeholder 2"/>
+          <p:cNvSpPr>
+            <a:spLocks noGrp="1"/>
+          </p:cNvSpPr>
+          <p:nvPr>
+            <p:ph type="body" idx="3" sz="quarter"/>
+          </p:nvPr>
+        </p:nvSpPr>
+        <p:spPr/>
+        <p:txBody>
+          <a:bodyPr/>
+          <a:lstStyle/>
+          <a:p>
+            <a:r>
+              <a:t>[설명] 공식 문서는 버전 차이와 확장 학습을 확인할 때 사용한다.</a:t>
+            </a:r>
+          </a:p>
+          <a:p>
+            <a:r>
+              <a:t>[실행] 슬라이드의 명령 또는 파일 작성 단계를 진행한다.</a:t>
+            </a:r>
+          </a:p>
+          <a:p>
+            <a:r>
+              <a:t>[확인] 학습자는 본문만으로 현재 모듈을 완료한 상태여야 한다.</a:t>
+            </a:r>
+          </a:p>
+          <a:p>
+            <a:r>
+              <a:t>[멈춤] 교육생이 현재 체크포인트를 통과할 때까지 기다린다.</a:t>
+            </a:r>
+          </a:p>
+          <a:p>
+            <a:r>
+              <a:t>[오류] 오류가 나면 현재 폴더, source, 파일 경로를 먼저 확인한다.</a:t>
+            </a:r>
+          </a:p>
+        </p:txBody>
+      </p:sp>
+      <p:sp>
+        <p:nvSpPr>
+          <p:cNvPr id="4" name="Slide Number Placeholder 3"/>
+          <p:cNvSpPr>
+            <a:spLocks noGrp="1"/>
+          </p:cNvSpPr>
+          <p:nvPr>
+            <p:ph type="sldNum" idx="5" sz="quarter"/>
+          </p:nvPr>
+        </p:nvSpPr>
+        <p:spPr/>
+      </p:sp>
+    </p:spTree>
+  </p:cSld>
+  <p:clrMapOvr>
+    <a:masterClrMapping/>
+  </p:clrMapOvr>
+</p:notes>
+</file>
+
 <file path=ppt/notesSlides/notesSlide3.xml><?xml version="1.0" encoding="utf-8"?>
 <p:notes xmlns:a="http://schemas.openxmlformats.org/drawingml/2006/main" xmlns:p="http://schemas.openxmlformats.org/presentationml/2006/main" xmlns:r="http://schemas.openxmlformats.org/officeDocument/2006/relationships">
   <p:cSld>
@@ -1793,22 +2076,17 @@
           <a:lstStyle/>
           <a:p>
             <a:r>
-              <a:t>[설명] M05에서는 macro·property·xacro 없이 한 파일에 link와 joint를 직접 작성한다.</a:t>
-            </a:r>
-          </a:p>
-          <a:p>
-            <a:r>
-              <a:t>[실행] cd ~/ros2_curri/agv_ws</a:t>
-            </a:r>
-          </a:p>
-          <a:p>
-            <a:r>
-              <a:t>check_urdf src/agv_description/curriculum_stages/M05/agv.urdf</a:t>
-            </a:r>
-          </a:p>
-          <a:p>
-            <a:r>
-              <a:t>[확인] 명령 출력에서 슬라이드의 확인 항목을 찾는다.</a:t>
+              <a:t>[설명] 파일을 코드 문법보다 먼저 역할·사용법·확인 화면으로 설명한다.</a:t>
+            </a:r>
+          </a:p>
+          <a:p>
+            <a:r>
+              <a:t>[실행] 슬라이드의 명령 또는 파일 작성 단계를 진행한다.</a:t>
+            </a:r>
+          </a:p>
+          <a:p>
+            <a:r>
+              <a:t>[확인] 교육생이 각 파일의 산출물과 확인 위치를 말할 수 있다.</a:t>
             </a:r>
           </a:p>
           <a:p>
@@ -1888,27 +2166,17 @@
           <a:lstStyle/>
           <a:p>
             <a:r>
-              <a:t>[설명] RobotModel에는 단일 URDF 텍스트를 robot_description으로 넣고 TF를 함께 확인한다.</a:t>
-            </a:r>
-          </a:p>
-          <a:p>
-            <a:r>
-              <a:t>[실행] ros2 run robot_state_publisher robot_state_publisher \</a:t>
-            </a:r>
-          </a:p>
-          <a:p>
-            <a:r>
-              <a:t>  --ros-args -p robot_description:="$(cat src/agv_description/curriculum_stages/M05/agv.urdf)"</a:t>
-            </a:r>
-          </a:p>
-          <a:p>
-            <a:r>
-              <a:t># 새 터미널: rviz2 → Add → RobotModel, TF</a:t>
-            </a:r>
-          </a:p>
-          <a:p>
-            <a:r>
-              <a:t>[확인] 명령 출력에서 슬라이드의 확인 항목을 찾는다.</a:t>
+              <a:t>[설명] URDF는 로봇의 부품표가 아니라, ‘어떤 부품을 어느 frame에 고정할지’ 적는 조립도입니다.</a:t>
+            </a:r>
+          </a:p>
+          <a:p>
+            <a:r>
+              <a:t>[실행] 슬라이드의 명령 또는 파일 작성 단계를 진행한다.</a:t>
+            </a:r>
+          </a:p>
+          <a:p>
+            <a:r>
+              <a:t>[확인] check_urdf의 root Link와 child 목록을 먼저 읽고 RViz RobotModel로 형태를 봅니다.</a:t>
             </a:r>
           </a:p>
           <a:p>
@@ -1988,17 +2256,22 @@
           <a:lstStyle/>
           <a:p>
             <a:r>
-              <a:t>[설명] ~/ros2_curri/agv_ws/src/agv_description/curriculum_stages/M05/agv.urdf의 전체 파일을 1/2 구간으로 작성한다.</a:t>
-            </a:r>
-          </a:p>
-          <a:p>
-            <a:r>
-              <a:t>[실행] nano ~/ros2_curri/agv_ws/src/agv_description/curriculum_stages/M05/agv.urdf</a:t>
-            </a:r>
-          </a:p>
-          <a:p>
-            <a:r>
-              <a:t>[확인] 코드를 저장하고 다음 코드 슬라이드 또는 build 단계로 이동한다.</a:t>
+              <a:t>[설명] M05에서는 macro·property·xacro 없이 한 파일에 link와 joint를 직접 작성한다.</a:t>
+            </a:r>
+          </a:p>
+          <a:p>
+            <a:r>
+              <a:t>[실행] cd ~/ros2_curri/agv_ws</a:t>
+            </a:r>
+          </a:p>
+          <a:p>
+            <a:r>
+              <a:t>check_urdf src/agv_description/curriculum_stages/M05/agv.urdf</a:t>
+            </a:r>
+          </a:p>
+          <a:p>
+            <a:r>
+              <a:t>[확인] 명령 출력에서 슬라이드의 확인 항목을 찾는다.</a:t>
             </a:r>
           </a:p>
           <a:p>
@@ -2008,7 +2281,7 @@
           </a:p>
           <a:p>
             <a:r>
-              <a:t>[오류] 들여쓰기·XML 태그·따옴표가 슬라이드와 정확히 같은지 확인한다.</a:t>
+              <a:t>[오류] 오류가 나면 현재 폴더, source, 파일 경로를 먼저 확인한다.</a:t>
             </a:r>
           </a:p>
         </p:txBody>
@@ -5381,7 +5654,7 @@
               </a:defRPr>
             </a:pPr>
             <a:r>
-              <a:t>파일을 계속 작성하고 저장한다 (2/2)</a:t>
+              <a:t>RViz로 표시한다</a:t>
             </a:r>
           </a:p>
         </p:txBody>
@@ -5420,7 +5693,7 @@
               </a:defRPr>
             </a:pPr>
             <a:r>
-              <a:t>~/ros2_curri/agv_ws/src/agv_description/curriculum_stages/M05/agv.urdf</a:t>
+              <a:t>한 장에는 한 행동만 수행합니다.</a:t>
             </a:r>
           </a:p>
         </p:txBody>
@@ -5556,7 +5829,7 @@
               </a:defRPr>
             </a:pPr>
             <a:r>
-              <a:t>현재 단계 4/5    |    현재 폴더 ~/ros2_curri/agv_ws    |    현재 터미널</a:t>
+              <a:t>현재 단계 2/2    |    현재 폴더 ~/ros2_curri/agv_ws    |    새 터미널</a:t>
             </a:r>
           </a:p>
         </p:txBody>
@@ -5569,8 +5842,8 @@
         </p:nvSpPr>
         <p:spPr>
           <a:xfrm>
-            <a:off x="658368" y="1627632"/>
-            <a:ext cx="10972800" cy="256032"/>
+            <a:off x="676656" y="1764792"/>
+            <a:ext cx="1828800" cy="347472"/>
           </a:xfrm>
           <a:prstGeom prst="rect">
             <a:avLst/>
@@ -5587,7 +5860,46 @@
               <a:spcAft>
                 <a:spcPts val="0"/>
               </a:spcAft>
-              <a:defRPr sz="1500" b="1">
+              <a:defRPr sz="1800" b="1">
+                <a:solidFill>
+                  <a:srgbClr val="225B9B"/>
+                </a:solidFill>
+                <a:latin typeface="Noto Sans CJK KR"/>
+              </a:defRPr>
+            </a:pPr>
+            <a:r>
+              <a:t>왜 하는가</a:t>
+            </a:r>
+          </a:p>
+        </p:txBody>
+      </p:sp>
+      <p:sp>
+        <p:nvSpPr>
+          <p:cNvPr id="8" name="TextBox 7"/>
+          <p:cNvSpPr txBox="1"/>
+          <p:nvPr/>
+        </p:nvSpPr>
+        <p:spPr>
+          <a:xfrm>
+            <a:off x="676656" y="2103120"/>
+            <a:ext cx="10789920" cy="512064"/>
+          </a:xfrm>
+          <a:prstGeom prst="rect">
+            <a:avLst/>
+          </a:prstGeom>
+          <a:noFill/>
+        </p:spPr>
+        <p:txBody>
+          <a:bodyPr wrap="square" lIns="73152" rIns="73152" tIns="36576" bIns="36576">
+            <a:spAutoFit/>
+          </a:bodyPr>
+          <a:lstStyle/>
+          <a:p>
+            <a:pPr algn="l">
+              <a:spcAft>
+                <a:spcPts val="0"/>
+              </a:spcAft>
+              <a:defRPr sz="2000" b="0">
                 <a:solidFill>
                   <a:srgbClr val="122C4E"/>
                 </a:solidFill>
@@ -5595,31 +5907,31 @@
               </a:defRPr>
             </a:pPr>
             <a:r>
-              <a:t>이번 단계: 파일의 전체 내용을 중간 생략 없이 작성합니다. 아래 줄 범위를 끝까지 입력하세요.</a:t>
-            </a:r>
-          </a:p>
-        </p:txBody>
-      </p:sp>
-      <p:sp>
-        <p:nvSpPr>
-          <p:cNvPr id="8" name="Rectangle 7"/>
+              <a:t>RobotModel에는 단일 URDF 텍스트를 robot_description으로 넣고 TF를 함께 확인한다.</a:t>
+            </a:r>
+          </a:p>
+        </p:txBody>
+      </p:sp>
+      <p:sp>
+        <p:nvSpPr>
+          <p:cNvPr id="9" name="Rounded Rectangle 8"/>
           <p:cNvSpPr/>
           <p:nvPr/>
         </p:nvSpPr>
         <p:spPr>
           <a:xfrm>
-            <a:off x="658368" y="1956816"/>
-            <a:ext cx="10972800" cy="603504"/>
-          </a:xfrm>
-          <a:prstGeom prst="rect">
+            <a:off x="676656" y="2871216"/>
+            <a:ext cx="10835640" cy="2331720"/>
+          </a:xfrm>
+          <a:prstGeom prst="roundRect">
             <a:avLst/>
           </a:prstGeom>
           <a:solidFill>
-            <a:srgbClr val="F4F7FB"/>
+            <a:srgbClr val="1D232D"/>
           </a:solidFill>
           <a:ln>
             <a:solidFill>
-              <a:srgbClr val="F4F7FB"/>
+              <a:srgbClr val="1D232D"/>
             </a:solidFill>
           </a:ln>
         </p:spPr>
@@ -5645,81 +5957,23 @@
               <a:spcAft>
                 <a:spcPts val="0"/>
               </a:spcAft>
-              <a:defRPr sz="1400" b="0">
-                <a:solidFill>
-                  <a:srgbClr val="122C4E"/>
+              <a:defRPr sz="1600" b="0">
+                <a:solidFill>
+                  <a:srgbClr val="FFFFFF"/>
                 </a:solidFill>
                 <a:latin typeface="DejaVu Sans Mono"/>
               </a:defRPr>
             </a:pPr>
             <a:r>
-              <a:t>파일 생성: mkdir -p ~/ros2_curri/agv_ws/src/agv_description/curriculum_stages/M05</a:t>
+              <a:t>ros2 run robot_state_publisher robot_state_publisher \</a:t>
             </a:r>
             <a:br/>
             <a:r>
-              <a:t>파일 열기: nano ~/ros2_curri/agv_ws/src/agv_description/curriculum_stages/M05/agv.urdf</a:t>
-            </a:r>
-          </a:p>
-        </p:txBody>
-      </p:sp>
-      <p:sp>
-        <p:nvSpPr>
-          <p:cNvPr id="9" name="Rectangle 8"/>
-          <p:cNvSpPr/>
-          <p:nvPr/>
-        </p:nvSpPr>
-        <p:spPr>
-          <a:xfrm>
-            <a:off x="658368" y="2706624"/>
-            <a:ext cx="10972800" cy="3364992"/>
-          </a:xfrm>
-          <a:prstGeom prst="rect">
-            <a:avLst/>
-          </a:prstGeom>
-          <a:solidFill>
-            <a:srgbClr val="1D232D"/>
-          </a:solidFill>
-          <a:ln>
-            <a:solidFill>
-              <a:srgbClr val="1D232D"/>
-            </a:solidFill>
-          </a:ln>
-        </p:spPr>
-        <p:style>
-          <a:lnRef idx="1">
-            <a:schemeClr val="accent1"/>
-          </a:lnRef>
-          <a:fillRef idx="3">
-            <a:schemeClr val="accent1"/>
-          </a:fillRef>
-          <a:effectRef idx="2">
-            <a:schemeClr val="accent1"/>
-          </a:effectRef>
-          <a:fontRef idx="minor">
-            <a:schemeClr val="lt1"/>
-          </a:fontRef>
-        </p:style>
-        <p:txBody>
-          <a:bodyPr rtlCol="0" anchor="ctr" wrap="square" lIns="164592" rIns="164592" tIns="109728" bIns="36576"/>
-          <a:lstStyle/>
-          <a:p>
-            <a:pPr algn="l">
-              <a:spcAft>
-                <a:spcPts val="0"/>
-              </a:spcAft>
-              <a:defRPr sz="1400" b="0">
-                <a:solidFill>
-                  <a:srgbClr val="FFFFFF"/>
-                </a:solidFill>
-                <a:latin typeface="DejaVu Sans Mono"/>
-              </a:defRPr>
-            </a:pPr>
-            <a:r>
-              <a:t>  &lt;joint name="imu_joint" type="fixed"&gt;&lt;parent link="base_link"/&gt;&lt;child link="imu_link"/&gt;&lt;origin xyz="0 0 0.28"/&gt;&lt;/joint&gt;</a:t>
+              <a:t>  --ros-args -p robot_description:="$(cat src/agv_description/curriculum_stages/M05/agv.urdf)"</a:t>
             </a:r>
             <a:br/>
             <a:r>
-              <a:t>&lt;/robot&gt;</a:t>
+              <a:t># 새 터미널: rviz2 → Add → RobotModel, TF</a:t>
             </a:r>
           </a:p>
         </p:txBody>
@@ -5732,8 +5986,8 @@
         </p:nvSpPr>
         <p:spPr>
           <a:xfrm>
-            <a:off x="749808" y="6181344"/>
-            <a:ext cx="10789920" cy="201168"/>
+            <a:off x="768096" y="5468112"/>
+            <a:ext cx="1143000" cy="256032"/>
           </a:xfrm>
           <a:prstGeom prst="rect">
             <a:avLst/>
@@ -5750,15 +6004,54 @@
               <a:spcAft>
                 <a:spcPts val="0"/>
               </a:spcAft>
-              <a:defRPr sz="1000" b="0">
-                <a:solidFill>
-                  <a:srgbClr val="5C6672"/>
-                </a:solidFill>
-                <a:latin typeface="Noto Sans CJK KR"/>
-              </a:defRPr>
-            </a:pPr>
-            <a:r>
-              <a:t>파일 전체 2/2 · 이 슬라이드 다음에 같은 파일의 나머지 줄이 이어집니다.</a:t>
+              <a:defRPr sz="1800" b="1">
+                <a:solidFill>
+                  <a:srgbClr val="2A8B5A"/>
+                </a:solidFill>
+                <a:latin typeface="Noto Sans CJK KR"/>
+              </a:defRPr>
+            </a:pPr>
+            <a:r>
+              <a:t>확인</a:t>
+            </a:r>
+          </a:p>
+        </p:txBody>
+      </p:sp>
+      <p:sp>
+        <p:nvSpPr>
+          <p:cNvPr id="11" name="TextBox 10"/>
+          <p:cNvSpPr txBox="1"/>
+          <p:nvPr/>
+        </p:nvSpPr>
+        <p:spPr>
+          <a:xfrm>
+            <a:off x="768096" y="5742432"/>
+            <a:ext cx="10561320" cy="347472"/>
+          </a:xfrm>
+          <a:prstGeom prst="rect">
+            <a:avLst/>
+          </a:prstGeom>
+          <a:noFill/>
+        </p:spPr>
+        <p:txBody>
+          <a:bodyPr wrap="square" lIns="73152" rIns="73152" tIns="36576" bIns="36576">
+            <a:spAutoFit/>
+          </a:bodyPr>
+          <a:lstStyle/>
+          <a:p>
+            <a:pPr algn="l">
+              <a:spcAft>
+                <a:spcPts val="0"/>
+              </a:spcAft>
+              <a:defRPr sz="1800" b="0">
+                <a:solidFill>
+                  <a:srgbClr val="122C4E"/>
+                </a:solidFill>
+                <a:latin typeface="Noto Sans CJK KR"/>
+              </a:defRPr>
+            </a:pPr>
+            <a:r>
+              <a:t>명령의 출력에서 topic·frame·파일 이름 또는 성공 메시지를 찾으면 이 단계가 완료됩니다.</a:t>
             </a:r>
           </a:p>
         </p:txBody>
@@ -5815,7 +6108,7 @@
               </a:defRPr>
             </a:pPr>
             <a:r>
-              <a:t>build → source → run 순서로 실행한다</a:t>
+              <a:t>파일을 새로 만들고 저장한다 (1/2)</a:t>
             </a:r>
           </a:p>
         </p:txBody>
@@ -5854,7 +6147,7 @@
               </a:defRPr>
             </a:pPr>
             <a:r>
-              <a:t>새 파일 또는 수정 파일은 build와 source 뒤에만 실행 이름·설정에 반영됩니다.</a:t>
+              <a:t>~/ros2_curri/agv_ws/src/agv_description/curriculum_stages/M05/agv.urdf</a:t>
             </a:r>
           </a:p>
         </p:txBody>
@@ -5990,31 +6283,70 @@
               </a:defRPr>
             </a:pPr>
             <a:r>
-              <a:t>현재 단계 실행    |    현재 폴더 ~/ros2_curri/agv_ws    |    현재 터미널</a:t>
-            </a:r>
-          </a:p>
-        </p:txBody>
-      </p:sp>
-      <p:sp>
-        <p:nvSpPr>
-          <p:cNvPr id="7" name="Rounded Rectangle 6"/>
+              <a:t>현재 단계 3/5    |    현재 폴더 ~/ros2_curri/agv_ws    |    현재 터미널</a:t>
+            </a:r>
+          </a:p>
+        </p:txBody>
+      </p:sp>
+      <p:sp>
+        <p:nvSpPr>
+          <p:cNvPr id="7" name="TextBox 6"/>
+          <p:cNvSpPr txBox="1"/>
+          <p:nvPr/>
+        </p:nvSpPr>
+        <p:spPr>
+          <a:xfrm>
+            <a:off x="658368" y="1627632"/>
+            <a:ext cx="10972800" cy="256032"/>
+          </a:xfrm>
+          <a:prstGeom prst="rect">
+            <a:avLst/>
+          </a:prstGeom>
+          <a:noFill/>
+        </p:spPr>
+        <p:txBody>
+          <a:bodyPr wrap="square" lIns="73152" rIns="73152" tIns="36576" bIns="36576">
+            <a:spAutoFit/>
+          </a:bodyPr>
+          <a:lstStyle/>
+          <a:p>
+            <a:pPr algn="l">
+              <a:spcAft>
+                <a:spcPts val="0"/>
+              </a:spcAft>
+              <a:defRPr sz="1500" b="1">
+                <a:solidFill>
+                  <a:srgbClr val="122C4E"/>
+                </a:solidFill>
+                <a:latin typeface="Noto Sans CJK KR"/>
+              </a:defRPr>
+            </a:pPr>
+            <a:r>
+              <a:t>이번 단계: 파일의 전체 내용을 중간 생략 없이 작성합니다. 아래 줄 범위를 끝까지 입력하세요.</a:t>
+            </a:r>
+          </a:p>
+        </p:txBody>
+      </p:sp>
+      <p:sp>
+        <p:nvSpPr>
+          <p:cNvPr id="8" name="Rectangle 7"/>
           <p:cNvSpPr/>
           <p:nvPr/>
         </p:nvSpPr>
         <p:spPr>
           <a:xfrm>
-            <a:off x="658368" y="1700784"/>
-            <a:ext cx="10972800" cy="3182112"/>
-          </a:xfrm>
-          <a:prstGeom prst="roundRect">
+            <a:off x="658368" y="1956816"/>
+            <a:ext cx="10972800" cy="603504"/>
+          </a:xfrm>
+          <a:prstGeom prst="rect">
             <a:avLst/>
           </a:prstGeom>
           <a:solidFill>
-            <a:srgbClr val="1D232D"/>
+            <a:srgbClr val="F4F7FB"/>
           </a:solidFill>
           <a:ln>
             <a:solidFill>
-              <a:srgbClr val="1D232D"/>
+              <a:srgbClr val="F4F7FB"/>
             </a:solidFill>
           </a:ln>
         </p:spPr>
@@ -6040,7 +6372,69 @@
               <a:spcAft>
                 <a:spcPts val="0"/>
               </a:spcAft>
-              <a:defRPr sz="1600" b="0">
+              <a:defRPr sz="1400" b="0">
+                <a:solidFill>
+                  <a:srgbClr val="122C4E"/>
+                </a:solidFill>
+                <a:latin typeface="DejaVu Sans Mono"/>
+              </a:defRPr>
+            </a:pPr>
+            <a:r>
+              <a:t>파일 생성: mkdir -p ~/ros2_curri/agv_ws/src/agv_description/curriculum_stages/M05</a:t>
+            </a:r>
+            <a:br/>
+            <a:r>
+              <a:t>파일 열기: nano ~/ros2_curri/agv_ws/src/agv_description/curriculum_stages/M05/agv.urdf</a:t>
+            </a:r>
+          </a:p>
+        </p:txBody>
+      </p:sp>
+      <p:sp>
+        <p:nvSpPr>
+          <p:cNvPr id="9" name="Rectangle 8"/>
+          <p:cNvSpPr/>
+          <p:nvPr/>
+        </p:nvSpPr>
+        <p:spPr>
+          <a:xfrm>
+            <a:off x="658368" y="2706624"/>
+            <a:ext cx="10972800" cy="3364992"/>
+          </a:xfrm>
+          <a:prstGeom prst="rect">
+            <a:avLst/>
+          </a:prstGeom>
+          <a:solidFill>
+            <a:srgbClr val="1D232D"/>
+          </a:solidFill>
+          <a:ln>
+            <a:solidFill>
+              <a:srgbClr val="1D232D"/>
+            </a:solidFill>
+          </a:ln>
+        </p:spPr>
+        <p:style>
+          <a:lnRef idx="1">
+            <a:schemeClr val="accent1"/>
+          </a:lnRef>
+          <a:fillRef idx="3">
+            <a:schemeClr val="accent1"/>
+          </a:fillRef>
+          <a:effectRef idx="2">
+            <a:schemeClr val="accent1"/>
+          </a:effectRef>
+          <a:fontRef idx="minor">
+            <a:schemeClr val="lt1"/>
+          </a:fontRef>
+        </p:style>
+        <p:txBody>
+          <a:bodyPr rtlCol="0" anchor="ctr" wrap="square" lIns="164592" rIns="164592" tIns="109728" bIns="36576"/>
+          <a:lstStyle/>
+          <a:p>
+            <a:pPr algn="l">
+              <a:spcAft>
+                <a:spcPts val="0"/>
+              </a:spcAft>
+              <a:defRPr sz="1400" b="0">
                 <a:solidFill>
                   <a:srgbClr val="FFFFFF"/>
                 </a:solidFill>
@@ -6048,29 +6442,65 @@
               </a:defRPr>
             </a:pPr>
             <a:r>
-              <a:t>cd ~/ros2_curri/agv_ws</a:t>
+              <a:t>&lt;?xml version="1.0"?&gt;</a:t>
             </a:r>
             <a:br/>
             <a:r>
-              <a:t>check_urdf src/agv_description/curriculum_stages/M05/agv.urdf</a:t>
+              <a:t>&lt;robot name="agv_m05"&gt;</a:t>
             </a:r>
             <a:br/>
             <a:r>
-              <a:t># 다음 M06에서 처음으로 xacro를 사용한다.</a:t>
-            </a:r>
-          </a:p>
-        </p:txBody>
-      </p:sp>
-      <p:sp>
-        <p:nvSpPr>
-          <p:cNvPr id="8" name="TextBox 7"/>
+              <a:t>  &lt;link name="base_link"&gt;&lt;visual&gt;&lt;origin xyz="0 0 0.16"/&gt;&lt;geometry&gt;&lt;box size="0.60 0.42 0.16"/&gt;&lt;/geometry&gt;&lt;/visual&gt;&lt;/link&gt;</a:t>
+            </a:r>
+            <a:br/>
+            <a:r>
+              <a:t>  &lt;link name="left_wheel_link"&gt;&lt;visual&gt;&lt;origin rpy="1.5708 0 0"/&gt;&lt;geometry&gt;&lt;cylinder radius="0.08" length="0.05"/&gt;&lt;/geometry&gt;&lt;/visual&gt;&lt;/link&gt;</a:t>
+            </a:r>
+            <a:br/>
+            <a:r>
+              <a:t>  &lt;link name="right_wheel_link"&gt;&lt;visual&gt;&lt;origin rpy="1.5708 0 0"/&gt;&lt;geometry&gt;&lt;cylinder radius="0.08" length="0.05"/&gt;&lt;/geometry&gt;&lt;/visual&gt;&lt;/link&gt;</a:t>
+            </a:r>
+            <a:br/>
+            <a:r>
+              <a:t>  &lt;link name="caster_link"&gt;&lt;visual&gt;&lt;geometry&gt;&lt;sphere radius="0.04"/&gt;&lt;/geometry&gt;&lt;/visual&gt;&lt;/link&gt;</a:t>
+            </a:r>
+            <a:br/>
+            <a:r>
+              <a:t>  &lt;link name="camera_link"/&gt;&lt;link name="lidar_link"/&gt;&lt;link name="imu_link"/&gt;</a:t>
+            </a:r>
+            <a:br/>
+            <a:r>
+              <a:t>  &lt;joint name="left_wheel_joint" type="continuous"&gt;&lt;parent link="base_link"/&gt;&lt;child link="left_wheel_link"/&gt;&lt;origin xyz="0 0.19 0.08"/&gt;&lt;axis xyz="0 1 0"/&gt;&lt;/joint&gt;</a:t>
+            </a:r>
+            <a:br/>
+            <a:r>
+              <a:t>  &lt;joint name="right_wheel_joint" type="continuous"&gt;&lt;parent link="base_link"/&gt;&lt;child link="right_wheel_link"/&gt;&lt;origin xyz="0 -0.19 0.08"/&gt;&lt;axis xyz="0 1 0"/&gt;&lt;/joint&gt;</a:t>
+            </a:r>
+            <a:br/>
+            <a:r>
+              <a:t>  &lt;joint name="caster_joint" type="fixed"&gt;&lt;parent link="base_link"/&gt;&lt;child link="caster_link"/&gt;&lt;origin xyz="-0.24 0 0.04"/&gt;&lt;/joint&gt;</a:t>
+            </a:r>
+            <a:br/>
+            <a:r>
+              <a:t>  &lt;joint name="camera_joint" type="fixed"&gt;&lt;parent link="base_link"/&gt;&lt;child link="camera_link"/&gt;&lt;origin xyz="0.30 0 0.26"/&gt;&lt;/joint&gt;</a:t>
+            </a:r>
+            <a:br/>
+            <a:r>
+              <a:t>  &lt;joint name="lidar_joint" type="fixed"&gt;&lt;parent link="base_link"/&gt;&lt;child link="lidar_link"/&gt;&lt;origin xyz="0.12 0 0.29"/&gt;&lt;/joint&gt;</a:t>
+            </a:r>
+          </a:p>
+        </p:txBody>
+      </p:sp>
+      <p:sp>
+        <p:nvSpPr>
+          <p:cNvPr id="10" name="TextBox 9"/>
           <p:cNvSpPr txBox="1"/>
           <p:nvPr/>
         </p:nvSpPr>
         <p:spPr>
           <a:xfrm>
-            <a:off x="786384" y="5239512"/>
-            <a:ext cx="1261872" cy="237744"/>
+            <a:off x="749808" y="6181344"/>
+            <a:ext cx="10789920" cy="201168"/>
           </a:xfrm>
           <a:prstGeom prst="rect">
             <a:avLst/>
@@ -6087,54 +6517,15 @@
               <a:spcAft>
                 <a:spcPts val="0"/>
               </a:spcAft>
-              <a:defRPr sz="1800" b="1">
-                <a:solidFill>
-                  <a:srgbClr val="2A8B5A"/>
-                </a:solidFill>
-                <a:latin typeface="Noto Sans CJK KR"/>
-              </a:defRPr>
-            </a:pPr>
-            <a:r>
-              <a:t>확인 기준</a:t>
-            </a:r>
-          </a:p>
-        </p:txBody>
-      </p:sp>
-      <p:sp>
-        <p:nvSpPr>
-          <p:cNvPr id="9" name="TextBox 8"/>
-          <p:cNvSpPr txBox="1"/>
-          <p:nvPr/>
-        </p:nvSpPr>
-        <p:spPr>
-          <a:xfrm>
-            <a:off x="786384" y="5532120"/>
-            <a:ext cx="10469880" cy="420624"/>
-          </a:xfrm>
-          <a:prstGeom prst="rect">
-            <a:avLst/>
-          </a:prstGeom>
-          <a:noFill/>
-        </p:spPr>
-        <p:txBody>
-          <a:bodyPr wrap="square" lIns="73152" rIns="73152" tIns="36576" bIns="36576">
-            <a:spAutoFit/>
-          </a:bodyPr>
-          <a:lstStyle/>
-          <a:p>
-            <a:pPr algn="l">
-              <a:spcAft>
-                <a:spcPts val="0"/>
-              </a:spcAft>
-              <a:defRPr sz="1800" b="0">
-                <a:solidFill>
-                  <a:srgbClr val="122C4E"/>
-                </a:solidFill>
-                <a:latin typeface="Noto Sans CJK KR"/>
-              </a:defRPr>
-            </a:pPr>
-            <a:r>
-              <a:t>RobotModel과 TF에서 base, 두 wheel, camera, lidar, imu 연결을 확인한다.</a:t>
+              <a:defRPr sz="1000" b="0">
+                <a:solidFill>
+                  <a:srgbClr val="5C6672"/>
+                </a:solidFill>
+                <a:latin typeface="Noto Sans CJK KR"/>
+              </a:defRPr>
+            </a:pPr>
+            <a:r>
+              <a:t>파일 전체 1/2 · 이 슬라이드 다음에 같은 파일의 나머지 줄이 이어집니다.</a:t>
             </a:r>
           </a:p>
         </p:txBody>
@@ -6191,7 +6582,7 @@
               </a:defRPr>
             </a:pPr>
             <a:r>
-              <a:t>정상 결과: 실제 환경에서 확인한 출력</a:t>
+              <a:t>파일을 계속 작성하고 저장한다 (2/2)</a:t>
             </a:r>
           </a:p>
         </p:txBody>
@@ -6230,7 +6621,7 @@
               </a:defRPr>
             </a:pPr>
             <a:r>
-              <a:t>실제 ROS 2 환경의 파일·패키지·구성 검증 로그</a:t>
+              <a:t>~/ros2_curri/agv_ws/src/agv_description/curriculum_stages/M05/agv.urdf</a:t>
             </a:r>
           </a:p>
         </p:txBody>
@@ -6313,30 +6704,64 @@
           </a:p>
         </p:txBody>
       </p:sp>
-      <p:pic>
-        <p:nvPicPr>
-          <p:cNvPr id="6" name="Picture 5" descr="validation_terminal.png"/>
-          <p:cNvPicPr>
-            <a:picLocks noChangeAspect="1"/>
-          </p:cNvPicPr>
-          <p:nvPr/>
-        </p:nvPicPr>
-        <p:blipFill>
-          <a:blip r:embed="rId2"/>
-          <a:stretch>
-            <a:fillRect/>
-          </a:stretch>
-        </p:blipFill>
-        <p:spPr>
-          <a:xfrm>
-            <a:off x="790956" y="1884338"/>
-            <a:ext cx="10607040" cy="3738546"/>
-          </a:xfrm>
-          <a:prstGeom prst="rect">
-            <a:avLst/>
-          </a:prstGeom>
-        </p:spPr>
-      </p:pic>
+      <p:sp>
+        <p:nvSpPr>
+          <p:cNvPr id="6" name="Rectangle 5"/>
+          <p:cNvSpPr/>
+          <p:nvPr/>
+        </p:nvSpPr>
+        <p:spPr>
+          <a:xfrm>
+            <a:off x="566928" y="1188720"/>
+            <a:ext cx="11064240" cy="347472"/>
+          </a:xfrm>
+          <a:prstGeom prst="rect">
+            <a:avLst/>
+          </a:prstGeom>
+          <a:solidFill>
+            <a:srgbClr val="F4F7FB"/>
+          </a:solidFill>
+          <a:ln>
+            <a:solidFill>
+              <a:srgbClr val="F4F7FB"/>
+            </a:solidFill>
+          </a:ln>
+        </p:spPr>
+        <p:style>
+          <a:lnRef idx="1">
+            <a:schemeClr val="accent1"/>
+          </a:lnRef>
+          <a:fillRef idx="3">
+            <a:schemeClr val="accent1"/>
+          </a:fillRef>
+          <a:effectRef idx="2">
+            <a:schemeClr val="accent1"/>
+          </a:effectRef>
+          <a:fontRef idx="minor">
+            <a:schemeClr val="lt1"/>
+          </a:fontRef>
+        </p:style>
+        <p:txBody>
+          <a:bodyPr rtlCol="0" anchor="ctr" wrap="square" lIns="73152" rIns="73152" tIns="36576" bIns="36576"/>
+          <a:lstStyle/>
+          <a:p>
+            <a:pPr algn="l">
+              <a:spcAft>
+                <a:spcPts val="0"/>
+              </a:spcAft>
+              <a:defRPr sz="1300" b="1">
+                <a:solidFill>
+                  <a:srgbClr val="122C4E"/>
+                </a:solidFill>
+                <a:latin typeface="Noto Sans CJK KR"/>
+              </a:defRPr>
+            </a:pPr>
+            <a:r>
+              <a:t>현재 단계 4/5    |    현재 폴더 ~/ros2_curri/agv_ws    |    현재 터미널</a:t>
+            </a:r>
+          </a:p>
+        </p:txBody>
+      </p:sp>
       <p:sp>
         <p:nvSpPr>
           <p:cNvPr id="7" name="TextBox 6"/>
@@ -6345,8 +6770,8 @@
         </p:nvSpPr>
         <p:spPr>
           <a:xfrm>
-            <a:off x="777240" y="6217920"/>
-            <a:ext cx="10607040" cy="182880"/>
+            <a:off x="658368" y="1627632"/>
+            <a:ext cx="10972800" cy="256032"/>
           </a:xfrm>
           <a:prstGeom prst="rect">
             <a:avLst/>
@@ -6359,19 +6784,182 @@
           </a:bodyPr>
           <a:lstStyle/>
           <a:p>
-            <a:pPr algn="ctr">
-              <a:spcAft>
-                <a:spcPts val="0"/>
-              </a:spcAft>
-              <a:defRPr sz="1100" b="1">
-                <a:solidFill>
-                  <a:srgbClr val="2A8B5A"/>
-                </a:solidFill>
-                <a:latin typeface="Noto Sans CJK KR"/>
-              </a:defRPr>
-            </a:pPr>
-            <a:r>
-              <a:t>① 명령/설정  ② 정상 출력 또는 화면  ③ 다음 검증 명령으로 재확인</a:t>
+            <a:pPr algn="l">
+              <a:spcAft>
+                <a:spcPts val="0"/>
+              </a:spcAft>
+              <a:defRPr sz="1500" b="1">
+                <a:solidFill>
+                  <a:srgbClr val="122C4E"/>
+                </a:solidFill>
+                <a:latin typeface="Noto Sans CJK KR"/>
+              </a:defRPr>
+            </a:pPr>
+            <a:r>
+              <a:t>이번 단계: 파일의 전체 내용을 중간 생략 없이 작성합니다. 아래 줄 범위를 끝까지 입력하세요.</a:t>
+            </a:r>
+          </a:p>
+        </p:txBody>
+      </p:sp>
+      <p:sp>
+        <p:nvSpPr>
+          <p:cNvPr id="8" name="Rectangle 7"/>
+          <p:cNvSpPr/>
+          <p:nvPr/>
+        </p:nvSpPr>
+        <p:spPr>
+          <a:xfrm>
+            <a:off x="658368" y="1956816"/>
+            <a:ext cx="10972800" cy="603504"/>
+          </a:xfrm>
+          <a:prstGeom prst="rect">
+            <a:avLst/>
+          </a:prstGeom>
+          <a:solidFill>
+            <a:srgbClr val="F4F7FB"/>
+          </a:solidFill>
+          <a:ln>
+            <a:solidFill>
+              <a:srgbClr val="F4F7FB"/>
+            </a:solidFill>
+          </a:ln>
+        </p:spPr>
+        <p:style>
+          <a:lnRef idx="1">
+            <a:schemeClr val="accent1"/>
+          </a:lnRef>
+          <a:fillRef idx="3">
+            <a:schemeClr val="accent1"/>
+          </a:fillRef>
+          <a:effectRef idx="2">
+            <a:schemeClr val="accent1"/>
+          </a:effectRef>
+          <a:fontRef idx="minor">
+            <a:schemeClr val="lt1"/>
+          </a:fontRef>
+        </p:style>
+        <p:txBody>
+          <a:bodyPr rtlCol="0" anchor="ctr" wrap="square" lIns="73152" rIns="73152" tIns="36576" bIns="36576"/>
+          <a:lstStyle/>
+          <a:p>
+            <a:pPr algn="l">
+              <a:spcAft>
+                <a:spcPts val="0"/>
+              </a:spcAft>
+              <a:defRPr sz="1400" b="0">
+                <a:solidFill>
+                  <a:srgbClr val="122C4E"/>
+                </a:solidFill>
+                <a:latin typeface="DejaVu Sans Mono"/>
+              </a:defRPr>
+            </a:pPr>
+            <a:r>
+              <a:t>파일 생성: mkdir -p ~/ros2_curri/agv_ws/src/agv_description/curriculum_stages/M05</a:t>
+            </a:r>
+            <a:br/>
+            <a:r>
+              <a:t>파일 열기: nano ~/ros2_curri/agv_ws/src/agv_description/curriculum_stages/M05/agv.urdf</a:t>
+            </a:r>
+          </a:p>
+        </p:txBody>
+      </p:sp>
+      <p:sp>
+        <p:nvSpPr>
+          <p:cNvPr id="9" name="Rectangle 8"/>
+          <p:cNvSpPr/>
+          <p:nvPr/>
+        </p:nvSpPr>
+        <p:spPr>
+          <a:xfrm>
+            <a:off x="658368" y="2706624"/>
+            <a:ext cx="10972800" cy="3364992"/>
+          </a:xfrm>
+          <a:prstGeom prst="rect">
+            <a:avLst/>
+          </a:prstGeom>
+          <a:solidFill>
+            <a:srgbClr val="1D232D"/>
+          </a:solidFill>
+          <a:ln>
+            <a:solidFill>
+              <a:srgbClr val="1D232D"/>
+            </a:solidFill>
+          </a:ln>
+        </p:spPr>
+        <p:style>
+          <a:lnRef idx="1">
+            <a:schemeClr val="accent1"/>
+          </a:lnRef>
+          <a:fillRef idx="3">
+            <a:schemeClr val="accent1"/>
+          </a:fillRef>
+          <a:effectRef idx="2">
+            <a:schemeClr val="accent1"/>
+          </a:effectRef>
+          <a:fontRef idx="minor">
+            <a:schemeClr val="lt1"/>
+          </a:fontRef>
+        </p:style>
+        <p:txBody>
+          <a:bodyPr rtlCol="0" anchor="ctr" wrap="square" lIns="164592" rIns="164592" tIns="109728" bIns="36576"/>
+          <a:lstStyle/>
+          <a:p>
+            <a:pPr algn="l">
+              <a:spcAft>
+                <a:spcPts val="0"/>
+              </a:spcAft>
+              <a:defRPr sz="1400" b="0">
+                <a:solidFill>
+                  <a:srgbClr val="FFFFFF"/>
+                </a:solidFill>
+                <a:latin typeface="DejaVu Sans Mono"/>
+              </a:defRPr>
+            </a:pPr>
+            <a:r>
+              <a:t>  &lt;joint name="imu_joint" type="fixed"&gt;&lt;parent link="base_link"/&gt;&lt;child link="imu_link"/&gt;&lt;origin xyz="0 0 0.28"/&gt;&lt;/joint&gt;</a:t>
+            </a:r>
+            <a:br/>
+            <a:r>
+              <a:t>&lt;/robot&gt;</a:t>
+            </a:r>
+          </a:p>
+        </p:txBody>
+      </p:sp>
+      <p:sp>
+        <p:nvSpPr>
+          <p:cNvPr id="10" name="TextBox 9"/>
+          <p:cNvSpPr txBox="1"/>
+          <p:nvPr/>
+        </p:nvSpPr>
+        <p:spPr>
+          <a:xfrm>
+            <a:off x="749808" y="6181344"/>
+            <a:ext cx="10789920" cy="201168"/>
+          </a:xfrm>
+          <a:prstGeom prst="rect">
+            <a:avLst/>
+          </a:prstGeom>
+          <a:noFill/>
+        </p:spPr>
+        <p:txBody>
+          <a:bodyPr wrap="square" lIns="73152" rIns="73152" tIns="36576" bIns="36576">
+            <a:spAutoFit/>
+          </a:bodyPr>
+          <a:lstStyle/>
+          <a:p>
+            <a:pPr algn="l">
+              <a:spcAft>
+                <a:spcPts val="0"/>
+              </a:spcAft>
+              <a:defRPr sz="1000" b="0">
+                <a:solidFill>
+                  <a:srgbClr val="5C6672"/>
+                </a:solidFill>
+                <a:latin typeface="Noto Sans CJK KR"/>
+              </a:defRPr>
+            </a:pPr>
+            <a:r>
+              <a:t>파일 전체 2/2 · 이 슬라이드 다음에 같은 파일의 나머지 줄이 이어집니다.</a:t>
             </a:r>
           </a:p>
         </p:txBody>
@@ -6428,7 +7016,7 @@
               </a:defRPr>
             </a:pPr>
             <a:r>
-              <a:t>객관적 검증 명령으로 완료를 확인한다</a:t>
+              <a:t>build → source → run 순서로 실행한다</a:t>
             </a:r>
           </a:p>
         </p:txBody>
@@ -6467,7 +7055,7 @@
               </a:defRPr>
             </a:pPr>
             <a:r>
-              <a:t>화면만 보지 말고 topic·frame·파일·parameter를 다시 확인합니다.</a:t>
+              <a:t>새 파일 또는 수정 파일은 build와 source 뒤에만 실행 이름·설정에 반영됩니다.</a:t>
             </a:r>
           </a:p>
         </p:txBody>
@@ -6603,7 +7191,7 @@
               </a:defRPr>
             </a:pPr>
             <a:r>
-              <a:t>현재 단계 검증    |    현재 폴더 ~/ros2_curri/agv_ws    |    현재 터미널</a:t>
+              <a:t>현재 단계 실행    |    현재 폴더 ~/ros2_curri/agv_ws    |    현재 터미널</a:t>
             </a:r>
           </a:p>
         </p:txBody>
@@ -6616,8 +7204,8 @@
         </p:nvSpPr>
         <p:spPr>
           <a:xfrm>
-            <a:off x="658368" y="1755648"/>
-            <a:ext cx="10972800" cy="2148840"/>
+            <a:off x="658368" y="1700784"/>
+            <a:ext cx="10972800" cy="3182112"/>
           </a:xfrm>
           <a:prstGeom prst="roundRect">
             <a:avLst/>
@@ -6661,95 +7249,29 @@
               </a:defRPr>
             </a:pPr>
             <a:r>
-              <a:t>check_urdf ~/ros2_curri/agv_ws/src/agv_description/curriculum_stages/M05/agv.urdf</a:t>
+              <a:t>cd ~/ros2_curri/agv_ws</a:t>
             </a:r>
             <a:br/>
             <a:r>
-              <a:t>rg -n '&lt;xacro:|&lt;link |&lt;joint ' ~/ros2_curri/agv_ws/src/agv_description/curriculum_stages/M05/agv.urdf</a:t>
-            </a:r>
-          </a:p>
-        </p:txBody>
-      </p:sp>
-      <p:sp>
-        <p:nvSpPr>
-          <p:cNvPr id="8" name="Rounded Rectangle 7"/>
-          <p:cNvSpPr/>
-          <p:nvPr/>
-        </p:nvSpPr>
-        <p:spPr>
-          <a:xfrm>
-            <a:off x="658368" y="4206240"/>
-            <a:ext cx="10972800" cy="1554480"/>
-          </a:xfrm>
-          <a:prstGeom prst="roundRect">
-            <a:avLst/>
-          </a:prstGeom>
-          <a:solidFill>
-            <a:srgbClr val="F4F7FB"/>
-          </a:solidFill>
-          <a:ln>
-            <a:solidFill>
-              <a:srgbClr val="D1DFD5"/>
-            </a:solidFill>
-          </a:ln>
-        </p:spPr>
-        <p:style>
-          <a:lnRef idx="1">
-            <a:schemeClr val="accent1"/>
-          </a:lnRef>
-          <a:fillRef idx="3">
-            <a:schemeClr val="accent1"/>
-          </a:fillRef>
-          <a:effectRef idx="2">
-            <a:schemeClr val="accent1"/>
-          </a:effectRef>
-          <a:fontRef idx="minor">
-            <a:schemeClr val="lt1"/>
-          </a:fontRef>
-        </p:style>
-        <p:txBody>
-          <a:bodyPr rtlCol="0" anchor="ctr" wrap="square" lIns="73152" rIns="73152" tIns="36576" bIns="36576"/>
-          <a:lstStyle/>
-          <a:p>
-            <a:pPr algn="l">
-              <a:spcAft>
-                <a:spcPts val="0"/>
-              </a:spcAft>
-              <a:defRPr sz="1800" b="1">
-                <a:solidFill>
-                  <a:srgbClr val="2A8B5A"/>
-                </a:solidFill>
-                <a:latin typeface="Noto Sans CJK KR"/>
-              </a:defRPr>
-            </a:pPr>
-            <a:r>
-              <a:t>완료 체크</a:t>
+              <a:t>check_urdf src/agv_description/curriculum_stages/M05/agv.urdf</a:t>
             </a:r>
             <a:br/>
             <a:r>
-              <a:t>□ 명령이 오류 없이 실행된다.</a:t>
-            </a:r>
-            <a:br/>
-            <a:r>
-              <a:t>□ 기대한 파일·topic·frame·parameter 이름이 보인다.</a:t>
-            </a:r>
-            <a:br/>
-            <a:r>
-              <a:t>□ 값의 단위와 방향을 한 문장으로 설명할 수 있다.</a:t>
-            </a:r>
-          </a:p>
-        </p:txBody>
-      </p:sp>
-      <p:sp>
-        <p:nvSpPr>
-          <p:cNvPr id="9" name="TextBox 8"/>
+              <a:t># 다음 M06에서 처음으로 xacro를 사용한다.</a:t>
+            </a:r>
+          </a:p>
+        </p:txBody>
+      </p:sp>
+      <p:sp>
+        <p:nvSpPr>
+          <p:cNvPr id="8" name="TextBox 7"/>
           <p:cNvSpPr txBox="1"/>
           <p:nvPr/>
         </p:nvSpPr>
         <p:spPr>
           <a:xfrm>
-            <a:off x="731520" y="5989320"/>
-            <a:ext cx="10789920" cy="237744"/>
+            <a:off x="786384" y="5239512"/>
+            <a:ext cx="1261872" cy="237744"/>
           </a:xfrm>
           <a:prstGeom prst="rect">
             <a:avLst/>
@@ -6766,7 +7288,46 @@
               <a:spcAft>
                 <a:spcPts val="0"/>
               </a:spcAft>
-              <a:defRPr sz="1500" b="1">
+              <a:defRPr sz="1800" b="1">
+                <a:solidFill>
+                  <a:srgbClr val="2A8B5A"/>
+                </a:solidFill>
+                <a:latin typeface="Noto Sans CJK KR"/>
+              </a:defRPr>
+            </a:pPr>
+            <a:r>
+              <a:t>확인 기준</a:t>
+            </a:r>
+          </a:p>
+        </p:txBody>
+      </p:sp>
+      <p:sp>
+        <p:nvSpPr>
+          <p:cNvPr id="9" name="TextBox 8"/>
+          <p:cNvSpPr txBox="1"/>
+          <p:nvPr/>
+        </p:nvSpPr>
+        <p:spPr>
+          <a:xfrm>
+            <a:off x="786384" y="5532120"/>
+            <a:ext cx="10469880" cy="420624"/>
+          </a:xfrm>
+          <a:prstGeom prst="rect">
+            <a:avLst/>
+          </a:prstGeom>
+          <a:noFill/>
+        </p:spPr>
+        <p:txBody>
+          <a:bodyPr wrap="square" lIns="73152" rIns="73152" tIns="36576" bIns="36576">
+            <a:spAutoFit/>
+          </a:bodyPr>
+          <a:lstStyle/>
+          <a:p>
+            <a:pPr algn="l">
+              <a:spcAft>
+                <a:spcPts val="0"/>
+              </a:spcAft>
+              <a:defRPr sz="1800" b="0">
                 <a:solidFill>
                   <a:srgbClr val="122C4E"/>
                 </a:solidFill>
@@ -6774,7 +7335,7 @@
               </a:defRPr>
             </a:pPr>
             <a:r>
-              <a:t>완료 조건: RobotModel과 TF에서 base, 두 wheel, camera, lidar, imu 연결을 확인한다.</a:t>
+              <a:t>RobotModel과 TF에서 base, 두 wheel, camera, lidar, imu 연결을 확인한다.</a:t>
             </a:r>
           </a:p>
         </p:txBody>
@@ -6831,7 +7392,7 @@
               </a:defRPr>
             </a:pPr>
             <a:r>
-              <a:t>막히면: 증상 → 우선 확인 → 재검증</a:t>
+              <a:t>정상 결과: 실제 환경에서 확인한 출력</a:t>
             </a:r>
           </a:p>
         </p:txBody>
@@ -6870,7 +7431,7 @@
               </a:defRPr>
             </a:pPr>
             <a:r>
-              <a:t>오류 메시지를 숨기지 않고 같은 순서로 점검합니다.</a:t>
+              <a:t>실제 ROS 2 환경의 파일·패키지·구성 검증 로그</a:t>
             </a:r>
           </a:p>
         </p:txBody>
@@ -6953,119 +7514,40 @@
           </a:p>
         </p:txBody>
       </p:sp>
-      <p:sp>
-        <p:nvSpPr>
-          <p:cNvPr id="6" name="Rectangle 5"/>
-          <p:cNvSpPr/>
-          <p:nvPr/>
-        </p:nvSpPr>
-        <p:spPr>
-          <a:xfrm>
-            <a:off x="566928" y="1188720"/>
-            <a:ext cx="11064240" cy="347472"/>
-          </a:xfrm>
-          <a:prstGeom prst="rect">
-            <a:avLst/>
-          </a:prstGeom>
-          <a:solidFill>
-            <a:srgbClr val="F4F7FB"/>
-          </a:solidFill>
-          <a:ln>
-            <a:solidFill>
-              <a:srgbClr val="F4F7FB"/>
-            </a:solidFill>
-          </a:ln>
-        </p:spPr>
-        <p:style>
-          <a:lnRef idx="1">
-            <a:schemeClr val="accent1"/>
-          </a:lnRef>
-          <a:fillRef idx="3">
-            <a:schemeClr val="accent1"/>
-          </a:fillRef>
-          <a:effectRef idx="2">
-            <a:schemeClr val="accent1"/>
-          </a:effectRef>
-          <a:fontRef idx="minor">
-            <a:schemeClr val="lt1"/>
-          </a:fontRef>
-        </p:style>
-        <p:txBody>
-          <a:bodyPr rtlCol="0" anchor="ctr" wrap="square" lIns="73152" rIns="73152" tIns="36576" bIns="36576"/>
-          <a:lstStyle/>
-          <a:p>
-            <a:pPr algn="l">
-              <a:spcAft>
-                <a:spcPts val="0"/>
-              </a:spcAft>
-              <a:defRPr sz="1300" b="1">
-                <a:solidFill>
-                  <a:srgbClr val="122C4E"/>
-                </a:solidFill>
-                <a:latin typeface="Noto Sans CJK KR"/>
-              </a:defRPr>
-            </a:pPr>
-            <a:r>
-              <a:t>현재 단계 오류 대응    |    현재 폴더 ~/ros2_curri/agv_ws    |    현재 터미널</a:t>
-            </a:r>
-          </a:p>
-        </p:txBody>
-      </p:sp>
-      <p:sp>
-        <p:nvSpPr>
-          <p:cNvPr id="7" name="Rounded Rectangle 6"/>
-          <p:cNvSpPr/>
-          <p:nvPr/>
-        </p:nvSpPr>
-        <p:spPr>
-          <a:xfrm>
-            <a:off x="694944" y="1755648"/>
-            <a:ext cx="10972800" cy="1115568"/>
-          </a:xfrm>
-          <a:prstGeom prst="roundRect">
-            <a:avLst/>
-          </a:prstGeom>
-          <a:solidFill>
-            <a:srgbClr val="FFF7F4"/>
-          </a:solidFill>
-          <a:ln>
-            <a:solidFill>
-              <a:srgbClr val="EDBEB4"/>
-            </a:solidFill>
-          </a:ln>
-        </p:spPr>
-        <p:style>
-          <a:lnRef idx="1">
-            <a:schemeClr val="accent1"/>
-          </a:lnRef>
-          <a:fillRef idx="3">
-            <a:schemeClr val="accent1"/>
-          </a:fillRef>
-          <a:effectRef idx="2">
-            <a:schemeClr val="accent1"/>
-          </a:effectRef>
-          <a:fontRef idx="minor">
-            <a:schemeClr val="lt1"/>
-          </a:fontRef>
-        </p:style>
-        <p:txBody>
-          <a:bodyPr rtlCol="0" anchor="ctr"/>
-          <a:lstStyle/>
-          <a:p>
-            <a:pPr algn="ctr"/>
-          </a:p>
-        </p:txBody>
-      </p:sp>
-      <p:sp>
-        <p:nvSpPr>
-          <p:cNvPr id="8" name="TextBox 7"/>
+      <p:pic>
+        <p:nvPicPr>
+          <p:cNvPr id="6" name="Picture 5" descr="validation_terminal.png"/>
+          <p:cNvPicPr>
+            <a:picLocks noChangeAspect="1"/>
+          </p:cNvPicPr>
+          <p:nvPr/>
+        </p:nvPicPr>
+        <p:blipFill>
+          <a:blip r:embed="rId2"/>
+          <a:stretch>
+            <a:fillRect/>
+          </a:stretch>
+        </p:blipFill>
+        <p:spPr>
+          <a:xfrm>
+            <a:off x="790956" y="1884338"/>
+            <a:ext cx="10607040" cy="3738546"/>
+          </a:xfrm>
+          <a:prstGeom prst="rect">
+            <a:avLst/>
+          </a:prstGeom>
+        </p:spPr>
+      </p:pic>
+      <p:sp>
+        <p:nvSpPr>
+          <p:cNvPr id="7" name="TextBox 6"/>
           <p:cNvSpPr txBox="1"/>
           <p:nvPr/>
         </p:nvSpPr>
         <p:spPr>
           <a:xfrm>
-            <a:off x="896112" y="1901952"/>
-            <a:ext cx="2926080" cy="274320"/>
+            <a:off x="777240" y="6144768"/>
+            <a:ext cx="10607040" cy="310896"/>
           </a:xfrm>
           <a:prstGeom prst="rect">
             <a:avLst/>
@@ -7078,228 +7560,19 @@
           </a:bodyPr>
           <a:lstStyle/>
           <a:p>
-            <a:pPr algn="l">
-              <a:spcAft>
-                <a:spcPts val="0"/>
-              </a:spcAft>
-              <a:defRPr sz="1800" b="1">
-                <a:solidFill>
-                  <a:srgbClr val="BE3B3B"/>
-                </a:solidFill>
-                <a:latin typeface="Noto Sans CJK KR"/>
-              </a:defRPr>
-            </a:pPr>
-            <a:r>
-              <a:t>증상 1: XML parsing error</a:t>
-            </a:r>
-          </a:p>
-        </p:txBody>
-      </p:sp>
-      <p:sp>
-        <p:nvSpPr>
-          <p:cNvPr id="9" name="TextBox 8"/>
-          <p:cNvSpPr txBox="1"/>
-          <p:nvPr/>
-        </p:nvSpPr>
-        <p:spPr>
-          <a:xfrm>
-            <a:off x="3794760" y="1883664"/>
-            <a:ext cx="7543800" cy="621792"/>
-          </a:xfrm>
-          <a:prstGeom prst="rect">
-            <a:avLst/>
-          </a:prstGeom>
-          <a:noFill/>
-        </p:spPr>
-        <p:txBody>
-          <a:bodyPr wrap="square" lIns="73152" rIns="73152" tIns="36576" bIns="36576">
-            <a:spAutoFit/>
-          </a:bodyPr>
-          <a:lstStyle/>
-          <a:p>
-            <a:pPr algn="l">
-              <a:spcAft>
-                <a:spcPts val="0"/>
-              </a:spcAft>
-              <a:defRPr sz="1600" b="0">
-                <a:solidFill>
-                  <a:srgbClr val="122C4E"/>
-                </a:solidFill>
-                <a:latin typeface="Noto Sans CJK KR"/>
-              </a:defRPr>
-            </a:pPr>
-            <a:r>
-              <a:t>우선 확인: 닫는 태그·따옴표·중첩 구조를 확인한다.</a:t>
-            </a:r>
-            <a:br/>
-            <a:r>
-              <a:t>수정 후: check_urdf ~/ros2_curri/agv_ws/src/agv_description/curriculum_stages/M05/agv.urdf</a:t>
-            </a:r>
-          </a:p>
-        </p:txBody>
-      </p:sp>
-      <p:sp>
-        <p:nvSpPr>
-          <p:cNvPr id="10" name="Rounded Rectangle 9"/>
-          <p:cNvSpPr/>
-          <p:nvPr/>
-        </p:nvSpPr>
-        <p:spPr>
-          <a:xfrm>
-            <a:off x="694944" y="3172968"/>
-            <a:ext cx="10972800" cy="1115568"/>
-          </a:xfrm>
-          <a:prstGeom prst="roundRect">
-            <a:avLst/>
-          </a:prstGeom>
-          <a:solidFill>
-            <a:srgbClr val="FFF7F4"/>
-          </a:solidFill>
-          <a:ln>
-            <a:solidFill>
-              <a:srgbClr val="EDBEB4"/>
-            </a:solidFill>
-          </a:ln>
-        </p:spPr>
-        <p:style>
-          <a:lnRef idx="1">
-            <a:schemeClr val="accent1"/>
-          </a:lnRef>
-          <a:fillRef idx="3">
-            <a:schemeClr val="accent1"/>
-          </a:fillRef>
-          <a:effectRef idx="2">
-            <a:schemeClr val="accent1"/>
-          </a:effectRef>
-          <a:fontRef idx="minor">
-            <a:schemeClr val="lt1"/>
-          </a:fontRef>
-        </p:style>
-        <p:txBody>
-          <a:bodyPr rtlCol="0" anchor="ctr"/>
-          <a:lstStyle/>
-          <a:p>
-            <a:pPr algn="ctr"/>
-          </a:p>
-        </p:txBody>
-      </p:sp>
-      <p:sp>
-        <p:nvSpPr>
-          <p:cNvPr id="11" name="TextBox 10"/>
-          <p:cNvSpPr txBox="1"/>
-          <p:nvPr/>
-        </p:nvSpPr>
-        <p:spPr>
-          <a:xfrm>
-            <a:off x="896112" y="3319272"/>
-            <a:ext cx="2926080" cy="274320"/>
-          </a:xfrm>
-          <a:prstGeom prst="rect">
-            <a:avLst/>
-          </a:prstGeom>
-          <a:noFill/>
-        </p:spPr>
-        <p:txBody>
-          <a:bodyPr wrap="square" lIns="73152" rIns="73152" tIns="36576" bIns="36576">
-            <a:spAutoFit/>
-          </a:bodyPr>
-          <a:lstStyle/>
-          <a:p>
-            <a:pPr algn="l">
-              <a:spcAft>
-                <a:spcPts val="0"/>
-              </a:spcAft>
-              <a:defRPr sz="1800" b="1">
-                <a:solidFill>
-                  <a:srgbClr val="BE3B3B"/>
-                </a:solidFill>
-                <a:latin typeface="Noto Sans CJK KR"/>
-              </a:defRPr>
-            </a:pPr>
-            <a:r>
-              <a:t>증상 2: 바퀴가 눕거나 TF가 없음</a:t>
-            </a:r>
-          </a:p>
-        </p:txBody>
-      </p:sp>
-      <p:sp>
-        <p:nvSpPr>
-          <p:cNvPr id="12" name="TextBox 11"/>
-          <p:cNvSpPr txBox="1"/>
-          <p:nvPr/>
-        </p:nvSpPr>
-        <p:spPr>
-          <a:xfrm>
-            <a:off x="3794760" y="3300984"/>
-            <a:ext cx="7543800" cy="621792"/>
-          </a:xfrm>
-          <a:prstGeom prst="rect">
-            <a:avLst/>
-          </a:prstGeom>
-          <a:noFill/>
-        </p:spPr>
-        <p:txBody>
-          <a:bodyPr wrap="square" lIns="73152" rIns="73152" tIns="36576" bIns="36576">
-            <a:spAutoFit/>
-          </a:bodyPr>
-          <a:lstStyle/>
-          <a:p>
-            <a:pPr algn="l">
-              <a:spcAft>
-                <a:spcPts val="0"/>
-              </a:spcAft>
-              <a:defRPr sz="1600" b="0">
-                <a:solidFill>
-                  <a:srgbClr val="122C4E"/>
-                </a:solidFill>
-                <a:latin typeface="Noto Sans CJK KR"/>
-              </a:defRPr>
-            </a:pPr>
-            <a:r>
-              <a:t>우선 확인: cylinder rpy·joint axis·parent/child link 이름을 확인한다.</a:t>
-            </a:r>
-            <a:br/>
-            <a:r>
-              <a:t>수정 후: check_urdf ~/ros2_curri/agv_ws/src/agv_description/curriculum_stages/M05/agv.urdf</a:t>
-            </a:r>
-          </a:p>
-        </p:txBody>
-      </p:sp>
-      <p:sp>
-        <p:nvSpPr>
-          <p:cNvPr id="13" name="TextBox 12"/>
-          <p:cNvSpPr txBox="1"/>
-          <p:nvPr/>
-        </p:nvSpPr>
-        <p:spPr>
-          <a:xfrm>
-            <a:off x="822960" y="5102352"/>
-            <a:ext cx="10607040" cy="402336"/>
-          </a:xfrm>
-          <a:prstGeom prst="rect">
-            <a:avLst/>
-          </a:prstGeom>
-          <a:noFill/>
-        </p:spPr>
-        <p:txBody>
-          <a:bodyPr wrap="square" lIns="73152" rIns="73152" tIns="36576" bIns="36576">
-            <a:spAutoFit/>
-          </a:bodyPr>
-          <a:lstStyle/>
-          <a:p>
             <a:pPr algn="ctr">
               <a:spcAft>
                 <a:spcPts val="0"/>
               </a:spcAft>
-              <a:defRPr sz="1800" b="1">
-                <a:solidFill>
-                  <a:srgbClr val="DB7E22"/>
-                </a:solidFill>
-                <a:latin typeface="Noto Sans CJK KR"/>
-              </a:defRPr>
-            </a:pPr>
-            <a:r>
-              <a:t>공통 순서: ① 현재 폴더 ② source ③ 파일 경로 ④ 이름/타입/단위 ⑤ build·source 후 재실행</a:t>
+              <a:defRPr sz="1100" b="1">
+                <a:solidFill>
+                  <a:srgbClr val="2A8B5A"/>
+                </a:solidFill>
+                <a:latin typeface="Noto Sans CJK KR"/>
+              </a:defRPr>
+            </a:pPr>
+            <a:r>
+              <a:t>화면에서 확인: ① 명령/설정  ② 정상 출력 또는 화면  ③ 다음 검증 명령으로 재확인</a:t>
             </a:r>
           </a:p>
         </p:txBody>
@@ -7356,7 +7629,7 @@
               </a:defRPr>
             </a:pPr>
             <a:r>
-              <a:t>미니 실습: 값 하나를 바꾸고 결과를 비교한다</a:t>
+              <a:t>정상 결과: 실제 환경에서 확인한 출력</a:t>
             </a:r>
           </a:p>
         </p:txBody>
@@ -7395,7 +7668,7 @@
               </a:defRPr>
             </a:pPr>
             <a:r>
-              <a:t>정상 결과를 만든 뒤에는 한 번에 하나의 값만 바꿉니다.</a:t>
+              <a:t>실제 terminal: check_urdf가 base_link와 6개 자식 link를 확인한 결과</a:t>
             </a:r>
           </a:p>
         </p:txBody>
@@ -7478,132 +7751,40 @@
           </a:p>
         </p:txBody>
       </p:sp>
-      <p:sp>
-        <p:nvSpPr>
-          <p:cNvPr id="6" name="Rectangle 5"/>
-          <p:cNvSpPr/>
-          <p:nvPr/>
-        </p:nvSpPr>
-        <p:spPr>
-          <a:xfrm>
-            <a:off x="566928" y="1188720"/>
-            <a:ext cx="11064240" cy="347472"/>
-          </a:xfrm>
-          <a:prstGeom prst="rect">
-            <a:avLst/>
-          </a:prstGeom>
-          <a:solidFill>
-            <a:srgbClr val="F4F7FB"/>
-          </a:solidFill>
-          <a:ln>
-            <a:solidFill>
-              <a:srgbClr val="F4F7FB"/>
-            </a:solidFill>
-          </a:ln>
-        </p:spPr>
-        <p:style>
-          <a:lnRef idx="1">
-            <a:schemeClr val="accent1"/>
-          </a:lnRef>
-          <a:fillRef idx="3">
-            <a:schemeClr val="accent1"/>
-          </a:fillRef>
-          <a:effectRef idx="2">
-            <a:schemeClr val="accent1"/>
-          </a:effectRef>
-          <a:fontRef idx="minor">
-            <a:schemeClr val="lt1"/>
-          </a:fontRef>
-        </p:style>
-        <p:txBody>
-          <a:bodyPr rtlCol="0" anchor="ctr" wrap="square" lIns="73152" rIns="73152" tIns="36576" bIns="36576"/>
-          <a:lstStyle/>
-          <a:p>
-            <a:pPr algn="l">
-              <a:spcAft>
-                <a:spcPts val="0"/>
-              </a:spcAft>
-              <a:defRPr sz="1300" b="1">
-                <a:solidFill>
-                  <a:srgbClr val="122C4E"/>
-                </a:solidFill>
-                <a:latin typeface="Noto Sans CJK KR"/>
-              </a:defRPr>
-            </a:pPr>
-            <a:r>
-              <a:t>현재 단계 미니 실습    |    현재 폴더 ~/ros2_curri/agv_ws    |    현재 터미널</a:t>
-            </a:r>
-          </a:p>
-        </p:txBody>
-      </p:sp>
-      <p:sp>
-        <p:nvSpPr>
-          <p:cNvPr id="7" name="Rounded Rectangle 6"/>
-          <p:cNvSpPr/>
-          <p:nvPr/>
-        </p:nvSpPr>
-        <p:spPr>
-          <a:xfrm>
-            <a:off x="749808" y="1874519"/>
-            <a:ext cx="10652760" cy="1993392"/>
-          </a:xfrm>
-          <a:prstGeom prst="roundRect">
-            <a:avLst/>
-          </a:prstGeom>
-          <a:solidFill>
-            <a:srgbClr val="FFF8EB"/>
-          </a:solidFill>
-          <a:ln>
-            <a:solidFill>
-              <a:srgbClr val="ECC680"/>
-            </a:solidFill>
-          </a:ln>
-        </p:spPr>
-        <p:style>
-          <a:lnRef idx="1">
-            <a:schemeClr val="accent1"/>
-          </a:lnRef>
-          <a:fillRef idx="3">
-            <a:schemeClr val="accent1"/>
-          </a:fillRef>
-          <a:effectRef idx="2">
-            <a:schemeClr val="accent1"/>
-          </a:effectRef>
-          <a:fontRef idx="minor">
-            <a:schemeClr val="lt1"/>
-          </a:fontRef>
-        </p:style>
-        <p:txBody>
-          <a:bodyPr rtlCol="0" anchor="ctr" wrap="square" lIns="73152" rIns="73152" tIns="36576" bIns="36576"/>
-          <a:lstStyle/>
-          <a:p>
-            <a:pPr algn="ctr">
-              <a:spcAft>
-                <a:spcPts val="0"/>
-              </a:spcAft>
-              <a:defRPr sz="2300" b="1">
-                <a:solidFill>
-                  <a:srgbClr val="122C4E"/>
-                </a:solidFill>
-                <a:latin typeface="Noto Sans CJK KR"/>
-              </a:defRPr>
-            </a:pPr>
-            <a:r>
-              <a:t>wheel_radius를 0.08 m에서 0.10 m로 바꾸고 RobotModel에서 바퀴 크기 변화를 확인한다.</a:t>
-            </a:r>
-          </a:p>
-        </p:txBody>
-      </p:sp>
-      <p:sp>
-        <p:nvSpPr>
-          <p:cNvPr id="8" name="TextBox 7"/>
+      <p:pic>
+        <p:nvPicPr>
+          <p:cNvPr id="6" name="Picture 5" descr="02_m05_urdf_terminal_actual.png"/>
+          <p:cNvPicPr>
+            <a:picLocks noChangeAspect="1"/>
+          </p:cNvPicPr>
+          <p:nvPr/>
+        </p:nvPicPr>
+        <p:blipFill>
+          <a:blip r:embed="rId2"/>
+          <a:stretch>
+            <a:fillRect/>
+          </a:stretch>
+        </p:blipFill>
+        <p:spPr>
+          <a:xfrm>
+            <a:off x="2789770" y="1353312"/>
+            <a:ext cx="6609411" cy="4800600"/>
+          </a:xfrm>
+          <a:prstGeom prst="rect">
+            <a:avLst/>
+          </a:prstGeom>
+        </p:spPr>
+      </p:pic>
+      <p:sp>
+        <p:nvSpPr>
+          <p:cNvPr id="7" name="TextBox 6"/>
           <p:cNvSpPr txBox="1"/>
           <p:nvPr/>
         </p:nvSpPr>
         <p:spPr>
           <a:xfrm>
-            <a:off x="877824" y="4590288"/>
-            <a:ext cx="10241280" cy="594360"/>
+            <a:off x="777240" y="6144768"/>
+            <a:ext cx="10607040" cy="310896"/>
           </a:xfrm>
           <a:prstGeom prst="rect">
             <a:avLst/>
@@ -7620,15 +7801,15 @@
               <a:spcAft>
                 <a:spcPts val="0"/>
               </a:spcAft>
-              <a:defRPr sz="1900" b="1">
-                <a:solidFill>
-                  <a:srgbClr val="DB7E22"/>
-                </a:solidFill>
-                <a:latin typeface="Noto Sans CJK KR"/>
-              </a:defRPr>
-            </a:pPr>
-            <a:r>
-              <a:t>기록할 것: 바꾼 값(단위) · 기대한 변화 · 실제 출력/화면 · 원래 값으로 되돌린 결과</a:t>
+              <a:defRPr sz="1100" b="1">
+                <a:solidFill>
+                  <a:srgbClr val="2A8B5A"/>
+                </a:solidFill>
+                <a:latin typeface="Noto Sans CJK KR"/>
+              </a:defRPr>
+            </a:pPr>
+            <a:r>
+              <a:t>화면에서 확인: root Link=base_link와 wheel·camera·lidar·imu child 이름을 찾습니다.</a:t>
             </a:r>
           </a:p>
         </p:txBody>
@@ -7685,7 +7866,7 @@
               </a:defRPr>
             </a:pPr>
             <a:r>
-              <a:t>체크포인트를 저장하고 다음 모듈로 넘긴다</a:t>
+              <a:t>객관적 검증 명령으로 완료를 확인한다</a:t>
             </a:r>
           </a:p>
         </p:txBody>
@@ -7724,7 +7905,7 @@
               </a:defRPr>
             </a:pPr>
             <a:r>
-              <a:t>현재 Complete는 다음 Starter의 기준선입니다.</a:t>
+              <a:t>화면만 보지 말고 topic·frame·파일·parameter를 다시 확인합니다.</a:t>
             </a:r>
           </a:p>
         </p:txBody>
@@ -7860,7 +8041,7 @@
               </a:defRPr>
             </a:pPr>
             <a:r>
-              <a:t>현재 단계 체크포인트    |    현재 폴더 ~/ros2_curri/agv_ws    |    현재 터미널</a:t>
+              <a:t>현재 단계 검증    |    현재 폴더 ~/ros2_curri/agv_ws    |    현재 터미널</a:t>
             </a:r>
           </a:p>
         </p:txBody>
@@ -7873,18 +8054,18 @@
         </p:nvSpPr>
         <p:spPr>
           <a:xfrm>
-            <a:off x="685800" y="1737360"/>
-            <a:ext cx="10972800" cy="3611880"/>
+            <a:off x="658368" y="1755648"/>
+            <a:ext cx="10972800" cy="2148840"/>
           </a:xfrm>
           <a:prstGeom prst="roundRect">
             <a:avLst/>
           </a:prstGeom>
           <a:solidFill>
-            <a:srgbClr val="F4F7FB"/>
+            <a:srgbClr val="1D232D"/>
           </a:solidFill>
           <a:ln>
             <a:solidFill>
-              <a:srgbClr val="D2DCE8"/>
+              <a:srgbClr val="1D232D"/>
             </a:solidFill>
           </a:ln>
         </p:spPr>
@@ -7903,112 +8084,96 @@
           </a:fontRef>
         </p:style>
         <p:txBody>
-          <a:bodyPr rtlCol="0" anchor="ctr"/>
-          <a:lstStyle/>
-          <a:p>
-            <a:pPr algn="ctr"/>
-          </a:p>
-        </p:txBody>
-      </p:sp>
-      <p:sp>
-        <p:nvSpPr>
-          <p:cNvPr id="8" name="TextBox 7"/>
-          <p:cNvSpPr txBox="1"/>
-          <p:nvPr/>
-        </p:nvSpPr>
-        <p:spPr>
-          <a:xfrm>
-            <a:off x="896112" y="1993392"/>
-            <a:ext cx="10332720" cy="2971800"/>
-          </a:xfrm>
-          <a:prstGeom prst="rect">
-            <a:avLst/>
-          </a:prstGeom>
-          <a:noFill/>
-        </p:spPr>
-        <p:txBody>
-          <a:bodyPr wrap="square" lIns="109728" rIns="109728">
-            <a:spAutoFit/>
-          </a:bodyPr>
-          <a:lstStyle/>
-          <a:p>
-            <a:pPr>
-              <a:spcAft>
-                <a:spcPts val="800"/>
-              </a:spcAft>
-              <a:defRPr sz="1800">
-                <a:solidFill>
-                  <a:srgbClr val="122C4E"/>
-                </a:solidFill>
-                <a:latin typeface="Noto Sans CJK KR"/>
-              </a:defRPr>
-            </a:pPr>
-            <a:r>
-              <a:t>• □ 완료 화면: RobotModel과 TF에서 base, 두 wheel, camera, lidar, imu 연결을 확인한다.</a:t>
-            </a:r>
-          </a:p>
-          <a:p>
-            <a:pPr>
-              <a:spcAft>
-                <a:spcPts val="800"/>
-              </a:spcAft>
-              <a:defRPr sz="1800">
-                <a:solidFill>
-                  <a:srgbClr val="122C4E"/>
-                </a:solidFill>
-                <a:latin typeface="Noto Sans CJK KR"/>
-              </a:defRPr>
-            </a:pPr>
-            <a:r>
-              <a:t>• □ Complete 파일: blocks/B_robot_build/M05_urdf_basic_model/complete/</a:t>
-            </a:r>
-          </a:p>
-          <a:p>
-            <a:pPr>
-              <a:spcAft>
-                <a:spcPts val="800"/>
-              </a:spcAft>
-              <a:defRPr sz="1800">
-                <a:solidFill>
-                  <a:srgbClr val="122C4E"/>
-                </a:solidFill>
-                <a:latin typeface="Noto Sans CJK KR"/>
-              </a:defRPr>
-            </a:pPr>
-            <a:r>
-              <a:t>• □ 정상 로그·캡처: logs/validation.log, screenshots/validation_terminal.png</a:t>
-            </a:r>
-          </a:p>
-          <a:p>
-            <a:pPr>
-              <a:spcAft>
-                <a:spcPts val="800"/>
-              </a:spcAft>
-              <a:defRPr sz="1800">
-                <a:solidFill>
-                  <a:srgbClr val="122C4E"/>
-                </a:solidFill>
-                <a:latin typeface="Noto Sans CJK KR"/>
-              </a:defRPr>
-            </a:pPr>
-            <a:r>
-              <a:t>• □ 버전 식별: CHECKSUM_or_TAG.txt의 SHA-256 manifest</a:t>
-            </a:r>
-          </a:p>
-          <a:p>
-            <a:pPr>
-              <a:spcAft>
-                <a:spcPts val="800"/>
-              </a:spcAft>
-              <a:defRPr sz="1800">
-                <a:solidFill>
-                  <a:srgbClr val="122C4E"/>
-                </a:solidFill>
-                <a:latin typeface="Noto Sans CJK KR"/>
-              </a:defRPr>
-            </a:pPr>
-            <a:r>
-              <a:t>• □ 다음 시작 조건: M06 Xacro 모듈화</a:t>
+          <a:bodyPr rtlCol="0" anchor="ctr" wrap="square" lIns="73152" rIns="73152" tIns="36576" bIns="36576"/>
+          <a:lstStyle/>
+          <a:p>
+            <a:pPr algn="l">
+              <a:spcAft>
+                <a:spcPts val="0"/>
+              </a:spcAft>
+              <a:defRPr sz="1600" b="0">
+                <a:solidFill>
+                  <a:srgbClr val="FFFFFF"/>
+                </a:solidFill>
+                <a:latin typeface="DejaVu Sans Mono"/>
+              </a:defRPr>
+            </a:pPr>
+            <a:r>
+              <a:t>check_urdf ~/ros2_curri/agv_ws/src/agv_description/curriculum_stages/M05/agv.urdf</a:t>
+            </a:r>
+            <a:br/>
+            <a:r>
+              <a:t>rg -n '&lt;xacro:|&lt;link |&lt;joint ' ~/ros2_curri/agv_ws/src/agv_description/curriculum_stages/M05/agv.urdf</a:t>
+            </a:r>
+          </a:p>
+        </p:txBody>
+      </p:sp>
+      <p:sp>
+        <p:nvSpPr>
+          <p:cNvPr id="8" name="Rounded Rectangle 7"/>
+          <p:cNvSpPr/>
+          <p:nvPr/>
+        </p:nvSpPr>
+        <p:spPr>
+          <a:xfrm>
+            <a:off x="658368" y="4206240"/>
+            <a:ext cx="10972800" cy="1554480"/>
+          </a:xfrm>
+          <a:prstGeom prst="roundRect">
+            <a:avLst/>
+          </a:prstGeom>
+          <a:solidFill>
+            <a:srgbClr val="F4F7FB"/>
+          </a:solidFill>
+          <a:ln>
+            <a:solidFill>
+              <a:srgbClr val="D1DFD5"/>
+            </a:solidFill>
+          </a:ln>
+        </p:spPr>
+        <p:style>
+          <a:lnRef idx="1">
+            <a:schemeClr val="accent1"/>
+          </a:lnRef>
+          <a:fillRef idx="3">
+            <a:schemeClr val="accent1"/>
+          </a:fillRef>
+          <a:effectRef idx="2">
+            <a:schemeClr val="accent1"/>
+          </a:effectRef>
+          <a:fontRef idx="minor">
+            <a:schemeClr val="lt1"/>
+          </a:fontRef>
+        </p:style>
+        <p:txBody>
+          <a:bodyPr rtlCol="0" anchor="ctr" wrap="square" lIns="73152" rIns="73152" tIns="36576" bIns="36576"/>
+          <a:lstStyle/>
+          <a:p>
+            <a:pPr algn="l">
+              <a:spcAft>
+                <a:spcPts val="0"/>
+              </a:spcAft>
+              <a:defRPr sz="1800" b="1">
+                <a:solidFill>
+                  <a:srgbClr val="2A8B5A"/>
+                </a:solidFill>
+                <a:latin typeface="Noto Sans CJK KR"/>
+              </a:defRPr>
+            </a:pPr>
+            <a:r>
+              <a:t>완료 체크</a:t>
+            </a:r>
+            <a:br/>
+            <a:r>
+              <a:t>□ 명령이 오류 없이 실행된다.</a:t>
+            </a:r>
+            <a:br/>
+            <a:r>
+              <a:t>□ 기대한 파일·topic·frame·parameter 이름이 보인다.</a:t>
+            </a:r>
+            <a:br/>
+            <a:r>
+              <a:t>□ 값의 단위와 방향을 한 문장으로 설명할 수 있다.</a:t>
             </a:r>
           </a:p>
         </p:txBody>
@@ -8021,8 +8186,8 @@
         </p:nvSpPr>
         <p:spPr>
           <a:xfrm>
-            <a:off x="868680" y="5596128"/>
-            <a:ext cx="10515600" cy="338328"/>
+            <a:off x="731520" y="5989320"/>
+            <a:ext cx="10789920" cy="237744"/>
           </a:xfrm>
           <a:prstGeom prst="rect">
             <a:avLst/>
@@ -8035,19 +8200,19 @@
           </a:bodyPr>
           <a:lstStyle/>
           <a:p>
-            <a:pPr algn="ctr">
-              <a:spcAft>
-                <a:spcPts val="0"/>
-              </a:spcAft>
-              <a:defRPr sz="1700" b="1">
-                <a:solidFill>
-                  <a:srgbClr val="2A8B5A"/>
-                </a:solidFill>
-                <a:latin typeface="Noto Sans CJK KR"/>
-              </a:defRPr>
-            </a:pPr>
-            <a:r>
-              <a:t>다음 모듈을 시작하기 전, 이 슬라이드의 Complete와 다음 모듈의 Starter를 비교합니다.</a:t>
+            <a:pPr algn="l">
+              <a:spcAft>
+                <a:spcPts val="0"/>
+              </a:spcAft>
+              <a:defRPr sz="1500" b="1">
+                <a:solidFill>
+                  <a:srgbClr val="122C4E"/>
+                </a:solidFill>
+                <a:latin typeface="Noto Sans CJK KR"/>
+              </a:defRPr>
+            </a:pPr>
+            <a:r>
+              <a:t>완료 조건: RobotModel과 TF에서 base, 두 wheel, camera, lidar, imu 연결을 확인한다.</a:t>
             </a:r>
           </a:p>
         </p:txBody>
@@ -8104,7 +8269,7 @@
               </a:defRPr>
             </a:pPr>
             <a:r>
-              <a:t>공식 참고 자료</a:t>
+              <a:t>막히면: 증상 → 우선 확인 → 재검증</a:t>
             </a:r>
           </a:p>
         </p:txBody>
@@ -8143,7 +8308,7 @@
               </a:defRPr>
             </a:pPr>
             <a:r>
-              <a:t>본문 단계는 링크를 열지 않아도 완료할 수 있으며, 링크는 개념을 더 확인할 때만 사용합니다.</a:t>
+              <a:t>오류 메시지를 숨기지 않고 같은 순서로 점검합니다.</a:t>
             </a:r>
           </a:p>
         </p:txBody>
@@ -8228,16 +8393,16 @@
       </p:sp>
       <p:sp>
         <p:nvSpPr>
-          <p:cNvPr id="6" name="Rounded Rectangle 5"/>
+          <p:cNvPr id="6" name="Rectangle 5"/>
           <p:cNvSpPr/>
           <p:nvPr/>
         </p:nvSpPr>
         <p:spPr>
           <a:xfrm>
-            <a:off x="658368" y="1554480"/>
-            <a:ext cx="10972800" cy="4526280"/>
-          </a:xfrm>
-          <a:prstGeom prst="roundRect">
+            <a:off x="566928" y="1188720"/>
+            <a:ext cx="11064240" cy="347472"/>
+          </a:xfrm>
+          <a:prstGeom prst="rect">
             <a:avLst/>
           </a:prstGeom>
           <a:solidFill>
@@ -8245,7 +8410,7 @@
           </a:solidFill>
           <a:ln>
             <a:solidFill>
-              <a:srgbClr val="D7DFE9"/>
+              <a:srgbClr val="F4F7FB"/>
             </a:solidFill>
           </a:ln>
         </p:spPr>
@@ -8264,6 +8429,64 @@
           </a:fontRef>
         </p:style>
         <p:txBody>
+          <a:bodyPr rtlCol="0" anchor="ctr" wrap="square" lIns="73152" rIns="73152" tIns="36576" bIns="36576"/>
+          <a:lstStyle/>
+          <a:p>
+            <a:pPr algn="l">
+              <a:spcAft>
+                <a:spcPts val="0"/>
+              </a:spcAft>
+              <a:defRPr sz="1300" b="1">
+                <a:solidFill>
+                  <a:srgbClr val="122C4E"/>
+                </a:solidFill>
+                <a:latin typeface="Noto Sans CJK KR"/>
+              </a:defRPr>
+            </a:pPr>
+            <a:r>
+              <a:t>현재 단계 오류 대응    |    현재 폴더 ~/ros2_curri/agv_ws    |    현재 터미널</a:t>
+            </a:r>
+          </a:p>
+        </p:txBody>
+      </p:sp>
+      <p:sp>
+        <p:nvSpPr>
+          <p:cNvPr id="7" name="Rounded Rectangle 6"/>
+          <p:cNvSpPr/>
+          <p:nvPr/>
+        </p:nvSpPr>
+        <p:spPr>
+          <a:xfrm>
+            <a:off x="694944" y="1755648"/>
+            <a:ext cx="10972800" cy="1115568"/>
+          </a:xfrm>
+          <a:prstGeom prst="roundRect">
+            <a:avLst/>
+          </a:prstGeom>
+          <a:solidFill>
+            <a:srgbClr val="FFF7F4"/>
+          </a:solidFill>
+          <a:ln>
+            <a:solidFill>
+              <a:srgbClr val="EDBEB4"/>
+            </a:solidFill>
+          </a:ln>
+        </p:spPr>
+        <p:style>
+          <a:lnRef idx="1">
+            <a:schemeClr val="accent1"/>
+          </a:lnRef>
+          <a:fillRef idx="3">
+            <a:schemeClr val="accent1"/>
+          </a:fillRef>
+          <a:effectRef idx="2">
+            <a:schemeClr val="accent1"/>
+          </a:effectRef>
+          <a:fontRef idx="minor">
+            <a:schemeClr val="lt1"/>
+          </a:fontRef>
+        </p:style>
+        <p:txBody>
           <a:bodyPr rtlCol="0" anchor="ctr"/>
           <a:lstStyle/>
           <a:p>
@@ -8273,14 +8496,14 @@
       </p:sp>
       <p:sp>
         <p:nvSpPr>
-          <p:cNvPr id="7" name="TextBox 6"/>
+          <p:cNvPr id="8" name="TextBox 7"/>
           <p:cNvSpPr txBox="1"/>
           <p:nvPr/>
         </p:nvSpPr>
         <p:spPr>
           <a:xfrm>
-            <a:off x="914400" y="1773936"/>
-            <a:ext cx="3840480" cy="256032"/>
+            <a:off x="896112" y="1901952"/>
+            <a:ext cx="2926080" cy="274320"/>
           </a:xfrm>
           <a:prstGeom prst="rect">
             <a:avLst/>
@@ -8297,29 +8520,29 @@
               <a:spcAft>
                 <a:spcPts val="0"/>
               </a:spcAft>
-              <a:defRPr sz="1700" b="1">
-                <a:solidFill>
-                  <a:srgbClr val="122C4E"/>
-                </a:solidFill>
-                <a:latin typeface="Noto Sans CJK KR"/>
-              </a:defRPr>
-            </a:pPr>
-            <a:r>
-              <a:t>ROS 2 Jazzy — Gazebo Simulation</a:t>
-            </a:r>
-          </a:p>
-        </p:txBody>
-      </p:sp>
-      <p:sp>
-        <p:nvSpPr>
-          <p:cNvPr id="8" name="TextBox 7"/>
+              <a:defRPr sz="1800" b="1">
+                <a:solidFill>
+                  <a:srgbClr val="BE3B3B"/>
+                </a:solidFill>
+                <a:latin typeface="Noto Sans CJK KR"/>
+              </a:defRPr>
+            </a:pPr>
+            <a:r>
+              <a:t>증상 1: XML parsing error</a:t>
+            </a:r>
+          </a:p>
+        </p:txBody>
+      </p:sp>
+      <p:sp>
+        <p:nvSpPr>
+          <p:cNvPr id="9" name="TextBox 8"/>
           <p:cNvSpPr txBox="1"/>
           <p:nvPr/>
         </p:nvSpPr>
         <p:spPr>
           <a:xfrm>
-            <a:off x="914400" y="2048255"/>
-            <a:ext cx="9966960" cy="475488"/>
+            <a:off x="3794760" y="1883664"/>
+            <a:ext cx="7543800" cy="621792"/>
           </a:xfrm>
           <a:prstGeom prst="rect">
             <a:avLst/>
@@ -8336,29 +8559,78 @@
               <a:spcAft>
                 <a:spcPts val="0"/>
               </a:spcAft>
-              <a:defRPr sz="1000" b="0">
-                <a:solidFill>
-                  <a:srgbClr val="225B9B"/>
-                </a:solidFill>
-                <a:latin typeface="DejaVu Sans Mono"/>
-              </a:defRPr>
-            </a:pPr>
-            <a:r>
-              <a:t>https://docs.ros.org/en/jazzy/Tutorials/Advanced/Simulators/Gazebo/Simulation-Gazebo.html</a:t>
-            </a:r>
-          </a:p>
-        </p:txBody>
-      </p:sp>
-      <p:sp>
-        <p:nvSpPr>
-          <p:cNvPr id="9" name="TextBox 8"/>
+              <a:defRPr sz="1600" b="0">
+                <a:solidFill>
+                  <a:srgbClr val="122C4E"/>
+                </a:solidFill>
+                <a:latin typeface="Noto Sans CJK KR"/>
+              </a:defRPr>
+            </a:pPr>
+            <a:r>
+              <a:t>우선 확인: 닫는 태그·따옴표·중첩 구조를 확인한다.</a:t>
+            </a:r>
+            <a:br/>
+            <a:r>
+              <a:t>수정 후: check_urdf ~/ros2_curri/agv_ws/src/agv_description/curriculum_stages/M05/agv.urdf</a:t>
+            </a:r>
+          </a:p>
+        </p:txBody>
+      </p:sp>
+      <p:sp>
+        <p:nvSpPr>
+          <p:cNvPr id="10" name="Rounded Rectangle 9"/>
+          <p:cNvSpPr/>
+          <p:nvPr/>
+        </p:nvSpPr>
+        <p:spPr>
+          <a:xfrm>
+            <a:off x="694944" y="3172968"/>
+            <a:ext cx="10972800" cy="1115568"/>
+          </a:xfrm>
+          <a:prstGeom prst="roundRect">
+            <a:avLst/>
+          </a:prstGeom>
+          <a:solidFill>
+            <a:srgbClr val="FFF7F4"/>
+          </a:solidFill>
+          <a:ln>
+            <a:solidFill>
+              <a:srgbClr val="EDBEB4"/>
+            </a:solidFill>
+          </a:ln>
+        </p:spPr>
+        <p:style>
+          <a:lnRef idx="1">
+            <a:schemeClr val="accent1"/>
+          </a:lnRef>
+          <a:fillRef idx="3">
+            <a:schemeClr val="accent1"/>
+          </a:fillRef>
+          <a:effectRef idx="2">
+            <a:schemeClr val="accent1"/>
+          </a:effectRef>
+          <a:fontRef idx="minor">
+            <a:schemeClr val="lt1"/>
+          </a:fontRef>
+        </p:style>
+        <p:txBody>
+          <a:bodyPr rtlCol="0" anchor="ctr"/>
+          <a:lstStyle/>
+          <a:p>
+            <a:pPr algn="ctr"/>
+          </a:p>
+        </p:txBody>
+      </p:sp>
+      <p:sp>
+        <p:nvSpPr>
+          <p:cNvPr id="11" name="TextBox 10"/>
           <p:cNvSpPr txBox="1"/>
           <p:nvPr/>
         </p:nvSpPr>
         <p:spPr>
           <a:xfrm>
-            <a:off x="914400" y="2852928"/>
-            <a:ext cx="3840480" cy="256032"/>
+            <a:off x="896112" y="3319272"/>
+            <a:ext cx="2926080" cy="274320"/>
           </a:xfrm>
           <a:prstGeom prst="rect">
             <a:avLst/>
@@ -8375,29 +8647,29 @@
               <a:spcAft>
                 <a:spcPts val="0"/>
               </a:spcAft>
-              <a:defRPr sz="1700" b="1">
-                <a:solidFill>
-                  <a:srgbClr val="122C4E"/>
-                </a:solidFill>
-                <a:latin typeface="Noto Sans CJK KR"/>
-              </a:defRPr>
-            </a:pPr>
-            <a:r>
-              <a:t>ROS 2 Jazzy — URDF / robot_state_publisher</a:t>
-            </a:r>
-          </a:p>
-        </p:txBody>
-      </p:sp>
-      <p:sp>
-        <p:nvSpPr>
-          <p:cNvPr id="10" name="TextBox 9"/>
+              <a:defRPr sz="1800" b="1">
+                <a:solidFill>
+                  <a:srgbClr val="BE3B3B"/>
+                </a:solidFill>
+                <a:latin typeface="Noto Sans CJK KR"/>
+              </a:defRPr>
+            </a:pPr>
+            <a:r>
+              <a:t>증상 2: 바퀴가 눕거나 TF가 없음</a:t>
+            </a:r>
+          </a:p>
+        </p:txBody>
+      </p:sp>
+      <p:sp>
+        <p:nvSpPr>
+          <p:cNvPr id="12" name="TextBox 11"/>
           <p:cNvSpPr txBox="1"/>
           <p:nvPr/>
         </p:nvSpPr>
         <p:spPr>
           <a:xfrm>
-            <a:off x="914400" y="3127248"/>
-            <a:ext cx="9966960" cy="475488"/>
+            <a:off x="3794760" y="3300984"/>
+            <a:ext cx="7543800" cy="621792"/>
           </a:xfrm>
           <a:prstGeom prst="rect">
             <a:avLst/>
@@ -8414,29 +8686,33 @@
               <a:spcAft>
                 <a:spcPts val="0"/>
               </a:spcAft>
-              <a:defRPr sz="1000" b="0">
-                <a:solidFill>
-                  <a:srgbClr val="225B9B"/>
-                </a:solidFill>
-                <a:latin typeface="DejaVu Sans Mono"/>
-              </a:defRPr>
-            </a:pPr>
-            <a:r>
-              <a:t>https://docs.ros.org/en/jazzy/Tutorials/Intermediate/URDF/Using-URDF-with-Robot-State-Publisher-py.html</a:t>
-            </a:r>
-          </a:p>
-        </p:txBody>
-      </p:sp>
-      <p:sp>
-        <p:nvSpPr>
-          <p:cNvPr id="11" name="TextBox 10"/>
+              <a:defRPr sz="1600" b="0">
+                <a:solidFill>
+                  <a:srgbClr val="122C4E"/>
+                </a:solidFill>
+                <a:latin typeface="Noto Sans CJK KR"/>
+              </a:defRPr>
+            </a:pPr>
+            <a:r>
+              <a:t>우선 확인: cylinder rpy·joint axis·parent/child link 이름을 확인한다.</a:t>
+            </a:r>
+            <a:br/>
+            <a:r>
+              <a:t>수정 후: check_urdf ~/ros2_curri/agv_ws/src/agv_description/curriculum_stages/M05/agv.urdf</a:t>
+            </a:r>
+          </a:p>
+        </p:txBody>
+      </p:sp>
+      <p:sp>
+        <p:nvSpPr>
+          <p:cNvPr id="13" name="TextBox 12"/>
           <p:cNvSpPr txBox="1"/>
           <p:nvPr/>
         </p:nvSpPr>
         <p:spPr>
           <a:xfrm>
-            <a:off x="914400" y="3931920"/>
-            <a:ext cx="3840480" cy="256032"/>
+            <a:off x="822960" y="5102352"/>
+            <a:ext cx="10607040" cy="402336"/>
           </a:xfrm>
           <a:prstGeom prst="rect">
             <a:avLst/>
@@ -8449,33 +8725,51 @@
           </a:bodyPr>
           <a:lstStyle/>
           <a:p>
-            <a:pPr algn="l">
-              <a:spcAft>
-                <a:spcPts val="0"/>
-              </a:spcAft>
-              <a:defRPr sz="1700" b="1">
-                <a:solidFill>
-                  <a:srgbClr val="122C4E"/>
-                </a:solidFill>
-                <a:latin typeface="Noto Sans CJK KR"/>
-              </a:defRPr>
-            </a:pPr>
-            <a:r>
-              <a:t>Gazebo — ROS 2 Integration / ros_gz_bridge</a:t>
-            </a:r>
-          </a:p>
-        </p:txBody>
-      </p:sp>
-      <p:sp>
-        <p:nvSpPr>
-          <p:cNvPr id="12" name="TextBox 11"/>
+            <a:pPr algn="ctr">
+              <a:spcAft>
+                <a:spcPts val="0"/>
+              </a:spcAft>
+              <a:defRPr sz="1800" b="1">
+                <a:solidFill>
+                  <a:srgbClr val="DB7E22"/>
+                </a:solidFill>
+                <a:latin typeface="Noto Sans CJK KR"/>
+              </a:defRPr>
+            </a:pPr>
+            <a:r>
+              <a:t>공통 순서: ① 현재 폴더 ② source ③ 파일 경로 ④ 이름/타입/단위 ⑤ build·source 후 재실행</a:t>
+            </a:r>
+          </a:p>
+        </p:txBody>
+      </p:sp>
+    </p:spTree>
+  </p:cSld>
+  <p:clrMapOvr>
+    <a:masterClrMapping/>
+  </p:clrMapOvr>
+</p:sld>
+</file>
+
+<file path=ppt/slides/slide18.xml><?xml version="1.0" encoding="utf-8"?>
+<p:sld xmlns:a="http://schemas.openxmlformats.org/drawingml/2006/main" xmlns:p="http://schemas.openxmlformats.org/presentationml/2006/main" xmlns:r="http://schemas.openxmlformats.org/officeDocument/2006/relationships">
+  <p:cSld>
+    <p:spTree>
+      <p:nvGrpSpPr>
+        <p:cNvPr id="1" name=""/>
+        <p:cNvGrpSpPr/>
+        <p:nvPr/>
+      </p:nvGrpSpPr>
+      <p:grpSpPr/>
+      <p:sp>
+        <p:nvSpPr>
+          <p:cNvPr id="2" name="TextBox 1"/>
           <p:cNvSpPr txBox="1"/>
           <p:nvPr/>
         </p:nvSpPr>
         <p:spPr>
           <a:xfrm>
-            <a:off x="914400" y="4206240"/>
-            <a:ext cx="9966960" cy="475488"/>
+            <a:off x="566928" y="347472"/>
+            <a:ext cx="10881360" cy="438912"/>
           </a:xfrm>
           <a:prstGeom prst="rect">
             <a:avLst/>
@@ -8492,29 +8786,29 @@
               <a:spcAft>
                 <a:spcPts val="0"/>
               </a:spcAft>
-              <a:defRPr sz="1000" b="0">
-                <a:solidFill>
-                  <a:srgbClr val="225B9B"/>
-                </a:solidFill>
-                <a:latin typeface="DejaVu Sans Mono"/>
-              </a:defRPr>
-            </a:pPr>
-            <a:r>
-              <a:t>https://gazebosim.org/docs/latest/ros2_integration/</a:t>
-            </a:r>
-          </a:p>
-        </p:txBody>
-      </p:sp>
-      <p:sp>
-        <p:nvSpPr>
-          <p:cNvPr id="13" name="TextBox 12"/>
+              <a:defRPr sz="3200" b="1">
+                <a:solidFill>
+                  <a:srgbClr val="122C4E"/>
+                </a:solidFill>
+                <a:latin typeface="Noto Sans CJK KR"/>
+              </a:defRPr>
+            </a:pPr>
+            <a:r>
+              <a:t>미니 실습: 값 하나를 바꾸고 결과를 비교한다</a:t>
+            </a:r>
+          </a:p>
+        </p:txBody>
+      </p:sp>
+      <p:sp>
+        <p:nvSpPr>
+          <p:cNvPr id="3" name="TextBox 2"/>
           <p:cNvSpPr txBox="1"/>
           <p:nvPr/>
         </p:nvSpPr>
         <p:spPr>
           <a:xfrm>
-            <a:off x="914400" y="5010912"/>
-            <a:ext cx="3840480" cy="256032"/>
+            <a:off x="603504" y="859536"/>
+            <a:ext cx="10698480" cy="292608"/>
           </a:xfrm>
           <a:prstGeom prst="rect">
             <a:avLst/>
@@ -8531,29 +8825,29 @@
               <a:spcAft>
                 <a:spcPts val="0"/>
               </a:spcAft>
-              <a:defRPr sz="1700" b="1">
-                <a:solidFill>
-                  <a:srgbClr val="122C4E"/>
-                </a:solidFill>
-                <a:latin typeface="Noto Sans CJK KR"/>
-              </a:defRPr>
-            </a:pPr>
-            <a:r>
-              <a:t>ROS 2 Jazzy — rosbag2 Recording and Playback</a:t>
-            </a:r>
-          </a:p>
-        </p:txBody>
-      </p:sp>
-      <p:sp>
-        <p:nvSpPr>
-          <p:cNvPr id="14" name="TextBox 13"/>
+              <a:defRPr sz="1700" b="0">
+                <a:solidFill>
+                  <a:srgbClr val="5C6672"/>
+                </a:solidFill>
+                <a:latin typeface="Noto Sans CJK KR"/>
+              </a:defRPr>
+            </a:pPr>
+            <a:r>
+              <a:t>정상 결과를 만든 뒤에는 한 번에 하나의 값만 바꿉니다.</a:t>
+            </a:r>
+          </a:p>
+        </p:txBody>
+      </p:sp>
+      <p:sp>
+        <p:nvSpPr>
+          <p:cNvPr id="4" name="TextBox 3"/>
           <p:cNvSpPr txBox="1"/>
           <p:nvPr/>
         </p:nvSpPr>
         <p:spPr>
           <a:xfrm>
-            <a:off x="914400" y="5285232"/>
-            <a:ext cx="9966960" cy="475488"/>
+            <a:off x="530352" y="6510528"/>
+            <a:ext cx="7772400" cy="201168"/>
           </a:xfrm>
           <a:prstGeom prst="rect">
             <a:avLst/>
@@ -8572,13 +8866,626 @@
               </a:spcAft>
               <a:defRPr sz="1000" b="0">
                 <a:solidFill>
-                  <a:srgbClr val="225B9B"/>
-                </a:solidFill>
-                <a:latin typeface="DejaVu Sans Mono"/>
-              </a:defRPr>
-            </a:pPr>
-            <a:r>
-              <a:t>https://docs.ros.org/en/jazzy/Tutorials/Beginner-CLI-Tools/Recording-And-Playing-Back-Data/Recording-And-Playing-Back-Data.html</a:t>
+                  <a:srgbClr val="5C6672"/>
+                </a:solidFill>
+                <a:latin typeface="Noto Sans CJK KR"/>
+              </a:defRPr>
+            </a:pPr>
+            <a:r>
+              <a:t>ROS 2 Jazzy · Gazebo Harmonic · M05 · 따라 하기형 AGV 실습</a:t>
+            </a:r>
+          </a:p>
+        </p:txBody>
+      </p:sp>
+      <p:sp>
+        <p:nvSpPr>
+          <p:cNvPr id="5" name="TextBox 4"/>
+          <p:cNvSpPr txBox="1"/>
+          <p:nvPr/>
+        </p:nvSpPr>
+        <p:spPr>
+          <a:xfrm>
+            <a:off x="9144000" y="6510528"/>
+            <a:ext cx="2468880" cy="201168"/>
+          </a:xfrm>
+          <a:prstGeom prst="rect">
+            <a:avLst/>
+          </a:prstGeom>
+          <a:noFill/>
+        </p:spPr>
+        <p:txBody>
+          <a:bodyPr wrap="square" lIns="73152" rIns="73152" tIns="36576" bIns="36576">
+            <a:spAutoFit/>
+          </a:bodyPr>
+          <a:lstStyle/>
+          <a:p>
+            <a:pPr algn="r">
+              <a:spcAft>
+                <a:spcPts val="0"/>
+              </a:spcAft>
+              <a:defRPr sz="1000" b="0">
+                <a:solidFill>
+                  <a:srgbClr val="5C6672"/>
+                </a:solidFill>
+                <a:latin typeface="Noto Sans CJK KR"/>
+              </a:defRPr>
+            </a:pPr>
+            <a:r>
+              <a:t>명령·파일 경로는 슬라이드에서 복사 가능</a:t>
+            </a:r>
+          </a:p>
+        </p:txBody>
+      </p:sp>
+      <p:sp>
+        <p:nvSpPr>
+          <p:cNvPr id="6" name="Rectangle 5"/>
+          <p:cNvSpPr/>
+          <p:nvPr/>
+        </p:nvSpPr>
+        <p:spPr>
+          <a:xfrm>
+            <a:off x="566928" y="1188720"/>
+            <a:ext cx="11064240" cy="347472"/>
+          </a:xfrm>
+          <a:prstGeom prst="rect">
+            <a:avLst/>
+          </a:prstGeom>
+          <a:solidFill>
+            <a:srgbClr val="F4F7FB"/>
+          </a:solidFill>
+          <a:ln>
+            <a:solidFill>
+              <a:srgbClr val="F4F7FB"/>
+            </a:solidFill>
+          </a:ln>
+        </p:spPr>
+        <p:style>
+          <a:lnRef idx="1">
+            <a:schemeClr val="accent1"/>
+          </a:lnRef>
+          <a:fillRef idx="3">
+            <a:schemeClr val="accent1"/>
+          </a:fillRef>
+          <a:effectRef idx="2">
+            <a:schemeClr val="accent1"/>
+          </a:effectRef>
+          <a:fontRef idx="minor">
+            <a:schemeClr val="lt1"/>
+          </a:fontRef>
+        </p:style>
+        <p:txBody>
+          <a:bodyPr rtlCol="0" anchor="ctr" wrap="square" lIns="73152" rIns="73152" tIns="36576" bIns="36576"/>
+          <a:lstStyle/>
+          <a:p>
+            <a:pPr algn="l">
+              <a:spcAft>
+                <a:spcPts val="0"/>
+              </a:spcAft>
+              <a:defRPr sz="1300" b="1">
+                <a:solidFill>
+                  <a:srgbClr val="122C4E"/>
+                </a:solidFill>
+                <a:latin typeface="Noto Sans CJK KR"/>
+              </a:defRPr>
+            </a:pPr>
+            <a:r>
+              <a:t>현재 단계 미니 실습    |    현재 폴더 ~/ros2_curri/agv_ws    |    현재 터미널</a:t>
+            </a:r>
+          </a:p>
+        </p:txBody>
+      </p:sp>
+      <p:sp>
+        <p:nvSpPr>
+          <p:cNvPr id="7" name="Rounded Rectangle 6"/>
+          <p:cNvSpPr/>
+          <p:nvPr/>
+        </p:nvSpPr>
+        <p:spPr>
+          <a:xfrm>
+            <a:off x="749808" y="1874519"/>
+            <a:ext cx="10652760" cy="1993392"/>
+          </a:xfrm>
+          <a:prstGeom prst="roundRect">
+            <a:avLst/>
+          </a:prstGeom>
+          <a:solidFill>
+            <a:srgbClr val="FFF8EB"/>
+          </a:solidFill>
+          <a:ln>
+            <a:solidFill>
+              <a:srgbClr val="ECC680"/>
+            </a:solidFill>
+          </a:ln>
+        </p:spPr>
+        <p:style>
+          <a:lnRef idx="1">
+            <a:schemeClr val="accent1"/>
+          </a:lnRef>
+          <a:fillRef idx="3">
+            <a:schemeClr val="accent1"/>
+          </a:fillRef>
+          <a:effectRef idx="2">
+            <a:schemeClr val="accent1"/>
+          </a:effectRef>
+          <a:fontRef idx="minor">
+            <a:schemeClr val="lt1"/>
+          </a:fontRef>
+        </p:style>
+        <p:txBody>
+          <a:bodyPr rtlCol="0" anchor="ctr" wrap="square" lIns="73152" rIns="73152" tIns="36576" bIns="36576"/>
+          <a:lstStyle/>
+          <a:p>
+            <a:pPr algn="ctr">
+              <a:spcAft>
+                <a:spcPts val="0"/>
+              </a:spcAft>
+              <a:defRPr sz="2300" b="1">
+                <a:solidFill>
+                  <a:srgbClr val="122C4E"/>
+                </a:solidFill>
+                <a:latin typeface="Noto Sans CJK KR"/>
+              </a:defRPr>
+            </a:pPr>
+            <a:r>
+              <a:t>wheel_radius를 0.08 m에서 0.10 m로 바꾸고 RobotModel에서 바퀴 크기 변화를 확인한다.</a:t>
+            </a:r>
+          </a:p>
+        </p:txBody>
+      </p:sp>
+      <p:sp>
+        <p:nvSpPr>
+          <p:cNvPr id="8" name="TextBox 7"/>
+          <p:cNvSpPr txBox="1"/>
+          <p:nvPr/>
+        </p:nvSpPr>
+        <p:spPr>
+          <a:xfrm>
+            <a:off x="877824" y="4590288"/>
+            <a:ext cx="10241280" cy="594360"/>
+          </a:xfrm>
+          <a:prstGeom prst="rect">
+            <a:avLst/>
+          </a:prstGeom>
+          <a:noFill/>
+        </p:spPr>
+        <p:txBody>
+          <a:bodyPr wrap="square" lIns="73152" rIns="73152" tIns="36576" bIns="36576">
+            <a:spAutoFit/>
+          </a:bodyPr>
+          <a:lstStyle/>
+          <a:p>
+            <a:pPr algn="ctr">
+              <a:spcAft>
+                <a:spcPts val="0"/>
+              </a:spcAft>
+              <a:defRPr sz="1900" b="1">
+                <a:solidFill>
+                  <a:srgbClr val="DB7E22"/>
+                </a:solidFill>
+                <a:latin typeface="Noto Sans CJK KR"/>
+              </a:defRPr>
+            </a:pPr>
+            <a:r>
+              <a:t>기록할 것: 바꾼 값(단위) · 기대한 변화 · 실제 출력/화면 · 원래 값으로 되돌린 결과</a:t>
+            </a:r>
+          </a:p>
+        </p:txBody>
+      </p:sp>
+    </p:spTree>
+  </p:cSld>
+  <p:clrMapOvr>
+    <a:masterClrMapping/>
+  </p:clrMapOvr>
+</p:sld>
+</file>
+
+<file path=ppt/slides/slide19.xml><?xml version="1.0" encoding="utf-8"?>
+<p:sld xmlns:a="http://schemas.openxmlformats.org/drawingml/2006/main" xmlns:p="http://schemas.openxmlformats.org/presentationml/2006/main" xmlns:r="http://schemas.openxmlformats.org/officeDocument/2006/relationships">
+  <p:cSld>
+    <p:spTree>
+      <p:nvGrpSpPr>
+        <p:cNvPr id="1" name=""/>
+        <p:cNvGrpSpPr/>
+        <p:nvPr/>
+      </p:nvGrpSpPr>
+      <p:grpSpPr/>
+      <p:sp>
+        <p:nvSpPr>
+          <p:cNvPr id="2" name="TextBox 1"/>
+          <p:cNvSpPr txBox="1"/>
+          <p:nvPr/>
+        </p:nvSpPr>
+        <p:spPr>
+          <a:xfrm>
+            <a:off x="566928" y="347472"/>
+            <a:ext cx="10881360" cy="438912"/>
+          </a:xfrm>
+          <a:prstGeom prst="rect">
+            <a:avLst/>
+          </a:prstGeom>
+          <a:noFill/>
+        </p:spPr>
+        <p:txBody>
+          <a:bodyPr wrap="square" lIns="73152" rIns="73152" tIns="36576" bIns="36576">
+            <a:spAutoFit/>
+          </a:bodyPr>
+          <a:lstStyle/>
+          <a:p>
+            <a:pPr algn="l">
+              <a:spcAft>
+                <a:spcPts val="0"/>
+              </a:spcAft>
+              <a:defRPr sz="3200" b="1">
+                <a:solidFill>
+                  <a:srgbClr val="122C4E"/>
+                </a:solidFill>
+                <a:latin typeface="Noto Sans CJK KR"/>
+              </a:defRPr>
+            </a:pPr>
+            <a:r>
+              <a:t>체크포인트를 저장하고 다음 모듈로 넘긴다</a:t>
+            </a:r>
+          </a:p>
+        </p:txBody>
+      </p:sp>
+      <p:sp>
+        <p:nvSpPr>
+          <p:cNvPr id="3" name="TextBox 2"/>
+          <p:cNvSpPr txBox="1"/>
+          <p:nvPr/>
+        </p:nvSpPr>
+        <p:spPr>
+          <a:xfrm>
+            <a:off x="603504" y="859536"/>
+            <a:ext cx="10698480" cy="292608"/>
+          </a:xfrm>
+          <a:prstGeom prst="rect">
+            <a:avLst/>
+          </a:prstGeom>
+          <a:noFill/>
+        </p:spPr>
+        <p:txBody>
+          <a:bodyPr wrap="square" lIns="73152" rIns="73152" tIns="36576" bIns="36576">
+            <a:spAutoFit/>
+          </a:bodyPr>
+          <a:lstStyle/>
+          <a:p>
+            <a:pPr algn="l">
+              <a:spcAft>
+                <a:spcPts val="0"/>
+              </a:spcAft>
+              <a:defRPr sz="1700" b="0">
+                <a:solidFill>
+                  <a:srgbClr val="5C6672"/>
+                </a:solidFill>
+                <a:latin typeface="Noto Sans CJK KR"/>
+              </a:defRPr>
+            </a:pPr>
+            <a:r>
+              <a:t>현재 Complete는 다음 Starter의 기준선입니다.</a:t>
+            </a:r>
+          </a:p>
+        </p:txBody>
+      </p:sp>
+      <p:sp>
+        <p:nvSpPr>
+          <p:cNvPr id="4" name="TextBox 3"/>
+          <p:cNvSpPr txBox="1"/>
+          <p:nvPr/>
+        </p:nvSpPr>
+        <p:spPr>
+          <a:xfrm>
+            <a:off x="530352" y="6510528"/>
+            <a:ext cx="7772400" cy="201168"/>
+          </a:xfrm>
+          <a:prstGeom prst="rect">
+            <a:avLst/>
+          </a:prstGeom>
+          <a:noFill/>
+        </p:spPr>
+        <p:txBody>
+          <a:bodyPr wrap="square" lIns="73152" rIns="73152" tIns="36576" bIns="36576">
+            <a:spAutoFit/>
+          </a:bodyPr>
+          <a:lstStyle/>
+          <a:p>
+            <a:pPr algn="l">
+              <a:spcAft>
+                <a:spcPts val="0"/>
+              </a:spcAft>
+              <a:defRPr sz="1000" b="0">
+                <a:solidFill>
+                  <a:srgbClr val="5C6672"/>
+                </a:solidFill>
+                <a:latin typeface="Noto Sans CJK KR"/>
+              </a:defRPr>
+            </a:pPr>
+            <a:r>
+              <a:t>ROS 2 Jazzy · Gazebo Harmonic · M05 · 따라 하기형 AGV 실습</a:t>
+            </a:r>
+          </a:p>
+        </p:txBody>
+      </p:sp>
+      <p:sp>
+        <p:nvSpPr>
+          <p:cNvPr id="5" name="TextBox 4"/>
+          <p:cNvSpPr txBox="1"/>
+          <p:nvPr/>
+        </p:nvSpPr>
+        <p:spPr>
+          <a:xfrm>
+            <a:off x="9144000" y="6510528"/>
+            <a:ext cx="2468880" cy="201168"/>
+          </a:xfrm>
+          <a:prstGeom prst="rect">
+            <a:avLst/>
+          </a:prstGeom>
+          <a:noFill/>
+        </p:spPr>
+        <p:txBody>
+          <a:bodyPr wrap="square" lIns="73152" rIns="73152" tIns="36576" bIns="36576">
+            <a:spAutoFit/>
+          </a:bodyPr>
+          <a:lstStyle/>
+          <a:p>
+            <a:pPr algn="r">
+              <a:spcAft>
+                <a:spcPts val="0"/>
+              </a:spcAft>
+              <a:defRPr sz="1000" b="0">
+                <a:solidFill>
+                  <a:srgbClr val="5C6672"/>
+                </a:solidFill>
+                <a:latin typeface="Noto Sans CJK KR"/>
+              </a:defRPr>
+            </a:pPr>
+            <a:r>
+              <a:t>명령·파일 경로는 슬라이드에서 복사 가능</a:t>
+            </a:r>
+          </a:p>
+        </p:txBody>
+      </p:sp>
+      <p:sp>
+        <p:nvSpPr>
+          <p:cNvPr id="6" name="Rectangle 5"/>
+          <p:cNvSpPr/>
+          <p:nvPr/>
+        </p:nvSpPr>
+        <p:spPr>
+          <a:xfrm>
+            <a:off x="566928" y="1188720"/>
+            <a:ext cx="11064240" cy="347472"/>
+          </a:xfrm>
+          <a:prstGeom prst="rect">
+            <a:avLst/>
+          </a:prstGeom>
+          <a:solidFill>
+            <a:srgbClr val="F4F7FB"/>
+          </a:solidFill>
+          <a:ln>
+            <a:solidFill>
+              <a:srgbClr val="F4F7FB"/>
+            </a:solidFill>
+          </a:ln>
+        </p:spPr>
+        <p:style>
+          <a:lnRef idx="1">
+            <a:schemeClr val="accent1"/>
+          </a:lnRef>
+          <a:fillRef idx="3">
+            <a:schemeClr val="accent1"/>
+          </a:fillRef>
+          <a:effectRef idx="2">
+            <a:schemeClr val="accent1"/>
+          </a:effectRef>
+          <a:fontRef idx="minor">
+            <a:schemeClr val="lt1"/>
+          </a:fontRef>
+        </p:style>
+        <p:txBody>
+          <a:bodyPr rtlCol="0" anchor="ctr" wrap="square" lIns="73152" rIns="73152" tIns="36576" bIns="36576"/>
+          <a:lstStyle/>
+          <a:p>
+            <a:pPr algn="l">
+              <a:spcAft>
+                <a:spcPts val="0"/>
+              </a:spcAft>
+              <a:defRPr sz="1300" b="1">
+                <a:solidFill>
+                  <a:srgbClr val="122C4E"/>
+                </a:solidFill>
+                <a:latin typeface="Noto Sans CJK KR"/>
+              </a:defRPr>
+            </a:pPr>
+            <a:r>
+              <a:t>현재 단계 체크포인트    |    현재 폴더 ~/ros2_curri/agv_ws    |    현재 터미널</a:t>
+            </a:r>
+          </a:p>
+        </p:txBody>
+      </p:sp>
+      <p:sp>
+        <p:nvSpPr>
+          <p:cNvPr id="7" name="Rounded Rectangle 6"/>
+          <p:cNvSpPr/>
+          <p:nvPr/>
+        </p:nvSpPr>
+        <p:spPr>
+          <a:xfrm>
+            <a:off x="685800" y="1737360"/>
+            <a:ext cx="10972800" cy="3611880"/>
+          </a:xfrm>
+          <a:prstGeom prst="roundRect">
+            <a:avLst/>
+          </a:prstGeom>
+          <a:solidFill>
+            <a:srgbClr val="F4F7FB"/>
+          </a:solidFill>
+          <a:ln>
+            <a:solidFill>
+              <a:srgbClr val="D2DCE8"/>
+            </a:solidFill>
+          </a:ln>
+        </p:spPr>
+        <p:style>
+          <a:lnRef idx="1">
+            <a:schemeClr val="accent1"/>
+          </a:lnRef>
+          <a:fillRef idx="3">
+            <a:schemeClr val="accent1"/>
+          </a:fillRef>
+          <a:effectRef idx="2">
+            <a:schemeClr val="accent1"/>
+          </a:effectRef>
+          <a:fontRef idx="minor">
+            <a:schemeClr val="lt1"/>
+          </a:fontRef>
+        </p:style>
+        <p:txBody>
+          <a:bodyPr rtlCol="0" anchor="ctr"/>
+          <a:lstStyle/>
+          <a:p>
+            <a:pPr algn="ctr"/>
+          </a:p>
+        </p:txBody>
+      </p:sp>
+      <p:sp>
+        <p:nvSpPr>
+          <p:cNvPr id="8" name="TextBox 7"/>
+          <p:cNvSpPr txBox="1"/>
+          <p:nvPr/>
+        </p:nvSpPr>
+        <p:spPr>
+          <a:xfrm>
+            <a:off x="896112" y="1993392"/>
+            <a:ext cx="10332720" cy="2971800"/>
+          </a:xfrm>
+          <a:prstGeom prst="rect">
+            <a:avLst/>
+          </a:prstGeom>
+          <a:noFill/>
+        </p:spPr>
+        <p:txBody>
+          <a:bodyPr wrap="square" lIns="109728" rIns="109728">
+            <a:spAutoFit/>
+          </a:bodyPr>
+          <a:lstStyle/>
+          <a:p>
+            <a:pPr>
+              <a:spcAft>
+                <a:spcPts val="800"/>
+              </a:spcAft>
+              <a:defRPr sz="1800">
+                <a:solidFill>
+                  <a:srgbClr val="122C4E"/>
+                </a:solidFill>
+                <a:latin typeface="Noto Sans CJK KR"/>
+              </a:defRPr>
+            </a:pPr>
+            <a:r>
+              <a:t>• □ 완료 화면: RobotModel과 TF에서 base, 두 wheel, camera, lidar, imu 연결을 확인한다.</a:t>
+            </a:r>
+          </a:p>
+          <a:p>
+            <a:pPr>
+              <a:spcAft>
+                <a:spcPts val="800"/>
+              </a:spcAft>
+              <a:defRPr sz="1800">
+                <a:solidFill>
+                  <a:srgbClr val="122C4E"/>
+                </a:solidFill>
+                <a:latin typeface="Noto Sans CJK KR"/>
+              </a:defRPr>
+            </a:pPr>
+            <a:r>
+              <a:t>• □ Complete 파일: blocks/B_robot_build/M05_urdf_basic_model/complete/</a:t>
+            </a:r>
+          </a:p>
+          <a:p>
+            <a:pPr>
+              <a:spcAft>
+                <a:spcPts val="800"/>
+              </a:spcAft>
+              <a:defRPr sz="1800">
+                <a:solidFill>
+                  <a:srgbClr val="122C4E"/>
+                </a:solidFill>
+                <a:latin typeface="Noto Sans CJK KR"/>
+              </a:defRPr>
+            </a:pPr>
+            <a:r>
+              <a:t>• □ 정상 로그·캡처: logs/validation.log, screenshots/validation_terminal.png</a:t>
+            </a:r>
+          </a:p>
+          <a:p>
+            <a:pPr>
+              <a:spcAft>
+                <a:spcPts val="800"/>
+              </a:spcAft>
+              <a:defRPr sz="1800">
+                <a:solidFill>
+                  <a:srgbClr val="122C4E"/>
+                </a:solidFill>
+                <a:latin typeface="Noto Sans CJK KR"/>
+              </a:defRPr>
+            </a:pPr>
+            <a:r>
+              <a:t>• □ 버전 식별: CHECKSUM_or_TAG.txt의 SHA-256 manifest</a:t>
+            </a:r>
+          </a:p>
+          <a:p>
+            <a:pPr>
+              <a:spcAft>
+                <a:spcPts val="800"/>
+              </a:spcAft>
+              <a:defRPr sz="1800">
+                <a:solidFill>
+                  <a:srgbClr val="122C4E"/>
+                </a:solidFill>
+                <a:latin typeface="Noto Sans CJK KR"/>
+              </a:defRPr>
+            </a:pPr>
+            <a:r>
+              <a:t>• □ 다음 시작 조건: M06 Xacro 모듈화</a:t>
+            </a:r>
+          </a:p>
+        </p:txBody>
+      </p:sp>
+      <p:sp>
+        <p:nvSpPr>
+          <p:cNvPr id="9" name="TextBox 8"/>
+          <p:cNvSpPr txBox="1"/>
+          <p:nvPr/>
+        </p:nvSpPr>
+        <p:spPr>
+          <a:xfrm>
+            <a:off x="868680" y="5596128"/>
+            <a:ext cx="10515600" cy="338328"/>
+          </a:xfrm>
+          <a:prstGeom prst="rect">
+            <a:avLst/>
+          </a:prstGeom>
+          <a:noFill/>
+        </p:spPr>
+        <p:txBody>
+          <a:bodyPr wrap="square" lIns="73152" rIns="73152" tIns="36576" bIns="36576">
+            <a:spAutoFit/>
+          </a:bodyPr>
+          <a:lstStyle/>
+          <a:p>
+            <a:pPr algn="ctr">
+              <a:spcAft>
+                <a:spcPts val="0"/>
+              </a:spcAft>
+              <a:defRPr sz="1700" b="1">
+                <a:solidFill>
+                  <a:srgbClr val="2A8B5A"/>
+                </a:solidFill>
+                <a:latin typeface="Noto Sans CJK KR"/>
+              </a:defRPr>
+            </a:pPr>
+            <a:r>
+              <a:t>다음 모듈을 시작하기 전, 이 슬라이드의 Complete와 다음 모듈의 Starter를 비교합니다.</a:t>
             </a:r>
           </a:p>
         </p:txBody>
@@ -9052,6 +9959,537 @@
 </p:sld>
 </file>
 
+<file path=ppt/slides/slide20.xml><?xml version="1.0" encoding="utf-8"?>
+<p:sld xmlns:a="http://schemas.openxmlformats.org/drawingml/2006/main" xmlns:p="http://schemas.openxmlformats.org/presentationml/2006/main" xmlns:r="http://schemas.openxmlformats.org/officeDocument/2006/relationships">
+  <p:cSld>
+    <p:spTree>
+      <p:nvGrpSpPr>
+        <p:cNvPr id="1" name=""/>
+        <p:cNvGrpSpPr/>
+        <p:nvPr/>
+      </p:nvGrpSpPr>
+      <p:grpSpPr/>
+      <p:sp>
+        <p:nvSpPr>
+          <p:cNvPr id="2" name="TextBox 1"/>
+          <p:cNvSpPr txBox="1"/>
+          <p:nvPr/>
+        </p:nvSpPr>
+        <p:spPr>
+          <a:xfrm>
+            <a:off x="566928" y="347472"/>
+            <a:ext cx="10881360" cy="438912"/>
+          </a:xfrm>
+          <a:prstGeom prst="rect">
+            <a:avLst/>
+          </a:prstGeom>
+          <a:noFill/>
+        </p:spPr>
+        <p:txBody>
+          <a:bodyPr wrap="square" lIns="73152" rIns="73152" tIns="36576" bIns="36576">
+            <a:spAutoFit/>
+          </a:bodyPr>
+          <a:lstStyle/>
+          <a:p>
+            <a:pPr algn="l">
+              <a:spcAft>
+                <a:spcPts val="0"/>
+              </a:spcAft>
+              <a:defRPr sz="3200" b="1">
+                <a:solidFill>
+                  <a:srgbClr val="122C4E"/>
+                </a:solidFill>
+                <a:latin typeface="Noto Sans CJK KR"/>
+              </a:defRPr>
+            </a:pPr>
+            <a:r>
+              <a:t>공식 참고 자료</a:t>
+            </a:r>
+          </a:p>
+        </p:txBody>
+      </p:sp>
+      <p:sp>
+        <p:nvSpPr>
+          <p:cNvPr id="3" name="TextBox 2"/>
+          <p:cNvSpPr txBox="1"/>
+          <p:nvPr/>
+        </p:nvSpPr>
+        <p:spPr>
+          <a:xfrm>
+            <a:off x="603504" y="859536"/>
+            <a:ext cx="10698480" cy="292608"/>
+          </a:xfrm>
+          <a:prstGeom prst="rect">
+            <a:avLst/>
+          </a:prstGeom>
+          <a:noFill/>
+        </p:spPr>
+        <p:txBody>
+          <a:bodyPr wrap="square" lIns="73152" rIns="73152" tIns="36576" bIns="36576">
+            <a:spAutoFit/>
+          </a:bodyPr>
+          <a:lstStyle/>
+          <a:p>
+            <a:pPr algn="l">
+              <a:spcAft>
+                <a:spcPts val="0"/>
+              </a:spcAft>
+              <a:defRPr sz="1700" b="0">
+                <a:solidFill>
+                  <a:srgbClr val="5C6672"/>
+                </a:solidFill>
+                <a:latin typeface="Noto Sans CJK KR"/>
+              </a:defRPr>
+            </a:pPr>
+            <a:r>
+              <a:t>본문 단계는 링크를 열지 않아도 완료할 수 있으며, 링크는 개념을 더 확인할 때만 사용합니다.</a:t>
+            </a:r>
+          </a:p>
+        </p:txBody>
+      </p:sp>
+      <p:sp>
+        <p:nvSpPr>
+          <p:cNvPr id="4" name="TextBox 3"/>
+          <p:cNvSpPr txBox="1"/>
+          <p:nvPr/>
+        </p:nvSpPr>
+        <p:spPr>
+          <a:xfrm>
+            <a:off x="530352" y="6510528"/>
+            <a:ext cx="7772400" cy="201168"/>
+          </a:xfrm>
+          <a:prstGeom prst="rect">
+            <a:avLst/>
+          </a:prstGeom>
+          <a:noFill/>
+        </p:spPr>
+        <p:txBody>
+          <a:bodyPr wrap="square" lIns="73152" rIns="73152" tIns="36576" bIns="36576">
+            <a:spAutoFit/>
+          </a:bodyPr>
+          <a:lstStyle/>
+          <a:p>
+            <a:pPr algn="l">
+              <a:spcAft>
+                <a:spcPts val="0"/>
+              </a:spcAft>
+              <a:defRPr sz="1000" b="0">
+                <a:solidFill>
+                  <a:srgbClr val="5C6672"/>
+                </a:solidFill>
+                <a:latin typeface="Noto Sans CJK KR"/>
+              </a:defRPr>
+            </a:pPr>
+            <a:r>
+              <a:t>ROS 2 Jazzy · Gazebo Harmonic · M05 · 따라 하기형 AGV 실습</a:t>
+            </a:r>
+          </a:p>
+        </p:txBody>
+      </p:sp>
+      <p:sp>
+        <p:nvSpPr>
+          <p:cNvPr id="5" name="TextBox 4"/>
+          <p:cNvSpPr txBox="1"/>
+          <p:nvPr/>
+        </p:nvSpPr>
+        <p:spPr>
+          <a:xfrm>
+            <a:off x="9144000" y="6510528"/>
+            <a:ext cx="2468880" cy="201168"/>
+          </a:xfrm>
+          <a:prstGeom prst="rect">
+            <a:avLst/>
+          </a:prstGeom>
+          <a:noFill/>
+        </p:spPr>
+        <p:txBody>
+          <a:bodyPr wrap="square" lIns="73152" rIns="73152" tIns="36576" bIns="36576">
+            <a:spAutoFit/>
+          </a:bodyPr>
+          <a:lstStyle/>
+          <a:p>
+            <a:pPr algn="r">
+              <a:spcAft>
+                <a:spcPts val="0"/>
+              </a:spcAft>
+              <a:defRPr sz="1000" b="0">
+                <a:solidFill>
+                  <a:srgbClr val="5C6672"/>
+                </a:solidFill>
+                <a:latin typeface="Noto Sans CJK KR"/>
+              </a:defRPr>
+            </a:pPr>
+            <a:r>
+              <a:t>명령·파일 경로는 슬라이드에서 복사 가능</a:t>
+            </a:r>
+          </a:p>
+        </p:txBody>
+      </p:sp>
+      <p:sp>
+        <p:nvSpPr>
+          <p:cNvPr id="6" name="Rounded Rectangle 5"/>
+          <p:cNvSpPr/>
+          <p:nvPr/>
+        </p:nvSpPr>
+        <p:spPr>
+          <a:xfrm>
+            <a:off x="658368" y="1554480"/>
+            <a:ext cx="10972800" cy="4526280"/>
+          </a:xfrm>
+          <a:prstGeom prst="roundRect">
+            <a:avLst/>
+          </a:prstGeom>
+          <a:solidFill>
+            <a:srgbClr val="F4F7FB"/>
+          </a:solidFill>
+          <a:ln>
+            <a:solidFill>
+              <a:srgbClr val="D7DFE9"/>
+            </a:solidFill>
+          </a:ln>
+        </p:spPr>
+        <p:style>
+          <a:lnRef idx="1">
+            <a:schemeClr val="accent1"/>
+          </a:lnRef>
+          <a:fillRef idx="3">
+            <a:schemeClr val="accent1"/>
+          </a:fillRef>
+          <a:effectRef idx="2">
+            <a:schemeClr val="accent1"/>
+          </a:effectRef>
+          <a:fontRef idx="minor">
+            <a:schemeClr val="lt1"/>
+          </a:fontRef>
+        </p:style>
+        <p:txBody>
+          <a:bodyPr rtlCol="0" anchor="ctr"/>
+          <a:lstStyle/>
+          <a:p>
+            <a:pPr algn="ctr"/>
+          </a:p>
+        </p:txBody>
+      </p:sp>
+      <p:sp>
+        <p:nvSpPr>
+          <p:cNvPr id="7" name="TextBox 6"/>
+          <p:cNvSpPr txBox="1"/>
+          <p:nvPr/>
+        </p:nvSpPr>
+        <p:spPr>
+          <a:xfrm>
+            <a:off x="914400" y="1773936"/>
+            <a:ext cx="3840480" cy="256032"/>
+          </a:xfrm>
+          <a:prstGeom prst="rect">
+            <a:avLst/>
+          </a:prstGeom>
+          <a:noFill/>
+        </p:spPr>
+        <p:txBody>
+          <a:bodyPr wrap="square" lIns="73152" rIns="73152" tIns="36576" bIns="36576">
+            <a:spAutoFit/>
+          </a:bodyPr>
+          <a:lstStyle/>
+          <a:p>
+            <a:pPr algn="l">
+              <a:spcAft>
+                <a:spcPts val="0"/>
+              </a:spcAft>
+              <a:defRPr sz="1700" b="1">
+                <a:solidFill>
+                  <a:srgbClr val="122C4E"/>
+                </a:solidFill>
+                <a:latin typeface="Noto Sans CJK KR"/>
+              </a:defRPr>
+            </a:pPr>
+            <a:r>
+              <a:t>ROS 2 Jazzy — Gazebo Simulation</a:t>
+            </a:r>
+          </a:p>
+        </p:txBody>
+      </p:sp>
+      <p:sp>
+        <p:nvSpPr>
+          <p:cNvPr id="8" name="TextBox 7"/>
+          <p:cNvSpPr txBox="1"/>
+          <p:nvPr/>
+        </p:nvSpPr>
+        <p:spPr>
+          <a:xfrm>
+            <a:off x="914400" y="2048255"/>
+            <a:ext cx="9966960" cy="475488"/>
+          </a:xfrm>
+          <a:prstGeom prst="rect">
+            <a:avLst/>
+          </a:prstGeom>
+          <a:noFill/>
+        </p:spPr>
+        <p:txBody>
+          <a:bodyPr wrap="square" lIns="73152" rIns="73152" tIns="36576" bIns="36576">
+            <a:spAutoFit/>
+          </a:bodyPr>
+          <a:lstStyle/>
+          <a:p>
+            <a:pPr algn="l">
+              <a:spcAft>
+                <a:spcPts val="0"/>
+              </a:spcAft>
+              <a:defRPr sz="1000" b="0">
+                <a:solidFill>
+                  <a:srgbClr val="225B9B"/>
+                </a:solidFill>
+                <a:latin typeface="DejaVu Sans Mono"/>
+              </a:defRPr>
+            </a:pPr>
+            <a:r>
+              <a:t>https://docs.ros.org/en/jazzy/Tutorials/Advanced/Simulators/Gazebo/Simulation-Gazebo.html</a:t>
+            </a:r>
+          </a:p>
+        </p:txBody>
+      </p:sp>
+      <p:sp>
+        <p:nvSpPr>
+          <p:cNvPr id="9" name="TextBox 8"/>
+          <p:cNvSpPr txBox="1"/>
+          <p:nvPr/>
+        </p:nvSpPr>
+        <p:spPr>
+          <a:xfrm>
+            <a:off x="914400" y="2852928"/>
+            <a:ext cx="3840480" cy="256032"/>
+          </a:xfrm>
+          <a:prstGeom prst="rect">
+            <a:avLst/>
+          </a:prstGeom>
+          <a:noFill/>
+        </p:spPr>
+        <p:txBody>
+          <a:bodyPr wrap="square" lIns="73152" rIns="73152" tIns="36576" bIns="36576">
+            <a:spAutoFit/>
+          </a:bodyPr>
+          <a:lstStyle/>
+          <a:p>
+            <a:pPr algn="l">
+              <a:spcAft>
+                <a:spcPts val="0"/>
+              </a:spcAft>
+              <a:defRPr sz="1700" b="1">
+                <a:solidFill>
+                  <a:srgbClr val="122C4E"/>
+                </a:solidFill>
+                <a:latin typeface="Noto Sans CJK KR"/>
+              </a:defRPr>
+            </a:pPr>
+            <a:r>
+              <a:t>ROS 2 Jazzy — URDF / robot_state_publisher</a:t>
+            </a:r>
+          </a:p>
+        </p:txBody>
+      </p:sp>
+      <p:sp>
+        <p:nvSpPr>
+          <p:cNvPr id="10" name="TextBox 9"/>
+          <p:cNvSpPr txBox="1"/>
+          <p:nvPr/>
+        </p:nvSpPr>
+        <p:spPr>
+          <a:xfrm>
+            <a:off x="914400" y="3127248"/>
+            <a:ext cx="9966960" cy="475488"/>
+          </a:xfrm>
+          <a:prstGeom prst="rect">
+            <a:avLst/>
+          </a:prstGeom>
+          <a:noFill/>
+        </p:spPr>
+        <p:txBody>
+          <a:bodyPr wrap="square" lIns="73152" rIns="73152" tIns="36576" bIns="36576">
+            <a:spAutoFit/>
+          </a:bodyPr>
+          <a:lstStyle/>
+          <a:p>
+            <a:pPr algn="l">
+              <a:spcAft>
+                <a:spcPts val="0"/>
+              </a:spcAft>
+              <a:defRPr sz="1000" b="0">
+                <a:solidFill>
+                  <a:srgbClr val="225B9B"/>
+                </a:solidFill>
+                <a:latin typeface="DejaVu Sans Mono"/>
+              </a:defRPr>
+            </a:pPr>
+            <a:r>
+              <a:t>https://docs.ros.org/en/jazzy/Tutorials/Intermediate/URDF/Using-URDF-with-Robot-State-Publisher-py.html</a:t>
+            </a:r>
+          </a:p>
+        </p:txBody>
+      </p:sp>
+      <p:sp>
+        <p:nvSpPr>
+          <p:cNvPr id="11" name="TextBox 10"/>
+          <p:cNvSpPr txBox="1"/>
+          <p:nvPr/>
+        </p:nvSpPr>
+        <p:spPr>
+          <a:xfrm>
+            <a:off x="914400" y="3931920"/>
+            <a:ext cx="3840480" cy="256032"/>
+          </a:xfrm>
+          <a:prstGeom prst="rect">
+            <a:avLst/>
+          </a:prstGeom>
+          <a:noFill/>
+        </p:spPr>
+        <p:txBody>
+          <a:bodyPr wrap="square" lIns="73152" rIns="73152" tIns="36576" bIns="36576">
+            <a:spAutoFit/>
+          </a:bodyPr>
+          <a:lstStyle/>
+          <a:p>
+            <a:pPr algn="l">
+              <a:spcAft>
+                <a:spcPts val="0"/>
+              </a:spcAft>
+              <a:defRPr sz="1700" b="1">
+                <a:solidFill>
+                  <a:srgbClr val="122C4E"/>
+                </a:solidFill>
+                <a:latin typeface="Noto Sans CJK KR"/>
+              </a:defRPr>
+            </a:pPr>
+            <a:r>
+              <a:t>Gazebo — ROS 2 Integration / ros_gz_bridge</a:t>
+            </a:r>
+          </a:p>
+        </p:txBody>
+      </p:sp>
+      <p:sp>
+        <p:nvSpPr>
+          <p:cNvPr id="12" name="TextBox 11"/>
+          <p:cNvSpPr txBox="1"/>
+          <p:nvPr/>
+        </p:nvSpPr>
+        <p:spPr>
+          <a:xfrm>
+            <a:off x="914400" y="4206240"/>
+            <a:ext cx="9966960" cy="475488"/>
+          </a:xfrm>
+          <a:prstGeom prst="rect">
+            <a:avLst/>
+          </a:prstGeom>
+          <a:noFill/>
+        </p:spPr>
+        <p:txBody>
+          <a:bodyPr wrap="square" lIns="73152" rIns="73152" tIns="36576" bIns="36576">
+            <a:spAutoFit/>
+          </a:bodyPr>
+          <a:lstStyle/>
+          <a:p>
+            <a:pPr algn="l">
+              <a:spcAft>
+                <a:spcPts val="0"/>
+              </a:spcAft>
+              <a:defRPr sz="1000" b="0">
+                <a:solidFill>
+                  <a:srgbClr val="225B9B"/>
+                </a:solidFill>
+                <a:latin typeface="DejaVu Sans Mono"/>
+              </a:defRPr>
+            </a:pPr>
+            <a:r>
+              <a:t>https://gazebosim.org/docs/latest/ros2_integration/</a:t>
+            </a:r>
+          </a:p>
+        </p:txBody>
+      </p:sp>
+      <p:sp>
+        <p:nvSpPr>
+          <p:cNvPr id="13" name="TextBox 12"/>
+          <p:cNvSpPr txBox="1"/>
+          <p:nvPr/>
+        </p:nvSpPr>
+        <p:spPr>
+          <a:xfrm>
+            <a:off x="914400" y="5010912"/>
+            <a:ext cx="3840480" cy="256032"/>
+          </a:xfrm>
+          <a:prstGeom prst="rect">
+            <a:avLst/>
+          </a:prstGeom>
+          <a:noFill/>
+        </p:spPr>
+        <p:txBody>
+          <a:bodyPr wrap="square" lIns="73152" rIns="73152" tIns="36576" bIns="36576">
+            <a:spAutoFit/>
+          </a:bodyPr>
+          <a:lstStyle/>
+          <a:p>
+            <a:pPr algn="l">
+              <a:spcAft>
+                <a:spcPts val="0"/>
+              </a:spcAft>
+              <a:defRPr sz="1700" b="1">
+                <a:solidFill>
+                  <a:srgbClr val="122C4E"/>
+                </a:solidFill>
+                <a:latin typeface="Noto Sans CJK KR"/>
+              </a:defRPr>
+            </a:pPr>
+            <a:r>
+              <a:t>ROS 2 Jazzy — rosbag2 Recording and Playback</a:t>
+            </a:r>
+          </a:p>
+        </p:txBody>
+      </p:sp>
+      <p:sp>
+        <p:nvSpPr>
+          <p:cNvPr id="14" name="TextBox 13"/>
+          <p:cNvSpPr txBox="1"/>
+          <p:nvPr/>
+        </p:nvSpPr>
+        <p:spPr>
+          <a:xfrm>
+            <a:off x="914400" y="5285232"/>
+            <a:ext cx="9966960" cy="475488"/>
+          </a:xfrm>
+          <a:prstGeom prst="rect">
+            <a:avLst/>
+          </a:prstGeom>
+          <a:noFill/>
+        </p:spPr>
+        <p:txBody>
+          <a:bodyPr wrap="square" lIns="73152" rIns="73152" tIns="36576" bIns="36576">
+            <a:spAutoFit/>
+          </a:bodyPr>
+          <a:lstStyle/>
+          <a:p>
+            <a:pPr algn="l">
+              <a:spcAft>
+                <a:spcPts val="0"/>
+              </a:spcAft>
+              <a:defRPr sz="1000" b="0">
+                <a:solidFill>
+                  <a:srgbClr val="225B9B"/>
+                </a:solidFill>
+                <a:latin typeface="DejaVu Sans Mono"/>
+              </a:defRPr>
+            </a:pPr>
+            <a:r>
+              <a:t>https://docs.ros.org/en/jazzy/Tutorials/Beginner-CLI-Tools/Recording-And-Playing-Back-Data/Recording-And-Playing-Back-Data.html</a:t>
+            </a:r>
+          </a:p>
+        </p:txBody>
+      </p:sp>
+    </p:spTree>
+  </p:cSld>
+  <p:clrMapOvr>
+    <a:masterClrMapping/>
+  </p:clrMapOvr>
+</p:sld>
+</file>
+
 <file path=ppt/slides/slide3.xml><?xml version="1.0" encoding="utf-8"?>
 <p:sld xmlns:a="http://schemas.openxmlformats.org/drawingml/2006/main" xmlns:p="http://schemas.openxmlformats.org/presentationml/2006/main" xmlns:r="http://schemas.openxmlformats.org/officeDocument/2006/relationships">
   <p:cSld>
@@ -10592,7 +12030,7 @@
               </a:defRPr>
             </a:pPr>
             <a:r>
-              <a:t>단일 URDF를 검사한다</a:t>
+              <a:t>코드/설정이 실제로 만드는 것 (1/1)</a:t>
             </a:r>
           </a:p>
         </p:txBody>
@@ -10631,7 +12069,7 @@
               </a:defRPr>
             </a:pPr>
             <a:r>
-              <a:t>한 장에는 한 행동만 수행합니다.</a:t>
+              <a:t>파일을 입력하기 전에 ‘무엇을 만들고 어디서 볼지’를 먼저 연결합니다.</a:t>
             </a:r>
           </a:p>
         </p:txBody>
@@ -10767,109 +12205,31 @@
               </a:defRPr>
             </a:pPr>
             <a:r>
-              <a:t>현재 단계 1/2    |    현재 폴더 ~/ros2_curri/agv_ws    |    현재 터미널</a:t>
-            </a:r>
-          </a:p>
-        </p:txBody>
-      </p:sp>
-      <p:sp>
-        <p:nvSpPr>
-          <p:cNvPr id="7" name="TextBox 6"/>
-          <p:cNvSpPr txBox="1"/>
-          <p:nvPr/>
-        </p:nvSpPr>
-        <p:spPr>
-          <a:xfrm>
-            <a:off x="676656" y="1764792"/>
-            <a:ext cx="1828800" cy="347472"/>
-          </a:xfrm>
-          <a:prstGeom prst="rect">
-            <a:avLst/>
-          </a:prstGeom>
-          <a:noFill/>
-        </p:spPr>
-        <p:txBody>
-          <a:bodyPr wrap="square" lIns="73152" rIns="73152" tIns="36576" bIns="36576">
-            <a:spAutoFit/>
-          </a:bodyPr>
-          <a:lstStyle/>
-          <a:p>
-            <a:pPr algn="l">
-              <a:spcAft>
-                <a:spcPts val="0"/>
-              </a:spcAft>
-              <a:defRPr sz="1800" b="1">
-                <a:solidFill>
-                  <a:srgbClr val="225B9B"/>
-                </a:solidFill>
-                <a:latin typeface="Noto Sans CJK KR"/>
-              </a:defRPr>
-            </a:pPr>
-            <a:r>
-              <a:t>왜 하는가</a:t>
-            </a:r>
-          </a:p>
-        </p:txBody>
-      </p:sp>
-      <p:sp>
-        <p:nvSpPr>
-          <p:cNvPr id="8" name="TextBox 7"/>
-          <p:cNvSpPr txBox="1"/>
-          <p:nvPr/>
-        </p:nvSpPr>
-        <p:spPr>
-          <a:xfrm>
-            <a:off x="676656" y="2103120"/>
-            <a:ext cx="10789920" cy="512064"/>
-          </a:xfrm>
-          <a:prstGeom prst="rect">
-            <a:avLst/>
-          </a:prstGeom>
-          <a:noFill/>
-        </p:spPr>
-        <p:txBody>
-          <a:bodyPr wrap="square" lIns="73152" rIns="73152" tIns="36576" bIns="36576">
-            <a:spAutoFit/>
-          </a:bodyPr>
-          <a:lstStyle/>
-          <a:p>
-            <a:pPr algn="l">
-              <a:spcAft>
-                <a:spcPts val="0"/>
-              </a:spcAft>
-              <a:defRPr sz="2000" b="0">
-                <a:solidFill>
-                  <a:srgbClr val="122C4E"/>
-                </a:solidFill>
-                <a:latin typeface="Noto Sans CJK KR"/>
-              </a:defRPr>
-            </a:pPr>
-            <a:r>
-              <a:t>M05에서는 macro·property·xacro 없이 한 파일에 link와 joint를 직접 작성한다.</a:t>
-            </a:r>
-          </a:p>
-        </p:txBody>
-      </p:sp>
-      <p:sp>
-        <p:nvSpPr>
-          <p:cNvPr id="9" name="Rounded Rectangle 8"/>
+              <a:t>현재 단계 파일 역할    |    현재 폴더 ~/ros2_curri/agv_ws    |    현재 터미널</a:t>
+            </a:r>
+          </a:p>
+        </p:txBody>
+      </p:sp>
+      <p:sp>
+        <p:nvSpPr>
+          <p:cNvPr id="7" name="Rounded Rectangle 6"/>
           <p:cNvSpPr/>
           <p:nvPr/>
         </p:nvSpPr>
         <p:spPr>
           <a:xfrm>
-            <a:off x="676656" y="2871216"/>
-            <a:ext cx="10835640" cy="2331720"/>
+            <a:off x="640080" y="1627632"/>
+            <a:ext cx="10972800" cy="2048256"/>
           </a:xfrm>
           <a:prstGeom prst="roundRect">
             <a:avLst/>
           </a:prstGeom>
           <a:solidFill>
-            <a:srgbClr val="1D232D"/>
+            <a:srgbClr val="F4F7FB"/>
           </a:solidFill>
           <a:ln>
             <a:solidFill>
-              <a:srgbClr val="1D232D"/>
+              <a:srgbClr val="CCDBEB"/>
             </a:solidFill>
           </a:ln>
         </p:spPr>
@@ -10888,40 +12248,23 @@
           </a:fontRef>
         </p:style>
         <p:txBody>
-          <a:bodyPr rtlCol="0" anchor="ctr" wrap="square" lIns="73152" rIns="73152" tIns="36576" bIns="36576"/>
-          <a:lstStyle/>
-          <a:p>
-            <a:pPr algn="l">
-              <a:spcAft>
-                <a:spcPts val="0"/>
-              </a:spcAft>
-              <a:defRPr sz="1600" b="0">
-                <a:solidFill>
-                  <a:srgbClr val="FFFFFF"/>
-                </a:solidFill>
-                <a:latin typeface="DejaVu Sans Mono"/>
-              </a:defRPr>
-            </a:pPr>
-            <a:r>
-              <a:t>cd ~/ros2_curri/agv_ws</a:t>
-            </a:r>
-            <a:br/>
-            <a:r>
-              <a:t>check_urdf src/agv_description/curriculum_stages/M05/agv.urdf</a:t>
-            </a:r>
-          </a:p>
-        </p:txBody>
-      </p:sp>
-      <p:sp>
-        <p:nvSpPr>
-          <p:cNvPr id="10" name="TextBox 9"/>
+          <a:bodyPr rtlCol="0" anchor="ctr"/>
+          <a:lstStyle/>
+          <a:p>
+            <a:pPr algn="ctr"/>
+          </a:p>
+        </p:txBody>
+      </p:sp>
+      <p:sp>
+        <p:nvSpPr>
+          <p:cNvPr id="8" name="TextBox 7"/>
           <p:cNvSpPr txBox="1"/>
           <p:nvPr/>
         </p:nvSpPr>
         <p:spPr>
           <a:xfrm>
-            <a:off x="768096" y="5468112"/>
-            <a:ext cx="1143000" cy="256032"/>
+            <a:off x="850392" y="1764792"/>
+            <a:ext cx="10424160" cy="256032"/>
           </a:xfrm>
           <a:prstGeom prst="rect">
             <a:avLst/>
@@ -10938,29 +12281,29 @@
               <a:spcAft>
                 <a:spcPts val="0"/>
               </a:spcAft>
-              <a:defRPr sz="1800" b="1">
-                <a:solidFill>
-                  <a:srgbClr val="2A8B5A"/>
-                </a:solidFill>
-                <a:latin typeface="Noto Sans CJK KR"/>
-              </a:defRPr>
-            </a:pPr>
-            <a:r>
-              <a:t>확인</a:t>
-            </a:r>
-          </a:p>
-        </p:txBody>
-      </p:sp>
-      <p:sp>
-        <p:nvSpPr>
-          <p:cNvPr id="11" name="TextBox 10"/>
+              <a:defRPr sz="1300" b="1">
+                <a:solidFill>
+                  <a:srgbClr val="225B9B"/>
+                </a:solidFill>
+                <a:latin typeface="DejaVu Sans Mono"/>
+              </a:defRPr>
+            </a:pPr>
+            <a:r>
+              <a:t>~/ros2_curri/agv_ws/src/agv_description/curriculum_stages/M05/agv.urdf</a:t>
+            </a:r>
+          </a:p>
+        </p:txBody>
+      </p:sp>
+      <p:sp>
+        <p:nvSpPr>
+          <p:cNvPr id="9" name="TextBox 8"/>
           <p:cNvSpPr txBox="1"/>
           <p:nvPr/>
         </p:nvSpPr>
         <p:spPr>
           <a:xfrm>
-            <a:off x="768096" y="5742432"/>
-            <a:ext cx="10561320" cy="347472"/>
+            <a:off x="868680" y="2130552"/>
+            <a:ext cx="1234440" cy="228600"/>
           </a:xfrm>
           <a:prstGeom prst="rect">
             <a:avLst/>
@@ -10977,7 +12320,46 @@
               <a:spcAft>
                 <a:spcPts val="0"/>
               </a:spcAft>
-              <a:defRPr sz="1800" b="0">
+              <a:defRPr sz="1500" b="1">
+                <a:solidFill>
+                  <a:srgbClr val="2A8B5A"/>
+                </a:solidFill>
+                <a:latin typeface="Noto Sans CJK KR"/>
+              </a:defRPr>
+            </a:pPr>
+            <a:r>
+              <a:t>만드는 것</a:t>
+            </a:r>
+          </a:p>
+        </p:txBody>
+      </p:sp>
+      <p:sp>
+        <p:nvSpPr>
+          <p:cNvPr id="10" name="TextBox 9"/>
+          <p:cNvSpPr txBox="1"/>
+          <p:nvPr/>
+        </p:nvSpPr>
+        <p:spPr>
+          <a:xfrm>
+            <a:off x="1975104" y="2112264"/>
+            <a:ext cx="9189720" cy="274320"/>
+          </a:xfrm>
+          <a:prstGeom prst="rect">
+            <a:avLst/>
+          </a:prstGeom>
+          <a:noFill/>
+        </p:spPr>
+        <p:txBody>
+          <a:bodyPr wrap="square" lIns="73152" rIns="73152" tIns="36576" bIns="36576">
+            <a:spAutoFit/>
+          </a:bodyPr>
+          <a:lstStyle/>
+          <a:p>
+            <a:pPr algn="l">
+              <a:spcAft>
+                <a:spcPts val="0"/>
+              </a:spcAft>
+              <a:defRPr sz="1500" b="0">
                 <a:solidFill>
                   <a:srgbClr val="122C4E"/>
                 </a:solidFill>
@@ -10985,7 +12367,167 @@
               </a:defRPr>
             </a:pPr>
             <a:r>
-              <a:t>명령의 출력에서 topic·frame·파일 이름 또는 성공 메시지를 찾으면 이 단계가 완료됩니다.</a:t>
+              <a:t>몸체·두 바퀴·caster·camera/lidar/imu frame을 link와 joint로 조립한 기본 AGV</a:t>
+            </a:r>
+          </a:p>
+        </p:txBody>
+      </p:sp>
+      <p:sp>
+        <p:nvSpPr>
+          <p:cNvPr id="11" name="TextBox 10"/>
+          <p:cNvSpPr txBox="1"/>
+          <p:nvPr/>
+        </p:nvSpPr>
+        <p:spPr>
+          <a:xfrm>
+            <a:off x="868680" y="2505456"/>
+            <a:ext cx="1234440" cy="228600"/>
+          </a:xfrm>
+          <a:prstGeom prst="rect">
+            <a:avLst/>
+          </a:prstGeom>
+          <a:noFill/>
+        </p:spPr>
+        <p:txBody>
+          <a:bodyPr wrap="square" lIns="73152" rIns="73152" tIns="36576" bIns="36576">
+            <a:spAutoFit/>
+          </a:bodyPr>
+          <a:lstStyle/>
+          <a:p>
+            <a:pPr algn="l">
+              <a:spcAft>
+                <a:spcPts val="0"/>
+              </a:spcAft>
+              <a:defRPr sz="1500" b="1">
+                <a:solidFill>
+                  <a:srgbClr val="DB7E22"/>
+                </a:solidFill>
+                <a:latin typeface="Noto Sans CJK KR"/>
+              </a:defRPr>
+            </a:pPr>
+            <a:r>
+              <a:t>코드 읽기</a:t>
+            </a:r>
+          </a:p>
+        </p:txBody>
+      </p:sp>
+      <p:sp>
+        <p:nvSpPr>
+          <p:cNvPr id="12" name="TextBox 11"/>
+          <p:cNvSpPr txBox="1"/>
+          <p:nvPr/>
+        </p:nvSpPr>
+        <p:spPr>
+          <a:xfrm>
+            <a:off x="1975104" y="2487168"/>
+            <a:ext cx="9189720" cy="301752"/>
+          </a:xfrm>
+          <a:prstGeom prst="rect">
+            <a:avLst/>
+          </a:prstGeom>
+          <a:noFill/>
+        </p:spPr>
+        <p:txBody>
+          <a:bodyPr wrap="square" lIns="73152" rIns="73152" tIns="36576" bIns="36576">
+            <a:spAutoFit/>
+          </a:bodyPr>
+          <a:lstStyle/>
+          <a:p>
+            <a:pPr algn="l">
+              <a:spcAft>
+                <a:spcPts val="0"/>
+              </a:spcAft>
+              <a:defRPr sz="1400" b="0">
+                <a:solidFill>
+                  <a:srgbClr val="122C4E"/>
+                </a:solidFill>
+                <a:latin typeface="Noto Sans CJK KR"/>
+              </a:defRPr>
+            </a:pPr>
+            <a:r>
+              <a:t>각 &lt;link&gt;의 geometry와 각 &lt;joint&gt;의 parent/child를 차례로 작성한다.</a:t>
+            </a:r>
+          </a:p>
+        </p:txBody>
+      </p:sp>
+      <p:sp>
+        <p:nvSpPr>
+          <p:cNvPr id="13" name="TextBox 12"/>
+          <p:cNvSpPr txBox="1"/>
+          <p:nvPr/>
+        </p:nvSpPr>
+        <p:spPr>
+          <a:xfrm>
+            <a:off x="868680" y="2889504"/>
+            <a:ext cx="1234440" cy="228600"/>
+          </a:xfrm>
+          <a:prstGeom prst="rect">
+            <a:avLst/>
+          </a:prstGeom>
+          <a:noFill/>
+        </p:spPr>
+        <p:txBody>
+          <a:bodyPr wrap="square" lIns="73152" rIns="73152" tIns="36576" bIns="36576">
+            <a:spAutoFit/>
+          </a:bodyPr>
+          <a:lstStyle/>
+          <a:p>
+            <a:pPr algn="l">
+              <a:spcAft>
+                <a:spcPts val="0"/>
+              </a:spcAft>
+              <a:defRPr sz="1500" b="1">
+                <a:solidFill>
+                  <a:srgbClr val="225B9B"/>
+                </a:solidFill>
+                <a:latin typeface="Noto Sans CJK KR"/>
+              </a:defRPr>
+            </a:pPr>
+            <a:r>
+              <a:t>사용/확인</a:t>
+            </a:r>
+          </a:p>
+        </p:txBody>
+      </p:sp>
+      <p:sp>
+        <p:nvSpPr>
+          <p:cNvPr id="14" name="TextBox 13"/>
+          <p:cNvSpPr txBox="1"/>
+          <p:nvPr/>
+        </p:nvSpPr>
+        <p:spPr>
+          <a:xfrm>
+            <a:off x="1975104" y="2871216"/>
+            <a:ext cx="9189720" cy="512064"/>
+          </a:xfrm>
+          <a:prstGeom prst="rect">
+            <a:avLst/>
+          </a:prstGeom>
+          <a:noFill/>
+        </p:spPr>
+        <p:txBody>
+          <a:bodyPr wrap="square" lIns="73152" rIns="73152" tIns="36576" bIns="36576">
+            <a:spAutoFit/>
+          </a:bodyPr>
+          <a:lstStyle/>
+          <a:p>
+            <a:pPr algn="l">
+              <a:spcAft>
+                <a:spcPts val="0"/>
+              </a:spcAft>
+              <a:defRPr sz="1300" b="0">
+                <a:solidFill>
+                  <a:srgbClr val="122C4E"/>
+                </a:solidFill>
+                <a:latin typeface="Noto Sans CJK KR"/>
+              </a:defRPr>
+            </a:pPr>
+            <a:r>
+              <a:t>사용: check_urdf로 tree를 확인한 뒤 robot_state_publisher + RViz RobotModel에 넣는다.</a:t>
+            </a:r>
+            <a:br/>
+            <a:r>
+              <a:t>화면/출력: terminal의 base_link 자식 6개와 RViz의 바퀴·센서 frame</a:t>
             </a:r>
           </a:p>
         </p:txBody>
@@ -11042,7 +12584,7 @@
               </a:defRPr>
             </a:pPr>
             <a:r>
-              <a:t>RViz로 표시한다</a:t>
+              <a:t>코드를 ‘만드는 것 → 표시할 줄 → 바꾼 결과’로 읽는다</a:t>
             </a:r>
           </a:p>
         </p:txBody>
@@ -11081,7 +12623,7 @@
               </a:defRPr>
             </a:pPr>
             <a:r>
-              <a:t>한 장에는 한 행동만 수행합니다.</a:t>
+              <a:t>PDF 예시처럼 화면을 보기 전에 코드의 역할과 관찰 지점을 한 번 짚고 갑니다.</a:t>
             </a:r>
           </a:p>
         </p:txBody>
@@ -11217,109 +12759,31 @@
               </a:defRPr>
             </a:pPr>
             <a:r>
-              <a:t>현재 단계 2/2    |    현재 폴더 ~/ros2_curri/agv_ws    |    새 터미널</a:t>
-            </a:r>
-          </a:p>
-        </p:txBody>
-      </p:sp>
-      <p:sp>
-        <p:nvSpPr>
-          <p:cNvPr id="7" name="TextBox 6"/>
-          <p:cNvSpPr txBox="1"/>
-          <p:nvPr/>
-        </p:nvSpPr>
-        <p:spPr>
-          <a:xfrm>
-            <a:off x="676656" y="1764792"/>
-            <a:ext cx="1828800" cy="347472"/>
-          </a:xfrm>
-          <a:prstGeom prst="rect">
-            <a:avLst/>
-          </a:prstGeom>
-          <a:noFill/>
-        </p:spPr>
-        <p:txBody>
-          <a:bodyPr wrap="square" lIns="73152" rIns="73152" tIns="36576" bIns="36576">
-            <a:spAutoFit/>
-          </a:bodyPr>
-          <a:lstStyle/>
-          <a:p>
-            <a:pPr algn="l">
-              <a:spcAft>
-                <a:spcPts val="0"/>
-              </a:spcAft>
-              <a:defRPr sz="1800" b="1">
-                <a:solidFill>
-                  <a:srgbClr val="225B9B"/>
-                </a:solidFill>
-                <a:latin typeface="Noto Sans CJK KR"/>
-              </a:defRPr>
-            </a:pPr>
-            <a:r>
-              <a:t>왜 하는가</a:t>
-            </a:r>
-          </a:p>
-        </p:txBody>
-      </p:sp>
-      <p:sp>
-        <p:nvSpPr>
-          <p:cNvPr id="8" name="TextBox 7"/>
-          <p:cNvSpPr txBox="1"/>
-          <p:nvPr/>
-        </p:nvSpPr>
-        <p:spPr>
-          <a:xfrm>
-            <a:off x="676656" y="2103120"/>
-            <a:ext cx="10789920" cy="512064"/>
-          </a:xfrm>
-          <a:prstGeom prst="rect">
-            <a:avLst/>
-          </a:prstGeom>
-          <a:noFill/>
-        </p:spPr>
-        <p:txBody>
-          <a:bodyPr wrap="square" lIns="73152" rIns="73152" tIns="36576" bIns="36576">
-            <a:spAutoFit/>
-          </a:bodyPr>
-          <a:lstStyle/>
-          <a:p>
-            <a:pPr algn="l">
-              <a:spcAft>
-                <a:spcPts val="0"/>
-              </a:spcAft>
-              <a:defRPr sz="2000" b="0">
-                <a:solidFill>
-                  <a:srgbClr val="122C4E"/>
-                </a:solidFill>
-                <a:latin typeface="Noto Sans CJK KR"/>
-              </a:defRPr>
-            </a:pPr>
-            <a:r>
-              <a:t>RobotModel에는 단일 URDF 텍스트를 robot_description으로 넣고 TF를 함께 확인한다.</a:t>
-            </a:r>
-          </a:p>
-        </p:txBody>
-      </p:sp>
-      <p:sp>
-        <p:nvSpPr>
-          <p:cNvPr id="9" name="Rounded Rectangle 8"/>
+              <a:t>현재 단계 코드 해설    |    현재 폴더 ~/ros2_curri/agv_ws    |    현재 터미널</a:t>
+            </a:r>
+          </a:p>
+        </p:txBody>
+      </p:sp>
+      <p:sp>
+        <p:nvSpPr>
+          <p:cNvPr id="7" name="Rounded Rectangle 6"/>
           <p:cNvSpPr/>
           <p:nvPr/>
         </p:nvSpPr>
         <p:spPr>
           <a:xfrm>
-            <a:off x="676656" y="2871216"/>
-            <a:ext cx="10835640" cy="2331720"/>
+            <a:off x="658368" y="1664208"/>
+            <a:ext cx="5321808" cy="1764792"/>
           </a:xfrm>
           <a:prstGeom prst="roundRect">
             <a:avLst/>
           </a:prstGeom>
           <a:solidFill>
-            <a:srgbClr val="1D232D"/>
+            <a:srgbClr val="F4F7FB"/>
           </a:solidFill>
           <a:ln>
             <a:solidFill>
-              <a:srgbClr val="1D232D"/>
+              <a:srgbClr val="2A8B5A"/>
             </a:solidFill>
           </a:ln>
         </p:spPr>
@@ -11338,44 +12802,23 @@
           </a:fontRef>
         </p:style>
         <p:txBody>
-          <a:bodyPr rtlCol="0" anchor="ctr" wrap="square" lIns="73152" rIns="73152" tIns="36576" bIns="36576"/>
-          <a:lstStyle/>
-          <a:p>
-            <a:pPr algn="l">
-              <a:spcAft>
-                <a:spcPts val="0"/>
-              </a:spcAft>
-              <a:defRPr sz="1600" b="0">
-                <a:solidFill>
-                  <a:srgbClr val="FFFFFF"/>
-                </a:solidFill>
-                <a:latin typeface="DejaVu Sans Mono"/>
-              </a:defRPr>
-            </a:pPr>
-            <a:r>
-              <a:t>ros2 run robot_state_publisher robot_state_publisher \</a:t>
-            </a:r>
-            <a:br/>
-            <a:r>
-              <a:t>  --ros-args -p robot_description:="$(cat src/agv_description/curriculum_stages/M05/agv.urdf)"</a:t>
-            </a:r>
-            <a:br/>
-            <a:r>
-              <a:t># 새 터미널: rviz2 → Add → RobotModel, TF</a:t>
-            </a:r>
-          </a:p>
-        </p:txBody>
-      </p:sp>
-      <p:sp>
-        <p:nvSpPr>
-          <p:cNvPr id="10" name="TextBox 9"/>
+          <a:bodyPr rtlCol="0" anchor="ctr"/>
+          <a:lstStyle/>
+          <a:p>
+            <a:pPr algn="ctr"/>
+          </a:p>
+        </p:txBody>
+      </p:sp>
+      <p:sp>
+        <p:nvSpPr>
+          <p:cNvPr id="8" name="TextBox 7"/>
           <p:cNvSpPr txBox="1"/>
           <p:nvPr/>
         </p:nvSpPr>
         <p:spPr>
           <a:xfrm>
-            <a:off x="768096" y="5468112"/>
-            <a:ext cx="1143000" cy="256032"/>
+            <a:off x="859536" y="1828800"/>
+            <a:ext cx="4892040" cy="265176"/>
           </a:xfrm>
           <a:prstGeom prst="rect">
             <a:avLst/>
@@ -11392,7 +12835,7 @@
               <a:spcAft>
                 <a:spcPts val="0"/>
               </a:spcAft>
-              <a:defRPr sz="1800" b="1">
+              <a:defRPr sz="1700" b="1">
                 <a:solidFill>
                   <a:srgbClr val="2A8B5A"/>
                 </a:solidFill>
@@ -11400,21 +12843,21 @@
               </a:defRPr>
             </a:pPr>
             <a:r>
-              <a:t>확인</a:t>
-            </a:r>
-          </a:p>
-        </p:txBody>
-      </p:sp>
-      <p:sp>
-        <p:nvSpPr>
-          <p:cNvPr id="11" name="TextBox 10"/>
+              <a:t>1. 이 파일이 만드는 것</a:t>
+            </a:r>
+          </a:p>
+        </p:txBody>
+      </p:sp>
+      <p:sp>
+        <p:nvSpPr>
+          <p:cNvPr id="9" name="TextBox 8"/>
           <p:cNvSpPr txBox="1"/>
           <p:nvPr/>
         </p:nvSpPr>
         <p:spPr>
           <a:xfrm>
-            <a:off x="768096" y="5742432"/>
-            <a:ext cx="10561320" cy="347472"/>
+            <a:off x="859536" y="2240280"/>
+            <a:ext cx="4846320" cy="941832"/>
           </a:xfrm>
           <a:prstGeom prst="rect">
             <a:avLst/>
@@ -11431,7 +12874,7 @@
               <a:spcAft>
                 <a:spcPts val="0"/>
               </a:spcAft>
-              <a:defRPr sz="1800" b="0">
+              <a:defRPr sz="1600" b="0">
                 <a:solidFill>
                   <a:srgbClr val="122C4E"/>
                 </a:solidFill>
@@ -11439,7 +12882,415 @@
               </a:defRPr>
             </a:pPr>
             <a:r>
-              <a:t>명령의 출력에서 topic·frame·파일 이름 또는 성공 메시지를 찾으면 이 단계가 완료됩니다.</a:t>
+              <a:t>URDF는 로봇의 부품표가 아니라, ‘어떤 부품을 어느 frame에 고정할지’ 적는 조립도입니다.</a:t>
+            </a:r>
+          </a:p>
+        </p:txBody>
+      </p:sp>
+      <p:sp>
+        <p:nvSpPr>
+          <p:cNvPr id="10" name="Rounded Rectangle 9"/>
+          <p:cNvSpPr/>
+          <p:nvPr/>
+        </p:nvSpPr>
+        <p:spPr>
+          <a:xfrm>
+            <a:off x="6217920" y="1664208"/>
+            <a:ext cx="5321808" cy="1764792"/>
+          </a:xfrm>
+          <a:prstGeom prst="roundRect">
+            <a:avLst/>
+          </a:prstGeom>
+          <a:solidFill>
+            <a:srgbClr val="F4F7FB"/>
+          </a:solidFill>
+          <a:ln>
+            <a:solidFill>
+              <a:srgbClr val="225B9B"/>
+            </a:solidFill>
+          </a:ln>
+        </p:spPr>
+        <p:style>
+          <a:lnRef idx="1">
+            <a:schemeClr val="accent1"/>
+          </a:lnRef>
+          <a:fillRef idx="3">
+            <a:schemeClr val="accent1"/>
+          </a:fillRef>
+          <a:effectRef idx="2">
+            <a:schemeClr val="accent1"/>
+          </a:effectRef>
+          <a:fontRef idx="minor">
+            <a:schemeClr val="lt1"/>
+          </a:fontRef>
+        </p:style>
+        <p:txBody>
+          <a:bodyPr rtlCol="0" anchor="ctr"/>
+          <a:lstStyle/>
+          <a:p>
+            <a:pPr algn="ctr"/>
+          </a:p>
+        </p:txBody>
+      </p:sp>
+      <p:sp>
+        <p:nvSpPr>
+          <p:cNvPr id="11" name="TextBox 10"/>
+          <p:cNvSpPr txBox="1"/>
+          <p:nvPr/>
+        </p:nvSpPr>
+        <p:spPr>
+          <a:xfrm>
+            <a:off x="6419088" y="1828800"/>
+            <a:ext cx="4892040" cy="265176"/>
+          </a:xfrm>
+          <a:prstGeom prst="rect">
+            <a:avLst/>
+          </a:prstGeom>
+          <a:noFill/>
+        </p:spPr>
+        <p:txBody>
+          <a:bodyPr wrap="square" lIns="73152" rIns="73152" tIns="36576" bIns="36576">
+            <a:spAutoFit/>
+          </a:bodyPr>
+          <a:lstStyle/>
+          <a:p>
+            <a:pPr algn="l">
+              <a:spcAft>
+                <a:spcPts val="0"/>
+              </a:spcAft>
+              <a:defRPr sz="1700" b="1">
+                <a:solidFill>
+                  <a:srgbClr val="225B9B"/>
+                </a:solidFill>
+                <a:latin typeface="Noto Sans CJK KR"/>
+              </a:defRPr>
+            </a:pPr>
+            <a:r>
+              <a:t>2. 먼저 찾을 코드/태그</a:t>
+            </a:r>
+          </a:p>
+        </p:txBody>
+      </p:sp>
+      <p:sp>
+        <p:nvSpPr>
+          <p:cNvPr id="12" name="TextBox 11"/>
+          <p:cNvSpPr txBox="1"/>
+          <p:nvPr/>
+        </p:nvSpPr>
+        <p:spPr>
+          <a:xfrm>
+            <a:off x="6419088" y="2240280"/>
+            <a:ext cx="4846320" cy="941832"/>
+          </a:xfrm>
+          <a:prstGeom prst="rect">
+            <a:avLst/>
+          </a:prstGeom>
+          <a:noFill/>
+        </p:spPr>
+        <p:txBody>
+          <a:bodyPr wrap="square" lIns="73152" rIns="73152" tIns="36576" bIns="36576">
+            <a:spAutoFit/>
+          </a:bodyPr>
+          <a:lstStyle/>
+          <a:p>
+            <a:pPr algn="l">
+              <a:spcAft>
+                <a:spcPts val="0"/>
+              </a:spcAft>
+              <a:defRPr sz="1600" b="0">
+                <a:solidFill>
+                  <a:srgbClr val="122C4E"/>
+                </a:solidFill>
+                <a:latin typeface="Noto Sans CJK KR"/>
+              </a:defRPr>
+            </a:pPr>
+            <a:r>
+              <a:t>&lt;link name="base_link"&gt;, &lt;joint name="..."&gt;, &lt;parent&gt;, &lt;child&gt;</a:t>
+            </a:r>
+          </a:p>
+        </p:txBody>
+      </p:sp>
+      <p:sp>
+        <p:nvSpPr>
+          <p:cNvPr id="13" name="Rounded Rectangle 12"/>
+          <p:cNvSpPr/>
+          <p:nvPr/>
+        </p:nvSpPr>
+        <p:spPr>
+          <a:xfrm>
+            <a:off x="658368" y="3813048"/>
+            <a:ext cx="5321808" cy="1764792"/>
+          </a:xfrm>
+          <a:prstGeom prst="roundRect">
+            <a:avLst/>
+          </a:prstGeom>
+          <a:solidFill>
+            <a:srgbClr val="F4F7FB"/>
+          </a:solidFill>
+          <a:ln>
+            <a:solidFill>
+              <a:srgbClr val="DB7E22"/>
+            </a:solidFill>
+          </a:ln>
+        </p:spPr>
+        <p:style>
+          <a:lnRef idx="1">
+            <a:schemeClr val="accent1"/>
+          </a:lnRef>
+          <a:fillRef idx="3">
+            <a:schemeClr val="accent1"/>
+          </a:fillRef>
+          <a:effectRef idx="2">
+            <a:schemeClr val="accent1"/>
+          </a:effectRef>
+          <a:fontRef idx="minor">
+            <a:schemeClr val="lt1"/>
+          </a:fontRef>
+        </p:style>
+        <p:txBody>
+          <a:bodyPr rtlCol="0" anchor="ctr"/>
+          <a:lstStyle/>
+          <a:p>
+            <a:pPr algn="ctr"/>
+          </a:p>
+        </p:txBody>
+      </p:sp>
+      <p:sp>
+        <p:nvSpPr>
+          <p:cNvPr id="14" name="TextBox 13"/>
+          <p:cNvSpPr txBox="1"/>
+          <p:nvPr/>
+        </p:nvSpPr>
+        <p:spPr>
+          <a:xfrm>
+            <a:off x="859536" y="3977639"/>
+            <a:ext cx="4892040" cy="265176"/>
+          </a:xfrm>
+          <a:prstGeom prst="rect">
+            <a:avLst/>
+          </a:prstGeom>
+          <a:noFill/>
+        </p:spPr>
+        <p:txBody>
+          <a:bodyPr wrap="square" lIns="73152" rIns="73152" tIns="36576" bIns="36576">
+            <a:spAutoFit/>
+          </a:bodyPr>
+          <a:lstStyle/>
+          <a:p>
+            <a:pPr algn="l">
+              <a:spcAft>
+                <a:spcPts val="0"/>
+              </a:spcAft>
+              <a:defRPr sz="1700" b="1">
+                <a:solidFill>
+                  <a:srgbClr val="DB7E22"/>
+                </a:solidFill>
+                <a:latin typeface="Noto Sans CJK KR"/>
+              </a:defRPr>
+            </a:pPr>
+            <a:r>
+              <a:t>3. 값을 바꾸면</a:t>
+            </a:r>
+          </a:p>
+        </p:txBody>
+      </p:sp>
+      <p:sp>
+        <p:nvSpPr>
+          <p:cNvPr id="15" name="TextBox 14"/>
+          <p:cNvSpPr txBox="1"/>
+          <p:nvPr/>
+        </p:nvSpPr>
+        <p:spPr>
+          <a:xfrm>
+            <a:off x="859536" y="4389120"/>
+            <a:ext cx="4846320" cy="941832"/>
+          </a:xfrm>
+          <a:prstGeom prst="rect">
+            <a:avLst/>
+          </a:prstGeom>
+          <a:noFill/>
+        </p:spPr>
+        <p:txBody>
+          <a:bodyPr wrap="square" lIns="73152" rIns="73152" tIns="36576" bIns="36576">
+            <a:spAutoFit/>
+          </a:bodyPr>
+          <a:lstStyle/>
+          <a:p>
+            <a:pPr algn="l">
+              <a:spcAft>
+                <a:spcPts val="0"/>
+              </a:spcAft>
+              <a:defRPr sz="1600" b="0">
+                <a:solidFill>
+                  <a:srgbClr val="122C4E"/>
+                </a:solidFill>
+                <a:latin typeface="Noto Sans CJK KR"/>
+              </a:defRPr>
+            </a:pPr>
+            <a:r>
+              <a:t>wheel link의 cylinder radius를 바꾸면 보이는 바퀴 크기가 바뀌고, joint origin은 장착 위치를 바꿉니다.</a:t>
+            </a:r>
+          </a:p>
+        </p:txBody>
+      </p:sp>
+      <p:sp>
+        <p:nvSpPr>
+          <p:cNvPr id="16" name="Rounded Rectangle 15"/>
+          <p:cNvSpPr/>
+          <p:nvPr/>
+        </p:nvSpPr>
+        <p:spPr>
+          <a:xfrm>
+            <a:off x="6217920" y="3813048"/>
+            <a:ext cx="5321808" cy="1764792"/>
+          </a:xfrm>
+          <a:prstGeom prst="roundRect">
+            <a:avLst/>
+          </a:prstGeom>
+          <a:solidFill>
+            <a:srgbClr val="F4F7FB"/>
+          </a:solidFill>
+          <a:ln>
+            <a:solidFill>
+              <a:srgbClr val="BE3B3B"/>
+            </a:solidFill>
+          </a:ln>
+        </p:spPr>
+        <p:style>
+          <a:lnRef idx="1">
+            <a:schemeClr val="accent1"/>
+          </a:lnRef>
+          <a:fillRef idx="3">
+            <a:schemeClr val="accent1"/>
+          </a:fillRef>
+          <a:effectRef idx="2">
+            <a:schemeClr val="accent1"/>
+          </a:effectRef>
+          <a:fontRef idx="minor">
+            <a:schemeClr val="lt1"/>
+          </a:fontRef>
+        </p:style>
+        <p:txBody>
+          <a:bodyPr rtlCol="0" anchor="ctr"/>
+          <a:lstStyle/>
+          <a:p>
+            <a:pPr algn="ctr"/>
+          </a:p>
+        </p:txBody>
+      </p:sp>
+      <p:sp>
+        <p:nvSpPr>
+          <p:cNvPr id="17" name="TextBox 16"/>
+          <p:cNvSpPr txBox="1"/>
+          <p:nvPr/>
+        </p:nvSpPr>
+        <p:spPr>
+          <a:xfrm>
+            <a:off x="6419088" y="3977639"/>
+            <a:ext cx="4892040" cy="265176"/>
+          </a:xfrm>
+          <a:prstGeom prst="rect">
+            <a:avLst/>
+          </a:prstGeom>
+          <a:noFill/>
+        </p:spPr>
+        <p:txBody>
+          <a:bodyPr wrap="square" lIns="73152" rIns="73152" tIns="36576" bIns="36576">
+            <a:spAutoFit/>
+          </a:bodyPr>
+          <a:lstStyle/>
+          <a:p>
+            <a:pPr algn="l">
+              <a:spcAft>
+                <a:spcPts val="0"/>
+              </a:spcAft>
+              <a:defRPr sz="1700" b="1">
+                <a:solidFill>
+                  <a:srgbClr val="BE3B3B"/>
+                </a:solidFill>
+                <a:latin typeface="Noto Sans CJK KR"/>
+              </a:defRPr>
+            </a:pPr>
+            <a:r>
+              <a:t>4. 실제로 보는 곳</a:t>
+            </a:r>
+          </a:p>
+        </p:txBody>
+      </p:sp>
+      <p:sp>
+        <p:nvSpPr>
+          <p:cNvPr id="18" name="TextBox 17"/>
+          <p:cNvSpPr txBox="1"/>
+          <p:nvPr/>
+        </p:nvSpPr>
+        <p:spPr>
+          <a:xfrm>
+            <a:off x="6419088" y="4389120"/>
+            <a:ext cx="4846320" cy="941832"/>
+          </a:xfrm>
+          <a:prstGeom prst="rect">
+            <a:avLst/>
+          </a:prstGeom>
+          <a:noFill/>
+        </p:spPr>
+        <p:txBody>
+          <a:bodyPr wrap="square" lIns="73152" rIns="73152" tIns="36576" bIns="36576">
+            <a:spAutoFit/>
+          </a:bodyPr>
+          <a:lstStyle/>
+          <a:p>
+            <a:pPr algn="l">
+              <a:spcAft>
+                <a:spcPts val="0"/>
+              </a:spcAft>
+              <a:defRPr sz="1600" b="0">
+                <a:solidFill>
+                  <a:srgbClr val="122C4E"/>
+                </a:solidFill>
+                <a:latin typeface="Noto Sans CJK KR"/>
+              </a:defRPr>
+            </a:pPr>
+            <a:r>
+              <a:t>check_urdf의 root Link와 child 목록을 먼저 읽고 RViz RobotModel로 형태를 봅니다.</a:t>
+            </a:r>
+          </a:p>
+        </p:txBody>
+      </p:sp>
+      <p:sp>
+        <p:nvSpPr>
+          <p:cNvPr id="19" name="TextBox 18"/>
+          <p:cNvSpPr txBox="1"/>
+          <p:nvPr/>
+        </p:nvSpPr>
+        <p:spPr>
+          <a:xfrm>
+            <a:off x="777240" y="6172200"/>
+            <a:ext cx="10607040" cy="201168"/>
+          </a:xfrm>
+          <a:prstGeom prst="rect">
+            <a:avLst/>
+          </a:prstGeom>
+          <a:noFill/>
+        </p:spPr>
+        <p:txBody>
+          <a:bodyPr wrap="square" lIns="73152" rIns="73152" tIns="36576" bIns="36576">
+            <a:spAutoFit/>
+          </a:bodyPr>
+          <a:lstStyle/>
+          <a:p>
+            <a:pPr algn="ctr">
+              <a:spcAft>
+                <a:spcPts val="0"/>
+              </a:spcAft>
+              <a:defRPr sz="1200" b="1">
+                <a:solidFill>
+                  <a:srgbClr val="2A8B5A"/>
+                </a:solidFill>
+                <a:latin typeface="Noto Sans CJK KR"/>
+              </a:defRPr>
+            </a:pPr>
+            <a:r>
+              <a:t>다음 코드 슬라이드에서는 위의 태그/함수를 찾아 색으로 표시하며 한 줄씩 설명합니다.</a:t>
             </a:r>
           </a:p>
         </p:txBody>
@@ -11496,7 +13347,7 @@
               </a:defRPr>
             </a:pPr>
             <a:r>
-              <a:t>파일을 새로 만들고 저장한다 (1/2)</a:t>
+              <a:t>단일 URDF를 검사한다</a:t>
             </a:r>
           </a:p>
         </p:txBody>
@@ -11535,7 +13386,7 @@
               </a:defRPr>
             </a:pPr>
             <a:r>
-              <a:t>~/ros2_curri/agv_ws/src/agv_description/curriculum_stages/M05/agv.urdf</a:t>
+              <a:t>한 장에는 한 행동만 수행합니다.</a:t>
             </a:r>
           </a:p>
         </p:txBody>
@@ -11671,7 +13522,7 @@
               </a:defRPr>
             </a:pPr>
             <a:r>
-              <a:t>현재 단계 3/5    |    현재 폴더 ~/ros2_curri/agv_ws    |    현재 터미널</a:t>
+              <a:t>현재 단계 1/2    |    현재 폴더 ~/ros2_curri/agv_ws    |    현재 터미널</a:t>
             </a:r>
           </a:p>
         </p:txBody>
@@ -11684,8 +13535,8 @@
         </p:nvSpPr>
         <p:spPr>
           <a:xfrm>
-            <a:off x="658368" y="1627632"/>
-            <a:ext cx="10972800" cy="256032"/>
+            <a:off x="676656" y="1764792"/>
+            <a:ext cx="1828800" cy="347472"/>
           </a:xfrm>
           <a:prstGeom prst="rect">
             <a:avLst/>
@@ -11702,7 +13553,46 @@
               <a:spcAft>
                 <a:spcPts val="0"/>
               </a:spcAft>
-              <a:defRPr sz="1500" b="1">
+              <a:defRPr sz="1800" b="1">
+                <a:solidFill>
+                  <a:srgbClr val="225B9B"/>
+                </a:solidFill>
+                <a:latin typeface="Noto Sans CJK KR"/>
+              </a:defRPr>
+            </a:pPr>
+            <a:r>
+              <a:t>왜 하는가</a:t>
+            </a:r>
+          </a:p>
+        </p:txBody>
+      </p:sp>
+      <p:sp>
+        <p:nvSpPr>
+          <p:cNvPr id="8" name="TextBox 7"/>
+          <p:cNvSpPr txBox="1"/>
+          <p:nvPr/>
+        </p:nvSpPr>
+        <p:spPr>
+          <a:xfrm>
+            <a:off x="676656" y="2103120"/>
+            <a:ext cx="10789920" cy="512064"/>
+          </a:xfrm>
+          <a:prstGeom prst="rect">
+            <a:avLst/>
+          </a:prstGeom>
+          <a:noFill/>
+        </p:spPr>
+        <p:txBody>
+          <a:bodyPr wrap="square" lIns="73152" rIns="73152" tIns="36576" bIns="36576">
+            <a:spAutoFit/>
+          </a:bodyPr>
+          <a:lstStyle/>
+          <a:p>
+            <a:pPr algn="l">
+              <a:spcAft>
+                <a:spcPts val="0"/>
+              </a:spcAft>
+              <a:defRPr sz="2000" b="0">
                 <a:solidFill>
                   <a:srgbClr val="122C4E"/>
                 </a:solidFill>
@@ -11710,31 +13600,31 @@
               </a:defRPr>
             </a:pPr>
             <a:r>
-              <a:t>이번 단계: 파일의 전체 내용을 중간 생략 없이 작성합니다. 아래 줄 범위를 끝까지 입력하세요.</a:t>
-            </a:r>
-          </a:p>
-        </p:txBody>
-      </p:sp>
-      <p:sp>
-        <p:nvSpPr>
-          <p:cNvPr id="8" name="Rectangle 7"/>
+              <a:t>M05에서는 macro·property·xacro 없이 한 파일에 link와 joint를 직접 작성한다.</a:t>
+            </a:r>
+          </a:p>
+        </p:txBody>
+      </p:sp>
+      <p:sp>
+        <p:nvSpPr>
+          <p:cNvPr id="9" name="Rounded Rectangle 8"/>
           <p:cNvSpPr/>
           <p:nvPr/>
         </p:nvSpPr>
         <p:spPr>
           <a:xfrm>
-            <a:off x="658368" y="1956816"/>
-            <a:ext cx="10972800" cy="603504"/>
-          </a:xfrm>
-          <a:prstGeom prst="rect">
+            <a:off x="676656" y="2871216"/>
+            <a:ext cx="10835640" cy="2331720"/>
+          </a:xfrm>
+          <a:prstGeom prst="roundRect">
             <a:avLst/>
           </a:prstGeom>
           <a:solidFill>
-            <a:srgbClr val="F4F7FB"/>
+            <a:srgbClr val="1D232D"/>
           </a:solidFill>
           <a:ln>
             <a:solidFill>
-              <a:srgbClr val="F4F7FB"/>
+              <a:srgbClr val="1D232D"/>
             </a:solidFill>
           </a:ln>
         </p:spPr>
@@ -11760,121 +13650,19 @@
               <a:spcAft>
                 <a:spcPts val="0"/>
               </a:spcAft>
-              <a:defRPr sz="1400" b="0">
-                <a:solidFill>
-                  <a:srgbClr val="122C4E"/>
+              <a:defRPr sz="1600" b="0">
+                <a:solidFill>
+                  <a:srgbClr val="FFFFFF"/>
                 </a:solidFill>
                 <a:latin typeface="DejaVu Sans Mono"/>
               </a:defRPr>
             </a:pPr>
             <a:r>
-              <a:t>파일 생성: mkdir -p ~/ros2_curri/agv_ws/src/agv_description/curriculum_stages/M05</a:t>
+              <a:t>cd ~/ros2_curri/agv_ws</a:t>
             </a:r>
             <a:br/>
             <a:r>
-              <a:t>파일 열기: nano ~/ros2_curri/agv_ws/src/agv_description/curriculum_stages/M05/agv.urdf</a:t>
-            </a:r>
-          </a:p>
-        </p:txBody>
-      </p:sp>
-      <p:sp>
-        <p:nvSpPr>
-          <p:cNvPr id="9" name="Rectangle 8"/>
-          <p:cNvSpPr/>
-          <p:nvPr/>
-        </p:nvSpPr>
-        <p:spPr>
-          <a:xfrm>
-            <a:off x="658368" y="2706624"/>
-            <a:ext cx="10972800" cy="3364992"/>
-          </a:xfrm>
-          <a:prstGeom prst="rect">
-            <a:avLst/>
-          </a:prstGeom>
-          <a:solidFill>
-            <a:srgbClr val="1D232D"/>
-          </a:solidFill>
-          <a:ln>
-            <a:solidFill>
-              <a:srgbClr val="1D232D"/>
-            </a:solidFill>
-          </a:ln>
-        </p:spPr>
-        <p:style>
-          <a:lnRef idx="1">
-            <a:schemeClr val="accent1"/>
-          </a:lnRef>
-          <a:fillRef idx="3">
-            <a:schemeClr val="accent1"/>
-          </a:fillRef>
-          <a:effectRef idx="2">
-            <a:schemeClr val="accent1"/>
-          </a:effectRef>
-          <a:fontRef idx="minor">
-            <a:schemeClr val="lt1"/>
-          </a:fontRef>
-        </p:style>
-        <p:txBody>
-          <a:bodyPr rtlCol="0" anchor="ctr" wrap="square" lIns="164592" rIns="164592" tIns="109728" bIns="36576"/>
-          <a:lstStyle/>
-          <a:p>
-            <a:pPr algn="l">
-              <a:spcAft>
-                <a:spcPts val="0"/>
-              </a:spcAft>
-              <a:defRPr sz="1400" b="0">
-                <a:solidFill>
-                  <a:srgbClr val="FFFFFF"/>
-                </a:solidFill>
-                <a:latin typeface="DejaVu Sans Mono"/>
-              </a:defRPr>
-            </a:pPr>
-            <a:r>
-              <a:t>&lt;?xml version="1.0"?&gt;</a:t>
-            </a:r>
-            <a:br/>
-            <a:r>
-              <a:t>&lt;robot name="agv_m05"&gt;</a:t>
-            </a:r>
-            <a:br/>
-            <a:r>
-              <a:t>  &lt;link name="base_link"&gt;&lt;visual&gt;&lt;origin xyz="0 0 0.16"/&gt;&lt;geometry&gt;&lt;box size="0.60 0.42 0.16"/&gt;&lt;/geometry&gt;&lt;/visual&gt;&lt;/link&gt;</a:t>
-            </a:r>
-            <a:br/>
-            <a:r>
-              <a:t>  &lt;link name="left_wheel_link"&gt;&lt;visual&gt;&lt;origin rpy="1.5708 0 0"/&gt;&lt;geometry&gt;&lt;cylinder radius="0.08" length="0.05"/&gt;&lt;/geometry&gt;&lt;/visual&gt;&lt;/link&gt;</a:t>
-            </a:r>
-            <a:br/>
-            <a:r>
-              <a:t>  &lt;link name="right_wheel_link"&gt;&lt;visual&gt;&lt;origin rpy="1.5708 0 0"/&gt;&lt;geometry&gt;&lt;cylinder radius="0.08" length="0.05"/&gt;&lt;/geometry&gt;&lt;/visual&gt;&lt;/link&gt;</a:t>
-            </a:r>
-            <a:br/>
-            <a:r>
-              <a:t>  &lt;link name="caster_link"&gt;&lt;visual&gt;&lt;geometry&gt;&lt;sphere radius="0.04"/&gt;&lt;/geometry&gt;&lt;/visual&gt;&lt;/link&gt;</a:t>
-            </a:r>
-            <a:br/>
-            <a:r>
-              <a:t>  &lt;link name="camera_link"/&gt;&lt;link name="lidar_link"/&gt;&lt;link name="imu_link"/&gt;</a:t>
-            </a:r>
-            <a:br/>
-            <a:r>
-              <a:t>  &lt;joint name="left_wheel_joint" type="continuous"&gt;&lt;parent link="base_link"/&gt;&lt;child link="left_wheel_link"/&gt;&lt;origin xyz="0 0.19 0.08"/&gt;&lt;axis xyz="0 1 0"/&gt;&lt;/joint&gt;</a:t>
-            </a:r>
-            <a:br/>
-            <a:r>
-              <a:t>  &lt;joint name="right_wheel_joint" type="continuous"&gt;&lt;parent link="base_link"/&gt;&lt;child link="right_wheel_link"/&gt;&lt;origin xyz="0 -0.19 0.08"/&gt;&lt;axis xyz="0 1 0"/&gt;&lt;/joint&gt;</a:t>
-            </a:r>
-            <a:br/>
-            <a:r>
-              <a:t>  &lt;joint name="caster_joint" type="fixed"&gt;&lt;parent link="base_link"/&gt;&lt;child link="caster_link"/&gt;&lt;origin xyz="-0.24 0 0.04"/&gt;&lt;/joint&gt;</a:t>
-            </a:r>
-            <a:br/>
-            <a:r>
-              <a:t>  &lt;joint name="camera_joint" type="fixed"&gt;&lt;parent link="base_link"/&gt;&lt;child link="camera_link"/&gt;&lt;origin xyz="0.30 0 0.26"/&gt;&lt;/joint&gt;</a:t>
-            </a:r>
-            <a:br/>
-            <a:r>
-              <a:t>  &lt;joint name="lidar_joint" type="fixed"&gt;&lt;parent link="base_link"/&gt;&lt;child link="lidar_link"/&gt;&lt;origin xyz="0.12 0 0.29"/&gt;&lt;/joint&gt;</a:t>
+              <a:t>check_urdf src/agv_description/curriculum_stages/M05/agv.urdf</a:t>
             </a:r>
           </a:p>
         </p:txBody>
@@ -11887,8 +13675,8 @@
         </p:nvSpPr>
         <p:spPr>
           <a:xfrm>
-            <a:off x="749808" y="6181344"/>
-            <a:ext cx="10789920" cy="201168"/>
+            <a:off x="768096" y="5468112"/>
+            <a:ext cx="1143000" cy="256032"/>
           </a:xfrm>
           <a:prstGeom prst="rect">
             <a:avLst/>
@@ -11905,15 +13693,54 @@
               <a:spcAft>
                 <a:spcPts val="0"/>
               </a:spcAft>
-              <a:defRPr sz="1000" b="0">
-                <a:solidFill>
-                  <a:srgbClr val="5C6672"/>
-                </a:solidFill>
-                <a:latin typeface="Noto Sans CJK KR"/>
-              </a:defRPr>
-            </a:pPr>
-            <a:r>
-              <a:t>파일 전체 1/2 · 이 슬라이드 다음에 같은 파일의 나머지 줄이 이어집니다.</a:t>
+              <a:defRPr sz="1800" b="1">
+                <a:solidFill>
+                  <a:srgbClr val="2A8B5A"/>
+                </a:solidFill>
+                <a:latin typeface="Noto Sans CJK KR"/>
+              </a:defRPr>
+            </a:pPr>
+            <a:r>
+              <a:t>확인</a:t>
+            </a:r>
+          </a:p>
+        </p:txBody>
+      </p:sp>
+      <p:sp>
+        <p:nvSpPr>
+          <p:cNvPr id="11" name="TextBox 10"/>
+          <p:cNvSpPr txBox="1"/>
+          <p:nvPr/>
+        </p:nvSpPr>
+        <p:spPr>
+          <a:xfrm>
+            <a:off x="768096" y="5742432"/>
+            <a:ext cx="10561320" cy="347472"/>
+          </a:xfrm>
+          <a:prstGeom prst="rect">
+            <a:avLst/>
+          </a:prstGeom>
+          <a:noFill/>
+        </p:spPr>
+        <p:txBody>
+          <a:bodyPr wrap="square" lIns="73152" rIns="73152" tIns="36576" bIns="36576">
+            <a:spAutoFit/>
+          </a:bodyPr>
+          <a:lstStyle/>
+          <a:p>
+            <a:pPr algn="l">
+              <a:spcAft>
+                <a:spcPts val="0"/>
+              </a:spcAft>
+              <a:defRPr sz="1800" b="0">
+                <a:solidFill>
+                  <a:srgbClr val="122C4E"/>
+                </a:solidFill>
+                <a:latin typeface="Noto Sans CJK KR"/>
+              </a:defRPr>
+            </a:pPr>
+            <a:r>
+              <a:t>명령의 출력에서 topic·frame·파일 이름 또는 성공 메시지를 찾으면 이 단계가 완료됩니다.</a:t>
             </a:r>
           </a:p>
         </p:txBody>

--- a/blocks/B_robot_build/M05_urdf_basic_model/M05_URDF로_기본_AGV_제작.pptx
+++ b/blocks/B_robot_build/M05_urdf_basic_model/M05_URDF로_기본_AGV_제작.pptx
@@ -25,6 +25,10 @@
     <p:sldId id="273" r:id="rId25"/>
     <p:sldId id="274" r:id="rId26"/>
     <p:sldId id="275" r:id="rId27"/>
+    <p:sldId id="276" r:id="rId28"/>
+    <p:sldId id="277" r:id="rId29"/>
+    <p:sldId id="278" r:id="rId30"/>
+    <p:sldId id="279" r:id="rId31"/>
   </p:sldIdLst>
   <p:sldSz cx="12191999" cy="6858000" type="screen4x3"/>
   <p:notesSz cx="6858000" cy="9144000"/>
@@ -611,27 +615,17 @@
           <a:lstStyle/>
           <a:p>
             <a:r>
-              <a:t>[설명] RobotModel에는 단일 URDF 텍스트를 robot_description으로 넣고 TF를 함께 확인한다.</a:t>
-            </a:r>
-          </a:p>
-          <a:p>
-            <a:r>
-              <a:t>[실행] ros2 run robot_state_publisher robot_state_publisher \</a:t>
-            </a:r>
-          </a:p>
-          <a:p>
-            <a:r>
-              <a:t>  --ros-args -p robot_description:="$(cat src/agv_description/curriculum_stages/M05/agv.urdf)"</a:t>
-            </a:r>
-          </a:p>
-          <a:p>
-            <a:r>
-              <a:t># 새 터미널: rviz2 → Add → RobotModel, TF</a:t>
-            </a:r>
-          </a:p>
-          <a:p>
-            <a:r>
-              <a:t>[확인] 명령 출력에서 슬라이드의 확인 항목을 찾는다.</a:t>
+              <a:t>[설명] URDF는 로봇의 부품표가 아니라, ‘어떤 부품을 어느 frame에 고정할지’ 적는 조립도입니다.</a:t>
+            </a:r>
+          </a:p>
+          <a:p>
+            <a:r>
+              <a:t>[실행] 슬라이드의 명령 또는 파일 작성 단계를 진행한다.</a:t>
+            </a:r>
+          </a:p>
+          <a:p>
+            <a:r>
+              <a:t>[확인] check_urdf의 root Link와 child 목록을 먼저 읽고 RViz RobotModel로 형태를 봅니다.</a:t>
             </a:r>
           </a:p>
           <a:p>
@@ -711,17 +705,27 @@
           <a:lstStyle/>
           <a:p>
             <a:r>
-              <a:t>[설명] ~/ros2_curri/agv_ws/src/agv_description/curriculum_stages/M05/agv.urdf의 전체 파일을 1/2 구간으로 작성한다.</a:t>
-            </a:r>
-          </a:p>
-          <a:p>
-            <a:r>
-              <a:t>[실행] nano ~/ros2_curri/agv_ws/src/agv_description/curriculum_stages/M05/agv.urdf</a:t>
-            </a:r>
-          </a:p>
-          <a:p>
-            <a:r>
-              <a:t>[확인] 코드를 저장하고 다음 코드 슬라이드 또는 build 단계로 이동한다.</a:t>
+              <a:t>[설명] URDF는 일반 폴더가 아니라 ROS package 안에 넣어야 RViz·launch가 찾을 수 있습니다.</a:t>
+            </a:r>
+          </a:p>
+          <a:p>
+            <a:r>
+              <a:t>[실행] cd ~/ros2_curri/my_agv_ws/src</a:t>
+            </a:r>
+          </a:p>
+          <a:p>
+            <a:r>
+              <a:t>ros2 pkg create --build-type ament_python agv_description</a:t>
+            </a:r>
+          </a:p>
+          <a:p>
+            <a:r>
+              <a:t>mkdir -p agv_description/curriculum_stages/M05</a:t>
+            </a:r>
+          </a:p>
+          <a:p>
+            <a:r>
+              <a:t>[확인] src 아래에 새 package 폴더와 package.xml이 생성되었는지 확인한다.</a:t>
             </a:r>
           </a:p>
           <a:p>
@@ -731,7 +735,7 @@
           </a:p>
           <a:p>
             <a:r>
-              <a:t>[오류] 들여쓰기·XML 태그·따옴표가 슬라이드와 정확히 같은지 확인한다.</a:t>
+              <a:t>[오류] 오류가 나면 현재 폴더, source, 파일 경로를 먼저 확인한다.</a:t>
             </a:r>
           </a:p>
         </p:txBody>
@@ -801,17 +805,22 @@
           <a:lstStyle/>
           <a:p>
             <a:r>
-              <a:t>[설명] ~/ros2_curri/agv_ws/src/agv_description/curriculum_stages/M05/agv.urdf의 전체 파일을 2/2 구간으로 작성한다.</a:t>
-            </a:r>
-          </a:p>
-          <a:p>
-            <a:r>
-              <a:t>[실행] nano ~/ros2_curri/agv_ws/src/agv_description/curriculum_stages/M05/agv.urdf</a:t>
-            </a:r>
-          </a:p>
-          <a:p>
-            <a:r>
-              <a:t>[확인] 코드를 저장하고 다음 코드 슬라이드 또는 build 단계로 이동한다.</a:t>
+              <a:t>[설명] 몸체·두 바퀴·caster·camera/lidar/imu frame을 link와 joint로 조립한 기본 AGV</a:t>
+            </a:r>
+          </a:p>
+          <a:p>
+            <a:r>
+              <a:t>[실행] mkdir -p ~/ros2_curri/my_agv_ws/src/agv_description/curriculum_stages/M05</a:t>
+            </a:r>
+          </a:p>
+          <a:p>
+            <a:r>
+              <a:t>nano ~/ros2_curri/my_agv_ws/src/agv_description/curriculum_stages/M05/agv.urdf</a:t>
+            </a:r>
+          </a:p>
+          <a:p>
+            <a:r>
+              <a:t>[확인] 빈 파일을 연 뒤 다음 코드 입력 슬라이드로 간다.</a:t>
             </a:r>
           </a:p>
           <a:p>
@@ -821,7 +830,7 @@
           </a:p>
           <a:p>
             <a:r>
-              <a:t>[오류] 들여쓰기·XML 태그·따옴표가 슬라이드와 정확히 같은지 확인한다.</a:t>
+              <a:t>[오류] 오류가 나면 현재 폴더, source, 파일 경로를 먼저 확인한다.</a:t>
             </a:r>
           </a:p>
         </p:txBody>
@@ -891,27 +900,17 @@
           <a:lstStyle/>
           <a:p>
             <a:r>
-              <a:t>[설명] build/source/run을 생략 없이 실행한다.</a:t>
-            </a:r>
-          </a:p>
-          <a:p>
-            <a:r>
-              <a:t>[실행] cd ~/ros2_curri/agv_ws</a:t>
-            </a:r>
-          </a:p>
-          <a:p>
-            <a:r>
-              <a:t>check_urdf src/agv_description/curriculum_stages/M05/agv.urdf</a:t>
-            </a:r>
-          </a:p>
-          <a:p>
-            <a:r>
-              <a:t># 다음 M06에서 처음으로 xacro를 사용한다.</a:t>
-            </a:r>
-          </a:p>
-          <a:p>
-            <a:r>
-              <a:t>[확인] RobotModel과 TF에서 base, 두 wheel, camera, lidar, imu 연결을 확인한다.</a:t>
+              <a:t>[설명] ~/ros2_curri/my_agv_ws/src/agv_description/curriculum_stages/M05/agv.urdf의 1/2 구현 블록을 직접 입력한다.</a:t>
+            </a:r>
+          </a:p>
+          <a:p>
+            <a:r>
+              <a:t>[실행] nano ~/ros2_curri/my_agv_ws/src/agv_description/curriculum_stages/M05/agv.urdf</a:t>
+            </a:r>
+          </a:p>
+          <a:p>
+            <a:r>
+              <a:t>[확인] 저장 뒤 다음 구현 블록으로 이동한다.</a:t>
             </a:r>
           </a:p>
           <a:p>
@@ -921,7 +920,7 @@
           </a:p>
           <a:p>
             <a:r>
-              <a:t>[오류] 오류가 나면 현재 폴더, source, 파일 경로를 먼저 확인한다.</a:t>
+              <a:t>[오류] 들여쓰기·XML 태그·따옴표가 슬라이드와 정확히 같은지 확인한다.</a:t>
             </a:r>
           </a:p>
         </p:txBody>
@@ -991,17 +990,17 @@
           <a:lstStyle/>
           <a:p>
             <a:r>
-              <a:t>[설명] 실제 Ubuntu/ROS 2 환경에서 생성한 검증 화면이다.</a:t>
-            </a:r>
-          </a:p>
-          <a:p>
-            <a:r>
-              <a:t>[실행] 슬라이드의 명령 또는 파일 작성 단계를 진행한다.</a:t>
-            </a:r>
-          </a:p>
-          <a:p>
-            <a:r>
-              <a:t>[확인] ① 명령/설정  ② 정상 출력 또는 화면  ③ 다음 검증 명령으로 재확인</a:t>
+              <a:t>[설명] ~/ros2_curri/my_agv_ws/src/agv_description/curriculum_stages/M05/agv.urdf의 2/2 구현 블록을 직접 입력한다.</a:t>
+            </a:r>
+          </a:p>
+          <a:p>
+            <a:r>
+              <a:t>[실행] nano ~/ros2_curri/my_agv_ws/src/agv_description/curriculum_stages/M05/agv.urdf</a:t>
+            </a:r>
+          </a:p>
+          <a:p>
+            <a:r>
+              <a:t>[확인] 저장 뒤 다음 구현 블록으로 이동한다.</a:t>
             </a:r>
           </a:p>
           <a:p>
@@ -1011,7 +1010,7 @@
           </a:p>
           <a:p>
             <a:r>
-              <a:t>[오류] 오류가 나면 현재 폴더, source, 파일 경로를 먼저 확인한다.</a:t>
+              <a:t>[오류] 들여쓰기·XML 태그·따옴표가 슬라이드와 정확히 같은지 확인한다.</a:t>
             </a:r>
           </a:p>
         </p:txBody>
@@ -1081,17 +1080,22 @@
           <a:lstStyle/>
           <a:p>
             <a:r>
-              <a:t>[설명] 실제 Ubuntu/ROS 2 환경에서 생성한 검증 화면이다.</a:t>
-            </a:r>
-          </a:p>
-          <a:p>
-            <a:r>
-              <a:t>[실행] 슬라이드의 명령 또는 파일 작성 단계를 진행한다.</a:t>
-            </a:r>
-          </a:p>
-          <a:p>
-            <a:r>
-              <a:t>[확인] root Link=base_link와 wheel·camera·lidar·imu child 이름을 찾습니다.</a:t>
+              <a:t>[설명] M05에서는 macro·property·xacro 없이 한 파일에 link와 joint를 직접 작성한다.</a:t>
+            </a:r>
+          </a:p>
+          <a:p>
+            <a:r>
+              <a:t>[실행] cd ~/ros2_curri/my_agv_ws</a:t>
+            </a:r>
+          </a:p>
+          <a:p>
+            <a:r>
+              <a:t>check_urdf src/agv_description/curriculum_stages/M05/agv.urdf</a:t>
+            </a:r>
+          </a:p>
+          <a:p>
+            <a:r>
+              <a:t>[확인] 명령 출력에서 슬라이드의 확인 항목을 찾는다.</a:t>
             </a:r>
           </a:p>
           <a:p>
@@ -1171,22 +1175,27 @@
           <a:lstStyle/>
           <a:p>
             <a:r>
-              <a:t>[설명] 검증 명령은 GUI 결과와 별도로 실행해 재현 가능한 완료 기준을 만든다.</a:t>
-            </a:r>
-          </a:p>
-          <a:p>
-            <a:r>
-              <a:t>[실행] check_urdf ~/ros2_curri/agv_ws/src/agv_description/curriculum_stages/M05/agv.urdf</a:t>
-            </a:r>
-          </a:p>
-          <a:p>
-            <a:r>
-              <a:t>rg -n '&lt;xacro:|&lt;link |&lt;joint ' ~/ros2_curri/agv_ws/src/agv_description/curriculum_stages/M05/agv.urdf</a:t>
-            </a:r>
-          </a:p>
-          <a:p>
-            <a:r>
-              <a:t>[확인] RobotModel과 TF에서 base, 두 wheel, camera, lidar, imu 연결을 확인한다.</a:t>
+              <a:t>[설명] RobotModel에는 단일 URDF 텍스트를 robot_description으로 넣고 TF를 함께 확인한다.</a:t>
+            </a:r>
+          </a:p>
+          <a:p>
+            <a:r>
+              <a:t>[실행] ros2 run robot_state_publisher robot_state_publisher \</a:t>
+            </a:r>
+          </a:p>
+          <a:p>
+            <a:r>
+              <a:t>  --ros-args -p robot_description:="$(cat src/agv_description/curriculum_stages/M05/agv.urdf)"</a:t>
+            </a:r>
+          </a:p>
+          <a:p>
+            <a:r>
+              <a:t># 새 터미널: rviz2 → Add → RobotModel, TF</a:t>
+            </a:r>
+          </a:p>
+          <a:p>
+            <a:r>
+              <a:t>[확인] 명령 출력에서 슬라이드의 확인 항목을 찾는다.</a:t>
             </a:r>
           </a:p>
           <a:p>
@@ -1266,17 +1275,27 @@
           <a:lstStyle/>
           <a:p>
             <a:r>
-              <a:t>[설명] 오류를 대신 해결하지 말고 증상부터 우선 확인 순서대로 교육생이 실행하게 한다.</a:t>
-            </a:r>
-          </a:p>
-          <a:p>
-            <a:r>
-              <a:t>[실행] 슬라이드의 명령 또는 파일 작성 단계를 진행한다.</a:t>
-            </a:r>
-          </a:p>
-          <a:p>
-            <a:r>
-              <a:t>[확인] 수정 뒤 첫 검증 명령을 다시 실행한다.</a:t>
+              <a:t>[설명] build/source/run을 생략 없이 실행한다.</a:t>
+            </a:r>
+          </a:p>
+          <a:p>
+            <a:r>
+              <a:t>[실행] cd ~/ros2_curri/my_agv_ws</a:t>
+            </a:r>
+          </a:p>
+          <a:p>
+            <a:r>
+              <a:t>check_urdf src/agv_description/curriculum_stages/M05/agv.urdf</a:t>
+            </a:r>
+          </a:p>
+          <a:p>
+            <a:r>
+              <a:t># 다음 M06에서 처음으로 xacro를 사용한다.</a:t>
+            </a:r>
+          </a:p>
+          <a:p>
+            <a:r>
+              <a:t>[확인] RobotModel과 TF에서 base, 두 wheel, camera, lidar, imu 연결을 확인한다.</a:t>
             </a:r>
           </a:p>
           <a:p>
@@ -1286,7 +1305,7 @@
           </a:p>
           <a:p>
             <a:r>
-              <a:t>[오류] 슬라이드의 두 대표 오류를 먼저 사용한다.</a:t>
+              <a:t>[오류] 오류가 나면 현재 폴더, source, 파일 경로를 먼저 확인한다.</a:t>
             </a:r>
           </a:p>
         </p:txBody>
@@ -1356,7 +1375,7 @@
           <a:lstStyle/>
           <a:p>
             <a:r>
-              <a:t>[설명] 교육생이 직접 한 값만 바꿔 원인과 결과를 연결하게 한다.</a:t>
+              <a:t>[설명] 실제 Ubuntu/ROS 2 환경에서 생성한 검증 화면이다.</a:t>
             </a:r>
           </a:p>
           <a:p>
@@ -1366,7 +1385,7 @@
           </a:p>
           <a:p>
             <a:r>
-              <a:t>[확인] 원래 값과 변경 값을 모두 기록한다.</a:t>
+              <a:t>[확인] ① 명령/설정  ② 정상 출력 또는 화면  ③ 다음 검증 명령으로 재확인</a:t>
             </a:r>
           </a:p>
           <a:p>
@@ -1446,17 +1465,22 @@
           <a:lstStyle/>
           <a:p>
             <a:r>
-              <a:t>[설명] 교육생이 Complete·캡처·로그를 저장했는지 확인하고 다음 모듈의 시작 상태를 읽는다.</a:t>
-            </a:r>
-          </a:p>
-          <a:p>
-            <a:r>
-              <a:t>[실행] 슬라이드의 명령 또는 파일 작성 단계를 진행한다.</a:t>
-            </a:r>
-          </a:p>
-          <a:p>
-            <a:r>
-              <a:t>[확인] M06 Xacro 모듈화 시작 조건을 말할 수 있다.</a:t>
+              <a:t>[설명] 검증 명령은 GUI 결과와 별도로 실행해 재현 가능한 완료 기준을 만든다.</a:t>
+            </a:r>
+          </a:p>
+          <a:p>
+            <a:r>
+              <a:t>[실행] check_urdf ~/ros2_curri/my_agv_ws/src/agv_description/curriculum_stages/M05/agv.urdf</a:t>
+            </a:r>
+          </a:p>
+          <a:p>
+            <a:r>
+              <a:t>rg -n '&lt;xacro:|&lt;link |&lt;joint ' ~/ros2_curri/my_agv_ws/src/agv_description/curriculum_stages/M05/agv.urdf</a:t>
+            </a:r>
+          </a:p>
+          <a:p>
+            <a:r>
+              <a:t>[확인] RobotModel과 TF에서 base, 두 wheel, camera, lidar, imu 연결을 확인한다.</a:t>
             </a:r>
           </a:p>
           <a:p>
@@ -1626,6 +1650,386 @@
           <a:lstStyle/>
           <a:p>
             <a:r>
+              <a:t>[설명] 오류를 대신 해결하지 말고 증상부터 우선 확인 순서대로 교육생이 실행하게 한다.</a:t>
+            </a:r>
+          </a:p>
+          <a:p>
+            <a:r>
+              <a:t>[실행] 슬라이드의 명령 또는 파일 작성 단계를 진행한다.</a:t>
+            </a:r>
+          </a:p>
+          <a:p>
+            <a:r>
+              <a:t>[확인] 수정 뒤 첫 검증 명령을 다시 실행한다.</a:t>
+            </a:r>
+          </a:p>
+          <a:p>
+            <a:r>
+              <a:t>[멈춤] 교육생이 현재 체크포인트를 통과할 때까지 기다린다.</a:t>
+            </a:r>
+          </a:p>
+          <a:p>
+            <a:r>
+              <a:t>[오류] 슬라이드의 두 대표 오류를 먼저 사용한다.</a:t>
+            </a:r>
+          </a:p>
+        </p:txBody>
+      </p:sp>
+      <p:sp>
+        <p:nvSpPr>
+          <p:cNvPr id="4" name="Slide Number Placeholder 3"/>
+          <p:cNvSpPr>
+            <a:spLocks noGrp="1"/>
+          </p:cNvSpPr>
+          <p:nvPr>
+            <p:ph type="sldNum" idx="5" sz="quarter"/>
+          </p:nvPr>
+        </p:nvSpPr>
+        <p:spPr/>
+      </p:sp>
+    </p:spTree>
+  </p:cSld>
+  <p:clrMapOvr>
+    <a:masterClrMapping/>
+  </p:clrMapOvr>
+</p:notes>
+</file>
+
+<file path=ppt/notesSlides/notesSlide21.xml><?xml version="1.0" encoding="utf-8"?>
+<p:notes xmlns:a="http://schemas.openxmlformats.org/drawingml/2006/main" xmlns:p="http://schemas.openxmlformats.org/presentationml/2006/main" xmlns:r="http://schemas.openxmlformats.org/officeDocument/2006/relationships">
+  <p:cSld>
+    <p:spTree>
+      <p:nvGrpSpPr>
+        <p:cNvPr id="1" name=""/>
+        <p:cNvGrpSpPr/>
+        <p:nvPr/>
+      </p:nvGrpSpPr>
+      <p:grpSpPr>
+        <a:xfrm>
+          <a:off x="0" y="0"/>
+          <a:ext cx="0" cy="0"/>
+          <a:chOff x="0" y="0"/>
+          <a:chExt cx="0" cy="0"/>
+        </a:xfrm>
+      </p:grpSpPr>
+      <p:sp>
+        <p:nvSpPr>
+          <p:cNvPr id="2" name="Slide Image Placeholder 1"/>
+          <p:cNvSpPr>
+            <a:spLocks noGrp="1"/>
+          </p:cNvSpPr>
+          <p:nvPr>
+            <p:ph type="sldImg" idx="2"/>
+          </p:nvPr>
+        </p:nvSpPr>
+        <p:spPr/>
+      </p:sp>
+      <p:sp>
+        <p:nvSpPr>
+          <p:cNvPr id="3" name="Notes Placeholder 2"/>
+          <p:cNvSpPr>
+            <a:spLocks noGrp="1"/>
+          </p:cNvSpPr>
+          <p:nvPr>
+            <p:ph type="body" idx="3" sz="quarter"/>
+          </p:nvPr>
+        </p:nvSpPr>
+        <p:spPr/>
+        <p:txBody>
+          <a:bodyPr/>
+          <a:lstStyle/>
+          <a:p>
+            <a:r>
+              <a:t>[설명] Complete는 정답 복사본이 아니라 막혔을 때 비교·복구하는 안전망이다.</a:t>
+            </a:r>
+          </a:p>
+          <a:p>
+            <a:r>
+              <a:t>[실행] cd ~/ros2_curri</a:t>
+            </a:r>
+          </a:p>
+          <a:p>
+            <a:r>
+              <a:t>diff -ru my_agv_ws/src blocks/B_robot_build/M05_urdf_basic_model/complete/agv_ws/src || true</a:t>
+            </a:r>
+          </a:p>
+          <a:p>
+            <a:r>
+              <a:t>cp -a my_agv_ws/src my_agv_ws/src_before_M05</a:t>
+            </a:r>
+          </a:p>
+          <a:p>
+            <a:r>
+              <a:t>cp -a blocks/B_robot_build/M05_urdf_basic_model/complete/agv_ws/src/. my_agv_ws/src/</a:t>
+            </a:r>
+          </a:p>
+          <a:p>
+            <a:r>
+              <a:t>cd my_agv_ws &amp;&amp; colcon build --symlink-install &amp;&amp; source install/setup.bash</a:t>
+            </a:r>
+          </a:p>
+          <a:p>
+            <a:r>
+              <a:t>[확인] diff에서 내 파일과 Complete의 차이를 설명할 수 있다.</a:t>
+            </a:r>
+          </a:p>
+          <a:p>
+            <a:r>
+              <a:t>[멈춤] 교육생이 현재 체크포인트를 통과할 때까지 기다린다.</a:t>
+            </a:r>
+          </a:p>
+          <a:p>
+            <a:r>
+              <a:t>[오류] 오류가 나면 현재 폴더, source, 파일 경로를 먼저 확인한다.</a:t>
+            </a:r>
+          </a:p>
+        </p:txBody>
+      </p:sp>
+      <p:sp>
+        <p:nvSpPr>
+          <p:cNvPr id="4" name="Slide Number Placeholder 3"/>
+          <p:cNvSpPr>
+            <a:spLocks noGrp="1"/>
+          </p:cNvSpPr>
+          <p:nvPr>
+            <p:ph type="sldNum" idx="5" sz="quarter"/>
+          </p:nvPr>
+        </p:nvSpPr>
+        <p:spPr/>
+      </p:sp>
+    </p:spTree>
+  </p:cSld>
+  <p:clrMapOvr>
+    <a:masterClrMapping/>
+  </p:clrMapOvr>
+</p:notes>
+</file>
+
+<file path=ppt/notesSlides/notesSlide22.xml><?xml version="1.0" encoding="utf-8"?>
+<p:notes xmlns:a="http://schemas.openxmlformats.org/drawingml/2006/main" xmlns:p="http://schemas.openxmlformats.org/presentationml/2006/main" xmlns:r="http://schemas.openxmlformats.org/officeDocument/2006/relationships">
+  <p:cSld>
+    <p:spTree>
+      <p:nvGrpSpPr>
+        <p:cNvPr id="1" name=""/>
+        <p:cNvGrpSpPr/>
+        <p:nvPr/>
+      </p:nvGrpSpPr>
+      <p:grpSpPr>
+        <a:xfrm>
+          <a:off x="0" y="0"/>
+          <a:ext cx="0" cy="0"/>
+          <a:chOff x="0" y="0"/>
+          <a:chExt cx="0" cy="0"/>
+        </a:xfrm>
+      </p:grpSpPr>
+      <p:sp>
+        <p:nvSpPr>
+          <p:cNvPr id="2" name="Slide Image Placeholder 1"/>
+          <p:cNvSpPr>
+            <a:spLocks noGrp="1"/>
+          </p:cNvSpPr>
+          <p:nvPr>
+            <p:ph type="sldImg" idx="2"/>
+          </p:nvPr>
+        </p:nvSpPr>
+        <p:spPr/>
+      </p:sp>
+      <p:sp>
+        <p:nvSpPr>
+          <p:cNvPr id="3" name="Notes Placeholder 2"/>
+          <p:cNvSpPr>
+            <a:spLocks noGrp="1"/>
+          </p:cNvSpPr>
+          <p:nvPr>
+            <p:ph type="body" idx="3" sz="quarter"/>
+          </p:nvPr>
+        </p:nvSpPr>
+        <p:spPr/>
+        <p:txBody>
+          <a:bodyPr/>
+          <a:lstStyle/>
+          <a:p>
+            <a:r>
+              <a:t>[설명] 교육생이 직접 한 값만 바꿔 원인과 결과를 연결하게 한다.</a:t>
+            </a:r>
+          </a:p>
+          <a:p>
+            <a:r>
+              <a:t>[실행] 슬라이드의 명령 또는 파일 작성 단계를 진행한다.</a:t>
+            </a:r>
+          </a:p>
+          <a:p>
+            <a:r>
+              <a:t>[확인] 원래 값과 변경 값을 모두 기록한다.</a:t>
+            </a:r>
+          </a:p>
+          <a:p>
+            <a:r>
+              <a:t>[멈춤] 교육생이 현재 체크포인트를 통과할 때까지 기다린다.</a:t>
+            </a:r>
+          </a:p>
+          <a:p>
+            <a:r>
+              <a:t>[오류] 오류가 나면 현재 폴더, source, 파일 경로를 먼저 확인한다.</a:t>
+            </a:r>
+          </a:p>
+        </p:txBody>
+      </p:sp>
+      <p:sp>
+        <p:nvSpPr>
+          <p:cNvPr id="4" name="Slide Number Placeholder 3"/>
+          <p:cNvSpPr>
+            <a:spLocks noGrp="1"/>
+          </p:cNvSpPr>
+          <p:nvPr>
+            <p:ph type="sldNum" idx="5" sz="quarter"/>
+          </p:nvPr>
+        </p:nvSpPr>
+        <p:spPr/>
+      </p:sp>
+    </p:spTree>
+  </p:cSld>
+  <p:clrMapOvr>
+    <a:masterClrMapping/>
+  </p:clrMapOvr>
+</p:notes>
+</file>
+
+<file path=ppt/notesSlides/notesSlide23.xml><?xml version="1.0" encoding="utf-8"?>
+<p:notes xmlns:a="http://schemas.openxmlformats.org/drawingml/2006/main" xmlns:p="http://schemas.openxmlformats.org/presentationml/2006/main" xmlns:r="http://schemas.openxmlformats.org/officeDocument/2006/relationships">
+  <p:cSld>
+    <p:spTree>
+      <p:nvGrpSpPr>
+        <p:cNvPr id="1" name=""/>
+        <p:cNvGrpSpPr/>
+        <p:nvPr/>
+      </p:nvGrpSpPr>
+      <p:grpSpPr>
+        <a:xfrm>
+          <a:off x="0" y="0"/>
+          <a:ext cx="0" cy="0"/>
+          <a:chOff x="0" y="0"/>
+          <a:chExt cx="0" cy="0"/>
+        </a:xfrm>
+      </p:grpSpPr>
+      <p:sp>
+        <p:nvSpPr>
+          <p:cNvPr id="2" name="Slide Image Placeholder 1"/>
+          <p:cNvSpPr>
+            <a:spLocks noGrp="1"/>
+          </p:cNvSpPr>
+          <p:nvPr>
+            <p:ph type="sldImg" idx="2"/>
+          </p:nvPr>
+        </p:nvSpPr>
+        <p:spPr/>
+      </p:sp>
+      <p:sp>
+        <p:nvSpPr>
+          <p:cNvPr id="3" name="Notes Placeholder 2"/>
+          <p:cNvSpPr>
+            <a:spLocks noGrp="1"/>
+          </p:cNvSpPr>
+          <p:nvPr>
+            <p:ph type="body" idx="3" sz="quarter"/>
+          </p:nvPr>
+        </p:nvSpPr>
+        <p:spPr/>
+        <p:txBody>
+          <a:bodyPr/>
+          <a:lstStyle/>
+          <a:p>
+            <a:r>
+              <a:t>[설명] 교육생이 자신의 workspace·캡처·로그를 저장했는지 확인하고 다음 모듈의 시작 상태를 읽는다.</a:t>
+            </a:r>
+          </a:p>
+          <a:p>
+            <a:r>
+              <a:t>[실행] 슬라이드의 명령 또는 파일 작성 단계를 진행한다.</a:t>
+            </a:r>
+          </a:p>
+          <a:p>
+            <a:r>
+              <a:t>[확인] M06 Xacro 모듈화 시작 조건을 말할 수 있다.</a:t>
+            </a:r>
+          </a:p>
+          <a:p>
+            <a:r>
+              <a:t>[멈춤] 교육생이 현재 체크포인트를 통과할 때까지 기다린다.</a:t>
+            </a:r>
+          </a:p>
+          <a:p>
+            <a:r>
+              <a:t>[오류] 오류가 나면 현재 폴더, source, 파일 경로를 먼저 확인한다.</a:t>
+            </a:r>
+          </a:p>
+        </p:txBody>
+      </p:sp>
+      <p:sp>
+        <p:nvSpPr>
+          <p:cNvPr id="4" name="Slide Number Placeholder 3"/>
+          <p:cNvSpPr>
+            <a:spLocks noGrp="1"/>
+          </p:cNvSpPr>
+          <p:nvPr>
+            <p:ph type="sldNum" idx="5" sz="quarter"/>
+          </p:nvPr>
+        </p:nvSpPr>
+        <p:spPr/>
+      </p:sp>
+    </p:spTree>
+  </p:cSld>
+  <p:clrMapOvr>
+    <a:masterClrMapping/>
+  </p:clrMapOvr>
+</p:notes>
+</file>
+
+<file path=ppt/notesSlides/notesSlide24.xml><?xml version="1.0" encoding="utf-8"?>
+<p:notes xmlns:a="http://schemas.openxmlformats.org/drawingml/2006/main" xmlns:p="http://schemas.openxmlformats.org/presentationml/2006/main" xmlns:r="http://schemas.openxmlformats.org/officeDocument/2006/relationships">
+  <p:cSld>
+    <p:spTree>
+      <p:nvGrpSpPr>
+        <p:cNvPr id="1" name=""/>
+        <p:cNvGrpSpPr/>
+        <p:nvPr/>
+      </p:nvGrpSpPr>
+      <p:grpSpPr>
+        <a:xfrm>
+          <a:off x="0" y="0"/>
+          <a:ext cx="0" cy="0"/>
+          <a:chOff x="0" y="0"/>
+          <a:chExt cx="0" cy="0"/>
+        </a:xfrm>
+      </p:grpSpPr>
+      <p:sp>
+        <p:nvSpPr>
+          <p:cNvPr id="2" name="Slide Image Placeholder 1"/>
+          <p:cNvSpPr>
+            <a:spLocks noGrp="1"/>
+          </p:cNvSpPr>
+          <p:nvPr>
+            <p:ph type="sldImg" idx="2"/>
+          </p:nvPr>
+        </p:nvSpPr>
+        <p:spPr/>
+      </p:sp>
+      <p:sp>
+        <p:nvSpPr>
+          <p:cNvPr id="3" name="Notes Placeholder 2"/>
+          <p:cNvSpPr>
+            <a:spLocks noGrp="1"/>
+          </p:cNvSpPr>
+          <p:nvPr>
+            <p:ph type="body" idx="3" sz="quarter"/>
+          </p:nvPr>
+        </p:nvSpPr>
+        <p:spPr/>
+        <p:txBody>
+          <a:bodyPr/>
+          <a:lstStyle/>
+          <a:p>
+            <a:r>
               <a:t>[설명] 공식 문서는 버전 차이와 확장 학습을 확인할 때 사용한다.</a:t>
             </a:r>
           </a:p>
@@ -1721,7 +2125,7 @@
           </a:p>
           <a:p>
             <a:r>
-              <a:t>[실행] pwd; source /opt/ros/jazzy/setup.bash; source ~/ros2_curri/agv_ws/install/setup.bash</a:t>
+              <a:t>[실행] pwd; source /opt/ros/jazzy/setup.bash; source ~/ros2_curri/my_agv_ws/install/setup.bash</a:t>
             </a:r>
           </a:p>
           <a:p>
@@ -1896,7 +2300,7 @@
           <a:lstStyle/>
           <a:p>
             <a:r>
-              <a:t>[설명] 도식의 각 상자가 무엇을 만들고 화살표가 어떤 방향으로 데이터를 보내는지 설명한다.</a:t>
+              <a:t>[설명] 이 모듈이 전체 AGV 프로젝트에 추가하는 기능을 먼저 선언한다.</a:t>
             </a:r>
           </a:p>
           <a:p>
@@ -1906,7 +2310,7 @@
           </a:p>
           <a:p>
             <a:r>
-              <a:t>[확인] 교육생이 왼쪽에서 오른쪽(또는 제어 방향)으로 흐름을 말할 수 있다.</a:t>
+              <a:t>[확인] RobotModel과 TF에서 base, 두 wheel, camera, lidar, imu 연결을 확인한다.</a:t>
             </a:r>
           </a:p>
           <a:p>
@@ -1986,7 +2390,7 @@
           <a:lstStyle/>
           <a:p>
             <a:r>
-              <a:t>[설명] 실제 파일 경로를 보여 주고 어떤 package의 책임인지 설명한다.</a:t>
+              <a:t>[설명] 코드를 입력하기 전에 완성 결과와 관찰 기준을 보여 준다.</a:t>
             </a:r>
           </a:p>
           <a:p>
@@ -1996,7 +2400,7 @@
           </a:p>
           <a:p>
             <a:r>
-              <a:t>[확인] 교육생이 파일의 부모 package를 찾을 수 있다.</a:t>
+              <a:t>[확인] root Link=base_link와 wheel·camera·lidar·imu child 이름을 찾습니다.</a:t>
             </a:r>
           </a:p>
           <a:p>
@@ -2076,7 +2480,7 @@
           <a:lstStyle/>
           <a:p>
             <a:r>
-              <a:t>[설명] 파일을 코드 문법보다 먼저 역할·사용법·확인 화면으로 설명한다.</a:t>
+              <a:t>[설명] 도식의 각 상자가 무엇을 만들고 화살표가 어떤 방향으로 데이터를 보내는지 설명한다.</a:t>
             </a:r>
           </a:p>
           <a:p>
@@ -2086,7 +2490,7 @@
           </a:p>
           <a:p>
             <a:r>
-              <a:t>[확인] 교육생이 각 파일의 산출물과 확인 위치를 말할 수 있다.</a:t>
+              <a:t>[확인] 교육생이 왼쪽에서 오른쪽(또는 제어 방향)으로 흐름을 말할 수 있다.</a:t>
             </a:r>
           </a:p>
           <a:p>
@@ -2166,7 +2570,7 @@
           <a:lstStyle/>
           <a:p>
             <a:r>
-              <a:t>[설명] URDF는 로봇의 부품표가 아니라, ‘어떤 부품을 어느 frame에 고정할지’ 적는 조립도입니다.</a:t>
+              <a:t>[설명] 실제 파일 경로를 보여 주고 어떤 package의 책임인지 설명한다.</a:t>
             </a:r>
           </a:p>
           <a:p>
@@ -2176,7 +2580,7 @@
           </a:p>
           <a:p>
             <a:r>
-              <a:t>[확인] check_urdf의 root Link와 child 목록을 먼저 읽고 RViz RobotModel로 형태를 봅니다.</a:t>
+              <a:t>[확인] 교육생이 파일의 부모 package를 찾을 수 있다.</a:t>
             </a:r>
           </a:p>
           <a:p>
@@ -2256,22 +2660,17 @@
           <a:lstStyle/>
           <a:p>
             <a:r>
-              <a:t>[설명] M05에서는 macro·property·xacro 없이 한 파일에 link와 joint를 직접 작성한다.</a:t>
-            </a:r>
-          </a:p>
-          <a:p>
-            <a:r>
-              <a:t>[실행] cd ~/ros2_curri/agv_ws</a:t>
-            </a:r>
-          </a:p>
-          <a:p>
-            <a:r>
-              <a:t>check_urdf src/agv_description/curriculum_stages/M05/agv.urdf</a:t>
-            </a:r>
-          </a:p>
-          <a:p>
-            <a:r>
-              <a:t>[확인] 명령 출력에서 슬라이드의 확인 항목을 찾는다.</a:t>
+              <a:t>[설명] 파일을 코드 문법보다 먼저 역할·사용법·확인 화면으로 설명한다.</a:t>
+            </a:r>
+          </a:p>
+          <a:p>
+            <a:r>
+              <a:t>[실행] 슬라이드의 명령 또는 파일 작성 단계를 진행한다.</a:t>
+            </a:r>
+          </a:p>
+          <a:p>
+            <a:r>
+              <a:t>[확인] 교육생이 각 파일의 산출물과 확인 위치를 말할 수 있다.</a:t>
             </a:r>
           </a:p>
           <a:p>
@@ -5519,7 +5918,7 @@
               </a:defRPr>
             </a:pPr>
             <a:r>
-              <a:t>이 PPT만 보고 시작 상태 → 파일 작성 → build/run → 검증 → 오류 대응 → checkpoint를 순서대로 수행합니다.</a:t>
+              <a:t>이 PPT에서 폴더 생성 → 빈 파일 열기 → 코드 입력·저장 → build/run → 검증을 직접 반복합니다.</a:t>
             </a:r>
           </a:p>
         </p:txBody>
@@ -5654,7 +6053,7 @@
               </a:defRPr>
             </a:pPr>
             <a:r>
-              <a:t>RViz로 표시한다</a:t>
+              <a:t>코드를 ‘만드는 것 → 표시할 줄 → 바꾼 결과’로 읽는다</a:t>
             </a:r>
           </a:p>
         </p:txBody>
@@ -5693,7 +6092,7 @@
               </a:defRPr>
             </a:pPr>
             <a:r>
-              <a:t>한 장에는 한 행동만 수행합니다.</a:t>
+              <a:t>PDF 예시처럼 화면을 보기 전에 코드의 역할과 관찰 지점을 한 번 짚고 갑니다.</a:t>
             </a:r>
           </a:p>
         </p:txBody>
@@ -5829,109 +6228,31 @@
               </a:defRPr>
             </a:pPr>
             <a:r>
-              <a:t>현재 단계 2/2    |    현재 폴더 ~/ros2_curri/agv_ws    |    새 터미널</a:t>
-            </a:r>
-          </a:p>
-        </p:txBody>
-      </p:sp>
-      <p:sp>
-        <p:nvSpPr>
-          <p:cNvPr id="7" name="TextBox 6"/>
-          <p:cNvSpPr txBox="1"/>
-          <p:nvPr/>
-        </p:nvSpPr>
-        <p:spPr>
-          <a:xfrm>
-            <a:off x="676656" y="1764792"/>
-            <a:ext cx="1828800" cy="347472"/>
-          </a:xfrm>
-          <a:prstGeom prst="rect">
-            <a:avLst/>
-          </a:prstGeom>
-          <a:noFill/>
-        </p:spPr>
-        <p:txBody>
-          <a:bodyPr wrap="square" lIns="73152" rIns="73152" tIns="36576" bIns="36576">
-            <a:spAutoFit/>
-          </a:bodyPr>
-          <a:lstStyle/>
-          <a:p>
-            <a:pPr algn="l">
-              <a:spcAft>
-                <a:spcPts val="0"/>
-              </a:spcAft>
-              <a:defRPr sz="1800" b="1">
-                <a:solidFill>
-                  <a:srgbClr val="225B9B"/>
-                </a:solidFill>
-                <a:latin typeface="Noto Sans CJK KR"/>
-              </a:defRPr>
-            </a:pPr>
-            <a:r>
-              <a:t>왜 하는가</a:t>
-            </a:r>
-          </a:p>
-        </p:txBody>
-      </p:sp>
-      <p:sp>
-        <p:nvSpPr>
-          <p:cNvPr id="8" name="TextBox 7"/>
-          <p:cNvSpPr txBox="1"/>
-          <p:nvPr/>
-        </p:nvSpPr>
-        <p:spPr>
-          <a:xfrm>
-            <a:off x="676656" y="2103120"/>
-            <a:ext cx="10789920" cy="512064"/>
-          </a:xfrm>
-          <a:prstGeom prst="rect">
-            <a:avLst/>
-          </a:prstGeom>
-          <a:noFill/>
-        </p:spPr>
-        <p:txBody>
-          <a:bodyPr wrap="square" lIns="73152" rIns="73152" tIns="36576" bIns="36576">
-            <a:spAutoFit/>
-          </a:bodyPr>
-          <a:lstStyle/>
-          <a:p>
-            <a:pPr algn="l">
-              <a:spcAft>
-                <a:spcPts val="0"/>
-              </a:spcAft>
-              <a:defRPr sz="2000" b="0">
-                <a:solidFill>
-                  <a:srgbClr val="122C4E"/>
-                </a:solidFill>
-                <a:latin typeface="Noto Sans CJK KR"/>
-              </a:defRPr>
-            </a:pPr>
-            <a:r>
-              <a:t>RobotModel에는 단일 URDF 텍스트를 robot_description으로 넣고 TF를 함께 확인한다.</a:t>
-            </a:r>
-          </a:p>
-        </p:txBody>
-      </p:sp>
-      <p:sp>
-        <p:nvSpPr>
-          <p:cNvPr id="9" name="Rounded Rectangle 8"/>
+              <a:t>현재 단계 코드 해설    |    현재 폴더 ~/ros2_curri/my_agv_ws    |    현재 터미널</a:t>
+            </a:r>
+          </a:p>
+        </p:txBody>
+      </p:sp>
+      <p:sp>
+        <p:nvSpPr>
+          <p:cNvPr id="7" name="Rounded Rectangle 6"/>
           <p:cNvSpPr/>
           <p:nvPr/>
         </p:nvSpPr>
         <p:spPr>
           <a:xfrm>
-            <a:off x="676656" y="2871216"/>
-            <a:ext cx="10835640" cy="2331720"/>
+            <a:off x="658368" y="1664208"/>
+            <a:ext cx="5321808" cy="1764792"/>
           </a:xfrm>
           <a:prstGeom prst="roundRect">
             <a:avLst/>
           </a:prstGeom>
           <a:solidFill>
-            <a:srgbClr val="1D232D"/>
+            <a:srgbClr val="F4F7FB"/>
           </a:solidFill>
           <a:ln>
             <a:solidFill>
-              <a:srgbClr val="1D232D"/>
+              <a:srgbClr val="2A8B5A"/>
             </a:solidFill>
           </a:ln>
         </p:spPr>
@@ -5950,44 +6271,146 @@
           </a:fontRef>
         </p:style>
         <p:txBody>
-          <a:bodyPr rtlCol="0" anchor="ctr" wrap="square" lIns="73152" rIns="73152" tIns="36576" bIns="36576"/>
+          <a:bodyPr rtlCol="0" anchor="ctr"/>
+          <a:lstStyle/>
+          <a:p>
+            <a:pPr algn="ctr"/>
+          </a:p>
+        </p:txBody>
+      </p:sp>
+      <p:sp>
+        <p:nvSpPr>
+          <p:cNvPr id="8" name="TextBox 7"/>
+          <p:cNvSpPr txBox="1"/>
+          <p:nvPr/>
+        </p:nvSpPr>
+        <p:spPr>
+          <a:xfrm>
+            <a:off x="859536" y="1828800"/>
+            <a:ext cx="4892040" cy="265176"/>
+          </a:xfrm>
+          <a:prstGeom prst="rect">
+            <a:avLst/>
+          </a:prstGeom>
+          <a:noFill/>
+        </p:spPr>
+        <p:txBody>
+          <a:bodyPr wrap="square" lIns="73152" rIns="73152" tIns="36576" bIns="36576">
+            <a:spAutoFit/>
+          </a:bodyPr>
           <a:lstStyle/>
           <a:p>
             <a:pPr algn="l">
               <a:spcAft>
                 <a:spcPts val="0"/>
               </a:spcAft>
+              <a:defRPr sz="1700" b="1">
+                <a:solidFill>
+                  <a:srgbClr val="2A8B5A"/>
+                </a:solidFill>
+                <a:latin typeface="Noto Sans CJK KR"/>
+              </a:defRPr>
+            </a:pPr>
+            <a:r>
+              <a:t>1. 이 파일이 만드는 것</a:t>
+            </a:r>
+          </a:p>
+        </p:txBody>
+      </p:sp>
+      <p:sp>
+        <p:nvSpPr>
+          <p:cNvPr id="9" name="TextBox 8"/>
+          <p:cNvSpPr txBox="1"/>
+          <p:nvPr/>
+        </p:nvSpPr>
+        <p:spPr>
+          <a:xfrm>
+            <a:off x="859536" y="2240280"/>
+            <a:ext cx="4846320" cy="941832"/>
+          </a:xfrm>
+          <a:prstGeom prst="rect">
+            <a:avLst/>
+          </a:prstGeom>
+          <a:noFill/>
+        </p:spPr>
+        <p:txBody>
+          <a:bodyPr wrap="square" lIns="73152" rIns="73152" tIns="36576" bIns="36576">
+            <a:spAutoFit/>
+          </a:bodyPr>
+          <a:lstStyle/>
+          <a:p>
+            <a:pPr algn="l">
+              <a:spcAft>
+                <a:spcPts val="0"/>
+              </a:spcAft>
               <a:defRPr sz="1600" b="0">
                 <a:solidFill>
-                  <a:srgbClr val="FFFFFF"/>
-                </a:solidFill>
-                <a:latin typeface="DejaVu Sans Mono"/>
-              </a:defRPr>
-            </a:pPr>
-            <a:r>
-              <a:t>ros2 run robot_state_publisher robot_state_publisher \</a:t>
-            </a:r>
-            <a:br/>
-            <a:r>
-              <a:t>  --ros-args -p robot_description:="$(cat src/agv_description/curriculum_stages/M05/agv.urdf)"</a:t>
-            </a:r>
-            <a:br/>
-            <a:r>
-              <a:t># 새 터미널: rviz2 → Add → RobotModel, TF</a:t>
-            </a:r>
-          </a:p>
-        </p:txBody>
-      </p:sp>
-      <p:sp>
-        <p:nvSpPr>
-          <p:cNvPr id="10" name="TextBox 9"/>
-          <p:cNvSpPr txBox="1"/>
-          <p:nvPr/>
-        </p:nvSpPr>
-        <p:spPr>
-          <a:xfrm>
-            <a:off x="768096" y="5468112"/>
-            <a:ext cx="1143000" cy="256032"/>
+                  <a:srgbClr val="122C4E"/>
+                </a:solidFill>
+                <a:latin typeface="Noto Sans CJK KR"/>
+              </a:defRPr>
+            </a:pPr>
+            <a:r>
+              <a:t>URDF는 로봇의 부품표가 아니라, ‘어떤 부품을 어느 frame에 고정할지’ 적는 조립도입니다.</a:t>
+            </a:r>
+          </a:p>
+        </p:txBody>
+      </p:sp>
+      <p:sp>
+        <p:nvSpPr>
+          <p:cNvPr id="10" name="Rounded Rectangle 9"/>
+          <p:cNvSpPr/>
+          <p:nvPr/>
+        </p:nvSpPr>
+        <p:spPr>
+          <a:xfrm>
+            <a:off x="6217920" y="1664208"/>
+            <a:ext cx="5321808" cy="1764792"/>
+          </a:xfrm>
+          <a:prstGeom prst="roundRect">
+            <a:avLst/>
+          </a:prstGeom>
+          <a:solidFill>
+            <a:srgbClr val="F4F7FB"/>
+          </a:solidFill>
+          <a:ln>
+            <a:solidFill>
+              <a:srgbClr val="225B9B"/>
+            </a:solidFill>
+          </a:ln>
+        </p:spPr>
+        <p:style>
+          <a:lnRef idx="1">
+            <a:schemeClr val="accent1"/>
+          </a:lnRef>
+          <a:fillRef idx="3">
+            <a:schemeClr val="accent1"/>
+          </a:fillRef>
+          <a:effectRef idx="2">
+            <a:schemeClr val="accent1"/>
+          </a:effectRef>
+          <a:fontRef idx="minor">
+            <a:schemeClr val="lt1"/>
+          </a:fontRef>
+        </p:style>
+        <p:txBody>
+          <a:bodyPr rtlCol="0" anchor="ctr"/>
+          <a:lstStyle/>
+          <a:p>
+            <a:pPr algn="ctr"/>
+          </a:p>
+        </p:txBody>
+      </p:sp>
+      <p:sp>
+        <p:nvSpPr>
+          <p:cNvPr id="11" name="TextBox 10"/>
+          <p:cNvSpPr txBox="1"/>
+          <p:nvPr/>
+        </p:nvSpPr>
+        <p:spPr>
+          <a:xfrm>
+            <a:off x="6419088" y="1828800"/>
+            <a:ext cx="4892040" cy="265176"/>
           </a:xfrm>
           <a:prstGeom prst="rect">
             <a:avLst/>
@@ -6004,7 +6427,331 @@
               <a:spcAft>
                 <a:spcPts val="0"/>
               </a:spcAft>
-              <a:defRPr sz="1800" b="1">
+              <a:defRPr sz="1700" b="1">
+                <a:solidFill>
+                  <a:srgbClr val="225B9B"/>
+                </a:solidFill>
+                <a:latin typeface="Noto Sans CJK KR"/>
+              </a:defRPr>
+            </a:pPr>
+            <a:r>
+              <a:t>2. 먼저 찾을 코드/태그</a:t>
+            </a:r>
+          </a:p>
+        </p:txBody>
+      </p:sp>
+      <p:sp>
+        <p:nvSpPr>
+          <p:cNvPr id="12" name="TextBox 11"/>
+          <p:cNvSpPr txBox="1"/>
+          <p:nvPr/>
+        </p:nvSpPr>
+        <p:spPr>
+          <a:xfrm>
+            <a:off x="6419088" y="2240280"/>
+            <a:ext cx="4846320" cy="941832"/>
+          </a:xfrm>
+          <a:prstGeom prst="rect">
+            <a:avLst/>
+          </a:prstGeom>
+          <a:noFill/>
+        </p:spPr>
+        <p:txBody>
+          <a:bodyPr wrap="square" lIns="73152" rIns="73152" tIns="36576" bIns="36576">
+            <a:spAutoFit/>
+          </a:bodyPr>
+          <a:lstStyle/>
+          <a:p>
+            <a:pPr algn="l">
+              <a:spcAft>
+                <a:spcPts val="0"/>
+              </a:spcAft>
+              <a:defRPr sz="1600" b="0">
+                <a:solidFill>
+                  <a:srgbClr val="122C4E"/>
+                </a:solidFill>
+                <a:latin typeface="Noto Sans CJK KR"/>
+              </a:defRPr>
+            </a:pPr>
+            <a:r>
+              <a:t>&lt;link name="base_link"&gt;, &lt;joint name="..."&gt;, &lt;parent&gt;, &lt;child&gt;</a:t>
+            </a:r>
+          </a:p>
+        </p:txBody>
+      </p:sp>
+      <p:sp>
+        <p:nvSpPr>
+          <p:cNvPr id="13" name="Rounded Rectangle 12"/>
+          <p:cNvSpPr/>
+          <p:nvPr/>
+        </p:nvSpPr>
+        <p:spPr>
+          <a:xfrm>
+            <a:off x="658368" y="3813048"/>
+            <a:ext cx="5321808" cy="1764792"/>
+          </a:xfrm>
+          <a:prstGeom prst="roundRect">
+            <a:avLst/>
+          </a:prstGeom>
+          <a:solidFill>
+            <a:srgbClr val="F4F7FB"/>
+          </a:solidFill>
+          <a:ln>
+            <a:solidFill>
+              <a:srgbClr val="DB7E22"/>
+            </a:solidFill>
+          </a:ln>
+        </p:spPr>
+        <p:style>
+          <a:lnRef idx="1">
+            <a:schemeClr val="accent1"/>
+          </a:lnRef>
+          <a:fillRef idx="3">
+            <a:schemeClr val="accent1"/>
+          </a:fillRef>
+          <a:effectRef idx="2">
+            <a:schemeClr val="accent1"/>
+          </a:effectRef>
+          <a:fontRef idx="minor">
+            <a:schemeClr val="lt1"/>
+          </a:fontRef>
+        </p:style>
+        <p:txBody>
+          <a:bodyPr rtlCol="0" anchor="ctr"/>
+          <a:lstStyle/>
+          <a:p>
+            <a:pPr algn="ctr"/>
+          </a:p>
+        </p:txBody>
+      </p:sp>
+      <p:sp>
+        <p:nvSpPr>
+          <p:cNvPr id="14" name="TextBox 13"/>
+          <p:cNvSpPr txBox="1"/>
+          <p:nvPr/>
+        </p:nvSpPr>
+        <p:spPr>
+          <a:xfrm>
+            <a:off x="859536" y="3977639"/>
+            <a:ext cx="4892040" cy="265176"/>
+          </a:xfrm>
+          <a:prstGeom prst="rect">
+            <a:avLst/>
+          </a:prstGeom>
+          <a:noFill/>
+        </p:spPr>
+        <p:txBody>
+          <a:bodyPr wrap="square" lIns="73152" rIns="73152" tIns="36576" bIns="36576">
+            <a:spAutoFit/>
+          </a:bodyPr>
+          <a:lstStyle/>
+          <a:p>
+            <a:pPr algn="l">
+              <a:spcAft>
+                <a:spcPts val="0"/>
+              </a:spcAft>
+              <a:defRPr sz="1700" b="1">
+                <a:solidFill>
+                  <a:srgbClr val="DB7E22"/>
+                </a:solidFill>
+                <a:latin typeface="Noto Sans CJK KR"/>
+              </a:defRPr>
+            </a:pPr>
+            <a:r>
+              <a:t>3. 값을 바꾸면</a:t>
+            </a:r>
+          </a:p>
+        </p:txBody>
+      </p:sp>
+      <p:sp>
+        <p:nvSpPr>
+          <p:cNvPr id="15" name="TextBox 14"/>
+          <p:cNvSpPr txBox="1"/>
+          <p:nvPr/>
+        </p:nvSpPr>
+        <p:spPr>
+          <a:xfrm>
+            <a:off x="859536" y="4389120"/>
+            <a:ext cx="4846320" cy="941832"/>
+          </a:xfrm>
+          <a:prstGeom prst="rect">
+            <a:avLst/>
+          </a:prstGeom>
+          <a:noFill/>
+        </p:spPr>
+        <p:txBody>
+          <a:bodyPr wrap="square" lIns="73152" rIns="73152" tIns="36576" bIns="36576">
+            <a:spAutoFit/>
+          </a:bodyPr>
+          <a:lstStyle/>
+          <a:p>
+            <a:pPr algn="l">
+              <a:spcAft>
+                <a:spcPts val="0"/>
+              </a:spcAft>
+              <a:defRPr sz="1600" b="0">
+                <a:solidFill>
+                  <a:srgbClr val="122C4E"/>
+                </a:solidFill>
+                <a:latin typeface="Noto Sans CJK KR"/>
+              </a:defRPr>
+            </a:pPr>
+            <a:r>
+              <a:t>wheel link의 cylinder radius를 바꾸면 보이는 바퀴 크기가 바뀌고, joint origin은 장착 위치를 바꿉니다.</a:t>
+            </a:r>
+          </a:p>
+        </p:txBody>
+      </p:sp>
+      <p:sp>
+        <p:nvSpPr>
+          <p:cNvPr id="16" name="Rounded Rectangle 15"/>
+          <p:cNvSpPr/>
+          <p:nvPr/>
+        </p:nvSpPr>
+        <p:spPr>
+          <a:xfrm>
+            <a:off x="6217920" y="3813048"/>
+            <a:ext cx="5321808" cy="1764792"/>
+          </a:xfrm>
+          <a:prstGeom prst="roundRect">
+            <a:avLst/>
+          </a:prstGeom>
+          <a:solidFill>
+            <a:srgbClr val="F4F7FB"/>
+          </a:solidFill>
+          <a:ln>
+            <a:solidFill>
+              <a:srgbClr val="BE3B3B"/>
+            </a:solidFill>
+          </a:ln>
+        </p:spPr>
+        <p:style>
+          <a:lnRef idx="1">
+            <a:schemeClr val="accent1"/>
+          </a:lnRef>
+          <a:fillRef idx="3">
+            <a:schemeClr val="accent1"/>
+          </a:fillRef>
+          <a:effectRef idx="2">
+            <a:schemeClr val="accent1"/>
+          </a:effectRef>
+          <a:fontRef idx="minor">
+            <a:schemeClr val="lt1"/>
+          </a:fontRef>
+        </p:style>
+        <p:txBody>
+          <a:bodyPr rtlCol="0" anchor="ctr"/>
+          <a:lstStyle/>
+          <a:p>
+            <a:pPr algn="ctr"/>
+          </a:p>
+        </p:txBody>
+      </p:sp>
+      <p:sp>
+        <p:nvSpPr>
+          <p:cNvPr id="17" name="TextBox 16"/>
+          <p:cNvSpPr txBox="1"/>
+          <p:nvPr/>
+        </p:nvSpPr>
+        <p:spPr>
+          <a:xfrm>
+            <a:off x="6419088" y="3977639"/>
+            <a:ext cx="4892040" cy="265176"/>
+          </a:xfrm>
+          <a:prstGeom prst="rect">
+            <a:avLst/>
+          </a:prstGeom>
+          <a:noFill/>
+        </p:spPr>
+        <p:txBody>
+          <a:bodyPr wrap="square" lIns="73152" rIns="73152" tIns="36576" bIns="36576">
+            <a:spAutoFit/>
+          </a:bodyPr>
+          <a:lstStyle/>
+          <a:p>
+            <a:pPr algn="l">
+              <a:spcAft>
+                <a:spcPts val="0"/>
+              </a:spcAft>
+              <a:defRPr sz="1700" b="1">
+                <a:solidFill>
+                  <a:srgbClr val="BE3B3B"/>
+                </a:solidFill>
+                <a:latin typeface="Noto Sans CJK KR"/>
+              </a:defRPr>
+            </a:pPr>
+            <a:r>
+              <a:t>4. 실제로 보는 곳</a:t>
+            </a:r>
+          </a:p>
+        </p:txBody>
+      </p:sp>
+      <p:sp>
+        <p:nvSpPr>
+          <p:cNvPr id="18" name="TextBox 17"/>
+          <p:cNvSpPr txBox="1"/>
+          <p:nvPr/>
+        </p:nvSpPr>
+        <p:spPr>
+          <a:xfrm>
+            <a:off x="6419088" y="4389120"/>
+            <a:ext cx="4846320" cy="941832"/>
+          </a:xfrm>
+          <a:prstGeom prst="rect">
+            <a:avLst/>
+          </a:prstGeom>
+          <a:noFill/>
+        </p:spPr>
+        <p:txBody>
+          <a:bodyPr wrap="square" lIns="73152" rIns="73152" tIns="36576" bIns="36576">
+            <a:spAutoFit/>
+          </a:bodyPr>
+          <a:lstStyle/>
+          <a:p>
+            <a:pPr algn="l">
+              <a:spcAft>
+                <a:spcPts val="0"/>
+              </a:spcAft>
+              <a:defRPr sz="1600" b="0">
+                <a:solidFill>
+                  <a:srgbClr val="122C4E"/>
+                </a:solidFill>
+                <a:latin typeface="Noto Sans CJK KR"/>
+              </a:defRPr>
+            </a:pPr>
+            <a:r>
+              <a:t>check_urdf의 root Link와 child 목록을 먼저 읽고 RViz RobotModel로 형태를 봅니다.</a:t>
+            </a:r>
+          </a:p>
+        </p:txBody>
+      </p:sp>
+      <p:sp>
+        <p:nvSpPr>
+          <p:cNvPr id="19" name="TextBox 18"/>
+          <p:cNvSpPr txBox="1"/>
+          <p:nvPr/>
+        </p:nvSpPr>
+        <p:spPr>
+          <a:xfrm>
+            <a:off x="777240" y="6172200"/>
+            <a:ext cx="10607040" cy="201168"/>
+          </a:xfrm>
+          <a:prstGeom prst="rect">
+            <a:avLst/>
+          </a:prstGeom>
+          <a:noFill/>
+        </p:spPr>
+        <p:txBody>
+          <a:bodyPr wrap="square" lIns="73152" rIns="73152" tIns="36576" bIns="36576">
+            <a:spAutoFit/>
+          </a:bodyPr>
+          <a:lstStyle/>
+          <a:p>
+            <a:pPr algn="ctr">
+              <a:spcAft>
+                <a:spcPts val="0"/>
+              </a:spcAft>
+              <a:defRPr sz="1200" b="1">
                 <a:solidFill>
                   <a:srgbClr val="2A8B5A"/>
                 </a:solidFill>
@@ -6012,46 +6759,7 @@
               </a:defRPr>
             </a:pPr>
             <a:r>
-              <a:t>확인</a:t>
-            </a:r>
-          </a:p>
-        </p:txBody>
-      </p:sp>
-      <p:sp>
-        <p:nvSpPr>
-          <p:cNvPr id="11" name="TextBox 10"/>
-          <p:cNvSpPr txBox="1"/>
-          <p:nvPr/>
-        </p:nvSpPr>
-        <p:spPr>
-          <a:xfrm>
-            <a:off x="768096" y="5742432"/>
-            <a:ext cx="10561320" cy="347472"/>
-          </a:xfrm>
-          <a:prstGeom prst="rect">
-            <a:avLst/>
-          </a:prstGeom>
-          <a:noFill/>
-        </p:spPr>
-        <p:txBody>
-          <a:bodyPr wrap="square" lIns="73152" rIns="73152" tIns="36576" bIns="36576">
-            <a:spAutoFit/>
-          </a:bodyPr>
-          <a:lstStyle/>
-          <a:p>
-            <a:pPr algn="l">
-              <a:spcAft>
-                <a:spcPts val="0"/>
-              </a:spcAft>
-              <a:defRPr sz="1800" b="0">
-                <a:solidFill>
-                  <a:srgbClr val="122C4E"/>
-                </a:solidFill>
-                <a:latin typeface="Noto Sans CJK KR"/>
-              </a:defRPr>
-            </a:pPr>
-            <a:r>
-              <a:t>명령의 출력에서 topic·frame·파일 이름 또는 성공 메시지를 찾으면 이 단계가 완료됩니다.</a:t>
+              <a:t>다음 코드 슬라이드에서는 위의 태그/함수를 찾아 색으로 표시하며 한 줄씩 설명합니다.</a:t>
             </a:r>
           </a:p>
         </p:txBody>
@@ -6108,7 +6816,7 @@
               </a:defRPr>
             </a:pPr>
             <a:r>
-              <a:t>파일을 새로 만들고 저장한다 (1/2)</a:t>
+              <a:t>로봇 설명 package를 새로 만든다</a:t>
             </a:r>
           </a:p>
         </p:txBody>
@@ -6147,7 +6855,7 @@
               </a:defRPr>
             </a:pPr>
             <a:r>
-              <a:t>~/ros2_curri/agv_ws/src/agv_description/curriculum_stages/M05/agv.urdf</a:t>
+              <a:t>프로젝트를 처음부터 만들 때 package 생성 명령을 먼저 실행합니다.</a:t>
             </a:r>
           </a:p>
         </p:txBody>
@@ -6283,7 +6991,7 @@
               </a:defRPr>
             </a:pPr>
             <a:r>
-              <a:t>현재 단계 3/5    |    현재 폴더 ~/ros2_curri/agv_ws    |    현재 터미널</a:t>
+              <a:t>현재 단계 workspace/package 생성    |    현재 폴더 ~/ros2_curri/my_agv_ws/src    |    현재 터미널</a:t>
             </a:r>
           </a:p>
         </p:txBody>
@@ -6296,8 +7004,8 @@
         </p:nvSpPr>
         <p:spPr>
           <a:xfrm>
-            <a:off x="658368" y="1627632"/>
-            <a:ext cx="10972800" cy="256032"/>
+            <a:off x="694944" y="1773936"/>
+            <a:ext cx="10698480" cy="457200"/>
           </a:xfrm>
           <a:prstGeom prst="rect">
             <a:avLst/>
@@ -6314,7 +7022,7 @@
               <a:spcAft>
                 <a:spcPts val="0"/>
               </a:spcAft>
-              <a:defRPr sz="1500" b="1">
+              <a:defRPr sz="1900" b="0">
                 <a:solidFill>
                   <a:srgbClr val="122C4E"/>
                 </a:solidFill>
@@ -6322,85 +7030,23 @@
               </a:defRPr>
             </a:pPr>
             <a:r>
-              <a:t>이번 단계: 파일의 전체 내용을 중간 생략 없이 작성합니다. 아래 줄 범위를 끝까지 입력하세요.</a:t>
-            </a:r>
-          </a:p>
-        </p:txBody>
-      </p:sp>
-      <p:sp>
-        <p:nvSpPr>
-          <p:cNvPr id="8" name="Rectangle 7"/>
+              <a:t>URDF는 일반 폴더가 아니라 ROS package 안에 넣어야 RViz·launch가 찾을 수 있습니다.</a:t>
+            </a:r>
+          </a:p>
+        </p:txBody>
+      </p:sp>
+      <p:sp>
+        <p:nvSpPr>
+          <p:cNvPr id="8" name="Rounded Rectangle 7"/>
           <p:cNvSpPr/>
           <p:nvPr/>
         </p:nvSpPr>
         <p:spPr>
           <a:xfrm>
-            <a:off x="658368" y="1956816"/>
-            <a:ext cx="10972800" cy="603504"/>
-          </a:xfrm>
-          <a:prstGeom prst="rect">
-            <a:avLst/>
-          </a:prstGeom>
-          <a:solidFill>
-            <a:srgbClr val="F4F7FB"/>
-          </a:solidFill>
-          <a:ln>
-            <a:solidFill>
-              <a:srgbClr val="F4F7FB"/>
-            </a:solidFill>
-          </a:ln>
-        </p:spPr>
-        <p:style>
-          <a:lnRef idx="1">
-            <a:schemeClr val="accent1"/>
-          </a:lnRef>
-          <a:fillRef idx="3">
-            <a:schemeClr val="accent1"/>
-          </a:fillRef>
-          <a:effectRef idx="2">
-            <a:schemeClr val="accent1"/>
-          </a:effectRef>
-          <a:fontRef idx="minor">
-            <a:schemeClr val="lt1"/>
-          </a:fontRef>
-        </p:style>
-        <p:txBody>
-          <a:bodyPr rtlCol="0" anchor="ctr" wrap="square" lIns="73152" rIns="73152" tIns="36576" bIns="36576"/>
-          <a:lstStyle/>
-          <a:p>
-            <a:pPr algn="l">
-              <a:spcAft>
-                <a:spcPts val="0"/>
-              </a:spcAft>
-              <a:defRPr sz="1400" b="0">
-                <a:solidFill>
-                  <a:srgbClr val="122C4E"/>
-                </a:solidFill>
-                <a:latin typeface="DejaVu Sans Mono"/>
-              </a:defRPr>
-            </a:pPr>
-            <a:r>
-              <a:t>파일 생성: mkdir -p ~/ros2_curri/agv_ws/src/agv_description/curriculum_stages/M05</a:t>
-            </a:r>
-            <a:br/>
-            <a:r>
-              <a:t>파일 열기: nano ~/ros2_curri/agv_ws/src/agv_description/curriculum_stages/M05/agv.urdf</a:t>
-            </a:r>
-          </a:p>
-        </p:txBody>
-      </p:sp>
-      <p:sp>
-        <p:nvSpPr>
-          <p:cNvPr id="9" name="Rectangle 8"/>
-          <p:cNvSpPr/>
-          <p:nvPr/>
-        </p:nvSpPr>
-        <p:spPr>
-          <a:xfrm>
-            <a:off x="658368" y="2706624"/>
-            <a:ext cx="10972800" cy="3364992"/>
-          </a:xfrm>
-          <a:prstGeom prst="rect">
+            <a:off x="676656" y="2514600"/>
+            <a:ext cx="10881360" cy="2267712"/>
+          </a:xfrm>
+          <a:prstGeom prst="roundRect">
             <a:avLst/>
           </a:prstGeom>
           <a:solidFill>
@@ -6427,14 +7073,14 @@
           </a:fontRef>
         </p:style>
         <p:txBody>
-          <a:bodyPr rtlCol="0" anchor="ctr" wrap="square" lIns="164592" rIns="164592" tIns="109728" bIns="36576"/>
+          <a:bodyPr rtlCol="0" anchor="ctr" wrap="square" lIns="73152" rIns="73152" tIns="36576" bIns="36576"/>
           <a:lstStyle/>
           <a:p>
             <a:pPr algn="l">
               <a:spcAft>
                 <a:spcPts val="0"/>
               </a:spcAft>
-              <a:defRPr sz="1400" b="0">
+              <a:defRPr sz="1500" b="0">
                 <a:solidFill>
                   <a:srgbClr val="FFFFFF"/>
                 </a:solidFill>
@@ -6442,51 +7088,54 @@
               </a:defRPr>
             </a:pPr>
             <a:r>
-              <a:t>&lt;?xml version="1.0"?&gt;</a:t>
+              <a:t>cd ~/ros2_curri/my_agv_ws/src</a:t>
             </a:r>
             <a:br/>
             <a:r>
-              <a:t>&lt;robot name="agv_m05"&gt;</a:t>
+              <a:t>ros2 pkg create --build-type ament_python agv_description</a:t>
             </a:r>
             <a:br/>
             <a:r>
-              <a:t>  &lt;link name="base_link"&gt;&lt;visual&gt;&lt;origin xyz="0 0 0.16"/&gt;&lt;geometry&gt;&lt;box size="0.60 0.42 0.16"/&gt;&lt;/geometry&gt;&lt;/visual&gt;&lt;/link&gt;</a:t>
-            </a:r>
-            <a:br/>
-            <a:r>
-              <a:t>  &lt;link name="left_wheel_link"&gt;&lt;visual&gt;&lt;origin rpy="1.5708 0 0"/&gt;&lt;geometry&gt;&lt;cylinder radius="0.08" length="0.05"/&gt;&lt;/geometry&gt;&lt;/visual&gt;&lt;/link&gt;</a:t>
-            </a:r>
-            <a:br/>
-            <a:r>
-              <a:t>  &lt;link name="right_wheel_link"&gt;&lt;visual&gt;&lt;origin rpy="1.5708 0 0"/&gt;&lt;geometry&gt;&lt;cylinder radius="0.08" length="0.05"/&gt;&lt;/geometry&gt;&lt;/visual&gt;&lt;/link&gt;</a:t>
-            </a:r>
-            <a:br/>
-            <a:r>
-              <a:t>  &lt;link name="caster_link"&gt;&lt;visual&gt;&lt;geometry&gt;&lt;sphere radius="0.04"/&gt;&lt;/geometry&gt;&lt;/visual&gt;&lt;/link&gt;</a:t>
-            </a:r>
-            <a:br/>
-            <a:r>
-              <a:t>  &lt;link name="camera_link"/&gt;&lt;link name="lidar_link"/&gt;&lt;link name="imu_link"/&gt;</a:t>
-            </a:r>
-            <a:br/>
-            <a:r>
-              <a:t>  &lt;joint name="left_wheel_joint" type="continuous"&gt;&lt;parent link="base_link"/&gt;&lt;child link="left_wheel_link"/&gt;&lt;origin xyz="0 0.19 0.08"/&gt;&lt;axis xyz="0 1 0"/&gt;&lt;/joint&gt;</a:t>
-            </a:r>
-            <a:br/>
-            <a:r>
-              <a:t>  &lt;joint name="right_wheel_joint" type="continuous"&gt;&lt;parent link="base_link"/&gt;&lt;child link="right_wheel_link"/&gt;&lt;origin xyz="0 -0.19 0.08"/&gt;&lt;axis xyz="0 1 0"/&gt;&lt;/joint&gt;</a:t>
-            </a:r>
-            <a:br/>
-            <a:r>
-              <a:t>  &lt;joint name="caster_joint" type="fixed"&gt;&lt;parent link="base_link"/&gt;&lt;child link="caster_link"/&gt;&lt;origin xyz="-0.24 0 0.04"/&gt;&lt;/joint&gt;</a:t>
-            </a:r>
-            <a:br/>
-            <a:r>
-              <a:t>  &lt;joint name="camera_joint" type="fixed"&gt;&lt;parent link="base_link"/&gt;&lt;child link="camera_link"/&gt;&lt;origin xyz="0.30 0 0.26"/&gt;&lt;/joint&gt;</a:t>
-            </a:r>
-            <a:br/>
-            <a:r>
-              <a:t>  &lt;joint name="lidar_joint" type="fixed"&gt;&lt;parent link="base_link"/&gt;&lt;child link="lidar_link"/&gt;&lt;origin xyz="0.12 0 0.29"/&gt;&lt;/joint&gt;</a:t>
+              <a:t>mkdir -p agv_description/curriculum_stages/M05</a:t>
+            </a:r>
+          </a:p>
+        </p:txBody>
+      </p:sp>
+      <p:sp>
+        <p:nvSpPr>
+          <p:cNvPr id="9" name="TextBox 8"/>
+          <p:cNvSpPr txBox="1"/>
+          <p:nvPr/>
+        </p:nvSpPr>
+        <p:spPr>
+          <a:xfrm>
+            <a:off x="786384" y="5166360"/>
+            <a:ext cx="1417320" cy="256032"/>
+          </a:xfrm>
+          <a:prstGeom prst="rect">
+            <a:avLst/>
+          </a:prstGeom>
+          <a:noFill/>
+        </p:spPr>
+        <p:txBody>
+          <a:bodyPr wrap="square" lIns="73152" rIns="73152" tIns="36576" bIns="36576">
+            <a:spAutoFit/>
+          </a:bodyPr>
+          <a:lstStyle/>
+          <a:p>
+            <a:pPr algn="l">
+              <a:spcAft>
+                <a:spcPts val="0"/>
+              </a:spcAft>
+              <a:defRPr sz="1800" b="1">
+                <a:solidFill>
+                  <a:srgbClr val="2A8B5A"/>
+                </a:solidFill>
+                <a:latin typeface="Noto Sans CJK KR"/>
+              </a:defRPr>
+            </a:pPr>
+            <a:r>
+              <a:t>확인</a:t>
             </a:r>
           </a:p>
         </p:txBody>
@@ -6499,8 +7148,8 @@
         </p:nvSpPr>
         <p:spPr>
           <a:xfrm>
-            <a:off x="749808" y="6181344"/>
-            <a:ext cx="10789920" cy="201168"/>
+            <a:off x="786384" y="5468112"/>
+            <a:ext cx="10287000" cy="384048"/>
           </a:xfrm>
           <a:prstGeom prst="rect">
             <a:avLst/>
@@ -6517,15 +7166,15 @@
               <a:spcAft>
                 <a:spcPts val="0"/>
               </a:spcAft>
-              <a:defRPr sz="1000" b="0">
-                <a:solidFill>
-                  <a:srgbClr val="5C6672"/>
-                </a:solidFill>
-                <a:latin typeface="Noto Sans CJK KR"/>
-              </a:defRPr>
-            </a:pPr>
-            <a:r>
-              <a:t>파일 전체 1/2 · 이 슬라이드 다음에 같은 파일의 나머지 줄이 이어집니다.</a:t>
+              <a:defRPr sz="1700" b="0">
+                <a:solidFill>
+                  <a:srgbClr val="122C4E"/>
+                </a:solidFill>
+                <a:latin typeface="Noto Sans CJK KR"/>
+              </a:defRPr>
+            </a:pPr>
+            <a:r>
+              <a:t>각 package 이름의 새 폴더와 package.xml이 src 아래에 보이면 다음 파일 작성 단계로 갑니다.</a:t>
             </a:r>
           </a:p>
         </p:txBody>
@@ -6582,7 +7231,7 @@
               </a:defRPr>
             </a:pPr>
             <a:r>
-              <a:t>파일을 계속 작성하고 저장한다 (2/2)</a:t>
+              <a:t>구현 1/1: 폴더를 만들고 빈 파일을 연다</a:t>
             </a:r>
           </a:p>
         </p:txBody>
@@ -6621,7 +7270,7 @@
               </a:defRPr>
             </a:pPr>
             <a:r>
-              <a:t>~/ros2_curri/agv_ws/src/agv_description/curriculum_stages/M05/agv.urdf</a:t>
+              <a:t>파일을 먼저 만든 뒤, 다음 슬라이드의 코드 블록을 위에서 아래로 직접 입력합니다.</a:t>
             </a:r>
           </a:p>
         </p:txBody>
@@ -6757,7 +7406,7 @@
               </a:defRPr>
             </a:pPr>
             <a:r>
-              <a:t>현재 단계 4/5    |    현재 폴더 ~/ros2_curri/agv_ws    |    현재 터미널</a:t>
+              <a:t>현재 단계 파일 생성 1/1    |    현재 폴더 ~/ros2_curri/my_agv_ws    |    현재 터미널</a:t>
             </a:r>
           </a:p>
         </p:txBody>
@@ -6770,8 +7419,8 @@
         </p:nvSpPr>
         <p:spPr>
           <a:xfrm>
-            <a:off x="658368" y="1627632"/>
-            <a:ext cx="10972800" cy="256032"/>
+            <a:off x="685800" y="1719072"/>
+            <a:ext cx="1417320" cy="256032"/>
           </a:xfrm>
           <a:prstGeom prst="rect">
             <a:avLst/>
@@ -6788,93 +7437,148 @@
               <a:spcAft>
                 <a:spcPts val="0"/>
               </a:spcAft>
-              <a:defRPr sz="1500" b="1">
+              <a:defRPr sz="1800" b="1">
+                <a:solidFill>
+                  <a:srgbClr val="225B9B"/>
+                </a:solidFill>
+                <a:latin typeface="Noto Sans CJK KR"/>
+              </a:defRPr>
+            </a:pPr>
+            <a:r>
+              <a:t>이번 파일</a:t>
+            </a:r>
+          </a:p>
+        </p:txBody>
+      </p:sp>
+      <p:sp>
+        <p:nvSpPr>
+          <p:cNvPr id="8" name="TextBox 7"/>
+          <p:cNvSpPr txBox="1"/>
+          <p:nvPr/>
+        </p:nvSpPr>
+        <p:spPr>
+          <a:xfrm>
+            <a:off x="1920240" y="1719072"/>
+            <a:ext cx="9235440" cy="274320"/>
+          </a:xfrm>
+          <a:prstGeom prst="rect">
+            <a:avLst/>
+          </a:prstGeom>
+          <a:noFill/>
+        </p:spPr>
+        <p:txBody>
+          <a:bodyPr wrap="square" lIns="73152" rIns="73152" tIns="36576" bIns="36576">
+            <a:spAutoFit/>
+          </a:bodyPr>
+          <a:lstStyle/>
+          <a:p>
+            <a:pPr algn="l">
+              <a:spcAft>
+                <a:spcPts val="0"/>
+              </a:spcAft>
+              <a:defRPr sz="1400" b="1">
                 <a:solidFill>
                   <a:srgbClr val="122C4E"/>
                 </a:solidFill>
-                <a:latin typeface="Noto Sans CJK KR"/>
-              </a:defRPr>
-            </a:pPr>
-            <a:r>
-              <a:t>이번 단계: 파일의 전체 내용을 중간 생략 없이 작성합니다. 아래 줄 범위를 끝까지 입력하세요.</a:t>
-            </a:r>
-          </a:p>
-        </p:txBody>
-      </p:sp>
-      <p:sp>
-        <p:nvSpPr>
-          <p:cNvPr id="8" name="Rectangle 7"/>
+                <a:latin typeface="DejaVu Sans Mono"/>
+              </a:defRPr>
+            </a:pPr>
+            <a:r>
+              <a:t>~/ros2_curri/my_agv_ws/src/agv_description/curriculum_stages/M05/agv.urdf</a:t>
+            </a:r>
+          </a:p>
+        </p:txBody>
+      </p:sp>
+      <p:sp>
+        <p:nvSpPr>
+          <p:cNvPr id="9" name="TextBox 8"/>
+          <p:cNvSpPr txBox="1"/>
+          <p:nvPr/>
+        </p:nvSpPr>
+        <p:spPr>
+          <a:xfrm>
+            <a:off x="685800" y="2103120"/>
+            <a:ext cx="1417320" cy="256032"/>
+          </a:xfrm>
+          <a:prstGeom prst="rect">
+            <a:avLst/>
+          </a:prstGeom>
+          <a:noFill/>
+        </p:spPr>
+        <p:txBody>
+          <a:bodyPr wrap="square" lIns="73152" rIns="73152" tIns="36576" bIns="36576">
+            <a:spAutoFit/>
+          </a:bodyPr>
+          <a:lstStyle/>
+          <a:p>
+            <a:pPr algn="l">
+              <a:spcAft>
+                <a:spcPts val="0"/>
+              </a:spcAft>
+              <a:defRPr sz="1800" b="1">
+                <a:solidFill>
+                  <a:srgbClr val="2A8B5A"/>
+                </a:solidFill>
+                <a:latin typeface="Noto Sans CJK KR"/>
+              </a:defRPr>
+            </a:pPr>
+            <a:r>
+              <a:t>만드는 것</a:t>
+            </a:r>
+          </a:p>
+        </p:txBody>
+      </p:sp>
+      <p:sp>
+        <p:nvSpPr>
+          <p:cNvPr id="10" name="TextBox 9"/>
+          <p:cNvSpPr txBox="1"/>
+          <p:nvPr/>
+        </p:nvSpPr>
+        <p:spPr>
+          <a:xfrm>
+            <a:off x="1920240" y="2103120"/>
+            <a:ext cx="9235440" cy="438912"/>
+          </a:xfrm>
+          <a:prstGeom prst="rect">
+            <a:avLst/>
+          </a:prstGeom>
+          <a:noFill/>
+        </p:spPr>
+        <p:txBody>
+          <a:bodyPr wrap="square" lIns="73152" rIns="73152" tIns="36576" bIns="36576">
+            <a:spAutoFit/>
+          </a:bodyPr>
+          <a:lstStyle/>
+          <a:p>
+            <a:pPr algn="l">
+              <a:spcAft>
+                <a:spcPts val="0"/>
+              </a:spcAft>
+              <a:defRPr sz="1700" b="0">
+                <a:solidFill>
+                  <a:srgbClr val="122C4E"/>
+                </a:solidFill>
+                <a:latin typeface="Noto Sans CJK KR"/>
+              </a:defRPr>
+            </a:pPr>
+            <a:r>
+              <a:t>몸체·두 바퀴·caster·camera/lidar/imu frame을 link와 joint로 조립한 기본 AGV</a:t>
+            </a:r>
+          </a:p>
+        </p:txBody>
+      </p:sp>
+      <p:sp>
+        <p:nvSpPr>
+          <p:cNvPr id="11" name="Rounded Rectangle 10"/>
           <p:cNvSpPr/>
           <p:nvPr/>
         </p:nvSpPr>
         <p:spPr>
           <a:xfrm>
-            <a:off x="658368" y="1956816"/>
-            <a:ext cx="10972800" cy="603504"/>
-          </a:xfrm>
-          <a:prstGeom prst="rect">
-            <a:avLst/>
-          </a:prstGeom>
-          <a:solidFill>
-            <a:srgbClr val="F4F7FB"/>
-          </a:solidFill>
-          <a:ln>
-            <a:solidFill>
-              <a:srgbClr val="F4F7FB"/>
-            </a:solidFill>
-          </a:ln>
-        </p:spPr>
-        <p:style>
-          <a:lnRef idx="1">
-            <a:schemeClr val="accent1"/>
-          </a:lnRef>
-          <a:fillRef idx="3">
-            <a:schemeClr val="accent1"/>
-          </a:fillRef>
-          <a:effectRef idx="2">
-            <a:schemeClr val="accent1"/>
-          </a:effectRef>
-          <a:fontRef idx="minor">
-            <a:schemeClr val="lt1"/>
-          </a:fontRef>
-        </p:style>
-        <p:txBody>
-          <a:bodyPr rtlCol="0" anchor="ctr" wrap="square" lIns="73152" rIns="73152" tIns="36576" bIns="36576"/>
-          <a:lstStyle/>
-          <a:p>
-            <a:pPr algn="l">
-              <a:spcAft>
-                <a:spcPts val="0"/>
-              </a:spcAft>
-              <a:defRPr sz="1400" b="0">
-                <a:solidFill>
-                  <a:srgbClr val="122C4E"/>
-                </a:solidFill>
-                <a:latin typeface="DejaVu Sans Mono"/>
-              </a:defRPr>
-            </a:pPr>
-            <a:r>
-              <a:t>파일 생성: mkdir -p ~/ros2_curri/agv_ws/src/agv_description/curriculum_stages/M05</a:t>
-            </a:r>
-            <a:br/>
-            <a:r>
-              <a:t>파일 열기: nano ~/ros2_curri/agv_ws/src/agv_description/curriculum_stages/M05/agv.urdf</a:t>
-            </a:r>
-          </a:p>
-        </p:txBody>
-      </p:sp>
-      <p:sp>
-        <p:nvSpPr>
-          <p:cNvPr id="9" name="Rectangle 8"/>
-          <p:cNvSpPr/>
-          <p:nvPr/>
-        </p:nvSpPr>
-        <p:spPr>
-          <a:xfrm>
-            <a:off x="658368" y="2706624"/>
-            <a:ext cx="10972800" cy="3364992"/>
-          </a:xfrm>
-          <a:prstGeom prst="rect">
+            <a:off x="676656" y="2852928"/>
+            <a:ext cx="10881360" cy="1682496"/>
+          </a:xfrm>
+          <a:prstGeom prst="roundRect">
             <a:avLst/>
           </a:prstGeom>
           <a:solidFill>
@@ -6901,14 +7605,14 @@
           </a:fontRef>
         </p:style>
         <p:txBody>
-          <a:bodyPr rtlCol="0" anchor="ctr" wrap="square" lIns="164592" rIns="164592" tIns="109728" bIns="36576"/>
+          <a:bodyPr rtlCol="0" anchor="ctr" wrap="square" lIns="73152" rIns="73152" tIns="36576" bIns="36576"/>
           <a:lstStyle/>
           <a:p>
             <a:pPr algn="l">
               <a:spcAft>
                 <a:spcPts val="0"/>
               </a:spcAft>
-              <a:defRPr sz="1400" b="0">
+              <a:defRPr sz="1600" b="0">
                 <a:solidFill>
                   <a:srgbClr val="FFFFFF"/>
                 </a:solidFill>
@@ -6916,25 +7620,25 @@
               </a:defRPr>
             </a:pPr>
             <a:r>
-              <a:t>  &lt;joint name="imu_joint" type="fixed"&gt;&lt;parent link="base_link"/&gt;&lt;child link="imu_link"/&gt;&lt;origin xyz="0 0 0.28"/&gt;&lt;/joint&gt;</a:t>
+              <a:t>mkdir -p ~/ros2_curri/my_agv_ws/src/agv_description/curriculum_stages/M05</a:t>
             </a:r>
             <a:br/>
             <a:r>
-              <a:t>&lt;/robot&gt;</a:t>
-            </a:r>
-          </a:p>
-        </p:txBody>
-      </p:sp>
-      <p:sp>
-        <p:nvSpPr>
-          <p:cNvPr id="10" name="TextBox 9"/>
-          <p:cNvSpPr txBox="1"/>
-          <p:nvPr/>
-        </p:nvSpPr>
-        <p:spPr>
-          <a:xfrm>
-            <a:off x="749808" y="6181344"/>
-            <a:ext cx="10789920" cy="201168"/>
+              <a:t>nano ~/ros2_curri/my_agv_ws/src/agv_description/curriculum_stages/M05/agv.urdf</a:t>
+            </a:r>
+          </a:p>
+        </p:txBody>
+      </p:sp>
+      <p:sp>
+        <p:nvSpPr>
+          <p:cNvPr id="12" name="TextBox 11"/>
+          <p:cNvSpPr txBox="1"/>
+          <p:nvPr/>
+        </p:nvSpPr>
+        <p:spPr>
+          <a:xfrm>
+            <a:off x="804672" y="4901184"/>
+            <a:ext cx="10241280" cy="329184"/>
           </a:xfrm>
           <a:prstGeom prst="rect">
             <a:avLst/>
@@ -6947,19 +7651,58 @@
           </a:bodyPr>
           <a:lstStyle/>
           <a:p>
-            <a:pPr algn="l">
-              <a:spcAft>
-                <a:spcPts val="0"/>
-              </a:spcAft>
-              <a:defRPr sz="1000" b="0">
-                <a:solidFill>
-                  <a:srgbClr val="5C6672"/>
-                </a:solidFill>
-                <a:latin typeface="Noto Sans CJK KR"/>
-              </a:defRPr>
-            </a:pPr>
-            <a:r>
-              <a:t>파일 전체 2/2 · 이 슬라이드 다음에 같은 파일의 나머지 줄이 이어집니다.</a:t>
+            <a:pPr algn="ctr">
+              <a:spcAft>
+                <a:spcPts val="0"/>
+              </a:spcAft>
+              <a:defRPr sz="1600" b="1">
+                <a:solidFill>
+                  <a:srgbClr val="DB7E22"/>
+                </a:solidFill>
+                <a:latin typeface="Noto Sans CJK KR"/>
+              </a:defRPr>
+            </a:pPr>
+            <a:r>
+              <a:t>nano 저장: Ctrl+O → Enter → Ctrl+X  |  파일이 열리면 아직 비어 있는 것이 정상입니다.</a:t>
+            </a:r>
+          </a:p>
+        </p:txBody>
+      </p:sp>
+      <p:sp>
+        <p:nvSpPr>
+          <p:cNvPr id="13" name="TextBox 12"/>
+          <p:cNvSpPr txBox="1"/>
+          <p:nvPr/>
+        </p:nvSpPr>
+        <p:spPr>
+          <a:xfrm>
+            <a:off x="804672" y="5504688"/>
+            <a:ext cx="10241280" cy="329184"/>
+          </a:xfrm>
+          <a:prstGeom prst="rect">
+            <a:avLst/>
+          </a:prstGeom>
+          <a:noFill/>
+        </p:spPr>
+        <p:txBody>
+          <a:bodyPr wrap="square" lIns="73152" rIns="73152" tIns="36576" bIns="36576">
+            <a:spAutoFit/>
+          </a:bodyPr>
+          <a:lstStyle/>
+          <a:p>
+            <a:pPr algn="ctr">
+              <a:spcAft>
+                <a:spcPts val="0"/>
+              </a:spcAft>
+              <a:defRPr sz="1500" b="1">
+                <a:solidFill>
+                  <a:srgbClr val="2A8B5A"/>
+                </a:solidFill>
+                <a:latin typeface="Noto Sans CJK KR"/>
+              </a:defRPr>
+            </a:pPr>
+            <a:r>
+              <a:t>다음 단계의 확인 화면: terminal의 base_link 자식 6개와 RViz의 바퀴·센서 frame</a:t>
             </a:r>
           </a:p>
         </p:txBody>
@@ -7016,7 +7759,7 @@
               </a:defRPr>
             </a:pPr>
             <a:r>
-              <a:t>build → source → run 순서로 실행한다</a:t>
+              <a:t>구현 1/1: 코드 입력 (1/2)</a:t>
             </a:r>
           </a:p>
         </p:txBody>
@@ -7055,7 +7798,7 @@
               </a:defRPr>
             </a:pPr>
             <a:r>
-              <a:t>새 파일 또는 수정 파일은 build와 source 뒤에만 실행 이름·설정에 반영됩니다.</a:t>
+              <a:t>~/ros2_curri/my_agv_ws/src/agv_description/curriculum_stages/M05/agv.urdf</a:t>
             </a:r>
           </a:p>
         </p:txBody>
@@ -7191,23 +7934,124 @@
               </a:defRPr>
             </a:pPr>
             <a:r>
-              <a:t>현재 단계 실행    |    현재 폴더 ~/ros2_curri/agv_ws    |    현재 터미널</a:t>
-            </a:r>
-          </a:p>
-        </p:txBody>
-      </p:sp>
-      <p:sp>
-        <p:nvSpPr>
-          <p:cNvPr id="7" name="Rounded Rectangle 6"/>
+              <a:t>현재 단계 파일 1/1 · 입력 1/2    |    현재 폴더 ~/ros2_curri/my_agv_ws    |    현재 터미널</a:t>
+            </a:r>
+          </a:p>
+        </p:txBody>
+      </p:sp>
+      <p:sp>
+        <p:nvSpPr>
+          <p:cNvPr id="7" name="TextBox 6"/>
+          <p:cNvSpPr txBox="1"/>
+          <p:nvPr/>
+        </p:nvSpPr>
+        <p:spPr>
+          <a:xfrm>
+            <a:off x="658368" y="1609344"/>
+            <a:ext cx="10972800" cy="384048"/>
+          </a:xfrm>
+          <a:prstGeom prst="rect">
+            <a:avLst/>
+          </a:prstGeom>
+          <a:noFill/>
+        </p:spPr>
+        <p:txBody>
+          <a:bodyPr wrap="square" lIns="73152" rIns="73152" tIns="36576" bIns="36576">
+            <a:spAutoFit/>
+          </a:bodyPr>
+          <a:lstStyle/>
+          <a:p>
+            <a:pPr algn="l">
+              <a:spcAft>
+                <a:spcPts val="0"/>
+              </a:spcAft>
+              <a:defRPr sz="1400" b="1">
+                <a:solidFill>
+                  <a:srgbClr val="122C4E"/>
+                </a:solidFill>
+                <a:latin typeface="Noto Sans CJK KR"/>
+              </a:defRPr>
+            </a:pPr>
+            <a:r>
+              <a:t>이 블록이 하는 일: 파일의 root와 첫 model/link를 입력합니다. 태그 여닫는 순서를 그대로 유지합니다.</a:t>
+            </a:r>
+          </a:p>
+        </p:txBody>
+      </p:sp>
+      <p:sp>
+        <p:nvSpPr>
+          <p:cNvPr id="8" name="Rectangle 7"/>
           <p:cNvSpPr/>
           <p:nvPr/>
         </p:nvSpPr>
         <p:spPr>
           <a:xfrm>
-            <a:off x="658368" y="1700784"/>
-            <a:ext cx="10972800" cy="3182112"/>
-          </a:xfrm>
-          <a:prstGeom prst="roundRect">
+            <a:off x="658368" y="1956816"/>
+            <a:ext cx="10972800" cy="603504"/>
+          </a:xfrm>
+          <a:prstGeom prst="rect">
+            <a:avLst/>
+          </a:prstGeom>
+          <a:solidFill>
+            <a:srgbClr val="F4F7FB"/>
+          </a:solidFill>
+          <a:ln>
+            <a:solidFill>
+              <a:srgbClr val="F4F7FB"/>
+            </a:solidFill>
+          </a:ln>
+        </p:spPr>
+        <p:style>
+          <a:lnRef idx="1">
+            <a:schemeClr val="accent1"/>
+          </a:lnRef>
+          <a:fillRef idx="3">
+            <a:schemeClr val="accent1"/>
+          </a:fillRef>
+          <a:effectRef idx="2">
+            <a:schemeClr val="accent1"/>
+          </a:effectRef>
+          <a:fontRef idx="minor">
+            <a:schemeClr val="lt1"/>
+          </a:fontRef>
+        </p:style>
+        <p:txBody>
+          <a:bodyPr rtlCol="0" anchor="ctr" wrap="square" lIns="73152" rIns="73152" tIns="36576" bIns="36576"/>
+          <a:lstStyle/>
+          <a:p>
+            <a:pPr algn="l">
+              <a:spcAft>
+                <a:spcPts val="0"/>
+              </a:spcAft>
+              <a:defRPr sz="1300" b="0">
+                <a:solidFill>
+                  <a:srgbClr val="122C4E"/>
+                </a:solidFill>
+                <a:latin typeface="DejaVu Sans Mono"/>
+              </a:defRPr>
+            </a:pPr>
+            <a:r>
+              <a:t>현재 열린 파일: ~/ros2_curri/my_agv_ws/src/agv_description/curriculum_stages/M05/agv.urdf</a:t>
+            </a:r>
+            <a:br/>
+            <a:r>
+              <a:t>아래 코드만 입력 → Ctrl+O → Enter로 저장 → 다음 블록으로 이동</a:t>
+            </a:r>
+          </a:p>
+        </p:txBody>
+      </p:sp>
+      <p:sp>
+        <p:nvSpPr>
+          <p:cNvPr id="9" name="Rectangle 8"/>
+          <p:cNvSpPr/>
+          <p:nvPr/>
+        </p:nvSpPr>
+        <p:spPr>
+          <a:xfrm>
+            <a:off x="658368" y="2706624"/>
+            <a:ext cx="10972800" cy="3364992"/>
+          </a:xfrm>
+          <a:prstGeom prst="rect">
             <a:avLst/>
           </a:prstGeom>
           <a:solidFill>
@@ -7234,14 +8078,14 @@
           </a:fontRef>
         </p:style>
         <p:txBody>
-          <a:bodyPr rtlCol="0" anchor="ctr" wrap="square" lIns="73152" rIns="73152" tIns="36576" bIns="36576"/>
+          <a:bodyPr rtlCol="0" anchor="ctr" wrap="square" lIns="164592" rIns="164592" tIns="109728" bIns="36576"/>
           <a:lstStyle/>
           <a:p>
             <a:pPr algn="l">
               <a:spcAft>
                 <a:spcPts val="0"/>
               </a:spcAft>
-              <a:defRPr sz="1600" b="0">
+              <a:defRPr sz="1400" b="0">
                 <a:solidFill>
                   <a:srgbClr val="FFFFFF"/>
                 </a:solidFill>
@@ -7249,29 +8093,65 @@
               </a:defRPr>
             </a:pPr>
             <a:r>
-              <a:t>cd ~/ros2_curri/agv_ws</a:t>
+              <a:t>&lt;?xml version="1.0"?&gt;</a:t>
             </a:r>
             <a:br/>
             <a:r>
-              <a:t>check_urdf src/agv_description/curriculum_stages/M05/agv.urdf</a:t>
+              <a:t>&lt;robot name="agv_m05"&gt;</a:t>
             </a:r>
             <a:br/>
             <a:r>
-              <a:t># 다음 M06에서 처음으로 xacro를 사용한다.</a:t>
-            </a:r>
-          </a:p>
-        </p:txBody>
-      </p:sp>
-      <p:sp>
-        <p:nvSpPr>
-          <p:cNvPr id="8" name="TextBox 7"/>
-          <p:cNvSpPr txBox="1"/>
-          <p:nvPr/>
-        </p:nvSpPr>
-        <p:spPr>
-          <a:xfrm>
-            <a:off x="786384" y="5239512"/>
-            <a:ext cx="1261872" cy="237744"/>
+              <a:t>  &lt;link name="base_link"&gt;&lt;visual&gt;&lt;origin xyz="0 0 0.16"/&gt;&lt;geometry&gt;&lt;box size="0.60 0.42 0.16"/&gt;&lt;/geometry&gt;&lt;/visual&gt;&lt;/link&gt;</a:t>
+            </a:r>
+            <a:br/>
+            <a:r>
+              <a:t>  &lt;link name="left_wheel_link"&gt;&lt;visual&gt;&lt;origin rpy="1.5708 0 0"/&gt;&lt;geometry&gt;&lt;cylinder radius="0.08" length="0.05"/&gt;&lt;/geometry&gt;&lt;/visual&gt;&lt;/link&gt;</a:t>
+            </a:r>
+            <a:br/>
+            <a:r>
+              <a:t>  &lt;link name="right_wheel_link"&gt;&lt;visual&gt;&lt;origin rpy="1.5708 0 0"/&gt;&lt;geometry&gt;&lt;cylinder radius="0.08" length="0.05"/&gt;&lt;/geometry&gt;&lt;/visual&gt;&lt;/link&gt;</a:t>
+            </a:r>
+            <a:br/>
+            <a:r>
+              <a:t>  &lt;link name="caster_link"&gt;&lt;visual&gt;&lt;geometry&gt;&lt;sphere radius="0.04"/&gt;&lt;/geometry&gt;&lt;/visual&gt;&lt;/link&gt;</a:t>
+            </a:r>
+            <a:br/>
+            <a:r>
+              <a:t>  &lt;link name="camera_link"/&gt;&lt;link name="lidar_link"/&gt;&lt;link name="imu_link"/&gt;</a:t>
+            </a:r>
+            <a:br/>
+            <a:r>
+              <a:t>  &lt;joint name="left_wheel_joint" type="continuous"&gt;&lt;parent link="base_link"/&gt;&lt;child link="left_wheel_link"/&gt;&lt;origin xyz="0 0.19 0.08"/&gt;&lt;axis xyz="0 1 0"/&gt;&lt;/joint&gt;</a:t>
+            </a:r>
+            <a:br/>
+            <a:r>
+              <a:t>  &lt;joint name="right_wheel_joint" type="continuous"&gt;&lt;parent link="base_link"/&gt;&lt;child link="right_wheel_link"/&gt;&lt;origin xyz="0 -0.19 0.08"/&gt;&lt;axis xyz="0 1 0"/&gt;&lt;/joint&gt;</a:t>
+            </a:r>
+            <a:br/>
+            <a:r>
+              <a:t>  &lt;joint name="caster_joint" type="fixed"&gt;&lt;parent link="base_link"/&gt;&lt;child link="caster_link"/&gt;&lt;origin xyz="-0.24 0 0.04"/&gt;&lt;/joint&gt;</a:t>
+            </a:r>
+            <a:br/>
+            <a:r>
+              <a:t>  &lt;joint name="camera_joint" type="fixed"&gt;&lt;parent link="base_link"/&gt;&lt;child link="camera_link"/&gt;&lt;origin xyz="0.30 0 0.26"/&gt;&lt;/joint&gt;</a:t>
+            </a:r>
+            <a:br/>
+            <a:r>
+              <a:t>  &lt;joint name="lidar_joint" type="fixed"&gt;&lt;parent link="base_link"/&gt;&lt;child link="lidar_link"/&gt;&lt;origin xyz="0.12 0 0.29"/&gt;&lt;/joint&gt;</a:t>
+            </a:r>
+          </a:p>
+        </p:txBody>
+      </p:sp>
+      <p:sp>
+        <p:nvSpPr>
+          <p:cNvPr id="10" name="TextBox 9"/>
+          <p:cNvSpPr txBox="1"/>
+          <p:nvPr/>
+        </p:nvSpPr>
+        <p:spPr>
+          <a:xfrm>
+            <a:off x="749808" y="6181344"/>
+            <a:ext cx="10789920" cy="201168"/>
           </a:xfrm>
           <a:prstGeom prst="rect">
             <a:avLst/>
@@ -7288,54 +8168,15 @@
               <a:spcAft>
                 <a:spcPts val="0"/>
               </a:spcAft>
-              <a:defRPr sz="1800" b="1">
-                <a:solidFill>
-                  <a:srgbClr val="2A8B5A"/>
-                </a:solidFill>
-                <a:latin typeface="Noto Sans CJK KR"/>
-              </a:defRPr>
-            </a:pPr>
-            <a:r>
-              <a:t>확인 기준</a:t>
-            </a:r>
-          </a:p>
-        </p:txBody>
-      </p:sp>
-      <p:sp>
-        <p:nvSpPr>
-          <p:cNvPr id="9" name="TextBox 8"/>
-          <p:cNvSpPr txBox="1"/>
-          <p:nvPr/>
-        </p:nvSpPr>
-        <p:spPr>
-          <a:xfrm>
-            <a:off x="786384" y="5532120"/>
-            <a:ext cx="10469880" cy="420624"/>
-          </a:xfrm>
-          <a:prstGeom prst="rect">
-            <a:avLst/>
-          </a:prstGeom>
-          <a:noFill/>
-        </p:spPr>
-        <p:txBody>
-          <a:bodyPr wrap="square" lIns="73152" rIns="73152" tIns="36576" bIns="36576">
-            <a:spAutoFit/>
-          </a:bodyPr>
-          <a:lstStyle/>
-          <a:p>
-            <a:pPr algn="l">
-              <a:spcAft>
-                <a:spcPts val="0"/>
-              </a:spcAft>
-              <a:defRPr sz="1800" b="0">
-                <a:solidFill>
-                  <a:srgbClr val="122C4E"/>
-                </a:solidFill>
-                <a:latin typeface="Noto Sans CJK KR"/>
-              </a:defRPr>
-            </a:pPr>
-            <a:r>
-              <a:t>RobotModel과 TF에서 base, 두 wheel, camera, lidar, imu 연결을 확인한다.</a:t>
+              <a:defRPr sz="1000" b="0">
+                <a:solidFill>
+                  <a:srgbClr val="5C6672"/>
+                </a:solidFill>
+                <a:latin typeface="Noto Sans CJK KR"/>
+              </a:defRPr>
+            </a:pPr>
+            <a:r>
+              <a:t>입력 1/2 · 이 파일의 다음 코드 블록이 바로 다음 슬라이드에 이어집니다.</a:t>
             </a:r>
           </a:p>
         </p:txBody>
@@ -7392,7 +8233,7 @@
               </a:defRPr>
             </a:pPr>
             <a:r>
-              <a:t>정상 결과: 실제 환경에서 확인한 출력</a:t>
+              <a:t>구현 1/1: 코드 입력 (2/2)</a:t>
             </a:r>
           </a:p>
         </p:txBody>
@@ -7431,7 +8272,7 @@
               </a:defRPr>
             </a:pPr>
             <a:r>
-              <a:t>실제 ROS 2 환경의 파일·패키지·구성 검증 로그</a:t>
+              <a:t>~/ros2_curri/my_agv_ws/src/agv_description/curriculum_stages/M05/agv.urdf</a:t>
             </a:r>
           </a:p>
         </p:txBody>
@@ -7514,30 +8355,64 @@
           </a:p>
         </p:txBody>
       </p:sp>
-      <p:pic>
-        <p:nvPicPr>
-          <p:cNvPr id="6" name="Picture 5" descr="validation_terminal.png"/>
-          <p:cNvPicPr>
-            <a:picLocks noChangeAspect="1"/>
-          </p:cNvPicPr>
-          <p:nvPr/>
-        </p:nvPicPr>
-        <p:blipFill>
-          <a:blip r:embed="rId2"/>
-          <a:stretch>
-            <a:fillRect/>
-          </a:stretch>
-        </p:blipFill>
-        <p:spPr>
-          <a:xfrm>
-            <a:off x="790956" y="1884338"/>
-            <a:ext cx="10607040" cy="3738546"/>
-          </a:xfrm>
-          <a:prstGeom prst="rect">
-            <a:avLst/>
-          </a:prstGeom>
-        </p:spPr>
-      </p:pic>
+      <p:sp>
+        <p:nvSpPr>
+          <p:cNvPr id="6" name="Rectangle 5"/>
+          <p:cNvSpPr/>
+          <p:nvPr/>
+        </p:nvSpPr>
+        <p:spPr>
+          <a:xfrm>
+            <a:off x="566928" y="1188720"/>
+            <a:ext cx="11064240" cy="347472"/>
+          </a:xfrm>
+          <a:prstGeom prst="rect">
+            <a:avLst/>
+          </a:prstGeom>
+          <a:solidFill>
+            <a:srgbClr val="F4F7FB"/>
+          </a:solidFill>
+          <a:ln>
+            <a:solidFill>
+              <a:srgbClr val="F4F7FB"/>
+            </a:solidFill>
+          </a:ln>
+        </p:spPr>
+        <p:style>
+          <a:lnRef idx="1">
+            <a:schemeClr val="accent1"/>
+          </a:lnRef>
+          <a:fillRef idx="3">
+            <a:schemeClr val="accent1"/>
+          </a:fillRef>
+          <a:effectRef idx="2">
+            <a:schemeClr val="accent1"/>
+          </a:effectRef>
+          <a:fontRef idx="minor">
+            <a:schemeClr val="lt1"/>
+          </a:fontRef>
+        </p:style>
+        <p:txBody>
+          <a:bodyPr rtlCol="0" anchor="ctr" wrap="square" lIns="73152" rIns="73152" tIns="36576" bIns="36576"/>
+          <a:lstStyle/>
+          <a:p>
+            <a:pPr algn="l">
+              <a:spcAft>
+                <a:spcPts val="0"/>
+              </a:spcAft>
+              <a:defRPr sz="1300" b="1">
+                <a:solidFill>
+                  <a:srgbClr val="122C4E"/>
+                </a:solidFill>
+                <a:latin typeface="Noto Sans CJK KR"/>
+              </a:defRPr>
+            </a:pPr>
+            <a:r>
+              <a:t>현재 단계 파일 1/1 · 입력 2/2    |    현재 폴더 ~/ros2_curri/my_agv_ws    |    현재 터미널</a:t>
+            </a:r>
+          </a:p>
+        </p:txBody>
+      </p:sp>
       <p:sp>
         <p:nvSpPr>
           <p:cNvPr id="7" name="TextBox 6"/>
@@ -7546,8 +8421,8 @@
         </p:nvSpPr>
         <p:spPr>
           <a:xfrm>
-            <a:off x="777240" y="6144768"/>
-            <a:ext cx="10607040" cy="310896"/>
+            <a:off x="658368" y="1609344"/>
+            <a:ext cx="10972800" cy="384048"/>
           </a:xfrm>
           <a:prstGeom prst="rect">
             <a:avLst/>
@@ -7560,19 +8435,182 @@
           </a:bodyPr>
           <a:lstStyle/>
           <a:p>
-            <a:pPr algn="ctr">
-              <a:spcAft>
-                <a:spcPts val="0"/>
-              </a:spcAft>
-              <a:defRPr sz="1100" b="1">
-                <a:solidFill>
-                  <a:srgbClr val="2A8B5A"/>
-                </a:solidFill>
-                <a:latin typeface="Noto Sans CJK KR"/>
-              </a:defRPr>
-            </a:pPr>
-            <a:r>
-              <a:t>화면에서 확인: ① 명령/설정  ② 정상 출력 또는 화면  ③ 다음 검증 명령으로 재확인</a:t>
+            <a:pPr algn="l">
+              <a:spcAft>
+                <a:spcPts val="0"/>
+              </a:spcAft>
+              <a:defRPr sz="1400" b="1">
+                <a:solidFill>
+                  <a:srgbClr val="122C4E"/>
+                </a:solidFill>
+                <a:latin typeface="Noto Sans CJK KR"/>
+              </a:defRPr>
+            </a:pPr>
+            <a:r>
+              <a:t>이 블록이 하는 일: 마지막 joint·sensor·plugin과 닫는 태그를 입력해 구조를 완성합니다.</a:t>
+            </a:r>
+          </a:p>
+        </p:txBody>
+      </p:sp>
+      <p:sp>
+        <p:nvSpPr>
+          <p:cNvPr id="8" name="Rectangle 7"/>
+          <p:cNvSpPr/>
+          <p:nvPr/>
+        </p:nvSpPr>
+        <p:spPr>
+          <a:xfrm>
+            <a:off x="658368" y="1956816"/>
+            <a:ext cx="10972800" cy="603504"/>
+          </a:xfrm>
+          <a:prstGeom prst="rect">
+            <a:avLst/>
+          </a:prstGeom>
+          <a:solidFill>
+            <a:srgbClr val="F4F7FB"/>
+          </a:solidFill>
+          <a:ln>
+            <a:solidFill>
+              <a:srgbClr val="F4F7FB"/>
+            </a:solidFill>
+          </a:ln>
+        </p:spPr>
+        <p:style>
+          <a:lnRef idx="1">
+            <a:schemeClr val="accent1"/>
+          </a:lnRef>
+          <a:fillRef idx="3">
+            <a:schemeClr val="accent1"/>
+          </a:fillRef>
+          <a:effectRef idx="2">
+            <a:schemeClr val="accent1"/>
+          </a:effectRef>
+          <a:fontRef idx="minor">
+            <a:schemeClr val="lt1"/>
+          </a:fontRef>
+        </p:style>
+        <p:txBody>
+          <a:bodyPr rtlCol="0" anchor="ctr" wrap="square" lIns="73152" rIns="73152" tIns="36576" bIns="36576"/>
+          <a:lstStyle/>
+          <a:p>
+            <a:pPr algn="l">
+              <a:spcAft>
+                <a:spcPts val="0"/>
+              </a:spcAft>
+              <a:defRPr sz="1300" b="0">
+                <a:solidFill>
+                  <a:srgbClr val="122C4E"/>
+                </a:solidFill>
+                <a:latin typeface="DejaVu Sans Mono"/>
+              </a:defRPr>
+            </a:pPr>
+            <a:r>
+              <a:t>현재 열린 파일: ~/ros2_curri/my_agv_ws/src/agv_description/curriculum_stages/M05/agv.urdf</a:t>
+            </a:r>
+            <a:br/>
+            <a:r>
+              <a:t>아래 코드만 입력 → Ctrl+O → Enter로 저장 → 다음 블록으로 이동</a:t>
+            </a:r>
+          </a:p>
+        </p:txBody>
+      </p:sp>
+      <p:sp>
+        <p:nvSpPr>
+          <p:cNvPr id="9" name="Rectangle 8"/>
+          <p:cNvSpPr/>
+          <p:nvPr/>
+        </p:nvSpPr>
+        <p:spPr>
+          <a:xfrm>
+            <a:off x="658368" y="2706624"/>
+            <a:ext cx="10972800" cy="3364992"/>
+          </a:xfrm>
+          <a:prstGeom prst="rect">
+            <a:avLst/>
+          </a:prstGeom>
+          <a:solidFill>
+            <a:srgbClr val="1D232D"/>
+          </a:solidFill>
+          <a:ln>
+            <a:solidFill>
+              <a:srgbClr val="1D232D"/>
+            </a:solidFill>
+          </a:ln>
+        </p:spPr>
+        <p:style>
+          <a:lnRef idx="1">
+            <a:schemeClr val="accent1"/>
+          </a:lnRef>
+          <a:fillRef idx="3">
+            <a:schemeClr val="accent1"/>
+          </a:fillRef>
+          <a:effectRef idx="2">
+            <a:schemeClr val="accent1"/>
+          </a:effectRef>
+          <a:fontRef idx="minor">
+            <a:schemeClr val="lt1"/>
+          </a:fontRef>
+        </p:style>
+        <p:txBody>
+          <a:bodyPr rtlCol="0" anchor="ctr" wrap="square" lIns="164592" rIns="164592" tIns="109728" bIns="36576"/>
+          <a:lstStyle/>
+          <a:p>
+            <a:pPr algn="l">
+              <a:spcAft>
+                <a:spcPts val="0"/>
+              </a:spcAft>
+              <a:defRPr sz="1400" b="0">
+                <a:solidFill>
+                  <a:srgbClr val="FFFFFF"/>
+                </a:solidFill>
+                <a:latin typeface="DejaVu Sans Mono"/>
+              </a:defRPr>
+            </a:pPr>
+            <a:r>
+              <a:t>  &lt;joint name="imu_joint" type="fixed"&gt;&lt;parent link="base_link"/&gt;&lt;child link="imu_link"/&gt;&lt;origin xyz="0 0 0.28"/&gt;&lt;/joint&gt;</a:t>
+            </a:r>
+            <a:br/>
+            <a:r>
+              <a:t>&lt;/robot&gt;</a:t>
+            </a:r>
+          </a:p>
+        </p:txBody>
+      </p:sp>
+      <p:sp>
+        <p:nvSpPr>
+          <p:cNvPr id="10" name="TextBox 9"/>
+          <p:cNvSpPr txBox="1"/>
+          <p:nvPr/>
+        </p:nvSpPr>
+        <p:spPr>
+          <a:xfrm>
+            <a:off x="749808" y="6181344"/>
+            <a:ext cx="10789920" cy="201168"/>
+          </a:xfrm>
+          <a:prstGeom prst="rect">
+            <a:avLst/>
+          </a:prstGeom>
+          <a:noFill/>
+        </p:spPr>
+        <p:txBody>
+          <a:bodyPr wrap="square" lIns="73152" rIns="73152" tIns="36576" bIns="36576">
+            <a:spAutoFit/>
+          </a:bodyPr>
+          <a:lstStyle/>
+          <a:p>
+            <a:pPr algn="l">
+              <a:spcAft>
+                <a:spcPts val="0"/>
+              </a:spcAft>
+              <a:defRPr sz="1000" b="0">
+                <a:solidFill>
+                  <a:srgbClr val="5C6672"/>
+                </a:solidFill>
+                <a:latin typeface="Noto Sans CJK KR"/>
+              </a:defRPr>
+            </a:pPr>
+            <a:r>
+              <a:t>입력 2/2 · 이 파일의 다음 코드 블록이 바로 다음 슬라이드에 이어집니다.</a:t>
             </a:r>
           </a:p>
         </p:txBody>
@@ -7629,7 +8667,7 @@
               </a:defRPr>
             </a:pPr>
             <a:r>
-              <a:t>정상 결과: 실제 환경에서 확인한 출력</a:t>
+              <a:t>구현 뒤 실행 1/2: 단일 URDF를 검사한다</a:t>
             </a:r>
           </a:p>
         </p:txBody>
@@ -7668,7 +8706,7 @@
               </a:defRPr>
             </a:pPr>
             <a:r>
-              <a:t>실제 terminal: check_urdf가 base_link와 6개 자식 link를 확인한 결과</a:t>
+              <a:t>방금 직접 만든 파일을 실행·검사하며 다음 파일로 넘어갈 기준을 만듭니다.</a:t>
             </a:r>
           </a:p>
         </p:txBody>
@@ -7751,30 +8789,64 @@
           </a:p>
         </p:txBody>
       </p:sp>
-      <p:pic>
-        <p:nvPicPr>
-          <p:cNvPr id="6" name="Picture 5" descr="02_m05_urdf_terminal_actual.png"/>
-          <p:cNvPicPr>
-            <a:picLocks noChangeAspect="1"/>
-          </p:cNvPicPr>
-          <p:nvPr/>
-        </p:nvPicPr>
-        <p:blipFill>
-          <a:blip r:embed="rId2"/>
-          <a:stretch>
-            <a:fillRect/>
-          </a:stretch>
-        </p:blipFill>
-        <p:spPr>
-          <a:xfrm>
-            <a:off x="2789770" y="1353312"/>
-            <a:ext cx="6609411" cy="4800600"/>
-          </a:xfrm>
-          <a:prstGeom prst="rect">
-            <a:avLst/>
-          </a:prstGeom>
-        </p:spPr>
-      </p:pic>
+      <p:sp>
+        <p:nvSpPr>
+          <p:cNvPr id="6" name="Rectangle 5"/>
+          <p:cNvSpPr/>
+          <p:nvPr/>
+        </p:nvSpPr>
+        <p:spPr>
+          <a:xfrm>
+            <a:off x="566928" y="1188720"/>
+            <a:ext cx="11064240" cy="347472"/>
+          </a:xfrm>
+          <a:prstGeom prst="rect">
+            <a:avLst/>
+          </a:prstGeom>
+          <a:solidFill>
+            <a:srgbClr val="F4F7FB"/>
+          </a:solidFill>
+          <a:ln>
+            <a:solidFill>
+              <a:srgbClr val="F4F7FB"/>
+            </a:solidFill>
+          </a:ln>
+        </p:spPr>
+        <p:style>
+          <a:lnRef idx="1">
+            <a:schemeClr val="accent1"/>
+          </a:lnRef>
+          <a:fillRef idx="3">
+            <a:schemeClr val="accent1"/>
+          </a:fillRef>
+          <a:effectRef idx="2">
+            <a:schemeClr val="accent1"/>
+          </a:effectRef>
+          <a:fontRef idx="minor">
+            <a:schemeClr val="lt1"/>
+          </a:fontRef>
+        </p:style>
+        <p:txBody>
+          <a:bodyPr rtlCol="0" anchor="ctr" wrap="square" lIns="73152" rIns="73152" tIns="36576" bIns="36576"/>
+          <a:lstStyle/>
+          <a:p>
+            <a:pPr algn="l">
+              <a:spcAft>
+                <a:spcPts val="0"/>
+              </a:spcAft>
+              <a:defRPr sz="1300" b="1">
+                <a:solidFill>
+                  <a:srgbClr val="122C4E"/>
+                </a:solidFill>
+                <a:latin typeface="Noto Sans CJK KR"/>
+              </a:defRPr>
+            </a:pPr>
+            <a:r>
+              <a:t>현재 단계 실행 1/2    |    현재 폴더 ~/ros2_curri/my_agv_ws    |    현재 터미널</a:t>
+            </a:r>
+          </a:p>
+        </p:txBody>
+      </p:sp>
       <p:sp>
         <p:nvSpPr>
           <p:cNvPr id="7" name="TextBox 6"/>
@@ -7783,8 +8855,8 @@
         </p:nvSpPr>
         <p:spPr>
           <a:xfrm>
-            <a:off x="777240" y="6144768"/>
-            <a:ext cx="10607040" cy="310896"/>
+            <a:off x="676656" y="1764792"/>
+            <a:ext cx="1828800" cy="347472"/>
           </a:xfrm>
           <a:prstGeom prst="rect">
             <a:avLst/>
@@ -7797,11 +8869,151 @@
           </a:bodyPr>
           <a:lstStyle/>
           <a:p>
-            <a:pPr algn="ctr">
-              <a:spcAft>
-                <a:spcPts val="0"/>
-              </a:spcAft>
-              <a:defRPr sz="1100" b="1">
+            <a:pPr algn="l">
+              <a:spcAft>
+                <a:spcPts val="0"/>
+              </a:spcAft>
+              <a:defRPr sz="1800" b="1">
+                <a:solidFill>
+                  <a:srgbClr val="225B9B"/>
+                </a:solidFill>
+                <a:latin typeface="Noto Sans CJK KR"/>
+              </a:defRPr>
+            </a:pPr>
+            <a:r>
+              <a:t>왜 하는가</a:t>
+            </a:r>
+          </a:p>
+        </p:txBody>
+      </p:sp>
+      <p:sp>
+        <p:nvSpPr>
+          <p:cNvPr id="8" name="TextBox 7"/>
+          <p:cNvSpPr txBox="1"/>
+          <p:nvPr/>
+        </p:nvSpPr>
+        <p:spPr>
+          <a:xfrm>
+            <a:off x="676656" y="2103120"/>
+            <a:ext cx="10789920" cy="512064"/>
+          </a:xfrm>
+          <a:prstGeom prst="rect">
+            <a:avLst/>
+          </a:prstGeom>
+          <a:noFill/>
+        </p:spPr>
+        <p:txBody>
+          <a:bodyPr wrap="square" lIns="73152" rIns="73152" tIns="36576" bIns="36576">
+            <a:spAutoFit/>
+          </a:bodyPr>
+          <a:lstStyle/>
+          <a:p>
+            <a:pPr algn="l">
+              <a:spcAft>
+                <a:spcPts val="0"/>
+              </a:spcAft>
+              <a:defRPr sz="2000" b="0">
+                <a:solidFill>
+                  <a:srgbClr val="122C4E"/>
+                </a:solidFill>
+                <a:latin typeface="Noto Sans CJK KR"/>
+              </a:defRPr>
+            </a:pPr>
+            <a:r>
+              <a:t>M05에서는 macro·property·xacro 없이 한 파일에 link와 joint를 직접 작성한다.</a:t>
+            </a:r>
+          </a:p>
+        </p:txBody>
+      </p:sp>
+      <p:sp>
+        <p:nvSpPr>
+          <p:cNvPr id="9" name="Rounded Rectangle 8"/>
+          <p:cNvSpPr/>
+          <p:nvPr/>
+        </p:nvSpPr>
+        <p:spPr>
+          <a:xfrm>
+            <a:off x="676656" y="2871216"/>
+            <a:ext cx="10835640" cy="2331720"/>
+          </a:xfrm>
+          <a:prstGeom prst="roundRect">
+            <a:avLst/>
+          </a:prstGeom>
+          <a:solidFill>
+            <a:srgbClr val="1D232D"/>
+          </a:solidFill>
+          <a:ln>
+            <a:solidFill>
+              <a:srgbClr val="1D232D"/>
+            </a:solidFill>
+          </a:ln>
+        </p:spPr>
+        <p:style>
+          <a:lnRef idx="1">
+            <a:schemeClr val="accent1"/>
+          </a:lnRef>
+          <a:fillRef idx="3">
+            <a:schemeClr val="accent1"/>
+          </a:fillRef>
+          <a:effectRef idx="2">
+            <a:schemeClr val="accent1"/>
+          </a:effectRef>
+          <a:fontRef idx="minor">
+            <a:schemeClr val="lt1"/>
+          </a:fontRef>
+        </p:style>
+        <p:txBody>
+          <a:bodyPr rtlCol="0" anchor="ctr" wrap="square" lIns="73152" rIns="73152" tIns="36576" bIns="36576"/>
+          <a:lstStyle/>
+          <a:p>
+            <a:pPr algn="l">
+              <a:spcAft>
+                <a:spcPts val="0"/>
+              </a:spcAft>
+              <a:defRPr sz="1600" b="0">
+                <a:solidFill>
+                  <a:srgbClr val="FFFFFF"/>
+                </a:solidFill>
+                <a:latin typeface="DejaVu Sans Mono"/>
+              </a:defRPr>
+            </a:pPr>
+            <a:r>
+              <a:t>cd ~/ros2_curri/my_agv_ws</a:t>
+            </a:r>
+            <a:br/>
+            <a:r>
+              <a:t>check_urdf src/agv_description/curriculum_stages/M05/agv.urdf</a:t>
+            </a:r>
+          </a:p>
+        </p:txBody>
+      </p:sp>
+      <p:sp>
+        <p:nvSpPr>
+          <p:cNvPr id="10" name="TextBox 9"/>
+          <p:cNvSpPr txBox="1"/>
+          <p:nvPr/>
+        </p:nvSpPr>
+        <p:spPr>
+          <a:xfrm>
+            <a:off x="768096" y="5468112"/>
+            <a:ext cx="1143000" cy="256032"/>
+          </a:xfrm>
+          <a:prstGeom prst="rect">
+            <a:avLst/>
+          </a:prstGeom>
+          <a:noFill/>
+        </p:spPr>
+        <p:txBody>
+          <a:bodyPr wrap="square" lIns="73152" rIns="73152" tIns="36576" bIns="36576">
+            <a:spAutoFit/>
+          </a:bodyPr>
+          <a:lstStyle/>
+          <a:p>
+            <a:pPr algn="l">
+              <a:spcAft>
+                <a:spcPts val="0"/>
+              </a:spcAft>
+              <a:defRPr sz="1800" b="1">
                 <a:solidFill>
                   <a:srgbClr val="2A8B5A"/>
                 </a:solidFill>
@@ -7809,7 +9021,46 @@
               </a:defRPr>
             </a:pPr>
             <a:r>
-              <a:t>화면에서 확인: root Link=base_link와 wheel·camera·lidar·imu child 이름을 찾습니다.</a:t>
+              <a:t>확인</a:t>
+            </a:r>
+          </a:p>
+        </p:txBody>
+      </p:sp>
+      <p:sp>
+        <p:nvSpPr>
+          <p:cNvPr id="11" name="TextBox 10"/>
+          <p:cNvSpPr txBox="1"/>
+          <p:nvPr/>
+        </p:nvSpPr>
+        <p:spPr>
+          <a:xfrm>
+            <a:off x="768096" y="5742432"/>
+            <a:ext cx="10561320" cy="347472"/>
+          </a:xfrm>
+          <a:prstGeom prst="rect">
+            <a:avLst/>
+          </a:prstGeom>
+          <a:noFill/>
+        </p:spPr>
+        <p:txBody>
+          <a:bodyPr wrap="square" lIns="73152" rIns="73152" tIns="36576" bIns="36576">
+            <a:spAutoFit/>
+          </a:bodyPr>
+          <a:lstStyle/>
+          <a:p>
+            <a:pPr algn="l">
+              <a:spcAft>
+                <a:spcPts val="0"/>
+              </a:spcAft>
+              <a:defRPr sz="1800" b="0">
+                <a:solidFill>
+                  <a:srgbClr val="122C4E"/>
+                </a:solidFill>
+                <a:latin typeface="Noto Sans CJK KR"/>
+              </a:defRPr>
+            </a:pPr>
+            <a:r>
+              <a:t>출력에서 topic·frame·파일 이름 또는 성공 메시지를 찾고, 맞지 않으면 다음 파일로 가지 않습니다.</a:t>
             </a:r>
           </a:p>
         </p:txBody>
@@ -7866,7 +9117,7 @@
               </a:defRPr>
             </a:pPr>
             <a:r>
-              <a:t>객관적 검증 명령으로 완료를 확인한다</a:t>
+              <a:t>구현 뒤 실행 2/2: RViz로 표시한다</a:t>
             </a:r>
           </a:p>
         </p:txBody>
@@ -7905,7 +9156,7 @@
               </a:defRPr>
             </a:pPr>
             <a:r>
-              <a:t>화면만 보지 말고 topic·frame·파일·parameter를 다시 확인합니다.</a:t>
+              <a:t>방금 직접 만든 파일을 실행·검사하며 다음 파일로 넘어갈 기준을 만듭니다.</a:t>
             </a:r>
           </a:p>
         </p:txBody>
@@ -8041,21 +9292,99 @@
               </a:defRPr>
             </a:pPr>
             <a:r>
-              <a:t>현재 단계 검증    |    현재 폴더 ~/ros2_curri/agv_ws    |    현재 터미널</a:t>
-            </a:r>
-          </a:p>
-        </p:txBody>
-      </p:sp>
-      <p:sp>
-        <p:nvSpPr>
-          <p:cNvPr id="7" name="Rounded Rectangle 6"/>
+              <a:t>현재 단계 실행 2/2    |    현재 폴더 ~/ros2_curri/my_agv_ws    |    새 터미널</a:t>
+            </a:r>
+          </a:p>
+        </p:txBody>
+      </p:sp>
+      <p:sp>
+        <p:nvSpPr>
+          <p:cNvPr id="7" name="TextBox 6"/>
+          <p:cNvSpPr txBox="1"/>
+          <p:nvPr/>
+        </p:nvSpPr>
+        <p:spPr>
+          <a:xfrm>
+            <a:off x="676656" y="1764792"/>
+            <a:ext cx="1828800" cy="347472"/>
+          </a:xfrm>
+          <a:prstGeom prst="rect">
+            <a:avLst/>
+          </a:prstGeom>
+          <a:noFill/>
+        </p:spPr>
+        <p:txBody>
+          <a:bodyPr wrap="square" lIns="73152" rIns="73152" tIns="36576" bIns="36576">
+            <a:spAutoFit/>
+          </a:bodyPr>
+          <a:lstStyle/>
+          <a:p>
+            <a:pPr algn="l">
+              <a:spcAft>
+                <a:spcPts val="0"/>
+              </a:spcAft>
+              <a:defRPr sz="1800" b="1">
+                <a:solidFill>
+                  <a:srgbClr val="225B9B"/>
+                </a:solidFill>
+                <a:latin typeface="Noto Sans CJK KR"/>
+              </a:defRPr>
+            </a:pPr>
+            <a:r>
+              <a:t>왜 하는가</a:t>
+            </a:r>
+          </a:p>
+        </p:txBody>
+      </p:sp>
+      <p:sp>
+        <p:nvSpPr>
+          <p:cNvPr id="8" name="TextBox 7"/>
+          <p:cNvSpPr txBox="1"/>
+          <p:nvPr/>
+        </p:nvSpPr>
+        <p:spPr>
+          <a:xfrm>
+            <a:off x="676656" y="2103120"/>
+            <a:ext cx="10789920" cy="512064"/>
+          </a:xfrm>
+          <a:prstGeom prst="rect">
+            <a:avLst/>
+          </a:prstGeom>
+          <a:noFill/>
+        </p:spPr>
+        <p:txBody>
+          <a:bodyPr wrap="square" lIns="73152" rIns="73152" tIns="36576" bIns="36576">
+            <a:spAutoFit/>
+          </a:bodyPr>
+          <a:lstStyle/>
+          <a:p>
+            <a:pPr algn="l">
+              <a:spcAft>
+                <a:spcPts val="0"/>
+              </a:spcAft>
+              <a:defRPr sz="2000" b="0">
+                <a:solidFill>
+                  <a:srgbClr val="122C4E"/>
+                </a:solidFill>
+                <a:latin typeface="Noto Sans CJK KR"/>
+              </a:defRPr>
+            </a:pPr>
+            <a:r>
+              <a:t>RobotModel에는 단일 URDF 텍스트를 robot_description으로 넣고 TF를 함께 확인한다.</a:t>
+            </a:r>
+          </a:p>
+        </p:txBody>
+      </p:sp>
+      <p:sp>
+        <p:nvSpPr>
+          <p:cNvPr id="9" name="Rounded Rectangle 8"/>
           <p:cNvSpPr/>
           <p:nvPr/>
         </p:nvSpPr>
         <p:spPr>
           <a:xfrm>
-            <a:off x="658368" y="1755648"/>
-            <a:ext cx="10972800" cy="2148840"/>
+            <a:off x="676656" y="2871216"/>
+            <a:ext cx="10835640" cy="2331720"/>
           </a:xfrm>
           <a:prstGeom prst="roundRect">
             <a:avLst/>
@@ -8099,54 +9428,39 @@
               </a:defRPr>
             </a:pPr>
             <a:r>
-              <a:t>check_urdf ~/ros2_curri/agv_ws/src/agv_description/curriculum_stages/M05/agv.urdf</a:t>
+              <a:t>ros2 run robot_state_publisher robot_state_publisher \</a:t>
             </a:r>
             <a:br/>
             <a:r>
-              <a:t>rg -n '&lt;xacro:|&lt;link |&lt;joint ' ~/ros2_curri/agv_ws/src/agv_description/curriculum_stages/M05/agv.urdf</a:t>
-            </a:r>
-          </a:p>
-        </p:txBody>
-      </p:sp>
-      <p:sp>
-        <p:nvSpPr>
-          <p:cNvPr id="8" name="Rounded Rectangle 7"/>
-          <p:cNvSpPr/>
-          <p:nvPr/>
-        </p:nvSpPr>
-        <p:spPr>
-          <a:xfrm>
-            <a:off x="658368" y="4206240"/>
-            <a:ext cx="10972800" cy="1554480"/>
-          </a:xfrm>
-          <a:prstGeom prst="roundRect">
-            <a:avLst/>
-          </a:prstGeom>
-          <a:solidFill>
-            <a:srgbClr val="F4F7FB"/>
-          </a:solidFill>
-          <a:ln>
-            <a:solidFill>
-              <a:srgbClr val="D1DFD5"/>
-            </a:solidFill>
-          </a:ln>
-        </p:spPr>
-        <p:style>
-          <a:lnRef idx="1">
-            <a:schemeClr val="accent1"/>
-          </a:lnRef>
-          <a:fillRef idx="3">
-            <a:schemeClr val="accent1"/>
-          </a:fillRef>
-          <a:effectRef idx="2">
-            <a:schemeClr val="accent1"/>
-          </a:effectRef>
-          <a:fontRef idx="minor">
-            <a:schemeClr val="lt1"/>
-          </a:fontRef>
-        </p:style>
-        <p:txBody>
-          <a:bodyPr rtlCol="0" anchor="ctr" wrap="square" lIns="73152" rIns="73152" tIns="36576" bIns="36576"/>
+              <a:t>  --ros-args -p robot_description:="$(cat src/agv_description/curriculum_stages/M05/agv.urdf)"</a:t>
+            </a:r>
+            <a:br/>
+            <a:r>
+              <a:t># 새 터미널: rviz2 → Add → RobotModel, TF</a:t>
+            </a:r>
+          </a:p>
+        </p:txBody>
+      </p:sp>
+      <p:sp>
+        <p:nvSpPr>
+          <p:cNvPr id="10" name="TextBox 9"/>
+          <p:cNvSpPr txBox="1"/>
+          <p:nvPr/>
+        </p:nvSpPr>
+        <p:spPr>
+          <a:xfrm>
+            <a:off x="768096" y="5468112"/>
+            <a:ext cx="1143000" cy="256032"/>
+          </a:xfrm>
+          <a:prstGeom prst="rect">
+            <a:avLst/>
+          </a:prstGeom>
+          <a:noFill/>
+        </p:spPr>
+        <p:txBody>
+          <a:bodyPr wrap="square" lIns="73152" rIns="73152" tIns="36576" bIns="36576">
+            <a:spAutoFit/>
+          </a:bodyPr>
           <a:lstStyle/>
           <a:p>
             <a:pPr algn="l">
@@ -8161,33 +9475,21 @@
               </a:defRPr>
             </a:pPr>
             <a:r>
-              <a:t>완료 체크</a:t>
-            </a:r>
-            <a:br/>
-            <a:r>
-              <a:t>□ 명령이 오류 없이 실행된다.</a:t>
-            </a:r>
-            <a:br/>
-            <a:r>
-              <a:t>□ 기대한 파일·topic·frame·parameter 이름이 보인다.</a:t>
-            </a:r>
-            <a:br/>
-            <a:r>
-              <a:t>□ 값의 단위와 방향을 한 문장으로 설명할 수 있다.</a:t>
-            </a:r>
-          </a:p>
-        </p:txBody>
-      </p:sp>
-      <p:sp>
-        <p:nvSpPr>
-          <p:cNvPr id="9" name="TextBox 8"/>
-          <p:cNvSpPr txBox="1"/>
-          <p:nvPr/>
-        </p:nvSpPr>
-        <p:spPr>
-          <a:xfrm>
-            <a:off x="731520" y="5989320"/>
-            <a:ext cx="10789920" cy="237744"/>
+              <a:t>확인</a:t>
+            </a:r>
+          </a:p>
+        </p:txBody>
+      </p:sp>
+      <p:sp>
+        <p:nvSpPr>
+          <p:cNvPr id="11" name="TextBox 10"/>
+          <p:cNvSpPr txBox="1"/>
+          <p:nvPr/>
+        </p:nvSpPr>
+        <p:spPr>
+          <a:xfrm>
+            <a:off x="768096" y="5742432"/>
+            <a:ext cx="10561320" cy="347472"/>
           </a:xfrm>
           <a:prstGeom prst="rect">
             <a:avLst/>
@@ -8204,7 +9506,7 @@
               <a:spcAft>
                 <a:spcPts val="0"/>
               </a:spcAft>
-              <a:defRPr sz="1500" b="1">
+              <a:defRPr sz="1800" b="0">
                 <a:solidFill>
                   <a:srgbClr val="122C4E"/>
                 </a:solidFill>
@@ -8212,7 +9514,7 @@
               </a:defRPr>
             </a:pPr>
             <a:r>
-              <a:t>완료 조건: RobotModel과 TF에서 base, 두 wheel, camera, lidar, imu 연결을 확인한다.</a:t>
+              <a:t>출력에서 topic·frame·파일 이름 또는 성공 메시지를 찾고, 맞지 않으면 다음 파일로 가지 않습니다.</a:t>
             </a:r>
           </a:p>
         </p:txBody>
@@ -8269,7 +9571,7 @@
               </a:defRPr>
             </a:pPr>
             <a:r>
-              <a:t>막히면: 증상 → 우선 확인 → 재검증</a:t>
+              <a:t>build → source → run 순서로 실행한다</a:t>
             </a:r>
           </a:p>
         </p:txBody>
@@ -8308,7 +9610,7 @@
               </a:defRPr>
             </a:pPr>
             <a:r>
-              <a:t>오류 메시지를 숨기지 않고 같은 순서로 점검합니다.</a:t>
+              <a:t>새 파일 또는 수정 파일은 build와 source 뒤에만 실행 이름·설정에 반영됩니다.</a:t>
             </a:r>
           </a:p>
         </p:txBody>
@@ -8444,7 +9746,7 @@
               </a:defRPr>
             </a:pPr>
             <a:r>
-              <a:t>현재 단계 오류 대응    |    현재 폴더 ~/ros2_curri/agv_ws    |    현재 터미널</a:t>
+              <a:t>현재 단계 실행    |    현재 폴더 ~/ros2_curri/my_agv_ws    |    현재 터미널</a:t>
             </a:r>
           </a:p>
         </p:txBody>
@@ -8457,18 +9759,18 @@
         </p:nvSpPr>
         <p:spPr>
           <a:xfrm>
-            <a:off x="694944" y="1755648"/>
-            <a:ext cx="10972800" cy="1115568"/>
+            <a:off x="658368" y="1700784"/>
+            <a:ext cx="10972800" cy="3182112"/>
           </a:xfrm>
           <a:prstGeom prst="roundRect">
             <a:avLst/>
           </a:prstGeom>
           <a:solidFill>
-            <a:srgbClr val="FFF7F4"/>
+            <a:srgbClr val="1D232D"/>
           </a:solidFill>
           <a:ln>
             <a:solidFill>
-              <a:srgbClr val="EDBEB4"/>
+              <a:srgbClr val="1D232D"/>
             </a:solidFill>
           </a:ln>
         </p:spPr>
@@ -8487,10 +9789,31 @@
           </a:fontRef>
         </p:style>
         <p:txBody>
-          <a:bodyPr rtlCol="0" anchor="ctr"/>
-          <a:lstStyle/>
-          <a:p>
-            <a:pPr algn="ctr"/>
+          <a:bodyPr rtlCol="0" anchor="ctr" wrap="square" lIns="73152" rIns="73152" tIns="36576" bIns="36576"/>
+          <a:lstStyle/>
+          <a:p>
+            <a:pPr algn="l">
+              <a:spcAft>
+                <a:spcPts val="0"/>
+              </a:spcAft>
+              <a:defRPr sz="1600" b="0">
+                <a:solidFill>
+                  <a:srgbClr val="FFFFFF"/>
+                </a:solidFill>
+                <a:latin typeface="DejaVu Sans Mono"/>
+              </a:defRPr>
+            </a:pPr>
+            <a:r>
+              <a:t>cd ~/ros2_curri/my_agv_ws</a:t>
+            </a:r>
+            <a:br/>
+            <a:r>
+              <a:t>check_urdf src/agv_description/curriculum_stages/M05/agv.urdf</a:t>
+            </a:r>
+            <a:br/>
+            <a:r>
+              <a:t># 다음 M06에서 처음으로 xacro를 사용한다.</a:t>
+            </a:r>
           </a:p>
         </p:txBody>
       </p:sp>
@@ -8502,8 +9825,8 @@
         </p:nvSpPr>
         <p:spPr>
           <a:xfrm>
-            <a:off x="896112" y="1901952"/>
-            <a:ext cx="2926080" cy="274320"/>
+            <a:off x="786384" y="5239512"/>
+            <a:ext cx="1261872" cy="237744"/>
           </a:xfrm>
           <a:prstGeom prst="rect">
             <a:avLst/>
@@ -8522,13 +9845,13 @@
               </a:spcAft>
               <a:defRPr sz="1800" b="1">
                 <a:solidFill>
-                  <a:srgbClr val="BE3B3B"/>
-                </a:solidFill>
-                <a:latin typeface="Noto Sans CJK KR"/>
-              </a:defRPr>
-            </a:pPr>
-            <a:r>
-              <a:t>증상 1: XML parsing error</a:t>
+                  <a:srgbClr val="2A8B5A"/>
+                </a:solidFill>
+                <a:latin typeface="Noto Sans CJK KR"/>
+              </a:defRPr>
+            </a:pPr>
+            <a:r>
+              <a:t>확인 기준</a:t>
             </a:r>
           </a:p>
         </p:txBody>
@@ -8541,8 +9864,8 @@
         </p:nvSpPr>
         <p:spPr>
           <a:xfrm>
-            <a:off x="3794760" y="1883664"/>
-            <a:ext cx="7543800" cy="621792"/>
+            <a:off x="786384" y="5532120"/>
+            <a:ext cx="10469880" cy="420624"/>
           </a:xfrm>
           <a:prstGeom prst="rect">
             <a:avLst/>
@@ -8559,7 +9882,7 @@
               <a:spcAft>
                 <a:spcPts val="0"/>
               </a:spcAft>
-              <a:defRPr sz="1600" b="0">
+              <a:defRPr sz="1800" b="0">
                 <a:solidFill>
                   <a:srgbClr val="122C4E"/>
                 </a:solidFill>
@@ -8567,177 +9890,7 @@
               </a:defRPr>
             </a:pPr>
             <a:r>
-              <a:t>우선 확인: 닫는 태그·따옴표·중첩 구조를 확인한다.</a:t>
-            </a:r>
-            <a:br/>
-            <a:r>
-              <a:t>수정 후: check_urdf ~/ros2_curri/agv_ws/src/agv_description/curriculum_stages/M05/agv.urdf</a:t>
-            </a:r>
-          </a:p>
-        </p:txBody>
-      </p:sp>
-      <p:sp>
-        <p:nvSpPr>
-          <p:cNvPr id="10" name="Rounded Rectangle 9"/>
-          <p:cNvSpPr/>
-          <p:nvPr/>
-        </p:nvSpPr>
-        <p:spPr>
-          <a:xfrm>
-            <a:off x="694944" y="3172968"/>
-            <a:ext cx="10972800" cy="1115568"/>
-          </a:xfrm>
-          <a:prstGeom prst="roundRect">
-            <a:avLst/>
-          </a:prstGeom>
-          <a:solidFill>
-            <a:srgbClr val="FFF7F4"/>
-          </a:solidFill>
-          <a:ln>
-            <a:solidFill>
-              <a:srgbClr val="EDBEB4"/>
-            </a:solidFill>
-          </a:ln>
-        </p:spPr>
-        <p:style>
-          <a:lnRef idx="1">
-            <a:schemeClr val="accent1"/>
-          </a:lnRef>
-          <a:fillRef idx="3">
-            <a:schemeClr val="accent1"/>
-          </a:fillRef>
-          <a:effectRef idx="2">
-            <a:schemeClr val="accent1"/>
-          </a:effectRef>
-          <a:fontRef idx="minor">
-            <a:schemeClr val="lt1"/>
-          </a:fontRef>
-        </p:style>
-        <p:txBody>
-          <a:bodyPr rtlCol="0" anchor="ctr"/>
-          <a:lstStyle/>
-          <a:p>
-            <a:pPr algn="ctr"/>
-          </a:p>
-        </p:txBody>
-      </p:sp>
-      <p:sp>
-        <p:nvSpPr>
-          <p:cNvPr id="11" name="TextBox 10"/>
-          <p:cNvSpPr txBox="1"/>
-          <p:nvPr/>
-        </p:nvSpPr>
-        <p:spPr>
-          <a:xfrm>
-            <a:off x="896112" y="3319272"/>
-            <a:ext cx="2926080" cy="274320"/>
-          </a:xfrm>
-          <a:prstGeom prst="rect">
-            <a:avLst/>
-          </a:prstGeom>
-          <a:noFill/>
-        </p:spPr>
-        <p:txBody>
-          <a:bodyPr wrap="square" lIns="73152" rIns="73152" tIns="36576" bIns="36576">
-            <a:spAutoFit/>
-          </a:bodyPr>
-          <a:lstStyle/>
-          <a:p>
-            <a:pPr algn="l">
-              <a:spcAft>
-                <a:spcPts val="0"/>
-              </a:spcAft>
-              <a:defRPr sz="1800" b="1">
-                <a:solidFill>
-                  <a:srgbClr val="BE3B3B"/>
-                </a:solidFill>
-                <a:latin typeface="Noto Sans CJK KR"/>
-              </a:defRPr>
-            </a:pPr>
-            <a:r>
-              <a:t>증상 2: 바퀴가 눕거나 TF가 없음</a:t>
-            </a:r>
-          </a:p>
-        </p:txBody>
-      </p:sp>
-      <p:sp>
-        <p:nvSpPr>
-          <p:cNvPr id="12" name="TextBox 11"/>
-          <p:cNvSpPr txBox="1"/>
-          <p:nvPr/>
-        </p:nvSpPr>
-        <p:spPr>
-          <a:xfrm>
-            <a:off x="3794760" y="3300984"/>
-            <a:ext cx="7543800" cy="621792"/>
-          </a:xfrm>
-          <a:prstGeom prst="rect">
-            <a:avLst/>
-          </a:prstGeom>
-          <a:noFill/>
-        </p:spPr>
-        <p:txBody>
-          <a:bodyPr wrap="square" lIns="73152" rIns="73152" tIns="36576" bIns="36576">
-            <a:spAutoFit/>
-          </a:bodyPr>
-          <a:lstStyle/>
-          <a:p>
-            <a:pPr algn="l">
-              <a:spcAft>
-                <a:spcPts val="0"/>
-              </a:spcAft>
-              <a:defRPr sz="1600" b="0">
-                <a:solidFill>
-                  <a:srgbClr val="122C4E"/>
-                </a:solidFill>
-                <a:latin typeface="Noto Sans CJK KR"/>
-              </a:defRPr>
-            </a:pPr>
-            <a:r>
-              <a:t>우선 확인: cylinder rpy·joint axis·parent/child link 이름을 확인한다.</a:t>
-            </a:r>
-            <a:br/>
-            <a:r>
-              <a:t>수정 후: check_urdf ~/ros2_curri/agv_ws/src/agv_description/curriculum_stages/M05/agv.urdf</a:t>
-            </a:r>
-          </a:p>
-        </p:txBody>
-      </p:sp>
-      <p:sp>
-        <p:nvSpPr>
-          <p:cNvPr id="13" name="TextBox 12"/>
-          <p:cNvSpPr txBox="1"/>
-          <p:nvPr/>
-        </p:nvSpPr>
-        <p:spPr>
-          <a:xfrm>
-            <a:off x="822960" y="5102352"/>
-            <a:ext cx="10607040" cy="402336"/>
-          </a:xfrm>
-          <a:prstGeom prst="rect">
-            <a:avLst/>
-          </a:prstGeom>
-          <a:noFill/>
-        </p:spPr>
-        <p:txBody>
-          <a:bodyPr wrap="square" lIns="73152" rIns="73152" tIns="36576" bIns="36576">
-            <a:spAutoFit/>
-          </a:bodyPr>
-          <a:lstStyle/>
-          <a:p>
-            <a:pPr algn="ctr">
-              <a:spcAft>
-                <a:spcPts val="0"/>
-              </a:spcAft>
-              <a:defRPr sz="1800" b="1">
-                <a:solidFill>
-                  <a:srgbClr val="DB7E22"/>
-                </a:solidFill>
-                <a:latin typeface="Noto Sans CJK KR"/>
-              </a:defRPr>
-            </a:pPr>
-            <a:r>
-              <a:t>공통 순서: ① 현재 폴더 ② source ③ 파일 경로 ④ 이름/타입/단위 ⑤ build·source 후 재실행</a:t>
+              <a:t>RobotModel과 TF에서 base, 두 wheel, camera, lidar, imu 연결을 확인한다.</a:t>
             </a:r>
           </a:p>
         </p:txBody>
@@ -8794,7 +9947,7 @@
               </a:defRPr>
             </a:pPr>
             <a:r>
-              <a:t>미니 실습: 값 하나를 바꾸고 결과를 비교한다</a:t>
+              <a:t>정상 결과: 실제 환경에서 확인한 출력</a:t>
             </a:r>
           </a:p>
         </p:txBody>
@@ -8833,7 +9986,7 @@
               </a:defRPr>
             </a:pPr>
             <a:r>
-              <a:t>정상 결과를 만든 뒤에는 한 번에 하나의 값만 바꿉니다.</a:t>
+              <a:t>실제 ROS 2 환경의 파일·패키지·구성 검증 로그</a:t>
             </a:r>
           </a:p>
         </p:txBody>
@@ -8916,157 +10069,65 @@
           </a:p>
         </p:txBody>
       </p:sp>
-      <p:sp>
-        <p:nvSpPr>
-          <p:cNvPr id="6" name="Rectangle 5"/>
-          <p:cNvSpPr/>
-          <p:nvPr/>
-        </p:nvSpPr>
-        <p:spPr>
-          <a:xfrm>
-            <a:off x="566928" y="1188720"/>
-            <a:ext cx="11064240" cy="347472"/>
-          </a:xfrm>
-          <a:prstGeom prst="rect">
-            <a:avLst/>
-          </a:prstGeom>
-          <a:solidFill>
-            <a:srgbClr val="F4F7FB"/>
-          </a:solidFill>
-          <a:ln>
-            <a:solidFill>
-              <a:srgbClr val="F4F7FB"/>
-            </a:solidFill>
-          </a:ln>
-        </p:spPr>
-        <p:style>
-          <a:lnRef idx="1">
-            <a:schemeClr val="accent1"/>
-          </a:lnRef>
-          <a:fillRef idx="3">
-            <a:schemeClr val="accent1"/>
-          </a:fillRef>
-          <a:effectRef idx="2">
-            <a:schemeClr val="accent1"/>
-          </a:effectRef>
-          <a:fontRef idx="minor">
-            <a:schemeClr val="lt1"/>
-          </a:fontRef>
-        </p:style>
-        <p:txBody>
-          <a:bodyPr rtlCol="0" anchor="ctr" wrap="square" lIns="73152" rIns="73152" tIns="36576" bIns="36576"/>
-          <a:lstStyle/>
-          <a:p>
-            <a:pPr algn="l">
-              <a:spcAft>
-                <a:spcPts val="0"/>
-              </a:spcAft>
-              <a:defRPr sz="1300" b="1">
-                <a:solidFill>
-                  <a:srgbClr val="122C4E"/>
-                </a:solidFill>
-                <a:latin typeface="Noto Sans CJK KR"/>
-              </a:defRPr>
-            </a:pPr>
-            <a:r>
-              <a:t>현재 단계 미니 실습    |    현재 폴더 ~/ros2_curri/agv_ws    |    현재 터미널</a:t>
-            </a:r>
-          </a:p>
-        </p:txBody>
-      </p:sp>
-      <p:sp>
-        <p:nvSpPr>
-          <p:cNvPr id="7" name="Rounded Rectangle 6"/>
-          <p:cNvSpPr/>
-          <p:nvPr/>
-        </p:nvSpPr>
-        <p:spPr>
-          <a:xfrm>
-            <a:off x="749808" y="1874519"/>
-            <a:ext cx="10652760" cy="1993392"/>
-          </a:xfrm>
-          <a:prstGeom prst="roundRect">
-            <a:avLst/>
-          </a:prstGeom>
-          <a:solidFill>
-            <a:srgbClr val="FFF8EB"/>
-          </a:solidFill>
-          <a:ln>
-            <a:solidFill>
-              <a:srgbClr val="ECC680"/>
-            </a:solidFill>
-          </a:ln>
-        </p:spPr>
-        <p:style>
-          <a:lnRef idx="1">
-            <a:schemeClr val="accent1"/>
-          </a:lnRef>
-          <a:fillRef idx="3">
-            <a:schemeClr val="accent1"/>
-          </a:fillRef>
-          <a:effectRef idx="2">
-            <a:schemeClr val="accent1"/>
-          </a:effectRef>
-          <a:fontRef idx="minor">
-            <a:schemeClr val="lt1"/>
-          </a:fontRef>
-        </p:style>
-        <p:txBody>
-          <a:bodyPr rtlCol="0" anchor="ctr" wrap="square" lIns="73152" rIns="73152" tIns="36576" bIns="36576"/>
+      <p:pic>
+        <p:nvPicPr>
+          <p:cNvPr id="6" name="Picture 5" descr="validation_terminal.png"/>
+          <p:cNvPicPr>
+            <a:picLocks noChangeAspect="1"/>
+          </p:cNvPicPr>
+          <p:nvPr/>
+        </p:nvPicPr>
+        <p:blipFill>
+          <a:blip r:embed="rId2"/>
+          <a:stretch>
+            <a:fillRect/>
+          </a:stretch>
+        </p:blipFill>
+        <p:spPr>
+          <a:xfrm>
+            <a:off x="790956" y="1884338"/>
+            <a:ext cx="10607040" cy="3738546"/>
+          </a:xfrm>
+          <a:prstGeom prst="rect">
+            <a:avLst/>
+          </a:prstGeom>
+        </p:spPr>
+      </p:pic>
+      <p:sp>
+        <p:nvSpPr>
+          <p:cNvPr id="7" name="TextBox 6"/>
+          <p:cNvSpPr txBox="1"/>
+          <p:nvPr/>
+        </p:nvSpPr>
+        <p:spPr>
+          <a:xfrm>
+            <a:off x="777240" y="6144768"/>
+            <a:ext cx="10607040" cy="310896"/>
+          </a:xfrm>
+          <a:prstGeom prst="rect">
+            <a:avLst/>
+          </a:prstGeom>
+          <a:noFill/>
+        </p:spPr>
+        <p:txBody>
+          <a:bodyPr wrap="square" lIns="73152" rIns="73152" tIns="36576" bIns="36576">
+            <a:spAutoFit/>
+          </a:bodyPr>
           <a:lstStyle/>
           <a:p>
             <a:pPr algn="ctr">
               <a:spcAft>
                 <a:spcPts val="0"/>
               </a:spcAft>
-              <a:defRPr sz="2300" b="1">
-                <a:solidFill>
-                  <a:srgbClr val="122C4E"/>
-                </a:solidFill>
-                <a:latin typeface="Noto Sans CJK KR"/>
-              </a:defRPr>
-            </a:pPr>
-            <a:r>
-              <a:t>wheel_radius를 0.08 m에서 0.10 m로 바꾸고 RobotModel에서 바퀴 크기 변화를 확인한다.</a:t>
-            </a:r>
-          </a:p>
-        </p:txBody>
-      </p:sp>
-      <p:sp>
-        <p:nvSpPr>
-          <p:cNvPr id="8" name="TextBox 7"/>
-          <p:cNvSpPr txBox="1"/>
-          <p:nvPr/>
-        </p:nvSpPr>
-        <p:spPr>
-          <a:xfrm>
-            <a:off x="877824" y="4590288"/>
-            <a:ext cx="10241280" cy="594360"/>
-          </a:xfrm>
-          <a:prstGeom prst="rect">
-            <a:avLst/>
-          </a:prstGeom>
-          <a:noFill/>
-        </p:spPr>
-        <p:txBody>
-          <a:bodyPr wrap="square" lIns="73152" rIns="73152" tIns="36576" bIns="36576">
-            <a:spAutoFit/>
-          </a:bodyPr>
-          <a:lstStyle/>
-          <a:p>
-            <a:pPr algn="ctr">
-              <a:spcAft>
-                <a:spcPts val="0"/>
-              </a:spcAft>
-              <a:defRPr sz="1900" b="1">
-                <a:solidFill>
-                  <a:srgbClr val="DB7E22"/>
-                </a:solidFill>
-                <a:latin typeface="Noto Sans CJK KR"/>
-              </a:defRPr>
-            </a:pPr>
-            <a:r>
-              <a:t>기록할 것: 바꾼 값(단위) · 기대한 변화 · 실제 출력/화면 · 원래 값으로 되돌린 결과</a:t>
+              <a:defRPr sz="1100" b="1">
+                <a:solidFill>
+                  <a:srgbClr val="2A8B5A"/>
+                </a:solidFill>
+                <a:latin typeface="Noto Sans CJK KR"/>
+              </a:defRPr>
+            </a:pPr>
+            <a:r>
+              <a:t>화면에서 확인: ① 명령/설정  ② 정상 출력 또는 화면  ③ 다음 검증 명령으로 재확인</a:t>
             </a:r>
           </a:p>
         </p:txBody>
@@ -9123,7 +10184,7 @@
               </a:defRPr>
             </a:pPr>
             <a:r>
-              <a:t>체크포인트를 저장하고 다음 모듈로 넘긴다</a:t>
+              <a:t>객관적 검증 명령으로 완료를 확인한다</a:t>
             </a:r>
           </a:p>
         </p:txBody>
@@ -9162,7 +10223,7 @@
               </a:defRPr>
             </a:pPr>
             <a:r>
-              <a:t>현재 Complete는 다음 Starter의 기준선입니다.</a:t>
+              <a:t>화면만 보지 말고 topic·frame·파일·parameter를 다시 확인합니다.</a:t>
             </a:r>
           </a:p>
         </p:txBody>
@@ -9298,7 +10359,7 @@
               </a:defRPr>
             </a:pPr>
             <a:r>
-              <a:t>현재 단계 체크포인트    |    현재 폴더 ~/ros2_curri/agv_ws    |    현재 터미널</a:t>
+              <a:t>현재 단계 검증    |    현재 폴더 ~/ros2_curri/my_agv_ws    |    현재 터미널</a:t>
             </a:r>
           </a:p>
         </p:txBody>
@@ -9311,8 +10372,70 @@
         </p:nvSpPr>
         <p:spPr>
           <a:xfrm>
-            <a:off x="685800" y="1737360"/>
-            <a:ext cx="10972800" cy="3611880"/>
+            <a:off x="658368" y="1755648"/>
+            <a:ext cx="10972800" cy="2148840"/>
+          </a:xfrm>
+          <a:prstGeom prst="roundRect">
+            <a:avLst/>
+          </a:prstGeom>
+          <a:solidFill>
+            <a:srgbClr val="1D232D"/>
+          </a:solidFill>
+          <a:ln>
+            <a:solidFill>
+              <a:srgbClr val="1D232D"/>
+            </a:solidFill>
+          </a:ln>
+        </p:spPr>
+        <p:style>
+          <a:lnRef idx="1">
+            <a:schemeClr val="accent1"/>
+          </a:lnRef>
+          <a:fillRef idx="3">
+            <a:schemeClr val="accent1"/>
+          </a:fillRef>
+          <a:effectRef idx="2">
+            <a:schemeClr val="accent1"/>
+          </a:effectRef>
+          <a:fontRef idx="minor">
+            <a:schemeClr val="lt1"/>
+          </a:fontRef>
+        </p:style>
+        <p:txBody>
+          <a:bodyPr rtlCol="0" anchor="ctr" wrap="square" lIns="73152" rIns="73152" tIns="36576" bIns="36576"/>
+          <a:lstStyle/>
+          <a:p>
+            <a:pPr algn="l">
+              <a:spcAft>
+                <a:spcPts val="0"/>
+              </a:spcAft>
+              <a:defRPr sz="1600" b="0">
+                <a:solidFill>
+                  <a:srgbClr val="FFFFFF"/>
+                </a:solidFill>
+                <a:latin typeface="DejaVu Sans Mono"/>
+              </a:defRPr>
+            </a:pPr>
+            <a:r>
+              <a:t>check_urdf ~/ros2_curri/my_agv_ws/src/agv_description/curriculum_stages/M05/agv.urdf</a:t>
+            </a:r>
+            <a:br/>
+            <a:r>
+              <a:t>rg -n '&lt;xacro:|&lt;link |&lt;joint ' ~/ros2_curri/my_agv_ws/src/agv_description/curriculum_stages/M05/agv.urdf</a:t>
+            </a:r>
+          </a:p>
+        </p:txBody>
+      </p:sp>
+      <p:sp>
+        <p:nvSpPr>
+          <p:cNvPr id="8" name="Rounded Rectangle 7"/>
+          <p:cNvSpPr/>
+          <p:nvPr/>
+        </p:nvSpPr>
+        <p:spPr>
+          <a:xfrm>
+            <a:off x="658368" y="4206240"/>
+            <a:ext cx="10972800" cy="1554480"/>
           </a:xfrm>
           <a:prstGeom prst="roundRect">
             <a:avLst/>
@@ -9322,7 +10445,7 @@
           </a:solidFill>
           <a:ln>
             <a:solidFill>
-              <a:srgbClr val="D2DCE8"/>
+              <a:srgbClr val="D1DFD5"/>
             </a:solidFill>
           </a:ln>
         </p:spPr>
@@ -9341,40 +10464,65 @@
           </a:fontRef>
         </p:style>
         <p:txBody>
-          <a:bodyPr rtlCol="0" anchor="ctr"/>
-          <a:lstStyle/>
-          <a:p>
-            <a:pPr algn="ctr"/>
-          </a:p>
-        </p:txBody>
-      </p:sp>
-      <p:sp>
-        <p:nvSpPr>
-          <p:cNvPr id="8" name="TextBox 7"/>
-          <p:cNvSpPr txBox="1"/>
-          <p:nvPr/>
-        </p:nvSpPr>
-        <p:spPr>
-          <a:xfrm>
-            <a:off x="896112" y="1993392"/>
-            <a:ext cx="10332720" cy="2971800"/>
-          </a:xfrm>
-          <a:prstGeom prst="rect">
-            <a:avLst/>
-          </a:prstGeom>
-          <a:noFill/>
-        </p:spPr>
-        <p:txBody>
-          <a:bodyPr wrap="square" lIns="109728" rIns="109728">
-            <a:spAutoFit/>
-          </a:bodyPr>
-          <a:lstStyle/>
-          <a:p>
-            <a:pPr>
-              <a:spcAft>
-                <a:spcPts val="800"/>
-              </a:spcAft>
-              <a:defRPr sz="1800">
+          <a:bodyPr rtlCol="0" anchor="ctr" wrap="square" lIns="73152" rIns="73152" tIns="36576" bIns="36576"/>
+          <a:lstStyle/>
+          <a:p>
+            <a:pPr algn="l">
+              <a:spcAft>
+                <a:spcPts val="0"/>
+              </a:spcAft>
+              <a:defRPr sz="1800" b="1">
+                <a:solidFill>
+                  <a:srgbClr val="2A8B5A"/>
+                </a:solidFill>
+                <a:latin typeface="Noto Sans CJK KR"/>
+              </a:defRPr>
+            </a:pPr>
+            <a:r>
+              <a:t>완료 체크</a:t>
+            </a:r>
+            <a:br/>
+            <a:r>
+              <a:t>□ 명령이 오류 없이 실행된다.</a:t>
+            </a:r>
+            <a:br/>
+            <a:r>
+              <a:t>□ 기대한 파일·topic·frame·parameter 이름이 보인다.</a:t>
+            </a:r>
+            <a:br/>
+            <a:r>
+              <a:t>□ 값의 단위와 방향을 한 문장으로 설명할 수 있다.</a:t>
+            </a:r>
+          </a:p>
+        </p:txBody>
+      </p:sp>
+      <p:sp>
+        <p:nvSpPr>
+          <p:cNvPr id="9" name="TextBox 8"/>
+          <p:cNvSpPr txBox="1"/>
+          <p:nvPr/>
+        </p:nvSpPr>
+        <p:spPr>
+          <a:xfrm>
+            <a:off x="731520" y="5989320"/>
+            <a:ext cx="10789920" cy="237744"/>
+          </a:xfrm>
+          <a:prstGeom prst="rect">
+            <a:avLst/>
+          </a:prstGeom>
+          <a:noFill/>
+        </p:spPr>
+        <p:txBody>
+          <a:bodyPr wrap="square" lIns="73152" rIns="73152" tIns="36576" bIns="36576">
+            <a:spAutoFit/>
+          </a:bodyPr>
+          <a:lstStyle/>
+          <a:p>
+            <a:pPr algn="l">
+              <a:spcAft>
+                <a:spcPts val="0"/>
+              </a:spcAft>
+              <a:defRPr sz="1500" b="1">
                 <a:solidFill>
                   <a:srgbClr val="122C4E"/>
                 </a:solidFill>
@@ -9382,110 +10530,7 @@
               </a:defRPr>
             </a:pPr>
             <a:r>
-              <a:t>• □ 완료 화면: RobotModel과 TF에서 base, 두 wheel, camera, lidar, imu 연결을 확인한다.</a:t>
-            </a:r>
-          </a:p>
-          <a:p>
-            <a:pPr>
-              <a:spcAft>
-                <a:spcPts val="800"/>
-              </a:spcAft>
-              <a:defRPr sz="1800">
-                <a:solidFill>
-                  <a:srgbClr val="122C4E"/>
-                </a:solidFill>
-                <a:latin typeface="Noto Sans CJK KR"/>
-              </a:defRPr>
-            </a:pPr>
-            <a:r>
-              <a:t>• □ Complete 파일: blocks/B_robot_build/M05_urdf_basic_model/complete/</a:t>
-            </a:r>
-          </a:p>
-          <a:p>
-            <a:pPr>
-              <a:spcAft>
-                <a:spcPts val="800"/>
-              </a:spcAft>
-              <a:defRPr sz="1800">
-                <a:solidFill>
-                  <a:srgbClr val="122C4E"/>
-                </a:solidFill>
-                <a:latin typeface="Noto Sans CJK KR"/>
-              </a:defRPr>
-            </a:pPr>
-            <a:r>
-              <a:t>• □ 정상 로그·캡처: logs/validation.log, screenshots/validation_terminal.png</a:t>
-            </a:r>
-          </a:p>
-          <a:p>
-            <a:pPr>
-              <a:spcAft>
-                <a:spcPts val="800"/>
-              </a:spcAft>
-              <a:defRPr sz="1800">
-                <a:solidFill>
-                  <a:srgbClr val="122C4E"/>
-                </a:solidFill>
-                <a:latin typeface="Noto Sans CJK KR"/>
-              </a:defRPr>
-            </a:pPr>
-            <a:r>
-              <a:t>• □ 버전 식별: CHECKSUM_or_TAG.txt의 SHA-256 manifest</a:t>
-            </a:r>
-          </a:p>
-          <a:p>
-            <a:pPr>
-              <a:spcAft>
-                <a:spcPts val="800"/>
-              </a:spcAft>
-              <a:defRPr sz="1800">
-                <a:solidFill>
-                  <a:srgbClr val="122C4E"/>
-                </a:solidFill>
-                <a:latin typeface="Noto Sans CJK KR"/>
-              </a:defRPr>
-            </a:pPr>
-            <a:r>
-              <a:t>• □ 다음 시작 조건: M06 Xacro 모듈화</a:t>
-            </a:r>
-          </a:p>
-        </p:txBody>
-      </p:sp>
-      <p:sp>
-        <p:nvSpPr>
-          <p:cNvPr id="9" name="TextBox 8"/>
-          <p:cNvSpPr txBox="1"/>
-          <p:nvPr/>
-        </p:nvSpPr>
-        <p:spPr>
-          <a:xfrm>
-            <a:off x="868680" y="5596128"/>
-            <a:ext cx="10515600" cy="338328"/>
-          </a:xfrm>
-          <a:prstGeom prst="rect">
-            <a:avLst/>
-          </a:prstGeom>
-          <a:noFill/>
-        </p:spPr>
-        <p:txBody>
-          <a:bodyPr wrap="square" lIns="73152" rIns="73152" tIns="36576" bIns="36576">
-            <a:spAutoFit/>
-          </a:bodyPr>
-          <a:lstStyle/>
-          <a:p>
-            <a:pPr algn="ctr">
-              <a:spcAft>
-                <a:spcPts val="0"/>
-              </a:spcAft>
-              <a:defRPr sz="1700" b="1">
-                <a:solidFill>
-                  <a:srgbClr val="2A8B5A"/>
-                </a:solidFill>
-                <a:latin typeface="Noto Sans CJK KR"/>
-              </a:defRPr>
-            </a:pPr>
-            <a:r>
-              <a:t>다음 모듈을 시작하기 전, 이 슬라이드의 Complete와 다음 모듈의 Starter를 비교합니다.</a:t>
+              <a:t>완료 조건: RobotModel과 TF에서 base, 두 wheel, camera, lidar, imu 연결을 확인한다.</a:t>
             </a:r>
           </a:p>
         </p:txBody>
@@ -10003,6 +11048,1663 @@
               </a:defRPr>
             </a:pPr>
             <a:r>
+              <a:t>막히면: 증상 → 우선 확인 → 재검증</a:t>
+            </a:r>
+          </a:p>
+        </p:txBody>
+      </p:sp>
+      <p:sp>
+        <p:nvSpPr>
+          <p:cNvPr id="3" name="TextBox 2"/>
+          <p:cNvSpPr txBox="1"/>
+          <p:nvPr/>
+        </p:nvSpPr>
+        <p:spPr>
+          <a:xfrm>
+            <a:off x="603504" y="859536"/>
+            <a:ext cx="10698480" cy="292608"/>
+          </a:xfrm>
+          <a:prstGeom prst="rect">
+            <a:avLst/>
+          </a:prstGeom>
+          <a:noFill/>
+        </p:spPr>
+        <p:txBody>
+          <a:bodyPr wrap="square" lIns="73152" rIns="73152" tIns="36576" bIns="36576">
+            <a:spAutoFit/>
+          </a:bodyPr>
+          <a:lstStyle/>
+          <a:p>
+            <a:pPr algn="l">
+              <a:spcAft>
+                <a:spcPts val="0"/>
+              </a:spcAft>
+              <a:defRPr sz="1700" b="0">
+                <a:solidFill>
+                  <a:srgbClr val="5C6672"/>
+                </a:solidFill>
+                <a:latin typeface="Noto Sans CJK KR"/>
+              </a:defRPr>
+            </a:pPr>
+            <a:r>
+              <a:t>오류 메시지를 숨기지 않고 같은 순서로 점검합니다.</a:t>
+            </a:r>
+          </a:p>
+        </p:txBody>
+      </p:sp>
+      <p:sp>
+        <p:nvSpPr>
+          <p:cNvPr id="4" name="TextBox 3"/>
+          <p:cNvSpPr txBox="1"/>
+          <p:nvPr/>
+        </p:nvSpPr>
+        <p:spPr>
+          <a:xfrm>
+            <a:off x="530352" y="6510528"/>
+            <a:ext cx="7772400" cy="201168"/>
+          </a:xfrm>
+          <a:prstGeom prst="rect">
+            <a:avLst/>
+          </a:prstGeom>
+          <a:noFill/>
+        </p:spPr>
+        <p:txBody>
+          <a:bodyPr wrap="square" lIns="73152" rIns="73152" tIns="36576" bIns="36576">
+            <a:spAutoFit/>
+          </a:bodyPr>
+          <a:lstStyle/>
+          <a:p>
+            <a:pPr algn="l">
+              <a:spcAft>
+                <a:spcPts val="0"/>
+              </a:spcAft>
+              <a:defRPr sz="1000" b="0">
+                <a:solidFill>
+                  <a:srgbClr val="5C6672"/>
+                </a:solidFill>
+                <a:latin typeface="Noto Sans CJK KR"/>
+              </a:defRPr>
+            </a:pPr>
+            <a:r>
+              <a:t>ROS 2 Jazzy · Gazebo Harmonic · M05 · 따라 하기형 AGV 실습</a:t>
+            </a:r>
+          </a:p>
+        </p:txBody>
+      </p:sp>
+      <p:sp>
+        <p:nvSpPr>
+          <p:cNvPr id="5" name="TextBox 4"/>
+          <p:cNvSpPr txBox="1"/>
+          <p:nvPr/>
+        </p:nvSpPr>
+        <p:spPr>
+          <a:xfrm>
+            <a:off x="9144000" y="6510528"/>
+            <a:ext cx="2468880" cy="201168"/>
+          </a:xfrm>
+          <a:prstGeom prst="rect">
+            <a:avLst/>
+          </a:prstGeom>
+          <a:noFill/>
+        </p:spPr>
+        <p:txBody>
+          <a:bodyPr wrap="square" lIns="73152" rIns="73152" tIns="36576" bIns="36576">
+            <a:spAutoFit/>
+          </a:bodyPr>
+          <a:lstStyle/>
+          <a:p>
+            <a:pPr algn="r">
+              <a:spcAft>
+                <a:spcPts val="0"/>
+              </a:spcAft>
+              <a:defRPr sz="1000" b="0">
+                <a:solidFill>
+                  <a:srgbClr val="5C6672"/>
+                </a:solidFill>
+                <a:latin typeface="Noto Sans CJK KR"/>
+              </a:defRPr>
+            </a:pPr>
+            <a:r>
+              <a:t>명령·파일 경로는 슬라이드에서 복사 가능</a:t>
+            </a:r>
+          </a:p>
+        </p:txBody>
+      </p:sp>
+      <p:sp>
+        <p:nvSpPr>
+          <p:cNvPr id="6" name="Rectangle 5"/>
+          <p:cNvSpPr/>
+          <p:nvPr/>
+        </p:nvSpPr>
+        <p:spPr>
+          <a:xfrm>
+            <a:off x="566928" y="1188720"/>
+            <a:ext cx="11064240" cy="347472"/>
+          </a:xfrm>
+          <a:prstGeom prst="rect">
+            <a:avLst/>
+          </a:prstGeom>
+          <a:solidFill>
+            <a:srgbClr val="F4F7FB"/>
+          </a:solidFill>
+          <a:ln>
+            <a:solidFill>
+              <a:srgbClr val="F4F7FB"/>
+            </a:solidFill>
+          </a:ln>
+        </p:spPr>
+        <p:style>
+          <a:lnRef idx="1">
+            <a:schemeClr val="accent1"/>
+          </a:lnRef>
+          <a:fillRef idx="3">
+            <a:schemeClr val="accent1"/>
+          </a:fillRef>
+          <a:effectRef idx="2">
+            <a:schemeClr val="accent1"/>
+          </a:effectRef>
+          <a:fontRef idx="minor">
+            <a:schemeClr val="lt1"/>
+          </a:fontRef>
+        </p:style>
+        <p:txBody>
+          <a:bodyPr rtlCol="0" anchor="ctr" wrap="square" lIns="73152" rIns="73152" tIns="36576" bIns="36576"/>
+          <a:lstStyle/>
+          <a:p>
+            <a:pPr algn="l">
+              <a:spcAft>
+                <a:spcPts val="0"/>
+              </a:spcAft>
+              <a:defRPr sz="1300" b="1">
+                <a:solidFill>
+                  <a:srgbClr val="122C4E"/>
+                </a:solidFill>
+                <a:latin typeface="Noto Sans CJK KR"/>
+              </a:defRPr>
+            </a:pPr>
+            <a:r>
+              <a:t>현재 단계 오류 대응    |    현재 폴더 ~/ros2_curri/my_agv_ws    |    현재 터미널</a:t>
+            </a:r>
+          </a:p>
+        </p:txBody>
+      </p:sp>
+      <p:sp>
+        <p:nvSpPr>
+          <p:cNvPr id="7" name="Rounded Rectangle 6"/>
+          <p:cNvSpPr/>
+          <p:nvPr/>
+        </p:nvSpPr>
+        <p:spPr>
+          <a:xfrm>
+            <a:off x="694944" y="1755648"/>
+            <a:ext cx="10972800" cy="1115568"/>
+          </a:xfrm>
+          <a:prstGeom prst="roundRect">
+            <a:avLst/>
+          </a:prstGeom>
+          <a:solidFill>
+            <a:srgbClr val="FFF7F4"/>
+          </a:solidFill>
+          <a:ln>
+            <a:solidFill>
+              <a:srgbClr val="EDBEB4"/>
+            </a:solidFill>
+          </a:ln>
+        </p:spPr>
+        <p:style>
+          <a:lnRef idx="1">
+            <a:schemeClr val="accent1"/>
+          </a:lnRef>
+          <a:fillRef idx="3">
+            <a:schemeClr val="accent1"/>
+          </a:fillRef>
+          <a:effectRef idx="2">
+            <a:schemeClr val="accent1"/>
+          </a:effectRef>
+          <a:fontRef idx="minor">
+            <a:schemeClr val="lt1"/>
+          </a:fontRef>
+        </p:style>
+        <p:txBody>
+          <a:bodyPr rtlCol="0" anchor="ctr"/>
+          <a:lstStyle/>
+          <a:p>
+            <a:pPr algn="ctr"/>
+          </a:p>
+        </p:txBody>
+      </p:sp>
+      <p:sp>
+        <p:nvSpPr>
+          <p:cNvPr id="8" name="TextBox 7"/>
+          <p:cNvSpPr txBox="1"/>
+          <p:nvPr/>
+        </p:nvSpPr>
+        <p:spPr>
+          <a:xfrm>
+            <a:off x="896112" y="1901952"/>
+            <a:ext cx="2926080" cy="274320"/>
+          </a:xfrm>
+          <a:prstGeom prst="rect">
+            <a:avLst/>
+          </a:prstGeom>
+          <a:noFill/>
+        </p:spPr>
+        <p:txBody>
+          <a:bodyPr wrap="square" lIns="73152" rIns="73152" tIns="36576" bIns="36576">
+            <a:spAutoFit/>
+          </a:bodyPr>
+          <a:lstStyle/>
+          <a:p>
+            <a:pPr algn="l">
+              <a:spcAft>
+                <a:spcPts val="0"/>
+              </a:spcAft>
+              <a:defRPr sz="1800" b="1">
+                <a:solidFill>
+                  <a:srgbClr val="BE3B3B"/>
+                </a:solidFill>
+                <a:latin typeface="Noto Sans CJK KR"/>
+              </a:defRPr>
+            </a:pPr>
+            <a:r>
+              <a:t>증상 1: XML parsing error</a:t>
+            </a:r>
+          </a:p>
+        </p:txBody>
+      </p:sp>
+      <p:sp>
+        <p:nvSpPr>
+          <p:cNvPr id="9" name="TextBox 8"/>
+          <p:cNvSpPr txBox="1"/>
+          <p:nvPr/>
+        </p:nvSpPr>
+        <p:spPr>
+          <a:xfrm>
+            <a:off x="3794760" y="1883664"/>
+            <a:ext cx="7543800" cy="621792"/>
+          </a:xfrm>
+          <a:prstGeom prst="rect">
+            <a:avLst/>
+          </a:prstGeom>
+          <a:noFill/>
+        </p:spPr>
+        <p:txBody>
+          <a:bodyPr wrap="square" lIns="73152" rIns="73152" tIns="36576" bIns="36576">
+            <a:spAutoFit/>
+          </a:bodyPr>
+          <a:lstStyle/>
+          <a:p>
+            <a:pPr algn="l">
+              <a:spcAft>
+                <a:spcPts val="0"/>
+              </a:spcAft>
+              <a:defRPr sz="1600" b="0">
+                <a:solidFill>
+                  <a:srgbClr val="122C4E"/>
+                </a:solidFill>
+                <a:latin typeface="Noto Sans CJK KR"/>
+              </a:defRPr>
+            </a:pPr>
+            <a:r>
+              <a:t>우선 확인: 닫는 태그·따옴표·중첩 구조를 확인한다.</a:t>
+            </a:r>
+            <a:br/>
+            <a:r>
+              <a:t>수정 후: check_urdf ~/ros2_curri/my_agv_ws/src/agv_description/curriculum_stages/M05/agv.urdf</a:t>
+            </a:r>
+          </a:p>
+        </p:txBody>
+      </p:sp>
+      <p:sp>
+        <p:nvSpPr>
+          <p:cNvPr id="10" name="Rounded Rectangle 9"/>
+          <p:cNvSpPr/>
+          <p:nvPr/>
+        </p:nvSpPr>
+        <p:spPr>
+          <a:xfrm>
+            <a:off x="694944" y="3172968"/>
+            <a:ext cx="10972800" cy="1115568"/>
+          </a:xfrm>
+          <a:prstGeom prst="roundRect">
+            <a:avLst/>
+          </a:prstGeom>
+          <a:solidFill>
+            <a:srgbClr val="FFF7F4"/>
+          </a:solidFill>
+          <a:ln>
+            <a:solidFill>
+              <a:srgbClr val="EDBEB4"/>
+            </a:solidFill>
+          </a:ln>
+        </p:spPr>
+        <p:style>
+          <a:lnRef idx="1">
+            <a:schemeClr val="accent1"/>
+          </a:lnRef>
+          <a:fillRef idx="3">
+            <a:schemeClr val="accent1"/>
+          </a:fillRef>
+          <a:effectRef idx="2">
+            <a:schemeClr val="accent1"/>
+          </a:effectRef>
+          <a:fontRef idx="minor">
+            <a:schemeClr val="lt1"/>
+          </a:fontRef>
+        </p:style>
+        <p:txBody>
+          <a:bodyPr rtlCol="0" anchor="ctr"/>
+          <a:lstStyle/>
+          <a:p>
+            <a:pPr algn="ctr"/>
+          </a:p>
+        </p:txBody>
+      </p:sp>
+      <p:sp>
+        <p:nvSpPr>
+          <p:cNvPr id="11" name="TextBox 10"/>
+          <p:cNvSpPr txBox="1"/>
+          <p:nvPr/>
+        </p:nvSpPr>
+        <p:spPr>
+          <a:xfrm>
+            <a:off x="896112" y="3319272"/>
+            <a:ext cx="2926080" cy="274320"/>
+          </a:xfrm>
+          <a:prstGeom prst="rect">
+            <a:avLst/>
+          </a:prstGeom>
+          <a:noFill/>
+        </p:spPr>
+        <p:txBody>
+          <a:bodyPr wrap="square" lIns="73152" rIns="73152" tIns="36576" bIns="36576">
+            <a:spAutoFit/>
+          </a:bodyPr>
+          <a:lstStyle/>
+          <a:p>
+            <a:pPr algn="l">
+              <a:spcAft>
+                <a:spcPts val="0"/>
+              </a:spcAft>
+              <a:defRPr sz="1800" b="1">
+                <a:solidFill>
+                  <a:srgbClr val="BE3B3B"/>
+                </a:solidFill>
+                <a:latin typeface="Noto Sans CJK KR"/>
+              </a:defRPr>
+            </a:pPr>
+            <a:r>
+              <a:t>증상 2: 바퀴가 눕거나 TF가 없음</a:t>
+            </a:r>
+          </a:p>
+        </p:txBody>
+      </p:sp>
+      <p:sp>
+        <p:nvSpPr>
+          <p:cNvPr id="12" name="TextBox 11"/>
+          <p:cNvSpPr txBox="1"/>
+          <p:nvPr/>
+        </p:nvSpPr>
+        <p:spPr>
+          <a:xfrm>
+            <a:off x="3794760" y="3300984"/>
+            <a:ext cx="7543800" cy="621792"/>
+          </a:xfrm>
+          <a:prstGeom prst="rect">
+            <a:avLst/>
+          </a:prstGeom>
+          <a:noFill/>
+        </p:spPr>
+        <p:txBody>
+          <a:bodyPr wrap="square" lIns="73152" rIns="73152" tIns="36576" bIns="36576">
+            <a:spAutoFit/>
+          </a:bodyPr>
+          <a:lstStyle/>
+          <a:p>
+            <a:pPr algn="l">
+              <a:spcAft>
+                <a:spcPts val="0"/>
+              </a:spcAft>
+              <a:defRPr sz="1600" b="0">
+                <a:solidFill>
+                  <a:srgbClr val="122C4E"/>
+                </a:solidFill>
+                <a:latin typeface="Noto Sans CJK KR"/>
+              </a:defRPr>
+            </a:pPr>
+            <a:r>
+              <a:t>우선 확인: cylinder rpy·joint axis·parent/child link 이름을 확인한다.</a:t>
+            </a:r>
+            <a:br/>
+            <a:r>
+              <a:t>수정 후: check_urdf ~/ros2_curri/my_agv_ws/src/agv_description/curriculum_stages/M05/agv.urdf</a:t>
+            </a:r>
+          </a:p>
+        </p:txBody>
+      </p:sp>
+      <p:sp>
+        <p:nvSpPr>
+          <p:cNvPr id="13" name="TextBox 12"/>
+          <p:cNvSpPr txBox="1"/>
+          <p:nvPr/>
+        </p:nvSpPr>
+        <p:spPr>
+          <a:xfrm>
+            <a:off x="822960" y="5102352"/>
+            <a:ext cx="10607040" cy="402336"/>
+          </a:xfrm>
+          <a:prstGeom prst="rect">
+            <a:avLst/>
+          </a:prstGeom>
+          <a:noFill/>
+        </p:spPr>
+        <p:txBody>
+          <a:bodyPr wrap="square" lIns="73152" rIns="73152" tIns="36576" bIns="36576">
+            <a:spAutoFit/>
+          </a:bodyPr>
+          <a:lstStyle/>
+          <a:p>
+            <a:pPr algn="ctr">
+              <a:spcAft>
+                <a:spcPts val="0"/>
+              </a:spcAft>
+              <a:defRPr sz="1800" b="1">
+                <a:solidFill>
+                  <a:srgbClr val="DB7E22"/>
+                </a:solidFill>
+                <a:latin typeface="Noto Sans CJK KR"/>
+              </a:defRPr>
+            </a:pPr>
+            <a:r>
+              <a:t>공통 순서: ① 현재 폴더 ② source ③ 파일 경로 ④ 이름/타입/단위 ⑤ build·source 후 재실행</a:t>
+            </a:r>
+          </a:p>
+        </p:txBody>
+      </p:sp>
+    </p:spTree>
+  </p:cSld>
+  <p:clrMapOvr>
+    <a:masterClrMapping/>
+  </p:clrMapOvr>
+</p:sld>
+</file>
+
+<file path=ppt/slides/slide21.xml><?xml version="1.0" encoding="utf-8"?>
+<p:sld xmlns:a="http://schemas.openxmlformats.org/drawingml/2006/main" xmlns:p="http://schemas.openxmlformats.org/presentationml/2006/main" xmlns:r="http://schemas.openxmlformats.org/officeDocument/2006/relationships">
+  <p:cSld>
+    <p:spTree>
+      <p:nvGrpSpPr>
+        <p:cNvPr id="1" name=""/>
+        <p:cNvGrpSpPr/>
+        <p:nvPr/>
+      </p:nvGrpSpPr>
+      <p:grpSpPr/>
+      <p:sp>
+        <p:nvSpPr>
+          <p:cNvPr id="2" name="TextBox 1"/>
+          <p:cNvSpPr txBox="1"/>
+          <p:nvPr/>
+        </p:nvSpPr>
+        <p:spPr>
+          <a:xfrm>
+            <a:off x="566928" y="347472"/>
+            <a:ext cx="10881360" cy="438912"/>
+          </a:xfrm>
+          <a:prstGeom prst="rect">
+            <a:avLst/>
+          </a:prstGeom>
+          <a:noFill/>
+        </p:spPr>
+        <p:txBody>
+          <a:bodyPr wrap="square" lIns="73152" rIns="73152" tIns="36576" bIns="36576">
+            <a:spAutoFit/>
+          </a:bodyPr>
+          <a:lstStyle/>
+          <a:p>
+            <a:pPr algn="l">
+              <a:spcAft>
+                <a:spcPts val="0"/>
+              </a:spcAft>
+              <a:defRPr sz="3200" b="1">
+                <a:solidFill>
+                  <a:srgbClr val="122C4E"/>
+                </a:solidFill>
+                <a:latin typeface="Noto Sans CJK KR"/>
+              </a:defRPr>
+            </a:pPr>
+            <a:r>
+              <a:t>막혔을 때만: Complete를 복구용으로 사용한다</a:t>
+            </a:r>
+          </a:p>
+        </p:txBody>
+      </p:sp>
+      <p:sp>
+        <p:nvSpPr>
+          <p:cNvPr id="3" name="TextBox 2"/>
+          <p:cNvSpPr txBox="1"/>
+          <p:nvPr/>
+        </p:nvSpPr>
+        <p:spPr>
+          <a:xfrm>
+            <a:off x="603504" y="859536"/>
+            <a:ext cx="10698480" cy="292608"/>
+          </a:xfrm>
+          <a:prstGeom prst="rect">
+            <a:avLst/>
+          </a:prstGeom>
+          <a:noFill/>
+        </p:spPr>
+        <p:txBody>
+          <a:bodyPr wrap="square" lIns="73152" rIns="73152" tIns="36576" bIns="36576">
+            <a:spAutoFit/>
+          </a:bodyPr>
+          <a:lstStyle/>
+          <a:p>
+            <a:pPr algn="l">
+              <a:spcAft>
+                <a:spcPts val="0"/>
+              </a:spcAft>
+              <a:defRPr sz="1700" b="0">
+                <a:solidFill>
+                  <a:srgbClr val="5C6672"/>
+                </a:solidFill>
+                <a:latin typeface="Noto Sans CJK KR"/>
+              </a:defRPr>
+            </a:pPr>
+            <a:r>
+              <a:t>이 슬라이드가 먼저가 아닙니다. 직접 입력·실행을 시도한 뒤에만 내 파일과 Complete를 비교합니다.</a:t>
+            </a:r>
+          </a:p>
+        </p:txBody>
+      </p:sp>
+      <p:sp>
+        <p:nvSpPr>
+          <p:cNvPr id="4" name="TextBox 3"/>
+          <p:cNvSpPr txBox="1"/>
+          <p:nvPr/>
+        </p:nvSpPr>
+        <p:spPr>
+          <a:xfrm>
+            <a:off x="530352" y="6510528"/>
+            <a:ext cx="7772400" cy="201168"/>
+          </a:xfrm>
+          <a:prstGeom prst="rect">
+            <a:avLst/>
+          </a:prstGeom>
+          <a:noFill/>
+        </p:spPr>
+        <p:txBody>
+          <a:bodyPr wrap="square" lIns="73152" rIns="73152" tIns="36576" bIns="36576">
+            <a:spAutoFit/>
+          </a:bodyPr>
+          <a:lstStyle/>
+          <a:p>
+            <a:pPr algn="l">
+              <a:spcAft>
+                <a:spcPts val="0"/>
+              </a:spcAft>
+              <a:defRPr sz="1000" b="0">
+                <a:solidFill>
+                  <a:srgbClr val="5C6672"/>
+                </a:solidFill>
+                <a:latin typeface="Noto Sans CJK KR"/>
+              </a:defRPr>
+            </a:pPr>
+            <a:r>
+              <a:t>ROS 2 Jazzy · Gazebo Harmonic · M05 · 따라 하기형 AGV 실습</a:t>
+            </a:r>
+          </a:p>
+        </p:txBody>
+      </p:sp>
+      <p:sp>
+        <p:nvSpPr>
+          <p:cNvPr id="5" name="TextBox 4"/>
+          <p:cNvSpPr txBox="1"/>
+          <p:nvPr/>
+        </p:nvSpPr>
+        <p:spPr>
+          <a:xfrm>
+            <a:off x="9144000" y="6510528"/>
+            <a:ext cx="2468880" cy="201168"/>
+          </a:xfrm>
+          <a:prstGeom prst="rect">
+            <a:avLst/>
+          </a:prstGeom>
+          <a:noFill/>
+        </p:spPr>
+        <p:txBody>
+          <a:bodyPr wrap="square" lIns="73152" rIns="73152" tIns="36576" bIns="36576">
+            <a:spAutoFit/>
+          </a:bodyPr>
+          <a:lstStyle/>
+          <a:p>
+            <a:pPr algn="r">
+              <a:spcAft>
+                <a:spcPts val="0"/>
+              </a:spcAft>
+              <a:defRPr sz="1000" b="0">
+                <a:solidFill>
+                  <a:srgbClr val="5C6672"/>
+                </a:solidFill>
+                <a:latin typeface="Noto Sans CJK KR"/>
+              </a:defRPr>
+            </a:pPr>
+            <a:r>
+              <a:t>명령·파일 경로는 슬라이드에서 복사 가능</a:t>
+            </a:r>
+          </a:p>
+        </p:txBody>
+      </p:sp>
+      <p:sp>
+        <p:nvSpPr>
+          <p:cNvPr id="6" name="Rectangle 5"/>
+          <p:cNvSpPr/>
+          <p:nvPr/>
+        </p:nvSpPr>
+        <p:spPr>
+          <a:xfrm>
+            <a:off x="566928" y="1188720"/>
+            <a:ext cx="11064240" cy="347472"/>
+          </a:xfrm>
+          <a:prstGeom prst="rect">
+            <a:avLst/>
+          </a:prstGeom>
+          <a:solidFill>
+            <a:srgbClr val="F4F7FB"/>
+          </a:solidFill>
+          <a:ln>
+            <a:solidFill>
+              <a:srgbClr val="F4F7FB"/>
+            </a:solidFill>
+          </a:ln>
+        </p:spPr>
+        <p:style>
+          <a:lnRef idx="1">
+            <a:schemeClr val="accent1"/>
+          </a:lnRef>
+          <a:fillRef idx="3">
+            <a:schemeClr val="accent1"/>
+          </a:fillRef>
+          <a:effectRef idx="2">
+            <a:schemeClr val="accent1"/>
+          </a:effectRef>
+          <a:fontRef idx="minor">
+            <a:schemeClr val="lt1"/>
+          </a:fontRef>
+        </p:style>
+        <p:txBody>
+          <a:bodyPr rtlCol="0" anchor="ctr" wrap="square" lIns="73152" rIns="73152" tIns="36576" bIns="36576"/>
+          <a:lstStyle/>
+          <a:p>
+            <a:pPr algn="l">
+              <a:spcAft>
+                <a:spcPts val="0"/>
+              </a:spcAft>
+              <a:defRPr sz="1300" b="1">
+                <a:solidFill>
+                  <a:srgbClr val="122C4E"/>
+                </a:solidFill>
+                <a:latin typeface="Noto Sans CJK KR"/>
+              </a:defRPr>
+            </a:pPr>
+            <a:r>
+              <a:t>현재 단계 복구용 Complete    |    현재 폴더 ~/ros2_curri    |    현재 터미널</a:t>
+            </a:r>
+          </a:p>
+        </p:txBody>
+      </p:sp>
+      <p:sp>
+        <p:nvSpPr>
+          <p:cNvPr id="7" name="TextBox 6"/>
+          <p:cNvSpPr txBox="1"/>
+          <p:nvPr/>
+        </p:nvSpPr>
+        <p:spPr>
+          <a:xfrm>
+            <a:off x="713232" y="1664208"/>
+            <a:ext cx="10698480" cy="402336"/>
+          </a:xfrm>
+          <a:prstGeom prst="rect">
+            <a:avLst/>
+          </a:prstGeom>
+          <a:noFill/>
+        </p:spPr>
+        <p:txBody>
+          <a:bodyPr wrap="square" lIns="73152" rIns="73152" tIns="36576" bIns="36576">
+            <a:spAutoFit/>
+          </a:bodyPr>
+          <a:lstStyle/>
+          <a:p>
+            <a:pPr algn="ctr">
+              <a:spcAft>
+                <a:spcPts val="0"/>
+              </a:spcAft>
+              <a:defRPr sz="1800" b="1">
+                <a:solidFill>
+                  <a:srgbClr val="DB7E22"/>
+                </a:solidFill>
+                <a:latin typeface="Noto Sans CJK KR"/>
+              </a:defRPr>
+            </a:pPr>
+            <a:r>
+              <a:t>권장 순서: ① 내 오류를 확인  ② Complete와 diff  ③ 꼭 필요할 때만 backup 후 복사</a:t>
+            </a:r>
+          </a:p>
+        </p:txBody>
+      </p:sp>
+      <p:sp>
+        <p:nvSpPr>
+          <p:cNvPr id="8" name="Rounded Rectangle 7"/>
+          <p:cNvSpPr/>
+          <p:nvPr/>
+        </p:nvSpPr>
+        <p:spPr>
+          <a:xfrm>
+            <a:off x="676656" y="2423160"/>
+            <a:ext cx="10881360" cy="2606040"/>
+          </a:xfrm>
+          <a:prstGeom prst="roundRect">
+            <a:avLst/>
+          </a:prstGeom>
+          <a:solidFill>
+            <a:srgbClr val="1D232D"/>
+          </a:solidFill>
+          <a:ln>
+            <a:solidFill>
+              <a:srgbClr val="1D232D"/>
+            </a:solidFill>
+          </a:ln>
+        </p:spPr>
+        <p:style>
+          <a:lnRef idx="1">
+            <a:schemeClr val="accent1"/>
+          </a:lnRef>
+          <a:fillRef idx="3">
+            <a:schemeClr val="accent1"/>
+          </a:fillRef>
+          <a:effectRef idx="2">
+            <a:schemeClr val="accent1"/>
+          </a:effectRef>
+          <a:fontRef idx="minor">
+            <a:schemeClr val="lt1"/>
+          </a:fontRef>
+        </p:style>
+        <p:txBody>
+          <a:bodyPr rtlCol="0" anchor="ctr" wrap="square" lIns="73152" rIns="73152" tIns="36576" bIns="36576"/>
+          <a:lstStyle/>
+          <a:p>
+            <a:pPr algn="l">
+              <a:spcAft>
+                <a:spcPts val="0"/>
+              </a:spcAft>
+              <a:defRPr sz="1400" b="0">
+                <a:solidFill>
+                  <a:srgbClr val="FFFFFF"/>
+                </a:solidFill>
+                <a:latin typeface="DejaVu Sans Mono"/>
+              </a:defRPr>
+            </a:pPr>
+            <a:r>
+              <a:t>cd ~/ros2_curri</a:t>
+            </a:r>
+            <a:br/>
+            <a:r>
+              <a:t>diff -ru my_agv_ws/src blocks/B_robot_build/M05_urdf_basic_model/complete/agv_ws/src || true</a:t>
+            </a:r>
+            <a:br/>
+            <a:r>
+              <a:t>cp -a my_agv_ws/src my_agv_ws/src_before_M05</a:t>
+            </a:r>
+            <a:br/>
+            <a:r>
+              <a:t>cp -a blocks/B_robot_build/M05_urdf_basic_model/complete/agv_ws/src/. my_agv_ws/src/</a:t>
+            </a:r>
+            <a:br/>
+            <a:r>
+              <a:t>cd my_agv_ws &amp;&amp; colcon build --symlink-install &amp;&amp; source install/setup.bash</a:t>
+            </a:r>
+          </a:p>
+        </p:txBody>
+      </p:sp>
+      <p:sp>
+        <p:nvSpPr>
+          <p:cNvPr id="9" name="TextBox 8"/>
+          <p:cNvSpPr txBox="1"/>
+          <p:nvPr/>
+        </p:nvSpPr>
+        <p:spPr>
+          <a:xfrm>
+            <a:off x="786384" y="5413248"/>
+            <a:ext cx="10424160" cy="429768"/>
+          </a:xfrm>
+          <a:prstGeom prst="rect">
+            <a:avLst/>
+          </a:prstGeom>
+          <a:noFill/>
+        </p:spPr>
+        <p:txBody>
+          <a:bodyPr wrap="square" lIns="73152" rIns="73152" tIns="36576" bIns="36576">
+            <a:spAutoFit/>
+          </a:bodyPr>
+          <a:lstStyle/>
+          <a:p>
+            <a:pPr algn="ctr">
+              <a:spcAft>
+                <a:spcPts val="0"/>
+              </a:spcAft>
+              <a:defRPr sz="1700" b="1">
+                <a:solidFill>
+                  <a:srgbClr val="2A8B5A"/>
+                </a:solidFill>
+                <a:latin typeface="Noto Sans CJK KR"/>
+              </a:defRPr>
+            </a:pPr>
+            <a:r>
+              <a:t>복구 뒤에는 끝내지 말고, 내 파일과 Complete의 차이를 한 줄씩 설명한 뒤 다시 직접 입력해 봅니다.</a:t>
+            </a:r>
+          </a:p>
+        </p:txBody>
+      </p:sp>
+    </p:spTree>
+  </p:cSld>
+  <p:clrMapOvr>
+    <a:masterClrMapping/>
+  </p:clrMapOvr>
+</p:sld>
+</file>
+
+<file path=ppt/slides/slide22.xml><?xml version="1.0" encoding="utf-8"?>
+<p:sld xmlns:a="http://schemas.openxmlformats.org/drawingml/2006/main" xmlns:p="http://schemas.openxmlformats.org/presentationml/2006/main" xmlns:r="http://schemas.openxmlformats.org/officeDocument/2006/relationships">
+  <p:cSld>
+    <p:spTree>
+      <p:nvGrpSpPr>
+        <p:cNvPr id="1" name=""/>
+        <p:cNvGrpSpPr/>
+        <p:nvPr/>
+      </p:nvGrpSpPr>
+      <p:grpSpPr/>
+      <p:sp>
+        <p:nvSpPr>
+          <p:cNvPr id="2" name="TextBox 1"/>
+          <p:cNvSpPr txBox="1"/>
+          <p:nvPr/>
+        </p:nvSpPr>
+        <p:spPr>
+          <a:xfrm>
+            <a:off x="566928" y="347472"/>
+            <a:ext cx="10881360" cy="438912"/>
+          </a:xfrm>
+          <a:prstGeom prst="rect">
+            <a:avLst/>
+          </a:prstGeom>
+          <a:noFill/>
+        </p:spPr>
+        <p:txBody>
+          <a:bodyPr wrap="square" lIns="73152" rIns="73152" tIns="36576" bIns="36576">
+            <a:spAutoFit/>
+          </a:bodyPr>
+          <a:lstStyle/>
+          <a:p>
+            <a:pPr algn="l">
+              <a:spcAft>
+                <a:spcPts val="0"/>
+              </a:spcAft>
+              <a:defRPr sz="3200" b="1">
+                <a:solidFill>
+                  <a:srgbClr val="122C4E"/>
+                </a:solidFill>
+                <a:latin typeface="Noto Sans CJK KR"/>
+              </a:defRPr>
+            </a:pPr>
+            <a:r>
+              <a:t>미니 실습: 값 하나를 바꾸고 결과를 비교한다</a:t>
+            </a:r>
+          </a:p>
+        </p:txBody>
+      </p:sp>
+      <p:sp>
+        <p:nvSpPr>
+          <p:cNvPr id="3" name="TextBox 2"/>
+          <p:cNvSpPr txBox="1"/>
+          <p:nvPr/>
+        </p:nvSpPr>
+        <p:spPr>
+          <a:xfrm>
+            <a:off x="603504" y="859536"/>
+            <a:ext cx="10698480" cy="292608"/>
+          </a:xfrm>
+          <a:prstGeom prst="rect">
+            <a:avLst/>
+          </a:prstGeom>
+          <a:noFill/>
+        </p:spPr>
+        <p:txBody>
+          <a:bodyPr wrap="square" lIns="73152" rIns="73152" tIns="36576" bIns="36576">
+            <a:spAutoFit/>
+          </a:bodyPr>
+          <a:lstStyle/>
+          <a:p>
+            <a:pPr algn="l">
+              <a:spcAft>
+                <a:spcPts val="0"/>
+              </a:spcAft>
+              <a:defRPr sz="1700" b="0">
+                <a:solidFill>
+                  <a:srgbClr val="5C6672"/>
+                </a:solidFill>
+                <a:latin typeface="Noto Sans CJK KR"/>
+              </a:defRPr>
+            </a:pPr>
+            <a:r>
+              <a:t>정상 결과를 만든 뒤에는 한 번에 하나의 값만 바꿉니다.</a:t>
+            </a:r>
+          </a:p>
+        </p:txBody>
+      </p:sp>
+      <p:sp>
+        <p:nvSpPr>
+          <p:cNvPr id="4" name="TextBox 3"/>
+          <p:cNvSpPr txBox="1"/>
+          <p:nvPr/>
+        </p:nvSpPr>
+        <p:spPr>
+          <a:xfrm>
+            <a:off x="530352" y="6510528"/>
+            <a:ext cx="7772400" cy="201168"/>
+          </a:xfrm>
+          <a:prstGeom prst="rect">
+            <a:avLst/>
+          </a:prstGeom>
+          <a:noFill/>
+        </p:spPr>
+        <p:txBody>
+          <a:bodyPr wrap="square" lIns="73152" rIns="73152" tIns="36576" bIns="36576">
+            <a:spAutoFit/>
+          </a:bodyPr>
+          <a:lstStyle/>
+          <a:p>
+            <a:pPr algn="l">
+              <a:spcAft>
+                <a:spcPts val="0"/>
+              </a:spcAft>
+              <a:defRPr sz="1000" b="0">
+                <a:solidFill>
+                  <a:srgbClr val="5C6672"/>
+                </a:solidFill>
+                <a:latin typeface="Noto Sans CJK KR"/>
+              </a:defRPr>
+            </a:pPr>
+            <a:r>
+              <a:t>ROS 2 Jazzy · Gazebo Harmonic · M05 · 따라 하기형 AGV 실습</a:t>
+            </a:r>
+          </a:p>
+        </p:txBody>
+      </p:sp>
+      <p:sp>
+        <p:nvSpPr>
+          <p:cNvPr id="5" name="TextBox 4"/>
+          <p:cNvSpPr txBox="1"/>
+          <p:nvPr/>
+        </p:nvSpPr>
+        <p:spPr>
+          <a:xfrm>
+            <a:off x="9144000" y="6510528"/>
+            <a:ext cx="2468880" cy="201168"/>
+          </a:xfrm>
+          <a:prstGeom prst="rect">
+            <a:avLst/>
+          </a:prstGeom>
+          <a:noFill/>
+        </p:spPr>
+        <p:txBody>
+          <a:bodyPr wrap="square" lIns="73152" rIns="73152" tIns="36576" bIns="36576">
+            <a:spAutoFit/>
+          </a:bodyPr>
+          <a:lstStyle/>
+          <a:p>
+            <a:pPr algn="r">
+              <a:spcAft>
+                <a:spcPts val="0"/>
+              </a:spcAft>
+              <a:defRPr sz="1000" b="0">
+                <a:solidFill>
+                  <a:srgbClr val="5C6672"/>
+                </a:solidFill>
+                <a:latin typeface="Noto Sans CJK KR"/>
+              </a:defRPr>
+            </a:pPr>
+            <a:r>
+              <a:t>명령·파일 경로는 슬라이드에서 복사 가능</a:t>
+            </a:r>
+          </a:p>
+        </p:txBody>
+      </p:sp>
+      <p:sp>
+        <p:nvSpPr>
+          <p:cNvPr id="6" name="Rectangle 5"/>
+          <p:cNvSpPr/>
+          <p:nvPr/>
+        </p:nvSpPr>
+        <p:spPr>
+          <a:xfrm>
+            <a:off x="566928" y="1188720"/>
+            <a:ext cx="11064240" cy="347472"/>
+          </a:xfrm>
+          <a:prstGeom prst="rect">
+            <a:avLst/>
+          </a:prstGeom>
+          <a:solidFill>
+            <a:srgbClr val="F4F7FB"/>
+          </a:solidFill>
+          <a:ln>
+            <a:solidFill>
+              <a:srgbClr val="F4F7FB"/>
+            </a:solidFill>
+          </a:ln>
+        </p:spPr>
+        <p:style>
+          <a:lnRef idx="1">
+            <a:schemeClr val="accent1"/>
+          </a:lnRef>
+          <a:fillRef idx="3">
+            <a:schemeClr val="accent1"/>
+          </a:fillRef>
+          <a:effectRef idx="2">
+            <a:schemeClr val="accent1"/>
+          </a:effectRef>
+          <a:fontRef idx="minor">
+            <a:schemeClr val="lt1"/>
+          </a:fontRef>
+        </p:style>
+        <p:txBody>
+          <a:bodyPr rtlCol="0" anchor="ctr" wrap="square" lIns="73152" rIns="73152" tIns="36576" bIns="36576"/>
+          <a:lstStyle/>
+          <a:p>
+            <a:pPr algn="l">
+              <a:spcAft>
+                <a:spcPts val="0"/>
+              </a:spcAft>
+              <a:defRPr sz="1300" b="1">
+                <a:solidFill>
+                  <a:srgbClr val="122C4E"/>
+                </a:solidFill>
+                <a:latin typeface="Noto Sans CJK KR"/>
+              </a:defRPr>
+            </a:pPr>
+            <a:r>
+              <a:t>현재 단계 미니 실습    |    현재 폴더 ~/ros2_curri/my_agv_ws    |    현재 터미널</a:t>
+            </a:r>
+          </a:p>
+        </p:txBody>
+      </p:sp>
+      <p:sp>
+        <p:nvSpPr>
+          <p:cNvPr id="7" name="Rounded Rectangle 6"/>
+          <p:cNvSpPr/>
+          <p:nvPr/>
+        </p:nvSpPr>
+        <p:spPr>
+          <a:xfrm>
+            <a:off x="749808" y="1874519"/>
+            <a:ext cx="10652760" cy="1993392"/>
+          </a:xfrm>
+          <a:prstGeom prst="roundRect">
+            <a:avLst/>
+          </a:prstGeom>
+          <a:solidFill>
+            <a:srgbClr val="FFF8EB"/>
+          </a:solidFill>
+          <a:ln>
+            <a:solidFill>
+              <a:srgbClr val="ECC680"/>
+            </a:solidFill>
+          </a:ln>
+        </p:spPr>
+        <p:style>
+          <a:lnRef idx="1">
+            <a:schemeClr val="accent1"/>
+          </a:lnRef>
+          <a:fillRef idx="3">
+            <a:schemeClr val="accent1"/>
+          </a:fillRef>
+          <a:effectRef idx="2">
+            <a:schemeClr val="accent1"/>
+          </a:effectRef>
+          <a:fontRef idx="minor">
+            <a:schemeClr val="lt1"/>
+          </a:fontRef>
+        </p:style>
+        <p:txBody>
+          <a:bodyPr rtlCol="0" anchor="ctr" wrap="square" lIns="73152" rIns="73152" tIns="36576" bIns="36576"/>
+          <a:lstStyle/>
+          <a:p>
+            <a:pPr algn="ctr">
+              <a:spcAft>
+                <a:spcPts val="0"/>
+              </a:spcAft>
+              <a:defRPr sz="2300" b="1">
+                <a:solidFill>
+                  <a:srgbClr val="122C4E"/>
+                </a:solidFill>
+                <a:latin typeface="Noto Sans CJK KR"/>
+              </a:defRPr>
+            </a:pPr>
+            <a:r>
+              <a:t>wheel_radius를 0.08 m에서 0.10 m로 바꾸고 RobotModel에서 바퀴 크기 변화를 확인한다.</a:t>
+            </a:r>
+          </a:p>
+        </p:txBody>
+      </p:sp>
+      <p:sp>
+        <p:nvSpPr>
+          <p:cNvPr id="8" name="TextBox 7"/>
+          <p:cNvSpPr txBox="1"/>
+          <p:nvPr/>
+        </p:nvSpPr>
+        <p:spPr>
+          <a:xfrm>
+            <a:off x="877824" y="4590288"/>
+            <a:ext cx="10241280" cy="594360"/>
+          </a:xfrm>
+          <a:prstGeom prst="rect">
+            <a:avLst/>
+          </a:prstGeom>
+          <a:noFill/>
+        </p:spPr>
+        <p:txBody>
+          <a:bodyPr wrap="square" lIns="73152" rIns="73152" tIns="36576" bIns="36576">
+            <a:spAutoFit/>
+          </a:bodyPr>
+          <a:lstStyle/>
+          <a:p>
+            <a:pPr algn="ctr">
+              <a:spcAft>
+                <a:spcPts val="0"/>
+              </a:spcAft>
+              <a:defRPr sz="1900" b="1">
+                <a:solidFill>
+                  <a:srgbClr val="DB7E22"/>
+                </a:solidFill>
+                <a:latin typeface="Noto Sans CJK KR"/>
+              </a:defRPr>
+            </a:pPr>
+            <a:r>
+              <a:t>기록할 것: 바꾼 값(단위) · 기대한 변화 · 실제 출력/화면 · 원래 값으로 되돌린 결과</a:t>
+            </a:r>
+          </a:p>
+        </p:txBody>
+      </p:sp>
+    </p:spTree>
+  </p:cSld>
+  <p:clrMapOvr>
+    <a:masterClrMapping/>
+  </p:clrMapOvr>
+</p:sld>
+</file>
+
+<file path=ppt/slides/slide23.xml><?xml version="1.0" encoding="utf-8"?>
+<p:sld xmlns:a="http://schemas.openxmlformats.org/drawingml/2006/main" xmlns:p="http://schemas.openxmlformats.org/presentationml/2006/main" xmlns:r="http://schemas.openxmlformats.org/officeDocument/2006/relationships">
+  <p:cSld>
+    <p:spTree>
+      <p:nvGrpSpPr>
+        <p:cNvPr id="1" name=""/>
+        <p:cNvGrpSpPr/>
+        <p:nvPr/>
+      </p:nvGrpSpPr>
+      <p:grpSpPr/>
+      <p:sp>
+        <p:nvSpPr>
+          <p:cNvPr id="2" name="TextBox 1"/>
+          <p:cNvSpPr txBox="1"/>
+          <p:nvPr/>
+        </p:nvSpPr>
+        <p:spPr>
+          <a:xfrm>
+            <a:off x="566928" y="347472"/>
+            <a:ext cx="10881360" cy="438912"/>
+          </a:xfrm>
+          <a:prstGeom prst="rect">
+            <a:avLst/>
+          </a:prstGeom>
+          <a:noFill/>
+        </p:spPr>
+        <p:txBody>
+          <a:bodyPr wrap="square" lIns="73152" rIns="73152" tIns="36576" bIns="36576">
+            <a:spAutoFit/>
+          </a:bodyPr>
+          <a:lstStyle/>
+          <a:p>
+            <a:pPr algn="l">
+              <a:spcAft>
+                <a:spcPts val="0"/>
+              </a:spcAft>
+              <a:defRPr sz="3200" b="1">
+                <a:solidFill>
+                  <a:srgbClr val="122C4E"/>
+                </a:solidFill>
+                <a:latin typeface="Noto Sans CJK KR"/>
+              </a:defRPr>
+            </a:pPr>
+            <a:r>
+              <a:t>내 프로젝트 체크포인트를 저장하고 다음 모듈로 넘긴다</a:t>
+            </a:r>
+          </a:p>
+        </p:txBody>
+      </p:sp>
+      <p:sp>
+        <p:nvSpPr>
+          <p:cNvPr id="3" name="TextBox 2"/>
+          <p:cNvSpPr txBox="1"/>
+          <p:nvPr/>
+        </p:nvSpPr>
+        <p:spPr>
+          <a:xfrm>
+            <a:off x="603504" y="859536"/>
+            <a:ext cx="10698480" cy="292608"/>
+          </a:xfrm>
+          <a:prstGeom prst="rect">
+            <a:avLst/>
+          </a:prstGeom>
+          <a:noFill/>
+        </p:spPr>
+        <p:txBody>
+          <a:bodyPr wrap="square" lIns="73152" rIns="73152" tIns="36576" bIns="36576">
+            <a:spAutoFit/>
+          </a:bodyPr>
+          <a:lstStyle/>
+          <a:p>
+            <a:pPr algn="l">
+              <a:spcAft>
+                <a:spcPts val="0"/>
+              </a:spcAft>
+              <a:defRPr sz="1700" b="0">
+                <a:solidFill>
+                  <a:srgbClr val="5C6672"/>
+                </a:solidFill>
+                <a:latin typeface="Noto Sans CJK KR"/>
+              </a:defRPr>
+            </a:pPr>
+            <a:r>
+              <a:t>Complete는 복구용 비교 기준이고, 다음 단계는 내가 직접 만든 workspace에서 계속합니다.</a:t>
+            </a:r>
+          </a:p>
+        </p:txBody>
+      </p:sp>
+      <p:sp>
+        <p:nvSpPr>
+          <p:cNvPr id="4" name="TextBox 3"/>
+          <p:cNvSpPr txBox="1"/>
+          <p:nvPr/>
+        </p:nvSpPr>
+        <p:spPr>
+          <a:xfrm>
+            <a:off x="530352" y="6510528"/>
+            <a:ext cx="7772400" cy="201168"/>
+          </a:xfrm>
+          <a:prstGeom prst="rect">
+            <a:avLst/>
+          </a:prstGeom>
+          <a:noFill/>
+        </p:spPr>
+        <p:txBody>
+          <a:bodyPr wrap="square" lIns="73152" rIns="73152" tIns="36576" bIns="36576">
+            <a:spAutoFit/>
+          </a:bodyPr>
+          <a:lstStyle/>
+          <a:p>
+            <a:pPr algn="l">
+              <a:spcAft>
+                <a:spcPts val="0"/>
+              </a:spcAft>
+              <a:defRPr sz="1000" b="0">
+                <a:solidFill>
+                  <a:srgbClr val="5C6672"/>
+                </a:solidFill>
+                <a:latin typeface="Noto Sans CJK KR"/>
+              </a:defRPr>
+            </a:pPr>
+            <a:r>
+              <a:t>ROS 2 Jazzy · Gazebo Harmonic · M05 · 따라 하기형 AGV 실습</a:t>
+            </a:r>
+          </a:p>
+        </p:txBody>
+      </p:sp>
+      <p:sp>
+        <p:nvSpPr>
+          <p:cNvPr id="5" name="TextBox 4"/>
+          <p:cNvSpPr txBox="1"/>
+          <p:nvPr/>
+        </p:nvSpPr>
+        <p:spPr>
+          <a:xfrm>
+            <a:off x="9144000" y="6510528"/>
+            <a:ext cx="2468880" cy="201168"/>
+          </a:xfrm>
+          <a:prstGeom prst="rect">
+            <a:avLst/>
+          </a:prstGeom>
+          <a:noFill/>
+        </p:spPr>
+        <p:txBody>
+          <a:bodyPr wrap="square" lIns="73152" rIns="73152" tIns="36576" bIns="36576">
+            <a:spAutoFit/>
+          </a:bodyPr>
+          <a:lstStyle/>
+          <a:p>
+            <a:pPr algn="r">
+              <a:spcAft>
+                <a:spcPts val="0"/>
+              </a:spcAft>
+              <a:defRPr sz="1000" b="0">
+                <a:solidFill>
+                  <a:srgbClr val="5C6672"/>
+                </a:solidFill>
+                <a:latin typeface="Noto Sans CJK KR"/>
+              </a:defRPr>
+            </a:pPr>
+            <a:r>
+              <a:t>명령·파일 경로는 슬라이드에서 복사 가능</a:t>
+            </a:r>
+          </a:p>
+        </p:txBody>
+      </p:sp>
+      <p:sp>
+        <p:nvSpPr>
+          <p:cNvPr id="6" name="Rectangle 5"/>
+          <p:cNvSpPr/>
+          <p:nvPr/>
+        </p:nvSpPr>
+        <p:spPr>
+          <a:xfrm>
+            <a:off x="566928" y="1188720"/>
+            <a:ext cx="11064240" cy="347472"/>
+          </a:xfrm>
+          <a:prstGeom prst="rect">
+            <a:avLst/>
+          </a:prstGeom>
+          <a:solidFill>
+            <a:srgbClr val="F4F7FB"/>
+          </a:solidFill>
+          <a:ln>
+            <a:solidFill>
+              <a:srgbClr val="F4F7FB"/>
+            </a:solidFill>
+          </a:ln>
+        </p:spPr>
+        <p:style>
+          <a:lnRef idx="1">
+            <a:schemeClr val="accent1"/>
+          </a:lnRef>
+          <a:fillRef idx="3">
+            <a:schemeClr val="accent1"/>
+          </a:fillRef>
+          <a:effectRef idx="2">
+            <a:schemeClr val="accent1"/>
+          </a:effectRef>
+          <a:fontRef idx="minor">
+            <a:schemeClr val="lt1"/>
+          </a:fontRef>
+        </p:style>
+        <p:txBody>
+          <a:bodyPr rtlCol="0" anchor="ctr" wrap="square" lIns="73152" rIns="73152" tIns="36576" bIns="36576"/>
+          <a:lstStyle/>
+          <a:p>
+            <a:pPr algn="l">
+              <a:spcAft>
+                <a:spcPts val="0"/>
+              </a:spcAft>
+              <a:defRPr sz="1300" b="1">
+                <a:solidFill>
+                  <a:srgbClr val="122C4E"/>
+                </a:solidFill>
+                <a:latin typeface="Noto Sans CJK KR"/>
+              </a:defRPr>
+            </a:pPr>
+            <a:r>
+              <a:t>현재 단계 체크포인트    |    현재 폴더 ~/ros2_curri/my_agv_ws    |    현재 터미널</a:t>
+            </a:r>
+          </a:p>
+        </p:txBody>
+      </p:sp>
+      <p:sp>
+        <p:nvSpPr>
+          <p:cNvPr id="7" name="Rounded Rectangle 6"/>
+          <p:cNvSpPr/>
+          <p:nvPr/>
+        </p:nvSpPr>
+        <p:spPr>
+          <a:xfrm>
+            <a:off x="685800" y="1737360"/>
+            <a:ext cx="10972800" cy="3611880"/>
+          </a:xfrm>
+          <a:prstGeom prst="roundRect">
+            <a:avLst/>
+          </a:prstGeom>
+          <a:solidFill>
+            <a:srgbClr val="F4F7FB"/>
+          </a:solidFill>
+          <a:ln>
+            <a:solidFill>
+              <a:srgbClr val="D2DCE8"/>
+            </a:solidFill>
+          </a:ln>
+        </p:spPr>
+        <p:style>
+          <a:lnRef idx="1">
+            <a:schemeClr val="accent1"/>
+          </a:lnRef>
+          <a:fillRef idx="3">
+            <a:schemeClr val="accent1"/>
+          </a:fillRef>
+          <a:effectRef idx="2">
+            <a:schemeClr val="accent1"/>
+          </a:effectRef>
+          <a:fontRef idx="minor">
+            <a:schemeClr val="lt1"/>
+          </a:fontRef>
+        </p:style>
+        <p:txBody>
+          <a:bodyPr rtlCol="0" anchor="ctr"/>
+          <a:lstStyle/>
+          <a:p>
+            <a:pPr algn="ctr"/>
+          </a:p>
+        </p:txBody>
+      </p:sp>
+      <p:sp>
+        <p:nvSpPr>
+          <p:cNvPr id="8" name="TextBox 7"/>
+          <p:cNvSpPr txBox="1"/>
+          <p:nvPr/>
+        </p:nvSpPr>
+        <p:spPr>
+          <a:xfrm>
+            <a:off x="896112" y="1993392"/>
+            <a:ext cx="10332720" cy="2971800"/>
+          </a:xfrm>
+          <a:prstGeom prst="rect">
+            <a:avLst/>
+          </a:prstGeom>
+          <a:noFill/>
+        </p:spPr>
+        <p:txBody>
+          <a:bodyPr wrap="square" lIns="109728" rIns="109728">
+            <a:spAutoFit/>
+          </a:bodyPr>
+          <a:lstStyle/>
+          <a:p>
+            <a:pPr>
+              <a:spcAft>
+                <a:spcPts val="800"/>
+              </a:spcAft>
+              <a:defRPr sz="1800">
+                <a:solidFill>
+                  <a:srgbClr val="122C4E"/>
+                </a:solidFill>
+                <a:latin typeface="Noto Sans CJK KR"/>
+              </a:defRPr>
+            </a:pPr>
+            <a:r>
+              <a:t>• □ 완료 화면: RobotModel과 TF에서 base, 두 wheel, camera, lidar, imu 연결을 확인한다.</a:t>
+            </a:r>
+          </a:p>
+          <a:p>
+            <a:pPr>
+              <a:spcAft>
+                <a:spcPts val="800"/>
+              </a:spcAft>
+              <a:defRPr sz="1800">
+                <a:solidFill>
+                  <a:srgbClr val="122C4E"/>
+                </a:solidFill>
+                <a:latin typeface="Noto Sans CJK KR"/>
+              </a:defRPr>
+            </a:pPr>
+            <a:r>
+              <a:t>• □ 막혔을 때 비교할 Complete: blocks/B_robot_build/M05_urdf_basic_model/complete/</a:t>
+            </a:r>
+          </a:p>
+          <a:p>
+            <a:pPr>
+              <a:spcAft>
+                <a:spcPts val="800"/>
+              </a:spcAft>
+              <a:defRPr sz="1800">
+                <a:solidFill>
+                  <a:srgbClr val="122C4E"/>
+                </a:solidFill>
+                <a:latin typeface="Noto Sans CJK KR"/>
+              </a:defRPr>
+            </a:pPr>
+            <a:r>
+              <a:t>• □ 정상 로그·캡처: logs/validation.log, screenshots/validation_terminal.png</a:t>
+            </a:r>
+          </a:p>
+          <a:p>
+            <a:pPr>
+              <a:spcAft>
+                <a:spcPts val="800"/>
+              </a:spcAft>
+              <a:defRPr sz="1800">
+                <a:solidFill>
+                  <a:srgbClr val="122C4E"/>
+                </a:solidFill>
+                <a:latin typeface="Noto Sans CJK KR"/>
+              </a:defRPr>
+            </a:pPr>
+            <a:r>
+              <a:t>• □ 버전 식별: CHECKSUM_or_TAG.txt의 SHA-256 manifest</a:t>
+            </a:r>
+          </a:p>
+          <a:p>
+            <a:pPr>
+              <a:spcAft>
+                <a:spcPts val="800"/>
+              </a:spcAft>
+              <a:defRPr sz="1800">
+                <a:solidFill>
+                  <a:srgbClr val="122C4E"/>
+                </a:solidFill>
+                <a:latin typeface="Noto Sans CJK KR"/>
+              </a:defRPr>
+            </a:pPr>
+            <a:r>
+              <a:t>• □ 다음 시작 조건: M06 Xacro 모듈화</a:t>
+            </a:r>
+          </a:p>
+        </p:txBody>
+      </p:sp>
+      <p:sp>
+        <p:nvSpPr>
+          <p:cNvPr id="9" name="TextBox 8"/>
+          <p:cNvSpPr txBox="1"/>
+          <p:nvPr/>
+        </p:nvSpPr>
+        <p:spPr>
+          <a:xfrm>
+            <a:off x="868680" y="5596128"/>
+            <a:ext cx="10515600" cy="338328"/>
+          </a:xfrm>
+          <a:prstGeom prst="rect">
+            <a:avLst/>
+          </a:prstGeom>
+          <a:noFill/>
+        </p:spPr>
+        <p:txBody>
+          <a:bodyPr wrap="square" lIns="73152" rIns="73152" tIns="36576" bIns="36576">
+            <a:spAutoFit/>
+          </a:bodyPr>
+          <a:lstStyle/>
+          <a:p>
+            <a:pPr algn="ctr">
+              <a:spcAft>
+                <a:spcPts val="0"/>
+              </a:spcAft>
+              <a:defRPr sz="1700" b="1">
+                <a:solidFill>
+                  <a:srgbClr val="2A8B5A"/>
+                </a:solidFill>
+                <a:latin typeface="Noto Sans CJK KR"/>
+              </a:defRPr>
+            </a:pPr>
+            <a:r>
+              <a:t>다음 모듈을 시작하기 전, 내 src의 변경사항을 저장하고 현재 완료 조건을 다시 확인합니다.</a:t>
+            </a:r>
+          </a:p>
+        </p:txBody>
+      </p:sp>
+    </p:spTree>
+  </p:cSld>
+  <p:clrMapOvr>
+    <a:masterClrMapping/>
+  </p:clrMapOvr>
+</p:sld>
+</file>
+
+<file path=ppt/slides/slide24.xml><?xml version="1.0" encoding="utf-8"?>
+<p:sld xmlns:a="http://schemas.openxmlformats.org/drawingml/2006/main" xmlns:p="http://schemas.openxmlformats.org/presentationml/2006/main" xmlns:r="http://schemas.openxmlformats.org/officeDocument/2006/relationships">
+  <p:cSld>
+    <p:spTree>
+      <p:nvGrpSpPr>
+        <p:cNvPr id="1" name=""/>
+        <p:cNvGrpSpPr/>
+        <p:nvPr/>
+      </p:nvGrpSpPr>
+      <p:grpSpPr/>
+      <p:sp>
+        <p:nvSpPr>
+          <p:cNvPr id="2" name="TextBox 1"/>
+          <p:cNvSpPr txBox="1"/>
+          <p:nvPr/>
+        </p:nvSpPr>
+        <p:spPr>
+          <a:xfrm>
+            <a:off x="566928" y="347472"/>
+            <a:ext cx="10881360" cy="438912"/>
+          </a:xfrm>
+          <a:prstGeom prst="rect">
+            <a:avLst/>
+          </a:prstGeom>
+          <a:noFill/>
+        </p:spPr>
+        <p:txBody>
+          <a:bodyPr wrap="square" lIns="73152" rIns="73152" tIns="36576" bIns="36576">
+            <a:spAutoFit/>
+          </a:bodyPr>
+          <a:lstStyle/>
+          <a:p>
+            <a:pPr algn="l">
+              <a:spcAft>
+                <a:spcPts val="0"/>
+              </a:spcAft>
+              <a:defRPr sz="3200" b="1">
+                <a:solidFill>
+                  <a:srgbClr val="122C4E"/>
+                </a:solidFill>
+                <a:latin typeface="Noto Sans CJK KR"/>
+              </a:defRPr>
+            </a:pPr>
+            <a:r>
               <a:t>공식 참고 자료</a:t>
             </a:r>
           </a:p>
@@ -10709,7 +13411,7 @@
               </a:defRPr>
             </a:pPr>
             <a:r>
-              <a:t>현재 단계 시작    |    현재 폴더 ~/ros2_curri/agv_ws    |    현재 터미널</a:t>
+              <a:t>현재 단계 시작    |    현재 폴더 ~/ros2_curri/my_agv_ws    |    현재 터미널</a:t>
             </a:r>
           </a:p>
         </p:txBody>
@@ -10825,7 +13527,7 @@
               </a:defRPr>
             </a:pPr>
             <a:r>
-              <a:t>• 현재 폴더: ~/ros2_curri/agv_ws</a:t>
+              <a:t>• 현재 폴더: ~/ros2_curri/my_agv_ws</a:t>
             </a:r>
           </a:p>
           <a:p>
@@ -10896,7 +13598,7 @@
               </a:defRPr>
             </a:pPr>
             <a:r>
-              <a:t>확인: pwd가 ~/ros2_curri/agv_ws이고, 이전 모듈의 완료 조건을 한 문장으로 설명할 수 있으면 시작합니다.</a:t>
+              <a:t>확인: pwd가 ~/ros2_curri/my_agv_ws이고, 이전 모듈의 완료 조건을 한 문장으로 설명할 수 있으면 시작합니다.</a:t>
             </a:r>
           </a:p>
         </p:txBody>
@@ -11286,7 +13988,7 @@
               </a:defRPr>
             </a:pPr>
             <a:r>
-              <a:t>핵심 흐름을 한 장으로 이해하기</a:t>
+              <a:t>프로젝트에 이번 기능을 직접 추가한다</a:t>
             </a:r>
           </a:p>
         </p:txBody>
@@ -11325,7 +14027,7 @@
               </a:defRPr>
             </a:pPr>
             <a:r>
-              <a:t>상자와 화살표의 방향을 따라 데이터 또는 제어의 흐름을 읽습니다.</a:t>
+              <a:t>완성본을 먼저 복사하지 않습니다. 빈 workspace에 지금 필요한 폴더와 파일을 하나씩 만듭니다.</a:t>
             </a:r>
           </a:p>
         </p:txBody>
@@ -11410,20 +14112,201 @@
       </p:sp>
       <p:sp>
         <p:nvSpPr>
-          <p:cNvPr id="6" name="Rounded Rectangle 5"/>
+          <p:cNvPr id="6" name="Rectangle 5"/>
           <p:cNvSpPr/>
           <p:nvPr/>
         </p:nvSpPr>
         <p:spPr>
           <a:xfrm>
-            <a:off x="2738628" y="2743200"/>
-            <a:ext cx="2029968" cy="1051560"/>
+            <a:off x="566928" y="1188720"/>
+            <a:ext cx="11064240" cy="347472"/>
+          </a:xfrm>
+          <a:prstGeom prst="rect">
+            <a:avLst/>
+          </a:prstGeom>
+          <a:solidFill>
+            <a:srgbClr val="F4F7FB"/>
+          </a:solidFill>
+          <a:ln>
+            <a:solidFill>
+              <a:srgbClr val="F4F7FB"/>
+            </a:solidFill>
+          </a:ln>
+        </p:spPr>
+        <p:style>
+          <a:lnRef idx="1">
+            <a:schemeClr val="accent1"/>
+          </a:lnRef>
+          <a:fillRef idx="3">
+            <a:schemeClr val="accent1"/>
+          </a:fillRef>
+          <a:effectRef idx="2">
+            <a:schemeClr val="accent1"/>
+          </a:effectRef>
+          <a:fontRef idx="minor">
+            <a:schemeClr val="lt1"/>
+          </a:fontRef>
+        </p:style>
+        <p:txBody>
+          <a:bodyPr rtlCol="0" anchor="ctr" wrap="square" lIns="73152" rIns="73152" tIns="36576" bIns="36576"/>
+          <a:lstStyle/>
+          <a:p>
+            <a:pPr algn="l">
+              <a:spcAft>
+                <a:spcPts val="0"/>
+              </a:spcAft>
+              <a:defRPr sz="1300" b="1">
+                <a:solidFill>
+                  <a:srgbClr val="122C4E"/>
+                </a:solidFill>
+                <a:latin typeface="Noto Sans CJK KR"/>
+              </a:defRPr>
+            </a:pPr>
+            <a:r>
+              <a:t>현재 단계 프로젝트 조립    |    현재 폴더 ~/ros2_curri/my_agv_ws    |    현재 터미널</a:t>
+            </a:r>
+          </a:p>
+        </p:txBody>
+      </p:sp>
+      <p:sp>
+        <p:nvSpPr>
+          <p:cNvPr id="7" name="Rounded Rectangle 6"/>
+          <p:cNvSpPr/>
+          <p:nvPr/>
+        </p:nvSpPr>
+        <p:spPr>
+          <a:xfrm>
+            <a:off x="731520" y="1755648"/>
+            <a:ext cx="10835640" cy="1033271"/>
           </a:xfrm>
           <a:prstGeom prst="roundRect">
             <a:avLst/>
           </a:prstGeom>
           <a:solidFill>
-            <a:srgbClr val="FFFFFF"/>
+            <a:srgbClr val="F4F7FB"/>
+          </a:solidFill>
+          <a:ln>
+            <a:solidFill>
+              <a:srgbClr val="5C6672"/>
+            </a:solidFill>
+          </a:ln>
+        </p:spPr>
+        <p:style>
+          <a:lnRef idx="1">
+            <a:schemeClr val="accent1"/>
+          </a:lnRef>
+          <a:fillRef idx="3">
+            <a:schemeClr val="accent1"/>
+          </a:fillRef>
+          <a:effectRef idx="2">
+            <a:schemeClr val="accent1"/>
+          </a:effectRef>
+          <a:fontRef idx="minor">
+            <a:schemeClr val="lt1"/>
+          </a:fontRef>
+        </p:style>
+        <p:txBody>
+          <a:bodyPr rtlCol="0" anchor="ctr"/>
+          <a:lstStyle/>
+          <a:p>
+            <a:pPr algn="ctr"/>
+          </a:p>
+        </p:txBody>
+      </p:sp>
+      <p:sp>
+        <p:nvSpPr>
+          <p:cNvPr id="8" name="TextBox 7"/>
+          <p:cNvSpPr txBox="1"/>
+          <p:nvPr/>
+        </p:nvSpPr>
+        <p:spPr>
+          <a:xfrm>
+            <a:off x="960120" y="1911095"/>
+            <a:ext cx="1920240" cy="228600"/>
+          </a:xfrm>
+          <a:prstGeom prst="rect">
+            <a:avLst/>
+          </a:prstGeom>
+          <a:noFill/>
+        </p:spPr>
+        <p:txBody>
+          <a:bodyPr wrap="square" lIns="73152" rIns="73152" tIns="36576" bIns="36576">
+            <a:spAutoFit/>
+          </a:bodyPr>
+          <a:lstStyle/>
+          <a:p>
+            <a:pPr algn="l">
+              <a:spcAft>
+                <a:spcPts val="0"/>
+              </a:spcAft>
+              <a:defRPr sz="1700" b="1">
+                <a:solidFill>
+                  <a:srgbClr val="5C6672"/>
+                </a:solidFill>
+                <a:latin typeface="Noto Sans CJK KR"/>
+              </a:defRPr>
+            </a:pPr>
+            <a:r>
+              <a:t>이미 있는 것</a:t>
+            </a:r>
+          </a:p>
+        </p:txBody>
+      </p:sp>
+      <p:sp>
+        <p:nvSpPr>
+          <p:cNvPr id="9" name="TextBox 8"/>
+          <p:cNvSpPr txBox="1"/>
+          <p:nvPr/>
+        </p:nvSpPr>
+        <p:spPr>
+          <a:xfrm>
+            <a:off x="2788920" y="1892807"/>
+            <a:ext cx="8229600" cy="566928"/>
+          </a:xfrm>
+          <a:prstGeom prst="rect">
+            <a:avLst/>
+          </a:prstGeom>
+          <a:noFill/>
+        </p:spPr>
+        <p:txBody>
+          <a:bodyPr wrap="square" lIns="73152" rIns="73152" tIns="36576" bIns="36576">
+            <a:spAutoFit/>
+          </a:bodyPr>
+          <a:lstStyle/>
+          <a:p>
+            <a:pPr algn="l">
+              <a:spcAft>
+                <a:spcPts val="0"/>
+              </a:spcAft>
+              <a:defRPr sz="1700" b="0">
+                <a:solidFill>
+                  <a:srgbClr val="122C4E"/>
+                </a:solidFill>
+                <a:latin typeface="Noto Sans CJK KR"/>
+              </a:defRPr>
+            </a:pPr>
+            <a:r>
+              <a:t>M04 frame tree</a:t>
+            </a:r>
+          </a:p>
+        </p:txBody>
+      </p:sp>
+      <p:sp>
+        <p:nvSpPr>
+          <p:cNvPr id="10" name="Rounded Rectangle 9"/>
+          <p:cNvSpPr/>
+          <p:nvPr/>
+        </p:nvSpPr>
+        <p:spPr>
+          <a:xfrm>
+            <a:off x="731520" y="3081528"/>
+            <a:ext cx="10835640" cy="1033271"/>
+          </a:xfrm>
+          <a:prstGeom prst="roundRect">
+            <a:avLst/>
+          </a:prstGeom>
+          <a:solidFill>
+            <a:srgbClr val="F4F7FB"/>
           </a:solidFill>
           <a:ln>
             <a:solidFill>
@@ -11446,14 +14329,79 @@
           </a:fontRef>
         </p:style>
         <p:txBody>
-          <a:bodyPr rtlCol="0" anchor="ctr" wrap="square" lIns="73152" rIns="73152" tIns="36576" bIns="36576"/>
-          <a:lstStyle/>
-          <a:p>
-            <a:pPr algn="ctr">
-              <a:spcAft>
-                <a:spcPts val="0"/>
-              </a:spcAft>
-              <a:defRPr sz="1900" b="1">
+          <a:bodyPr rtlCol="0" anchor="ctr"/>
+          <a:lstStyle/>
+          <a:p>
+            <a:pPr algn="ctr"/>
+          </a:p>
+        </p:txBody>
+      </p:sp>
+      <p:sp>
+        <p:nvSpPr>
+          <p:cNvPr id="11" name="TextBox 10"/>
+          <p:cNvSpPr txBox="1"/>
+          <p:nvPr/>
+        </p:nvSpPr>
+        <p:spPr>
+          <a:xfrm>
+            <a:off x="960120" y="3236976"/>
+            <a:ext cx="1920240" cy="228600"/>
+          </a:xfrm>
+          <a:prstGeom prst="rect">
+            <a:avLst/>
+          </a:prstGeom>
+          <a:noFill/>
+        </p:spPr>
+        <p:txBody>
+          <a:bodyPr wrap="square" lIns="73152" rIns="73152" tIns="36576" bIns="36576">
+            <a:spAutoFit/>
+          </a:bodyPr>
+          <a:lstStyle/>
+          <a:p>
+            <a:pPr algn="l">
+              <a:spcAft>
+                <a:spcPts val="0"/>
+              </a:spcAft>
+              <a:defRPr sz="1700" b="1">
+                <a:solidFill>
+                  <a:srgbClr val="225B9B"/>
+                </a:solidFill>
+                <a:latin typeface="Noto Sans CJK KR"/>
+              </a:defRPr>
+            </a:pPr>
+            <a:r>
+              <a:t>이번에 직접 만들 것</a:t>
+            </a:r>
+          </a:p>
+        </p:txBody>
+      </p:sp>
+      <p:sp>
+        <p:nvSpPr>
+          <p:cNvPr id="12" name="TextBox 11"/>
+          <p:cNvSpPr txBox="1"/>
+          <p:nvPr/>
+        </p:nvSpPr>
+        <p:spPr>
+          <a:xfrm>
+            <a:off x="2788920" y="3218688"/>
+            <a:ext cx="8229600" cy="566928"/>
+          </a:xfrm>
+          <a:prstGeom prst="rect">
+            <a:avLst/>
+          </a:prstGeom>
+          <a:noFill/>
+        </p:spPr>
+        <p:txBody>
+          <a:bodyPr wrap="square" lIns="73152" rIns="73152" tIns="36576" bIns="36576">
+            <a:spAutoFit/>
+          </a:bodyPr>
+          <a:lstStyle/>
+          <a:p>
+            <a:pPr algn="l">
+              <a:spcAft>
+                <a:spcPts val="0"/>
+              </a:spcAft>
+              <a:defRPr sz="1700" b="0">
                 <a:solidFill>
                   <a:srgbClr val="122C4E"/>
                 </a:solidFill>
@@ -11461,70 +14409,31 @@
               </a:defRPr>
             </a:pPr>
             <a:r>
-              <a:t>base_link</a:t>
-            </a:r>
-            <a:br/>
-            <a:r>
-              <a:t>box</a:t>
-            </a:r>
-          </a:p>
-        </p:txBody>
-      </p:sp>
-      <p:cxnSp>
-        <p:nvCxnSpPr>
-          <p:cNvPr id="7" name="Connector 6"/>
-          <p:cNvCxnSpPr/>
-          <p:nvPr/>
-        </p:nvCxnSpPr>
-        <p:spPr>
-          <a:xfrm>
-            <a:off x="4768596" y="3264408"/>
-            <a:ext cx="283463" cy="0"/>
-          </a:xfrm>
-          <a:prstGeom prst="line">
-            <a:avLst/>
-          </a:prstGeom>
-          <a:ln w="31750">
-            <a:solidFill>
-              <a:srgbClr val="225B9B"/>
-            </a:solidFill>
-          </a:ln>
-        </p:spPr>
-        <p:style>
-          <a:lnRef idx="2">
-            <a:schemeClr val="accent1"/>
-          </a:lnRef>
-          <a:fillRef idx="0">
-            <a:schemeClr val="accent1"/>
-          </a:fillRef>
-          <a:effectRef idx="1">
-            <a:schemeClr val="accent1"/>
-          </a:effectRef>
-          <a:fontRef idx="minor">
-            <a:schemeClr val="tx1"/>
-          </a:fontRef>
-        </p:style>
-      </p:cxnSp>
-      <p:sp>
-        <p:nvSpPr>
-          <p:cNvPr id="8" name="Rounded Rectangle 7"/>
+              <a:t>box·cylinder·sphere만으로 body·wheel·caster·sensor frame을 갖춘 AGV를 만든다.</a:t>
+            </a:r>
+          </a:p>
+        </p:txBody>
+      </p:sp>
+      <p:sp>
+        <p:nvSpPr>
+          <p:cNvPr id="13" name="Rounded Rectangle 12"/>
           <p:cNvSpPr/>
           <p:nvPr/>
         </p:nvSpPr>
         <p:spPr>
           <a:xfrm>
-            <a:off x="5079492" y="2743200"/>
-            <a:ext cx="2029968" cy="1051560"/>
+            <a:off x="731520" y="4407408"/>
+            <a:ext cx="10835640" cy="1033271"/>
           </a:xfrm>
           <a:prstGeom prst="roundRect">
             <a:avLst/>
           </a:prstGeom>
           <a:solidFill>
-            <a:srgbClr val="FFFFFF"/>
+            <a:srgbClr val="F4F7FB"/>
           </a:solidFill>
           <a:ln>
             <a:solidFill>
-              <a:srgbClr val="225B9B"/>
+              <a:srgbClr val="2A8B5A"/>
             </a:solidFill>
           </a:ln>
         </p:spPr>
@@ -11543,162 +14452,126 @@
           </a:fontRef>
         </p:style>
         <p:txBody>
-          <a:bodyPr rtlCol="0" anchor="ctr" wrap="square" lIns="73152" rIns="73152" tIns="36576" bIns="36576"/>
+          <a:bodyPr rtlCol="0" anchor="ctr"/>
+          <a:lstStyle/>
+          <a:p>
+            <a:pPr algn="ctr"/>
+          </a:p>
+        </p:txBody>
+      </p:sp>
+      <p:sp>
+        <p:nvSpPr>
+          <p:cNvPr id="14" name="TextBox 13"/>
+          <p:cNvSpPr txBox="1"/>
+          <p:nvPr/>
+        </p:nvSpPr>
+        <p:spPr>
+          <a:xfrm>
+            <a:off x="960120" y="4562856"/>
+            <a:ext cx="1920240" cy="228600"/>
+          </a:xfrm>
+          <a:prstGeom prst="rect">
+            <a:avLst/>
+          </a:prstGeom>
+          <a:noFill/>
+        </p:spPr>
+        <p:txBody>
+          <a:bodyPr wrap="square" lIns="73152" rIns="73152" tIns="36576" bIns="36576">
+            <a:spAutoFit/>
+          </a:bodyPr>
+          <a:lstStyle/>
+          <a:p>
+            <a:pPr algn="l">
+              <a:spcAft>
+                <a:spcPts val="0"/>
+              </a:spcAft>
+              <a:defRPr sz="1700" b="1">
+                <a:solidFill>
+                  <a:srgbClr val="2A8B5A"/>
+                </a:solidFill>
+                <a:latin typeface="Noto Sans CJK KR"/>
+              </a:defRPr>
+            </a:pPr>
+            <a:r>
+              <a:t>만들고 나서 확인할 것</a:t>
+            </a:r>
+          </a:p>
+        </p:txBody>
+      </p:sp>
+      <p:sp>
+        <p:nvSpPr>
+          <p:cNvPr id="15" name="TextBox 14"/>
+          <p:cNvSpPr txBox="1"/>
+          <p:nvPr/>
+        </p:nvSpPr>
+        <p:spPr>
+          <a:xfrm>
+            <a:off x="2788920" y="4544568"/>
+            <a:ext cx="8229600" cy="566928"/>
+          </a:xfrm>
+          <a:prstGeom prst="rect">
+            <a:avLst/>
+          </a:prstGeom>
+          <a:noFill/>
+        </p:spPr>
+        <p:txBody>
+          <a:bodyPr wrap="square" lIns="73152" rIns="73152" tIns="36576" bIns="36576">
+            <a:spAutoFit/>
+          </a:bodyPr>
+          <a:lstStyle/>
+          <a:p>
+            <a:pPr algn="l">
+              <a:spcAft>
+                <a:spcPts val="0"/>
+              </a:spcAft>
+              <a:defRPr sz="1700" b="0">
+                <a:solidFill>
+                  <a:srgbClr val="122C4E"/>
+                </a:solidFill>
+                <a:latin typeface="Noto Sans CJK KR"/>
+              </a:defRPr>
+            </a:pPr>
+            <a:r>
+              <a:t>RobotModel과 TF에서 base, 두 wheel, camera, lidar, imu 연결을 확인한다.</a:t>
+            </a:r>
+          </a:p>
+        </p:txBody>
+      </p:sp>
+      <p:sp>
+        <p:nvSpPr>
+          <p:cNvPr id="16" name="TextBox 15"/>
+          <p:cNvSpPr txBox="1"/>
+          <p:nvPr/>
+        </p:nvSpPr>
+        <p:spPr>
+          <a:xfrm>
+            <a:off x="841248" y="5833872"/>
+            <a:ext cx="10561320" cy="365760"/>
+          </a:xfrm>
+          <a:prstGeom prst="rect">
+            <a:avLst/>
+          </a:prstGeom>
+          <a:noFill/>
+        </p:spPr>
+        <p:txBody>
+          <a:bodyPr wrap="square" lIns="73152" rIns="73152" tIns="36576" bIns="36576">
+            <a:spAutoFit/>
+          </a:bodyPr>
           <a:lstStyle/>
           <a:p>
             <a:pPr algn="ctr">
               <a:spcAft>
                 <a:spcPts val="0"/>
               </a:spcAft>
-              <a:defRPr sz="1900" b="1">
-                <a:solidFill>
-                  <a:srgbClr val="122C4E"/>
-                </a:solidFill>
-                <a:latin typeface="Noto Sans CJK KR"/>
-              </a:defRPr>
-            </a:pPr>
-            <a:r>
-              <a:t>wheel</a:t>
-            </a:r>
-            <a:br/>
-            <a:r>
-              <a:t>cylinder</a:t>
-            </a:r>
-          </a:p>
-        </p:txBody>
-      </p:sp>
-      <p:cxnSp>
-        <p:nvCxnSpPr>
-          <p:cNvPr id="9" name="Connector 8"/>
-          <p:cNvCxnSpPr/>
-          <p:nvPr/>
-        </p:nvCxnSpPr>
-        <p:spPr>
-          <a:xfrm>
-            <a:off x="7109460" y="3264408"/>
-            <a:ext cx="283464" cy="0"/>
-          </a:xfrm>
-          <a:prstGeom prst="line">
-            <a:avLst/>
-          </a:prstGeom>
-          <a:ln w="31750">
-            <a:solidFill>
-              <a:srgbClr val="225B9B"/>
-            </a:solidFill>
-          </a:ln>
-        </p:spPr>
-        <p:style>
-          <a:lnRef idx="2">
-            <a:schemeClr val="accent1"/>
-          </a:lnRef>
-          <a:fillRef idx="0">
-            <a:schemeClr val="accent1"/>
-          </a:fillRef>
-          <a:effectRef idx="1">
-            <a:schemeClr val="accent1"/>
-          </a:effectRef>
-          <a:fontRef idx="minor">
-            <a:schemeClr val="tx1"/>
-          </a:fontRef>
-        </p:style>
-      </p:cxnSp>
-      <p:sp>
-        <p:nvSpPr>
-          <p:cNvPr id="10" name="Rounded Rectangle 9"/>
-          <p:cNvSpPr/>
-          <p:nvPr/>
-        </p:nvSpPr>
-        <p:spPr>
-          <a:xfrm>
-            <a:off x="7420356" y="2743200"/>
-            <a:ext cx="2029968" cy="1051560"/>
-          </a:xfrm>
-          <a:prstGeom prst="roundRect">
-            <a:avLst/>
-          </a:prstGeom>
-          <a:solidFill>
-            <a:srgbClr val="FFFFFF"/>
-          </a:solidFill>
-          <a:ln>
-            <a:solidFill>
-              <a:srgbClr val="225B9B"/>
-            </a:solidFill>
-          </a:ln>
-        </p:spPr>
-        <p:style>
-          <a:lnRef idx="1">
-            <a:schemeClr val="accent1"/>
-          </a:lnRef>
-          <a:fillRef idx="3">
-            <a:schemeClr val="accent1"/>
-          </a:fillRef>
-          <a:effectRef idx="2">
-            <a:schemeClr val="accent1"/>
-          </a:effectRef>
-          <a:fontRef idx="minor">
-            <a:schemeClr val="lt1"/>
-          </a:fontRef>
-        </p:style>
-        <p:txBody>
-          <a:bodyPr rtlCol="0" anchor="ctr" wrap="square" lIns="73152" rIns="73152" tIns="36576" bIns="36576"/>
-          <a:lstStyle/>
-          <a:p>
-            <a:pPr algn="ctr">
-              <a:spcAft>
-                <a:spcPts val="0"/>
-              </a:spcAft>
-              <a:defRPr sz="1900" b="1">
-                <a:solidFill>
-                  <a:srgbClr val="122C4E"/>
-                </a:solidFill>
-                <a:latin typeface="Noto Sans CJK KR"/>
-              </a:defRPr>
-            </a:pPr>
-            <a:r>
-              <a:t>sensor</a:t>
-            </a:r>
-            <a:br/>
-            <a:r>
-              <a:t>fixed joint</a:t>
-            </a:r>
-          </a:p>
-        </p:txBody>
-      </p:sp>
-      <p:sp>
-        <p:nvSpPr>
-          <p:cNvPr id="11" name="TextBox 10"/>
-          <p:cNvSpPr txBox="1"/>
-          <p:nvPr/>
-        </p:nvSpPr>
-        <p:spPr>
-          <a:xfrm>
-            <a:off x="914400" y="4800600"/>
-            <a:ext cx="10332720" cy="502920"/>
-          </a:xfrm>
-          <a:prstGeom prst="rect">
-            <a:avLst/>
-          </a:prstGeom>
-          <a:noFill/>
-        </p:spPr>
-        <p:txBody>
-          <a:bodyPr wrap="square" lIns="73152" rIns="73152" tIns="36576" bIns="36576">
-            <a:spAutoFit/>
-          </a:bodyPr>
-          <a:lstStyle/>
-          <a:p>
-            <a:pPr algn="ctr">
-              <a:spcAft>
-                <a:spcPts val="0"/>
-              </a:spcAft>
-              <a:defRPr sz="2000" b="1">
-                <a:solidFill>
-                  <a:srgbClr val="225B9B"/>
-                </a:solidFill>
-                <a:latin typeface="Noto Sans CJK KR"/>
-              </a:defRPr>
-            </a:pPr>
-            <a:r>
-              <a:t>기억할 한 문장: 앞 단계의 출력이 다음 단계의 입력이 되도록 topic·frame·파일 이름을 끝까지 유지합니다.</a:t>
+              <a:defRPr sz="1500" b="1">
+                <a:solidFill>
+                  <a:srgbClr val="DB7E22"/>
+                </a:solidFill>
+                <a:latin typeface="Noto Sans CJK KR"/>
+              </a:defRPr>
+            </a:pPr>
+            <a:r>
+              <a:t>이번 모듈에서는 1개 파일을 빈 상태에서 직접 만듭니다. 다음 슬라이드의 명령을 입력한 뒤에만 코드를 작성합니다.</a:t>
             </a:r>
           </a:p>
         </p:txBody>
@@ -11755,7 +14628,7 @@
               </a:defRPr>
             </a:pPr>
             <a:r>
-              <a:t>이번 모듈에서 생성·수정하는 파일</a:t>
+              <a:t>먼저 이번 단계의 완료 모습을 본다</a:t>
             </a:r>
           </a:p>
         </p:txBody>
@@ -11794,7 +14667,7 @@
               </a:defRPr>
             </a:pPr>
             <a:r>
-              <a:t>파일명과 package 경로를 끝까지 동일하게 사용합니다.</a:t>
+              <a:t>지금부터 폴더·파일·코드를 만들면 아래의 실제 결과에 도달합니다. 보이는 기준을 기억한 뒤 구현합니다.</a:t>
             </a:r>
           </a:p>
         </p:txBody>
@@ -11877,68 +14750,30 @@
           </a:p>
         </p:txBody>
       </p:sp>
-      <p:sp>
-        <p:nvSpPr>
-          <p:cNvPr id="6" name="Rounded Rectangle 5"/>
-          <p:cNvSpPr/>
-          <p:nvPr/>
-        </p:nvSpPr>
-        <p:spPr>
-          <a:xfrm>
-            <a:off x="777240" y="1600200"/>
-            <a:ext cx="10789920" cy="4407408"/>
-          </a:xfrm>
-          <a:prstGeom prst="roundRect">
-            <a:avLst/>
-          </a:prstGeom>
-          <a:solidFill>
-            <a:srgbClr val="1D232D"/>
-          </a:solidFill>
-          <a:ln>
-            <a:solidFill>
-              <a:srgbClr val="1D232D"/>
-            </a:solidFill>
-          </a:ln>
-        </p:spPr>
-        <p:style>
-          <a:lnRef idx="1">
-            <a:schemeClr val="accent1"/>
-          </a:lnRef>
-          <a:fillRef idx="3">
-            <a:schemeClr val="accent1"/>
-          </a:fillRef>
-          <a:effectRef idx="2">
-            <a:schemeClr val="accent1"/>
-          </a:effectRef>
-          <a:fontRef idx="minor">
-            <a:schemeClr val="lt1"/>
-          </a:fontRef>
-        </p:style>
-        <p:txBody>
-          <a:bodyPr rtlCol="0" anchor="ctr" wrap="square" lIns="73152" rIns="73152" tIns="36576" bIns="36576"/>
-          <a:lstStyle/>
-          <a:p>
-            <a:pPr algn="l">
-              <a:spcAft>
-                <a:spcPts val="0"/>
-              </a:spcAft>
-              <a:defRPr sz="1600" b="0">
-                <a:solidFill>
-                  <a:srgbClr val="FFFFFF"/>
-                </a:solidFill>
-                <a:latin typeface="DejaVu Sans Mono"/>
-              </a:defRPr>
-            </a:pPr>
-            <a:r>
-              <a:t>~/ros2_curri/agv_ws/src/</a:t>
-            </a:r>
-            <a:br/>
-            <a:r>
-              <a:t>└── agv_description/curriculum_stages/M05/agv.urdf</a:t>
-            </a:r>
-          </a:p>
-        </p:txBody>
-      </p:sp>
+      <p:pic>
+        <p:nvPicPr>
+          <p:cNvPr id="6" name="Picture 5" descr="02_m05_urdf_terminal_actual.png"/>
+          <p:cNvPicPr>
+            <a:picLocks noChangeAspect="1"/>
+          </p:cNvPicPr>
+          <p:nvPr/>
+        </p:nvPicPr>
+        <p:blipFill>
+          <a:blip r:embed="rId2"/>
+          <a:stretch>
+            <a:fillRect/>
+          </a:stretch>
+        </p:blipFill>
+        <p:spPr>
+          <a:xfrm>
+            <a:off x="2884190" y="1389888"/>
+            <a:ext cx="6420570" cy="4663440"/>
+          </a:xfrm>
+          <a:prstGeom prst="rect">
+            <a:avLst/>
+          </a:prstGeom>
+        </p:spPr>
+      </p:pic>
       <p:sp>
         <p:nvSpPr>
           <p:cNvPr id="7" name="TextBox 6"/>
@@ -11947,8 +14782,8 @@
         </p:nvSpPr>
         <p:spPr>
           <a:xfrm>
-            <a:off x="877824" y="6144768"/>
-            <a:ext cx="10332720" cy="201168"/>
+            <a:off x="777240" y="6126480"/>
+            <a:ext cx="10607040" cy="228600"/>
           </a:xfrm>
           <a:prstGeom prst="rect">
             <a:avLst/>
@@ -11965,15 +14800,15 @@
               <a:spcAft>
                 <a:spcPts val="0"/>
               </a:spcAft>
-              <a:defRPr sz="1100" b="0">
-                <a:solidFill>
-                  <a:srgbClr val="5C6672"/>
-                </a:solidFill>
-                <a:latin typeface="Noto Sans CJK KR"/>
-              </a:defRPr>
-            </a:pPr>
-            <a:r>
-              <a:t>파일 전체 코드는 다음 슬라이드에 이어집니다. 중간 줄을 빼지 않고 끝까지 제공합니다.</a:t>
+              <a:defRPr sz="1000" b="1">
+                <a:solidFill>
+                  <a:srgbClr val="2A8B5A"/>
+                </a:solidFill>
+                <a:latin typeface="Noto Sans CJK KR"/>
+              </a:defRPr>
+            </a:pPr>
+            <a:r>
+              <a:t>목표 화면: 실제 terminal: check_urdf가 base_link와 6개 자식 link를 확인한 결과  |  나중에 확인할 것: root Link=base_link와 wheel·camera·lidar·imu child 이름을 찾습니다.</a:t>
             </a:r>
           </a:p>
         </p:txBody>
@@ -12030,7 +14865,7 @@
               </a:defRPr>
             </a:pPr>
             <a:r>
-              <a:t>코드/설정이 실제로 만드는 것 (1/1)</a:t>
+              <a:t>핵심 흐름을 한 장으로 이해하기</a:t>
             </a:r>
           </a:p>
         </p:txBody>
@@ -12069,7 +14904,7 @@
               </a:defRPr>
             </a:pPr>
             <a:r>
-              <a:t>파일을 입력하기 전에 ‘무엇을 만들고 어디서 볼지’를 먼저 연결합니다.</a:t>
+              <a:t>상자와 화살표의 방향을 따라 데이터 또는 제어의 흐름을 읽습니다.</a:t>
             </a:r>
           </a:p>
         </p:txBody>
@@ -12154,24 +14989,24 @@
       </p:sp>
       <p:sp>
         <p:nvSpPr>
-          <p:cNvPr id="6" name="Rectangle 5"/>
+          <p:cNvPr id="6" name="Rounded Rectangle 5"/>
           <p:cNvSpPr/>
           <p:nvPr/>
         </p:nvSpPr>
         <p:spPr>
           <a:xfrm>
-            <a:off x="566928" y="1188720"/>
-            <a:ext cx="11064240" cy="347472"/>
-          </a:xfrm>
-          <a:prstGeom prst="rect">
+            <a:off x="2738628" y="2743200"/>
+            <a:ext cx="2029968" cy="1051560"/>
+          </a:xfrm>
+          <a:prstGeom prst="roundRect">
             <a:avLst/>
           </a:prstGeom>
           <a:solidFill>
-            <a:srgbClr val="F4F7FB"/>
+            <a:srgbClr val="FFFFFF"/>
           </a:solidFill>
           <a:ln>
             <a:solidFill>
-              <a:srgbClr val="F4F7FB"/>
+              <a:srgbClr val="225B9B"/>
             </a:solidFill>
           </a:ln>
         </p:spPr>
@@ -12193,11 +15028,11 @@
           <a:bodyPr rtlCol="0" anchor="ctr" wrap="square" lIns="73152" rIns="73152" tIns="36576" bIns="36576"/>
           <a:lstStyle/>
           <a:p>
-            <a:pPr algn="l">
-              <a:spcAft>
-                <a:spcPts val="0"/>
-              </a:spcAft>
-              <a:defRPr sz="1300" b="1">
+            <a:pPr algn="ctr">
+              <a:spcAft>
+                <a:spcPts val="0"/>
+              </a:spcAft>
+              <a:defRPr sz="1900" b="1">
                 <a:solidFill>
                   <a:srgbClr val="122C4E"/>
                 </a:solidFill>
@@ -12205,31 +15040,70 @@
               </a:defRPr>
             </a:pPr>
             <a:r>
-              <a:t>현재 단계 파일 역할    |    현재 폴더 ~/ros2_curri/agv_ws    |    현재 터미널</a:t>
-            </a:r>
-          </a:p>
-        </p:txBody>
-      </p:sp>
-      <p:sp>
-        <p:nvSpPr>
-          <p:cNvPr id="7" name="Rounded Rectangle 6"/>
+              <a:t>base_link</a:t>
+            </a:r>
+            <a:br/>
+            <a:r>
+              <a:t>box</a:t>
+            </a:r>
+          </a:p>
+        </p:txBody>
+      </p:sp>
+      <p:cxnSp>
+        <p:nvCxnSpPr>
+          <p:cNvPr id="7" name="Connector 6"/>
+          <p:cNvCxnSpPr/>
+          <p:nvPr/>
+        </p:nvCxnSpPr>
+        <p:spPr>
+          <a:xfrm>
+            <a:off x="4768596" y="3264408"/>
+            <a:ext cx="283463" cy="0"/>
+          </a:xfrm>
+          <a:prstGeom prst="line">
+            <a:avLst/>
+          </a:prstGeom>
+          <a:ln w="31750">
+            <a:solidFill>
+              <a:srgbClr val="225B9B"/>
+            </a:solidFill>
+          </a:ln>
+        </p:spPr>
+        <p:style>
+          <a:lnRef idx="2">
+            <a:schemeClr val="accent1"/>
+          </a:lnRef>
+          <a:fillRef idx="0">
+            <a:schemeClr val="accent1"/>
+          </a:fillRef>
+          <a:effectRef idx="1">
+            <a:schemeClr val="accent1"/>
+          </a:effectRef>
+          <a:fontRef idx="minor">
+            <a:schemeClr val="tx1"/>
+          </a:fontRef>
+        </p:style>
+      </p:cxnSp>
+      <p:sp>
+        <p:nvSpPr>
+          <p:cNvPr id="8" name="Rounded Rectangle 7"/>
           <p:cNvSpPr/>
           <p:nvPr/>
         </p:nvSpPr>
         <p:spPr>
           <a:xfrm>
-            <a:off x="640080" y="1627632"/>
-            <a:ext cx="10972800" cy="2048256"/>
+            <a:off x="5079492" y="2743200"/>
+            <a:ext cx="2029968" cy="1051560"/>
           </a:xfrm>
           <a:prstGeom prst="roundRect">
             <a:avLst/>
           </a:prstGeom>
           <a:solidFill>
-            <a:srgbClr val="F4F7FB"/>
+            <a:srgbClr val="FFFFFF"/>
           </a:solidFill>
           <a:ln>
             <a:solidFill>
-              <a:srgbClr val="CCDBEB"/>
+              <a:srgbClr val="225B9B"/>
             </a:solidFill>
           </a:ln>
         </p:spPr>
@@ -12248,23 +15122,137 @@
           </a:fontRef>
         </p:style>
         <p:txBody>
-          <a:bodyPr rtlCol="0" anchor="ctr"/>
-          <a:lstStyle/>
-          <a:p>
-            <a:pPr algn="ctr"/>
-          </a:p>
-        </p:txBody>
-      </p:sp>
-      <p:sp>
-        <p:nvSpPr>
-          <p:cNvPr id="8" name="TextBox 7"/>
-          <p:cNvSpPr txBox="1"/>
-          <p:nvPr/>
-        </p:nvSpPr>
-        <p:spPr>
-          <a:xfrm>
-            <a:off x="850392" y="1764792"/>
-            <a:ext cx="10424160" cy="256032"/>
+          <a:bodyPr rtlCol="0" anchor="ctr" wrap="square" lIns="73152" rIns="73152" tIns="36576" bIns="36576"/>
+          <a:lstStyle/>
+          <a:p>
+            <a:pPr algn="ctr">
+              <a:spcAft>
+                <a:spcPts val="0"/>
+              </a:spcAft>
+              <a:defRPr sz="1900" b="1">
+                <a:solidFill>
+                  <a:srgbClr val="122C4E"/>
+                </a:solidFill>
+                <a:latin typeface="Noto Sans CJK KR"/>
+              </a:defRPr>
+            </a:pPr>
+            <a:r>
+              <a:t>wheel</a:t>
+            </a:r>
+            <a:br/>
+            <a:r>
+              <a:t>cylinder</a:t>
+            </a:r>
+          </a:p>
+        </p:txBody>
+      </p:sp>
+      <p:cxnSp>
+        <p:nvCxnSpPr>
+          <p:cNvPr id="9" name="Connector 8"/>
+          <p:cNvCxnSpPr/>
+          <p:nvPr/>
+        </p:nvCxnSpPr>
+        <p:spPr>
+          <a:xfrm>
+            <a:off x="7109460" y="3264408"/>
+            <a:ext cx="283464" cy="0"/>
+          </a:xfrm>
+          <a:prstGeom prst="line">
+            <a:avLst/>
+          </a:prstGeom>
+          <a:ln w="31750">
+            <a:solidFill>
+              <a:srgbClr val="225B9B"/>
+            </a:solidFill>
+          </a:ln>
+        </p:spPr>
+        <p:style>
+          <a:lnRef idx="2">
+            <a:schemeClr val="accent1"/>
+          </a:lnRef>
+          <a:fillRef idx="0">
+            <a:schemeClr val="accent1"/>
+          </a:fillRef>
+          <a:effectRef idx="1">
+            <a:schemeClr val="accent1"/>
+          </a:effectRef>
+          <a:fontRef idx="minor">
+            <a:schemeClr val="tx1"/>
+          </a:fontRef>
+        </p:style>
+      </p:cxnSp>
+      <p:sp>
+        <p:nvSpPr>
+          <p:cNvPr id="10" name="Rounded Rectangle 9"/>
+          <p:cNvSpPr/>
+          <p:nvPr/>
+        </p:nvSpPr>
+        <p:spPr>
+          <a:xfrm>
+            <a:off x="7420356" y="2743200"/>
+            <a:ext cx="2029968" cy="1051560"/>
+          </a:xfrm>
+          <a:prstGeom prst="roundRect">
+            <a:avLst/>
+          </a:prstGeom>
+          <a:solidFill>
+            <a:srgbClr val="FFFFFF"/>
+          </a:solidFill>
+          <a:ln>
+            <a:solidFill>
+              <a:srgbClr val="225B9B"/>
+            </a:solidFill>
+          </a:ln>
+        </p:spPr>
+        <p:style>
+          <a:lnRef idx="1">
+            <a:schemeClr val="accent1"/>
+          </a:lnRef>
+          <a:fillRef idx="3">
+            <a:schemeClr val="accent1"/>
+          </a:fillRef>
+          <a:effectRef idx="2">
+            <a:schemeClr val="accent1"/>
+          </a:effectRef>
+          <a:fontRef idx="minor">
+            <a:schemeClr val="lt1"/>
+          </a:fontRef>
+        </p:style>
+        <p:txBody>
+          <a:bodyPr rtlCol="0" anchor="ctr" wrap="square" lIns="73152" rIns="73152" tIns="36576" bIns="36576"/>
+          <a:lstStyle/>
+          <a:p>
+            <a:pPr algn="ctr">
+              <a:spcAft>
+                <a:spcPts val="0"/>
+              </a:spcAft>
+              <a:defRPr sz="1900" b="1">
+                <a:solidFill>
+                  <a:srgbClr val="122C4E"/>
+                </a:solidFill>
+                <a:latin typeface="Noto Sans CJK KR"/>
+              </a:defRPr>
+            </a:pPr>
+            <a:r>
+              <a:t>sensor</a:t>
+            </a:r>
+            <a:br/>
+            <a:r>
+              <a:t>fixed joint</a:t>
+            </a:r>
+          </a:p>
+        </p:txBody>
+      </p:sp>
+      <p:sp>
+        <p:nvSpPr>
+          <p:cNvPr id="11" name="TextBox 10"/>
+          <p:cNvSpPr txBox="1"/>
+          <p:nvPr/>
+        </p:nvSpPr>
+        <p:spPr>
+          <a:xfrm>
+            <a:off x="914400" y="4800600"/>
+            <a:ext cx="10332720" cy="502920"/>
           </a:xfrm>
           <a:prstGeom prst="rect">
             <a:avLst/>
@@ -12277,257 +15265,19 @@
           </a:bodyPr>
           <a:lstStyle/>
           <a:p>
-            <a:pPr algn="l">
-              <a:spcAft>
-                <a:spcPts val="0"/>
-              </a:spcAft>
-              <a:defRPr sz="1300" b="1">
+            <a:pPr algn="ctr">
+              <a:spcAft>
+                <a:spcPts val="0"/>
+              </a:spcAft>
+              <a:defRPr sz="2000" b="1">
                 <a:solidFill>
                   <a:srgbClr val="225B9B"/>
                 </a:solidFill>
-                <a:latin typeface="DejaVu Sans Mono"/>
-              </a:defRPr>
-            </a:pPr>
-            <a:r>
-              <a:t>~/ros2_curri/agv_ws/src/agv_description/curriculum_stages/M05/agv.urdf</a:t>
-            </a:r>
-          </a:p>
-        </p:txBody>
-      </p:sp>
-      <p:sp>
-        <p:nvSpPr>
-          <p:cNvPr id="9" name="TextBox 8"/>
-          <p:cNvSpPr txBox="1"/>
-          <p:nvPr/>
-        </p:nvSpPr>
-        <p:spPr>
-          <a:xfrm>
-            <a:off x="868680" y="2130552"/>
-            <a:ext cx="1234440" cy="228600"/>
-          </a:xfrm>
-          <a:prstGeom prst="rect">
-            <a:avLst/>
-          </a:prstGeom>
-          <a:noFill/>
-        </p:spPr>
-        <p:txBody>
-          <a:bodyPr wrap="square" lIns="73152" rIns="73152" tIns="36576" bIns="36576">
-            <a:spAutoFit/>
-          </a:bodyPr>
-          <a:lstStyle/>
-          <a:p>
-            <a:pPr algn="l">
-              <a:spcAft>
-                <a:spcPts val="0"/>
-              </a:spcAft>
-              <a:defRPr sz="1500" b="1">
-                <a:solidFill>
-                  <a:srgbClr val="2A8B5A"/>
-                </a:solidFill>
-                <a:latin typeface="Noto Sans CJK KR"/>
-              </a:defRPr>
-            </a:pPr>
-            <a:r>
-              <a:t>만드는 것</a:t>
-            </a:r>
-          </a:p>
-        </p:txBody>
-      </p:sp>
-      <p:sp>
-        <p:nvSpPr>
-          <p:cNvPr id="10" name="TextBox 9"/>
-          <p:cNvSpPr txBox="1"/>
-          <p:nvPr/>
-        </p:nvSpPr>
-        <p:spPr>
-          <a:xfrm>
-            <a:off x="1975104" y="2112264"/>
-            <a:ext cx="9189720" cy="274320"/>
-          </a:xfrm>
-          <a:prstGeom prst="rect">
-            <a:avLst/>
-          </a:prstGeom>
-          <a:noFill/>
-        </p:spPr>
-        <p:txBody>
-          <a:bodyPr wrap="square" lIns="73152" rIns="73152" tIns="36576" bIns="36576">
-            <a:spAutoFit/>
-          </a:bodyPr>
-          <a:lstStyle/>
-          <a:p>
-            <a:pPr algn="l">
-              <a:spcAft>
-                <a:spcPts val="0"/>
-              </a:spcAft>
-              <a:defRPr sz="1500" b="0">
-                <a:solidFill>
-                  <a:srgbClr val="122C4E"/>
-                </a:solidFill>
-                <a:latin typeface="Noto Sans CJK KR"/>
-              </a:defRPr>
-            </a:pPr>
-            <a:r>
-              <a:t>몸체·두 바퀴·caster·camera/lidar/imu frame을 link와 joint로 조립한 기본 AGV</a:t>
-            </a:r>
-          </a:p>
-        </p:txBody>
-      </p:sp>
-      <p:sp>
-        <p:nvSpPr>
-          <p:cNvPr id="11" name="TextBox 10"/>
-          <p:cNvSpPr txBox="1"/>
-          <p:nvPr/>
-        </p:nvSpPr>
-        <p:spPr>
-          <a:xfrm>
-            <a:off x="868680" y="2505456"/>
-            <a:ext cx="1234440" cy="228600"/>
-          </a:xfrm>
-          <a:prstGeom prst="rect">
-            <a:avLst/>
-          </a:prstGeom>
-          <a:noFill/>
-        </p:spPr>
-        <p:txBody>
-          <a:bodyPr wrap="square" lIns="73152" rIns="73152" tIns="36576" bIns="36576">
-            <a:spAutoFit/>
-          </a:bodyPr>
-          <a:lstStyle/>
-          <a:p>
-            <a:pPr algn="l">
-              <a:spcAft>
-                <a:spcPts val="0"/>
-              </a:spcAft>
-              <a:defRPr sz="1500" b="1">
-                <a:solidFill>
-                  <a:srgbClr val="DB7E22"/>
-                </a:solidFill>
-                <a:latin typeface="Noto Sans CJK KR"/>
-              </a:defRPr>
-            </a:pPr>
-            <a:r>
-              <a:t>코드 읽기</a:t>
-            </a:r>
-          </a:p>
-        </p:txBody>
-      </p:sp>
-      <p:sp>
-        <p:nvSpPr>
-          <p:cNvPr id="12" name="TextBox 11"/>
-          <p:cNvSpPr txBox="1"/>
-          <p:nvPr/>
-        </p:nvSpPr>
-        <p:spPr>
-          <a:xfrm>
-            <a:off x="1975104" y="2487168"/>
-            <a:ext cx="9189720" cy="301752"/>
-          </a:xfrm>
-          <a:prstGeom prst="rect">
-            <a:avLst/>
-          </a:prstGeom>
-          <a:noFill/>
-        </p:spPr>
-        <p:txBody>
-          <a:bodyPr wrap="square" lIns="73152" rIns="73152" tIns="36576" bIns="36576">
-            <a:spAutoFit/>
-          </a:bodyPr>
-          <a:lstStyle/>
-          <a:p>
-            <a:pPr algn="l">
-              <a:spcAft>
-                <a:spcPts val="0"/>
-              </a:spcAft>
-              <a:defRPr sz="1400" b="0">
-                <a:solidFill>
-                  <a:srgbClr val="122C4E"/>
-                </a:solidFill>
-                <a:latin typeface="Noto Sans CJK KR"/>
-              </a:defRPr>
-            </a:pPr>
-            <a:r>
-              <a:t>각 &lt;link&gt;의 geometry와 각 &lt;joint&gt;의 parent/child를 차례로 작성한다.</a:t>
-            </a:r>
-          </a:p>
-        </p:txBody>
-      </p:sp>
-      <p:sp>
-        <p:nvSpPr>
-          <p:cNvPr id="13" name="TextBox 12"/>
-          <p:cNvSpPr txBox="1"/>
-          <p:nvPr/>
-        </p:nvSpPr>
-        <p:spPr>
-          <a:xfrm>
-            <a:off x="868680" y="2889504"/>
-            <a:ext cx="1234440" cy="228600"/>
-          </a:xfrm>
-          <a:prstGeom prst="rect">
-            <a:avLst/>
-          </a:prstGeom>
-          <a:noFill/>
-        </p:spPr>
-        <p:txBody>
-          <a:bodyPr wrap="square" lIns="73152" rIns="73152" tIns="36576" bIns="36576">
-            <a:spAutoFit/>
-          </a:bodyPr>
-          <a:lstStyle/>
-          <a:p>
-            <a:pPr algn="l">
-              <a:spcAft>
-                <a:spcPts val="0"/>
-              </a:spcAft>
-              <a:defRPr sz="1500" b="1">
-                <a:solidFill>
-                  <a:srgbClr val="225B9B"/>
-                </a:solidFill>
-                <a:latin typeface="Noto Sans CJK KR"/>
-              </a:defRPr>
-            </a:pPr>
-            <a:r>
-              <a:t>사용/확인</a:t>
-            </a:r>
-          </a:p>
-        </p:txBody>
-      </p:sp>
-      <p:sp>
-        <p:nvSpPr>
-          <p:cNvPr id="14" name="TextBox 13"/>
-          <p:cNvSpPr txBox="1"/>
-          <p:nvPr/>
-        </p:nvSpPr>
-        <p:spPr>
-          <a:xfrm>
-            <a:off x="1975104" y="2871216"/>
-            <a:ext cx="9189720" cy="512064"/>
-          </a:xfrm>
-          <a:prstGeom prst="rect">
-            <a:avLst/>
-          </a:prstGeom>
-          <a:noFill/>
-        </p:spPr>
-        <p:txBody>
-          <a:bodyPr wrap="square" lIns="73152" rIns="73152" tIns="36576" bIns="36576">
-            <a:spAutoFit/>
-          </a:bodyPr>
-          <a:lstStyle/>
-          <a:p>
-            <a:pPr algn="l">
-              <a:spcAft>
-                <a:spcPts val="0"/>
-              </a:spcAft>
-              <a:defRPr sz="1300" b="0">
-                <a:solidFill>
-                  <a:srgbClr val="122C4E"/>
-                </a:solidFill>
-                <a:latin typeface="Noto Sans CJK KR"/>
-              </a:defRPr>
-            </a:pPr>
-            <a:r>
-              <a:t>사용: check_urdf로 tree를 확인한 뒤 robot_state_publisher + RViz RobotModel에 넣는다.</a:t>
-            </a:r>
-            <a:br/>
-            <a:r>
-              <a:t>화면/출력: terminal의 base_link 자식 6개와 RViz의 바퀴·센서 frame</a:t>
+                <a:latin typeface="Noto Sans CJK KR"/>
+              </a:defRPr>
+            </a:pPr>
+            <a:r>
+              <a:t>기억할 한 문장: 앞 단계의 출력이 다음 단계의 입력이 되도록 topic·frame·파일 이름을 끝까지 유지합니다.</a:t>
             </a:r>
           </a:p>
         </p:txBody>
@@ -12584,7 +15334,7 @@
               </a:defRPr>
             </a:pPr>
             <a:r>
-              <a:t>코드를 ‘만드는 것 → 표시할 줄 → 바꾼 결과’로 읽는다</a:t>
+              <a:t>이번에 프로젝트 안에 새로 만드는 파일</a:t>
             </a:r>
           </a:p>
         </p:txBody>
@@ -12623,7 +15373,7 @@
               </a:defRPr>
             </a:pPr>
             <a:r>
-              <a:t>PDF 예시처럼 화면을 보기 전에 코드의 역할과 관찰 지점을 한 번 짚고 갑니다.</a:t>
+              <a:t>아래 파일은 완성본을 복사하지 않고, 다음 슬라이드에서 폴더·빈 파일부터 직접 만듭니다.</a:t>
             </a:r>
           </a:p>
         </p:txBody>
@@ -12708,24 +15458,24 @@
       </p:sp>
       <p:sp>
         <p:nvSpPr>
-          <p:cNvPr id="6" name="Rectangle 5"/>
+          <p:cNvPr id="6" name="Rounded Rectangle 5"/>
           <p:cNvSpPr/>
           <p:nvPr/>
         </p:nvSpPr>
         <p:spPr>
           <a:xfrm>
-            <a:off x="566928" y="1188720"/>
-            <a:ext cx="11064240" cy="347472"/>
-          </a:xfrm>
-          <a:prstGeom prst="rect">
+            <a:off x="777240" y="1600200"/>
+            <a:ext cx="10789920" cy="4407408"/>
+          </a:xfrm>
+          <a:prstGeom prst="roundRect">
             <a:avLst/>
           </a:prstGeom>
           <a:solidFill>
-            <a:srgbClr val="F4F7FB"/>
+            <a:srgbClr val="1D232D"/>
           </a:solidFill>
           <a:ln>
             <a:solidFill>
-              <a:srgbClr val="F4F7FB"/>
+              <a:srgbClr val="1D232D"/>
             </a:solidFill>
           </a:ln>
         </p:spPr>
@@ -12751,74 +15501,33 @@
               <a:spcAft>
                 <a:spcPts val="0"/>
               </a:spcAft>
-              <a:defRPr sz="1300" b="1">
-                <a:solidFill>
-                  <a:srgbClr val="122C4E"/>
-                </a:solidFill>
-                <a:latin typeface="Noto Sans CJK KR"/>
-              </a:defRPr>
-            </a:pPr>
-            <a:r>
-              <a:t>현재 단계 코드 해설    |    현재 폴더 ~/ros2_curri/agv_ws    |    현재 터미널</a:t>
-            </a:r>
-          </a:p>
-        </p:txBody>
-      </p:sp>
-      <p:sp>
-        <p:nvSpPr>
-          <p:cNvPr id="7" name="Rounded Rectangle 6"/>
-          <p:cNvSpPr/>
-          <p:nvPr/>
-        </p:nvSpPr>
-        <p:spPr>
-          <a:xfrm>
-            <a:off x="658368" y="1664208"/>
-            <a:ext cx="5321808" cy="1764792"/>
-          </a:xfrm>
-          <a:prstGeom prst="roundRect">
-            <a:avLst/>
-          </a:prstGeom>
-          <a:solidFill>
-            <a:srgbClr val="F4F7FB"/>
-          </a:solidFill>
-          <a:ln>
-            <a:solidFill>
-              <a:srgbClr val="2A8B5A"/>
-            </a:solidFill>
-          </a:ln>
-        </p:spPr>
-        <p:style>
-          <a:lnRef idx="1">
-            <a:schemeClr val="accent1"/>
-          </a:lnRef>
-          <a:fillRef idx="3">
-            <a:schemeClr val="accent1"/>
-          </a:fillRef>
-          <a:effectRef idx="2">
-            <a:schemeClr val="accent1"/>
-          </a:effectRef>
-          <a:fontRef idx="minor">
-            <a:schemeClr val="lt1"/>
-          </a:fontRef>
-        </p:style>
-        <p:txBody>
-          <a:bodyPr rtlCol="0" anchor="ctr"/>
-          <a:lstStyle/>
-          <a:p>
-            <a:pPr algn="ctr"/>
-          </a:p>
-        </p:txBody>
-      </p:sp>
-      <p:sp>
-        <p:nvSpPr>
-          <p:cNvPr id="8" name="TextBox 7"/>
-          <p:cNvSpPr txBox="1"/>
-          <p:nvPr/>
-        </p:nvSpPr>
-        <p:spPr>
-          <a:xfrm>
-            <a:off x="859536" y="1828800"/>
-            <a:ext cx="4892040" cy="265176"/>
+              <a:defRPr sz="1600" b="0">
+                <a:solidFill>
+                  <a:srgbClr val="FFFFFF"/>
+                </a:solidFill>
+                <a:latin typeface="DejaVu Sans Mono"/>
+              </a:defRPr>
+            </a:pPr>
+            <a:r>
+              <a:t>~/ros2_curri/my_agv_ws/src/</a:t>
+            </a:r>
+            <a:br/>
+            <a:r>
+              <a:t>└── agv_description/curriculum_stages/M05/agv.urdf</a:t>
+            </a:r>
+          </a:p>
+        </p:txBody>
+      </p:sp>
+      <p:sp>
+        <p:nvSpPr>
+          <p:cNvPr id="7" name="TextBox 6"/>
+          <p:cNvSpPr txBox="1"/>
+          <p:nvPr/>
+        </p:nvSpPr>
+        <p:spPr>
+          <a:xfrm>
+            <a:off x="877824" y="6144768"/>
+            <a:ext cx="10332720" cy="201168"/>
           </a:xfrm>
           <a:prstGeom prst="rect">
             <a:avLst/>
@@ -12831,466 +15540,19 @@
           </a:bodyPr>
           <a:lstStyle/>
           <a:p>
-            <a:pPr algn="l">
-              <a:spcAft>
-                <a:spcPts val="0"/>
-              </a:spcAft>
-              <a:defRPr sz="1700" b="1">
-                <a:solidFill>
-                  <a:srgbClr val="2A8B5A"/>
-                </a:solidFill>
-                <a:latin typeface="Noto Sans CJK KR"/>
-              </a:defRPr>
-            </a:pPr>
-            <a:r>
-              <a:t>1. 이 파일이 만드는 것</a:t>
-            </a:r>
-          </a:p>
-        </p:txBody>
-      </p:sp>
-      <p:sp>
-        <p:nvSpPr>
-          <p:cNvPr id="9" name="TextBox 8"/>
-          <p:cNvSpPr txBox="1"/>
-          <p:nvPr/>
-        </p:nvSpPr>
-        <p:spPr>
-          <a:xfrm>
-            <a:off x="859536" y="2240280"/>
-            <a:ext cx="4846320" cy="941832"/>
-          </a:xfrm>
-          <a:prstGeom prst="rect">
-            <a:avLst/>
-          </a:prstGeom>
-          <a:noFill/>
-        </p:spPr>
-        <p:txBody>
-          <a:bodyPr wrap="square" lIns="73152" rIns="73152" tIns="36576" bIns="36576">
-            <a:spAutoFit/>
-          </a:bodyPr>
-          <a:lstStyle/>
-          <a:p>
-            <a:pPr algn="l">
-              <a:spcAft>
-                <a:spcPts val="0"/>
-              </a:spcAft>
-              <a:defRPr sz="1600" b="0">
-                <a:solidFill>
-                  <a:srgbClr val="122C4E"/>
-                </a:solidFill>
-                <a:latin typeface="Noto Sans CJK KR"/>
-              </a:defRPr>
-            </a:pPr>
-            <a:r>
-              <a:t>URDF는 로봇의 부품표가 아니라, ‘어떤 부품을 어느 frame에 고정할지’ 적는 조립도입니다.</a:t>
-            </a:r>
-          </a:p>
-        </p:txBody>
-      </p:sp>
-      <p:sp>
-        <p:nvSpPr>
-          <p:cNvPr id="10" name="Rounded Rectangle 9"/>
-          <p:cNvSpPr/>
-          <p:nvPr/>
-        </p:nvSpPr>
-        <p:spPr>
-          <a:xfrm>
-            <a:off x="6217920" y="1664208"/>
-            <a:ext cx="5321808" cy="1764792"/>
-          </a:xfrm>
-          <a:prstGeom prst="roundRect">
-            <a:avLst/>
-          </a:prstGeom>
-          <a:solidFill>
-            <a:srgbClr val="F4F7FB"/>
-          </a:solidFill>
-          <a:ln>
-            <a:solidFill>
-              <a:srgbClr val="225B9B"/>
-            </a:solidFill>
-          </a:ln>
-        </p:spPr>
-        <p:style>
-          <a:lnRef idx="1">
-            <a:schemeClr val="accent1"/>
-          </a:lnRef>
-          <a:fillRef idx="3">
-            <a:schemeClr val="accent1"/>
-          </a:fillRef>
-          <a:effectRef idx="2">
-            <a:schemeClr val="accent1"/>
-          </a:effectRef>
-          <a:fontRef idx="minor">
-            <a:schemeClr val="lt1"/>
-          </a:fontRef>
-        </p:style>
-        <p:txBody>
-          <a:bodyPr rtlCol="0" anchor="ctr"/>
-          <a:lstStyle/>
-          <a:p>
-            <a:pPr algn="ctr"/>
-          </a:p>
-        </p:txBody>
-      </p:sp>
-      <p:sp>
-        <p:nvSpPr>
-          <p:cNvPr id="11" name="TextBox 10"/>
-          <p:cNvSpPr txBox="1"/>
-          <p:nvPr/>
-        </p:nvSpPr>
-        <p:spPr>
-          <a:xfrm>
-            <a:off x="6419088" y="1828800"/>
-            <a:ext cx="4892040" cy="265176"/>
-          </a:xfrm>
-          <a:prstGeom prst="rect">
-            <a:avLst/>
-          </a:prstGeom>
-          <a:noFill/>
-        </p:spPr>
-        <p:txBody>
-          <a:bodyPr wrap="square" lIns="73152" rIns="73152" tIns="36576" bIns="36576">
-            <a:spAutoFit/>
-          </a:bodyPr>
-          <a:lstStyle/>
-          <a:p>
-            <a:pPr algn="l">
-              <a:spcAft>
-                <a:spcPts val="0"/>
-              </a:spcAft>
-              <a:defRPr sz="1700" b="1">
-                <a:solidFill>
-                  <a:srgbClr val="225B9B"/>
-                </a:solidFill>
-                <a:latin typeface="Noto Sans CJK KR"/>
-              </a:defRPr>
-            </a:pPr>
-            <a:r>
-              <a:t>2. 먼저 찾을 코드/태그</a:t>
-            </a:r>
-          </a:p>
-        </p:txBody>
-      </p:sp>
-      <p:sp>
-        <p:nvSpPr>
-          <p:cNvPr id="12" name="TextBox 11"/>
-          <p:cNvSpPr txBox="1"/>
-          <p:nvPr/>
-        </p:nvSpPr>
-        <p:spPr>
-          <a:xfrm>
-            <a:off x="6419088" y="2240280"/>
-            <a:ext cx="4846320" cy="941832"/>
-          </a:xfrm>
-          <a:prstGeom prst="rect">
-            <a:avLst/>
-          </a:prstGeom>
-          <a:noFill/>
-        </p:spPr>
-        <p:txBody>
-          <a:bodyPr wrap="square" lIns="73152" rIns="73152" tIns="36576" bIns="36576">
-            <a:spAutoFit/>
-          </a:bodyPr>
-          <a:lstStyle/>
-          <a:p>
-            <a:pPr algn="l">
-              <a:spcAft>
-                <a:spcPts val="0"/>
-              </a:spcAft>
-              <a:defRPr sz="1600" b="0">
-                <a:solidFill>
-                  <a:srgbClr val="122C4E"/>
-                </a:solidFill>
-                <a:latin typeface="Noto Sans CJK KR"/>
-              </a:defRPr>
-            </a:pPr>
-            <a:r>
-              <a:t>&lt;link name="base_link"&gt;, &lt;joint name="..."&gt;, &lt;parent&gt;, &lt;child&gt;</a:t>
-            </a:r>
-          </a:p>
-        </p:txBody>
-      </p:sp>
-      <p:sp>
-        <p:nvSpPr>
-          <p:cNvPr id="13" name="Rounded Rectangle 12"/>
-          <p:cNvSpPr/>
-          <p:nvPr/>
-        </p:nvSpPr>
-        <p:spPr>
-          <a:xfrm>
-            <a:off x="658368" y="3813048"/>
-            <a:ext cx="5321808" cy="1764792"/>
-          </a:xfrm>
-          <a:prstGeom prst="roundRect">
-            <a:avLst/>
-          </a:prstGeom>
-          <a:solidFill>
-            <a:srgbClr val="F4F7FB"/>
-          </a:solidFill>
-          <a:ln>
-            <a:solidFill>
-              <a:srgbClr val="DB7E22"/>
-            </a:solidFill>
-          </a:ln>
-        </p:spPr>
-        <p:style>
-          <a:lnRef idx="1">
-            <a:schemeClr val="accent1"/>
-          </a:lnRef>
-          <a:fillRef idx="3">
-            <a:schemeClr val="accent1"/>
-          </a:fillRef>
-          <a:effectRef idx="2">
-            <a:schemeClr val="accent1"/>
-          </a:effectRef>
-          <a:fontRef idx="minor">
-            <a:schemeClr val="lt1"/>
-          </a:fontRef>
-        </p:style>
-        <p:txBody>
-          <a:bodyPr rtlCol="0" anchor="ctr"/>
-          <a:lstStyle/>
-          <a:p>
-            <a:pPr algn="ctr"/>
-          </a:p>
-        </p:txBody>
-      </p:sp>
-      <p:sp>
-        <p:nvSpPr>
-          <p:cNvPr id="14" name="TextBox 13"/>
-          <p:cNvSpPr txBox="1"/>
-          <p:nvPr/>
-        </p:nvSpPr>
-        <p:spPr>
-          <a:xfrm>
-            <a:off x="859536" y="3977639"/>
-            <a:ext cx="4892040" cy="265176"/>
-          </a:xfrm>
-          <a:prstGeom prst="rect">
-            <a:avLst/>
-          </a:prstGeom>
-          <a:noFill/>
-        </p:spPr>
-        <p:txBody>
-          <a:bodyPr wrap="square" lIns="73152" rIns="73152" tIns="36576" bIns="36576">
-            <a:spAutoFit/>
-          </a:bodyPr>
-          <a:lstStyle/>
-          <a:p>
-            <a:pPr algn="l">
-              <a:spcAft>
-                <a:spcPts val="0"/>
-              </a:spcAft>
-              <a:defRPr sz="1700" b="1">
-                <a:solidFill>
-                  <a:srgbClr val="DB7E22"/>
-                </a:solidFill>
-                <a:latin typeface="Noto Sans CJK KR"/>
-              </a:defRPr>
-            </a:pPr>
-            <a:r>
-              <a:t>3. 값을 바꾸면</a:t>
-            </a:r>
-          </a:p>
-        </p:txBody>
-      </p:sp>
-      <p:sp>
-        <p:nvSpPr>
-          <p:cNvPr id="15" name="TextBox 14"/>
-          <p:cNvSpPr txBox="1"/>
-          <p:nvPr/>
-        </p:nvSpPr>
-        <p:spPr>
-          <a:xfrm>
-            <a:off x="859536" y="4389120"/>
-            <a:ext cx="4846320" cy="941832"/>
-          </a:xfrm>
-          <a:prstGeom prst="rect">
-            <a:avLst/>
-          </a:prstGeom>
-          <a:noFill/>
-        </p:spPr>
-        <p:txBody>
-          <a:bodyPr wrap="square" lIns="73152" rIns="73152" tIns="36576" bIns="36576">
-            <a:spAutoFit/>
-          </a:bodyPr>
-          <a:lstStyle/>
-          <a:p>
-            <a:pPr algn="l">
-              <a:spcAft>
-                <a:spcPts val="0"/>
-              </a:spcAft>
-              <a:defRPr sz="1600" b="0">
-                <a:solidFill>
-                  <a:srgbClr val="122C4E"/>
-                </a:solidFill>
-                <a:latin typeface="Noto Sans CJK KR"/>
-              </a:defRPr>
-            </a:pPr>
-            <a:r>
-              <a:t>wheel link의 cylinder radius를 바꾸면 보이는 바퀴 크기가 바뀌고, joint origin은 장착 위치를 바꿉니다.</a:t>
-            </a:r>
-          </a:p>
-        </p:txBody>
-      </p:sp>
-      <p:sp>
-        <p:nvSpPr>
-          <p:cNvPr id="16" name="Rounded Rectangle 15"/>
-          <p:cNvSpPr/>
-          <p:nvPr/>
-        </p:nvSpPr>
-        <p:spPr>
-          <a:xfrm>
-            <a:off x="6217920" y="3813048"/>
-            <a:ext cx="5321808" cy="1764792"/>
-          </a:xfrm>
-          <a:prstGeom prst="roundRect">
-            <a:avLst/>
-          </a:prstGeom>
-          <a:solidFill>
-            <a:srgbClr val="F4F7FB"/>
-          </a:solidFill>
-          <a:ln>
-            <a:solidFill>
-              <a:srgbClr val="BE3B3B"/>
-            </a:solidFill>
-          </a:ln>
-        </p:spPr>
-        <p:style>
-          <a:lnRef idx="1">
-            <a:schemeClr val="accent1"/>
-          </a:lnRef>
-          <a:fillRef idx="3">
-            <a:schemeClr val="accent1"/>
-          </a:fillRef>
-          <a:effectRef idx="2">
-            <a:schemeClr val="accent1"/>
-          </a:effectRef>
-          <a:fontRef idx="minor">
-            <a:schemeClr val="lt1"/>
-          </a:fontRef>
-        </p:style>
-        <p:txBody>
-          <a:bodyPr rtlCol="0" anchor="ctr"/>
-          <a:lstStyle/>
-          <a:p>
-            <a:pPr algn="ctr"/>
-          </a:p>
-        </p:txBody>
-      </p:sp>
-      <p:sp>
-        <p:nvSpPr>
-          <p:cNvPr id="17" name="TextBox 16"/>
-          <p:cNvSpPr txBox="1"/>
-          <p:nvPr/>
-        </p:nvSpPr>
-        <p:spPr>
-          <a:xfrm>
-            <a:off x="6419088" y="3977639"/>
-            <a:ext cx="4892040" cy="265176"/>
-          </a:xfrm>
-          <a:prstGeom prst="rect">
-            <a:avLst/>
-          </a:prstGeom>
-          <a:noFill/>
-        </p:spPr>
-        <p:txBody>
-          <a:bodyPr wrap="square" lIns="73152" rIns="73152" tIns="36576" bIns="36576">
-            <a:spAutoFit/>
-          </a:bodyPr>
-          <a:lstStyle/>
-          <a:p>
-            <a:pPr algn="l">
-              <a:spcAft>
-                <a:spcPts val="0"/>
-              </a:spcAft>
-              <a:defRPr sz="1700" b="1">
-                <a:solidFill>
-                  <a:srgbClr val="BE3B3B"/>
-                </a:solidFill>
-                <a:latin typeface="Noto Sans CJK KR"/>
-              </a:defRPr>
-            </a:pPr>
-            <a:r>
-              <a:t>4. 실제로 보는 곳</a:t>
-            </a:r>
-          </a:p>
-        </p:txBody>
-      </p:sp>
-      <p:sp>
-        <p:nvSpPr>
-          <p:cNvPr id="18" name="TextBox 17"/>
-          <p:cNvSpPr txBox="1"/>
-          <p:nvPr/>
-        </p:nvSpPr>
-        <p:spPr>
-          <a:xfrm>
-            <a:off x="6419088" y="4389120"/>
-            <a:ext cx="4846320" cy="941832"/>
-          </a:xfrm>
-          <a:prstGeom prst="rect">
-            <a:avLst/>
-          </a:prstGeom>
-          <a:noFill/>
-        </p:spPr>
-        <p:txBody>
-          <a:bodyPr wrap="square" lIns="73152" rIns="73152" tIns="36576" bIns="36576">
-            <a:spAutoFit/>
-          </a:bodyPr>
-          <a:lstStyle/>
-          <a:p>
-            <a:pPr algn="l">
-              <a:spcAft>
-                <a:spcPts val="0"/>
-              </a:spcAft>
-              <a:defRPr sz="1600" b="0">
-                <a:solidFill>
-                  <a:srgbClr val="122C4E"/>
-                </a:solidFill>
-                <a:latin typeface="Noto Sans CJK KR"/>
-              </a:defRPr>
-            </a:pPr>
-            <a:r>
-              <a:t>check_urdf의 root Link와 child 목록을 먼저 읽고 RViz RobotModel로 형태를 봅니다.</a:t>
-            </a:r>
-          </a:p>
-        </p:txBody>
-      </p:sp>
-      <p:sp>
-        <p:nvSpPr>
-          <p:cNvPr id="19" name="TextBox 18"/>
-          <p:cNvSpPr txBox="1"/>
-          <p:nvPr/>
-        </p:nvSpPr>
-        <p:spPr>
-          <a:xfrm>
-            <a:off x="777240" y="6172200"/>
-            <a:ext cx="10607040" cy="201168"/>
-          </a:xfrm>
-          <a:prstGeom prst="rect">
-            <a:avLst/>
-          </a:prstGeom>
-          <a:noFill/>
-        </p:spPr>
-        <p:txBody>
-          <a:bodyPr wrap="square" lIns="73152" rIns="73152" tIns="36576" bIns="36576">
-            <a:spAutoFit/>
-          </a:bodyPr>
-          <a:lstStyle/>
-          <a:p>
             <a:pPr algn="ctr">
               <a:spcAft>
                 <a:spcPts val="0"/>
               </a:spcAft>
-              <a:defRPr sz="1200" b="1">
-                <a:solidFill>
-                  <a:srgbClr val="2A8B5A"/>
-                </a:solidFill>
-                <a:latin typeface="Noto Sans CJK KR"/>
-              </a:defRPr>
-            </a:pPr>
-            <a:r>
-              <a:t>다음 코드 슬라이드에서는 위의 태그/함수를 찾아 색으로 표시하며 한 줄씩 설명합니다.</a:t>
+              <a:defRPr sz="1100" b="0">
+                <a:solidFill>
+                  <a:srgbClr val="5C6672"/>
+                </a:solidFill>
+                <a:latin typeface="Noto Sans CJK KR"/>
+              </a:defRPr>
+            </a:pPr>
+            <a:r>
+              <a:t>파일 하나를 만들고 저장한 뒤에만 다음 파일로 넘어갑니다. Complete는 오류가 풀리지 않을 때만 비교합니다.</a:t>
             </a:r>
           </a:p>
         </p:txBody>
@@ -13347,7 +15609,7 @@
               </a:defRPr>
             </a:pPr>
             <a:r>
-              <a:t>단일 URDF를 검사한다</a:t>
+              <a:t>코드/설정이 실제로 만드는 것 (1/1)</a:t>
             </a:r>
           </a:p>
         </p:txBody>
@@ -13386,7 +15648,7 @@
               </a:defRPr>
             </a:pPr>
             <a:r>
-              <a:t>한 장에는 한 행동만 수행합니다.</a:t>
+              <a:t>파일을 입력하기 전에 ‘무엇을 만들고 어디서 볼지’를 먼저 연결합니다.</a:t>
             </a:r>
           </a:p>
         </p:txBody>
@@ -13522,109 +15784,31 @@
               </a:defRPr>
             </a:pPr>
             <a:r>
-              <a:t>현재 단계 1/2    |    현재 폴더 ~/ros2_curri/agv_ws    |    현재 터미널</a:t>
-            </a:r>
-          </a:p>
-        </p:txBody>
-      </p:sp>
-      <p:sp>
-        <p:nvSpPr>
-          <p:cNvPr id="7" name="TextBox 6"/>
-          <p:cNvSpPr txBox="1"/>
-          <p:nvPr/>
-        </p:nvSpPr>
-        <p:spPr>
-          <a:xfrm>
-            <a:off x="676656" y="1764792"/>
-            <a:ext cx="1828800" cy="347472"/>
-          </a:xfrm>
-          <a:prstGeom prst="rect">
-            <a:avLst/>
-          </a:prstGeom>
-          <a:noFill/>
-        </p:spPr>
-        <p:txBody>
-          <a:bodyPr wrap="square" lIns="73152" rIns="73152" tIns="36576" bIns="36576">
-            <a:spAutoFit/>
-          </a:bodyPr>
-          <a:lstStyle/>
-          <a:p>
-            <a:pPr algn="l">
-              <a:spcAft>
-                <a:spcPts val="0"/>
-              </a:spcAft>
-              <a:defRPr sz="1800" b="1">
-                <a:solidFill>
-                  <a:srgbClr val="225B9B"/>
-                </a:solidFill>
-                <a:latin typeface="Noto Sans CJK KR"/>
-              </a:defRPr>
-            </a:pPr>
-            <a:r>
-              <a:t>왜 하는가</a:t>
-            </a:r>
-          </a:p>
-        </p:txBody>
-      </p:sp>
-      <p:sp>
-        <p:nvSpPr>
-          <p:cNvPr id="8" name="TextBox 7"/>
-          <p:cNvSpPr txBox="1"/>
-          <p:nvPr/>
-        </p:nvSpPr>
-        <p:spPr>
-          <a:xfrm>
-            <a:off x="676656" y="2103120"/>
-            <a:ext cx="10789920" cy="512064"/>
-          </a:xfrm>
-          <a:prstGeom prst="rect">
-            <a:avLst/>
-          </a:prstGeom>
-          <a:noFill/>
-        </p:spPr>
-        <p:txBody>
-          <a:bodyPr wrap="square" lIns="73152" rIns="73152" tIns="36576" bIns="36576">
-            <a:spAutoFit/>
-          </a:bodyPr>
-          <a:lstStyle/>
-          <a:p>
-            <a:pPr algn="l">
-              <a:spcAft>
-                <a:spcPts val="0"/>
-              </a:spcAft>
-              <a:defRPr sz="2000" b="0">
-                <a:solidFill>
-                  <a:srgbClr val="122C4E"/>
-                </a:solidFill>
-                <a:latin typeface="Noto Sans CJK KR"/>
-              </a:defRPr>
-            </a:pPr>
-            <a:r>
-              <a:t>M05에서는 macro·property·xacro 없이 한 파일에 link와 joint를 직접 작성한다.</a:t>
-            </a:r>
-          </a:p>
-        </p:txBody>
-      </p:sp>
-      <p:sp>
-        <p:nvSpPr>
-          <p:cNvPr id="9" name="Rounded Rectangle 8"/>
+              <a:t>현재 단계 파일 역할    |    현재 폴더 ~/ros2_curri/my_agv_ws    |    현재 터미널</a:t>
+            </a:r>
+          </a:p>
+        </p:txBody>
+      </p:sp>
+      <p:sp>
+        <p:nvSpPr>
+          <p:cNvPr id="7" name="Rounded Rectangle 6"/>
           <p:cNvSpPr/>
           <p:nvPr/>
         </p:nvSpPr>
         <p:spPr>
           <a:xfrm>
-            <a:off x="676656" y="2871216"/>
-            <a:ext cx="10835640" cy="2331720"/>
+            <a:off x="640080" y="1627632"/>
+            <a:ext cx="10972800" cy="2048256"/>
           </a:xfrm>
           <a:prstGeom prst="roundRect">
             <a:avLst/>
           </a:prstGeom>
           <a:solidFill>
-            <a:srgbClr val="1D232D"/>
+            <a:srgbClr val="F4F7FB"/>
           </a:solidFill>
           <a:ln>
             <a:solidFill>
-              <a:srgbClr val="1D232D"/>
+              <a:srgbClr val="CCDBEB"/>
             </a:solidFill>
           </a:ln>
         </p:spPr>
@@ -13643,104 +15827,286 @@
           </a:fontRef>
         </p:style>
         <p:txBody>
-          <a:bodyPr rtlCol="0" anchor="ctr" wrap="square" lIns="73152" rIns="73152" tIns="36576" bIns="36576"/>
+          <a:bodyPr rtlCol="0" anchor="ctr"/>
+          <a:lstStyle/>
+          <a:p>
+            <a:pPr algn="ctr"/>
+          </a:p>
+        </p:txBody>
+      </p:sp>
+      <p:sp>
+        <p:nvSpPr>
+          <p:cNvPr id="8" name="TextBox 7"/>
+          <p:cNvSpPr txBox="1"/>
+          <p:nvPr/>
+        </p:nvSpPr>
+        <p:spPr>
+          <a:xfrm>
+            <a:off x="850392" y="1764792"/>
+            <a:ext cx="10424160" cy="256032"/>
+          </a:xfrm>
+          <a:prstGeom prst="rect">
+            <a:avLst/>
+          </a:prstGeom>
+          <a:noFill/>
+        </p:spPr>
+        <p:txBody>
+          <a:bodyPr wrap="square" lIns="73152" rIns="73152" tIns="36576" bIns="36576">
+            <a:spAutoFit/>
+          </a:bodyPr>
           <a:lstStyle/>
           <a:p>
             <a:pPr algn="l">
               <a:spcAft>
                 <a:spcPts val="0"/>
               </a:spcAft>
-              <a:defRPr sz="1600" b="0">
-                <a:solidFill>
-                  <a:srgbClr val="FFFFFF"/>
+              <a:defRPr sz="1300" b="1">
+                <a:solidFill>
+                  <a:srgbClr val="225B9B"/>
                 </a:solidFill>
                 <a:latin typeface="DejaVu Sans Mono"/>
               </a:defRPr>
             </a:pPr>
             <a:r>
-              <a:t>cd ~/ros2_curri/agv_ws</a:t>
+              <a:t>~/ros2_curri/my_agv_ws/src/agv_description/curriculum_stages/M05/agv.urdf</a:t>
+            </a:r>
+          </a:p>
+        </p:txBody>
+      </p:sp>
+      <p:sp>
+        <p:nvSpPr>
+          <p:cNvPr id="9" name="TextBox 8"/>
+          <p:cNvSpPr txBox="1"/>
+          <p:nvPr/>
+        </p:nvSpPr>
+        <p:spPr>
+          <a:xfrm>
+            <a:off x="868680" y="2130552"/>
+            <a:ext cx="1234440" cy="228600"/>
+          </a:xfrm>
+          <a:prstGeom prst="rect">
+            <a:avLst/>
+          </a:prstGeom>
+          <a:noFill/>
+        </p:spPr>
+        <p:txBody>
+          <a:bodyPr wrap="square" lIns="73152" rIns="73152" tIns="36576" bIns="36576">
+            <a:spAutoFit/>
+          </a:bodyPr>
+          <a:lstStyle/>
+          <a:p>
+            <a:pPr algn="l">
+              <a:spcAft>
+                <a:spcPts val="0"/>
+              </a:spcAft>
+              <a:defRPr sz="1500" b="1">
+                <a:solidFill>
+                  <a:srgbClr val="2A8B5A"/>
+                </a:solidFill>
+                <a:latin typeface="Noto Sans CJK KR"/>
+              </a:defRPr>
+            </a:pPr>
+            <a:r>
+              <a:t>만드는 것</a:t>
+            </a:r>
+          </a:p>
+        </p:txBody>
+      </p:sp>
+      <p:sp>
+        <p:nvSpPr>
+          <p:cNvPr id="10" name="TextBox 9"/>
+          <p:cNvSpPr txBox="1"/>
+          <p:nvPr/>
+        </p:nvSpPr>
+        <p:spPr>
+          <a:xfrm>
+            <a:off x="1975104" y="2112264"/>
+            <a:ext cx="9189720" cy="274320"/>
+          </a:xfrm>
+          <a:prstGeom prst="rect">
+            <a:avLst/>
+          </a:prstGeom>
+          <a:noFill/>
+        </p:spPr>
+        <p:txBody>
+          <a:bodyPr wrap="square" lIns="73152" rIns="73152" tIns="36576" bIns="36576">
+            <a:spAutoFit/>
+          </a:bodyPr>
+          <a:lstStyle/>
+          <a:p>
+            <a:pPr algn="l">
+              <a:spcAft>
+                <a:spcPts val="0"/>
+              </a:spcAft>
+              <a:defRPr sz="1500" b="0">
+                <a:solidFill>
+                  <a:srgbClr val="122C4E"/>
+                </a:solidFill>
+                <a:latin typeface="Noto Sans CJK KR"/>
+              </a:defRPr>
+            </a:pPr>
+            <a:r>
+              <a:t>몸체·두 바퀴·caster·camera/lidar/imu frame을 link와 joint로 조립한 기본 AGV</a:t>
+            </a:r>
+          </a:p>
+        </p:txBody>
+      </p:sp>
+      <p:sp>
+        <p:nvSpPr>
+          <p:cNvPr id="11" name="TextBox 10"/>
+          <p:cNvSpPr txBox="1"/>
+          <p:nvPr/>
+        </p:nvSpPr>
+        <p:spPr>
+          <a:xfrm>
+            <a:off x="868680" y="2505456"/>
+            <a:ext cx="1234440" cy="228600"/>
+          </a:xfrm>
+          <a:prstGeom prst="rect">
+            <a:avLst/>
+          </a:prstGeom>
+          <a:noFill/>
+        </p:spPr>
+        <p:txBody>
+          <a:bodyPr wrap="square" lIns="73152" rIns="73152" tIns="36576" bIns="36576">
+            <a:spAutoFit/>
+          </a:bodyPr>
+          <a:lstStyle/>
+          <a:p>
+            <a:pPr algn="l">
+              <a:spcAft>
+                <a:spcPts val="0"/>
+              </a:spcAft>
+              <a:defRPr sz="1500" b="1">
+                <a:solidFill>
+                  <a:srgbClr val="DB7E22"/>
+                </a:solidFill>
+                <a:latin typeface="Noto Sans CJK KR"/>
+              </a:defRPr>
+            </a:pPr>
+            <a:r>
+              <a:t>코드 읽기</a:t>
+            </a:r>
+          </a:p>
+        </p:txBody>
+      </p:sp>
+      <p:sp>
+        <p:nvSpPr>
+          <p:cNvPr id="12" name="TextBox 11"/>
+          <p:cNvSpPr txBox="1"/>
+          <p:nvPr/>
+        </p:nvSpPr>
+        <p:spPr>
+          <a:xfrm>
+            <a:off x="1975104" y="2487168"/>
+            <a:ext cx="9189720" cy="301752"/>
+          </a:xfrm>
+          <a:prstGeom prst="rect">
+            <a:avLst/>
+          </a:prstGeom>
+          <a:noFill/>
+        </p:spPr>
+        <p:txBody>
+          <a:bodyPr wrap="square" lIns="73152" rIns="73152" tIns="36576" bIns="36576">
+            <a:spAutoFit/>
+          </a:bodyPr>
+          <a:lstStyle/>
+          <a:p>
+            <a:pPr algn="l">
+              <a:spcAft>
+                <a:spcPts val="0"/>
+              </a:spcAft>
+              <a:defRPr sz="1400" b="0">
+                <a:solidFill>
+                  <a:srgbClr val="122C4E"/>
+                </a:solidFill>
+                <a:latin typeface="Noto Sans CJK KR"/>
+              </a:defRPr>
+            </a:pPr>
+            <a:r>
+              <a:t>각 &lt;link&gt;의 geometry와 각 &lt;joint&gt;의 parent/child를 차례로 작성한다.</a:t>
+            </a:r>
+          </a:p>
+        </p:txBody>
+      </p:sp>
+      <p:sp>
+        <p:nvSpPr>
+          <p:cNvPr id="13" name="TextBox 12"/>
+          <p:cNvSpPr txBox="1"/>
+          <p:nvPr/>
+        </p:nvSpPr>
+        <p:spPr>
+          <a:xfrm>
+            <a:off x="868680" y="2889504"/>
+            <a:ext cx="1234440" cy="228600"/>
+          </a:xfrm>
+          <a:prstGeom prst="rect">
+            <a:avLst/>
+          </a:prstGeom>
+          <a:noFill/>
+        </p:spPr>
+        <p:txBody>
+          <a:bodyPr wrap="square" lIns="73152" rIns="73152" tIns="36576" bIns="36576">
+            <a:spAutoFit/>
+          </a:bodyPr>
+          <a:lstStyle/>
+          <a:p>
+            <a:pPr algn="l">
+              <a:spcAft>
+                <a:spcPts val="0"/>
+              </a:spcAft>
+              <a:defRPr sz="1500" b="1">
+                <a:solidFill>
+                  <a:srgbClr val="225B9B"/>
+                </a:solidFill>
+                <a:latin typeface="Noto Sans CJK KR"/>
+              </a:defRPr>
+            </a:pPr>
+            <a:r>
+              <a:t>사용/확인</a:t>
+            </a:r>
+          </a:p>
+        </p:txBody>
+      </p:sp>
+      <p:sp>
+        <p:nvSpPr>
+          <p:cNvPr id="14" name="TextBox 13"/>
+          <p:cNvSpPr txBox="1"/>
+          <p:nvPr/>
+        </p:nvSpPr>
+        <p:spPr>
+          <a:xfrm>
+            <a:off x="1975104" y="2871216"/>
+            <a:ext cx="9189720" cy="512064"/>
+          </a:xfrm>
+          <a:prstGeom prst="rect">
+            <a:avLst/>
+          </a:prstGeom>
+          <a:noFill/>
+        </p:spPr>
+        <p:txBody>
+          <a:bodyPr wrap="square" lIns="73152" rIns="73152" tIns="36576" bIns="36576">
+            <a:spAutoFit/>
+          </a:bodyPr>
+          <a:lstStyle/>
+          <a:p>
+            <a:pPr algn="l">
+              <a:spcAft>
+                <a:spcPts val="0"/>
+              </a:spcAft>
+              <a:defRPr sz="1300" b="0">
+                <a:solidFill>
+                  <a:srgbClr val="122C4E"/>
+                </a:solidFill>
+                <a:latin typeface="Noto Sans CJK KR"/>
+              </a:defRPr>
+            </a:pPr>
+            <a:r>
+              <a:t>사용: check_urdf로 tree를 확인한 뒤 robot_state_publisher + RViz RobotModel에 넣는다.</a:t>
             </a:r>
             <a:br/>
             <a:r>
-              <a:t>check_urdf src/agv_description/curriculum_stages/M05/agv.urdf</a:t>
-            </a:r>
-          </a:p>
-        </p:txBody>
-      </p:sp>
-      <p:sp>
-        <p:nvSpPr>
-          <p:cNvPr id="10" name="TextBox 9"/>
-          <p:cNvSpPr txBox="1"/>
-          <p:nvPr/>
-        </p:nvSpPr>
-        <p:spPr>
-          <a:xfrm>
-            <a:off x="768096" y="5468112"/>
-            <a:ext cx="1143000" cy="256032"/>
-          </a:xfrm>
-          <a:prstGeom prst="rect">
-            <a:avLst/>
-          </a:prstGeom>
-          <a:noFill/>
-        </p:spPr>
-        <p:txBody>
-          <a:bodyPr wrap="square" lIns="73152" rIns="73152" tIns="36576" bIns="36576">
-            <a:spAutoFit/>
-          </a:bodyPr>
-          <a:lstStyle/>
-          <a:p>
-            <a:pPr algn="l">
-              <a:spcAft>
-                <a:spcPts val="0"/>
-              </a:spcAft>
-              <a:defRPr sz="1800" b="1">
-                <a:solidFill>
-                  <a:srgbClr val="2A8B5A"/>
-                </a:solidFill>
-                <a:latin typeface="Noto Sans CJK KR"/>
-              </a:defRPr>
-            </a:pPr>
-            <a:r>
-              <a:t>확인</a:t>
-            </a:r>
-          </a:p>
-        </p:txBody>
-      </p:sp>
-      <p:sp>
-        <p:nvSpPr>
-          <p:cNvPr id="11" name="TextBox 10"/>
-          <p:cNvSpPr txBox="1"/>
-          <p:nvPr/>
-        </p:nvSpPr>
-        <p:spPr>
-          <a:xfrm>
-            <a:off x="768096" y="5742432"/>
-            <a:ext cx="10561320" cy="347472"/>
-          </a:xfrm>
-          <a:prstGeom prst="rect">
-            <a:avLst/>
-          </a:prstGeom>
-          <a:noFill/>
-        </p:spPr>
-        <p:txBody>
-          <a:bodyPr wrap="square" lIns="73152" rIns="73152" tIns="36576" bIns="36576">
-            <a:spAutoFit/>
-          </a:bodyPr>
-          <a:lstStyle/>
-          <a:p>
-            <a:pPr algn="l">
-              <a:spcAft>
-                <a:spcPts val="0"/>
-              </a:spcAft>
-              <a:defRPr sz="1800" b="0">
-                <a:solidFill>
-                  <a:srgbClr val="122C4E"/>
-                </a:solidFill>
-                <a:latin typeface="Noto Sans CJK KR"/>
-              </a:defRPr>
-            </a:pPr>
-            <a:r>
-              <a:t>명령의 출력에서 topic·frame·파일 이름 또는 성공 메시지를 찾으면 이 단계가 완료됩니다.</a:t>
+              <a:t>화면/출력: terminal의 base_link 자식 6개와 RViz의 바퀴·센서 frame</a:t>
             </a:r>
           </a:p>
         </p:txBody>

--- a/blocks/B_robot_build/M05_urdf_basic_model/M05_URDF로_기본_AGV_제작.pptx
+++ b/blocks/B_robot_build/M05_urdf_basic_model/M05_URDF로_기본_AGV_제작.pptx
@@ -29,6 +29,8 @@
     <p:sldId id="277" r:id="rId29"/>
     <p:sldId id="278" r:id="rId30"/>
     <p:sldId id="279" r:id="rId31"/>
+    <p:sldId id="280" r:id="rId32"/>
+    <p:sldId id="281" r:id="rId33"/>
   </p:sldIdLst>
   <p:sldSz cx="12191999" cy="6858000" type="screen4x3"/>
   <p:notesSz cx="6858000" cy="9144000"/>
@@ -900,17 +902,17 @@
           <a:lstStyle/>
           <a:p>
             <a:r>
-              <a:t>[설명] ~/ros2_curri/my_agv_ws/src/agv_description/curriculum_stages/M05/agv.urdf의 1/2 구현 블록을 직접 입력한다.</a:t>
-            </a:r>
-          </a:p>
-          <a:p>
-            <a:r>
-              <a:t>[실행] nano ~/ros2_curri/my_agv_ws/src/agv_description/curriculum_stages/M05/agv.urdf</a:t>
-            </a:r>
-          </a:p>
-          <a:p>
-            <a:r>
-              <a:t>[확인] 저장 뒤 다음 구현 블록으로 이동한다.</a:t>
+              <a:t>[설명] 코드를 읽어 주는 방식으로 한 줄의 역할과 실행 효과를 연결한다.</a:t>
+            </a:r>
+          </a:p>
+          <a:p>
+            <a:r>
+              <a:t>[실행] 슬라이드의 명령 또는 파일 작성 단계를 진행한다.</a:t>
+            </a:r>
+          </a:p>
+          <a:p>
+            <a:r>
+              <a:t>[확인] 각 코드 줄의 뜻과 확인 위치를 한 문장으로 설명한다.</a:t>
             </a:r>
           </a:p>
           <a:p>
@@ -920,7 +922,7 @@
           </a:p>
           <a:p>
             <a:r>
-              <a:t>[오류] 들여쓰기·XML 태그·따옴표가 슬라이드와 정확히 같은지 확인한다.</a:t>
+              <a:t>[오류] 오류가 나면 현재 폴더, source, 파일 경로를 먼저 확인한다.</a:t>
             </a:r>
           </a:p>
         </p:txBody>
@@ -990,17 +992,17 @@
           <a:lstStyle/>
           <a:p>
             <a:r>
-              <a:t>[설명] ~/ros2_curri/my_agv_ws/src/agv_description/curriculum_stages/M05/agv.urdf의 2/2 구현 블록을 직접 입력한다.</a:t>
-            </a:r>
-          </a:p>
-          <a:p>
-            <a:r>
-              <a:t>[실행] nano ~/ros2_curri/my_agv_ws/src/agv_description/curriculum_stages/M05/agv.urdf</a:t>
-            </a:r>
-          </a:p>
-          <a:p>
-            <a:r>
-              <a:t>[확인] 저장 뒤 다음 구현 블록으로 이동한다.</a:t>
+              <a:t>[설명] 코드를 읽어 주는 방식으로 한 줄의 역할과 실행 효과를 연결한다.</a:t>
+            </a:r>
+          </a:p>
+          <a:p>
+            <a:r>
+              <a:t>[실행] 슬라이드의 명령 또는 파일 작성 단계를 진행한다.</a:t>
+            </a:r>
+          </a:p>
+          <a:p>
+            <a:r>
+              <a:t>[확인] 각 코드 줄의 뜻과 확인 위치를 한 문장으로 설명한다.</a:t>
             </a:r>
           </a:p>
           <a:p>
@@ -1010,7 +1012,7 @@
           </a:p>
           <a:p>
             <a:r>
-              <a:t>[오류] 들여쓰기·XML 태그·따옴표가 슬라이드와 정확히 같은지 확인한다.</a:t>
+              <a:t>[오류] 오류가 나면 현재 폴더, source, 파일 경로를 먼저 확인한다.</a:t>
             </a:r>
           </a:p>
         </p:txBody>
@@ -1080,22 +1082,17 @@
           <a:lstStyle/>
           <a:p>
             <a:r>
-              <a:t>[설명] M05에서는 macro·property·xacro 없이 한 파일에 link와 joint를 직접 작성한다.</a:t>
-            </a:r>
-          </a:p>
-          <a:p>
-            <a:r>
-              <a:t>[실행] cd ~/ros2_curri/my_agv_ws</a:t>
-            </a:r>
-          </a:p>
-          <a:p>
-            <a:r>
-              <a:t>check_urdf src/agv_description/curriculum_stages/M05/agv.urdf</a:t>
-            </a:r>
-          </a:p>
-          <a:p>
-            <a:r>
-              <a:t>[확인] 명령 출력에서 슬라이드의 확인 항목을 찾는다.</a:t>
+              <a:t>[설명] ~/ros2_curri/my_agv_ws/src/agv_description/curriculum_stages/M05/agv.urdf의 1/2 구현 블록을 직접 입력한다.</a:t>
+            </a:r>
+          </a:p>
+          <a:p>
+            <a:r>
+              <a:t>[실행] nano ~/ros2_curri/my_agv_ws/src/agv_description/curriculum_stages/M05/agv.urdf</a:t>
+            </a:r>
+          </a:p>
+          <a:p>
+            <a:r>
+              <a:t>[확인] 저장 뒤 다음 구현 블록으로 이동한다.</a:t>
             </a:r>
           </a:p>
           <a:p>
@@ -1105,7 +1102,7 @@
           </a:p>
           <a:p>
             <a:r>
-              <a:t>[오류] 오류가 나면 현재 폴더, source, 파일 경로를 먼저 확인한다.</a:t>
+              <a:t>[오류] 들여쓰기·XML 태그·따옴표가 슬라이드와 정확히 같은지 확인한다.</a:t>
             </a:r>
           </a:p>
         </p:txBody>
@@ -1175,27 +1172,17 @@
           <a:lstStyle/>
           <a:p>
             <a:r>
-              <a:t>[설명] RobotModel에는 단일 URDF 텍스트를 robot_description으로 넣고 TF를 함께 확인한다.</a:t>
-            </a:r>
-          </a:p>
-          <a:p>
-            <a:r>
-              <a:t>[실행] ros2 run robot_state_publisher robot_state_publisher \</a:t>
-            </a:r>
-          </a:p>
-          <a:p>
-            <a:r>
-              <a:t>  --ros-args -p robot_description:="$(cat src/agv_description/curriculum_stages/M05/agv.urdf)"</a:t>
-            </a:r>
-          </a:p>
-          <a:p>
-            <a:r>
-              <a:t># 새 터미널: rviz2 → Add → RobotModel, TF</a:t>
-            </a:r>
-          </a:p>
-          <a:p>
-            <a:r>
-              <a:t>[확인] 명령 출력에서 슬라이드의 확인 항목을 찾는다.</a:t>
+              <a:t>[설명] ~/ros2_curri/my_agv_ws/src/agv_description/curriculum_stages/M05/agv.urdf의 2/2 구현 블록을 직접 입력한다.</a:t>
+            </a:r>
+          </a:p>
+          <a:p>
+            <a:r>
+              <a:t>[실행] nano ~/ros2_curri/my_agv_ws/src/agv_description/curriculum_stages/M05/agv.urdf</a:t>
+            </a:r>
+          </a:p>
+          <a:p>
+            <a:r>
+              <a:t>[확인] 저장 뒤 다음 구현 블록으로 이동한다.</a:t>
             </a:r>
           </a:p>
           <a:p>
@@ -1205,7 +1192,7 @@
           </a:p>
           <a:p>
             <a:r>
-              <a:t>[오류] 오류가 나면 현재 폴더, source, 파일 경로를 먼저 확인한다.</a:t>
+              <a:t>[오류] 들여쓰기·XML 태그·따옴표가 슬라이드와 정확히 같은지 확인한다.</a:t>
             </a:r>
           </a:p>
         </p:txBody>
@@ -1275,7 +1262,7 @@
           <a:lstStyle/>
           <a:p>
             <a:r>
-              <a:t>[설명] build/source/run을 생략 없이 실행한다.</a:t>
+              <a:t>[설명] M05에서는 macro·property·xacro 없이 한 파일에 link와 joint를 직접 작성한다.</a:t>
             </a:r>
           </a:p>
           <a:p>
@@ -1290,12 +1277,7 @@
           </a:p>
           <a:p>
             <a:r>
-              <a:t># 다음 M06에서 처음으로 xacro를 사용한다.</a:t>
-            </a:r>
-          </a:p>
-          <a:p>
-            <a:r>
-              <a:t>[확인] RobotModel과 TF에서 base, 두 wheel, camera, lidar, imu 연결을 확인한다.</a:t>
+              <a:t>[확인] 명령 출력에서 슬라이드의 확인 항목을 찾는다.</a:t>
             </a:r>
           </a:p>
           <a:p>
@@ -1375,17 +1357,27 @@
           <a:lstStyle/>
           <a:p>
             <a:r>
-              <a:t>[설명] 실제 Ubuntu/ROS 2 환경에서 생성한 검증 화면이다.</a:t>
-            </a:r>
-          </a:p>
-          <a:p>
-            <a:r>
-              <a:t>[실행] 슬라이드의 명령 또는 파일 작성 단계를 진행한다.</a:t>
-            </a:r>
-          </a:p>
-          <a:p>
-            <a:r>
-              <a:t>[확인] ① 명령/설정  ② 정상 출력 또는 화면  ③ 다음 검증 명령으로 재확인</a:t>
+              <a:t>[설명] RobotModel에는 단일 URDF 텍스트를 robot_description으로 넣고 TF를 함께 확인한다.</a:t>
+            </a:r>
+          </a:p>
+          <a:p>
+            <a:r>
+              <a:t>[실행] ros2 run robot_state_publisher robot_state_publisher \</a:t>
+            </a:r>
+          </a:p>
+          <a:p>
+            <a:r>
+              <a:t>  --ros-args -p robot_description:="$(cat src/agv_description/curriculum_stages/M05/agv.urdf)"</a:t>
+            </a:r>
+          </a:p>
+          <a:p>
+            <a:r>
+              <a:t># 새 터미널: rviz2 → Add → RobotModel, TF</a:t>
+            </a:r>
+          </a:p>
+          <a:p>
+            <a:r>
+              <a:t>[확인] 명령 출력에서 슬라이드의 확인 항목을 찾는다.</a:t>
             </a:r>
           </a:p>
           <a:p>
@@ -1465,17 +1457,22 @@
           <a:lstStyle/>
           <a:p>
             <a:r>
-              <a:t>[설명] 검증 명령은 GUI 결과와 별도로 실행해 재현 가능한 완료 기준을 만든다.</a:t>
-            </a:r>
-          </a:p>
-          <a:p>
-            <a:r>
-              <a:t>[실행] check_urdf ~/ros2_curri/my_agv_ws/src/agv_description/curriculum_stages/M05/agv.urdf</a:t>
-            </a:r>
-          </a:p>
-          <a:p>
-            <a:r>
-              <a:t>rg -n '&lt;xacro:|&lt;link |&lt;joint ' ~/ros2_curri/my_agv_ws/src/agv_description/curriculum_stages/M05/agv.urdf</a:t>
+              <a:t>[설명] build/source/run을 생략 없이 실행한다.</a:t>
+            </a:r>
+          </a:p>
+          <a:p>
+            <a:r>
+              <a:t>[실행] cd ~/ros2_curri/my_agv_ws</a:t>
+            </a:r>
+          </a:p>
+          <a:p>
+            <a:r>
+              <a:t>check_urdf src/agv_description/curriculum_stages/M05/agv.urdf</a:t>
+            </a:r>
+          </a:p>
+          <a:p>
+            <a:r>
+              <a:t># 다음 M06에서 처음으로 xacro를 사용한다.</a:t>
             </a:r>
           </a:p>
           <a:p>
@@ -1650,7 +1647,7 @@
           <a:lstStyle/>
           <a:p>
             <a:r>
-              <a:t>[설명] 오류를 대신 해결하지 말고 증상부터 우선 확인 순서대로 교육생이 실행하게 한다.</a:t>
+              <a:t>[설명] 실제 Ubuntu/ROS 2 환경에서 생성한 검증 화면이다.</a:t>
             </a:r>
           </a:p>
           <a:p>
@@ -1660,7 +1657,7 @@
           </a:p>
           <a:p>
             <a:r>
-              <a:t>[확인] 수정 뒤 첫 검증 명령을 다시 실행한다.</a:t>
+              <a:t>[확인] ① 명령/설정  ② 정상 출력 또는 화면  ③ 다음 검증 명령으로 재확인</a:t>
             </a:r>
           </a:p>
           <a:p>
@@ -1670,7 +1667,7 @@
           </a:p>
           <a:p>
             <a:r>
-              <a:t>[오류] 슬라이드의 두 대표 오류를 먼저 사용한다.</a:t>
+              <a:t>[오류] 오류가 나면 현재 폴더, source, 파일 경로를 먼저 확인한다.</a:t>
             </a:r>
           </a:p>
         </p:txBody>
@@ -1740,37 +1737,22 @@
           <a:lstStyle/>
           <a:p>
             <a:r>
-              <a:t>[설명] Complete는 정답 복사본이 아니라 막혔을 때 비교·복구하는 안전망이다.</a:t>
-            </a:r>
-          </a:p>
-          <a:p>
-            <a:r>
-              <a:t>[실행] cd ~/ros2_curri</a:t>
-            </a:r>
-          </a:p>
-          <a:p>
-            <a:r>
-              <a:t>diff -ru my_agv_ws/src blocks/B_robot_build/M05_urdf_basic_model/complete/agv_ws/src || true</a:t>
-            </a:r>
-          </a:p>
-          <a:p>
-            <a:r>
-              <a:t>cp -a my_agv_ws/src my_agv_ws/src_before_M05</a:t>
-            </a:r>
-          </a:p>
-          <a:p>
-            <a:r>
-              <a:t>cp -a blocks/B_robot_build/M05_urdf_basic_model/complete/agv_ws/src/. my_agv_ws/src/</a:t>
-            </a:r>
-          </a:p>
-          <a:p>
-            <a:r>
-              <a:t>cd my_agv_ws &amp;&amp; colcon build --symlink-install &amp;&amp; source install/setup.bash</a:t>
-            </a:r>
-          </a:p>
-          <a:p>
-            <a:r>
-              <a:t>[확인] diff에서 내 파일과 Complete의 차이를 설명할 수 있다.</a:t>
+              <a:t>[설명] 검증 명령은 GUI 결과와 별도로 실행해 재현 가능한 완료 기준을 만든다.</a:t>
+            </a:r>
+          </a:p>
+          <a:p>
+            <a:r>
+              <a:t>[실행] check_urdf ~/ros2_curri/my_agv_ws/src/agv_description/curriculum_stages/M05/agv.urdf</a:t>
+            </a:r>
+          </a:p>
+          <a:p>
+            <a:r>
+              <a:t>rg -n '&lt;xacro:|&lt;link |&lt;joint ' ~/ros2_curri/my_agv_ws/src/agv_description/curriculum_stages/M05/agv.urdf</a:t>
+            </a:r>
+          </a:p>
+          <a:p>
+            <a:r>
+              <a:t>[확인] RobotModel과 TF에서 base, 두 wheel, camera, lidar, imu 연결을 확인한다.</a:t>
             </a:r>
           </a:p>
           <a:p>
@@ -1850,7 +1832,7 @@
           <a:lstStyle/>
           <a:p>
             <a:r>
-              <a:t>[설명] 교육생이 직접 한 값만 바꿔 원인과 결과를 연결하게 한다.</a:t>
+              <a:t>[설명] 오류를 대신 해결하지 말고 증상부터 우선 확인 순서대로 교육생이 실행하게 한다.</a:t>
             </a:r>
           </a:p>
           <a:p>
@@ -1860,7 +1842,7 @@
           </a:p>
           <a:p>
             <a:r>
-              <a:t>[확인] 원래 값과 변경 값을 모두 기록한다.</a:t>
+              <a:t>[확인] 수정 뒤 첫 검증 명령을 다시 실행한다.</a:t>
             </a:r>
           </a:p>
           <a:p>
@@ -1870,7 +1852,7 @@
           </a:p>
           <a:p>
             <a:r>
-              <a:t>[오류] 오류가 나면 현재 폴더, source, 파일 경로를 먼저 확인한다.</a:t>
+              <a:t>[오류] 슬라이드의 두 대표 오류를 먼저 사용한다.</a:t>
             </a:r>
           </a:p>
         </p:txBody>
@@ -1940,17 +1922,37 @@
           <a:lstStyle/>
           <a:p>
             <a:r>
-              <a:t>[설명] 교육생이 자신의 workspace·캡처·로그를 저장했는지 확인하고 다음 모듈의 시작 상태를 읽는다.</a:t>
-            </a:r>
-          </a:p>
-          <a:p>
-            <a:r>
-              <a:t>[실행] 슬라이드의 명령 또는 파일 작성 단계를 진행한다.</a:t>
-            </a:r>
-          </a:p>
-          <a:p>
-            <a:r>
-              <a:t>[확인] M06 Xacro 모듈화 시작 조건을 말할 수 있다.</a:t>
+              <a:t>[설명] Complete는 정답 복사본이 아니라 막혔을 때 비교·복구하는 안전망이다.</a:t>
+            </a:r>
+          </a:p>
+          <a:p>
+            <a:r>
+              <a:t>[실행] cd ~/ros2_curri</a:t>
+            </a:r>
+          </a:p>
+          <a:p>
+            <a:r>
+              <a:t>diff -ru my_agv_ws/src blocks/B_robot_build/M05_urdf_basic_model/complete/agv_ws/src || true</a:t>
+            </a:r>
+          </a:p>
+          <a:p>
+            <a:r>
+              <a:t>cp -a my_agv_ws/src my_agv_ws/src_before_M05</a:t>
+            </a:r>
+          </a:p>
+          <a:p>
+            <a:r>
+              <a:t>cp -a blocks/B_robot_build/M05_urdf_basic_model/complete/agv_ws/src/. my_agv_ws/src/</a:t>
+            </a:r>
+          </a:p>
+          <a:p>
+            <a:r>
+              <a:t>cd my_agv_ws &amp;&amp; colcon build --symlink-install &amp;&amp; source install/setup.bash</a:t>
+            </a:r>
+          </a:p>
+          <a:p>
+            <a:r>
+              <a:t>[확인] diff에서 내 파일과 Complete의 차이를 설명할 수 있다.</a:t>
             </a:r>
           </a:p>
           <a:p>
@@ -1986,6 +1988,186 @@
 </file>
 
 <file path=ppt/notesSlides/notesSlide24.xml><?xml version="1.0" encoding="utf-8"?>
+<p:notes xmlns:a="http://schemas.openxmlformats.org/drawingml/2006/main" xmlns:p="http://schemas.openxmlformats.org/presentationml/2006/main" xmlns:r="http://schemas.openxmlformats.org/officeDocument/2006/relationships">
+  <p:cSld>
+    <p:spTree>
+      <p:nvGrpSpPr>
+        <p:cNvPr id="1" name=""/>
+        <p:cNvGrpSpPr/>
+        <p:nvPr/>
+      </p:nvGrpSpPr>
+      <p:grpSpPr>
+        <a:xfrm>
+          <a:off x="0" y="0"/>
+          <a:ext cx="0" cy="0"/>
+          <a:chOff x="0" y="0"/>
+          <a:chExt cx="0" cy="0"/>
+        </a:xfrm>
+      </p:grpSpPr>
+      <p:sp>
+        <p:nvSpPr>
+          <p:cNvPr id="2" name="Slide Image Placeholder 1"/>
+          <p:cNvSpPr>
+            <a:spLocks noGrp="1"/>
+          </p:cNvSpPr>
+          <p:nvPr>
+            <p:ph type="sldImg" idx="2"/>
+          </p:nvPr>
+        </p:nvSpPr>
+        <p:spPr/>
+      </p:sp>
+      <p:sp>
+        <p:nvSpPr>
+          <p:cNvPr id="3" name="Notes Placeholder 2"/>
+          <p:cNvSpPr>
+            <a:spLocks noGrp="1"/>
+          </p:cNvSpPr>
+          <p:nvPr>
+            <p:ph type="body" idx="3" sz="quarter"/>
+          </p:nvPr>
+        </p:nvSpPr>
+        <p:spPr/>
+        <p:txBody>
+          <a:bodyPr/>
+          <a:lstStyle/>
+          <a:p>
+            <a:r>
+              <a:t>[설명] 교육생이 직접 한 값만 바꿔 원인과 결과를 연결하게 한다.</a:t>
+            </a:r>
+          </a:p>
+          <a:p>
+            <a:r>
+              <a:t>[실행] 슬라이드의 명령 또는 파일 작성 단계를 진행한다.</a:t>
+            </a:r>
+          </a:p>
+          <a:p>
+            <a:r>
+              <a:t>[확인] 원래 값과 변경 값을 모두 기록한다.</a:t>
+            </a:r>
+          </a:p>
+          <a:p>
+            <a:r>
+              <a:t>[멈춤] 교육생이 현재 체크포인트를 통과할 때까지 기다린다.</a:t>
+            </a:r>
+          </a:p>
+          <a:p>
+            <a:r>
+              <a:t>[오류] 오류가 나면 현재 폴더, source, 파일 경로를 먼저 확인한다.</a:t>
+            </a:r>
+          </a:p>
+        </p:txBody>
+      </p:sp>
+      <p:sp>
+        <p:nvSpPr>
+          <p:cNvPr id="4" name="Slide Number Placeholder 3"/>
+          <p:cNvSpPr>
+            <a:spLocks noGrp="1"/>
+          </p:cNvSpPr>
+          <p:nvPr>
+            <p:ph type="sldNum" idx="5" sz="quarter"/>
+          </p:nvPr>
+        </p:nvSpPr>
+        <p:spPr/>
+      </p:sp>
+    </p:spTree>
+  </p:cSld>
+  <p:clrMapOvr>
+    <a:masterClrMapping/>
+  </p:clrMapOvr>
+</p:notes>
+</file>
+
+<file path=ppt/notesSlides/notesSlide25.xml><?xml version="1.0" encoding="utf-8"?>
+<p:notes xmlns:a="http://schemas.openxmlformats.org/drawingml/2006/main" xmlns:p="http://schemas.openxmlformats.org/presentationml/2006/main" xmlns:r="http://schemas.openxmlformats.org/officeDocument/2006/relationships">
+  <p:cSld>
+    <p:spTree>
+      <p:nvGrpSpPr>
+        <p:cNvPr id="1" name=""/>
+        <p:cNvGrpSpPr/>
+        <p:nvPr/>
+      </p:nvGrpSpPr>
+      <p:grpSpPr>
+        <a:xfrm>
+          <a:off x="0" y="0"/>
+          <a:ext cx="0" cy="0"/>
+          <a:chOff x="0" y="0"/>
+          <a:chExt cx="0" cy="0"/>
+        </a:xfrm>
+      </p:grpSpPr>
+      <p:sp>
+        <p:nvSpPr>
+          <p:cNvPr id="2" name="Slide Image Placeholder 1"/>
+          <p:cNvSpPr>
+            <a:spLocks noGrp="1"/>
+          </p:cNvSpPr>
+          <p:nvPr>
+            <p:ph type="sldImg" idx="2"/>
+          </p:nvPr>
+        </p:nvSpPr>
+        <p:spPr/>
+      </p:sp>
+      <p:sp>
+        <p:nvSpPr>
+          <p:cNvPr id="3" name="Notes Placeholder 2"/>
+          <p:cNvSpPr>
+            <a:spLocks noGrp="1"/>
+          </p:cNvSpPr>
+          <p:nvPr>
+            <p:ph type="body" idx="3" sz="quarter"/>
+          </p:nvPr>
+        </p:nvSpPr>
+        <p:spPr/>
+        <p:txBody>
+          <a:bodyPr/>
+          <a:lstStyle/>
+          <a:p>
+            <a:r>
+              <a:t>[설명] 교육생이 자신의 workspace·캡처·로그를 저장했는지 확인하고 다음 모듈의 시작 상태를 읽는다.</a:t>
+            </a:r>
+          </a:p>
+          <a:p>
+            <a:r>
+              <a:t>[실행] 슬라이드의 명령 또는 파일 작성 단계를 진행한다.</a:t>
+            </a:r>
+          </a:p>
+          <a:p>
+            <a:r>
+              <a:t>[확인] M06 Xacro 모듈화 시작 조건을 말할 수 있다.</a:t>
+            </a:r>
+          </a:p>
+          <a:p>
+            <a:r>
+              <a:t>[멈춤] 교육생이 현재 체크포인트를 통과할 때까지 기다린다.</a:t>
+            </a:r>
+          </a:p>
+          <a:p>
+            <a:r>
+              <a:t>[오류] 오류가 나면 현재 폴더, source, 파일 경로를 먼저 확인한다.</a:t>
+            </a:r>
+          </a:p>
+        </p:txBody>
+      </p:sp>
+      <p:sp>
+        <p:nvSpPr>
+          <p:cNvPr id="4" name="Slide Number Placeholder 3"/>
+          <p:cNvSpPr>
+            <a:spLocks noGrp="1"/>
+          </p:cNvSpPr>
+          <p:nvPr>
+            <p:ph type="sldNum" idx="5" sz="quarter"/>
+          </p:nvPr>
+        </p:nvSpPr>
+        <p:spPr/>
+      </p:sp>
+    </p:spTree>
+  </p:cSld>
+  <p:clrMapOvr>
+    <a:masterClrMapping/>
+  </p:clrMapOvr>
+</p:notes>
+</file>
+
+<file path=ppt/notesSlides/notesSlide26.xml><?xml version="1.0" encoding="utf-8"?>
 <p:notes xmlns:a="http://schemas.openxmlformats.org/drawingml/2006/main" xmlns:p="http://schemas.openxmlformats.org/presentationml/2006/main" xmlns:r="http://schemas.openxmlformats.org/officeDocument/2006/relationships">
   <p:cSld>
     <p:spTree>
@@ -7759,7 +7941,7 @@
               </a:defRPr>
             </a:pPr>
             <a:r>
-              <a:t>구현 1/1: 코드 입력 (1/2)</a:t>
+              <a:t>구현 1/1: 코드 읽기 (1/2)</a:t>
             </a:r>
           </a:p>
         </p:txBody>
@@ -7798,7 +7980,7 @@
               </a:defRPr>
             </a:pPr>
             <a:r>
-              <a:t>~/ros2_curri/my_agv_ws/src/agv_description/curriculum_stages/M05/agv.urdf</a:t>
+              <a:t>짧은 실제 코드 조각을 먼저 읽고, 다음 슬라이드에서 같은 코드를 직접 입력합니다.</a:t>
             </a:r>
           </a:p>
         </p:txBody>
@@ -7934,7 +8116,7 @@
               </a:defRPr>
             </a:pPr>
             <a:r>
-              <a:t>현재 단계 파일 1/1 · 입력 1/2    |    현재 폴더 ~/ros2_curri/my_agv_ws    |    현재 터미널</a:t>
+              <a:t>현재 단계 코드 해설 1/1    |    현재 폴더 ~/ros2_curri/my_agv_ws    |    현재 터미널</a:t>
             </a:r>
           </a:p>
         </p:txBody>
@@ -7947,8 +8129,8 @@
         </p:nvSpPr>
         <p:spPr>
           <a:xfrm>
-            <a:off x="658368" y="1609344"/>
-            <a:ext cx="10972800" cy="384048"/>
+            <a:off x="694944" y="1618488"/>
+            <a:ext cx="10789920" cy="274320"/>
           </a:xfrm>
           <a:prstGeom prst="rect">
             <a:avLst/>
@@ -7965,93 +8147,70 @@
               <a:spcAft>
                 <a:spcPts val="0"/>
               </a:spcAft>
-              <a:defRPr sz="1400" b="1">
-                <a:solidFill>
-                  <a:srgbClr val="122C4E"/>
-                </a:solidFill>
-                <a:latin typeface="Noto Sans CJK KR"/>
-              </a:defRPr>
-            </a:pPr>
-            <a:r>
-              <a:t>이 블록이 하는 일: 파일의 root와 첫 model/link를 입력합니다. 태그 여닫는 순서를 그대로 유지합니다.</a:t>
-            </a:r>
-          </a:p>
-        </p:txBody>
-      </p:sp>
-      <p:sp>
-        <p:nvSpPr>
-          <p:cNvPr id="8" name="Rectangle 7"/>
+              <a:defRPr sz="1300" b="1">
+                <a:solidFill>
+                  <a:srgbClr val="225B9B"/>
+                </a:solidFill>
+                <a:latin typeface="DejaVu Sans Mono"/>
+              </a:defRPr>
+            </a:pPr>
+            <a:r>
+              <a:t>~/ros2_curri/my_agv_ws/src/agv_description/curriculum_stages/M05/agv.urdf</a:t>
+            </a:r>
+          </a:p>
+        </p:txBody>
+      </p:sp>
+      <p:sp>
+        <p:nvSpPr>
+          <p:cNvPr id="8" name="TextBox 7"/>
+          <p:cNvSpPr txBox="1"/>
+          <p:nvPr/>
+        </p:nvSpPr>
+        <p:spPr>
+          <a:xfrm>
+            <a:off x="694944" y="1938528"/>
+            <a:ext cx="10789920" cy="274320"/>
+          </a:xfrm>
+          <a:prstGeom prst="rect">
+            <a:avLst/>
+          </a:prstGeom>
+          <a:noFill/>
+        </p:spPr>
+        <p:txBody>
+          <a:bodyPr wrap="square" lIns="73152" rIns="73152" tIns="36576" bIns="36576">
+            <a:spAutoFit/>
+          </a:bodyPr>
+          <a:lstStyle/>
+          <a:p>
+            <a:pPr algn="ctr">
+              <a:spcAft>
+                <a:spcPts val="0"/>
+              </a:spcAft>
+              <a:defRPr sz="1500" b="1">
+                <a:solidFill>
+                  <a:srgbClr val="DB7E22"/>
+                </a:solidFill>
+                <a:latin typeface="Noto Sans CJK KR"/>
+              </a:defRPr>
+            </a:pPr>
+            <a:r>
+              <a:t>말로 먼저 답해 보세요: 이 줄은 무엇을 만들고, 실행하면 어디에서 확인할 수 있을까요?</a:t>
+            </a:r>
+          </a:p>
+        </p:txBody>
+      </p:sp>
+      <p:sp>
+        <p:nvSpPr>
+          <p:cNvPr id="9" name="Rounded Rectangle 8"/>
           <p:cNvSpPr/>
           <p:nvPr/>
         </p:nvSpPr>
         <p:spPr>
           <a:xfrm>
-            <a:off x="658368" y="1956816"/>
-            <a:ext cx="10972800" cy="603504"/>
-          </a:xfrm>
-          <a:prstGeom prst="rect">
-            <a:avLst/>
-          </a:prstGeom>
-          <a:solidFill>
-            <a:srgbClr val="F4F7FB"/>
-          </a:solidFill>
-          <a:ln>
-            <a:solidFill>
-              <a:srgbClr val="F4F7FB"/>
-            </a:solidFill>
-          </a:ln>
-        </p:spPr>
-        <p:style>
-          <a:lnRef idx="1">
-            <a:schemeClr val="accent1"/>
-          </a:lnRef>
-          <a:fillRef idx="3">
-            <a:schemeClr val="accent1"/>
-          </a:fillRef>
-          <a:effectRef idx="2">
-            <a:schemeClr val="accent1"/>
-          </a:effectRef>
-          <a:fontRef idx="minor">
-            <a:schemeClr val="lt1"/>
-          </a:fontRef>
-        </p:style>
-        <p:txBody>
-          <a:bodyPr rtlCol="0" anchor="ctr" wrap="square" lIns="73152" rIns="73152" tIns="36576" bIns="36576"/>
-          <a:lstStyle/>
-          <a:p>
-            <a:pPr algn="l">
-              <a:spcAft>
-                <a:spcPts val="0"/>
-              </a:spcAft>
-              <a:defRPr sz="1300" b="0">
-                <a:solidFill>
-                  <a:srgbClr val="122C4E"/>
-                </a:solidFill>
-                <a:latin typeface="DejaVu Sans Mono"/>
-              </a:defRPr>
-            </a:pPr>
-            <a:r>
-              <a:t>현재 열린 파일: ~/ros2_curri/my_agv_ws/src/agv_description/curriculum_stages/M05/agv.urdf</a:t>
-            </a:r>
-            <a:br/>
-            <a:r>
-              <a:t>아래 코드만 입력 → Ctrl+O → Enter로 저장 → 다음 블록으로 이동</a:t>
-            </a:r>
-          </a:p>
-        </p:txBody>
-      </p:sp>
-      <p:sp>
-        <p:nvSpPr>
-          <p:cNvPr id="9" name="Rectangle 8"/>
-          <p:cNvSpPr/>
-          <p:nvPr/>
-        </p:nvSpPr>
-        <p:spPr>
-          <a:xfrm>
-            <a:off x="658368" y="2706624"/>
-            <a:ext cx="10972800" cy="3364992"/>
-          </a:xfrm>
-          <a:prstGeom prst="rect">
+            <a:off x="658368" y="2359152"/>
+            <a:ext cx="4160520" cy="1417320"/>
+          </a:xfrm>
+          <a:prstGeom prst="roundRect">
             <a:avLst/>
           </a:prstGeom>
           <a:solidFill>
@@ -8078,14 +8237,14 @@
           </a:fontRef>
         </p:style>
         <p:txBody>
-          <a:bodyPr rtlCol="0" anchor="ctr" wrap="square" lIns="164592" rIns="164592" tIns="109728" bIns="36576"/>
+          <a:bodyPr rtlCol="0" anchor="ctr" wrap="square" lIns="73152" rIns="73152" tIns="36576" bIns="36576"/>
           <a:lstStyle/>
           <a:p>
             <a:pPr algn="l">
               <a:spcAft>
                 <a:spcPts val="0"/>
               </a:spcAft>
-              <a:defRPr sz="1400" b="0">
+              <a:defRPr sz="1300" b="0">
                 <a:solidFill>
                   <a:srgbClr val="FFFFFF"/>
                 </a:solidFill>
@@ -8093,65 +8252,294 @@
               </a:defRPr>
             </a:pPr>
             <a:r>
-              <a:t>&lt;?xml version="1.0"?&gt;</a:t>
+              <a:t>&lt;robot name="agv_m05"&gt;</a:t>
+            </a:r>
+          </a:p>
+        </p:txBody>
+      </p:sp>
+      <p:sp>
+        <p:nvSpPr>
+          <p:cNvPr id="10" name="Rounded Rectangle 9"/>
+          <p:cNvSpPr/>
+          <p:nvPr/>
+        </p:nvSpPr>
+        <p:spPr>
+          <a:xfrm>
+            <a:off x="5029200" y="2359152"/>
+            <a:ext cx="6537960" cy="1417320"/>
+          </a:xfrm>
+          <a:prstGeom prst="roundRect">
+            <a:avLst/>
+          </a:prstGeom>
+          <a:solidFill>
+            <a:srgbClr val="F4F7FB"/>
+          </a:solidFill>
+          <a:ln>
+            <a:solidFill>
+              <a:srgbClr val="225B9B"/>
+            </a:solidFill>
+          </a:ln>
+        </p:spPr>
+        <p:style>
+          <a:lnRef idx="1">
+            <a:schemeClr val="accent1"/>
+          </a:lnRef>
+          <a:fillRef idx="3">
+            <a:schemeClr val="accent1"/>
+          </a:fillRef>
+          <a:effectRef idx="2">
+            <a:schemeClr val="accent1"/>
+          </a:effectRef>
+          <a:fontRef idx="minor">
+            <a:schemeClr val="lt1"/>
+          </a:fontRef>
+        </p:style>
+        <p:txBody>
+          <a:bodyPr rtlCol="0" anchor="ctr"/>
+          <a:lstStyle/>
+          <a:p>
+            <a:pPr algn="ctr"/>
+          </a:p>
+        </p:txBody>
+      </p:sp>
+      <p:sp>
+        <p:nvSpPr>
+          <p:cNvPr id="11" name="TextBox 10"/>
+          <p:cNvSpPr txBox="1"/>
+          <p:nvPr/>
+        </p:nvSpPr>
+        <p:spPr>
+          <a:xfrm>
+            <a:off x="5239512" y="2468880"/>
+            <a:ext cx="594360" cy="219456"/>
+          </a:xfrm>
+          <a:prstGeom prst="rect">
+            <a:avLst/>
+          </a:prstGeom>
+          <a:noFill/>
+        </p:spPr>
+        <p:txBody>
+          <a:bodyPr wrap="square" lIns="73152" rIns="73152" tIns="36576" bIns="36576">
+            <a:spAutoFit/>
+          </a:bodyPr>
+          <a:lstStyle/>
+          <a:p>
+            <a:pPr algn="l">
+              <a:spcAft>
+                <a:spcPts val="0"/>
+              </a:spcAft>
+              <a:defRPr sz="1400" b="1">
+                <a:solidFill>
+                  <a:srgbClr val="225B9B"/>
+                </a:solidFill>
+                <a:latin typeface="Noto Sans CJK KR"/>
+              </a:defRPr>
+            </a:pPr>
+            <a:r>
+              <a:t>1.</a:t>
+            </a:r>
+          </a:p>
+        </p:txBody>
+      </p:sp>
+      <p:sp>
+        <p:nvSpPr>
+          <p:cNvPr id="12" name="TextBox 11"/>
+          <p:cNvSpPr txBox="1"/>
+          <p:nvPr/>
+        </p:nvSpPr>
+        <p:spPr>
+          <a:xfrm>
+            <a:off x="5596128" y="2450592"/>
+            <a:ext cx="5696712" cy="493776"/>
+          </a:xfrm>
+          <a:prstGeom prst="rect">
+            <a:avLst/>
+          </a:prstGeom>
+          <a:noFill/>
+        </p:spPr>
+        <p:txBody>
+          <a:bodyPr wrap="square" lIns="73152" rIns="73152" tIns="36576" bIns="36576">
+            <a:spAutoFit/>
+          </a:bodyPr>
+          <a:lstStyle/>
+          <a:p>
+            <a:pPr algn="l">
+              <a:spcAft>
+                <a:spcPts val="0"/>
+              </a:spcAft>
+              <a:defRPr sz="1300" b="0">
+                <a:solidFill>
+                  <a:srgbClr val="122C4E"/>
+                </a:solidFill>
+                <a:latin typeface="Noto Sans CJK KR"/>
+              </a:defRPr>
+            </a:pPr>
+            <a:r>
+              <a:t>뜻: 로봇 model 또는 Gazebo world의 가장 바깥 이름과 범위를 선언합니다.</a:t>
+            </a:r>
+          </a:p>
+        </p:txBody>
+      </p:sp>
+      <p:sp>
+        <p:nvSpPr>
+          <p:cNvPr id="13" name="TextBox 12"/>
+          <p:cNvSpPr txBox="1"/>
+          <p:nvPr/>
+        </p:nvSpPr>
+        <p:spPr>
+          <a:xfrm>
+            <a:off x="5596128" y="3108960"/>
+            <a:ext cx="5696712" cy="457200"/>
+          </a:xfrm>
+          <a:prstGeom prst="rect">
+            <a:avLst/>
+          </a:prstGeom>
+          <a:noFill/>
+        </p:spPr>
+        <p:txBody>
+          <a:bodyPr wrap="square" lIns="73152" rIns="73152" tIns="36576" bIns="36576">
+            <a:spAutoFit/>
+          </a:bodyPr>
+          <a:lstStyle/>
+          <a:p>
+            <a:pPr algn="l">
+              <a:spcAft>
+                <a:spcPts val="0"/>
+              </a:spcAft>
+              <a:defRPr sz="1200" b="0">
+                <a:solidFill>
+                  <a:srgbClr val="2A8B5A"/>
+                </a:solidFill>
+                <a:latin typeface="Noto Sans CJK KR"/>
+              </a:defRPr>
+            </a:pPr>
+            <a:r>
+              <a:t>실행에서: 문법 검사와 Gazebo/RViz가 이 구조부터 읽기 시작합니다.</a:t>
+            </a:r>
+          </a:p>
+        </p:txBody>
+      </p:sp>
+      <p:sp>
+        <p:nvSpPr>
+          <p:cNvPr id="14" name="Rounded Rectangle 13"/>
+          <p:cNvSpPr/>
+          <p:nvPr/>
+        </p:nvSpPr>
+        <p:spPr>
+          <a:xfrm>
+            <a:off x="658368" y="4078224"/>
+            <a:ext cx="4160520" cy="1417320"/>
+          </a:xfrm>
+          <a:prstGeom prst="roundRect">
+            <a:avLst/>
+          </a:prstGeom>
+          <a:solidFill>
+            <a:srgbClr val="1D232D"/>
+          </a:solidFill>
+          <a:ln>
+            <a:solidFill>
+              <a:srgbClr val="1D232D"/>
+            </a:solidFill>
+          </a:ln>
+        </p:spPr>
+        <p:style>
+          <a:lnRef idx="1">
+            <a:schemeClr val="accent1"/>
+          </a:lnRef>
+          <a:fillRef idx="3">
+            <a:schemeClr val="accent1"/>
+          </a:fillRef>
+          <a:effectRef idx="2">
+            <a:schemeClr val="accent1"/>
+          </a:effectRef>
+          <a:fontRef idx="minor">
+            <a:schemeClr val="lt1"/>
+          </a:fontRef>
+        </p:style>
+        <p:txBody>
+          <a:bodyPr rtlCol="0" anchor="ctr" wrap="square" lIns="73152" rIns="73152" tIns="36576" bIns="36576"/>
+          <a:lstStyle/>
+          <a:p>
+            <a:pPr algn="l">
+              <a:spcAft>
+                <a:spcPts val="0"/>
+              </a:spcAft>
+              <a:defRPr sz="1300" b="0">
+                <a:solidFill>
+                  <a:srgbClr val="FFFFFF"/>
+                </a:solidFill>
+                <a:latin typeface="DejaVu Sans Mono"/>
+              </a:defRPr>
+            </a:pPr>
+            <a:r>
+              <a:t>&lt;link name="base_link"&gt;&lt;visual&gt;&lt;origin xyz="0 0</a:t>
             </a:r>
             <a:br/>
             <a:r>
-              <a:t>&lt;robot name="agv_m05"&gt;</a:t>
+              <a:t>0.16"/&gt;&lt;geometry&gt;&lt;box size="0.60 0.42</a:t>
             </a:r>
             <a:br/>
             <a:r>
-              <a:t>  &lt;link name="base_link"&gt;&lt;visual&gt;&lt;origin xyz="0 0 0.16"/&gt;&lt;geometry&gt;&lt;box size="0.60 0.42 0.16"/&gt;&lt;/geometry&gt;&lt;/visual&gt;&lt;/link&gt;</a:t>
-            </a:r>
-            <a:br/>
-            <a:r>
-              <a:t>  &lt;link name="left_wheel_link"&gt;&lt;visual&gt;&lt;origin rpy="1.5708 0 0"/&gt;&lt;geometry&gt;&lt;cylinder radius="0.08" length="0.05"/&gt;&lt;/geometry&gt;&lt;/visual&gt;&lt;/link&gt;</a:t>
-            </a:r>
-            <a:br/>
-            <a:r>
-              <a:t>  &lt;link name="right_wheel_link"&gt;&lt;visual&gt;&lt;origin rpy="1.5708 0 0"/&gt;&lt;geometry&gt;&lt;cylinder radius="0.08" length="0.05"/&gt;&lt;/geometry&gt;&lt;/visual&gt;&lt;/link&gt;</a:t>
-            </a:r>
-            <a:br/>
-            <a:r>
-              <a:t>  &lt;link name="caster_link"&gt;&lt;visual&gt;&lt;geometry&gt;&lt;sphere radius="0.04"/&gt;&lt;/geometry&gt;&lt;/visual&gt;&lt;/link&gt;</a:t>
-            </a:r>
-            <a:br/>
-            <a:r>
-              <a:t>  &lt;link name="camera_link"/&gt;&lt;link name="lidar_link"/&gt;&lt;link name="imu_link"/&gt;</a:t>
-            </a:r>
-            <a:br/>
-            <a:r>
-              <a:t>  &lt;joint name="left_wheel_joint" type="continuous"&gt;&lt;parent link="base_link"/&gt;&lt;child link="left_wheel_link"/&gt;&lt;origin xyz="0 0.19 0.08"/&gt;&lt;axis xyz="0 1 0"/&gt;&lt;/joint&gt;</a:t>
-            </a:r>
-            <a:br/>
-            <a:r>
-              <a:t>  &lt;joint name="right_wheel_joint" type="continuous"&gt;&lt;parent link="base_link"/&gt;&lt;child link="right_wheel_link"/&gt;&lt;origin xyz="0 -0.19 0.08"/&gt;&lt;axis xyz="0 1 0"/&gt;&lt;/joint&gt;</a:t>
-            </a:r>
-            <a:br/>
-            <a:r>
-              <a:t>  &lt;joint name="caster_joint" type="fixed"&gt;&lt;parent link="base_link"/&gt;&lt;child link="caster_link"/&gt;&lt;origin xyz="-0.24 0 0.04"/&gt;&lt;/joint&gt;</a:t>
-            </a:r>
-            <a:br/>
-            <a:r>
-              <a:t>  &lt;joint name="camera_joint" type="fixed"&gt;&lt;parent link="base_link"/&gt;&lt;child link="camera_link"/&gt;&lt;origin xyz="0.30 0 0.26"/&gt;&lt;/joint&gt;</a:t>
-            </a:r>
-            <a:br/>
-            <a:r>
-              <a:t>  &lt;joint name="lidar_joint" type="fixed"&gt;&lt;parent link="base_link"/&gt;&lt;child link="lidar_link"/&gt;&lt;origin xyz="0.12 0 0.29"/&gt;&lt;/joint&gt;</a:t>
-            </a:r>
-          </a:p>
-        </p:txBody>
-      </p:sp>
-      <p:sp>
-        <p:nvSpPr>
-          <p:cNvPr id="10" name="TextBox 9"/>
-          <p:cNvSpPr txBox="1"/>
-          <p:nvPr/>
-        </p:nvSpPr>
-        <p:spPr>
-          <a:xfrm>
-            <a:off x="749808" y="6181344"/>
-            <a:ext cx="10789920" cy="201168"/>
+              <a:t>0.16"/&gt;&lt;/geometry&gt;&lt;/visual&gt;&lt;/link&gt;</a:t>
+            </a:r>
+          </a:p>
+        </p:txBody>
+      </p:sp>
+      <p:sp>
+        <p:nvSpPr>
+          <p:cNvPr id="15" name="Rounded Rectangle 14"/>
+          <p:cNvSpPr/>
+          <p:nvPr/>
+        </p:nvSpPr>
+        <p:spPr>
+          <a:xfrm>
+            <a:off x="5029200" y="4078224"/>
+            <a:ext cx="6537960" cy="1417320"/>
+          </a:xfrm>
+          <a:prstGeom prst="roundRect">
+            <a:avLst/>
+          </a:prstGeom>
+          <a:solidFill>
+            <a:srgbClr val="F4F7FB"/>
+          </a:solidFill>
+          <a:ln>
+            <a:solidFill>
+              <a:srgbClr val="225B9B"/>
+            </a:solidFill>
+          </a:ln>
+        </p:spPr>
+        <p:style>
+          <a:lnRef idx="1">
+            <a:schemeClr val="accent1"/>
+          </a:lnRef>
+          <a:fillRef idx="3">
+            <a:schemeClr val="accent1"/>
+          </a:fillRef>
+          <a:effectRef idx="2">
+            <a:schemeClr val="accent1"/>
+          </a:effectRef>
+          <a:fontRef idx="minor">
+            <a:schemeClr val="lt1"/>
+          </a:fontRef>
+        </p:style>
+        <p:txBody>
+          <a:bodyPr rtlCol="0" anchor="ctr"/>
+          <a:lstStyle/>
+          <a:p>
+            <a:pPr algn="ctr"/>
+          </a:p>
+        </p:txBody>
+      </p:sp>
+      <p:sp>
+        <p:nvSpPr>
+          <p:cNvPr id="16" name="TextBox 15"/>
+          <p:cNvSpPr txBox="1"/>
+          <p:nvPr/>
+        </p:nvSpPr>
+        <p:spPr>
+          <a:xfrm>
+            <a:off x="5239512" y="4187952"/>
+            <a:ext cx="594360" cy="219456"/>
           </a:xfrm>
           <a:prstGeom prst="rect">
             <a:avLst/>
@@ -8168,7 +8556,124 @@
               <a:spcAft>
                 <a:spcPts val="0"/>
               </a:spcAft>
-              <a:defRPr sz="1000" b="0">
+              <a:defRPr sz="1400" b="1">
+                <a:solidFill>
+                  <a:srgbClr val="225B9B"/>
+                </a:solidFill>
+                <a:latin typeface="Noto Sans CJK KR"/>
+              </a:defRPr>
+            </a:pPr>
+            <a:r>
+              <a:t>2.</a:t>
+            </a:r>
+          </a:p>
+        </p:txBody>
+      </p:sp>
+      <p:sp>
+        <p:nvSpPr>
+          <p:cNvPr id="17" name="TextBox 16"/>
+          <p:cNvSpPr txBox="1"/>
+          <p:nvPr/>
+        </p:nvSpPr>
+        <p:spPr>
+          <a:xfrm>
+            <a:off x="5596128" y="4169663"/>
+            <a:ext cx="5696712" cy="493776"/>
+          </a:xfrm>
+          <a:prstGeom prst="rect">
+            <a:avLst/>
+          </a:prstGeom>
+          <a:noFill/>
+        </p:spPr>
+        <p:txBody>
+          <a:bodyPr wrap="square" lIns="73152" rIns="73152" tIns="36576" bIns="36576">
+            <a:spAutoFit/>
+          </a:bodyPr>
+          <a:lstStyle/>
+          <a:p>
+            <a:pPr algn="l">
+              <a:spcAft>
+                <a:spcPts val="0"/>
+              </a:spcAft>
+              <a:defRPr sz="1300" b="0">
+                <a:solidFill>
+                  <a:srgbClr val="122C4E"/>
+                </a:solidFill>
+                <a:latin typeface="Noto Sans CJK KR"/>
+              </a:defRPr>
+            </a:pPr>
+            <a:r>
+              <a:t>뜻: 로봇의 몸체·바퀴처럼 실제로 존재하는 하나의 부품을 선언합니다.</a:t>
+            </a:r>
+          </a:p>
+        </p:txBody>
+      </p:sp>
+      <p:sp>
+        <p:nvSpPr>
+          <p:cNvPr id="18" name="TextBox 17"/>
+          <p:cNvSpPr txBox="1"/>
+          <p:nvPr/>
+        </p:nvSpPr>
+        <p:spPr>
+          <a:xfrm>
+            <a:off x="5596128" y="4828032"/>
+            <a:ext cx="5696712" cy="457200"/>
+          </a:xfrm>
+          <a:prstGeom prst="rect">
+            <a:avLst/>
+          </a:prstGeom>
+          <a:noFill/>
+        </p:spPr>
+        <p:txBody>
+          <a:bodyPr wrap="square" lIns="73152" rIns="73152" tIns="36576" bIns="36576">
+            <a:spAutoFit/>
+          </a:bodyPr>
+          <a:lstStyle/>
+          <a:p>
+            <a:pPr algn="l">
+              <a:spcAft>
+                <a:spcPts val="0"/>
+              </a:spcAft>
+              <a:defRPr sz="1200" b="0">
+                <a:solidFill>
+                  <a:srgbClr val="2A8B5A"/>
+                </a:solidFill>
+                <a:latin typeface="Noto Sans CJK KR"/>
+              </a:defRPr>
+            </a:pPr>
+            <a:r>
+              <a:t>실행에서: RViz/Gazebo에서 이 부품이 별도 frame/물체로 보입니다.</a:t>
+            </a:r>
+          </a:p>
+        </p:txBody>
+      </p:sp>
+      <p:sp>
+        <p:nvSpPr>
+          <p:cNvPr id="19" name="TextBox 18"/>
+          <p:cNvSpPr txBox="1"/>
+          <p:nvPr/>
+        </p:nvSpPr>
+        <p:spPr>
+          <a:xfrm>
+            <a:off x="749808" y="6199632"/>
+            <a:ext cx="10698480" cy="182880"/>
+          </a:xfrm>
+          <a:prstGeom prst="rect">
+            <a:avLst/>
+          </a:prstGeom>
+          <a:noFill/>
+        </p:spPr>
+        <p:txBody>
+          <a:bodyPr wrap="square" lIns="73152" rIns="73152" tIns="36576" bIns="36576">
+            <a:spAutoFit/>
+          </a:bodyPr>
+          <a:lstStyle/>
+          <a:p>
+            <a:pPr algn="ctr">
+              <a:spcAft>
+                <a:spcPts val="0"/>
+              </a:spcAft>
+              <a:defRPr sz="1100" b="0">
                 <a:solidFill>
                   <a:srgbClr val="5C6672"/>
                 </a:solidFill>
@@ -8176,7 +8681,7 @@
               </a:defRPr>
             </a:pPr>
             <a:r>
-              <a:t>입력 1/2 · 이 파일의 다음 코드 블록이 바로 다음 슬라이드에 이어집니다.</a:t>
+              <a:t>다음 코드 입력 슬라이드에서 이 줄을 발견하면, 방금 설명한 ‘뜻’과 ‘실행에서 보이는 변화’를 다시 말해 봅니다.</a:t>
             </a:r>
           </a:p>
         </p:txBody>
@@ -8233,7 +8738,7 @@
               </a:defRPr>
             </a:pPr>
             <a:r>
-              <a:t>구현 1/1: 코드 입력 (2/2)</a:t>
+              <a:t>구현 1/1: 코드 읽기 (2/2)</a:t>
             </a:r>
           </a:p>
         </p:txBody>
@@ -8272,7 +8777,7 @@
               </a:defRPr>
             </a:pPr>
             <a:r>
-              <a:t>~/ros2_curri/my_agv_ws/src/agv_description/curriculum_stages/M05/agv.urdf</a:t>
+              <a:t>짧은 실제 코드 조각을 먼저 읽고, 다음 슬라이드에서 같은 코드를 직접 입력합니다.</a:t>
             </a:r>
           </a:p>
         </p:txBody>
@@ -8408,7 +8913,7 @@
               </a:defRPr>
             </a:pPr>
             <a:r>
-              <a:t>현재 단계 파일 1/1 · 입력 2/2    |    현재 폴더 ~/ros2_curri/my_agv_ws    |    현재 터미널</a:t>
+              <a:t>현재 단계 코드 해설 1/1    |    현재 폴더 ~/ros2_curri/my_agv_ws    |    현재 터미널</a:t>
             </a:r>
           </a:p>
         </p:txBody>
@@ -8421,8 +8926,8 @@
         </p:nvSpPr>
         <p:spPr>
           <a:xfrm>
-            <a:off x="658368" y="1609344"/>
-            <a:ext cx="10972800" cy="384048"/>
+            <a:off x="694944" y="1618488"/>
+            <a:ext cx="10789920" cy="274320"/>
           </a:xfrm>
           <a:prstGeom prst="rect">
             <a:avLst/>
@@ -8439,93 +8944,70 @@
               <a:spcAft>
                 <a:spcPts val="0"/>
               </a:spcAft>
-              <a:defRPr sz="1400" b="1">
-                <a:solidFill>
-                  <a:srgbClr val="122C4E"/>
-                </a:solidFill>
-                <a:latin typeface="Noto Sans CJK KR"/>
-              </a:defRPr>
-            </a:pPr>
-            <a:r>
-              <a:t>이 블록이 하는 일: 마지막 joint·sensor·plugin과 닫는 태그를 입력해 구조를 완성합니다.</a:t>
-            </a:r>
-          </a:p>
-        </p:txBody>
-      </p:sp>
-      <p:sp>
-        <p:nvSpPr>
-          <p:cNvPr id="8" name="Rectangle 7"/>
+              <a:defRPr sz="1300" b="1">
+                <a:solidFill>
+                  <a:srgbClr val="225B9B"/>
+                </a:solidFill>
+                <a:latin typeface="DejaVu Sans Mono"/>
+              </a:defRPr>
+            </a:pPr>
+            <a:r>
+              <a:t>~/ros2_curri/my_agv_ws/src/agv_description/curriculum_stages/M05/agv.urdf</a:t>
+            </a:r>
+          </a:p>
+        </p:txBody>
+      </p:sp>
+      <p:sp>
+        <p:nvSpPr>
+          <p:cNvPr id="8" name="TextBox 7"/>
+          <p:cNvSpPr txBox="1"/>
+          <p:nvPr/>
+        </p:nvSpPr>
+        <p:spPr>
+          <a:xfrm>
+            <a:off x="694944" y="1938528"/>
+            <a:ext cx="10789920" cy="274320"/>
+          </a:xfrm>
+          <a:prstGeom prst="rect">
+            <a:avLst/>
+          </a:prstGeom>
+          <a:noFill/>
+        </p:spPr>
+        <p:txBody>
+          <a:bodyPr wrap="square" lIns="73152" rIns="73152" tIns="36576" bIns="36576">
+            <a:spAutoFit/>
+          </a:bodyPr>
+          <a:lstStyle/>
+          <a:p>
+            <a:pPr algn="ctr">
+              <a:spcAft>
+                <a:spcPts val="0"/>
+              </a:spcAft>
+              <a:defRPr sz="1500" b="1">
+                <a:solidFill>
+                  <a:srgbClr val="DB7E22"/>
+                </a:solidFill>
+                <a:latin typeface="Noto Sans CJK KR"/>
+              </a:defRPr>
+            </a:pPr>
+            <a:r>
+              <a:t>말로 먼저 답해 보세요: 이 줄은 무엇을 만들고, 실행하면 어디에서 확인할 수 있을까요?</a:t>
+            </a:r>
+          </a:p>
+        </p:txBody>
+      </p:sp>
+      <p:sp>
+        <p:nvSpPr>
+          <p:cNvPr id="9" name="Rounded Rectangle 8"/>
           <p:cNvSpPr/>
           <p:nvPr/>
         </p:nvSpPr>
         <p:spPr>
           <a:xfrm>
-            <a:off x="658368" y="1956816"/>
-            <a:ext cx="10972800" cy="603504"/>
-          </a:xfrm>
-          <a:prstGeom prst="rect">
-            <a:avLst/>
-          </a:prstGeom>
-          <a:solidFill>
-            <a:srgbClr val="F4F7FB"/>
-          </a:solidFill>
-          <a:ln>
-            <a:solidFill>
-              <a:srgbClr val="F4F7FB"/>
-            </a:solidFill>
-          </a:ln>
-        </p:spPr>
-        <p:style>
-          <a:lnRef idx="1">
-            <a:schemeClr val="accent1"/>
-          </a:lnRef>
-          <a:fillRef idx="3">
-            <a:schemeClr val="accent1"/>
-          </a:fillRef>
-          <a:effectRef idx="2">
-            <a:schemeClr val="accent1"/>
-          </a:effectRef>
-          <a:fontRef idx="minor">
-            <a:schemeClr val="lt1"/>
-          </a:fontRef>
-        </p:style>
-        <p:txBody>
-          <a:bodyPr rtlCol="0" anchor="ctr" wrap="square" lIns="73152" rIns="73152" tIns="36576" bIns="36576"/>
-          <a:lstStyle/>
-          <a:p>
-            <a:pPr algn="l">
-              <a:spcAft>
-                <a:spcPts val="0"/>
-              </a:spcAft>
-              <a:defRPr sz="1300" b="0">
-                <a:solidFill>
-                  <a:srgbClr val="122C4E"/>
-                </a:solidFill>
-                <a:latin typeface="DejaVu Sans Mono"/>
-              </a:defRPr>
-            </a:pPr>
-            <a:r>
-              <a:t>현재 열린 파일: ~/ros2_curri/my_agv_ws/src/agv_description/curriculum_stages/M05/agv.urdf</a:t>
-            </a:r>
-            <a:br/>
-            <a:r>
-              <a:t>아래 코드만 입력 → Ctrl+O → Enter로 저장 → 다음 블록으로 이동</a:t>
-            </a:r>
-          </a:p>
-        </p:txBody>
-      </p:sp>
-      <p:sp>
-        <p:nvSpPr>
-          <p:cNvPr id="9" name="Rectangle 8"/>
-          <p:cNvSpPr/>
-          <p:nvPr/>
-        </p:nvSpPr>
-        <p:spPr>
-          <a:xfrm>
-            <a:off x="658368" y="2706624"/>
-            <a:ext cx="10972800" cy="3364992"/>
-          </a:xfrm>
-          <a:prstGeom prst="rect">
+            <a:off x="658368" y="2359152"/>
+            <a:ext cx="4160520" cy="1417320"/>
+          </a:xfrm>
+          <a:prstGeom prst="roundRect">
             <a:avLst/>
           </a:prstGeom>
           <a:solidFill>
@@ -8552,14 +9034,14 @@
           </a:fontRef>
         </p:style>
         <p:txBody>
-          <a:bodyPr rtlCol="0" anchor="ctr" wrap="square" lIns="164592" rIns="164592" tIns="109728" bIns="36576"/>
+          <a:bodyPr rtlCol="0" anchor="ctr" wrap="square" lIns="73152" rIns="73152" tIns="36576" bIns="36576"/>
           <a:lstStyle/>
           <a:p>
             <a:pPr algn="l">
               <a:spcAft>
                 <a:spcPts val="0"/>
               </a:spcAft>
-              <a:defRPr sz="1400" b="0">
+              <a:defRPr sz="1300" b="0">
                 <a:solidFill>
                   <a:srgbClr val="FFFFFF"/>
                 </a:solidFill>
@@ -8567,25 +9049,74 @@
               </a:defRPr>
             </a:pPr>
             <a:r>
-              <a:t>  &lt;joint name="imu_joint" type="fixed"&gt;&lt;parent link="base_link"/&gt;&lt;child link="imu_link"/&gt;&lt;origin xyz="0 0 0.28"/&gt;&lt;/joint&gt;</a:t>
+              <a:t>&lt;joint name="left_wheel_joint" type="continuous"&gt;&lt;parent</a:t>
             </a:r>
             <a:br/>
             <a:r>
-              <a:t>&lt;/robot&gt;</a:t>
-            </a:r>
-          </a:p>
-        </p:txBody>
-      </p:sp>
-      <p:sp>
-        <p:nvSpPr>
-          <p:cNvPr id="10" name="TextBox 9"/>
-          <p:cNvSpPr txBox="1"/>
-          <p:nvPr/>
-        </p:nvSpPr>
-        <p:spPr>
-          <a:xfrm>
-            <a:off x="749808" y="6181344"/>
-            <a:ext cx="10789920" cy="201168"/>
+              <a:t>link="base_link"/&gt;&lt;child link="left_wheel_link"/&gt;&lt;origin</a:t>
+            </a:r>
+            <a:br/>
+            <a:r>
+              <a:t>xyz="0 0.19 0.08"/&gt;&lt;axis xyz="0 1 0"/&gt;&lt;/joint&gt;</a:t>
+            </a:r>
+          </a:p>
+        </p:txBody>
+      </p:sp>
+      <p:sp>
+        <p:nvSpPr>
+          <p:cNvPr id="10" name="Rounded Rectangle 9"/>
+          <p:cNvSpPr/>
+          <p:nvPr/>
+        </p:nvSpPr>
+        <p:spPr>
+          <a:xfrm>
+            <a:off x="5029200" y="2359152"/>
+            <a:ext cx="6537960" cy="1417320"/>
+          </a:xfrm>
+          <a:prstGeom prst="roundRect">
+            <a:avLst/>
+          </a:prstGeom>
+          <a:solidFill>
+            <a:srgbClr val="F4F7FB"/>
+          </a:solidFill>
+          <a:ln>
+            <a:solidFill>
+              <a:srgbClr val="225B9B"/>
+            </a:solidFill>
+          </a:ln>
+        </p:spPr>
+        <p:style>
+          <a:lnRef idx="1">
+            <a:schemeClr val="accent1"/>
+          </a:lnRef>
+          <a:fillRef idx="3">
+            <a:schemeClr val="accent1"/>
+          </a:fillRef>
+          <a:effectRef idx="2">
+            <a:schemeClr val="accent1"/>
+          </a:effectRef>
+          <a:fontRef idx="minor">
+            <a:schemeClr val="lt1"/>
+          </a:fontRef>
+        </p:style>
+        <p:txBody>
+          <a:bodyPr rtlCol="0" anchor="ctr"/>
+          <a:lstStyle/>
+          <a:p>
+            <a:pPr algn="ctr"/>
+          </a:p>
+        </p:txBody>
+      </p:sp>
+      <p:sp>
+        <p:nvSpPr>
+          <p:cNvPr id="11" name="TextBox 10"/>
+          <p:cNvSpPr txBox="1"/>
+          <p:nvPr/>
+        </p:nvSpPr>
+        <p:spPr>
+          <a:xfrm>
+            <a:off x="5239512" y="2468880"/>
+            <a:ext cx="594360" cy="219456"/>
           </a:xfrm>
           <a:prstGeom prst="rect">
             <a:avLst/>
@@ -8602,7 +9133,124 @@
               <a:spcAft>
                 <a:spcPts val="0"/>
               </a:spcAft>
-              <a:defRPr sz="1000" b="0">
+              <a:defRPr sz="1400" b="1">
+                <a:solidFill>
+                  <a:srgbClr val="225B9B"/>
+                </a:solidFill>
+                <a:latin typeface="Noto Sans CJK KR"/>
+              </a:defRPr>
+            </a:pPr>
+            <a:r>
+              <a:t>1.</a:t>
+            </a:r>
+          </a:p>
+        </p:txBody>
+      </p:sp>
+      <p:sp>
+        <p:nvSpPr>
+          <p:cNvPr id="12" name="TextBox 11"/>
+          <p:cNvSpPr txBox="1"/>
+          <p:nvPr/>
+        </p:nvSpPr>
+        <p:spPr>
+          <a:xfrm>
+            <a:off x="5596128" y="2450592"/>
+            <a:ext cx="5696712" cy="493776"/>
+          </a:xfrm>
+          <a:prstGeom prst="rect">
+            <a:avLst/>
+          </a:prstGeom>
+          <a:noFill/>
+        </p:spPr>
+        <p:txBody>
+          <a:bodyPr wrap="square" lIns="73152" rIns="73152" tIns="36576" bIns="36576">
+            <a:spAutoFit/>
+          </a:bodyPr>
+          <a:lstStyle/>
+          <a:p>
+            <a:pPr algn="l">
+              <a:spcAft>
+                <a:spcPts val="0"/>
+              </a:spcAft>
+              <a:defRPr sz="1300" b="0">
+                <a:solidFill>
+                  <a:srgbClr val="122C4E"/>
+                </a:solidFill>
+                <a:latin typeface="Noto Sans CJK KR"/>
+              </a:defRPr>
+            </a:pPr>
+            <a:r>
+              <a:t>뜻: 두 link를 어떤 축·방식으로 연결할지 정합니다.</a:t>
+            </a:r>
+          </a:p>
+        </p:txBody>
+      </p:sp>
+      <p:sp>
+        <p:nvSpPr>
+          <p:cNvPr id="13" name="TextBox 12"/>
+          <p:cNvSpPr txBox="1"/>
+          <p:nvPr/>
+        </p:nvSpPr>
+        <p:spPr>
+          <a:xfrm>
+            <a:off x="5596128" y="3108960"/>
+            <a:ext cx="5696712" cy="457200"/>
+          </a:xfrm>
+          <a:prstGeom prst="rect">
+            <a:avLst/>
+          </a:prstGeom>
+          <a:noFill/>
+        </p:spPr>
+        <p:txBody>
+          <a:bodyPr wrap="square" lIns="73152" rIns="73152" tIns="36576" bIns="36576">
+            <a:spAutoFit/>
+          </a:bodyPr>
+          <a:lstStyle/>
+          <a:p>
+            <a:pPr algn="l">
+              <a:spcAft>
+                <a:spcPts val="0"/>
+              </a:spcAft>
+              <a:defRPr sz="1200" b="0">
+                <a:solidFill>
+                  <a:srgbClr val="2A8B5A"/>
+                </a:solidFill>
+                <a:latin typeface="Noto Sans CJK KR"/>
+              </a:defRPr>
+            </a:pPr>
+            <a:r>
+              <a:t>실행에서: joint 이름·축이 맞아야 바퀴와 센서 frame이 기대한 위치에 있습니다.</a:t>
+            </a:r>
+          </a:p>
+        </p:txBody>
+      </p:sp>
+      <p:sp>
+        <p:nvSpPr>
+          <p:cNvPr id="14" name="TextBox 13"/>
+          <p:cNvSpPr txBox="1"/>
+          <p:nvPr/>
+        </p:nvSpPr>
+        <p:spPr>
+          <a:xfrm>
+            <a:off x="749808" y="6199632"/>
+            <a:ext cx="10698480" cy="182880"/>
+          </a:xfrm>
+          <a:prstGeom prst="rect">
+            <a:avLst/>
+          </a:prstGeom>
+          <a:noFill/>
+        </p:spPr>
+        <p:txBody>
+          <a:bodyPr wrap="square" lIns="73152" rIns="73152" tIns="36576" bIns="36576">
+            <a:spAutoFit/>
+          </a:bodyPr>
+          <a:lstStyle/>
+          <a:p>
+            <a:pPr algn="ctr">
+              <a:spcAft>
+                <a:spcPts val="0"/>
+              </a:spcAft>
+              <a:defRPr sz="1100" b="0">
                 <a:solidFill>
                   <a:srgbClr val="5C6672"/>
                 </a:solidFill>
@@ -8610,7 +9258,7 @@
               </a:defRPr>
             </a:pPr>
             <a:r>
-              <a:t>입력 2/2 · 이 파일의 다음 코드 블록이 바로 다음 슬라이드에 이어집니다.</a:t>
+              <a:t>다음 코드 입력 슬라이드에서 이 줄을 발견하면, 방금 설명한 ‘뜻’과 ‘실행에서 보이는 변화’를 다시 말해 봅니다.</a:t>
             </a:r>
           </a:p>
         </p:txBody>
@@ -8667,7 +9315,7 @@
               </a:defRPr>
             </a:pPr>
             <a:r>
-              <a:t>구현 뒤 실행 1/2: 단일 URDF를 검사한다</a:t>
+              <a:t>구현 1/1: 코드 입력 (1/2)</a:t>
             </a:r>
           </a:p>
         </p:txBody>
@@ -8706,7 +9354,7 @@
               </a:defRPr>
             </a:pPr>
             <a:r>
-              <a:t>방금 직접 만든 파일을 실행·검사하며 다음 파일로 넘어갈 기준을 만듭니다.</a:t>
+              <a:t>~/ros2_curri/my_agv_ws/src/agv_description/curriculum_stages/M05/agv.urdf</a:t>
             </a:r>
           </a:p>
         </p:txBody>
@@ -8842,7 +9490,7 @@
               </a:defRPr>
             </a:pPr>
             <a:r>
-              <a:t>현재 단계 실행 1/2    |    현재 폴더 ~/ros2_curri/my_agv_ws    |    현재 터미널</a:t>
+              <a:t>현재 단계 파일 1/1 · 입력 1/2    |    현재 폴더 ~/ros2_curri/my_agv_ws    |    현재 터미널</a:t>
             </a:r>
           </a:p>
         </p:txBody>
@@ -8855,8 +9503,8 @@
         </p:nvSpPr>
         <p:spPr>
           <a:xfrm>
-            <a:off x="676656" y="1764792"/>
-            <a:ext cx="1828800" cy="347472"/>
+            <a:off x="658368" y="1609344"/>
+            <a:ext cx="10972800" cy="384048"/>
           </a:xfrm>
           <a:prstGeom prst="rect">
             <a:avLst/>
@@ -8873,70 +9521,93 @@
               <a:spcAft>
                 <a:spcPts val="0"/>
               </a:spcAft>
-              <a:defRPr sz="1800" b="1">
-                <a:solidFill>
-                  <a:srgbClr val="225B9B"/>
-                </a:solidFill>
-                <a:latin typeface="Noto Sans CJK KR"/>
-              </a:defRPr>
-            </a:pPr>
-            <a:r>
-              <a:t>왜 하는가</a:t>
-            </a:r>
-          </a:p>
-        </p:txBody>
-      </p:sp>
-      <p:sp>
-        <p:nvSpPr>
-          <p:cNvPr id="8" name="TextBox 7"/>
-          <p:cNvSpPr txBox="1"/>
-          <p:nvPr/>
-        </p:nvSpPr>
-        <p:spPr>
-          <a:xfrm>
-            <a:off x="676656" y="2103120"/>
-            <a:ext cx="10789920" cy="512064"/>
-          </a:xfrm>
-          <a:prstGeom prst="rect">
-            <a:avLst/>
-          </a:prstGeom>
-          <a:noFill/>
-        </p:spPr>
-        <p:txBody>
-          <a:bodyPr wrap="square" lIns="73152" rIns="73152" tIns="36576" bIns="36576">
-            <a:spAutoFit/>
-          </a:bodyPr>
+              <a:defRPr sz="1400" b="1">
+                <a:solidFill>
+                  <a:srgbClr val="122C4E"/>
+                </a:solidFill>
+                <a:latin typeface="Noto Sans CJK KR"/>
+              </a:defRPr>
+            </a:pPr>
+            <a:r>
+              <a:t>이 블록이 하는 일: 파일의 root와 첫 model/link를 입력합니다. 태그 여닫는 순서를 그대로 유지합니다.</a:t>
+            </a:r>
+          </a:p>
+        </p:txBody>
+      </p:sp>
+      <p:sp>
+        <p:nvSpPr>
+          <p:cNvPr id="8" name="Rectangle 7"/>
+          <p:cNvSpPr/>
+          <p:nvPr/>
+        </p:nvSpPr>
+        <p:spPr>
+          <a:xfrm>
+            <a:off x="658368" y="1956816"/>
+            <a:ext cx="10972800" cy="603504"/>
+          </a:xfrm>
+          <a:prstGeom prst="rect">
+            <a:avLst/>
+          </a:prstGeom>
+          <a:solidFill>
+            <a:srgbClr val="F4F7FB"/>
+          </a:solidFill>
+          <a:ln>
+            <a:solidFill>
+              <a:srgbClr val="F4F7FB"/>
+            </a:solidFill>
+          </a:ln>
+        </p:spPr>
+        <p:style>
+          <a:lnRef idx="1">
+            <a:schemeClr val="accent1"/>
+          </a:lnRef>
+          <a:fillRef idx="3">
+            <a:schemeClr val="accent1"/>
+          </a:fillRef>
+          <a:effectRef idx="2">
+            <a:schemeClr val="accent1"/>
+          </a:effectRef>
+          <a:fontRef idx="minor">
+            <a:schemeClr val="lt1"/>
+          </a:fontRef>
+        </p:style>
+        <p:txBody>
+          <a:bodyPr rtlCol="0" anchor="ctr" wrap="square" lIns="73152" rIns="73152" tIns="36576" bIns="36576"/>
           <a:lstStyle/>
           <a:p>
             <a:pPr algn="l">
               <a:spcAft>
                 <a:spcPts val="0"/>
               </a:spcAft>
-              <a:defRPr sz="2000" b="0">
+              <a:defRPr sz="1300" b="0">
                 <a:solidFill>
                   <a:srgbClr val="122C4E"/>
                 </a:solidFill>
-                <a:latin typeface="Noto Sans CJK KR"/>
-              </a:defRPr>
-            </a:pPr>
-            <a:r>
-              <a:t>M05에서는 macro·property·xacro 없이 한 파일에 link와 joint를 직접 작성한다.</a:t>
-            </a:r>
-          </a:p>
-        </p:txBody>
-      </p:sp>
-      <p:sp>
-        <p:nvSpPr>
-          <p:cNvPr id="9" name="Rounded Rectangle 8"/>
+                <a:latin typeface="DejaVu Sans Mono"/>
+              </a:defRPr>
+            </a:pPr>
+            <a:r>
+              <a:t>현재 열린 파일: ~/ros2_curri/my_agv_ws/src/agv_description/curriculum_stages/M05/agv.urdf</a:t>
+            </a:r>
+            <a:br/>
+            <a:r>
+              <a:t>아래 코드만 입력 → Ctrl+O → Enter로 저장 → 다음 블록으로 이동</a:t>
+            </a:r>
+          </a:p>
+        </p:txBody>
+      </p:sp>
+      <p:sp>
+        <p:nvSpPr>
+          <p:cNvPr id="9" name="Rectangle 8"/>
           <p:cNvSpPr/>
           <p:nvPr/>
         </p:nvSpPr>
         <p:spPr>
           <a:xfrm>
-            <a:off x="676656" y="2871216"/>
-            <a:ext cx="10835640" cy="2331720"/>
-          </a:xfrm>
-          <a:prstGeom prst="roundRect">
+            <a:off x="658368" y="2706624"/>
+            <a:ext cx="10972800" cy="3364992"/>
+          </a:xfrm>
+          <a:prstGeom prst="rect">
             <a:avLst/>
           </a:prstGeom>
           <a:solidFill>
@@ -8963,14 +9634,14 @@
           </a:fontRef>
         </p:style>
         <p:txBody>
-          <a:bodyPr rtlCol="0" anchor="ctr" wrap="square" lIns="73152" rIns="73152" tIns="36576" bIns="36576"/>
+          <a:bodyPr rtlCol="0" anchor="ctr" wrap="square" lIns="164592" rIns="164592" tIns="109728" bIns="36576"/>
           <a:lstStyle/>
           <a:p>
             <a:pPr algn="l">
               <a:spcAft>
                 <a:spcPts val="0"/>
               </a:spcAft>
-              <a:defRPr sz="1600" b="0">
+              <a:defRPr sz="1400" b="0">
                 <a:solidFill>
                   <a:srgbClr val="FFFFFF"/>
                 </a:solidFill>
@@ -8978,11 +9649,51 @@
               </a:defRPr>
             </a:pPr>
             <a:r>
-              <a:t>cd ~/ros2_curri/my_agv_ws</a:t>
+              <a:t>&lt;?xml version="1.0"?&gt;</a:t>
             </a:r>
             <a:br/>
             <a:r>
-              <a:t>check_urdf src/agv_description/curriculum_stages/M05/agv.urdf</a:t>
+              <a:t>&lt;robot name="agv_m05"&gt;</a:t>
+            </a:r>
+            <a:br/>
+            <a:r>
+              <a:t>  &lt;link name="base_link"&gt;&lt;visual&gt;&lt;origin xyz="0 0 0.16"/&gt;&lt;geometry&gt;&lt;box size="0.60 0.42 0.16"/&gt;&lt;/geometry&gt;&lt;/visual&gt;&lt;/link&gt;</a:t>
+            </a:r>
+            <a:br/>
+            <a:r>
+              <a:t>  &lt;link name="left_wheel_link"&gt;&lt;visual&gt;&lt;origin rpy="1.5708 0 0"/&gt;&lt;geometry&gt;&lt;cylinder radius="0.08" length="0.05"/&gt;&lt;/geometry&gt;&lt;/visual&gt;&lt;/link&gt;</a:t>
+            </a:r>
+            <a:br/>
+            <a:r>
+              <a:t>  &lt;link name="right_wheel_link"&gt;&lt;visual&gt;&lt;origin rpy="1.5708 0 0"/&gt;&lt;geometry&gt;&lt;cylinder radius="0.08" length="0.05"/&gt;&lt;/geometry&gt;&lt;/visual&gt;&lt;/link&gt;</a:t>
+            </a:r>
+            <a:br/>
+            <a:r>
+              <a:t>  &lt;link name="caster_link"&gt;&lt;visual&gt;&lt;geometry&gt;&lt;sphere radius="0.04"/&gt;&lt;/geometry&gt;&lt;/visual&gt;&lt;/link&gt;</a:t>
+            </a:r>
+            <a:br/>
+            <a:r>
+              <a:t>  &lt;link name="camera_link"/&gt;&lt;link name="lidar_link"/&gt;&lt;link name="imu_link"/&gt;</a:t>
+            </a:r>
+            <a:br/>
+            <a:r>
+              <a:t>  &lt;joint name="left_wheel_joint" type="continuous"&gt;&lt;parent link="base_link"/&gt;&lt;child link="left_wheel_link"/&gt;&lt;origin xyz="0 0.19 0.08"/&gt;&lt;axis xyz="0 1 0"/&gt;&lt;/joint&gt;</a:t>
+            </a:r>
+            <a:br/>
+            <a:r>
+              <a:t>  &lt;joint name="right_wheel_joint" type="continuous"&gt;&lt;parent link="base_link"/&gt;&lt;child link="right_wheel_link"/&gt;&lt;origin xyz="0 -0.19 0.08"/&gt;&lt;axis xyz="0 1 0"/&gt;&lt;/joint&gt;</a:t>
+            </a:r>
+            <a:br/>
+            <a:r>
+              <a:t>  &lt;joint name="caster_joint" type="fixed"&gt;&lt;parent link="base_link"/&gt;&lt;child link="caster_link"/&gt;&lt;origin xyz="-0.24 0 0.04"/&gt;&lt;/joint&gt;</a:t>
+            </a:r>
+            <a:br/>
+            <a:r>
+              <a:t>  &lt;joint name="camera_joint" type="fixed"&gt;&lt;parent link="base_link"/&gt;&lt;child link="camera_link"/&gt;&lt;origin xyz="0.30 0 0.26"/&gt;&lt;/joint&gt;</a:t>
+            </a:r>
+            <a:br/>
+            <a:r>
+              <a:t>  &lt;joint name="lidar_joint" type="fixed"&gt;&lt;parent link="base_link"/&gt;&lt;child link="lidar_link"/&gt;&lt;origin xyz="0.12 0 0.29"/&gt;&lt;/joint&gt;</a:t>
             </a:r>
           </a:p>
         </p:txBody>
@@ -8995,8 +9706,8 @@
         </p:nvSpPr>
         <p:spPr>
           <a:xfrm>
-            <a:off x="768096" y="5468112"/>
-            <a:ext cx="1143000" cy="256032"/>
+            <a:off x="749808" y="6181344"/>
+            <a:ext cx="10789920" cy="201168"/>
           </a:xfrm>
           <a:prstGeom prst="rect">
             <a:avLst/>
@@ -9013,54 +9724,15 @@
               <a:spcAft>
                 <a:spcPts val="0"/>
               </a:spcAft>
-              <a:defRPr sz="1800" b="1">
-                <a:solidFill>
-                  <a:srgbClr val="2A8B5A"/>
-                </a:solidFill>
-                <a:latin typeface="Noto Sans CJK KR"/>
-              </a:defRPr>
-            </a:pPr>
-            <a:r>
-              <a:t>확인</a:t>
-            </a:r>
-          </a:p>
-        </p:txBody>
-      </p:sp>
-      <p:sp>
-        <p:nvSpPr>
-          <p:cNvPr id="11" name="TextBox 10"/>
-          <p:cNvSpPr txBox="1"/>
-          <p:nvPr/>
-        </p:nvSpPr>
-        <p:spPr>
-          <a:xfrm>
-            <a:off x="768096" y="5742432"/>
-            <a:ext cx="10561320" cy="347472"/>
-          </a:xfrm>
-          <a:prstGeom prst="rect">
-            <a:avLst/>
-          </a:prstGeom>
-          <a:noFill/>
-        </p:spPr>
-        <p:txBody>
-          <a:bodyPr wrap="square" lIns="73152" rIns="73152" tIns="36576" bIns="36576">
-            <a:spAutoFit/>
-          </a:bodyPr>
-          <a:lstStyle/>
-          <a:p>
-            <a:pPr algn="l">
-              <a:spcAft>
-                <a:spcPts val="0"/>
-              </a:spcAft>
-              <a:defRPr sz="1800" b="0">
-                <a:solidFill>
-                  <a:srgbClr val="122C4E"/>
-                </a:solidFill>
-                <a:latin typeface="Noto Sans CJK KR"/>
-              </a:defRPr>
-            </a:pPr>
-            <a:r>
-              <a:t>출력에서 topic·frame·파일 이름 또는 성공 메시지를 찾고, 맞지 않으면 다음 파일로 가지 않습니다.</a:t>
+              <a:defRPr sz="1000" b="0">
+                <a:solidFill>
+                  <a:srgbClr val="5C6672"/>
+                </a:solidFill>
+                <a:latin typeface="Noto Sans CJK KR"/>
+              </a:defRPr>
+            </a:pPr>
+            <a:r>
+              <a:t>입력 1/2 · 이 파일의 다음 코드 블록이 바로 다음 슬라이드에 이어집니다.</a:t>
             </a:r>
           </a:p>
         </p:txBody>
@@ -9117,7 +9789,7 @@
               </a:defRPr>
             </a:pPr>
             <a:r>
-              <a:t>구현 뒤 실행 2/2: RViz로 표시한다</a:t>
+              <a:t>구현 1/1: 코드 입력 (2/2)</a:t>
             </a:r>
           </a:p>
         </p:txBody>
@@ -9156,7 +9828,7 @@
               </a:defRPr>
             </a:pPr>
             <a:r>
-              <a:t>방금 직접 만든 파일을 실행·검사하며 다음 파일로 넘어갈 기준을 만듭니다.</a:t>
+              <a:t>~/ros2_curri/my_agv_ws/src/agv_description/curriculum_stages/M05/agv.urdf</a:t>
             </a:r>
           </a:p>
         </p:txBody>
@@ -9292,7 +9964,7 @@
               </a:defRPr>
             </a:pPr>
             <a:r>
-              <a:t>현재 단계 실행 2/2    |    현재 폴더 ~/ros2_curri/my_agv_ws    |    새 터미널</a:t>
+              <a:t>현재 단계 파일 1/1 · 입력 2/2    |    현재 폴더 ~/ros2_curri/my_agv_ws    |    현재 터미널</a:t>
             </a:r>
           </a:p>
         </p:txBody>
@@ -9305,8 +9977,8 @@
         </p:nvSpPr>
         <p:spPr>
           <a:xfrm>
-            <a:off x="676656" y="1764792"/>
-            <a:ext cx="1828800" cy="347472"/>
+            <a:off x="658368" y="1609344"/>
+            <a:ext cx="10972800" cy="384048"/>
           </a:xfrm>
           <a:prstGeom prst="rect">
             <a:avLst/>
@@ -9323,70 +9995,93 @@
               <a:spcAft>
                 <a:spcPts val="0"/>
               </a:spcAft>
-              <a:defRPr sz="1800" b="1">
-                <a:solidFill>
-                  <a:srgbClr val="225B9B"/>
-                </a:solidFill>
-                <a:latin typeface="Noto Sans CJK KR"/>
-              </a:defRPr>
-            </a:pPr>
-            <a:r>
-              <a:t>왜 하는가</a:t>
-            </a:r>
-          </a:p>
-        </p:txBody>
-      </p:sp>
-      <p:sp>
-        <p:nvSpPr>
-          <p:cNvPr id="8" name="TextBox 7"/>
-          <p:cNvSpPr txBox="1"/>
-          <p:nvPr/>
-        </p:nvSpPr>
-        <p:spPr>
-          <a:xfrm>
-            <a:off x="676656" y="2103120"/>
-            <a:ext cx="10789920" cy="512064"/>
-          </a:xfrm>
-          <a:prstGeom prst="rect">
-            <a:avLst/>
-          </a:prstGeom>
-          <a:noFill/>
-        </p:spPr>
-        <p:txBody>
-          <a:bodyPr wrap="square" lIns="73152" rIns="73152" tIns="36576" bIns="36576">
-            <a:spAutoFit/>
-          </a:bodyPr>
+              <a:defRPr sz="1400" b="1">
+                <a:solidFill>
+                  <a:srgbClr val="122C4E"/>
+                </a:solidFill>
+                <a:latin typeface="Noto Sans CJK KR"/>
+              </a:defRPr>
+            </a:pPr>
+            <a:r>
+              <a:t>이 블록이 하는 일: 마지막 joint·sensor·plugin과 닫는 태그를 입력해 구조를 완성합니다.</a:t>
+            </a:r>
+          </a:p>
+        </p:txBody>
+      </p:sp>
+      <p:sp>
+        <p:nvSpPr>
+          <p:cNvPr id="8" name="Rectangle 7"/>
+          <p:cNvSpPr/>
+          <p:nvPr/>
+        </p:nvSpPr>
+        <p:spPr>
+          <a:xfrm>
+            <a:off x="658368" y="1956816"/>
+            <a:ext cx="10972800" cy="603504"/>
+          </a:xfrm>
+          <a:prstGeom prst="rect">
+            <a:avLst/>
+          </a:prstGeom>
+          <a:solidFill>
+            <a:srgbClr val="F4F7FB"/>
+          </a:solidFill>
+          <a:ln>
+            <a:solidFill>
+              <a:srgbClr val="F4F7FB"/>
+            </a:solidFill>
+          </a:ln>
+        </p:spPr>
+        <p:style>
+          <a:lnRef idx="1">
+            <a:schemeClr val="accent1"/>
+          </a:lnRef>
+          <a:fillRef idx="3">
+            <a:schemeClr val="accent1"/>
+          </a:fillRef>
+          <a:effectRef idx="2">
+            <a:schemeClr val="accent1"/>
+          </a:effectRef>
+          <a:fontRef idx="minor">
+            <a:schemeClr val="lt1"/>
+          </a:fontRef>
+        </p:style>
+        <p:txBody>
+          <a:bodyPr rtlCol="0" anchor="ctr" wrap="square" lIns="73152" rIns="73152" tIns="36576" bIns="36576"/>
           <a:lstStyle/>
           <a:p>
             <a:pPr algn="l">
               <a:spcAft>
                 <a:spcPts val="0"/>
               </a:spcAft>
-              <a:defRPr sz="2000" b="0">
+              <a:defRPr sz="1300" b="0">
                 <a:solidFill>
                   <a:srgbClr val="122C4E"/>
                 </a:solidFill>
-                <a:latin typeface="Noto Sans CJK KR"/>
-              </a:defRPr>
-            </a:pPr>
-            <a:r>
-              <a:t>RobotModel에는 단일 URDF 텍스트를 robot_description으로 넣고 TF를 함께 확인한다.</a:t>
-            </a:r>
-          </a:p>
-        </p:txBody>
-      </p:sp>
-      <p:sp>
-        <p:nvSpPr>
-          <p:cNvPr id="9" name="Rounded Rectangle 8"/>
+                <a:latin typeface="DejaVu Sans Mono"/>
+              </a:defRPr>
+            </a:pPr>
+            <a:r>
+              <a:t>현재 열린 파일: ~/ros2_curri/my_agv_ws/src/agv_description/curriculum_stages/M05/agv.urdf</a:t>
+            </a:r>
+            <a:br/>
+            <a:r>
+              <a:t>아래 코드만 입력 → Ctrl+O → Enter로 저장 → 다음 블록으로 이동</a:t>
+            </a:r>
+          </a:p>
+        </p:txBody>
+      </p:sp>
+      <p:sp>
+        <p:nvSpPr>
+          <p:cNvPr id="9" name="Rectangle 8"/>
           <p:cNvSpPr/>
           <p:nvPr/>
         </p:nvSpPr>
         <p:spPr>
           <a:xfrm>
-            <a:off x="676656" y="2871216"/>
-            <a:ext cx="10835640" cy="2331720"/>
-          </a:xfrm>
-          <a:prstGeom prst="roundRect">
+            <a:off x="658368" y="2706624"/>
+            <a:ext cx="10972800" cy="3364992"/>
+          </a:xfrm>
+          <a:prstGeom prst="rect">
             <a:avLst/>
           </a:prstGeom>
           <a:solidFill>
@@ -9413,14 +10108,14 @@
           </a:fontRef>
         </p:style>
         <p:txBody>
-          <a:bodyPr rtlCol="0" anchor="ctr" wrap="square" lIns="73152" rIns="73152" tIns="36576" bIns="36576"/>
+          <a:bodyPr rtlCol="0" anchor="ctr" wrap="square" lIns="164592" rIns="164592" tIns="109728" bIns="36576"/>
           <a:lstStyle/>
           <a:p>
             <a:pPr algn="l">
               <a:spcAft>
                 <a:spcPts val="0"/>
               </a:spcAft>
-              <a:defRPr sz="1600" b="0">
+              <a:defRPr sz="1400" b="0">
                 <a:solidFill>
                   <a:srgbClr val="FFFFFF"/>
                 </a:solidFill>
@@ -9428,15 +10123,11 @@
               </a:defRPr>
             </a:pPr>
             <a:r>
-              <a:t>ros2 run robot_state_publisher robot_state_publisher \</a:t>
+              <a:t>  &lt;joint name="imu_joint" type="fixed"&gt;&lt;parent link="base_link"/&gt;&lt;child link="imu_link"/&gt;&lt;origin xyz="0 0 0.28"/&gt;&lt;/joint&gt;</a:t>
             </a:r>
             <a:br/>
             <a:r>
-              <a:t>  --ros-args -p robot_description:="$(cat src/agv_description/curriculum_stages/M05/agv.urdf)"</a:t>
-            </a:r>
-            <a:br/>
-            <a:r>
-              <a:t># 새 터미널: rviz2 → Add → RobotModel, TF</a:t>
+              <a:t>&lt;/robot&gt;</a:t>
             </a:r>
           </a:p>
         </p:txBody>
@@ -9449,8 +10140,8 @@
         </p:nvSpPr>
         <p:spPr>
           <a:xfrm>
-            <a:off x="768096" y="5468112"/>
-            <a:ext cx="1143000" cy="256032"/>
+            <a:off x="749808" y="6181344"/>
+            <a:ext cx="10789920" cy="201168"/>
           </a:xfrm>
           <a:prstGeom prst="rect">
             <a:avLst/>
@@ -9467,54 +10158,15 @@
               <a:spcAft>
                 <a:spcPts val="0"/>
               </a:spcAft>
-              <a:defRPr sz="1800" b="1">
-                <a:solidFill>
-                  <a:srgbClr val="2A8B5A"/>
-                </a:solidFill>
-                <a:latin typeface="Noto Sans CJK KR"/>
-              </a:defRPr>
-            </a:pPr>
-            <a:r>
-              <a:t>확인</a:t>
-            </a:r>
-          </a:p>
-        </p:txBody>
-      </p:sp>
-      <p:sp>
-        <p:nvSpPr>
-          <p:cNvPr id="11" name="TextBox 10"/>
-          <p:cNvSpPr txBox="1"/>
-          <p:nvPr/>
-        </p:nvSpPr>
-        <p:spPr>
-          <a:xfrm>
-            <a:off x="768096" y="5742432"/>
-            <a:ext cx="10561320" cy="347472"/>
-          </a:xfrm>
-          <a:prstGeom prst="rect">
-            <a:avLst/>
-          </a:prstGeom>
-          <a:noFill/>
-        </p:spPr>
-        <p:txBody>
-          <a:bodyPr wrap="square" lIns="73152" rIns="73152" tIns="36576" bIns="36576">
-            <a:spAutoFit/>
-          </a:bodyPr>
-          <a:lstStyle/>
-          <a:p>
-            <a:pPr algn="l">
-              <a:spcAft>
-                <a:spcPts val="0"/>
-              </a:spcAft>
-              <a:defRPr sz="1800" b="0">
-                <a:solidFill>
-                  <a:srgbClr val="122C4E"/>
-                </a:solidFill>
-                <a:latin typeface="Noto Sans CJK KR"/>
-              </a:defRPr>
-            </a:pPr>
-            <a:r>
-              <a:t>출력에서 topic·frame·파일 이름 또는 성공 메시지를 찾고, 맞지 않으면 다음 파일로 가지 않습니다.</a:t>
+              <a:defRPr sz="1000" b="0">
+                <a:solidFill>
+                  <a:srgbClr val="5C6672"/>
+                </a:solidFill>
+                <a:latin typeface="Noto Sans CJK KR"/>
+              </a:defRPr>
+            </a:pPr>
+            <a:r>
+              <a:t>입력 2/2 · 이 파일의 다음 코드 블록이 바로 다음 슬라이드에 이어집니다.</a:t>
             </a:r>
           </a:p>
         </p:txBody>
@@ -9571,7 +10223,7 @@
               </a:defRPr>
             </a:pPr>
             <a:r>
-              <a:t>build → source → run 순서로 실행한다</a:t>
+              <a:t>구현 뒤 실행 1/2: 단일 URDF를 검사한다</a:t>
             </a:r>
           </a:p>
         </p:txBody>
@@ -9610,7 +10262,7 @@
               </a:defRPr>
             </a:pPr>
             <a:r>
-              <a:t>새 파일 또는 수정 파일은 build와 source 뒤에만 실행 이름·설정에 반영됩니다.</a:t>
+              <a:t>방금 직접 만든 파일을 실행·검사하며 다음 파일로 넘어갈 기준을 만듭니다.</a:t>
             </a:r>
           </a:p>
         </p:txBody>
@@ -9746,21 +10398,99 @@
               </a:defRPr>
             </a:pPr>
             <a:r>
-              <a:t>현재 단계 실행    |    현재 폴더 ~/ros2_curri/my_agv_ws    |    현재 터미널</a:t>
-            </a:r>
-          </a:p>
-        </p:txBody>
-      </p:sp>
-      <p:sp>
-        <p:nvSpPr>
-          <p:cNvPr id="7" name="Rounded Rectangle 6"/>
+              <a:t>현재 단계 실행 1/2    |    현재 폴더 ~/ros2_curri/my_agv_ws    |    현재 터미널</a:t>
+            </a:r>
+          </a:p>
+        </p:txBody>
+      </p:sp>
+      <p:sp>
+        <p:nvSpPr>
+          <p:cNvPr id="7" name="TextBox 6"/>
+          <p:cNvSpPr txBox="1"/>
+          <p:nvPr/>
+        </p:nvSpPr>
+        <p:spPr>
+          <a:xfrm>
+            <a:off x="676656" y="1764792"/>
+            <a:ext cx="1828800" cy="347472"/>
+          </a:xfrm>
+          <a:prstGeom prst="rect">
+            <a:avLst/>
+          </a:prstGeom>
+          <a:noFill/>
+        </p:spPr>
+        <p:txBody>
+          <a:bodyPr wrap="square" lIns="73152" rIns="73152" tIns="36576" bIns="36576">
+            <a:spAutoFit/>
+          </a:bodyPr>
+          <a:lstStyle/>
+          <a:p>
+            <a:pPr algn="l">
+              <a:spcAft>
+                <a:spcPts val="0"/>
+              </a:spcAft>
+              <a:defRPr sz="1800" b="1">
+                <a:solidFill>
+                  <a:srgbClr val="225B9B"/>
+                </a:solidFill>
+                <a:latin typeface="Noto Sans CJK KR"/>
+              </a:defRPr>
+            </a:pPr>
+            <a:r>
+              <a:t>왜 하는가</a:t>
+            </a:r>
+          </a:p>
+        </p:txBody>
+      </p:sp>
+      <p:sp>
+        <p:nvSpPr>
+          <p:cNvPr id="8" name="TextBox 7"/>
+          <p:cNvSpPr txBox="1"/>
+          <p:nvPr/>
+        </p:nvSpPr>
+        <p:spPr>
+          <a:xfrm>
+            <a:off x="676656" y="2103120"/>
+            <a:ext cx="10789920" cy="512064"/>
+          </a:xfrm>
+          <a:prstGeom prst="rect">
+            <a:avLst/>
+          </a:prstGeom>
+          <a:noFill/>
+        </p:spPr>
+        <p:txBody>
+          <a:bodyPr wrap="square" lIns="73152" rIns="73152" tIns="36576" bIns="36576">
+            <a:spAutoFit/>
+          </a:bodyPr>
+          <a:lstStyle/>
+          <a:p>
+            <a:pPr algn="l">
+              <a:spcAft>
+                <a:spcPts val="0"/>
+              </a:spcAft>
+              <a:defRPr sz="2000" b="0">
+                <a:solidFill>
+                  <a:srgbClr val="122C4E"/>
+                </a:solidFill>
+                <a:latin typeface="Noto Sans CJK KR"/>
+              </a:defRPr>
+            </a:pPr>
+            <a:r>
+              <a:t>M05에서는 macro·property·xacro 없이 한 파일에 link와 joint를 직접 작성한다.</a:t>
+            </a:r>
+          </a:p>
+        </p:txBody>
+      </p:sp>
+      <p:sp>
+        <p:nvSpPr>
+          <p:cNvPr id="9" name="Rounded Rectangle 8"/>
           <p:cNvSpPr/>
           <p:nvPr/>
         </p:nvSpPr>
         <p:spPr>
           <a:xfrm>
-            <a:off x="658368" y="1700784"/>
-            <a:ext cx="10972800" cy="3182112"/>
+            <a:off x="676656" y="2871216"/>
+            <a:ext cx="10835640" cy="2331720"/>
           </a:xfrm>
           <a:prstGeom prst="roundRect">
             <a:avLst/>
@@ -9810,23 +10540,19 @@
             <a:r>
               <a:t>check_urdf src/agv_description/curriculum_stages/M05/agv.urdf</a:t>
             </a:r>
-            <a:br/>
-            <a:r>
-              <a:t># 다음 M06에서 처음으로 xacro를 사용한다.</a:t>
-            </a:r>
-          </a:p>
-        </p:txBody>
-      </p:sp>
-      <p:sp>
-        <p:nvSpPr>
-          <p:cNvPr id="8" name="TextBox 7"/>
-          <p:cNvSpPr txBox="1"/>
-          <p:nvPr/>
-        </p:nvSpPr>
-        <p:spPr>
-          <a:xfrm>
-            <a:off x="786384" y="5239512"/>
-            <a:ext cx="1261872" cy="237744"/>
+          </a:p>
+        </p:txBody>
+      </p:sp>
+      <p:sp>
+        <p:nvSpPr>
+          <p:cNvPr id="10" name="TextBox 9"/>
+          <p:cNvSpPr txBox="1"/>
+          <p:nvPr/>
+        </p:nvSpPr>
+        <p:spPr>
+          <a:xfrm>
+            <a:off x="768096" y="5468112"/>
+            <a:ext cx="1143000" cy="256032"/>
           </a:xfrm>
           <a:prstGeom prst="rect">
             <a:avLst/>
@@ -9851,21 +10577,21 @@
               </a:defRPr>
             </a:pPr>
             <a:r>
-              <a:t>확인 기준</a:t>
-            </a:r>
-          </a:p>
-        </p:txBody>
-      </p:sp>
-      <p:sp>
-        <p:nvSpPr>
-          <p:cNvPr id="9" name="TextBox 8"/>
-          <p:cNvSpPr txBox="1"/>
-          <p:nvPr/>
-        </p:nvSpPr>
-        <p:spPr>
-          <a:xfrm>
-            <a:off x="786384" y="5532120"/>
-            <a:ext cx="10469880" cy="420624"/>
+              <a:t>확인</a:t>
+            </a:r>
+          </a:p>
+        </p:txBody>
+      </p:sp>
+      <p:sp>
+        <p:nvSpPr>
+          <p:cNvPr id="11" name="TextBox 10"/>
+          <p:cNvSpPr txBox="1"/>
+          <p:nvPr/>
+        </p:nvSpPr>
+        <p:spPr>
+          <a:xfrm>
+            <a:off x="768096" y="5742432"/>
+            <a:ext cx="10561320" cy="347472"/>
           </a:xfrm>
           <a:prstGeom prst="rect">
             <a:avLst/>
@@ -9890,7 +10616,7 @@
               </a:defRPr>
             </a:pPr>
             <a:r>
-              <a:t>RobotModel과 TF에서 base, 두 wheel, camera, lidar, imu 연결을 확인한다.</a:t>
+              <a:t>출력에서 topic·frame·파일 이름 또는 성공 메시지를 찾고, 맞지 않으면 다음 파일로 가지 않습니다.</a:t>
             </a:r>
           </a:p>
         </p:txBody>
@@ -9947,7 +10673,7 @@
               </a:defRPr>
             </a:pPr>
             <a:r>
-              <a:t>정상 결과: 실제 환경에서 확인한 출력</a:t>
+              <a:t>구현 뒤 실행 2/2: RViz로 표시한다</a:t>
             </a:r>
           </a:p>
         </p:txBody>
@@ -9986,7 +10712,7 @@
               </a:defRPr>
             </a:pPr>
             <a:r>
-              <a:t>실제 ROS 2 환경의 파일·패키지·구성 검증 로그</a:t>
+              <a:t>방금 직접 만든 파일을 실행·검사하며 다음 파일로 넘어갈 기준을 만듭니다.</a:t>
             </a:r>
           </a:p>
         </p:txBody>
@@ -10069,30 +10795,64 @@
           </a:p>
         </p:txBody>
       </p:sp>
-      <p:pic>
-        <p:nvPicPr>
-          <p:cNvPr id="6" name="Picture 5" descr="validation_terminal.png"/>
-          <p:cNvPicPr>
-            <a:picLocks noChangeAspect="1"/>
-          </p:cNvPicPr>
-          <p:nvPr/>
-        </p:nvPicPr>
-        <p:blipFill>
-          <a:blip r:embed="rId2"/>
-          <a:stretch>
-            <a:fillRect/>
-          </a:stretch>
-        </p:blipFill>
-        <p:spPr>
-          <a:xfrm>
-            <a:off x="790956" y="1884338"/>
-            <a:ext cx="10607040" cy="3738546"/>
-          </a:xfrm>
-          <a:prstGeom prst="rect">
-            <a:avLst/>
-          </a:prstGeom>
-        </p:spPr>
-      </p:pic>
+      <p:sp>
+        <p:nvSpPr>
+          <p:cNvPr id="6" name="Rectangle 5"/>
+          <p:cNvSpPr/>
+          <p:nvPr/>
+        </p:nvSpPr>
+        <p:spPr>
+          <a:xfrm>
+            <a:off x="566928" y="1188720"/>
+            <a:ext cx="11064240" cy="347472"/>
+          </a:xfrm>
+          <a:prstGeom prst="rect">
+            <a:avLst/>
+          </a:prstGeom>
+          <a:solidFill>
+            <a:srgbClr val="F4F7FB"/>
+          </a:solidFill>
+          <a:ln>
+            <a:solidFill>
+              <a:srgbClr val="F4F7FB"/>
+            </a:solidFill>
+          </a:ln>
+        </p:spPr>
+        <p:style>
+          <a:lnRef idx="1">
+            <a:schemeClr val="accent1"/>
+          </a:lnRef>
+          <a:fillRef idx="3">
+            <a:schemeClr val="accent1"/>
+          </a:fillRef>
+          <a:effectRef idx="2">
+            <a:schemeClr val="accent1"/>
+          </a:effectRef>
+          <a:fontRef idx="minor">
+            <a:schemeClr val="lt1"/>
+          </a:fontRef>
+        </p:style>
+        <p:txBody>
+          <a:bodyPr rtlCol="0" anchor="ctr" wrap="square" lIns="73152" rIns="73152" tIns="36576" bIns="36576"/>
+          <a:lstStyle/>
+          <a:p>
+            <a:pPr algn="l">
+              <a:spcAft>
+                <a:spcPts val="0"/>
+              </a:spcAft>
+              <a:defRPr sz="1300" b="1">
+                <a:solidFill>
+                  <a:srgbClr val="122C4E"/>
+                </a:solidFill>
+                <a:latin typeface="Noto Sans CJK KR"/>
+              </a:defRPr>
+            </a:pPr>
+            <a:r>
+              <a:t>현재 단계 실행 2/2    |    현재 폴더 ~/ros2_curri/my_agv_ws    |    새 터미널</a:t>
+            </a:r>
+          </a:p>
+        </p:txBody>
+      </p:sp>
       <p:sp>
         <p:nvSpPr>
           <p:cNvPr id="7" name="TextBox 6"/>
@@ -10101,25 +10861,169 @@
         </p:nvSpPr>
         <p:spPr>
           <a:xfrm>
-            <a:off x="777240" y="6144768"/>
-            <a:ext cx="10607040" cy="310896"/>
-          </a:xfrm>
-          <a:prstGeom prst="rect">
-            <a:avLst/>
-          </a:prstGeom>
-          <a:noFill/>
-        </p:spPr>
-        <p:txBody>
-          <a:bodyPr wrap="square" lIns="73152" rIns="73152" tIns="36576" bIns="36576">
-            <a:spAutoFit/>
-          </a:bodyPr>
-          <a:lstStyle/>
-          <a:p>
-            <a:pPr algn="ctr">
-              <a:spcAft>
-                <a:spcPts val="0"/>
-              </a:spcAft>
-              <a:defRPr sz="1100" b="1">
+            <a:off x="676656" y="1764792"/>
+            <a:ext cx="1828800" cy="347472"/>
+          </a:xfrm>
+          <a:prstGeom prst="rect">
+            <a:avLst/>
+          </a:prstGeom>
+          <a:noFill/>
+        </p:spPr>
+        <p:txBody>
+          <a:bodyPr wrap="square" lIns="73152" rIns="73152" tIns="36576" bIns="36576">
+            <a:spAutoFit/>
+          </a:bodyPr>
+          <a:lstStyle/>
+          <a:p>
+            <a:pPr algn="l">
+              <a:spcAft>
+                <a:spcPts val="0"/>
+              </a:spcAft>
+              <a:defRPr sz="1800" b="1">
+                <a:solidFill>
+                  <a:srgbClr val="225B9B"/>
+                </a:solidFill>
+                <a:latin typeface="Noto Sans CJK KR"/>
+              </a:defRPr>
+            </a:pPr>
+            <a:r>
+              <a:t>왜 하는가</a:t>
+            </a:r>
+          </a:p>
+        </p:txBody>
+      </p:sp>
+      <p:sp>
+        <p:nvSpPr>
+          <p:cNvPr id="8" name="TextBox 7"/>
+          <p:cNvSpPr txBox="1"/>
+          <p:nvPr/>
+        </p:nvSpPr>
+        <p:spPr>
+          <a:xfrm>
+            <a:off x="676656" y="2103120"/>
+            <a:ext cx="10789920" cy="512064"/>
+          </a:xfrm>
+          <a:prstGeom prst="rect">
+            <a:avLst/>
+          </a:prstGeom>
+          <a:noFill/>
+        </p:spPr>
+        <p:txBody>
+          <a:bodyPr wrap="square" lIns="73152" rIns="73152" tIns="36576" bIns="36576">
+            <a:spAutoFit/>
+          </a:bodyPr>
+          <a:lstStyle/>
+          <a:p>
+            <a:pPr algn="l">
+              <a:spcAft>
+                <a:spcPts val="0"/>
+              </a:spcAft>
+              <a:defRPr sz="2000" b="0">
+                <a:solidFill>
+                  <a:srgbClr val="122C4E"/>
+                </a:solidFill>
+                <a:latin typeface="Noto Sans CJK KR"/>
+              </a:defRPr>
+            </a:pPr>
+            <a:r>
+              <a:t>RobotModel에는 단일 URDF 텍스트를 robot_description으로 넣고 TF를 함께 확인한다.</a:t>
+            </a:r>
+          </a:p>
+        </p:txBody>
+      </p:sp>
+      <p:sp>
+        <p:nvSpPr>
+          <p:cNvPr id="9" name="Rounded Rectangle 8"/>
+          <p:cNvSpPr/>
+          <p:nvPr/>
+        </p:nvSpPr>
+        <p:spPr>
+          <a:xfrm>
+            <a:off x="676656" y="2871216"/>
+            <a:ext cx="10835640" cy="2331720"/>
+          </a:xfrm>
+          <a:prstGeom prst="roundRect">
+            <a:avLst/>
+          </a:prstGeom>
+          <a:solidFill>
+            <a:srgbClr val="1D232D"/>
+          </a:solidFill>
+          <a:ln>
+            <a:solidFill>
+              <a:srgbClr val="1D232D"/>
+            </a:solidFill>
+          </a:ln>
+        </p:spPr>
+        <p:style>
+          <a:lnRef idx="1">
+            <a:schemeClr val="accent1"/>
+          </a:lnRef>
+          <a:fillRef idx="3">
+            <a:schemeClr val="accent1"/>
+          </a:fillRef>
+          <a:effectRef idx="2">
+            <a:schemeClr val="accent1"/>
+          </a:effectRef>
+          <a:fontRef idx="minor">
+            <a:schemeClr val="lt1"/>
+          </a:fontRef>
+        </p:style>
+        <p:txBody>
+          <a:bodyPr rtlCol="0" anchor="ctr" wrap="square" lIns="73152" rIns="73152" tIns="36576" bIns="36576"/>
+          <a:lstStyle/>
+          <a:p>
+            <a:pPr algn="l">
+              <a:spcAft>
+                <a:spcPts val="0"/>
+              </a:spcAft>
+              <a:defRPr sz="1600" b="0">
+                <a:solidFill>
+                  <a:srgbClr val="FFFFFF"/>
+                </a:solidFill>
+                <a:latin typeface="DejaVu Sans Mono"/>
+              </a:defRPr>
+            </a:pPr>
+            <a:r>
+              <a:t>ros2 run robot_state_publisher robot_state_publisher \</a:t>
+            </a:r>
+            <a:br/>
+            <a:r>
+              <a:t>  --ros-args -p robot_description:="$(cat src/agv_description/curriculum_stages/M05/agv.urdf)"</a:t>
+            </a:r>
+            <a:br/>
+            <a:r>
+              <a:t># 새 터미널: rviz2 → Add → RobotModel, TF</a:t>
+            </a:r>
+          </a:p>
+        </p:txBody>
+      </p:sp>
+      <p:sp>
+        <p:nvSpPr>
+          <p:cNvPr id="10" name="TextBox 9"/>
+          <p:cNvSpPr txBox="1"/>
+          <p:nvPr/>
+        </p:nvSpPr>
+        <p:spPr>
+          <a:xfrm>
+            <a:off x="768096" y="5468112"/>
+            <a:ext cx="1143000" cy="256032"/>
+          </a:xfrm>
+          <a:prstGeom prst="rect">
+            <a:avLst/>
+          </a:prstGeom>
+          <a:noFill/>
+        </p:spPr>
+        <p:txBody>
+          <a:bodyPr wrap="square" lIns="73152" rIns="73152" tIns="36576" bIns="36576">
+            <a:spAutoFit/>
+          </a:bodyPr>
+          <a:lstStyle/>
+          <a:p>
+            <a:pPr algn="l">
+              <a:spcAft>
+                <a:spcPts val="0"/>
+              </a:spcAft>
+              <a:defRPr sz="1800" b="1">
                 <a:solidFill>
                   <a:srgbClr val="2A8B5A"/>
                 </a:solidFill>
@@ -10127,7 +11031,46 @@
               </a:defRPr>
             </a:pPr>
             <a:r>
-              <a:t>화면에서 확인: ① 명령/설정  ② 정상 출력 또는 화면  ③ 다음 검증 명령으로 재확인</a:t>
+              <a:t>확인</a:t>
+            </a:r>
+          </a:p>
+        </p:txBody>
+      </p:sp>
+      <p:sp>
+        <p:nvSpPr>
+          <p:cNvPr id="11" name="TextBox 10"/>
+          <p:cNvSpPr txBox="1"/>
+          <p:nvPr/>
+        </p:nvSpPr>
+        <p:spPr>
+          <a:xfrm>
+            <a:off x="768096" y="5742432"/>
+            <a:ext cx="10561320" cy="347472"/>
+          </a:xfrm>
+          <a:prstGeom prst="rect">
+            <a:avLst/>
+          </a:prstGeom>
+          <a:noFill/>
+        </p:spPr>
+        <p:txBody>
+          <a:bodyPr wrap="square" lIns="73152" rIns="73152" tIns="36576" bIns="36576">
+            <a:spAutoFit/>
+          </a:bodyPr>
+          <a:lstStyle/>
+          <a:p>
+            <a:pPr algn="l">
+              <a:spcAft>
+                <a:spcPts val="0"/>
+              </a:spcAft>
+              <a:defRPr sz="1800" b="0">
+                <a:solidFill>
+                  <a:srgbClr val="122C4E"/>
+                </a:solidFill>
+                <a:latin typeface="Noto Sans CJK KR"/>
+              </a:defRPr>
+            </a:pPr>
+            <a:r>
+              <a:t>출력에서 topic·frame·파일 이름 또는 성공 메시지를 찾고, 맞지 않으면 다음 파일로 가지 않습니다.</a:t>
             </a:r>
           </a:p>
         </p:txBody>
@@ -10184,7 +11127,7 @@
               </a:defRPr>
             </a:pPr>
             <a:r>
-              <a:t>객관적 검증 명령으로 완료를 확인한다</a:t>
+              <a:t>build → source → run 순서로 실행한다</a:t>
             </a:r>
           </a:p>
         </p:txBody>
@@ -10223,7 +11166,7 @@
               </a:defRPr>
             </a:pPr>
             <a:r>
-              <a:t>화면만 보지 말고 topic·frame·파일·parameter를 다시 확인합니다.</a:t>
+              <a:t>새 파일 또는 수정 파일은 build와 source 뒤에만 실행 이름·설정에 반영됩니다.</a:t>
             </a:r>
           </a:p>
         </p:txBody>
@@ -10359,7 +11302,7 @@
               </a:defRPr>
             </a:pPr>
             <a:r>
-              <a:t>현재 단계 검증    |    현재 폴더 ~/ros2_curri/my_agv_ws    |    현재 터미널</a:t>
+              <a:t>현재 단계 실행    |    현재 폴더 ~/ros2_curri/my_agv_ws    |    현재 터미널</a:t>
             </a:r>
           </a:p>
         </p:txBody>
@@ -10372,8 +11315,8 @@
         </p:nvSpPr>
         <p:spPr>
           <a:xfrm>
-            <a:off x="658368" y="1755648"/>
-            <a:ext cx="10972800" cy="2148840"/>
+            <a:off x="658368" y="1700784"/>
+            <a:ext cx="10972800" cy="3182112"/>
           </a:xfrm>
           <a:prstGeom prst="roundRect">
             <a:avLst/>
@@ -10417,54 +11360,39 @@
               </a:defRPr>
             </a:pPr>
             <a:r>
-              <a:t>check_urdf ~/ros2_curri/my_agv_ws/src/agv_description/curriculum_stages/M05/agv.urdf</a:t>
+              <a:t>cd ~/ros2_curri/my_agv_ws</a:t>
             </a:r>
             <a:br/>
             <a:r>
-              <a:t>rg -n '&lt;xacro:|&lt;link |&lt;joint ' ~/ros2_curri/my_agv_ws/src/agv_description/curriculum_stages/M05/agv.urdf</a:t>
-            </a:r>
-          </a:p>
-        </p:txBody>
-      </p:sp>
-      <p:sp>
-        <p:nvSpPr>
-          <p:cNvPr id="8" name="Rounded Rectangle 7"/>
-          <p:cNvSpPr/>
-          <p:nvPr/>
-        </p:nvSpPr>
-        <p:spPr>
-          <a:xfrm>
-            <a:off x="658368" y="4206240"/>
-            <a:ext cx="10972800" cy="1554480"/>
-          </a:xfrm>
-          <a:prstGeom prst="roundRect">
-            <a:avLst/>
-          </a:prstGeom>
-          <a:solidFill>
-            <a:srgbClr val="F4F7FB"/>
-          </a:solidFill>
-          <a:ln>
-            <a:solidFill>
-              <a:srgbClr val="D1DFD5"/>
-            </a:solidFill>
-          </a:ln>
-        </p:spPr>
-        <p:style>
-          <a:lnRef idx="1">
-            <a:schemeClr val="accent1"/>
-          </a:lnRef>
-          <a:fillRef idx="3">
-            <a:schemeClr val="accent1"/>
-          </a:fillRef>
-          <a:effectRef idx="2">
-            <a:schemeClr val="accent1"/>
-          </a:effectRef>
-          <a:fontRef idx="minor">
-            <a:schemeClr val="lt1"/>
-          </a:fontRef>
-        </p:style>
-        <p:txBody>
-          <a:bodyPr rtlCol="0" anchor="ctr" wrap="square" lIns="73152" rIns="73152" tIns="36576" bIns="36576"/>
+              <a:t>check_urdf src/agv_description/curriculum_stages/M05/agv.urdf</a:t>
+            </a:r>
+            <a:br/>
+            <a:r>
+              <a:t># 다음 M06에서 처음으로 xacro를 사용한다.</a:t>
+            </a:r>
+          </a:p>
+        </p:txBody>
+      </p:sp>
+      <p:sp>
+        <p:nvSpPr>
+          <p:cNvPr id="8" name="TextBox 7"/>
+          <p:cNvSpPr txBox="1"/>
+          <p:nvPr/>
+        </p:nvSpPr>
+        <p:spPr>
+          <a:xfrm>
+            <a:off x="786384" y="5239512"/>
+            <a:ext cx="1261872" cy="237744"/>
+          </a:xfrm>
+          <a:prstGeom prst="rect">
+            <a:avLst/>
+          </a:prstGeom>
+          <a:noFill/>
+        </p:spPr>
+        <p:txBody>
+          <a:bodyPr wrap="square" lIns="73152" rIns="73152" tIns="36576" bIns="36576">
+            <a:spAutoFit/>
+          </a:bodyPr>
           <a:lstStyle/>
           <a:p>
             <a:pPr algn="l">
@@ -10479,19 +11407,7 @@
               </a:defRPr>
             </a:pPr>
             <a:r>
-              <a:t>완료 체크</a:t>
-            </a:r>
-            <a:br/>
-            <a:r>
-              <a:t>□ 명령이 오류 없이 실행된다.</a:t>
-            </a:r>
-            <a:br/>
-            <a:r>
-              <a:t>□ 기대한 파일·topic·frame·parameter 이름이 보인다.</a:t>
-            </a:r>
-            <a:br/>
-            <a:r>
-              <a:t>□ 값의 단위와 방향을 한 문장으로 설명할 수 있다.</a:t>
+              <a:t>확인 기준</a:t>
             </a:r>
           </a:p>
         </p:txBody>
@@ -10504,8 +11420,8 @@
         </p:nvSpPr>
         <p:spPr>
           <a:xfrm>
-            <a:off x="731520" y="5989320"/>
-            <a:ext cx="10789920" cy="237744"/>
+            <a:off x="786384" y="5532120"/>
+            <a:ext cx="10469880" cy="420624"/>
           </a:xfrm>
           <a:prstGeom prst="rect">
             <a:avLst/>
@@ -10522,7 +11438,7 @@
               <a:spcAft>
                 <a:spcPts val="0"/>
               </a:spcAft>
-              <a:defRPr sz="1500" b="1">
+              <a:defRPr sz="1800" b="0">
                 <a:solidFill>
                   <a:srgbClr val="122C4E"/>
                 </a:solidFill>
@@ -10530,7 +11446,7 @@
               </a:defRPr>
             </a:pPr>
             <a:r>
-              <a:t>완료 조건: RobotModel과 TF에서 base, 두 wheel, camera, lidar, imu 연결을 확인한다.</a:t>
+              <a:t>RobotModel과 TF에서 base, 두 wheel, camera, lidar, imu 연결을 확인한다.</a:t>
             </a:r>
           </a:p>
         </p:txBody>
@@ -11048,7 +11964,7 @@
               </a:defRPr>
             </a:pPr>
             <a:r>
-              <a:t>막히면: 증상 → 우선 확인 → 재검증</a:t>
+              <a:t>정상 결과: 실제 환경에서 확인한 출력</a:t>
             </a:r>
           </a:p>
         </p:txBody>
@@ -11087,7 +12003,7 @@
               </a:defRPr>
             </a:pPr>
             <a:r>
-              <a:t>오류 메시지를 숨기지 않고 같은 순서로 점검합니다.</a:t>
+              <a:t>실제 ROS 2 환경의 파일·패키지·구성 검증 로그</a:t>
             </a:r>
           </a:p>
         </p:txBody>
@@ -11170,328 +12086,40 @@
           </a:p>
         </p:txBody>
       </p:sp>
-      <p:sp>
-        <p:nvSpPr>
-          <p:cNvPr id="6" name="Rectangle 5"/>
-          <p:cNvSpPr/>
-          <p:nvPr/>
-        </p:nvSpPr>
-        <p:spPr>
-          <a:xfrm>
-            <a:off x="566928" y="1188720"/>
-            <a:ext cx="11064240" cy="347472"/>
-          </a:xfrm>
-          <a:prstGeom prst="rect">
-            <a:avLst/>
-          </a:prstGeom>
-          <a:solidFill>
-            <a:srgbClr val="F4F7FB"/>
-          </a:solidFill>
-          <a:ln>
-            <a:solidFill>
-              <a:srgbClr val="F4F7FB"/>
-            </a:solidFill>
-          </a:ln>
-        </p:spPr>
-        <p:style>
-          <a:lnRef idx="1">
-            <a:schemeClr val="accent1"/>
-          </a:lnRef>
-          <a:fillRef idx="3">
-            <a:schemeClr val="accent1"/>
-          </a:fillRef>
-          <a:effectRef idx="2">
-            <a:schemeClr val="accent1"/>
-          </a:effectRef>
-          <a:fontRef idx="minor">
-            <a:schemeClr val="lt1"/>
-          </a:fontRef>
-        </p:style>
-        <p:txBody>
-          <a:bodyPr rtlCol="0" anchor="ctr" wrap="square" lIns="73152" rIns="73152" tIns="36576" bIns="36576"/>
-          <a:lstStyle/>
-          <a:p>
-            <a:pPr algn="l">
-              <a:spcAft>
-                <a:spcPts val="0"/>
-              </a:spcAft>
-              <a:defRPr sz="1300" b="1">
-                <a:solidFill>
-                  <a:srgbClr val="122C4E"/>
-                </a:solidFill>
-                <a:latin typeface="Noto Sans CJK KR"/>
-              </a:defRPr>
-            </a:pPr>
-            <a:r>
-              <a:t>현재 단계 오류 대응    |    현재 폴더 ~/ros2_curri/my_agv_ws    |    현재 터미널</a:t>
-            </a:r>
-          </a:p>
-        </p:txBody>
-      </p:sp>
-      <p:sp>
-        <p:nvSpPr>
-          <p:cNvPr id="7" name="Rounded Rectangle 6"/>
-          <p:cNvSpPr/>
-          <p:nvPr/>
-        </p:nvSpPr>
-        <p:spPr>
-          <a:xfrm>
-            <a:off x="694944" y="1755648"/>
-            <a:ext cx="10972800" cy="1115568"/>
-          </a:xfrm>
-          <a:prstGeom prst="roundRect">
-            <a:avLst/>
-          </a:prstGeom>
-          <a:solidFill>
-            <a:srgbClr val="FFF7F4"/>
-          </a:solidFill>
-          <a:ln>
-            <a:solidFill>
-              <a:srgbClr val="EDBEB4"/>
-            </a:solidFill>
-          </a:ln>
-        </p:spPr>
-        <p:style>
-          <a:lnRef idx="1">
-            <a:schemeClr val="accent1"/>
-          </a:lnRef>
-          <a:fillRef idx="3">
-            <a:schemeClr val="accent1"/>
-          </a:fillRef>
-          <a:effectRef idx="2">
-            <a:schemeClr val="accent1"/>
-          </a:effectRef>
-          <a:fontRef idx="minor">
-            <a:schemeClr val="lt1"/>
-          </a:fontRef>
-        </p:style>
-        <p:txBody>
-          <a:bodyPr rtlCol="0" anchor="ctr"/>
-          <a:lstStyle/>
-          <a:p>
-            <a:pPr algn="ctr"/>
-          </a:p>
-        </p:txBody>
-      </p:sp>
-      <p:sp>
-        <p:nvSpPr>
-          <p:cNvPr id="8" name="TextBox 7"/>
-          <p:cNvSpPr txBox="1"/>
-          <p:nvPr/>
-        </p:nvSpPr>
-        <p:spPr>
-          <a:xfrm>
-            <a:off x="896112" y="1901952"/>
-            <a:ext cx="2926080" cy="274320"/>
-          </a:xfrm>
-          <a:prstGeom prst="rect">
-            <a:avLst/>
-          </a:prstGeom>
-          <a:noFill/>
-        </p:spPr>
-        <p:txBody>
-          <a:bodyPr wrap="square" lIns="73152" rIns="73152" tIns="36576" bIns="36576">
-            <a:spAutoFit/>
-          </a:bodyPr>
-          <a:lstStyle/>
-          <a:p>
-            <a:pPr algn="l">
-              <a:spcAft>
-                <a:spcPts val="0"/>
-              </a:spcAft>
-              <a:defRPr sz="1800" b="1">
-                <a:solidFill>
-                  <a:srgbClr val="BE3B3B"/>
-                </a:solidFill>
-                <a:latin typeface="Noto Sans CJK KR"/>
-              </a:defRPr>
-            </a:pPr>
-            <a:r>
-              <a:t>증상 1: XML parsing error</a:t>
-            </a:r>
-          </a:p>
-        </p:txBody>
-      </p:sp>
-      <p:sp>
-        <p:nvSpPr>
-          <p:cNvPr id="9" name="TextBox 8"/>
-          <p:cNvSpPr txBox="1"/>
-          <p:nvPr/>
-        </p:nvSpPr>
-        <p:spPr>
-          <a:xfrm>
-            <a:off x="3794760" y="1883664"/>
-            <a:ext cx="7543800" cy="621792"/>
-          </a:xfrm>
-          <a:prstGeom prst="rect">
-            <a:avLst/>
-          </a:prstGeom>
-          <a:noFill/>
-        </p:spPr>
-        <p:txBody>
-          <a:bodyPr wrap="square" lIns="73152" rIns="73152" tIns="36576" bIns="36576">
-            <a:spAutoFit/>
-          </a:bodyPr>
-          <a:lstStyle/>
-          <a:p>
-            <a:pPr algn="l">
-              <a:spcAft>
-                <a:spcPts val="0"/>
-              </a:spcAft>
-              <a:defRPr sz="1600" b="0">
-                <a:solidFill>
-                  <a:srgbClr val="122C4E"/>
-                </a:solidFill>
-                <a:latin typeface="Noto Sans CJK KR"/>
-              </a:defRPr>
-            </a:pPr>
-            <a:r>
-              <a:t>우선 확인: 닫는 태그·따옴표·중첩 구조를 확인한다.</a:t>
-            </a:r>
-            <a:br/>
-            <a:r>
-              <a:t>수정 후: check_urdf ~/ros2_curri/my_agv_ws/src/agv_description/curriculum_stages/M05/agv.urdf</a:t>
-            </a:r>
-          </a:p>
-        </p:txBody>
-      </p:sp>
-      <p:sp>
-        <p:nvSpPr>
-          <p:cNvPr id="10" name="Rounded Rectangle 9"/>
-          <p:cNvSpPr/>
-          <p:nvPr/>
-        </p:nvSpPr>
-        <p:spPr>
-          <a:xfrm>
-            <a:off x="694944" y="3172968"/>
-            <a:ext cx="10972800" cy="1115568"/>
-          </a:xfrm>
-          <a:prstGeom prst="roundRect">
-            <a:avLst/>
-          </a:prstGeom>
-          <a:solidFill>
-            <a:srgbClr val="FFF7F4"/>
-          </a:solidFill>
-          <a:ln>
-            <a:solidFill>
-              <a:srgbClr val="EDBEB4"/>
-            </a:solidFill>
-          </a:ln>
-        </p:spPr>
-        <p:style>
-          <a:lnRef idx="1">
-            <a:schemeClr val="accent1"/>
-          </a:lnRef>
-          <a:fillRef idx="3">
-            <a:schemeClr val="accent1"/>
-          </a:fillRef>
-          <a:effectRef idx="2">
-            <a:schemeClr val="accent1"/>
-          </a:effectRef>
-          <a:fontRef idx="minor">
-            <a:schemeClr val="lt1"/>
-          </a:fontRef>
-        </p:style>
-        <p:txBody>
-          <a:bodyPr rtlCol="0" anchor="ctr"/>
-          <a:lstStyle/>
-          <a:p>
-            <a:pPr algn="ctr"/>
-          </a:p>
-        </p:txBody>
-      </p:sp>
-      <p:sp>
-        <p:nvSpPr>
-          <p:cNvPr id="11" name="TextBox 10"/>
-          <p:cNvSpPr txBox="1"/>
-          <p:nvPr/>
-        </p:nvSpPr>
-        <p:spPr>
-          <a:xfrm>
-            <a:off x="896112" y="3319272"/>
-            <a:ext cx="2926080" cy="274320"/>
-          </a:xfrm>
-          <a:prstGeom prst="rect">
-            <a:avLst/>
-          </a:prstGeom>
-          <a:noFill/>
-        </p:spPr>
-        <p:txBody>
-          <a:bodyPr wrap="square" lIns="73152" rIns="73152" tIns="36576" bIns="36576">
-            <a:spAutoFit/>
-          </a:bodyPr>
-          <a:lstStyle/>
-          <a:p>
-            <a:pPr algn="l">
-              <a:spcAft>
-                <a:spcPts val="0"/>
-              </a:spcAft>
-              <a:defRPr sz="1800" b="1">
-                <a:solidFill>
-                  <a:srgbClr val="BE3B3B"/>
-                </a:solidFill>
-                <a:latin typeface="Noto Sans CJK KR"/>
-              </a:defRPr>
-            </a:pPr>
-            <a:r>
-              <a:t>증상 2: 바퀴가 눕거나 TF가 없음</a:t>
-            </a:r>
-          </a:p>
-        </p:txBody>
-      </p:sp>
-      <p:sp>
-        <p:nvSpPr>
-          <p:cNvPr id="12" name="TextBox 11"/>
-          <p:cNvSpPr txBox="1"/>
-          <p:nvPr/>
-        </p:nvSpPr>
-        <p:spPr>
-          <a:xfrm>
-            <a:off x="3794760" y="3300984"/>
-            <a:ext cx="7543800" cy="621792"/>
-          </a:xfrm>
-          <a:prstGeom prst="rect">
-            <a:avLst/>
-          </a:prstGeom>
-          <a:noFill/>
-        </p:spPr>
-        <p:txBody>
-          <a:bodyPr wrap="square" lIns="73152" rIns="73152" tIns="36576" bIns="36576">
-            <a:spAutoFit/>
-          </a:bodyPr>
-          <a:lstStyle/>
-          <a:p>
-            <a:pPr algn="l">
-              <a:spcAft>
-                <a:spcPts val="0"/>
-              </a:spcAft>
-              <a:defRPr sz="1600" b="0">
-                <a:solidFill>
-                  <a:srgbClr val="122C4E"/>
-                </a:solidFill>
-                <a:latin typeface="Noto Sans CJK KR"/>
-              </a:defRPr>
-            </a:pPr>
-            <a:r>
-              <a:t>우선 확인: cylinder rpy·joint axis·parent/child link 이름을 확인한다.</a:t>
-            </a:r>
-            <a:br/>
-            <a:r>
-              <a:t>수정 후: check_urdf ~/ros2_curri/my_agv_ws/src/agv_description/curriculum_stages/M05/agv.urdf</a:t>
-            </a:r>
-          </a:p>
-        </p:txBody>
-      </p:sp>
-      <p:sp>
-        <p:nvSpPr>
-          <p:cNvPr id="13" name="TextBox 12"/>
-          <p:cNvSpPr txBox="1"/>
-          <p:nvPr/>
-        </p:nvSpPr>
-        <p:spPr>
-          <a:xfrm>
-            <a:off x="822960" y="5102352"/>
-            <a:ext cx="10607040" cy="402336"/>
+      <p:pic>
+        <p:nvPicPr>
+          <p:cNvPr id="6" name="Picture 5" descr="validation_terminal.png"/>
+          <p:cNvPicPr>
+            <a:picLocks noChangeAspect="1"/>
+          </p:cNvPicPr>
+          <p:nvPr/>
+        </p:nvPicPr>
+        <p:blipFill>
+          <a:blip r:embed="rId2"/>
+          <a:stretch>
+            <a:fillRect/>
+          </a:stretch>
+        </p:blipFill>
+        <p:spPr>
+          <a:xfrm>
+            <a:off x="790956" y="1884338"/>
+            <a:ext cx="10607040" cy="3738546"/>
+          </a:xfrm>
+          <a:prstGeom prst="rect">
+            <a:avLst/>
+          </a:prstGeom>
+        </p:spPr>
+      </p:pic>
+      <p:sp>
+        <p:nvSpPr>
+          <p:cNvPr id="7" name="TextBox 6"/>
+          <p:cNvSpPr txBox="1"/>
+          <p:nvPr/>
+        </p:nvSpPr>
+        <p:spPr>
+          <a:xfrm>
+            <a:off x="777240" y="6144768"/>
+            <a:ext cx="10607040" cy="310896"/>
           </a:xfrm>
           <a:prstGeom prst="rect">
             <a:avLst/>
@@ -11508,15 +12136,15 @@
               <a:spcAft>
                 <a:spcPts val="0"/>
               </a:spcAft>
-              <a:defRPr sz="1800" b="1">
-                <a:solidFill>
-                  <a:srgbClr val="DB7E22"/>
-                </a:solidFill>
-                <a:latin typeface="Noto Sans CJK KR"/>
-              </a:defRPr>
-            </a:pPr>
-            <a:r>
-              <a:t>공통 순서: ① 현재 폴더 ② source ③ 파일 경로 ④ 이름/타입/단위 ⑤ build·source 후 재실행</a:t>
+              <a:defRPr sz="1100" b="1">
+                <a:solidFill>
+                  <a:srgbClr val="2A8B5A"/>
+                </a:solidFill>
+                <a:latin typeface="Noto Sans CJK KR"/>
+              </a:defRPr>
+            </a:pPr>
+            <a:r>
+              <a:t>화면에서 확인: ① 명령/설정  ② 정상 출력 또는 화면  ③ 다음 검증 명령으로 재확인</a:t>
             </a:r>
           </a:p>
         </p:txBody>
@@ -11573,7 +12201,7 @@
               </a:defRPr>
             </a:pPr>
             <a:r>
-              <a:t>막혔을 때만: Complete를 복구용으로 사용한다</a:t>
+              <a:t>객관적 검증 명령으로 완료를 확인한다</a:t>
             </a:r>
           </a:p>
         </p:txBody>
@@ -11612,7 +12240,7 @@
               </a:defRPr>
             </a:pPr>
             <a:r>
-              <a:t>이 슬라이드가 먼저가 아닙니다. 직접 입력·실행을 시도한 뒤에만 내 파일과 Complete를 비교합니다.</a:t>
+              <a:t>화면만 보지 말고 topic·frame·파일·parameter를 다시 확인합니다.</a:t>
             </a:r>
           </a:p>
         </p:txBody>
@@ -11748,60 +12376,21 @@
               </a:defRPr>
             </a:pPr>
             <a:r>
-              <a:t>현재 단계 복구용 Complete    |    현재 폴더 ~/ros2_curri    |    현재 터미널</a:t>
-            </a:r>
-          </a:p>
-        </p:txBody>
-      </p:sp>
-      <p:sp>
-        <p:nvSpPr>
-          <p:cNvPr id="7" name="TextBox 6"/>
-          <p:cNvSpPr txBox="1"/>
-          <p:nvPr/>
-        </p:nvSpPr>
-        <p:spPr>
-          <a:xfrm>
-            <a:off x="713232" y="1664208"/>
-            <a:ext cx="10698480" cy="402336"/>
-          </a:xfrm>
-          <a:prstGeom prst="rect">
-            <a:avLst/>
-          </a:prstGeom>
-          <a:noFill/>
-        </p:spPr>
-        <p:txBody>
-          <a:bodyPr wrap="square" lIns="73152" rIns="73152" tIns="36576" bIns="36576">
-            <a:spAutoFit/>
-          </a:bodyPr>
-          <a:lstStyle/>
-          <a:p>
-            <a:pPr algn="ctr">
-              <a:spcAft>
-                <a:spcPts val="0"/>
-              </a:spcAft>
-              <a:defRPr sz="1800" b="1">
-                <a:solidFill>
-                  <a:srgbClr val="DB7E22"/>
-                </a:solidFill>
-                <a:latin typeface="Noto Sans CJK KR"/>
-              </a:defRPr>
-            </a:pPr>
-            <a:r>
-              <a:t>권장 순서: ① 내 오류를 확인  ② Complete와 diff  ③ 꼭 필요할 때만 backup 후 복사</a:t>
-            </a:r>
-          </a:p>
-        </p:txBody>
-      </p:sp>
-      <p:sp>
-        <p:nvSpPr>
-          <p:cNvPr id="8" name="Rounded Rectangle 7"/>
+              <a:t>현재 단계 검증    |    현재 폴더 ~/ros2_curri/my_agv_ws    |    현재 터미널</a:t>
+            </a:r>
+          </a:p>
+        </p:txBody>
+      </p:sp>
+      <p:sp>
+        <p:nvSpPr>
+          <p:cNvPr id="7" name="Rounded Rectangle 6"/>
           <p:cNvSpPr/>
           <p:nvPr/>
         </p:nvSpPr>
         <p:spPr>
           <a:xfrm>
-            <a:off x="676656" y="2423160"/>
-            <a:ext cx="10881360" cy="2606040"/>
+            <a:off x="658368" y="1755648"/>
+            <a:ext cx="10972800" cy="2148840"/>
           </a:xfrm>
           <a:prstGeom prst="roundRect">
             <a:avLst/>
@@ -11837,7 +12426,7 @@
               <a:spcAft>
                 <a:spcPts val="0"/>
               </a:spcAft>
-              <a:defRPr sz="1400" b="0">
+              <a:defRPr sz="1600" b="0">
                 <a:solidFill>
                   <a:srgbClr val="FFFFFF"/>
                 </a:solidFill>
@@ -11845,23 +12434,81 @@
               </a:defRPr>
             </a:pPr>
             <a:r>
-              <a:t>cd ~/ros2_curri</a:t>
+              <a:t>check_urdf ~/ros2_curri/my_agv_ws/src/agv_description/curriculum_stages/M05/agv.urdf</a:t>
             </a:r>
             <a:br/>
             <a:r>
-              <a:t>diff -ru my_agv_ws/src blocks/B_robot_build/M05_urdf_basic_model/complete/agv_ws/src || true</a:t>
+              <a:t>rg -n '&lt;xacro:|&lt;link |&lt;joint ' ~/ros2_curri/my_agv_ws/src/agv_description/curriculum_stages/M05/agv.urdf</a:t>
+            </a:r>
+          </a:p>
+        </p:txBody>
+      </p:sp>
+      <p:sp>
+        <p:nvSpPr>
+          <p:cNvPr id="8" name="Rounded Rectangle 7"/>
+          <p:cNvSpPr/>
+          <p:nvPr/>
+        </p:nvSpPr>
+        <p:spPr>
+          <a:xfrm>
+            <a:off x="658368" y="4206240"/>
+            <a:ext cx="10972800" cy="1554480"/>
+          </a:xfrm>
+          <a:prstGeom prst="roundRect">
+            <a:avLst/>
+          </a:prstGeom>
+          <a:solidFill>
+            <a:srgbClr val="F4F7FB"/>
+          </a:solidFill>
+          <a:ln>
+            <a:solidFill>
+              <a:srgbClr val="D1DFD5"/>
+            </a:solidFill>
+          </a:ln>
+        </p:spPr>
+        <p:style>
+          <a:lnRef idx="1">
+            <a:schemeClr val="accent1"/>
+          </a:lnRef>
+          <a:fillRef idx="3">
+            <a:schemeClr val="accent1"/>
+          </a:fillRef>
+          <a:effectRef idx="2">
+            <a:schemeClr val="accent1"/>
+          </a:effectRef>
+          <a:fontRef idx="minor">
+            <a:schemeClr val="lt1"/>
+          </a:fontRef>
+        </p:style>
+        <p:txBody>
+          <a:bodyPr rtlCol="0" anchor="ctr" wrap="square" lIns="73152" rIns="73152" tIns="36576" bIns="36576"/>
+          <a:lstStyle/>
+          <a:p>
+            <a:pPr algn="l">
+              <a:spcAft>
+                <a:spcPts val="0"/>
+              </a:spcAft>
+              <a:defRPr sz="1800" b="1">
+                <a:solidFill>
+                  <a:srgbClr val="2A8B5A"/>
+                </a:solidFill>
+                <a:latin typeface="Noto Sans CJK KR"/>
+              </a:defRPr>
+            </a:pPr>
+            <a:r>
+              <a:t>완료 체크</a:t>
             </a:r>
             <a:br/>
             <a:r>
-              <a:t>cp -a my_agv_ws/src my_agv_ws/src_before_M05</a:t>
+              <a:t>□ 명령이 오류 없이 실행된다.</a:t>
             </a:r>
             <a:br/>
             <a:r>
-              <a:t>cp -a blocks/B_robot_build/M05_urdf_basic_model/complete/agv_ws/src/. my_agv_ws/src/</a:t>
+              <a:t>□ 기대한 파일·topic·frame·parameter 이름이 보인다.</a:t>
             </a:r>
             <a:br/>
             <a:r>
-              <a:t>cd my_agv_ws &amp;&amp; colcon build --symlink-install &amp;&amp; source install/setup.bash</a:t>
+              <a:t>□ 값의 단위와 방향을 한 문장으로 설명할 수 있다.</a:t>
             </a:r>
           </a:p>
         </p:txBody>
@@ -11874,33 +12521,33 @@
         </p:nvSpPr>
         <p:spPr>
           <a:xfrm>
-            <a:off x="786384" y="5413248"/>
-            <a:ext cx="10424160" cy="429768"/>
-          </a:xfrm>
-          <a:prstGeom prst="rect">
-            <a:avLst/>
-          </a:prstGeom>
-          <a:noFill/>
-        </p:spPr>
-        <p:txBody>
-          <a:bodyPr wrap="square" lIns="73152" rIns="73152" tIns="36576" bIns="36576">
-            <a:spAutoFit/>
-          </a:bodyPr>
-          <a:lstStyle/>
-          <a:p>
-            <a:pPr algn="ctr">
-              <a:spcAft>
-                <a:spcPts val="0"/>
-              </a:spcAft>
-              <a:defRPr sz="1700" b="1">
-                <a:solidFill>
-                  <a:srgbClr val="2A8B5A"/>
-                </a:solidFill>
-                <a:latin typeface="Noto Sans CJK KR"/>
-              </a:defRPr>
-            </a:pPr>
-            <a:r>
-              <a:t>복구 뒤에는 끝내지 말고, 내 파일과 Complete의 차이를 한 줄씩 설명한 뒤 다시 직접 입력해 봅니다.</a:t>
+            <a:off x="731520" y="5989320"/>
+            <a:ext cx="10789920" cy="237744"/>
+          </a:xfrm>
+          <a:prstGeom prst="rect">
+            <a:avLst/>
+          </a:prstGeom>
+          <a:noFill/>
+        </p:spPr>
+        <p:txBody>
+          <a:bodyPr wrap="square" lIns="73152" rIns="73152" tIns="36576" bIns="36576">
+            <a:spAutoFit/>
+          </a:bodyPr>
+          <a:lstStyle/>
+          <a:p>
+            <a:pPr algn="l">
+              <a:spcAft>
+                <a:spcPts val="0"/>
+              </a:spcAft>
+              <a:defRPr sz="1500" b="1">
+                <a:solidFill>
+                  <a:srgbClr val="122C4E"/>
+                </a:solidFill>
+                <a:latin typeface="Noto Sans CJK KR"/>
+              </a:defRPr>
+            </a:pPr>
+            <a:r>
+              <a:t>완료 조건: RobotModel과 TF에서 base, 두 wheel, camera, lidar, imu 연결을 확인한다.</a:t>
             </a:r>
           </a:p>
         </p:txBody>
@@ -11957,7 +12604,7 @@
               </a:defRPr>
             </a:pPr>
             <a:r>
-              <a:t>미니 실습: 값 하나를 바꾸고 결과를 비교한다</a:t>
+              <a:t>막히면: 증상 → 우선 확인 → 재검증</a:t>
             </a:r>
           </a:p>
         </p:txBody>
@@ -11996,7 +12643,7 @@
               </a:defRPr>
             </a:pPr>
             <a:r>
-              <a:t>정상 결과를 만든 뒤에는 한 번에 하나의 값만 바꿉니다.</a:t>
+              <a:t>오류 메시지를 숨기지 않고 같은 순서로 점검합니다.</a:t>
             </a:r>
           </a:p>
         </p:txBody>
@@ -12132,7 +12779,7 @@
               </a:defRPr>
             </a:pPr>
             <a:r>
-              <a:t>현재 단계 미니 실습    |    현재 폴더 ~/ros2_curri/my_agv_ws    |    현재 터미널</a:t>
+              <a:t>현재 단계 오류 대응    |    현재 폴더 ~/ros2_curri/my_agv_ws    |    현재 터미널</a:t>
             </a:r>
           </a:p>
         </p:txBody>
@@ -12145,18 +12792,18 @@
         </p:nvSpPr>
         <p:spPr>
           <a:xfrm>
-            <a:off x="749808" y="1874519"/>
-            <a:ext cx="10652760" cy="1993392"/>
+            <a:off x="694944" y="1755648"/>
+            <a:ext cx="10972800" cy="1115568"/>
           </a:xfrm>
           <a:prstGeom prst="roundRect">
             <a:avLst/>
           </a:prstGeom>
           <a:solidFill>
-            <a:srgbClr val="FFF8EB"/>
+            <a:srgbClr val="FFF7F4"/>
           </a:solidFill>
           <a:ln>
             <a:solidFill>
-              <a:srgbClr val="ECC680"/>
+              <a:srgbClr val="EDBEB4"/>
             </a:solidFill>
           </a:ln>
         </p:spPr>
@@ -12175,53 +12822,249 @@
           </a:fontRef>
         </p:style>
         <p:txBody>
-          <a:bodyPr rtlCol="0" anchor="ctr" wrap="square" lIns="73152" rIns="73152" tIns="36576" bIns="36576"/>
+          <a:bodyPr rtlCol="0" anchor="ctr"/>
+          <a:lstStyle/>
+          <a:p>
+            <a:pPr algn="ctr"/>
+          </a:p>
+        </p:txBody>
+      </p:sp>
+      <p:sp>
+        <p:nvSpPr>
+          <p:cNvPr id="8" name="TextBox 7"/>
+          <p:cNvSpPr txBox="1"/>
+          <p:nvPr/>
+        </p:nvSpPr>
+        <p:spPr>
+          <a:xfrm>
+            <a:off x="896112" y="1901952"/>
+            <a:ext cx="2926080" cy="274320"/>
+          </a:xfrm>
+          <a:prstGeom prst="rect">
+            <a:avLst/>
+          </a:prstGeom>
+          <a:noFill/>
+        </p:spPr>
+        <p:txBody>
+          <a:bodyPr wrap="square" lIns="73152" rIns="73152" tIns="36576" bIns="36576">
+            <a:spAutoFit/>
+          </a:bodyPr>
+          <a:lstStyle/>
+          <a:p>
+            <a:pPr algn="l">
+              <a:spcAft>
+                <a:spcPts val="0"/>
+              </a:spcAft>
+              <a:defRPr sz="1800" b="1">
+                <a:solidFill>
+                  <a:srgbClr val="BE3B3B"/>
+                </a:solidFill>
+                <a:latin typeface="Noto Sans CJK KR"/>
+              </a:defRPr>
+            </a:pPr>
+            <a:r>
+              <a:t>증상 1: XML parsing error</a:t>
+            </a:r>
+          </a:p>
+        </p:txBody>
+      </p:sp>
+      <p:sp>
+        <p:nvSpPr>
+          <p:cNvPr id="9" name="TextBox 8"/>
+          <p:cNvSpPr txBox="1"/>
+          <p:nvPr/>
+        </p:nvSpPr>
+        <p:spPr>
+          <a:xfrm>
+            <a:off x="3794760" y="1883664"/>
+            <a:ext cx="7543800" cy="621792"/>
+          </a:xfrm>
+          <a:prstGeom prst="rect">
+            <a:avLst/>
+          </a:prstGeom>
+          <a:noFill/>
+        </p:spPr>
+        <p:txBody>
+          <a:bodyPr wrap="square" lIns="73152" rIns="73152" tIns="36576" bIns="36576">
+            <a:spAutoFit/>
+          </a:bodyPr>
+          <a:lstStyle/>
+          <a:p>
+            <a:pPr algn="l">
+              <a:spcAft>
+                <a:spcPts val="0"/>
+              </a:spcAft>
+              <a:defRPr sz="1600" b="0">
+                <a:solidFill>
+                  <a:srgbClr val="122C4E"/>
+                </a:solidFill>
+                <a:latin typeface="Noto Sans CJK KR"/>
+              </a:defRPr>
+            </a:pPr>
+            <a:r>
+              <a:t>우선 확인: 닫는 태그·따옴표·중첩 구조를 확인한다.</a:t>
+            </a:r>
+            <a:br/>
+            <a:r>
+              <a:t>수정 후: check_urdf ~/ros2_curri/my_agv_ws/src/agv_description/curriculum_stages/M05/agv.urdf</a:t>
+            </a:r>
+          </a:p>
+        </p:txBody>
+      </p:sp>
+      <p:sp>
+        <p:nvSpPr>
+          <p:cNvPr id="10" name="Rounded Rectangle 9"/>
+          <p:cNvSpPr/>
+          <p:nvPr/>
+        </p:nvSpPr>
+        <p:spPr>
+          <a:xfrm>
+            <a:off x="694944" y="3172968"/>
+            <a:ext cx="10972800" cy="1115568"/>
+          </a:xfrm>
+          <a:prstGeom prst="roundRect">
+            <a:avLst/>
+          </a:prstGeom>
+          <a:solidFill>
+            <a:srgbClr val="FFF7F4"/>
+          </a:solidFill>
+          <a:ln>
+            <a:solidFill>
+              <a:srgbClr val="EDBEB4"/>
+            </a:solidFill>
+          </a:ln>
+        </p:spPr>
+        <p:style>
+          <a:lnRef idx="1">
+            <a:schemeClr val="accent1"/>
+          </a:lnRef>
+          <a:fillRef idx="3">
+            <a:schemeClr val="accent1"/>
+          </a:fillRef>
+          <a:effectRef idx="2">
+            <a:schemeClr val="accent1"/>
+          </a:effectRef>
+          <a:fontRef idx="minor">
+            <a:schemeClr val="lt1"/>
+          </a:fontRef>
+        </p:style>
+        <p:txBody>
+          <a:bodyPr rtlCol="0" anchor="ctr"/>
+          <a:lstStyle/>
+          <a:p>
+            <a:pPr algn="ctr"/>
+          </a:p>
+        </p:txBody>
+      </p:sp>
+      <p:sp>
+        <p:nvSpPr>
+          <p:cNvPr id="11" name="TextBox 10"/>
+          <p:cNvSpPr txBox="1"/>
+          <p:nvPr/>
+        </p:nvSpPr>
+        <p:spPr>
+          <a:xfrm>
+            <a:off x="896112" y="3319272"/>
+            <a:ext cx="2926080" cy="274320"/>
+          </a:xfrm>
+          <a:prstGeom prst="rect">
+            <a:avLst/>
+          </a:prstGeom>
+          <a:noFill/>
+        </p:spPr>
+        <p:txBody>
+          <a:bodyPr wrap="square" lIns="73152" rIns="73152" tIns="36576" bIns="36576">
+            <a:spAutoFit/>
+          </a:bodyPr>
+          <a:lstStyle/>
+          <a:p>
+            <a:pPr algn="l">
+              <a:spcAft>
+                <a:spcPts val="0"/>
+              </a:spcAft>
+              <a:defRPr sz="1800" b="1">
+                <a:solidFill>
+                  <a:srgbClr val="BE3B3B"/>
+                </a:solidFill>
+                <a:latin typeface="Noto Sans CJK KR"/>
+              </a:defRPr>
+            </a:pPr>
+            <a:r>
+              <a:t>증상 2: 바퀴가 눕거나 TF가 없음</a:t>
+            </a:r>
+          </a:p>
+        </p:txBody>
+      </p:sp>
+      <p:sp>
+        <p:nvSpPr>
+          <p:cNvPr id="12" name="TextBox 11"/>
+          <p:cNvSpPr txBox="1"/>
+          <p:nvPr/>
+        </p:nvSpPr>
+        <p:spPr>
+          <a:xfrm>
+            <a:off x="3794760" y="3300984"/>
+            <a:ext cx="7543800" cy="621792"/>
+          </a:xfrm>
+          <a:prstGeom prst="rect">
+            <a:avLst/>
+          </a:prstGeom>
+          <a:noFill/>
+        </p:spPr>
+        <p:txBody>
+          <a:bodyPr wrap="square" lIns="73152" rIns="73152" tIns="36576" bIns="36576">
+            <a:spAutoFit/>
+          </a:bodyPr>
+          <a:lstStyle/>
+          <a:p>
+            <a:pPr algn="l">
+              <a:spcAft>
+                <a:spcPts val="0"/>
+              </a:spcAft>
+              <a:defRPr sz="1600" b="0">
+                <a:solidFill>
+                  <a:srgbClr val="122C4E"/>
+                </a:solidFill>
+                <a:latin typeface="Noto Sans CJK KR"/>
+              </a:defRPr>
+            </a:pPr>
+            <a:r>
+              <a:t>우선 확인: cylinder rpy·joint axis·parent/child link 이름을 확인한다.</a:t>
+            </a:r>
+            <a:br/>
+            <a:r>
+              <a:t>수정 후: check_urdf ~/ros2_curri/my_agv_ws/src/agv_description/curriculum_stages/M05/agv.urdf</a:t>
+            </a:r>
+          </a:p>
+        </p:txBody>
+      </p:sp>
+      <p:sp>
+        <p:nvSpPr>
+          <p:cNvPr id="13" name="TextBox 12"/>
+          <p:cNvSpPr txBox="1"/>
+          <p:nvPr/>
+        </p:nvSpPr>
+        <p:spPr>
+          <a:xfrm>
+            <a:off x="822960" y="5102352"/>
+            <a:ext cx="10607040" cy="402336"/>
+          </a:xfrm>
+          <a:prstGeom prst="rect">
+            <a:avLst/>
+          </a:prstGeom>
+          <a:noFill/>
+        </p:spPr>
+        <p:txBody>
+          <a:bodyPr wrap="square" lIns="73152" rIns="73152" tIns="36576" bIns="36576">
+            <a:spAutoFit/>
+          </a:bodyPr>
           <a:lstStyle/>
           <a:p>
             <a:pPr algn="ctr">
               <a:spcAft>
                 <a:spcPts val="0"/>
               </a:spcAft>
-              <a:defRPr sz="2300" b="1">
-                <a:solidFill>
-                  <a:srgbClr val="122C4E"/>
-                </a:solidFill>
-                <a:latin typeface="Noto Sans CJK KR"/>
-              </a:defRPr>
-            </a:pPr>
-            <a:r>
-              <a:t>wheel_radius를 0.08 m에서 0.10 m로 바꾸고 RobotModel에서 바퀴 크기 변화를 확인한다.</a:t>
-            </a:r>
-          </a:p>
-        </p:txBody>
-      </p:sp>
-      <p:sp>
-        <p:nvSpPr>
-          <p:cNvPr id="8" name="TextBox 7"/>
-          <p:cNvSpPr txBox="1"/>
-          <p:nvPr/>
-        </p:nvSpPr>
-        <p:spPr>
-          <a:xfrm>
-            <a:off x="877824" y="4590288"/>
-            <a:ext cx="10241280" cy="594360"/>
-          </a:xfrm>
-          <a:prstGeom prst="rect">
-            <a:avLst/>
-          </a:prstGeom>
-          <a:noFill/>
-        </p:spPr>
-        <p:txBody>
-          <a:bodyPr wrap="square" lIns="73152" rIns="73152" tIns="36576" bIns="36576">
-            <a:spAutoFit/>
-          </a:bodyPr>
-          <a:lstStyle/>
-          <a:p>
-            <a:pPr algn="ctr">
-              <a:spcAft>
-                <a:spcPts val="0"/>
-              </a:spcAft>
-              <a:defRPr sz="1900" b="1">
+              <a:defRPr sz="1800" b="1">
                 <a:solidFill>
                   <a:srgbClr val="DB7E22"/>
                 </a:solidFill>
@@ -12229,7 +13072,7 @@
               </a:defRPr>
             </a:pPr>
             <a:r>
-              <a:t>기록할 것: 바꾼 값(단위) · 기대한 변화 · 실제 출력/화면 · 원래 값으로 되돌린 결과</a:t>
+              <a:t>공통 순서: ① 현재 폴더 ② source ③ 파일 경로 ④ 이름/타입/단위 ⑤ build·source 후 재실행</a:t>
             </a:r>
           </a:p>
         </p:txBody>
@@ -12286,7 +13129,7 @@
               </a:defRPr>
             </a:pPr>
             <a:r>
-              <a:t>내 프로젝트 체크포인트를 저장하고 다음 모듈로 넘긴다</a:t>
+              <a:t>막혔을 때만: Complete를 복구용으로 사용한다</a:t>
             </a:r>
           </a:p>
         </p:txBody>
@@ -12325,7 +13168,7 @@
               </a:defRPr>
             </a:pPr>
             <a:r>
-              <a:t>Complete는 복구용 비교 기준이고, 다음 단계는 내가 직접 만든 workspace에서 계속합니다.</a:t>
+              <a:t>이 슬라이드가 먼저가 아닙니다. 직접 입력·실행을 시도한 뒤에만 내 파일과 Complete를 비교합니다.</a:t>
             </a:r>
           </a:p>
         </p:txBody>
@@ -12461,31 +13304,70 @@
               </a:defRPr>
             </a:pPr>
             <a:r>
-              <a:t>현재 단계 체크포인트    |    현재 폴더 ~/ros2_curri/my_agv_ws    |    현재 터미널</a:t>
-            </a:r>
-          </a:p>
-        </p:txBody>
-      </p:sp>
-      <p:sp>
-        <p:nvSpPr>
-          <p:cNvPr id="7" name="Rounded Rectangle 6"/>
+              <a:t>현재 단계 복구용 Complete    |    현재 폴더 ~/ros2_curri    |    현재 터미널</a:t>
+            </a:r>
+          </a:p>
+        </p:txBody>
+      </p:sp>
+      <p:sp>
+        <p:nvSpPr>
+          <p:cNvPr id="7" name="TextBox 6"/>
+          <p:cNvSpPr txBox="1"/>
+          <p:nvPr/>
+        </p:nvSpPr>
+        <p:spPr>
+          <a:xfrm>
+            <a:off x="713232" y="1664208"/>
+            <a:ext cx="10698480" cy="402336"/>
+          </a:xfrm>
+          <a:prstGeom prst="rect">
+            <a:avLst/>
+          </a:prstGeom>
+          <a:noFill/>
+        </p:spPr>
+        <p:txBody>
+          <a:bodyPr wrap="square" lIns="73152" rIns="73152" tIns="36576" bIns="36576">
+            <a:spAutoFit/>
+          </a:bodyPr>
+          <a:lstStyle/>
+          <a:p>
+            <a:pPr algn="ctr">
+              <a:spcAft>
+                <a:spcPts val="0"/>
+              </a:spcAft>
+              <a:defRPr sz="1800" b="1">
+                <a:solidFill>
+                  <a:srgbClr val="DB7E22"/>
+                </a:solidFill>
+                <a:latin typeface="Noto Sans CJK KR"/>
+              </a:defRPr>
+            </a:pPr>
+            <a:r>
+              <a:t>권장 순서: ① 내 오류를 확인  ② Complete와 diff  ③ 꼭 필요할 때만 backup 후 복사</a:t>
+            </a:r>
+          </a:p>
+        </p:txBody>
+      </p:sp>
+      <p:sp>
+        <p:nvSpPr>
+          <p:cNvPr id="8" name="Rounded Rectangle 7"/>
           <p:cNvSpPr/>
           <p:nvPr/>
         </p:nvSpPr>
         <p:spPr>
           <a:xfrm>
-            <a:off x="685800" y="1737360"/>
-            <a:ext cx="10972800" cy="3611880"/>
+            <a:off x="676656" y="2423160"/>
+            <a:ext cx="10881360" cy="2606040"/>
           </a:xfrm>
           <a:prstGeom prst="roundRect">
             <a:avLst/>
           </a:prstGeom>
           <a:solidFill>
-            <a:srgbClr val="F4F7FB"/>
+            <a:srgbClr val="1D232D"/>
           </a:solidFill>
           <a:ln>
             <a:solidFill>
-              <a:srgbClr val="D2DCE8"/>
+              <a:srgbClr val="1D232D"/>
             </a:solidFill>
           </a:ln>
         </p:spPr>
@@ -12504,112 +13386,38 @@
           </a:fontRef>
         </p:style>
         <p:txBody>
-          <a:bodyPr rtlCol="0" anchor="ctr"/>
-          <a:lstStyle/>
-          <a:p>
-            <a:pPr algn="ctr"/>
-          </a:p>
-        </p:txBody>
-      </p:sp>
-      <p:sp>
-        <p:nvSpPr>
-          <p:cNvPr id="8" name="TextBox 7"/>
-          <p:cNvSpPr txBox="1"/>
-          <p:nvPr/>
-        </p:nvSpPr>
-        <p:spPr>
-          <a:xfrm>
-            <a:off x="896112" y="1993392"/>
-            <a:ext cx="10332720" cy="2971800"/>
-          </a:xfrm>
-          <a:prstGeom prst="rect">
-            <a:avLst/>
-          </a:prstGeom>
-          <a:noFill/>
-        </p:spPr>
-        <p:txBody>
-          <a:bodyPr wrap="square" lIns="109728" rIns="109728">
-            <a:spAutoFit/>
-          </a:bodyPr>
-          <a:lstStyle/>
-          <a:p>
-            <a:pPr>
-              <a:spcAft>
-                <a:spcPts val="800"/>
-              </a:spcAft>
-              <a:defRPr sz="1800">
-                <a:solidFill>
-                  <a:srgbClr val="122C4E"/>
-                </a:solidFill>
-                <a:latin typeface="Noto Sans CJK KR"/>
-              </a:defRPr>
-            </a:pPr>
-            <a:r>
-              <a:t>• □ 완료 화면: RobotModel과 TF에서 base, 두 wheel, camera, lidar, imu 연결을 확인한다.</a:t>
-            </a:r>
-          </a:p>
-          <a:p>
-            <a:pPr>
-              <a:spcAft>
-                <a:spcPts val="800"/>
-              </a:spcAft>
-              <a:defRPr sz="1800">
-                <a:solidFill>
-                  <a:srgbClr val="122C4E"/>
-                </a:solidFill>
-                <a:latin typeface="Noto Sans CJK KR"/>
-              </a:defRPr>
-            </a:pPr>
-            <a:r>
-              <a:t>• □ 막혔을 때 비교할 Complete: blocks/B_robot_build/M05_urdf_basic_model/complete/</a:t>
-            </a:r>
-          </a:p>
-          <a:p>
-            <a:pPr>
-              <a:spcAft>
-                <a:spcPts val="800"/>
-              </a:spcAft>
-              <a:defRPr sz="1800">
-                <a:solidFill>
-                  <a:srgbClr val="122C4E"/>
-                </a:solidFill>
-                <a:latin typeface="Noto Sans CJK KR"/>
-              </a:defRPr>
-            </a:pPr>
-            <a:r>
-              <a:t>• □ 정상 로그·캡처: logs/validation.log, screenshots/validation_terminal.png</a:t>
-            </a:r>
-          </a:p>
-          <a:p>
-            <a:pPr>
-              <a:spcAft>
-                <a:spcPts val="800"/>
-              </a:spcAft>
-              <a:defRPr sz="1800">
-                <a:solidFill>
-                  <a:srgbClr val="122C4E"/>
-                </a:solidFill>
-                <a:latin typeface="Noto Sans CJK KR"/>
-              </a:defRPr>
-            </a:pPr>
-            <a:r>
-              <a:t>• □ 버전 식별: CHECKSUM_or_TAG.txt의 SHA-256 manifest</a:t>
-            </a:r>
-          </a:p>
-          <a:p>
-            <a:pPr>
-              <a:spcAft>
-                <a:spcPts val="800"/>
-              </a:spcAft>
-              <a:defRPr sz="1800">
-                <a:solidFill>
-                  <a:srgbClr val="122C4E"/>
-                </a:solidFill>
-                <a:latin typeface="Noto Sans CJK KR"/>
-              </a:defRPr>
-            </a:pPr>
-            <a:r>
-              <a:t>• □ 다음 시작 조건: M06 Xacro 모듈화</a:t>
+          <a:bodyPr rtlCol="0" anchor="ctr" wrap="square" lIns="73152" rIns="73152" tIns="36576" bIns="36576"/>
+          <a:lstStyle/>
+          <a:p>
+            <a:pPr algn="l">
+              <a:spcAft>
+                <a:spcPts val="0"/>
+              </a:spcAft>
+              <a:defRPr sz="1400" b="0">
+                <a:solidFill>
+                  <a:srgbClr val="FFFFFF"/>
+                </a:solidFill>
+                <a:latin typeface="DejaVu Sans Mono"/>
+              </a:defRPr>
+            </a:pPr>
+            <a:r>
+              <a:t>cd ~/ros2_curri</a:t>
+            </a:r>
+            <a:br/>
+            <a:r>
+              <a:t>diff -ru my_agv_ws/src blocks/B_robot_build/M05_urdf_basic_model/complete/agv_ws/src || true</a:t>
+            </a:r>
+            <a:br/>
+            <a:r>
+              <a:t>cp -a my_agv_ws/src my_agv_ws/src_before_M05</a:t>
+            </a:r>
+            <a:br/>
+            <a:r>
+              <a:t>cp -a blocks/B_robot_build/M05_urdf_basic_model/complete/agv_ws/src/. my_agv_ws/src/</a:t>
+            </a:r>
+            <a:br/>
+            <a:r>
+              <a:t>cd my_agv_ws &amp;&amp; colcon build --symlink-install &amp;&amp; source install/setup.bash</a:t>
             </a:r>
           </a:p>
         </p:txBody>
@@ -12622,8 +13430,8 @@
         </p:nvSpPr>
         <p:spPr>
           <a:xfrm>
-            <a:off x="868680" y="5596128"/>
-            <a:ext cx="10515600" cy="338328"/>
+            <a:off x="786384" y="5413248"/>
+            <a:ext cx="10424160" cy="429768"/>
           </a:xfrm>
           <a:prstGeom prst="rect">
             <a:avLst/>
@@ -12648,7 +13456,7 @@
               </a:defRPr>
             </a:pPr>
             <a:r>
-              <a:t>다음 모듈을 시작하기 전, 내 src의 변경사항을 저장하고 현재 완료 조건을 다시 확인합니다.</a:t>
+              <a:t>복구 뒤에는 끝내지 말고, 내 파일과 Complete의 차이를 한 줄씩 설명한 뒤 다시 직접 입력해 봅니다.</a:t>
             </a:r>
           </a:p>
         </p:txBody>
@@ -12662,6 +13470,754 @@
 </file>
 
 <file path=ppt/slides/slide24.xml><?xml version="1.0" encoding="utf-8"?>
+<p:sld xmlns:a="http://schemas.openxmlformats.org/drawingml/2006/main" xmlns:p="http://schemas.openxmlformats.org/presentationml/2006/main" xmlns:r="http://schemas.openxmlformats.org/officeDocument/2006/relationships">
+  <p:cSld>
+    <p:spTree>
+      <p:nvGrpSpPr>
+        <p:cNvPr id="1" name=""/>
+        <p:cNvGrpSpPr/>
+        <p:nvPr/>
+      </p:nvGrpSpPr>
+      <p:grpSpPr/>
+      <p:sp>
+        <p:nvSpPr>
+          <p:cNvPr id="2" name="TextBox 1"/>
+          <p:cNvSpPr txBox="1"/>
+          <p:nvPr/>
+        </p:nvSpPr>
+        <p:spPr>
+          <a:xfrm>
+            <a:off x="566928" y="347472"/>
+            <a:ext cx="10881360" cy="438912"/>
+          </a:xfrm>
+          <a:prstGeom prst="rect">
+            <a:avLst/>
+          </a:prstGeom>
+          <a:noFill/>
+        </p:spPr>
+        <p:txBody>
+          <a:bodyPr wrap="square" lIns="73152" rIns="73152" tIns="36576" bIns="36576">
+            <a:spAutoFit/>
+          </a:bodyPr>
+          <a:lstStyle/>
+          <a:p>
+            <a:pPr algn="l">
+              <a:spcAft>
+                <a:spcPts val="0"/>
+              </a:spcAft>
+              <a:defRPr sz="3200" b="1">
+                <a:solidFill>
+                  <a:srgbClr val="122C4E"/>
+                </a:solidFill>
+                <a:latin typeface="Noto Sans CJK KR"/>
+              </a:defRPr>
+            </a:pPr>
+            <a:r>
+              <a:t>미니 실습: 값 하나를 바꾸고 결과를 비교한다</a:t>
+            </a:r>
+          </a:p>
+        </p:txBody>
+      </p:sp>
+      <p:sp>
+        <p:nvSpPr>
+          <p:cNvPr id="3" name="TextBox 2"/>
+          <p:cNvSpPr txBox="1"/>
+          <p:nvPr/>
+        </p:nvSpPr>
+        <p:spPr>
+          <a:xfrm>
+            <a:off x="603504" y="859536"/>
+            <a:ext cx="10698480" cy="292608"/>
+          </a:xfrm>
+          <a:prstGeom prst="rect">
+            <a:avLst/>
+          </a:prstGeom>
+          <a:noFill/>
+        </p:spPr>
+        <p:txBody>
+          <a:bodyPr wrap="square" lIns="73152" rIns="73152" tIns="36576" bIns="36576">
+            <a:spAutoFit/>
+          </a:bodyPr>
+          <a:lstStyle/>
+          <a:p>
+            <a:pPr algn="l">
+              <a:spcAft>
+                <a:spcPts val="0"/>
+              </a:spcAft>
+              <a:defRPr sz="1700" b="0">
+                <a:solidFill>
+                  <a:srgbClr val="5C6672"/>
+                </a:solidFill>
+                <a:latin typeface="Noto Sans CJK KR"/>
+              </a:defRPr>
+            </a:pPr>
+            <a:r>
+              <a:t>정상 결과를 만든 뒤에는 한 번에 하나의 값만 바꿉니다.</a:t>
+            </a:r>
+          </a:p>
+        </p:txBody>
+      </p:sp>
+      <p:sp>
+        <p:nvSpPr>
+          <p:cNvPr id="4" name="TextBox 3"/>
+          <p:cNvSpPr txBox="1"/>
+          <p:nvPr/>
+        </p:nvSpPr>
+        <p:spPr>
+          <a:xfrm>
+            <a:off x="530352" y="6510528"/>
+            <a:ext cx="7772400" cy="201168"/>
+          </a:xfrm>
+          <a:prstGeom prst="rect">
+            <a:avLst/>
+          </a:prstGeom>
+          <a:noFill/>
+        </p:spPr>
+        <p:txBody>
+          <a:bodyPr wrap="square" lIns="73152" rIns="73152" tIns="36576" bIns="36576">
+            <a:spAutoFit/>
+          </a:bodyPr>
+          <a:lstStyle/>
+          <a:p>
+            <a:pPr algn="l">
+              <a:spcAft>
+                <a:spcPts val="0"/>
+              </a:spcAft>
+              <a:defRPr sz="1000" b="0">
+                <a:solidFill>
+                  <a:srgbClr val="5C6672"/>
+                </a:solidFill>
+                <a:latin typeface="Noto Sans CJK KR"/>
+              </a:defRPr>
+            </a:pPr>
+            <a:r>
+              <a:t>ROS 2 Jazzy · Gazebo Harmonic · M05 · 따라 하기형 AGV 실습</a:t>
+            </a:r>
+          </a:p>
+        </p:txBody>
+      </p:sp>
+      <p:sp>
+        <p:nvSpPr>
+          <p:cNvPr id="5" name="TextBox 4"/>
+          <p:cNvSpPr txBox="1"/>
+          <p:nvPr/>
+        </p:nvSpPr>
+        <p:spPr>
+          <a:xfrm>
+            <a:off x="9144000" y="6510528"/>
+            <a:ext cx="2468880" cy="201168"/>
+          </a:xfrm>
+          <a:prstGeom prst="rect">
+            <a:avLst/>
+          </a:prstGeom>
+          <a:noFill/>
+        </p:spPr>
+        <p:txBody>
+          <a:bodyPr wrap="square" lIns="73152" rIns="73152" tIns="36576" bIns="36576">
+            <a:spAutoFit/>
+          </a:bodyPr>
+          <a:lstStyle/>
+          <a:p>
+            <a:pPr algn="r">
+              <a:spcAft>
+                <a:spcPts val="0"/>
+              </a:spcAft>
+              <a:defRPr sz="1000" b="0">
+                <a:solidFill>
+                  <a:srgbClr val="5C6672"/>
+                </a:solidFill>
+                <a:latin typeface="Noto Sans CJK KR"/>
+              </a:defRPr>
+            </a:pPr>
+            <a:r>
+              <a:t>명령·파일 경로는 슬라이드에서 복사 가능</a:t>
+            </a:r>
+          </a:p>
+        </p:txBody>
+      </p:sp>
+      <p:sp>
+        <p:nvSpPr>
+          <p:cNvPr id="6" name="Rectangle 5"/>
+          <p:cNvSpPr/>
+          <p:nvPr/>
+        </p:nvSpPr>
+        <p:spPr>
+          <a:xfrm>
+            <a:off x="566928" y="1188720"/>
+            <a:ext cx="11064240" cy="347472"/>
+          </a:xfrm>
+          <a:prstGeom prst="rect">
+            <a:avLst/>
+          </a:prstGeom>
+          <a:solidFill>
+            <a:srgbClr val="F4F7FB"/>
+          </a:solidFill>
+          <a:ln>
+            <a:solidFill>
+              <a:srgbClr val="F4F7FB"/>
+            </a:solidFill>
+          </a:ln>
+        </p:spPr>
+        <p:style>
+          <a:lnRef idx="1">
+            <a:schemeClr val="accent1"/>
+          </a:lnRef>
+          <a:fillRef idx="3">
+            <a:schemeClr val="accent1"/>
+          </a:fillRef>
+          <a:effectRef idx="2">
+            <a:schemeClr val="accent1"/>
+          </a:effectRef>
+          <a:fontRef idx="minor">
+            <a:schemeClr val="lt1"/>
+          </a:fontRef>
+        </p:style>
+        <p:txBody>
+          <a:bodyPr rtlCol="0" anchor="ctr" wrap="square" lIns="73152" rIns="73152" tIns="36576" bIns="36576"/>
+          <a:lstStyle/>
+          <a:p>
+            <a:pPr algn="l">
+              <a:spcAft>
+                <a:spcPts val="0"/>
+              </a:spcAft>
+              <a:defRPr sz="1300" b="1">
+                <a:solidFill>
+                  <a:srgbClr val="122C4E"/>
+                </a:solidFill>
+                <a:latin typeface="Noto Sans CJK KR"/>
+              </a:defRPr>
+            </a:pPr>
+            <a:r>
+              <a:t>현재 단계 미니 실습    |    현재 폴더 ~/ros2_curri/my_agv_ws    |    현재 터미널</a:t>
+            </a:r>
+          </a:p>
+        </p:txBody>
+      </p:sp>
+      <p:sp>
+        <p:nvSpPr>
+          <p:cNvPr id="7" name="Rounded Rectangle 6"/>
+          <p:cNvSpPr/>
+          <p:nvPr/>
+        </p:nvSpPr>
+        <p:spPr>
+          <a:xfrm>
+            <a:off x="749808" y="1874519"/>
+            <a:ext cx="10652760" cy="1993392"/>
+          </a:xfrm>
+          <a:prstGeom prst="roundRect">
+            <a:avLst/>
+          </a:prstGeom>
+          <a:solidFill>
+            <a:srgbClr val="FFF8EB"/>
+          </a:solidFill>
+          <a:ln>
+            <a:solidFill>
+              <a:srgbClr val="ECC680"/>
+            </a:solidFill>
+          </a:ln>
+        </p:spPr>
+        <p:style>
+          <a:lnRef idx="1">
+            <a:schemeClr val="accent1"/>
+          </a:lnRef>
+          <a:fillRef idx="3">
+            <a:schemeClr val="accent1"/>
+          </a:fillRef>
+          <a:effectRef idx="2">
+            <a:schemeClr val="accent1"/>
+          </a:effectRef>
+          <a:fontRef idx="minor">
+            <a:schemeClr val="lt1"/>
+          </a:fontRef>
+        </p:style>
+        <p:txBody>
+          <a:bodyPr rtlCol="0" anchor="ctr" wrap="square" lIns="73152" rIns="73152" tIns="36576" bIns="36576"/>
+          <a:lstStyle/>
+          <a:p>
+            <a:pPr algn="ctr">
+              <a:spcAft>
+                <a:spcPts val="0"/>
+              </a:spcAft>
+              <a:defRPr sz="2300" b="1">
+                <a:solidFill>
+                  <a:srgbClr val="122C4E"/>
+                </a:solidFill>
+                <a:latin typeface="Noto Sans CJK KR"/>
+              </a:defRPr>
+            </a:pPr>
+            <a:r>
+              <a:t>wheel_radius를 0.08 m에서 0.10 m로 바꾸고 RobotModel에서 바퀴 크기 변화를 확인한다.</a:t>
+            </a:r>
+          </a:p>
+        </p:txBody>
+      </p:sp>
+      <p:sp>
+        <p:nvSpPr>
+          <p:cNvPr id="8" name="TextBox 7"/>
+          <p:cNvSpPr txBox="1"/>
+          <p:nvPr/>
+        </p:nvSpPr>
+        <p:spPr>
+          <a:xfrm>
+            <a:off x="877824" y="4590288"/>
+            <a:ext cx="10241280" cy="594360"/>
+          </a:xfrm>
+          <a:prstGeom prst="rect">
+            <a:avLst/>
+          </a:prstGeom>
+          <a:noFill/>
+        </p:spPr>
+        <p:txBody>
+          <a:bodyPr wrap="square" lIns="73152" rIns="73152" tIns="36576" bIns="36576">
+            <a:spAutoFit/>
+          </a:bodyPr>
+          <a:lstStyle/>
+          <a:p>
+            <a:pPr algn="ctr">
+              <a:spcAft>
+                <a:spcPts val="0"/>
+              </a:spcAft>
+              <a:defRPr sz="1900" b="1">
+                <a:solidFill>
+                  <a:srgbClr val="DB7E22"/>
+                </a:solidFill>
+                <a:latin typeface="Noto Sans CJK KR"/>
+              </a:defRPr>
+            </a:pPr>
+            <a:r>
+              <a:t>기록할 것: 바꾼 값(단위) · 기대한 변화 · 실제 출력/화면 · 원래 값으로 되돌린 결과</a:t>
+            </a:r>
+          </a:p>
+        </p:txBody>
+      </p:sp>
+    </p:spTree>
+  </p:cSld>
+  <p:clrMapOvr>
+    <a:masterClrMapping/>
+  </p:clrMapOvr>
+</p:sld>
+</file>
+
+<file path=ppt/slides/slide25.xml><?xml version="1.0" encoding="utf-8"?>
+<p:sld xmlns:a="http://schemas.openxmlformats.org/drawingml/2006/main" xmlns:p="http://schemas.openxmlformats.org/presentationml/2006/main" xmlns:r="http://schemas.openxmlformats.org/officeDocument/2006/relationships">
+  <p:cSld>
+    <p:spTree>
+      <p:nvGrpSpPr>
+        <p:cNvPr id="1" name=""/>
+        <p:cNvGrpSpPr/>
+        <p:nvPr/>
+      </p:nvGrpSpPr>
+      <p:grpSpPr/>
+      <p:sp>
+        <p:nvSpPr>
+          <p:cNvPr id="2" name="TextBox 1"/>
+          <p:cNvSpPr txBox="1"/>
+          <p:nvPr/>
+        </p:nvSpPr>
+        <p:spPr>
+          <a:xfrm>
+            <a:off x="566928" y="347472"/>
+            <a:ext cx="10881360" cy="438912"/>
+          </a:xfrm>
+          <a:prstGeom prst="rect">
+            <a:avLst/>
+          </a:prstGeom>
+          <a:noFill/>
+        </p:spPr>
+        <p:txBody>
+          <a:bodyPr wrap="square" lIns="73152" rIns="73152" tIns="36576" bIns="36576">
+            <a:spAutoFit/>
+          </a:bodyPr>
+          <a:lstStyle/>
+          <a:p>
+            <a:pPr algn="l">
+              <a:spcAft>
+                <a:spcPts val="0"/>
+              </a:spcAft>
+              <a:defRPr sz="3200" b="1">
+                <a:solidFill>
+                  <a:srgbClr val="122C4E"/>
+                </a:solidFill>
+                <a:latin typeface="Noto Sans CJK KR"/>
+              </a:defRPr>
+            </a:pPr>
+            <a:r>
+              <a:t>내 프로젝트 체크포인트를 저장하고 다음 모듈로 넘긴다</a:t>
+            </a:r>
+          </a:p>
+        </p:txBody>
+      </p:sp>
+      <p:sp>
+        <p:nvSpPr>
+          <p:cNvPr id="3" name="TextBox 2"/>
+          <p:cNvSpPr txBox="1"/>
+          <p:nvPr/>
+        </p:nvSpPr>
+        <p:spPr>
+          <a:xfrm>
+            <a:off x="603504" y="859536"/>
+            <a:ext cx="10698480" cy="292608"/>
+          </a:xfrm>
+          <a:prstGeom prst="rect">
+            <a:avLst/>
+          </a:prstGeom>
+          <a:noFill/>
+        </p:spPr>
+        <p:txBody>
+          <a:bodyPr wrap="square" lIns="73152" rIns="73152" tIns="36576" bIns="36576">
+            <a:spAutoFit/>
+          </a:bodyPr>
+          <a:lstStyle/>
+          <a:p>
+            <a:pPr algn="l">
+              <a:spcAft>
+                <a:spcPts val="0"/>
+              </a:spcAft>
+              <a:defRPr sz="1700" b="0">
+                <a:solidFill>
+                  <a:srgbClr val="5C6672"/>
+                </a:solidFill>
+                <a:latin typeface="Noto Sans CJK KR"/>
+              </a:defRPr>
+            </a:pPr>
+            <a:r>
+              <a:t>Complete는 복구용 비교 기준이고, 다음 단계는 내가 직접 만든 workspace에서 계속합니다.</a:t>
+            </a:r>
+          </a:p>
+        </p:txBody>
+      </p:sp>
+      <p:sp>
+        <p:nvSpPr>
+          <p:cNvPr id="4" name="TextBox 3"/>
+          <p:cNvSpPr txBox="1"/>
+          <p:nvPr/>
+        </p:nvSpPr>
+        <p:spPr>
+          <a:xfrm>
+            <a:off x="530352" y="6510528"/>
+            <a:ext cx="7772400" cy="201168"/>
+          </a:xfrm>
+          <a:prstGeom prst="rect">
+            <a:avLst/>
+          </a:prstGeom>
+          <a:noFill/>
+        </p:spPr>
+        <p:txBody>
+          <a:bodyPr wrap="square" lIns="73152" rIns="73152" tIns="36576" bIns="36576">
+            <a:spAutoFit/>
+          </a:bodyPr>
+          <a:lstStyle/>
+          <a:p>
+            <a:pPr algn="l">
+              <a:spcAft>
+                <a:spcPts val="0"/>
+              </a:spcAft>
+              <a:defRPr sz="1000" b="0">
+                <a:solidFill>
+                  <a:srgbClr val="5C6672"/>
+                </a:solidFill>
+                <a:latin typeface="Noto Sans CJK KR"/>
+              </a:defRPr>
+            </a:pPr>
+            <a:r>
+              <a:t>ROS 2 Jazzy · Gazebo Harmonic · M05 · 따라 하기형 AGV 실습</a:t>
+            </a:r>
+          </a:p>
+        </p:txBody>
+      </p:sp>
+      <p:sp>
+        <p:nvSpPr>
+          <p:cNvPr id="5" name="TextBox 4"/>
+          <p:cNvSpPr txBox="1"/>
+          <p:nvPr/>
+        </p:nvSpPr>
+        <p:spPr>
+          <a:xfrm>
+            <a:off x="9144000" y="6510528"/>
+            <a:ext cx="2468880" cy="201168"/>
+          </a:xfrm>
+          <a:prstGeom prst="rect">
+            <a:avLst/>
+          </a:prstGeom>
+          <a:noFill/>
+        </p:spPr>
+        <p:txBody>
+          <a:bodyPr wrap="square" lIns="73152" rIns="73152" tIns="36576" bIns="36576">
+            <a:spAutoFit/>
+          </a:bodyPr>
+          <a:lstStyle/>
+          <a:p>
+            <a:pPr algn="r">
+              <a:spcAft>
+                <a:spcPts val="0"/>
+              </a:spcAft>
+              <a:defRPr sz="1000" b="0">
+                <a:solidFill>
+                  <a:srgbClr val="5C6672"/>
+                </a:solidFill>
+                <a:latin typeface="Noto Sans CJK KR"/>
+              </a:defRPr>
+            </a:pPr>
+            <a:r>
+              <a:t>명령·파일 경로는 슬라이드에서 복사 가능</a:t>
+            </a:r>
+          </a:p>
+        </p:txBody>
+      </p:sp>
+      <p:sp>
+        <p:nvSpPr>
+          <p:cNvPr id="6" name="Rectangle 5"/>
+          <p:cNvSpPr/>
+          <p:nvPr/>
+        </p:nvSpPr>
+        <p:spPr>
+          <a:xfrm>
+            <a:off x="566928" y="1188720"/>
+            <a:ext cx="11064240" cy="347472"/>
+          </a:xfrm>
+          <a:prstGeom prst="rect">
+            <a:avLst/>
+          </a:prstGeom>
+          <a:solidFill>
+            <a:srgbClr val="F4F7FB"/>
+          </a:solidFill>
+          <a:ln>
+            <a:solidFill>
+              <a:srgbClr val="F4F7FB"/>
+            </a:solidFill>
+          </a:ln>
+        </p:spPr>
+        <p:style>
+          <a:lnRef idx="1">
+            <a:schemeClr val="accent1"/>
+          </a:lnRef>
+          <a:fillRef idx="3">
+            <a:schemeClr val="accent1"/>
+          </a:fillRef>
+          <a:effectRef idx="2">
+            <a:schemeClr val="accent1"/>
+          </a:effectRef>
+          <a:fontRef idx="minor">
+            <a:schemeClr val="lt1"/>
+          </a:fontRef>
+        </p:style>
+        <p:txBody>
+          <a:bodyPr rtlCol="0" anchor="ctr" wrap="square" lIns="73152" rIns="73152" tIns="36576" bIns="36576"/>
+          <a:lstStyle/>
+          <a:p>
+            <a:pPr algn="l">
+              <a:spcAft>
+                <a:spcPts val="0"/>
+              </a:spcAft>
+              <a:defRPr sz="1300" b="1">
+                <a:solidFill>
+                  <a:srgbClr val="122C4E"/>
+                </a:solidFill>
+                <a:latin typeface="Noto Sans CJK KR"/>
+              </a:defRPr>
+            </a:pPr>
+            <a:r>
+              <a:t>현재 단계 체크포인트    |    현재 폴더 ~/ros2_curri/my_agv_ws    |    현재 터미널</a:t>
+            </a:r>
+          </a:p>
+        </p:txBody>
+      </p:sp>
+      <p:sp>
+        <p:nvSpPr>
+          <p:cNvPr id="7" name="Rounded Rectangle 6"/>
+          <p:cNvSpPr/>
+          <p:nvPr/>
+        </p:nvSpPr>
+        <p:spPr>
+          <a:xfrm>
+            <a:off x="685800" y="1737360"/>
+            <a:ext cx="10972800" cy="3611880"/>
+          </a:xfrm>
+          <a:prstGeom prst="roundRect">
+            <a:avLst/>
+          </a:prstGeom>
+          <a:solidFill>
+            <a:srgbClr val="F4F7FB"/>
+          </a:solidFill>
+          <a:ln>
+            <a:solidFill>
+              <a:srgbClr val="D2DCE8"/>
+            </a:solidFill>
+          </a:ln>
+        </p:spPr>
+        <p:style>
+          <a:lnRef idx="1">
+            <a:schemeClr val="accent1"/>
+          </a:lnRef>
+          <a:fillRef idx="3">
+            <a:schemeClr val="accent1"/>
+          </a:fillRef>
+          <a:effectRef idx="2">
+            <a:schemeClr val="accent1"/>
+          </a:effectRef>
+          <a:fontRef idx="minor">
+            <a:schemeClr val="lt1"/>
+          </a:fontRef>
+        </p:style>
+        <p:txBody>
+          <a:bodyPr rtlCol="0" anchor="ctr"/>
+          <a:lstStyle/>
+          <a:p>
+            <a:pPr algn="ctr"/>
+          </a:p>
+        </p:txBody>
+      </p:sp>
+      <p:sp>
+        <p:nvSpPr>
+          <p:cNvPr id="8" name="TextBox 7"/>
+          <p:cNvSpPr txBox="1"/>
+          <p:nvPr/>
+        </p:nvSpPr>
+        <p:spPr>
+          <a:xfrm>
+            <a:off x="896112" y="1993392"/>
+            <a:ext cx="10332720" cy="2971800"/>
+          </a:xfrm>
+          <a:prstGeom prst="rect">
+            <a:avLst/>
+          </a:prstGeom>
+          <a:noFill/>
+        </p:spPr>
+        <p:txBody>
+          <a:bodyPr wrap="square" lIns="109728" rIns="109728">
+            <a:spAutoFit/>
+          </a:bodyPr>
+          <a:lstStyle/>
+          <a:p>
+            <a:pPr>
+              <a:spcAft>
+                <a:spcPts val="800"/>
+              </a:spcAft>
+              <a:defRPr sz="1800">
+                <a:solidFill>
+                  <a:srgbClr val="122C4E"/>
+                </a:solidFill>
+                <a:latin typeface="Noto Sans CJK KR"/>
+              </a:defRPr>
+            </a:pPr>
+            <a:r>
+              <a:t>• □ 완료 화면: RobotModel과 TF에서 base, 두 wheel, camera, lidar, imu 연결을 확인한다.</a:t>
+            </a:r>
+          </a:p>
+          <a:p>
+            <a:pPr>
+              <a:spcAft>
+                <a:spcPts val="800"/>
+              </a:spcAft>
+              <a:defRPr sz="1800">
+                <a:solidFill>
+                  <a:srgbClr val="122C4E"/>
+                </a:solidFill>
+                <a:latin typeface="Noto Sans CJK KR"/>
+              </a:defRPr>
+            </a:pPr>
+            <a:r>
+              <a:t>• □ 막혔을 때 비교할 Complete: blocks/B_robot_build/M05_urdf_basic_model/complete/</a:t>
+            </a:r>
+          </a:p>
+          <a:p>
+            <a:pPr>
+              <a:spcAft>
+                <a:spcPts val="800"/>
+              </a:spcAft>
+              <a:defRPr sz="1800">
+                <a:solidFill>
+                  <a:srgbClr val="122C4E"/>
+                </a:solidFill>
+                <a:latin typeface="Noto Sans CJK KR"/>
+              </a:defRPr>
+            </a:pPr>
+            <a:r>
+              <a:t>• □ 정상 로그·캡처: logs/validation.log, screenshots/validation_terminal.png</a:t>
+            </a:r>
+          </a:p>
+          <a:p>
+            <a:pPr>
+              <a:spcAft>
+                <a:spcPts val="800"/>
+              </a:spcAft>
+              <a:defRPr sz="1800">
+                <a:solidFill>
+                  <a:srgbClr val="122C4E"/>
+                </a:solidFill>
+                <a:latin typeface="Noto Sans CJK KR"/>
+              </a:defRPr>
+            </a:pPr>
+            <a:r>
+              <a:t>• □ 버전 식별: CHECKSUM_or_TAG.txt의 SHA-256 manifest</a:t>
+            </a:r>
+          </a:p>
+          <a:p>
+            <a:pPr>
+              <a:spcAft>
+                <a:spcPts val="800"/>
+              </a:spcAft>
+              <a:defRPr sz="1800">
+                <a:solidFill>
+                  <a:srgbClr val="122C4E"/>
+                </a:solidFill>
+                <a:latin typeface="Noto Sans CJK KR"/>
+              </a:defRPr>
+            </a:pPr>
+            <a:r>
+              <a:t>• □ 다음 시작 조건: M06 Xacro 모듈화</a:t>
+            </a:r>
+          </a:p>
+        </p:txBody>
+      </p:sp>
+      <p:sp>
+        <p:nvSpPr>
+          <p:cNvPr id="9" name="TextBox 8"/>
+          <p:cNvSpPr txBox="1"/>
+          <p:nvPr/>
+        </p:nvSpPr>
+        <p:spPr>
+          <a:xfrm>
+            <a:off x="868680" y="5596128"/>
+            <a:ext cx="10515600" cy="338328"/>
+          </a:xfrm>
+          <a:prstGeom prst="rect">
+            <a:avLst/>
+          </a:prstGeom>
+          <a:noFill/>
+        </p:spPr>
+        <p:txBody>
+          <a:bodyPr wrap="square" lIns="73152" rIns="73152" tIns="36576" bIns="36576">
+            <a:spAutoFit/>
+          </a:bodyPr>
+          <a:lstStyle/>
+          <a:p>
+            <a:pPr algn="ctr">
+              <a:spcAft>
+                <a:spcPts val="0"/>
+              </a:spcAft>
+              <a:defRPr sz="1700" b="1">
+                <a:solidFill>
+                  <a:srgbClr val="2A8B5A"/>
+                </a:solidFill>
+                <a:latin typeface="Noto Sans CJK KR"/>
+              </a:defRPr>
+            </a:pPr>
+            <a:r>
+              <a:t>다음 모듈을 시작하기 전, 내 src의 변경사항을 저장하고 현재 완료 조건을 다시 확인합니다.</a:t>
+            </a:r>
+          </a:p>
+        </p:txBody>
+      </p:sp>
+    </p:spTree>
+  </p:cSld>
+  <p:clrMapOvr>
+    <a:masterClrMapping/>
+  </p:clrMapOvr>
+</p:sld>
+</file>
+
+<file path=ppt/slides/slide26.xml><?xml version="1.0" encoding="utf-8"?>
 <p:sld xmlns:a="http://schemas.openxmlformats.org/drawingml/2006/main" xmlns:p="http://schemas.openxmlformats.org/presentationml/2006/main" xmlns:r="http://schemas.openxmlformats.org/officeDocument/2006/relationships">
   <p:cSld>
     <p:spTree>

--- a/blocks/B_robot_build/M05_urdf_basic_model/M05_URDF로_기본_AGV_제작.pptx
+++ b/blocks/B_robot_build/M05_urdf_basic_model/M05_URDF로_기본_AGV_제작.pptx
@@ -5913,7 +5913,7 @@
               <a:spcAft>
                 <a:spcPts val="0"/>
               </a:spcAft>
-              <a:defRPr sz="1800" b="1">
+              <a:defRPr sz="1400" b="1">
                 <a:solidFill>
                   <a:srgbClr val="FFFFFF"/>
                 </a:solidFill>
@@ -5921,7 +5921,7 @@
               </a:defRPr>
             </a:pPr>
             <a:r>
-              <a:t>M05 · Block B · ROS 2 + Gazebo Sim AGV</a:t>
+              <a:t>ROS 2 기반 AGV End-to-End 개발 커리큘럼 · M05 · Block B</a:t>
             </a:r>
           </a:p>
         </p:txBody>
@@ -6131,7 +6131,7 @@
               <a:spcAft>
                 <a:spcPts val="0"/>
               </a:spcAft>
-              <a:defRPr sz="1000" b="0">
+              <a:defRPr sz="900" b="0">
                 <a:solidFill>
                   <a:srgbClr val="5C6672"/>
                 </a:solidFill>
@@ -6139,7 +6139,7 @@
               </a:defRPr>
             </a:pPr>
             <a:r>
-              <a:t>ROS 2 Jazzy · Gazebo Harmonic · M05 · 따라 하기형 AGV 실습</a:t>
+              <a:t>ROS 2 기반 AGV End-to-End 개발 커리큘럼 · M05 · Block B</a:t>
             </a:r>
           </a:p>
         </p:txBody>
@@ -6305,7 +6305,7 @@
               <a:spcAft>
                 <a:spcPts val="0"/>
               </a:spcAft>
-              <a:defRPr sz="1000" b="0">
+              <a:defRPr sz="900" b="0">
                 <a:solidFill>
                   <a:srgbClr val="5C6672"/>
                 </a:solidFill>
@@ -6313,7 +6313,7 @@
               </a:defRPr>
             </a:pPr>
             <a:r>
-              <a:t>ROS 2 Jazzy · Gazebo Harmonic · M05 · 따라 하기형 AGV 실습</a:t>
+              <a:t>ROS 2 기반 AGV End-to-End 개발 커리큘럼 · M05 · Block B</a:t>
             </a:r>
           </a:p>
         </p:txBody>
@@ -7068,7 +7068,7 @@
               <a:spcAft>
                 <a:spcPts val="0"/>
               </a:spcAft>
-              <a:defRPr sz="1000" b="0">
+              <a:defRPr sz="900" b="0">
                 <a:solidFill>
                   <a:srgbClr val="5C6672"/>
                 </a:solidFill>
@@ -7076,7 +7076,7 @@
               </a:defRPr>
             </a:pPr>
             <a:r>
-              <a:t>ROS 2 Jazzy · Gazebo Harmonic · M05 · 따라 하기형 AGV 실습</a:t>
+              <a:t>ROS 2 기반 AGV End-to-End 개발 커리큘럼 · M05 · Block B</a:t>
             </a:r>
           </a:p>
         </p:txBody>
@@ -7483,7 +7483,7 @@
               <a:spcAft>
                 <a:spcPts val="0"/>
               </a:spcAft>
-              <a:defRPr sz="1000" b="0">
+              <a:defRPr sz="900" b="0">
                 <a:solidFill>
                   <a:srgbClr val="5C6672"/>
                 </a:solidFill>
@@ -7491,7 +7491,7 @@
               </a:defRPr>
             </a:pPr>
             <a:r>
-              <a:t>ROS 2 Jazzy · Gazebo Harmonic · M05 · 따라 하기형 AGV 실습</a:t>
+              <a:t>ROS 2 기반 AGV End-to-End 개발 커리큘럼 · M05 · Block B</a:t>
             </a:r>
           </a:p>
         </p:txBody>
@@ -8011,7 +8011,7 @@
               <a:spcAft>
                 <a:spcPts val="0"/>
               </a:spcAft>
-              <a:defRPr sz="1000" b="0">
+              <a:defRPr sz="900" b="0">
                 <a:solidFill>
                   <a:srgbClr val="5C6672"/>
                 </a:solidFill>
@@ -8019,7 +8019,7 @@
               </a:defRPr>
             </a:pPr>
             <a:r>
-              <a:t>ROS 2 Jazzy · Gazebo Harmonic · M05 · 따라 하기형 AGV 실습</a:t>
+              <a:t>ROS 2 기반 AGV End-to-End 개발 커리큘럼 · M05 · Block B</a:t>
             </a:r>
           </a:p>
         </p:txBody>
@@ -8808,7 +8808,7 @@
               <a:spcAft>
                 <a:spcPts val="0"/>
               </a:spcAft>
-              <a:defRPr sz="1000" b="0">
+              <a:defRPr sz="900" b="0">
                 <a:solidFill>
                   <a:srgbClr val="5C6672"/>
                 </a:solidFill>
@@ -8816,7 +8816,7 @@
               </a:defRPr>
             </a:pPr>
             <a:r>
-              <a:t>ROS 2 Jazzy · Gazebo Harmonic · M05 · 따라 하기형 AGV 실습</a:t>
+              <a:t>ROS 2 기반 AGV End-to-End 개발 커리큘럼 · M05 · Block B</a:t>
             </a:r>
           </a:p>
         </p:txBody>
@@ -9385,7 +9385,7 @@
               <a:spcAft>
                 <a:spcPts val="0"/>
               </a:spcAft>
-              <a:defRPr sz="1000" b="0">
+              <a:defRPr sz="900" b="0">
                 <a:solidFill>
                   <a:srgbClr val="5C6672"/>
                 </a:solidFill>
@@ -9393,7 +9393,7 @@
               </a:defRPr>
             </a:pPr>
             <a:r>
-              <a:t>ROS 2 Jazzy · Gazebo Harmonic · M05 · 따라 하기형 AGV 실습</a:t>
+              <a:t>ROS 2 기반 AGV End-to-End 개발 커리큘럼 · M05 · Block B</a:t>
             </a:r>
           </a:p>
         </p:txBody>
@@ -9859,7 +9859,7 @@
               <a:spcAft>
                 <a:spcPts val="0"/>
               </a:spcAft>
-              <a:defRPr sz="1000" b="0">
+              <a:defRPr sz="900" b="0">
                 <a:solidFill>
                   <a:srgbClr val="5C6672"/>
                 </a:solidFill>
@@ -9867,7 +9867,7 @@
               </a:defRPr>
             </a:pPr>
             <a:r>
-              <a:t>ROS 2 Jazzy · Gazebo Harmonic · M05 · 따라 하기형 AGV 실습</a:t>
+              <a:t>ROS 2 기반 AGV End-to-End 개발 커리큘럼 · M05 · Block B</a:t>
             </a:r>
           </a:p>
         </p:txBody>
@@ -10293,7 +10293,7 @@
               <a:spcAft>
                 <a:spcPts val="0"/>
               </a:spcAft>
-              <a:defRPr sz="1000" b="0">
+              <a:defRPr sz="900" b="0">
                 <a:solidFill>
                   <a:srgbClr val="5C6672"/>
                 </a:solidFill>
@@ -10301,7 +10301,7 @@
               </a:defRPr>
             </a:pPr>
             <a:r>
-              <a:t>ROS 2 Jazzy · Gazebo Harmonic · M05 · 따라 하기형 AGV 실습</a:t>
+              <a:t>ROS 2 기반 AGV End-to-End 개발 커리큘럼 · M05 · Block B</a:t>
             </a:r>
           </a:p>
         </p:txBody>
@@ -10743,7 +10743,7 @@
               <a:spcAft>
                 <a:spcPts val="0"/>
               </a:spcAft>
-              <a:defRPr sz="1000" b="0">
+              <a:defRPr sz="900" b="0">
                 <a:solidFill>
                   <a:srgbClr val="5C6672"/>
                 </a:solidFill>
@@ -10751,7 +10751,7 @@
               </a:defRPr>
             </a:pPr>
             <a:r>
-              <a:t>ROS 2 Jazzy · Gazebo Harmonic · M05 · 따라 하기형 AGV 실습</a:t>
+              <a:t>ROS 2 기반 AGV End-to-End 개발 커리큘럼 · M05 · Block B</a:t>
             </a:r>
           </a:p>
         </p:txBody>
@@ -11197,7 +11197,7 @@
               <a:spcAft>
                 <a:spcPts val="0"/>
               </a:spcAft>
-              <a:defRPr sz="1000" b="0">
+              <a:defRPr sz="900" b="0">
                 <a:solidFill>
                   <a:srgbClr val="5C6672"/>
                 </a:solidFill>
@@ -11205,7 +11205,7 @@
               </a:defRPr>
             </a:pPr>
             <a:r>
-              <a:t>ROS 2 Jazzy · Gazebo Harmonic · M05 · 따라 하기형 AGV 실습</a:t>
+              <a:t>ROS 2 기반 AGV End-to-End 개발 커리큘럼 · M05 · Block B</a:t>
             </a:r>
           </a:p>
         </p:txBody>
@@ -11573,7 +11573,7 @@
               <a:spcAft>
                 <a:spcPts val="0"/>
               </a:spcAft>
-              <a:defRPr sz="1000" b="0">
+              <a:defRPr sz="900" b="0">
                 <a:solidFill>
                   <a:srgbClr val="5C6672"/>
                 </a:solidFill>
@@ -11581,7 +11581,7 @@
               </a:defRPr>
             </a:pPr>
             <a:r>
-              <a:t>ROS 2 Jazzy · Gazebo Harmonic · M05 · 따라 하기형 AGV 실습</a:t>
+              <a:t>ROS 2 기반 AGV End-to-End 개발 커리큘럼 · M05 · Block B</a:t>
             </a:r>
           </a:p>
         </p:txBody>
@@ -12034,7 +12034,7 @@
               <a:spcAft>
                 <a:spcPts val="0"/>
               </a:spcAft>
-              <a:defRPr sz="1000" b="0">
+              <a:defRPr sz="900" b="0">
                 <a:solidFill>
                   <a:srgbClr val="5C6672"/>
                 </a:solidFill>
@@ -12042,7 +12042,7 @@
               </a:defRPr>
             </a:pPr>
             <a:r>
-              <a:t>ROS 2 Jazzy · Gazebo Harmonic · M05 · 따라 하기형 AGV 실습</a:t>
+              <a:t>ROS 2 기반 AGV End-to-End 개발 커리큘럼 · M05 · Block B</a:t>
             </a:r>
           </a:p>
         </p:txBody>
@@ -12271,7 +12271,7 @@
               <a:spcAft>
                 <a:spcPts val="0"/>
               </a:spcAft>
-              <a:defRPr sz="1000" b="0">
+              <a:defRPr sz="900" b="0">
                 <a:solidFill>
                   <a:srgbClr val="5C6672"/>
                 </a:solidFill>
@@ -12279,7 +12279,7 @@
               </a:defRPr>
             </a:pPr>
             <a:r>
-              <a:t>ROS 2 Jazzy · Gazebo Harmonic · M05 · 따라 하기형 AGV 실습</a:t>
+              <a:t>ROS 2 기반 AGV End-to-End 개발 커리큘럼 · M05 · Block B</a:t>
             </a:r>
           </a:p>
         </p:txBody>
@@ -12674,7 +12674,7 @@
               <a:spcAft>
                 <a:spcPts val="0"/>
               </a:spcAft>
-              <a:defRPr sz="1000" b="0">
+              <a:defRPr sz="900" b="0">
                 <a:solidFill>
                   <a:srgbClr val="5C6672"/>
                 </a:solidFill>
@@ -12682,7 +12682,7 @@
               </a:defRPr>
             </a:pPr>
             <a:r>
-              <a:t>ROS 2 Jazzy · Gazebo Harmonic · M05 · 따라 하기형 AGV 실습</a:t>
+              <a:t>ROS 2 기반 AGV End-to-End 개발 커리큘럼 · M05 · Block B</a:t>
             </a:r>
           </a:p>
         </p:txBody>
@@ -13199,7 +13199,7 @@
               <a:spcAft>
                 <a:spcPts val="0"/>
               </a:spcAft>
-              <a:defRPr sz="1000" b="0">
+              <a:defRPr sz="900" b="0">
                 <a:solidFill>
                   <a:srgbClr val="5C6672"/>
                 </a:solidFill>
@@ -13207,7 +13207,7 @@
               </a:defRPr>
             </a:pPr>
             <a:r>
-              <a:t>ROS 2 Jazzy · Gazebo Harmonic · M05 · 따라 하기형 AGV 실습</a:t>
+              <a:t>ROS 2 기반 AGV End-to-End 개발 커리큘럼 · M05 · Block B</a:t>
             </a:r>
           </a:p>
         </p:txBody>
@@ -13583,7 +13583,7 @@
               <a:spcAft>
                 <a:spcPts val="0"/>
               </a:spcAft>
-              <a:defRPr sz="1000" b="0">
+              <a:defRPr sz="900" b="0">
                 <a:solidFill>
                   <a:srgbClr val="5C6672"/>
                 </a:solidFill>
@@ -13591,7 +13591,7 @@
               </a:defRPr>
             </a:pPr>
             <a:r>
-              <a:t>ROS 2 Jazzy · Gazebo Harmonic · M05 · 따라 하기형 AGV 실습</a:t>
+              <a:t>ROS 2 기반 AGV End-to-End 개발 커리큘럼 · M05 · Block B</a:t>
             </a:r>
           </a:p>
         </p:txBody>
@@ -13912,7 +13912,7 @@
               <a:spcAft>
                 <a:spcPts val="0"/>
               </a:spcAft>
-              <a:defRPr sz="1000" b="0">
+              <a:defRPr sz="900" b="0">
                 <a:solidFill>
                   <a:srgbClr val="5C6672"/>
                 </a:solidFill>
@@ -13920,7 +13920,7 @@
               </a:defRPr>
             </a:pPr>
             <a:r>
-              <a:t>ROS 2 Jazzy · Gazebo Harmonic · M05 · 따라 하기형 AGV 실습</a:t>
+              <a:t>ROS 2 기반 AGV End-to-End 개발 커리큘럼 · M05 · Block B</a:t>
             </a:r>
           </a:p>
         </p:txBody>
@@ -14331,7 +14331,7 @@
               <a:spcAft>
                 <a:spcPts val="0"/>
               </a:spcAft>
-              <a:defRPr sz="1000" b="0">
+              <a:defRPr sz="900" b="0">
                 <a:solidFill>
                   <a:srgbClr val="5C6672"/>
                 </a:solidFill>
@@ -14339,7 +14339,7 @@
               </a:defRPr>
             </a:pPr>
             <a:r>
-              <a:t>ROS 2 Jazzy · Gazebo Harmonic · M05 · 따라 하기형 AGV 실습</a:t>
+              <a:t>ROS 2 기반 AGV End-to-End 개발 커리큘럼 · M05 · Block B</a:t>
             </a:r>
           </a:p>
         </p:txBody>
@@ -14862,7 +14862,7 @@
               <a:spcAft>
                 <a:spcPts val="0"/>
               </a:spcAft>
-              <a:defRPr sz="1000" b="0">
+              <a:defRPr sz="900" b="0">
                 <a:solidFill>
                   <a:srgbClr val="5C6672"/>
                 </a:solidFill>
@@ -14870,7 +14870,7 @@
               </a:defRPr>
             </a:pPr>
             <a:r>
-              <a:t>ROS 2 Jazzy · Gazebo Harmonic · M05 · 따라 하기형 AGV 실습</a:t>
+              <a:t>ROS 2 기반 AGV End-to-End 개발 커리큘럼 · M05 · Block B</a:t>
             </a:r>
           </a:p>
         </p:txBody>
@@ -15281,7 +15281,7 @@
               <a:spcAft>
                 <a:spcPts val="0"/>
               </a:spcAft>
-              <a:defRPr sz="1000" b="0">
+              <a:defRPr sz="900" b="0">
                 <a:solidFill>
                   <a:srgbClr val="5C6672"/>
                 </a:solidFill>
@@ -15289,7 +15289,7 @@
               </a:defRPr>
             </a:pPr>
             <a:r>
-              <a:t>ROS 2 Jazzy · Gazebo Harmonic · M05 · 따라 하기형 AGV 실습</a:t>
+              <a:t>ROS 2 기반 AGV End-to-End 개발 커리큘럼 · M05 · Block B</a:t>
             </a:r>
           </a:p>
         </p:txBody>
@@ -15614,7 +15614,7 @@
               <a:spcAft>
                 <a:spcPts val="0"/>
               </a:spcAft>
-              <a:defRPr sz="1000" b="0">
+              <a:defRPr sz="900" b="0">
                 <a:solidFill>
                   <a:srgbClr val="5C6672"/>
                 </a:solidFill>
@@ -15622,7 +15622,7 @@
               </a:defRPr>
             </a:pPr>
             <a:r>
-              <a:t>ROS 2 Jazzy · Gazebo Harmonic · M05 · 따라 하기형 AGV 실습</a:t>
+              <a:t>ROS 2 기반 AGV End-to-End 개발 커리큘럼 · M05 · Block B</a:t>
             </a:r>
           </a:p>
         </p:txBody>
@@ -16254,7 +16254,7 @@
               <a:spcAft>
                 <a:spcPts val="0"/>
               </a:spcAft>
-              <a:defRPr sz="1000" b="0">
+              <a:defRPr sz="900" b="0">
                 <a:solidFill>
                   <a:srgbClr val="5C6672"/>
                 </a:solidFill>
@@ -16262,7 +16262,7 @@
               </a:defRPr>
             </a:pPr>
             <a:r>
-              <a:t>ROS 2 Jazzy · Gazebo Harmonic · M05 · 따라 하기형 AGV 실습</a:t>
+              <a:t>ROS 2 기반 AGV End-to-End 개발 커리큘럼 · M05 · Block B</a:t>
             </a:r>
           </a:p>
         </p:txBody>
@@ -16491,7 +16491,7 @@
               <a:spcAft>
                 <a:spcPts val="0"/>
               </a:spcAft>
-              <a:defRPr sz="1000" b="0">
+              <a:defRPr sz="900" b="0">
                 <a:solidFill>
                   <a:srgbClr val="5C6672"/>
                 </a:solidFill>
@@ -16499,7 +16499,7 @@
               </a:defRPr>
             </a:pPr>
             <a:r>
-              <a:t>ROS 2 Jazzy · Gazebo Harmonic · M05 · 따라 하기형 AGV 실습</a:t>
+              <a:t>ROS 2 기반 AGV End-to-End 개발 커리큘럼 · M05 · Block B</a:t>
             </a:r>
           </a:p>
         </p:txBody>
@@ -16960,7 +16960,7 @@
               <a:spcAft>
                 <a:spcPts val="0"/>
               </a:spcAft>
-              <a:defRPr sz="1000" b="0">
+              <a:defRPr sz="900" b="0">
                 <a:solidFill>
                   <a:srgbClr val="5C6672"/>
                 </a:solidFill>
@@ -16968,7 +16968,7 @@
               </a:defRPr>
             </a:pPr>
             <a:r>
-              <a:t>ROS 2 Jazzy · Gazebo Harmonic · M05 · 따라 하기형 AGV 실습</a:t>
+              <a:t>ROS 2 기반 AGV End-to-End 개발 커리큘럼 · M05 · Block B</a:t>
             </a:r>
           </a:p>
         </p:txBody>
@@ -17235,7 +17235,7 @@
               <a:spcAft>
                 <a:spcPts val="0"/>
               </a:spcAft>
-              <a:defRPr sz="1000" b="0">
+              <a:defRPr sz="900" b="0">
                 <a:solidFill>
                   <a:srgbClr val="5C6672"/>
                 </a:solidFill>
@@ -17243,7 +17243,7 @@
               </a:defRPr>
             </a:pPr>
             <a:r>
-              <a:t>ROS 2 Jazzy · Gazebo Harmonic · M05 · 따라 하기형 AGV 실습</a:t>
+              <a:t>ROS 2 기반 AGV End-to-End 개발 커리큘럼 · M05 · Block B</a:t>
             </a:r>
           </a:p>
         </p:txBody>
